--- a/docs/reference-style.pptx
+++ b/docs/reference-style.pptx
@@ -10,7 +10,7 @@
   <p:sldIdLst>
     <p:sldId xmlns:r="http://schemas.openxmlformats.org/officeDocument/2006/relationships" id="256" r:id="Rc4578536c6514910"/>
   </p:sldIdLst>
-  <p:sldSz cx="5791200" cy="5791200" type="custom"/>
+  <p:sldSz cx="5791200" cy="5153743" type="custom"/>
   <p:notesSz cx="6858000" cy="9144000"/>
 </p:presentation>
 </file>
@@ -1067,9 +1067,9 @@
         <p:grpSpPr>
           <a:xfrm>
             <a:off x="1154435" y="9325"/>
-            <a:ext cx="3482329" cy="4141460"/>
+            <a:ext cx="3482329" cy="3684122"/>
             <a:chOff x="4354835" y="590350"/>
-            <a:chExt cx="3482329" cy="4141460"/>
+            <a:chExt cx="3482329" cy="3684122"/>
           </a:xfrm>
         </p:grpSpPr>
         <p:sp>
@@ -1081,7 +1081,7 @@
           <p:spPr>
             <a:xfrm>
               <a:off x="4354835" y="590350"/>
-              <a:ext cx="3482329" cy="4141460"/>
+              <a:ext cx="3482329" cy="3684122"/>
             </a:xfrm>
             <a:custGeom>
               <a:avLst/>
@@ -1090,7 +1090,7 @@
               <a:cxnLst/>
               <a:rect l="0" t="0" r="r" b="b"/>
               <a:pathLst>
-                <a:path w="3482329" h="4141460" fill="norm">
+                <a:path w="3482329" h="3684122" fill="norm">
                   <a:moveTo>
                     <a:pt x="0" y="0"/>
                   </a:moveTo>
@@ -1098,10 +1098,10 @@
                     <a:pt x="3482329" y="0"/>
                   </a:lnTo>
                   <a:lnTo>
-                    <a:pt x="3482329" y="4141460"/>
+                    <a:pt x="3482329" y="3684122"/>
                   </a:lnTo>
                   <a:lnTo>
-                    <a:pt x="0" y="4141460"/>
+                    <a:pt x="0" y="3684122"/>
                   </a:lnTo>
                   <a:close/>
                 </a:path>
@@ -1121,28 +1121,28 @@
       </p:grpSp>
       <p:grpSp>
         <p:nvGrpSpPr>
-          <p:cNvPr id="4" name="Floor"/>
+          <p:cNvPr id="4" name="left wall"/>
           <p:cNvGrpSpPr/>
           <p:nvPr/>
         </p:nvGrpSpPr>
         <p:grpSpPr>
           <a:xfrm>
-            <a:off x="142113" y="4151204"/>
-            <a:ext cx="5506974" cy="1496075"/>
-            <a:chOff x="3342513" y="4732229"/>
-            <a:chExt cx="5506974" cy="1496075"/>
+            <a:off x="142113" y="9325"/>
+            <a:ext cx="1012322" cy="5015360"/>
+            <a:chOff x="3342513" y="590350"/>
+            <a:chExt cx="1012322" cy="5015360"/>
           </a:xfrm>
         </p:grpSpPr>
         <p:sp>
           <p:nvSpPr>
-            <p:cNvPr id="5" name="Floor 1"/>
+            <p:cNvPr id="5" name="left wall 1"/>
             <p:cNvSpPr/>
             <p:nvPr/>
           </p:nvSpPr>
           <p:spPr>
             <a:xfrm>
-              <a:off x="3361163" y="4742712"/>
-              <a:ext cx="5469674" cy="1475109"/>
+              <a:off x="3342513" y="590350"/>
+              <a:ext cx="1012322" cy="5015360"/>
             </a:xfrm>
             <a:custGeom>
               <a:avLst/>
@@ -1151,9 +1151,495 @@
               <a:cxnLst/>
               <a:rect l="0" t="0" r="r" b="b"/>
               <a:pathLst>
-                <a:path w="5469674" h="1475109" fill="norm">
+                <a:path w="1012322" h="5015360" fill="norm">
                   <a:moveTo>
-                    <a:pt x="0" y="1475109"/>
+                    <a:pt x="0" y="661329"/>
+                  </a:moveTo>
+                  <a:lnTo>
+                    <a:pt x="0" y="5015360"/>
+                  </a:lnTo>
+                  <a:lnTo>
+                    <a:pt x="1012322" y="3775134"/>
+                  </a:lnTo>
+                  <a:lnTo>
+                    <a:pt x="1012322" y="0"/>
+                  </a:lnTo>
+                  <a:lnTo>
+                    <a:pt x="0" y="661329"/>
+                  </a:lnTo>
+                  <a:close/>
+                </a:path>
+              </a:pathLst>
+            </a:custGeom>
+            <a:solidFill>
+              <a:srgbClr val="D5D3D1"/>
+            </a:solidFill>
+            <a:ln w="0" cap="rnd">
+              <a:noFill/>
+              <a:round/>
+            </a:ln>
+          </p:spPr>
+        </p:sp>
+        <p:sp>
+          <p:nvSpPr>
+            <p:cNvPr id="6" name="left wall 2"/>
+            <p:cNvSpPr/>
+            <p:nvPr/>
+          </p:nvSpPr>
+          <p:spPr>
+            <a:xfrm>
+              <a:off x="3342513" y="590350"/>
+              <a:ext cx="1012322" cy="5015360"/>
+            </a:xfrm>
+            <a:custGeom>
+              <a:avLst/>
+              <a:gdLst/>
+              <a:ahLst/>
+              <a:cxnLst/>
+              <a:rect l="0" t="0" r="r" b="b"/>
+              <a:pathLst>
+                <a:path w="1012322" h="5015360" fill="none">
+                  <a:moveTo>
+                    <a:pt x="0" y="661329"/>
+                  </a:moveTo>
+                  <a:lnTo>
+                    <a:pt x="0" y="5015360"/>
+                  </a:lnTo>
+                  <a:lnTo>
+                    <a:pt x="1012322" y="3775134"/>
+                  </a:lnTo>
+                  <a:lnTo>
+                    <a:pt x="1012322" y="0"/>
+                  </a:lnTo>
+                  <a:lnTo>
+                    <a:pt x="0" y="661329"/>
+                  </a:lnTo>
+                  <a:close/>
+                </a:path>
+              </a:pathLst>
+            </a:custGeom>
+            <a:noFill/>
+            <a:ln w="18650" cap="rnd">
+              <a:solidFill>
+                <a:srgbClr val="040000"/>
+              </a:solidFill>
+              <a:round/>
+            </a:ln>
+          </p:spPr>
+        </p:sp>
+      </p:grpSp>
+      <p:grpSp>
+        <p:nvGrpSpPr>
+          <p:cNvPr id="7" name="right wall"/>
+          <p:cNvGrpSpPr/>
+          <p:nvPr/>
+        </p:nvGrpSpPr>
+        <p:grpSpPr>
+          <a:xfrm>
+            <a:off x="4636765" y="9325"/>
+            <a:ext cx="1012322" cy="5015360"/>
+            <a:chOff x="7837165" y="590350"/>
+            <a:chExt cx="1012322" cy="5015360"/>
+          </a:xfrm>
+        </p:grpSpPr>
+        <p:sp>
+          <p:nvSpPr>
+            <p:cNvPr id="8" name="right wall 3"/>
+            <p:cNvSpPr/>
+            <p:nvPr/>
+          </p:nvSpPr>
+          <p:spPr>
+            <a:xfrm>
+              <a:off x="7846490" y="607881"/>
+              <a:ext cx="993672" cy="4971719"/>
+            </a:xfrm>
+            <a:custGeom>
+              <a:avLst/>
+              <a:gdLst/>
+              <a:ahLst/>
+              <a:cxnLst/>
+              <a:rect l="0" t="0" r="r" b="b"/>
+              <a:pathLst>
+                <a:path w="993672" h="4971719" fill="norm">
+                  <a:moveTo>
+                    <a:pt x="0" y="3754246"/>
+                  </a:moveTo>
+                  <a:lnTo>
+                    <a:pt x="0" y="0"/>
+                  </a:lnTo>
+                  <a:lnTo>
+                    <a:pt x="993672" y="649020"/>
+                  </a:lnTo>
+                  <a:lnTo>
+                    <a:pt x="993672" y="4971719"/>
+                  </a:lnTo>
+                  <a:lnTo>
+                    <a:pt x="0" y="3754246"/>
+                  </a:lnTo>
+                  <a:close/>
+                </a:path>
+              </a:pathLst>
+            </a:custGeom>
+            <a:solidFill>
+              <a:srgbClr val="D5D3D1"/>
+            </a:solidFill>
+            <a:ln w="0" cap="rnd">
+              <a:noFill/>
+              <a:round/>
+            </a:ln>
+          </p:spPr>
+        </p:sp>
+        <p:sp>
+          <p:nvSpPr>
+            <p:cNvPr id="9" name="right wall 4"/>
+            <p:cNvSpPr/>
+            <p:nvPr/>
+          </p:nvSpPr>
+          <p:spPr>
+            <a:xfrm>
+              <a:off x="7837165" y="590350"/>
+              <a:ext cx="1012322" cy="5015360"/>
+            </a:xfrm>
+            <a:custGeom>
+              <a:avLst/>
+              <a:gdLst/>
+              <a:ahLst/>
+              <a:cxnLst/>
+              <a:rect l="0" t="0" r="r" b="b"/>
+              <a:pathLst>
+                <a:path w="1012322" h="5015360" fill="norm">
+                  <a:moveTo>
+                    <a:pt x="18650" y="34689"/>
+                  </a:moveTo>
+                  <a:lnTo>
+                    <a:pt x="993672" y="671400"/>
+                  </a:lnTo>
+                  <a:lnTo>
+                    <a:pt x="993672" y="4963140"/>
+                  </a:lnTo>
+                  <a:lnTo>
+                    <a:pt x="18650" y="3768420"/>
+                  </a:lnTo>
+                  <a:lnTo>
+                    <a:pt x="18650" y="34689"/>
+                  </a:lnTo>
+                  <a:moveTo>
+                    <a:pt x="0" y="0"/>
+                  </a:moveTo>
+                  <a:lnTo>
+                    <a:pt x="0" y="3774761"/>
+                  </a:lnTo>
+                  <a:lnTo>
+                    <a:pt x="1012322" y="5015360"/>
+                  </a:lnTo>
+                  <a:lnTo>
+                    <a:pt x="1012322" y="661329"/>
+                  </a:lnTo>
+                  <a:lnTo>
+                    <a:pt x="0" y="0"/>
+                  </a:lnTo>
+                  <a:lnTo>
+                    <a:pt x="0" y="0"/>
+                  </a:lnTo>
+                  <a:close/>
+                </a:path>
+              </a:pathLst>
+            </a:custGeom>
+            <a:solidFill>
+              <a:srgbClr val="D4D3D0"/>
+            </a:solidFill>
+            <a:ln w="0" cap="rnd">
+              <a:noFill/>
+              <a:round/>
+            </a:ln>
+          </p:spPr>
+        </p:sp>
+        <p:sp>
+          <p:nvSpPr>
+            <p:cNvPr id="10" name="right wall 5"/>
+            <p:cNvSpPr/>
+            <p:nvPr/>
+          </p:nvSpPr>
+          <p:spPr>
+            <a:xfrm>
+              <a:off x="7837165" y="590350"/>
+              <a:ext cx="1012322" cy="5015360"/>
+            </a:xfrm>
+            <a:custGeom>
+              <a:avLst/>
+              <a:gdLst/>
+              <a:ahLst/>
+              <a:cxnLst/>
+              <a:rect l="0" t="0" r="r" b="b"/>
+              <a:pathLst>
+                <a:path w="1012322" h="5015360" fill="none">
+                  <a:moveTo>
+                    <a:pt x="1012322" y="661329"/>
+                  </a:moveTo>
+                  <a:lnTo>
+                    <a:pt x="1012322" y="5015360"/>
+                  </a:lnTo>
+                  <a:lnTo>
+                    <a:pt x="0" y="3775134"/>
+                  </a:lnTo>
+                  <a:lnTo>
+                    <a:pt x="0" y="0"/>
+                  </a:lnTo>
+                  <a:lnTo>
+                    <a:pt x="1012322" y="661329"/>
+                  </a:lnTo>
+                  <a:close/>
+                </a:path>
+              </a:pathLst>
+            </a:custGeom>
+            <a:noFill/>
+            <a:ln w="18650" cap="rnd">
+              <a:solidFill>
+                <a:srgbClr val="040000"/>
+              </a:solidFill>
+              <a:round/>
+            </a:ln>
+          </p:spPr>
+        </p:sp>
+      </p:grpSp>
+      <p:grpSp>
+        <p:nvGrpSpPr>
+          <p:cNvPr id="11" name="Box frame"/>
+          <p:cNvGrpSpPr/>
+          <p:nvPr/>
+        </p:nvGrpSpPr>
+        <p:grpSpPr>
+          <a:xfrm>
+            <a:off x="9325" y="9325"/>
+            <a:ext cx="5772550" cy="661329"/>
+            <a:chOff x="3209725" y="590350"/>
+            <a:chExt cx="5772550" cy="661329"/>
+          </a:xfrm>
+        </p:grpSpPr>
+        <p:sp>
+          <p:nvSpPr>
+            <p:cNvPr id="12" name="Box frame 6"/>
+            <p:cNvSpPr/>
+            <p:nvPr/>
+          </p:nvSpPr>
+          <p:spPr>
+            <a:xfrm>
+              <a:off x="3209725" y="590350"/>
+              <a:ext cx="1142126" cy="661329"/>
+            </a:xfrm>
+            <a:custGeom>
+              <a:avLst/>
+              <a:gdLst/>
+              <a:ahLst/>
+              <a:cxnLst/>
+              <a:rect l="0" t="0" r="r" b="b"/>
+              <a:pathLst>
+                <a:path w="1142126" h="661329" fill="norm">
+                  <a:moveTo>
+                    <a:pt x="0" y="661329"/>
+                  </a:moveTo>
+                  <a:lnTo>
+                    <a:pt x="1007846" y="0"/>
+                  </a:lnTo>
+                  <a:lnTo>
+                    <a:pt x="1142126" y="0"/>
+                  </a:lnTo>
+                  <a:lnTo>
+                    <a:pt x="132788" y="661329"/>
+                  </a:lnTo>
+                  <a:lnTo>
+                    <a:pt x="0" y="661329"/>
+                  </a:lnTo>
+                  <a:close/>
+                </a:path>
+              </a:pathLst>
+            </a:custGeom>
+            <a:solidFill>
+              <a:srgbClr val="EFEEEB"/>
+            </a:solidFill>
+            <a:ln w="0" cap="rnd">
+              <a:noFill/>
+              <a:round/>
+            </a:ln>
+          </p:spPr>
+        </p:sp>
+        <p:sp>
+          <p:nvSpPr>
+            <p:cNvPr id="13" name="Box frame 7"/>
+            <p:cNvSpPr/>
+            <p:nvPr/>
+          </p:nvSpPr>
+          <p:spPr>
+            <a:xfrm>
+              <a:off x="3209725" y="590350"/>
+              <a:ext cx="1142126" cy="661329"/>
+            </a:xfrm>
+            <a:custGeom>
+              <a:avLst/>
+              <a:gdLst/>
+              <a:ahLst/>
+              <a:cxnLst/>
+              <a:rect l="0" t="0" r="r" b="b"/>
+              <a:pathLst>
+                <a:path w="1142126" h="661329" fill="none">
+                  <a:moveTo>
+                    <a:pt x="0" y="661329"/>
+                  </a:moveTo>
+                  <a:lnTo>
+                    <a:pt x="1007846" y="0"/>
+                  </a:lnTo>
+                  <a:lnTo>
+                    <a:pt x="1142126" y="0"/>
+                  </a:lnTo>
+                  <a:lnTo>
+                    <a:pt x="132788" y="661329"/>
+                  </a:lnTo>
+                  <a:lnTo>
+                    <a:pt x="0" y="661329"/>
+                  </a:lnTo>
+                  <a:close/>
+                </a:path>
+              </a:pathLst>
+            </a:custGeom>
+            <a:noFill/>
+            <a:ln w="9325" cap="rnd">
+              <a:solidFill>
+                <a:srgbClr val="4D4D4D"/>
+              </a:solidFill>
+              <a:round/>
+            </a:ln>
+          </p:spPr>
+        </p:sp>
+        <p:sp>
+          <p:nvSpPr>
+            <p:cNvPr id="14" name="Box frame 8"/>
+            <p:cNvSpPr/>
+            <p:nvPr/>
+          </p:nvSpPr>
+          <p:spPr>
+            <a:xfrm>
+              <a:off x="7840149" y="590350"/>
+              <a:ext cx="1142126" cy="661329"/>
+            </a:xfrm>
+            <a:custGeom>
+              <a:avLst/>
+              <a:gdLst/>
+              <a:ahLst/>
+              <a:cxnLst/>
+              <a:rect l="0" t="0" r="r" b="b"/>
+              <a:pathLst>
+                <a:path w="1142126" h="661329" fill="norm">
+                  <a:moveTo>
+                    <a:pt x="1142126" y="661329"/>
+                  </a:moveTo>
+                  <a:lnTo>
+                    <a:pt x="134280" y="0"/>
+                  </a:lnTo>
+                  <a:lnTo>
+                    <a:pt x="0" y="0"/>
+                  </a:lnTo>
+                  <a:lnTo>
+                    <a:pt x="1009338" y="661329"/>
+                  </a:lnTo>
+                  <a:lnTo>
+                    <a:pt x="1142126" y="661329"/>
+                  </a:lnTo>
+                  <a:close/>
+                </a:path>
+              </a:pathLst>
+            </a:custGeom>
+            <a:solidFill>
+              <a:srgbClr val="EFEEEB"/>
+            </a:solidFill>
+            <a:ln w="0" cap="rnd">
+              <a:noFill/>
+              <a:round/>
+            </a:ln>
+          </p:spPr>
+        </p:sp>
+        <p:sp>
+          <p:nvSpPr>
+            <p:cNvPr id="15" name="Box frame 9"/>
+            <p:cNvSpPr/>
+            <p:nvPr/>
+          </p:nvSpPr>
+          <p:spPr>
+            <a:xfrm>
+              <a:off x="7840149" y="590350"/>
+              <a:ext cx="1142126" cy="661329"/>
+            </a:xfrm>
+            <a:custGeom>
+              <a:avLst/>
+              <a:gdLst/>
+              <a:ahLst/>
+              <a:cxnLst/>
+              <a:rect l="0" t="0" r="r" b="b"/>
+              <a:pathLst>
+                <a:path w="1142126" h="661329" fill="none">
+                  <a:moveTo>
+                    <a:pt x="1142126" y="661329"/>
+                  </a:moveTo>
+                  <a:lnTo>
+                    <a:pt x="134280" y="0"/>
+                  </a:lnTo>
+                  <a:lnTo>
+                    <a:pt x="0" y="0"/>
+                  </a:lnTo>
+                  <a:lnTo>
+                    <a:pt x="1009338" y="661329"/>
+                  </a:lnTo>
+                  <a:lnTo>
+                    <a:pt x="1142126" y="661329"/>
+                  </a:lnTo>
+                  <a:close/>
+                </a:path>
+              </a:pathLst>
+            </a:custGeom>
+            <a:noFill/>
+            <a:ln w="9325" cap="rnd">
+              <a:solidFill>
+                <a:srgbClr val="4D4D4D"/>
+              </a:solidFill>
+              <a:round/>
+            </a:ln>
+          </p:spPr>
+        </p:sp>
+      </p:grpSp>
+      <p:grpSp>
+        <p:nvGrpSpPr>
+          <p:cNvPr id="16" name="Floor"/>
+          <p:cNvGrpSpPr/>
+          <p:nvPr/>
+        </p:nvGrpSpPr>
+        <p:grpSpPr>
+          <a:xfrm>
+            <a:off x="142113" y="3693820"/>
+            <a:ext cx="5506974" cy="1330864"/>
+            <a:chOff x="3342513" y="4274845"/>
+            <a:chExt cx="5506974" cy="1330864"/>
+          </a:xfrm>
+        </p:grpSpPr>
+        <p:sp>
+          <p:nvSpPr>
+            <p:cNvPr id="17" name="Floor 10"/>
+            <p:cNvSpPr/>
+            <p:nvPr/>
+          </p:nvSpPr>
+          <p:spPr>
+            <a:xfrm>
+              <a:off x="3361163" y="4284170"/>
+              <a:ext cx="5469674" cy="1312214"/>
+            </a:xfrm>
+            <a:custGeom>
+              <a:avLst/>
+              <a:gdLst/>
+              <a:ahLst/>
+              <a:cxnLst/>
+              <a:rect l="0" t="0" r="r" b="b"/>
+              <a:pathLst>
+                <a:path w="5469674" h="1312214" fill="norm">
+                  <a:moveTo>
+                    <a:pt x="0" y="1312214"/>
                   </a:moveTo>
                   <a:lnTo>
                     <a:pt x="998148" y="0"/>
@@ -1162,10 +1648,10 @@
                     <a:pt x="4471526" y="0"/>
                   </a:lnTo>
                   <a:lnTo>
-                    <a:pt x="5469674" y="1475109"/>
+                    <a:pt x="5469674" y="1312214"/>
                   </a:lnTo>
                   <a:lnTo>
-                    <a:pt x="0" y="1475109"/>
+                    <a:pt x="0" y="1312214"/>
                   </a:lnTo>
                   <a:close/>
                 </a:path>
@@ -1182,14 +1668,14 @@
         </p:sp>
         <p:sp>
           <p:nvSpPr>
-            <p:cNvPr id="6" name="Floor 2"/>
+            <p:cNvPr id="18" name="Floor 11"/>
             <p:cNvSpPr/>
             <p:nvPr/>
           </p:nvSpPr>
           <p:spPr>
             <a:xfrm>
-              <a:off x="3342513" y="4732229"/>
-              <a:ext cx="5506974" cy="1496075"/>
+              <a:off x="3342513" y="4274845"/>
+              <a:ext cx="5506974" cy="1330864"/>
             </a:xfrm>
             <a:custGeom>
               <a:avLst/>
@@ -1198,21 +1684,21 @@
               <a:cxnLst/>
               <a:rect l="0" t="0" r="r" b="b"/>
               <a:pathLst>
-                <a:path w="5506974" h="1496075" fill="norm">
+                <a:path w="5506974" h="1330864" fill="norm">
                   <a:moveTo>
-                    <a:pt x="4485700" y="20965"/>
+                    <a:pt x="4485700" y="18650"/>
                   </a:moveTo>
                   <a:lnTo>
-                    <a:pt x="5469674" y="1475109"/>
+                    <a:pt x="5469674" y="1312214"/>
                   </a:lnTo>
                   <a:lnTo>
-                    <a:pt x="38046" y="1475109"/>
+                    <a:pt x="38046" y="1312214"/>
                   </a:lnTo>
                   <a:lnTo>
-                    <a:pt x="1022020" y="20965"/>
+                    <a:pt x="1022020" y="18650"/>
                   </a:lnTo>
                   <a:lnTo>
-                    <a:pt x="4486073" y="20965"/>
+                    <a:pt x="4486073" y="18650"/>
                   </a:lnTo>
                   <a:moveTo>
                     <a:pt x="4494652" y="0"/>
@@ -1221,10 +1707,10 @@
                     <a:pt x="1012322" y="0"/>
                   </a:lnTo>
                   <a:lnTo>
-                    <a:pt x="0" y="1496075"/>
+                    <a:pt x="0" y="1330864"/>
                   </a:lnTo>
                   <a:lnTo>
-                    <a:pt x="5506974" y="1496075"/>
+                    <a:pt x="5506974" y="1330864"/>
                   </a:lnTo>
                   <a:lnTo>
                     <a:pt x="4494652" y="0"/>
@@ -1247,14 +1733,14 @@
         </p:sp>
         <p:sp>
           <p:nvSpPr>
-            <p:cNvPr id="7" name="Floor 3"/>
+            <p:cNvPr id="19" name="Floor 12"/>
             <p:cNvSpPr/>
             <p:nvPr/>
           </p:nvSpPr>
           <p:spPr>
             <a:xfrm>
-              <a:off x="3342513" y="4732229"/>
-              <a:ext cx="5506974" cy="1496075"/>
+              <a:off x="3342513" y="4274845"/>
+              <a:ext cx="5506974" cy="1330864"/>
             </a:xfrm>
             <a:custGeom>
               <a:avLst/>
@@ -1263,12 +1749,12 @@
               <a:cxnLst/>
               <a:rect l="0" t="0" r="r" b="b"/>
               <a:pathLst>
-                <a:path w="5506974" h="1496075" fill="none">
+                <a:path w="5506974" h="1330864" fill="none">
                   <a:moveTo>
-                    <a:pt x="5506974" y="1496075"/>
+                    <a:pt x="5506974" y="1330864"/>
                   </a:moveTo>
                   <a:lnTo>
-                    <a:pt x="0" y="1496075"/>
+                    <a:pt x="0" y="1330864"/>
                   </a:lnTo>
                   <a:lnTo>
                     <a:pt x="1012322" y="0"/>
@@ -1277,7 +1763,7 @@
                     <a:pt x="4494652" y="0"/>
                   </a:lnTo>
                   <a:lnTo>
-                    <a:pt x="5506974" y="1496075"/>
+                    <a:pt x="5506974" y="1330864"/>
                   </a:lnTo>
                   <a:close/>
                 </a:path>
@@ -1295,28 +1781,28 @@
       </p:grpSp>
       <p:grpSp>
         <p:nvGrpSpPr>
-          <p:cNvPr id="8" name="left wall"/>
+          <p:cNvPr id="20" name="Box glass ceiling"/>
           <p:cNvGrpSpPr/>
           <p:nvPr/>
         </p:nvGrpSpPr>
         <p:grpSpPr>
           <a:xfrm>
-            <a:off x="142113" y="9325"/>
-            <a:ext cx="1012322" cy="5637954"/>
-            <a:chOff x="3342513" y="590350"/>
-            <a:chExt cx="1012322" cy="5637954"/>
+            <a:off x="9325" y="9325"/>
+            <a:ext cx="5772923" cy="661329"/>
+            <a:chOff x="3209725" y="590350"/>
+            <a:chExt cx="5772923" cy="661329"/>
           </a:xfrm>
         </p:grpSpPr>
         <p:sp>
           <p:nvSpPr>
-            <p:cNvPr id="9" name="left wall 4"/>
+            <p:cNvPr id="21" name="Box glass ceiling 13"/>
             <p:cNvSpPr/>
             <p:nvPr/>
           </p:nvSpPr>
           <p:spPr>
             <a:xfrm>
-              <a:off x="3342513" y="590350"/>
-              <a:ext cx="1012322" cy="5637954"/>
+              <a:off x="3209725" y="590350"/>
+              <a:ext cx="5772550" cy="661329"/>
             </a:xfrm>
             <a:custGeom>
               <a:avLst/>
@@ -1325,298 +1811,15 @@
               <a:cxnLst/>
               <a:rect l="0" t="0" r="r" b="b"/>
               <a:pathLst>
-                <a:path w="1012322" h="5637954" fill="norm">
-                  <a:moveTo>
-                    <a:pt x="0" y="743425"/>
-                  </a:moveTo>
-                  <a:lnTo>
-                    <a:pt x="0" y="5637954"/>
-                  </a:lnTo>
-                  <a:lnTo>
-                    <a:pt x="1012322" y="4243770"/>
-                  </a:lnTo>
-                  <a:lnTo>
-                    <a:pt x="1012322" y="0"/>
-                  </a:lnTo>
-                  <a:lnTo>
-                    <a:pt x="0" y="743425"/>
-                  </a:lnTo>
-                  <a:close/>
-                </a:path>
-              </a:pathLst>
-            </a:custGeom>
-            <a:solidFill>
-              <a:srgbClr val="D5D3D1"/>
-            </a:solidFill>
-            <a:ln w="0" cap="rnd">
-              <a:noFill/>
-              <a:round/>
-            </a:ln>
-          </p:spPr>
-        </p:sp>
-        <p:sp>
-          <p:nvSpPr>
-            <p:cNvPr id="10" name="left wall 5"/>
-            <p:cNvSpPr/>
-            <p:nvPr/>
-          </p:nvSpPr>
-          <p:spPr>
-            <a:xfrm>
-              <a:off x="3342513" y="590350"/>
-              <a:ext cx="1012322" cy="5637954"/>
-            </a:xfrm>
-            <a:custGeom>
-              <a:avLst/>
-              <a:gdLst/>
-              <a:ahLst/>
-              <a:cxnLst/>
-              <a:rect l="0" t="0" r="r" b="b"/>
-              <a:pathLst>
-                <a:path w="1012322" h="5637954" fill="none">
-                  <a:moveTo>
-                    <a:pt x="0" y="743425"/>
-                  </a:moveTo>
-                  <a:lnTo>
-                    <a:pt x="0" y="5637954"/>
-                  </a:lnTo>
-                  <a:lnTo>
-                    <a:pt x="1012322" y="4243770"/>
-                  </a:lnTo>
-                  <a:lnTo>
-                    <a:pt x="1012322" y="0"/>
-                  </a:lnTo>
-                  <a:lnTo>
-                    <a:pt x="0" y="743425"/>
-                  </a:lnTo>
-                  <a:close/>
-                </a:path>
-              </a:pathLst>
-            </a:custGeom>
-            <a:noFill/>
-            <a:ln w="18650" cap="rnd">
-              <a:solidFill>
-                <a:srgbClr val="040000"/>
-              </a:solidFill>
-              <a:round/>
-            </a:ln>
-          </p:spPr>
-        </p:sp>
-      </p:grpSp>
-      <p:grpSp>
-        <p:nvGrpSpPr>
-          <p:cNvPr id="11" name="right wall"/>
-          <p:cNvGrpSpPr/>
-          <p:nvPr/>
-        </p:nvGrpSpPr>
-        <p:grpSpPr>
-          <a:xfrm>
-            <a:off x="4636765" y="9325"/>
-            <a:ext cx="1012322" cy="5637954"/>
-            <a:chOff x="7837165" y="590350"/>
-            <a:chExt cx="1012322" cy="5637954"/>
-          </a:xfrm>
-        </p:grpSpPr>
-        <p:sp>
-          <p:nvSpPr>
-            <p:cNvPr id="12" name="right wall 6"/>
-            <p:cNvSpPr/>
-            <p:nvPr/>
-          </p:nvSpPr>
-          <p:spPr>
-            <a:xfrm>
-              <a:off x="7846490" y="610057"/>
-              <a:ext cx="993672" cy="5588895"/>
-            </a:xfrm>
-            <a:custGeom>
-              <a:avLst/>
-              <a:gdLst/>
-              <a:ahLst/>
-              <a:cxnLst/>
-              <a:rect l="0" t="0" r="r" b="b"/>
-              <a:pathLst>
-                <a:path w="993672" h="5588895" fill="norm">
-                  <a:moveTo>
-                    <a:pt x="0" y="4220289"/>
-                  </a:moveTo>
-                  <a:lnTo>
-                    <a:pt x="0" y="0"/>
-                  </a:lnTo>
-                  <a:lnTo>
-                    <a:pt x="993672" y="729588"/>
-                  </a:lnTo>
-                  <a:lnTo>
-                    <a:pt x="993672" y="5588895"/>
-                  </a:lnTo>
-                  <a:lnTo>
-                    <a:pt x="0" y="4220289"/>
-                  </a:lnTo>
-                  <a:close/>
-                </a:path>
-              </a:pathLst>
-            </a:custGeom>
-            <a:solidFill>
-              <a:srgbClr val="D5D3D1"/>
-            </a:solidFill>
-            <a:ln w="0" cap="rnd">
-              <a:noFill/>
-              <a:round/>
-            </a:ln>
-          </p:spPr>
-        </p:sp>
-        <p:sp>
-          <p:nvSpPr>
-            <p:cNvPr id="13" name="right wall 7"/>
-            <p:cNvSpPr/>
-            <p:nvPr/>
-          </p:nvSpPr>
-          <p:spPr>
-            <a:xfrm>
-              <a:off x="7837165" y="590350"/>
-              <a:ext cx="1012322" cy="5637954"/>
-            </a:xfrm>
-            <a:custGeom>
-              <a:avLst/>
-              <a:gdLst/>
-              <a:ahLst/>
-              <a:cxnLst/>
-              <a:rect l="0" t="0" r="r" b="b"/>
-              <a:pathLst>
-                <a:path w="1012322" h="5637954" fill="norm">
-                  <a:moveTo>
-                    <a:pt x="18650" y="38995"/>
-                  </a:moveTo>
-                  <a:lnTo>
-                    <a:pt x="993672" y="754746"/>
-                  </a:lnTo>
-                  <a:lnTo>
-                    <a:pt x="993672" y="5579251"/>
-                  </a:lnTo>
-                  <a:lnTo>
-                    <a:pt x="18650" y="4236222"/>
-                  </a:lnTo>
-                  <a:lnTo>
-                    <a:pt x="18650" y="38995"/>
-                  </a:lnTo>
-                  <a:moveTo>
-                    <a:pt x="0" y="0"/>
-                  </a:moveTo>
-                  <a:lnTo>
-                    <a:pt x="0" y="4243350"/>
-                  </a:lnTo>
-                  <a:lnTo>
-                    <a:pt x="1012322" y="5637954"/>
-                  </a:lnTo>
-                  <a:lnTo>
-                    <a:pt x="1012322" y="743425"/>
-                  </a:lnTo>
-                  <a:lnTo>
-                    <a:pt x="0" y="0"/>
-                  </a:lnTo>
-                  <a:lnTo>
-                    <a:pt x="0" y="0"/>
-                  </a:lnTo>
-                  <a:close/>
-                </a:path>
-              </a:pathLst>
-            </a:custGeom>
-            <a:solidFill>
-              <a:srgbClr val="D4D3D0"/>
-            </a:solidFill>
-            <a:ln w="0" cap="rnd">
-              <a:noFill/>
-              <a:round/>
-            </a:ln>
-          </p:spPr>
-        </p:sp>
-        <p:sp>
-          <p:nvSpPr>
-            <p:cNvPr id="14" name="right wall 8"/>
-            <p:cNvSpPr/>
-            <p:nvPr/>
-          </p:nvSpPr>
-          <p:spPr>
-            <a:xfrm>
-              <a:off x="7837165" y="590350"/>
-              <a:ext cx="1012322" cy="5637954"/>
-            </a:xfrm>
-            <a:custGeom>
-              <a:avLst/>
-              <a:gdLst/>
-              <a:ahLst/>
-              <a:cxnLst/>
-              <a:rect l="0" t="0" r="r" b="b"/>
-              <a:pathLst>
-                <a:path w="1012322" h="5637954" fill="none">
-                  <a:moveTo>
-                    <a:pt x="1012322" y="743425"/>
-                  </a:moveTo>
-                  <a:lnTo>
-                    <a:pt x="1012322" y="5637954"/>
-                  </a:lnTo>
-                  <a:lnTo>
-                    <a:pt x="0" y="4243770"/>
-                  </a:lnTo>
-                  <a:lnTo>
-                    <a:pt x="0" y="0"/>
-                  </a:lnTo>
-                  <a:lnTo>
-                    <a:pt x="1012322" y="743425"/>
-                  </a:lnTo>
-                  <a:close/>
-                </a:path>
-              </a:pathLst>
-            </a:custGeom>
-            <a:noFill/>
-            <a:ln w="18650" cap="rnd">
-              <a:solidFill>
-                <a:srgbClr val="040000"/>
-              </a:solidFill>
-              <a:round/>
-            </a:ln>
-          </p:spPr>
-        </p:sp>
-      </p:grpSp>
-      <p:grpSp>
-        <p:nvGrpSpPr>
-          <p:cNvPr id="15" name="Box glass ceiling"/>
-          <p:cNvGrpSpPr/>
-          <p:nvPr/>
-        </p:nvGrpSpPr>
-        <p:grpSpPr>
-          <a:xfrm>
-            <a:off x="9325" y="9325"/>
-            <a:ext cx="5772923" cy="743425"/>
-            <a:chOff x="3209725" y="590350"/>
-            <a:chExt cx="5772923" cy="743425"/>
-          </a:xfrm>
-        </p:grpSpPr>
-        <p:sp>
-          <p:nvSpPr>
-            <p:cNvPr id="16" name="Box glass ceiling 9"/>
-            <p:cNvSpPr/>
-            <p:nvPr/>
-          </p:nvSpPr>
-          <p:spPr>
-            <a:xfrm>
-              <a:off x="3209725" y="590350"/>
-              <a:ext cx="5772550" cy="743425"/>
-            </a:xfrm>
-            <a:custGeom>
-              <a:avLst/>
-              <a:gdLst/>
-              <a:ahLst/>
-              <a:cxnLst/>
-              <a:rect l="0" t="0" r="r" b="b"/>
-              <a:pathLst>
-                <a:path w="5772550" h="743425" fill="norm">
+                <a:path w="5772550" h="661329" fill="norm">
                   <a:moveTo>
                     <a:pt x="4764704" y="0"/>
                   </a:moveTo>
                   <a:lnTo>
-                    <a:pt x="5772550" y="743425"/>
+                    <a:pt x="5772550" y="661329"/>
                   </a:lnTo>
                   <a:lnTo>
-                    <a:pt x="0" y="743425"/>
+                    <a:pt x="0" y="661329"/>
                   </a:lnTo>
                   <a:lnTo>
                     <a:pt x="1007846" y="0"/>
@@ -1641,14 +1844,14 @@
         </p:sp>
         <p:sp>
           <p:nvSpPr>
-            <p:cNvPr id="17" name="Box glass ceiling 10"/>
+            <p:cNvPr id="22" name="Box glass ceiling 14"/>
             <p:cNvSpPr/>
             <p:nvPr/>
           </p:nvSpPr>
           <p:spPr>
             <a:xfrm>
               <a:off x="3209725" y="590350"/>
-              <a:ext cx="5772923" cy="743425"/>
+              <a:ext cx="5772923" cy="661329"/>
             </a:xfrm>
             <a:custGeom>
               <a:avLst/>
@@ -1657,21 +1860,21 @@
               <a:cxnLst/>
               <a:rect l="0" t="0" r="r" b="b"/>
               <a:pathLst>
-                <a:path w="5772923" h="743425" fill="norm">
+                <a:path w="5772923" h="661329" fill="norm">
                   <a:moveTo>
-                    <a:pt x="4759109" y="20965"/>
+                    <a:pt x="4759109" y="18650"/>
                   </a:moveTo>
                   <a:lnTo>
-                    <a:pt x="5710259" y="722460"/>
+                    <a:pt x="5710259" y="642679"/>
                   </a:lnTo>
                   <a:lnTo>
-                    <a:pt x="62291" y="722460"/>
+                    <a:pt x="62291" y="642679"/>
                   </a:lnTo>
                   <a:lnTo>
-                    <a:pt x="1013441" y="20965"/>
+                    <a:pt x="1013441" y="18650"/>
                   </a:lnTo>
                   <a:lnTo>
-                    <a:pt x="4758736" y="20965"/>
+                    <a:pt x="4758736" y="18650"/>
                   </a:lnTo>
                   <a:moveTo>
                     <a:pt x="4764704" y="0"/>
@@ -1680,10 +1883,10 @@
                     <a:pt x="1008219" y="0"/>
                   </a:lnTo>
                   <a:lnTo>
-                    <a:pt x="0" y="743425"/>
+                    <a:pt x="0" y="661329"/>
                   </a:lnTo>
                   <a:lnTo>
-                    <a:pt x="5772923" y="743425"/>
+                    <a:pt x="5772923" y="661329"/>
                   </a:lnTo>
                   <a:lnTo>
                     <a:pt x="4764704" y="0"/>
@@ -1708,14 +1911,14 @@
         </p:sp>
         <p:sp>
           <p:nvSpPr>
-            <p:cNvPr id="18" name="Box glass ceiling 11"/>
+            <p:cNvPr id="23" name="Box glass ceiling 15"/>
             <p:cNvSpPr/>
             <p:nvPr/>
           </p:nvSpPr>
           <p:spPr>
             <a:xfrm>
               <a:off x="3209725" y="590350"/>
-              <a:ext cx="5772550" cy="743425"/>
+              <a:ext cx="5772550" cy="661329"/>
             </a:xfrm>
             <a:custGeom>
               <a:avLst/>
@@ -1724,15 +1927,15 @@
               <a:cxnLst/>
               <a:rect l="0" t="0" r="r" b="b"/>
               <a:pathLst>
-                <a:path w="5772550" h="743425" fill="none">
+                <a:path w="5772550" h="661329" fill="none">
                   <a:moveTo>
                     <a:pt x="4764704" y="0"/>
                   </a:moveTo>
                   <a:lnTo>
-                    <a:pt x="5772550" y="743425"/>
+                    <a:pt x="5772550" y="661329"/>
                   </a:lnTo>
                   <a:lnTo>
-                    <a:pt x="0" y="743425"/>
+                    <a:pt x="0" y="661329"/>
                   </a:lnTo>
                   <a:lnTo>
                     <a:pt x="1007846" y="0"/>
@@ -1756,28 +1959,28 @@
       </p:grpSp>
       <p:grpSp>
         <p:nvGrpSpPr>
-          <p:cNvPr id="19" name="Box frame"/>
+          <p:cNvPr id="24" name="left House light column 3 row 2"/>
           <p:cNvGrpSpPr/>
           <p:nvPr/>
         </p:nvGrpSpPr>
         <p:grpSpPr>
           <a:xfrm>
-            <a:off x="9325" y="9325"/>
-            <a:ext cx="5772550" cy="743425"/>
-            <a:chOff x="3209725" y="590350"/>
-            <a:chExt cx="5772550" cy="743425"/>
+            <a:off x="897231" y="1104645"/>
+            <a:ext cx="579618" cy="390114"/>
+            <a:chOff x="4097631" y="1685670"/>
+            <a:chExt cx="579618" cy="390114"/>
           </a:xfrm>
         </p:grpSpPr>
         <p:sp>
           <p:nvSpPr>
-            <p:cNvPr id="20" name="Box frame 12"/>
+            <p:cNvPr id="25" name="left House light column 3 row 2 3"/>
             <p:cNvSpPr/>
             <p:nvPr/>
           </p:nvSpPr>
           <p:spPr>
             <a:xfrm>
-              <a:off x="3209725" y="590350"/>
-              <a:ext cx="1142126" cy="743425"/>
+              <a:off x="4097631" y="1686386"/>
+              <a:ext cx="117142" cy="389397"/>
             </a:xfrm>
             <a:custGeom>
               <a:avLst/>
@@ -1786,45 +1989,71 @@
               <a:cxnLst/>
               <a:rect l="0" t="0" r="r" b="b"/>
               <a:pathLst>
-                <a:path w="1142126" h="743425" fill="norm">
+                <a:path w="117142" h="389397" fill="norm">
                   <a:moveTo>
-                    <a:pt x="0" y="743425"/>
+                    <a:pt x="117142" y="389039"/>
                   </a:moveTo>
                   <a:lnTo>
-                    <a:pt x="1007846" y="0"/>
+                    <a:pt x="62332" y="389039"/>
                   </a:lnTo>
+                  <a:cubicBezTo>
+                    <a:pt x="27584" y="389039"/>
+                    <a:pt x="0" y="302347"/>
+                    <a:pt x="0" y="194878"/>
+                  </a:cubicBezTo>
+                  <a:cubicBezTo>
+                    <a:pt x="0" y="87408"/>
+                    <a:pt x="27584" y="0"/>
+                    <a:pt x="62332" y="0"/>
+                  </a:cubicBezTo>
                   <a:lnTo>
-                    <a:pt x="1142126" y="0"/>
+                    <a:pt x="117142" y="0"/>
                   </a:lnTo>
-                  <a:lnTo>
-                    <a:pt x="132788" y="743425"/>
-                  </a:lnTo>
-                  <a:lnTo>
-                    <a:pt x="0" y="743425"/>
-                  </a:lnTo>
+                  <a:cubicBezTo>
+                    <a:pt x="107111" y="0"/>
+                    <a:pt x="98155" y="6806"/>
+                    <a:pt x="90274" y="19344"/>
+                  </a:cubicBezTo>
+                  <a:cubicBezTo>
+                    <a:pt x="68780" y="50869"/>
+                    <a:pt x="54451" y="117500"/>
+                    <a:pt x="54451" y="194878"/>
+                  </a:cubicBezTo>
+                  <a:cubicBezTo>
+                    <a:pt x="54451" y="272256"/>
+                    <a:pt x="68780" y="338887"/>
+                    <a:pt x="90274" y="370411"/>
+                  </a:cubicBezTo>
+                  <a:cubicBezTo>
+                    <a:pt x="98514" y="382233"/>
+                    <a:pt x="107111" y="389397"/>
+                    <a:pt x="117142" y="389397"/>
+                  </a:cubicBezTo>
                   <a:close/>
                 </a:path>
               </a:pathLst>
             </a:custGeom>
             <a:solidFill>
-              <a:srgbClr val="EFEEEB"/>
+              <a:srgbClr val="000000"/>
             </a:solidFill>
-            <a:ln w="0" cap="rnd">
-              <a:noFill/>
+            <a:ln w="10747" cap="rnd">
+              <a:solidFill>
+                <a:srgbClr val="231815"/>
+              </a:solidFill>
               <a:round/>
             </a:ln>
           </p:spPr>
         </p:sp>
         <p:sp>
           <p:nvSpPr>
-            <p:cNvPr id="21" name="Box frame 13"/>
+            <p:cNvPr id="26" name="left House light column 3 row 2 4"/>
             <p:cNvSpPr/>
             <p:nvPr/>
           </p:nvSpPr>
           <p:spPr>
             <a:xfrm>
-              <a:off x="3209725" y="590350"/>
-              <a:ext cx="1142126" cy="743425"/>
+              <a:off x="4152082" y="1685670"/>
+              <a:ext cx="125023" cy="389397"/>
             </a:xfrm>
             <a:custGeom>
               <a:avLst/>
@@ -1833,28 +2062,118 @@
               <a:cxnLst/>
               <a:rect l="0" t="0" r="r" b="b"/>
               <a:pathLst>
-                <a:path w="1142126" h="743425" fill="none">
+                <a:path w="125023" h="389397" fill="norm">
                   <a:moveTo>
-                    <a:pt x="0" y="743425"/>
+                    <a:pt x="125023" y="195236"/>
                   </a:moveTo>
-                  <a:lnTo>
-                    <a:pt x="1007846" y="0"/>
-                  </a:lnTo>
-                  <a:lnTo>
-                    <a:pt x="1142126" y="0"/>
-                  </a:lnTo>
-                  <a:lnTo>
-                    <a:pt x="132788" y="743425"/>
-                  </a:lnTo>
-                  <a:lnTo>
-                    <a:pt x="0" y="743425"/>
-                  </a:lnTo>
+                  <a:cubicBezTo>
+                    <a:pt x="125023" y="302705"/>
+                    <a:pt x="97439" y="389397"/>
+                    <a:pt x="62690" y="389397"/>
+                  </a:cubicBezTo>
+                  <a:cubicBezTo>
+                    <a:pt x="52660" y="389397"/>
+                    <a:pt x="43704" y="382591"/>
+                    <a:pt x="35823" y="370411"/>
+                  </a:cubicBezTo>
+                  <a:cubicBezTo>
+                    <a:pt x="14329" y="338887"/>
+                    <a:pt x="0" y="272256"/>
+                    <a:pt x="0" y="194878"/>
+                  </a:cubicBezTo>
+                  <a:cubicBezTo>
+                    <a:pt x="0" y="117500"/>
+                    <a:pt x="14329" y="50869"/>
+                    <a:pt x="35823" y="19344"/>
+                  </a:cubicBezTo>
+                  <a:cubicBezTo>
+                    <a:pt x="44062" y="6806"/>
+                    <a:pt x="52660" y="0"/>
+                    <a:pt x="62690" y="0"/>
+                  </a:cubicBezTo>
+                  <a:cubicBezTo>
+                    <a:pt x="97439" y="0"/>
+                    <a:pt x="125023" y="86692"/>
+                    <a:pt x="125023" y="194878"/>
+                  </a:cubicBezTo>
                   <a:close/>
                 </a:path>
               </a:pathLst>
             </a:custGeom>
-            <a:noFill/>
-            <a:ln w="9325" cap="rnd">
+            <a:solidFill>
+              <a:srgbClr val="B3B3B3"/>
+            </a:solidFill>
+            <a:ln w="10747" cap="rnd">
+              <a:solidFill>
+                <a:srgbClr val="231815"/>
+              </a:solidFill>
+              <a:round/>
+            </a:ln>
+          </p:spPr>
+        </p:sp>
+        <p:sp>
+          <p:nvSpPr>
+            <p:cNvPr id="27" name="left House light column 3 row 2 5"/>
+            <p:cNvSpPr/>
+            <p:nvPr/>
+          </p:nvSpPr>
+          <p:spPr>
+            <a:xfrm>
+              <a:off x="4250596" y="1702507"/>
+              <a:ext cx="109619" cy="126456"/>
+            </a:xfrm>
+            <a:custGeom>
+              <a:avLst/>
+              <a:gdLst/>
+              <a:ahLst/>
+              <a:cxnLst/>
+              <a:rect l="0" t="0" r="r" b="b"/>
+              <a:pathLst>
+                <a:path w="109619" h="126456" fill="norm">
+                  <a:moveTo>
+                    <a:pt x="109260" y="126456"/>
+                  </a:moveTo>
+                  <a:lnTo>
+                    <a:pt x="0" y="126456"/>
+                  </a:lnTo>
+                  <a:cubicBezTo>
+                    <a:pt x="716" y="118933"/>
+                    <a:pt x="1433" y="112485"/>
+                    <a:pt x="2508" y="105678"/>
+                  </a:cubicBezTo>
+                  <a:cubicBezTo>
+                    <a:pt x="5015" y="86334"/>
+                    <a:pt x="8956" y="68422"/>
+                    <a:pt x="13971" y="54093"/>
+                  </a:cubicBezTo>
+                  <a:cubicBezTo>
+                    <a:pt x="22210" y="27226"/>
+                    <a:pt x="33315" y="8239"/>
+                    <a:pt x="45854" y="2508"/>
+                  </a:cubicBezTo>
+                  <a:cubicBezTo>
+                    <a:pt x="46570" y="2508"/>
+                    <a:pt x="46570" y="1791"/>
+                    <a:pt x="47287" y="1791"/>
+                  </a:cubicBezTo>
+                  <a:cubicBezTo>
+                    <a:pt x="49794" y="358"/>
+                    <a:pt x="52302" y="0"/>
+                    <a:pt x="54809" y="0"/>
+                  </a:cubicBezTo>
+                  <a:cubicBezTo>
+                    <a:pt x="80602" y="0"/>
+                    <a:pt x="102454" y="52660"/>
+                    <a:pt x="109619" y="126456"/>
+                  </a:cubicBezTo>
+                  <a:close/>
+                </a:path>
+              </a:pathLst>
+            </a:custGeom>
+            <a:solidFill>
+              <a:srgbClr val="B3B3B3"/>
+            </a:solidFill>
+            <a:ln w="8956" cap="rnd">
               <a:solidFill>
                 <a:srgbClr val="4D4D4D"/>
               </a:solidFill>
@@ -1864,14 +2183,14 @@
         </p:sp>
         <p:sp>
           <p:nvSpPr>
-            <p:cNvPr id="22" name="Box frame 14"/>
+            <p:cNvPr id="28" name="left House light column 3 row 2 6"/>
             <p:cNvSpPr/>
             <p:nvPr/>
           </p:nvSpPr>
           <p:spPr>
             <a:xfrm>
-              <a:off x="7840149" y="590350"/>
-              <a:ext cx="1142126" cy="743425"/>
+              <a:off x="4547928" y="1702149"/>
+              <a:ext cx="87050" cy="356798"/>
             </a:xfrm>
             <a:custGeom>
               <a:avLst/>
@@ -1880,379 +2199,60 @@
               <a:cxnLst/>
               <a:rect l="0" t="0" r="r" b="b"/>
               <a:pathLst>
-                <a:path w="1142126" h="743425" fill="norm">
+                <a:path w="87050" h="356798" fill="norm">
                   <a:moveTo>
-                    <a:pt x="1142126" y="743425"/>
+                    <a:pt x="87050" y="356798"/>
                   </a:moveTo>
                   <a:lnTo>
-                    <a:pt x="134280" y="0"/>
+                    <a:pt x="42271" y="356798"/>
                   </a:lnTo>
+                  <a:cubicBezTo>
+                    <a:pt x="18270" y="356798"/>
+                    <a:pt x="0" y="276913"/>
+                    <a:pt x="0" y="178757"/>
+                  </a:cubicBezTo>
+                  <a:cubicBezTo>
+                    <a:pt x="0" y="160488"/>
+                    <a:pt x="716" y="142934"/>
+                    <a:pt x="1791" y="126456"/>
+                  </a:cubicBezTo>
+                  <a:cubicBezTo>
+                    <a:pt x="6806" y="53018"/>
+                    <a:pt x="22569" y="0"/>
+                    <a:pt x="41913" y="0"/>
+                  </a:cubicBezTo>
                   <a:lnTo>
-                    <a:pt x="0" y="0"/>
+                    <a:pt x="86692" y="0"/>
                   </a:lnTo>
-                  <a:lnTo>
-                    <a:pt x="1009338" y="743425"/>
-                  </a:lnTo>
-                  <a:lnTo>
-                    <a:pt x="1142126" y="743425"/>
-                  </a:lnTo>
-                  <a:close/>
-                </a:path>
-              </a:pathLst>
-            </a:custGeom>
-            <a:solidFill>
-              <a:srgbClr val="EFEEEB"/>
-            </a:solidFill>
-            <a:ln w="0" cap="rnd">
-              <a:noFill/>
-              <a:round/>
-            </a:ln>
-          </p:spPr>
-        </p:sp>
-        <p:sp>
-          <p:nvSpPr>
-            <p:cNvPr id="23" name="Box frame 15"/>
-            <p:cNvSpPr/>
-            <p:nvPr/>
-          </p:nvSpPr>
-          <p:spPr>
-            <a:xfrm>
-              <a:off x="7840149" y="590350"/>
-              <a:ext cx="1142126" cy="743425"/>
-            </a:xfrm>
-            <a:custGeom>
-              <a:avLst/>
-              <a:gdLst/>
-              <a:ahLst/>
-              <a:cxnLst/>
-              <a:rect l="0" t="0" r="r" b="b"/>
-              <a:pathLst>
-                <a:path w="1142126" h="743425" fill="none">
-                  <a:moveTo>
-                    <a:pt x="1142126" y="743425"/>
-                  </a:moveTo>
-                  <a:lnTo>
-                    <a:pt x="134280" y="0"/>
-                  </a:lnTo>
-                  <a:lnTo>
-                    <a:pt x="0" y="0"/>
-                  </a:lnTo>
-                  <a:lnTo>
-                    <a:pt x="1009338" y="743425"/>
-                  </a:lnTo>
-                  <a:lnTo>
-                    <a:pt x="1142126" y="743425"/>
-                  </a:lnTo>
-                  <a:close/>
-                </a:path>
-              </a:pathLst>
-            </a:custGeom>
-            <a:noFill/>
-            <a:ln w="9325" cap="rnd">
-              <a:solidFill>
-                <a:srgbClr val="4D4D4D"/>
-              </a:solidFill>
-              <a:round/>
-            </a:ln>
-          </p:spPr>
-        </p:sp>
-      </p:grpSp>
-      <p:grpSp>
-        <p:nvGrpSpPr>
-          <p:cNvPr id="24" name="left House light column 3 row 3"/>
-          <p:cNvGrpSpPr/>
-          <p:nvPr/>
-        </p:nvGrpSpPr>
-        <p:grpSpPr>
-          <a:xfrm>
-            <a:off x="931723" y="1324187"/>
-            <a:ext cx="502068" cy="337918"/>
-            <a:chOff x="4132123" y="1905212"/>
-            <a:chExt cx="502068" cy="337918"/>
-          </a:xfrm>
-        </p:grpSpPr>
-        <p:sp>
-          <p:nvSpPr>
-            <p:cNvPr id="25" name="left House light column 3 row 3 6"/>
-            <p:cNvSpPr/>
-            <p:nvPr/>
-          </p:nvSpPr>
-          <p:spPr>
-            <a:xfrm>
-              <a:off x="4132123" y="1905832"/>
-              <a:ext cx="101469" cy="337298"/>
-            </a:xfrm>
-            <a:custGeom>
-              <a:avLst/>
-              <a:gdLst/>
-              <a:ahLst/>
-              <a:cxnLst/>
-              <a:rect l="0" t="0" r="r" b="b"/>
-              <a:pathLst>
-                <a:path w="101469" h="337298" fill="norm">
-                  <a:moveTo>
-                    <a:pt x="101469" y="336987"/>
-                  </a:moveTo>
-                  <a:lnTo>
-                    <a:pt x="53992" y="336987"/>
-                  </a:lnTo>
-                  <a:cubicBezTo>
-                    <a:pt x="23893" y="336987"/>
-                    <a:pt x="0" y="261895"/>
-                    <a:pt x="0" y="168804"/>
-                  </a:cubicBezTo>
-                  <a:cubicBezTo>
-                    <a:pt x="0" y="75714"/>
-                    <a:pt x="23893" y="0"/>
-                    <a:pt x="53992" y="0"/>
-                  </a:cubicBezTo>
-                  <a:lnTo>
-                    <a:pt x="101469" y="0"/>
-                  </a:lnTo>
-                  <a:cubicBezTo>
-                    <a:pt x="92780" y="0"/>
-                    <a:pt x="85023" y="5896"/>
-                    <a:pt x="78196" y="16756"/>
-                  </a:cubicBezTo>
-                  <a:cubicBezTo>
-                    <a:pt x="59578" y="44063"/>
-                    <a:pt x="47166" y="101779"/>
-                    <a:pt x="47166" y="168804"/>
-                  </a:cubicBezTo>
-                  <a:cubicBezTo>
-                    <a:pt x="47166" y="235829"/>
-                    <a:pt x="59578" y="293545"/>
-                    <a:pt x="78196" y="320852"/>
-                  </a:cubicBezTo>
-                  <a:cubicBezTo>
-                    <a:pt x="85333" y="331092"/>
-                    <a:pt x="92780" y="337298"/>
-                    <a:pt x="101469" y="337298"/>
-                  </a:cubicBezTo>
-                  <a:close/>
-                </a:path>
-              </a:pathLst>
-            </a:custGeom>
-            <a:solidFill>
-              <a:srgbClr val="000000"/>
-            </a:solidFill>
-            <a:ln w="9309" cap="rnd">
-              <a:solidFill>
-                <a:srgbClr val="231815"/>
-              </a:solidFill>
-              <a:round/>
-            </a:ln>
-          </p:spPr>
-        </p:sp>
-        <p:sp>
-          <p:nvSpPr>
-            <p:cNvPr id="26" name="left House light column 3 row 3 7"/>
-            <p:cNvSpPr/>
-            <p:nvPr/>
-          </p:nvSpPr>
-          <p:spPr>
-            <a:xfrm>
-              <a:off x="4179288" y="1905212"/>
-              <a:ext cx="108295" cy="337298"/>
-            </a:xfrm>
-            <a:custGeom>
-              <a:avLst/>
-              <a:gdLst/>
-              <a:ahLst/>
-              <a:cxnLst/>
-              <a:rect l="0" t="0" r="r" b="b"/>
-              <a:pathLst>
-                <a:path w="108295" h="337298" fill="norm">
-                  <a:moveTo>
-                    <a:pt x="108295" y="169114"/>
-                  </a:moveTo>
-                  <a:cubicBezTo>
-                    <a:pt x="108295" y="262205"/>
-                    <a:pt x="84402" y="337298"/>
-                    <a:pt x="54303" y="337298"/>
-                  </a:cubicBezTo>
-                  <a:cubicBezTo>
-                    <a:pt x="45614" y="337298"/>
-                    <a:pt x="37857" y="331402"/>
-                    <a:pt x="31030" y="320852"/>
-                  </a:cubicBezTo>
-                  <a:cubicBezTo>
-                    <a:pt x="12412" y="293545"/>
-                    <a:pt x="0" y="235829"/>
-                    <a:pt x="0" y="168804"/>
-                  </a:cubicBezTo>
-                  <a:cubicBezTo>
-                    <a:pt x="0" y="101779"/>
-                    <a:pt x="12412" y="44063"/>
-                    <a:pt x="31030" y="16756"/>
-                  </a:cubicBezTo>
-                  <a:cubicBezTo>
-                    <a:pt x="38167" y="5896"/>
-                    <a:pt x="45614" y="0"/>
-                    <a:pt x="54303" y="0"/>
-                  </a:cubicBezTo>
-                  <a:cubicBezTo>
-                    <a:pt x="84402" y="0"/>
-                    <a:pt x="108295" y="75093"/>
-                    <a:pt x="108295" y="168804"/>
-                  </a:cubicBezTo>
-                  <a:close/>
-                </a:path>
-              </a:pathLst>
-            </a:custGeom>
-            <a:solidFill>
-              <a:srgbClr val="B3B3B3"/>
-            </a:solidFill>
-            <a:ln w="9309" cap="rnd">
-              <a:solidFill>
-                <a:srgbClr val="231815"/>
-              </a:solidFill>
-              <a:round/>
-            </a:ln>
-          </p:spPr>
-        </p:sp>
-        <p:sp>
-          <p:nvSpPr>
-            <p:cNvPr id="27" name="left House light column 3 row 3 8"/>
-            <p:cNvSpPr/>
-            <p:nvPr/>
-          </p:nvSpPr>
-          <p:spPr>
-            <a:xfrm>
-              <a:off x="4264621" y="1919796"/>
-              <a:ext cx="94952" cy="109536"/>
-            </a:xfrm>
-            <a:custGeom>
-              <a:avLst/>
-              <a:gdLst/>
-              <a:ahLst/>
-              <a:cxnLst/>
-              <a:rect l="0" t="0" r="r" b="b"/>
-              <a:pathLst>
-                <a:path w="94952" h="109536" fill="norm">
-                  <a:moveTo>
-                    <a:pt x="94642" y="109536"/>
-                  </a:moveTo>
-                  <a:lnTo>
-                    <a:pt x="0" y="109536"/>
-                  </a:lnTo>
-                  <a:cubicBezTo>
-                    <a:pt x="621" y="103020"/>
-                    <a:pt x="1241" y="97435"/>
-                    <a:pt x="2172" y="91539"/>
-                  </a:cubicBezTo>
-                  <a:cubicBezTo>
-                    <a:pt x="4344" y="74783"/>
-                    <a:pt x="7758" y="59268"/>
-                    <a:pt x="12102" y="46856"/>
-                  </a:cubicBezTo>
-                  <a:cubicBezTo>
-                    <a:pt x="19239" y="23583"/>
-                    <a:pt x="28858" y="7137"/>
-                    <a:pt x="39719" y="2172"/>
-                  </a:cubicBezTo>
-                  <a:cubicBezTo>
-                    <a:pt x="40339" y="2172"/>
-                    <a:pt x="40339" y="1552"/>
-                    <a:pt x="40960" y="1552"/>
-                  </a:cubicBezTo>
-                  <a:cubicBezTo>
-                    <a:pt x="43132" y="310"/>
-                    <a:pt x="45304" y="0"/>
-                    <a:pt x="47476" y="0"/>
-                  </a:cubicBezTo>
-                  <a:cubicBezTo>
-                    <a:pt x="69818" y="0"/>
-                    <a:pt x="88746" y="45614"/>
-                    <a:pt x="94952" y="109536"/>
-                  </a:cubicBezTo>
-                  <a:close/>
-                </a:path>
-              </a:pathLst>
-            </a:custGeom>
-            <a:solidFill>
-              <a:srgbClr val="B3B3B3"/>
-            </a:solidFill>
-            <a:ln w="7758" cap="rnd">
-              <a:solidFill>
-                <a:srgbClr val="4D4D4D"/>
-              </a:solidFill>
-              <a:round/>
-            </a:ln>
-          </p:spPr>
-        </p:sp>
-        <p:sp>
-          <p:nvSpPr>
-            <p:cNvPr id="28" name="left House light column 3 row 3 9"/>
-            <p:cNvSpPr/>
-            <p:nvPr/>
-          </p:nvSpPr>
-          <p:spPr>
-            <a:xfrm>
-              <a:off x="4522172" y="1919485"/>
-              <a:ext cx="75403" cy="309060"/>
-            </a:xfrm>
-            <a:custGeom>
-              <a:avLst/>
-              <a:gdLst/>
-              <a:ahLst/>
-              <a:cxnLst/>
-              <a:rect l="0" t="0" r="r" b="b"/>
-              <a:pathLst>
-                <a:path w="75403" h="309060" fill="norm">
-                  <a:moveTo>
-                    <a:pt x="75403" y="309060"/>
-                  </a:moveTo>
-                  <a:lnTo>
-                    <a:pt x="36616" y="309060"/>
-                  </a:lnTo>
-                  <a:cubicBezTo>
-                    <a:pt x="15825" y="309060"/>
-                    <a:pt x="0" y="239863"/>
-                    <a:pt x="0" y="154840"/>
-                  </a:cubicBezTo>
-                  <a:cubicBezTo>
-                    <a:pt x="0" y="139015"/>
-                    <a:pt x="621" y="123810"/>
-                    <a:pt x="1552" y="109536"/>
-                  </a:cubicBezTo>
-                  <a:cubicBezTo>
-                    <a:pt x="5896" y="45925"/>
-                    <a:pt x="19549" y="0"/>
-                    <a:pt x="36305" y="0"/>
-                  </a:cubicBezTo>
-                  <a:lnTo>
-                    <a:pt x="75093" y="0"/>
-                  </a:lnTo>
-                  <a:cubicBezTo>
-                    <a:pt x="67956" y="0"/>
-                    <a:pt x="61440" y="8688"/>
-                    <a:pt x="55544" y="24514"/>
-                  </a:cubicBezTo>
-                  <a:cubicBezTo>
-                    <a:pt x="49959" y="39098"/>
-                    <a:pt x="45614" y="59268"/>
-                    <a:pt x="43132" y="83781"/>
-                  </a:cubicBezTo>
-                  <a:cubicBezTo>
-                    <a:pt x="41891" y="91849"/>
-                    <a:pt x="41580" y="100538"/>
-                    <a:pt x="40960" y="109226"/>
-                  </a:cubicBezTo>
-                  <a:cubicBezTo>
-                    <a:pt x="39719" y="123500"/>
-                    <a:pt x="39408" y="138705"/>
-                    <a:pt x="39408" y="154530"/>
-                  </a:cubicBezTo>
-                  <a:cubicBezTo>
-                    <a:pt x="39408" y="208833"/>
-                    <a:pt x="45304" y="256930"/>
-                    <a:pt x="55854" y="284236"/>
-                  </a:cubicBezTo>
-                  <a:cubicBezTo>
-                    <a:pt x="61750" y="300062"/>
-                    <a:pt x="68266" y="308750"/>
-                    <a:pt x="75403" y="308750"/>
+                  <a:cubicBezTo>
+                    <a:pt x="78453" y="0"/>
+                    <a:pt x="70930" y="10030"/>
+                    <a:pt x="64123" y="28300"/>
+                  </a:cubicBezTo>
+                  <a:cubicBezTo>
+                    <a:pt x="57675" y="45137"/>
+                    <a:pt x="52660" y="68422"/>
+                    <a:pt x="49794" y="96722"/>
+                  </a:cubicBezTo>
+                  <a:cubicBezTo>
+                    <a:pt x="48361" y="106036"/>
+                    <a:pt x="48003" y="116067"/>
+                    <a:pt x="47287" y="126097"/>
+                  </a:cubicBezTo>
+                  <a:cubicBezTo>
+                    <a:pt x="45854" y="142576"/>
+                    <a:pt x="45495" y="160129"/>
+                    <a:pt x="45495" y="178399"/>
+                  </a:cubicBezTo>
+                  <a:cubicBezTo>
+                    <a:pt x="45495" y="241090"/>
+                    <a:pt x="52302" y="296615"/>
+                    <a:pt x="64482" y="328140"/>
+                  </a:cubicBezTo>
+                  <a:cubicBezTo>
+                    <a:pt x="71288" y="346409"/>
+                    <a:pt x="78811" y="356440"/>
+                    <a:pt x="87050" y="356440"/>
                   </a:cubicBezTo>
                   <a:close/>
                 </a:path>
@@ -2269,14 +2269,14 @@
         </p:sp>
         <p:sp>
           <p:nvSpPr>
-            <p:cNvPr id="29" name="left House light column 3 row 3 10"/>
+            <p:cNvPr id="29" name="left House light column 3 row 2 7"/>
             <p:cNvSpPr/>
             <p:nvPr/>
           </p:nvSpPr>
           <p:spPr>
             <a:xfrm>
-              <a:off x="4280757" y="1941517"/>
-              <a:ext cx="319611" cy="87815"/>
+              <a:off x="4269224" y="1727583"/>
+              <a:ext cx="368978" cy="101379"/>
             </a:xfrm>
             <a:custGeom>
               <a:avLst/>
@@ -2285,23 +2285,23 @@
               <a:cxnLst/>
               <a:rect l="0" t="0" r="r" b="b"/>
               <a:pathLst>
-                <a:path w="319611" h="87815" fill="norm">
+                <a:path w="368978" h="101379" fill="norm">
                   <a:moveTo>
-                    <a:pt x="319300" y="0"/>
+                    <a:pt x="368620" y="0"/>
                   </a:moveTo>
                   <a:lnTo>
-                    <a:pt x="319300" y="87815"/>
+                    <a:pt x="368620" y="101379"/>
                   </a:lnTo>
                   <a:lnTo>
-                    <a:pt x="0" y="87815"/>
+                    <a:pt x="0" y="101379"/>
                   </a:lnTo>
                   <a:cubicBezTo>
-                    <a:pt x="4965" y="36305"/>
-                    <a:pt x="17377" y="0"/>
-                    <a:pt x="32271" y="0"/>
+                    <a:pt x="5732" y="41913"/>
+                    <a:pt x="20061" y="0"/>
+                    <a:pt x="37256" y="0"/>
                   </a:cubicBezTo>
                   <a:lnTo>
-                    <a:pt x="319611" y="0"/>
+                    <a:pt x="368978" y="0"/>
                   </a:lnTo>
                   <a:close/>
                 </a:path>
@@ -2320,14 +2320,14 @@
         </p:sp>
         <p:sp>
           <p:nvSpPr>
-            <p:cNvPr id="30" name="left House light column 3 row 3 11"/>
+            <p:cNvPr id="30" name="left House light column 3 row 2 8"/>
             <p:cNvSpPr/>
             <p:nvPr/>
           </p:nvSpPr>
           <p:spPr>
             <a:xfrm>
-              <a:off x="4221800" y="1919796"/>
-              <a:ext cx="412391" cy="308750"/>
+              <a:off x="4201160" y="1702507"/>
+              <a:ext cx="476089" cy="356440"/>
             </a:xfrm>
             <a:custGeom>
               <a:avLst/>
@@ -2336,76 +2336,76 @@
               <a:cxnLst/>
               <a:rect l="0" t="0" r="r" b="b"/>
               <a:pathLst>
-                <a:path w="412391" h="308750" fill="norm">
+                <a:path w="476089" h="356440" fill="norm">
                   <a:moveTo>
-                    <a:pt x="412391" y="154530"/>
+                    <a:pt x="476089" y="178399"/>
                   </a:moveTo>
                   <a:cubicBezTo>
-                    <a:pt x="412391" y="239553"/>
-                    <a:pt x="395945" y="308750"/>
-                    <a:pt x="375775" y="308750"/>
+                    <a:pt x="476089" y="276554"/>
+                    <a:pt x="457103" y="356440"/>
+                    <a:pt x="433818" y="356440"/>
                   </a:cubicBezTo>
                   <a:lnTo>
-                    <a:pt x="49648" y="308750"/>
+                    <a:pt x="57317" y="356440"/>
                   </a:lnTo>
                   <a:cubicBezTo>
-                    <a:pt x="22342" y="308750"/>
-                    <a:pt x="0" y="239553"/>
-                    <a:pt x="0" y="154530"/>
-                  </a:cubicBezTo>
-                  <a:cubicBezTo>
-                    <a:pt x="0" y="69508"/>
-                    <a:pt x="22342" y="0"/>
-                    <a:pt x="49648" y="0"/>
+                    <a:pt x="25793" y="356440"/>
+                    <a:pt x="0" y="276554"/>
+                    <a:pt x="0" y="178399"/>
+                  </a:cubicBezTo>
+                  <a:cubicBezTo>
+                    <a:pt x="0" y="80244"/>
+                    <a:pt x="25793" y="0"/>
+                    <a:pt x="57317" y="0"/>
                   </a:cubicBezTo>
                   <a:lnTo>
-                    <a:pt x="89987" y="0"/>
+                    <a:pt x="103887" y="0"/>
                   </a:lnTo>
                   <a:cubicBezTo>
-                    <a:pt x="87815" y="0"/>
-                    <a:pt x="85643" y="621"/>
-                    <a:pt x="83471" y="1552"/>
-                  </a:cubicBezTo>
-                  <a:cubicBezTo>
-                    <a:pt x="82851" y="1552"/>
-                    <a:pt x="82851" y="2172"/>
-                    <a:pt x="82230" y="2172"/>
-                  </a:cubicBezTo>
-                  <a:cubicBezTo>
-                    <a:pt x="71369" y="7137"/>
-                    <a:pt x="61440" y="23273"/>
-                    <a:pt x="54613" y="46856"/>
-                  </a:cubicBezTo>
-                  <a:cubicBezTo>
-                    <a:pt x="50269" y="59888"/>
-                    <a:pt x="46856" y="74472"/>
-                    <a:pt x="44683" y="91539"/>
-                  </a:cubicBezTo>
-                  <a:cubicBezTo>
-                    <a:pt x="43442" y="97435"/>
-                    <a:pt x="43132" y="103020"/>
-                    <a:pt x="42511" y="109536"/>
+                    <a:pt x="101379" y="0"/>
+                    <a:pt x="98872" y="716"/>
+                    <a:pt x="96364" y="1791"/>
+                  </a:cubicBezTo>
+                  <a:cubicBezTo>
+                    <a:pt x="95648" y="1791"/>
+                    <a:pt x="95648" y="2508"/>
+                    <a:pt x="94931" y="2508"/>
+                  </a:cubicBezTo>
+                  <a:cubicBezTo>
+                    <a:pt x="82393" y="8239"/>
+                    <a:pt x="70930" y="26867"/>
+                    <a:pt x="63049" y="54093"/>
+                  </a:cubicBezTo>
+                  <a:cubicBezTo>
+                    <a:pt x="58033" y="69139"/>
+                    <a:pt x="54093" y="85975"/>
+                    <a:pt x="51585" y="105678"/>
+                  </a:cubicBezTo>
+                  <a:cubicBezTo>
+                    <a:pt x="50152" y="112485"/>
+                    <a:pt x="49794" y="118933"/>
+                    <a:pt x="49078" y="126456"/>
                   </a:cubicBezTo>
                   <a:lnTo>
-                    <a:pt x="302234" y="109536"/>
+                    <a:pt x="348917" y="126456"/>
                   </a:lnTo>
                   <a:cubicBezTo>
-                    <a:pt x="306578" y="45925"/>
-                    <a:pt x="320231" y="0"/>
-                    <a:pt x="336987" y="0"/>
+                    <a:pt x="353932" y="53018"/>
+                    <a:pt x="369695" y="0"/>
+                    <a:pt x="389039" y="0"/>
                   </a:cubicBezTo>
                   <a:lnTo>
-                    <a:pt x="375775" y="0"/>
+                    <a:pt x="433818" y="0"/>
                   </a:lnTo>
                   <a:cubicBezTo>
-                    <a:pt x="392221" y="0"/>
-                    <a:pt x="406185" y="45614"/>
-                    <a:pt x="410529" y="109536"/>
-                  </a:cubicBezTo>
-                  <a:cubicBezTo>
-                    <a:pt x="411770" y="123810"/>
-                    <a:pt x="412080" y="139015"/>
-                    <a:pt x="412080" y="154840"/>
+                    <a:pt x="452804" y="0"/>
+                    <a:pt x="468925" y="52660"/>
+                    <a:pt x="473940" y="126456"/>
+                  </a:cubicBezTo>
+                  <a:cubicBezTo>
+                    <a:pt x="475373" y="142934"/>
+                    <a:pt x="475731" y="160488"/>
+                    <a:pt x="475731" y="178757"/>
                   </a:cubicBezTo>
                   <a:close/>
                 </a:path>
@@ -2414,7 +2414,7 @@
             <a:solidFill>
               <a:srgbClr val="000000"/>
             </a:solidFill>
-            <a:ln w="9309" cap="rnd">
+            <a:ln w="10747" cap="rnd">
               <a:solidFill>
                 <a:srgbClr val="231815"/>
               </a:solidFill>
@@ -2424,14 +2424,14 @@
         </p:sp>
         <p:sp>
           <p:nvSpPr>
-            <p:cNvPr id="31" name="left House light column 3 row 3 12"/>
+            <p:cNvPr id="31" name="left House light column 3 row 2 9"/>
             <p:cNvSpPr/>
             <p:nvPr/>
           </p:nvSpPr>
           <p:spPr>
             <a:xfrm>
-              <a:off x="4561580" y="1919796"/>
-              <a:ext cx="72611" cy="308750"/>
+              <a:off x="4593423" y="1702507"/>
+              <a:ext cx="83826" cy="356440"/>
             </a:xfrm>
             <a:custGeom>
               <a:avLst/>
@@ -2440,54 +2440,54 @@
               <a:cxnLst/>
               <a:rect l="0" t="0" r="r" b="b"/>
               <a:pathLst>
-                <a:path w="72611" h="308750" fill="norm">
+                <a:path w="83826" h="356440" fill="norm">
                   <a:moveTo>
-                    <a:pt x="72611" y="154530"/>
+                    <a:pt x="83826" y="178399"/>
                   </a:moveTo>
                   <a:cubicBezTo>
-                    <a:pt x="72611" y="239553"/>
-                    <a:pt x="56165" y="308750"/>
-                    <a:pt x="35995" y="308750"/>
-                  </a:cubicBezTo>
-                  <a:cubicBezTo>
-                    <a:pt x="28858" y="308750"/>
-                    <a:pt x="22342" y="300062"/>
-                    <a:pt x="16446" y="284236"/>
-                  </a:cubicBezTo>
-                  <a:cubicBezTo>
-                    <a:pt x="6206" y="256930"/>
-                    <a:pt x="0" y="209143"/>
-                    <a:pt x="0" y="154530"/>
-                  </a:cubicBezTo>
-                  <a:cubicBezTo>
-                    <a:pt x="0" y="138705"/>
-                    <a:pt x="621" y="123500"/>
-                    <a:pt x="1552" y="109226"/>
-                  </a:cubicBezTo>
-                  <a:cubicBezTo>
-                    <a:pt x="2172" y="100538"/>
-                    <a:pt x="2793" y="91849"/>
-                    <a:pt x="3724" y="83781"/>
-                  </a:cubicBezTo>
-                  <a:cubicBezTo>
-                    <a:pt x="6516" y="59268"/>
-                    <a:pt x="10861" y="39098"/>
-                    <a:pt x="16136" y="24514"/>
-                  </a:cubicBezTo>
-                  <a:cubicBezTo>
-                    <a:pt x="22031" y="8688"/>
-                    <a:pt x="28548" y="0"/>
-                    <a:pt x="35685" y="0"/>
-                  </a:cubicBezTo>
-                  <a:cubicBezTo>
-                    <a:pt x="52131" y="0"/>
-                    <a:pt x="66094" y="45614"/>
-                    <a:pt x="70438" y="109536"/>
-                  </a:cubicBezTo>
-                  <a:cubicBezTo>
-                    <a:pt x="71680" y="123810"/>
-                    <a:pt x="71990" y="139015"/>
-                    <a:pt x="71990" y="154840"/>
+                    <a:pt x="83826" y="276554"/>
+                    <a:pt x="64840" y="356440"/>
+                    <a:pt x="41555" y="356440"/>
+                  </a:cubicBezTo>
+                  <a:cubicBezTo>
+                    <a:pt x="33315" y="356440"/>
+                    <a:pt x="25793" y="346409"/>
+                    <a:pt x="18986" y="328140"/>
+                  </a:cubicBezTo>
+                  <a:cubicBezTo>
+                    <a:pt x="7165" y="296615"/>
+                    <a:pt x="0" y="241448"/>
+                    <a:pt x="0" y="178399"/>
+                  </a:cubicBezTo>
+                  <a:cubicBezTo>
+                    <a:pt x="0" y="160129"/>
+                    <a:pt x="716" y="142576"/>
+                    <a:pt x="1791" y="126097"/>
+                  </a:cubicBezTo>
+                  <a:cubicBezTo>
+                    <a:pt x="2508" y="116067"/>
+                    <a:pt x="3224" y="106036"/>
+                    <a:pt x="4299" y="96722"/>
+                  </a:cubicBezTo>
+                  <a:cubicBezTo>
+                    <a:pt x="7523" y="68422"/>
+                    <a:pt x="12538" y="45137"/>
+                    <a:pt x="18628" y="28300"/>
+                  </a:cubicBezTo>
+                  <a:cubicBezTo>
+                    <a:pt x="25434" y="10030"/>
+                    <a:pt x="32957" y="0"/>
+                    <a:pt x="41197" y="0"/>
+                  </a:cubicBezTo>
+                  <a:cubicBezTo>
+                    <a:pt x="60183" y="0"/>
+                    <a:pt x="76303" y="52660"/>
+                    <a:pt x="81318" y="126456"/>
+                  </a:cubicBezTo>
+                  <a:cubicBezTo>
+                    <a:pt x="82751" y="142934"/>
+                    <a:pt x="83110" y="160488"/>
+                    <a:pt x="83110" y="178757"/>
                   </a:cubicBezTo>
                   <a:close/>
                 </a:path>
@@ -2496,7 +2496,7 @@
             <a:solidFill>
               <a:srgbClr val="B3B3B3"/>
             </a:solidFill>
-            <a:ln w="9309" cap="rnd">
+            <a:ln w="10747" cap="rnd">
               <a:solidFill>
                 <a:srgbClr val="231815"/>
               </a:solidFill>
@@ -2513,22 +2513,22 @@
         </p:nvGrpSpPr>
         <p:grpSpPr>
           <a:xfrm>
-            <a:off x="528686" y="2714736"/>
-            <a:ext cx="252674" cy="1026169"/>
-            <a:chOff x="3729086" y="3295761"/>
-            <a:chExt cx="252674" cy="1026169"/>
+            <a:off x="565601" y="2459887"/>
+            <a:ext cx="232834" cy="992278"/>
+            <a:chOff x="3766001" y="3040912"/>
+            <a:chExt cx="232834" cy="992278"/>
           </a:xfrm>
         </p:grpSpPr>
         <p:sp>
           <p:nvSpPr>
-            <p:cNvPr id="33" name="left Water well column 2 row 5 6"/>
+            <p:cNvPr id="33" name="left Water well column 2 row 5 3"/>
             <p:cNvSpPr/>
             <p:nvPr/>
           </p:nvSpPr>
           <p:spPr>
             <a:xfrm>
-              <a:off x="3799745" y="3295761"/>
-              <a:ext cx="109668" cy="1026169"/>
+              <a:off x="3766001" y="3040912"/>
+              <a:ext cx="232834" cy="992278"/>
             </a:xfrm>
             <a:custGeom>
               <a:avLst/>
@@ -2537,27 +2537,30 @@
               <a:cxnLst/>
               <a:rect l="0" t="0" r="r" b="b"/>
               <a:pathLst>
-                <a:path w="109668" h="1026169" fill="norm">
+                <a:path w="232834" h="992278" fill="norm">
                   <a:moveTo>
-                    <a:pt x="0" y="117550"/>
+                    <a:pt x="0" y="164127"/>
                   </a:moveTo>
                   <a:lnTo>
-                    <a:pt x="109668" y="0"/>
+                    <a:pt x="0" y="992278"/>
                   </a:lnTo>
                   <a:lnTo>
-                    <a:pt x="109668" y="894695"/>
+                    <a:pt x="232834" y="743263"/>
                   </a:lnTo>
                   <a:lnTo>
-                    <a:pt x="0" y="1026169"/>
+                    <a:pt x="232834" y="0"/>
+                  </a:lnTo>
+                  <a:lnTo>
+                    <a:pt x="0" y="164127"/>
                   </a:lnTo>
                   <a:close/>
                 </a:path>
               </a:pathLst>
             </a:custGeom>
             <a:solidFill>
-              <a:srgbClr val="CCCBC7"/>
+              <a:srgbClr val="D5D3D1"/>
             </a:solidFill>
-            <a:ln w="11906" cap="rnd">
+            <a:ln w="18650" cap="rnd">
               <a:solidFill>
                 <a:srgbClr val="040000"/>
               </a:solidFill>
@@ -2567,14 +2570,14 @@
         </p:sp>
         <p:sp>
           <p:nvSpPr>
-            <p:cNvPr id="34" name="left Water well column 2 row 5 7"/>
+            <p:cNvPr id="34" name="left Water well column 2 row 5 4"/>
             <p:cNvSpPr/>
             <p:nvPr/>
           </p:nvSpPr>
           <p:spPr>
             <a:xfrm>
-              <a:off x="3729086" y="4181004"/>
-              <a:ext cx="252674" cy="137531"/>
+              <a:off x="3766001" y="3040912"/>
+              <a:ext cx="232834" cy="824026"/>
             </a:xfrm>
             <a:custGeom>
               <a:avLst/>
@@ -2583,56 +2586,22 @@
               <a:cxnLst/>
               <a:rect l="0" t="0" r="r" b="b"/>
               <a:pathLst>
-                <a:path w="252674" h="137531" fill="norm">
+                <a:path w="232834" h="824026" fill="norm">
                   <a:moveTo>
-                    <a:pt x="252674" y="0"/>
+                    <a:pt x="0" y="164127"/>
                   </a:moveTo>
                   <a:lnTo>
-                    <a:pt x="252674" y="65339"/>
+                    <a:pt x="0" y="824026"/>
                   </a:lnTo>
-                  <a:cubicBezTo>
-                    <a:pt x="252674" y="105319"/>
-                    <a:pt x="196245" y="137531"/>
-                    <a:pt x="126337" y="137531"/>
-                  </a:cubicBezTo>
-                  <a:cubicBezTo>
-                    <a:pt x="56429" y="137531"/>
-                    <a:pt x="0" y="105319"/>
-                    <a:pt x="0" y="65339"/>
-                  </a:cubicBezTo>
                   <a:lnTo>
-                    <a:pt x="0" y="0"/>
+                    <a:pt x="232834" y="743263"/>
                   </a:lnTo>
-                  <a:cubicBezTo>
-                    <a:pt x="0" y="11880"/>
-                    <a:pt x="5026" y="23074"/>
-                    <a:pt x="14164" y="32898"/>
-                  </a:cubicBezTo>
-                  <a:cubicBezTo>
-                    <a:pt x="26501" y="46834"/>
-                    <a:pt x="46834" y="58257"/>
-                    <a:pt x="71736" y="64882"/>
-                  </a:cubicBezTo>
-                  <a:cubicBezTo>
-                    <a:pt x="88413" y="69451"/>
-                    <a:pt x="106918" y="72193"/>
-                    <a:pt x="126337" y="72193"/>
-                  </a:cubicBezTo>
-                  <a:cubicBezTo>
-                    <a:pt x="145756" y="72193"/>
-                    <a:pt x="164261" y="69451"/>
-                    <a:pt x="180938" y="64882"/>
-                  </a:cubicBezTo>
-                  <a:cubicBezTo>
-                    <a:pt x="205840" y="58257"/>
-                    <a:pt x="225944" y="46834"/>
-                    <a:pt x="238738" y="32898"/>
-                  </a:cubicBezTo>
-                  <a:cubicBezTo>
-                    <a:pt x="247419" y="23074"/>
-                    <a:pt x="252674" y="11651"/>
-                    <a:pt x="252674" y="0"/>
-                  </a:cubicBezTo>
+                  <a:lnTo>
+                    <a:pt x="232834" y="0"/>
+                  </a:lnTo>
+                  <a:lnTo>
+                    <a:pt x="0" y="164127"/>
+                  </a:lnTo>
                   <a:close/>
                 </a:path>
               </a:pathLst>
@@ -2640,7 +2609,7 @@
             <a:solidFill>
               <a:srgbClr val="D5D3D1"/>
             </a:solidFill>
-            <a:ln w="11423" cap="rnd">
+            <a:ln w="18650" cap="rnd">
               <a:solidFill>
                 <a:srgbClr val="040000"/>
               </a:solidFill>
@@ -2650,14 +2619,14 @@
         </p:sp>
         <p:sp>
           <p:nvSpPr>
-            <p:cNvPr id="35" name="left Water well column 2 row 5 8"/>
+            <p:cNvPr id="35" name="left Water well column 2 row 5 5"/>
             <p:cNvSpPr/>
             <p:nvPr/>
           </p:nvSpPr>
           <p:spPr>
             <a:xfrm>
-              <a:off x="3729086" y="4109040"/>
-              <a:ext cx="252674" cy="144157"/>
+              <a:off x="3775330" y="3780900"/>
+              <a:ext cx="163432" cy="172702"/>
             </a:xfrm>
             <a:custGeom>
               <a:avLst/>
@@ -2666,49 +2635,35 @@
               <a:cxnLst/>
               <a:rect l="0" t="0" r="r" b="b"/>
               <a:pathLst>
-                <a:path w="252674" h="144157" fill="norm">
+                <a:path w="163432" h="172702" fill="norm">
                   <a:moveTo>
-                    <a:pt x="252674" y="71964"/>
+                    <a:pt x="163432" y="0"/>
                   </a:moveTo>
-                  <a:cubicBezTo>
-                    <a:pt x="252674" y="83844"/>
-                    <a:pt x="247648" y="95038"/>
-                    <a:pt x="238738" y="104862"/>
-                  </a:cubicBezTo>
-                  <a:cubicBezTo>
-                    <a:pt x="226173" y="118798"/>
-                    <a:pt x="205840" y="130221"/>
-                    <a:pt x="180938" y="136846"/>
-                  </a:cubicBezTo>
-                  <a:cubicBezTo>
-                    <a:pt x="164261" y="141415"/>
-                    <a:pt x="145756" y="144157"/>
-                    <a:pt x="126337" y="144157"/>
-                  </a:cubicBezTo>
-                  <a:cubicBezTo>
-                    <a:pt x="106918" y="144157"/>
-                    <a:pt x="88413" y="141415"/>
-                    <a:pt x="71736" y="136846"/>
-                  </a:cubicBezTo>
-                  <a:cubicBezTo>
-                    <a:pt x="46834" y="130221"/>
-                    <a:pt x="26730" y="118798"/>
-                    <a:pt x="14164" y="104862"/>
-                  </a:cubicBezTo>
-                  <a:cubicBezTo>
-                    <a:pt x="5255" y="95038"/>
-                    <a:pt x="0" y="83615"/>
-                    <a:pt x="0" y="71964"/>
-                  </a:cubicBezTo>
-                  <a:cubicBezTo>
-                    <a:pt x="0" y="32213"/>
-                    <a:pt x="56429" y="0"/>
-                    <a:pt x="126337" y="0"/>
-                  </a:cubicBezTo>
-                  <a:cubicBezTo>
-                    <a:pt x="196245" y="0"/>
-                    <a:pt x="252674" y="32213"/>
-                    <a:pt x="252674" y="71964"/>
+                  <a:lnTo>
+                    <a:pt x="163432" y="54729"/>
+                  </a:lnTo>
+                  <a:cubicBezTo>
+                    <a:pt x="163432" y="83900"/>
+                    <a:pt x="93499" y="134052"/>
+                    <a:pt x="0" y="172702"/>
+                  </a:cubicBezTo>
+                  <a:lnTo>
+                    <a:pt x="0" y="115898"/>
+                  </a:lnTo>
+                  <a:cubicBezTo>
+                    <a:pt x="16130" y="109502"/>
+                    <a:pt x="31630" y="102681"/>
+                    <a:pt x="46268" y="95650"/>
+                  </a:cubicBezTo>
+                  <a:cubicBezTo>
+                    <a:pt x="86940" y="76067"/>
+                    <a:pt x="119775" y="54884"/>
+                    <a:pt x="140671" y="35720"/>
+                  </a:cubicBezTo>
+                  <a:cubicBezTo>
+                    <a:pt x="154850" y="22406"/>
+                    <a:pt x="163432" y="9759"/>
+                    <a:pt x="163432" y="0"/>
                   </a:cubicBezTo>
                   <a:close/>
                 </a:path>
@@ -2717,7 +2672,47 @@
             <a:solidFill>
               <a:srgbClr val="D5D3D1"/>
             </a:solidFill>
-            <a:ln w="11423" cap="rnd">
+            <a:ln w="0" cap="rnd">
+              <a:noFill/>
+              <a:round/>
+            </a:ln>
+          </p:spPr>
+        </p:sp>
+        <p:sp>
+          <p:nvSpPr>
+            <p:cNvPr id="36" name="left Water well column 2 row 5 6"/>
+            <p:cNvSpPr/>
+            <p:nvPr/>
+          </p:nvSpPr>
+          <p:spPr>
+            <a:xfrm>
+              <a:off x="3775330" y="3780900"/>
+              <a:ext cx="163432" cy="172702"/>
+            </a:xfrm>
+            <a:custGeom>
+              <a:avLst/>
+              <a:gdLst/>
+              <a:ahLst/>
+              <a:cxnLst/>
+              <a:rect l="0" t="0" r="r" b="b"/>
+              <a:pathLst>
+                <a:path w="163432" h="172702" fill="none">
+                  <a:moveTo>
+                    <a:pt x="163432" y="0"/>
+                  </a:moveTo>
+                  <a:lnTo>
+                    <a:pt x="163432" y="54729"/>
+                  </a:lnTo>
+                  <a:cubicBezTo>
+                    <a:pt x="163432" y="83900"/>
+                    <a:pt x="93499" y="134052"/>
+                    <a:pt x="0" y="172702"/>
+                  </a:cubicBezTo>
+                </a:path>
+              </a:pathLst>
+            </a:custGeom>
+            <a:noFill/>
+            <a:ln w="18650" cap="rnd">
               <a:solidFill>
                 <a:srgbClr val="040000"/>
               </a:solidFill>
@@ -2727,14 +2722,14 @@
         </p:sp>
         <p:sp>
           <p:nvSpPr>
-            <p:cNvPr id="36" name="left Water well column 2 row 5 9"/>
+            <p:cNvPr id="37" name="left Water well column 2 row 5 7"/>
             <p:cNvSpPr/>
             <p:nvPr/>
           </p:nvSpPr>
           <p:spPr>
             <a:xfrm>
-              <a:off x="3778908" y="4150135"/>
-              <a:ext cx="153798" cy="80627"/>
+              <a:off x="3775330" y="3780900"/>
+              <a:ext cx="163432" cy="115898"/>
             </a:xfrm>
             <a:custGeom>
               <a:avLst/>
@@ -2743,56 +2738,239 @@
               <a:cxnLst/>
               <a:rect l="0" t="0" r="r" b="b"/>
               <a:pathLst>
-                <a:path w="153798" h="80627" fill="norm">
+                <a:path w="163432" h="115898" fill="none">
                   <a:moveTo>
-                    <a:pt x="153487" y="40236"/>
+                    <a:pt x="0" y="115898"/>
                   </a:moveTo>
                   <a:cubicBezTo>
-                    <a:pt x="153487" y="46761"/>
-                    <a:pt x="150380" y="53130"/>
-                    <a:pt x="145098" y="58723"/>
-                  </a:cubicBezTo>
-                  <a:cubicBezTo>
-                    <a:pt x="137330" y="66490"/>
-                    <a:pt x="125058" y="72860"/>
-                    <a:pt x="109989" y="76588"/>
-                  </a:cubicBezTo>
-                  <a:cubicBezTo>
-                    <a:pt x="99891" y="79074"/>
-                    <a:pt x="88550" y="80627"/>
-                    <a:pt x="76743" y="80627"/>
-                  </a:cubicBezTo>
-                  <a:cubicBezTo>
-                    <a:pt x="64937" y="80627"/>
-                    <a:pt x="53596" y="79074"/>
-                    <a:pt x="43498" y="76588"/>
-                  </a:cubicBezTo>
-                  <a:cubicBezTo>
-                    <a:pt x="28429" y="72860"/>
-                    <a:pt x="16001" y="66490"/>
-                    <a:pt x="8544" y="58723"/>
-                  </a:cubicBezTo>
-                  <a:cubicBezTo>
-                    <a:pt x="3107" y="53285"/>
-                    <a:pt x="0" y="46916"/>
-                    <a:pt x="0" y="40236"/>
-                  </a:cubicBezTo>
-                  <a:cubicBezTo>
-                    <a:pt x="0" y="18021"/>
-                    <a:pt x="34488" y="0"/>
-                    <a:pt x="76899" y="0"/>
-                  </a:cubicBezTo>
-                  <a:cubicBezTo>
-                    <a:pt x="119310" y="0"/>
-                    <a:pt x="153798" y="18021"/>
-                    <a:pt x="153798" y="40236"/>
+                    <a:pt x="16130" y="109502"/>
+                    <a:pt x="31630" y="102681"/>
+                    <a:pt x="46268" y="95650"/>
+                  </a:cubicBezTo>
+                  <a:cubicBezTo>
+                    <a:pt x="86940" y="76067"/>
+                    <a:pt x="119775" y="54884"/>
+                    <a:pt x="140671" y="35720"/>
+                  </a:cubicBezTo>
+                  <a:cubicBezTo>
+                    <a:pt x="154850" y="22406"/>
+                    <a:pt x="163432" y="9759"/>
+                    <a:pt x="163432" y="0"/>
+                  </a:cubicBezTo>
+                </a:path>
+              </a:pathLst>
+            </a:custGeom>
+            <a:noFill/>
+            <a:ln w="18650" cap="rnd">
+              <a:solidFill>
+                <a:srgbClr val="040000"/>
+              </a:solidFill>
+              <a:round/>
+            </a:ln>
+          </p:spPr>
+        </p:sp>
+        <p:sp>
+          <p:nvSpPr>
+            <p:cNvPr id="38" name="left Water well column 2 row 5 8"/>
+            <p:cNvSpPr/>
+            <p:nvPr/>
+          </p:nvSpPr>
+          <p:spPr>
+            <a:xfrm>
+              <a:off x="3775330" y="3751079"/>
+              <a:ext cx="163432" cy="145719"/>
+            </a:xfrm>
+            <a:custGeom>
+              <a:avLst/>
+              <a:gdLst/>
+              <a:ahLst/>
+              <a:cxnLst/>
+              <a:rect l="0" t="0" r="r" b="b"/>
+              <a:pathLst>
+                <a:path w="163432" h="145719" fill="norm">
+                  <a:moveTo>
+                    <a:pt x="163432" y="29821"/>
+                  </a:moveTo>
+                  <a:cubicBezTo>
+                    <a:pt x="163432" y="39772"/>
+                    <a:pt x="155223" y="52093"/>
+                    <a:pt x="140671" y="65541"/>
+                  </a:cubicBezTo>
+                  <a:cubicBezTo>
+                    <a:pt x="120148" y="84574"/>
+                    <a:pt x="86940" y="105888"/>
+                    <a:pt x="46268" y="125471"/>
+                  </a:cubicBezTo>
+                  <a:cubicBezTo>
+                    <a:pt x="31630" y="132502"/>
+                    <a:pt x="16130" y="139323"/>
+                    <a:pt x="0" y="145719"/>
+                  </a:cubicBezTo>
+                  <a:lnTo>
+                    <a:pt x="0" y="23414"/>
+                  </a:lnTo>
+                  <a:cubicBezTo>
+                    <a:pt x="93499" y="0"/>
+                    <a:pt x="163432" y="817"/>
+                    <a:pt x="163432" y="29821"/>
                   </a:cubicBezTo>
                   <a:close/>
                 </a:path>
               </a:pathLst>
             </a:custGeom>
             <a:solidFill>
-              <a:srgbClr val="68A7D9"/>
+              <a:srgbClr val="D5D3D1"/>
+            </a:solidFill>
+            <a:ln w="0" cap="rnd">
+              <a:noFill/>
+              <a:round/>
+            </a:ln>
+          </p:spPr>
+        </p:sp>
+        <p:sp>
+          <p:nvSpPr>
+            <p:cNvPr id="39" name="left Water well column 2 row 5 9"/>
+            <p:cNvSpPr/>
+            <p:nvPr/>
+          </p:nvSpPr>
+          <p:spPr>
+            <a:xfrm>
+              <a:off x="3775330" y="3780900"/>
+              <a:ext cx="163432" cy="115898"/>
+            </a:xfrm>
+            <a:custGeom>
+              <a:avLst/>
+              <a:gdLst/>
+              <a:ahLst/>
+              <a:cxnLst/>
+              <a:rect l="0" t="0" r="r" b="b"/>
+              <a:pathLst>
+                <a:path w="163432" h="115898" fill="none">
+                  <a:moveTo>
+                    <a:pt x="163432" y="0"/>
+                  </a:moveTo>
+                  <a:cubicBezTo>
+                    <a:pt x="163432" y="9951"/>
+                    <a:pt x="155223" y="22272"/>
+                    <a:pt x="140671" y="35720"/>
+                  </a:cubicBezTo>
+                  <a:cubicBezTo>
+                    <a:pt x="120148" y="54753"/>
+                    <a:pt x="86940" y="76067"/>
+                    <a:pt x="46268" y="95650"/>
+                  </a:cubicBezTo>
+                  <a:cubicBezTo>
+                    <a:pt x="31630" y="102681"/>
+                    <a:pt x="16130" y="109502"/>
+                    <a:pt x="0" y="115898"/>
+                  </a:cubicBezTo>
+                </a:path>
+              </a:pathLst>
+            </a:custGeom>
+            <a:noFill/>
+            <a:ln w="18650" cap="rnd">
+              <a:solidFill>
+                <a:srgbClr val="040000"/>
+              </a:solidFill>
+              <a:round/>
+            </a:ln>
+          </p:spPr>
+        </p:sp>
+        <p:sp>
+          <p:nvSpPr>
+            <p:cNvPr id="40" name="left Water well column 2 row 5 10"/>
+            <p:cNvSpPr/>
+            <p:nvPr/>
+          </p:nvSpPr>
+          <p:spPr>
+            <a:xfrm>
+              <a:off x="3775330" y="3751079"/>
+              <a:ext cx="163432" cy="29821"/>
+            </a:xfrm>
+            <a:custGeom>
+              <a:avLst/>
+              <a:gdLst/>
+              <a:ahLst/>
+              <a:cxnLst/>
+              <a:rect l="0" t="0" r="r" b="b"/>
+              <a:pathLst>
+                <a:path w="163432" h="29821" fill="none">
+                  <a:moveTo>
+                    <a:pt x="0" y="23414"/>
+                  </a:moveTo>
+                  <a:cubicBezTo>
+                    <a:pt x="93499" y="0"/>
+                    <a:pt x="163432" y="817"/>
+                    <a:pt x="163432" y="29821"/>
+                  </a:cubicBezTo>
+                </a:path>
+              </a:pathLst>
+            </a:custGeom>
+            <a:noFill/>
+            <a:ln w="18650" cap="rnd">
+              <a:solidFill>
+                <a:srgbClr val="040000"/>
+              </a:solidFill>
+              <a:round/>
+            </a:ln>
+          </p:spPr>
+        </p:sp>
+        <p:sp>
+          <p:nvSpPr>
+            <p:cNvPr id="41" name="left Water well column 2 row 5 11"/>
+            <p:cNvSpPr/>
+            <p:nvPr/>
+          </p:nvSpPr>
+          <p:spPr>
+            <a:xfrm>
+              <a:off x="3775330" y="3800331"/>
+              <a:ext cx="83313" cy="76302"/>
+            </a:xfrm>
+            <a:custGeom>
+              <a:avLst/>
+              <a:gdLst/>
+              <a:ahLst/>
+              <a:cxnLst/>
+              <a:rect l="0" t="0" r="r" b="b"/>
+              <a:pathLst>
+                <a:path w="83313" h="76302" fill="norm">
+                  <a:moveTo>
+                    <a:pt x="82805" y="16378"/>
+                  </a:moveTo>
+                  <a:cubicBezTo>
+                    <a:pt x="82805" y="21942"/>
+                    <a:pt x="77731" y="29089"/>
+                    <a:pt x="69104" y="36776"/>
+                  </a:cubicBezTo>
+                  <a:cubicBezTo>
+                    <a:pt x="56418" y="47686"/>
+                    <a:pt x="36373" y="59832"/>
+                    <a:pt x="11761" y="71130"/>
+                  </a:cubicBezTo>
+                  <a:cubicBezTo>
+                    <a:pt x="7944" y="72869"/>
+                    <a:pt x="4019" y="74597"/>
+                    <a:pt x="0" y="76302"/>
+                  </a:cubicBezTo>
+                  <a:lnTo>
+                    <a:pt x="0" y="10509"/>
+                  </a:lnTo>
+                  <a:cubicBezTo>
+                    <a:pt x="48521" y="0"/>
+                    <a:pt x="83313" y="1321"/>
+                    <a:pt x="83313" y="16207"/>
+                  </a:cubicBezTo>
+                  <a:lnTo>
+                    <a:pt x="82805" y="16378"/>
+                  </a:lnTo>
+                  <a:close/>
+                </a:path>
+              </a:pathLst>
+            </a:custGeom>
+            <a:solidFill>
+              <a:srgbClr val="68A7D9">
+                <a:alpha val="90000"/>
+              </a:srgbClr>
             </a:solidFill>
             <a:ln w="0" cap="rnd">
               <a:noFill/>
@@ -2803,28 +2981,28 @@
       </p:grpSp>
       <p:grpSp>
         <p:nvGrpSpPr>
-          <p:cNvPr id="37" name="right Speaker column 2 row 2"/>
+          <p:cNvPr id="42" name="right Speaker column 2 row 1"/>
           <p:cNvGrpSpPr/>
           <p:nvPr/>
         </p:nvGrpSpPr>
         <p:grpSpPr>
           <a:xfrm>
-            <a:off x="5038319" y="1061048"/>
-            <a:ext cx="209213" cy="921879"/>
-            <a:chOff x="8238719" y="1642073"/>
-            <a:chExt cx="209213" cy="921879"/>
+            <a:off x="5012858" y="712151"/>
+            <a:ext cx="260135" cy="839156"/>
+            <a:chOff x="8213258" y="1293176"/>
+            <a:chExt cx="260135" cy="839156"/>
           </a:xfrm>
         </p:grpSpPr>
         <p:sp>
           <p:nvSpPr>
-            <p:cNvPr id="38" name="right Speaker column 2 row 2 9"/>
+            <p:cNvPr id="43" name="right Speaker column 2 row 1 6"/>
             <p:cNvSpPr/>
             <p:nvPr/>
           </p:nvSpPr>
           <p:spPr>
             <a:xfrm>
-              <a:off x="8332975" y="1642073"/>
-              <a:ext cx="17049" cy="74151"/>
+              <a:off x="8330455" y="1293176"/>
+              <a:ext cx="21198" cy="68744"/>
             </a:xfrm>
             <a:custGeom>
               <a:avLst/>
@@ -2833,29 +3011,29 @@
               <a:cxnLst/>
               <a:rect l="0" t="0" r="r" b="b"/>
               <a:pathLst>
-                <a:path w="17049" h="74151" fill="norm">
+                <a:path w="21198" h="68744" fill="norm">
                   <a:moveTo>
-                    <a:pt x="17049" y="45189"/>
+                    <a:pt x="21198" y="43003"/>
                   </a:moveTo>
                   <a:cubicBezTo>
-                    <a:pt x="17049" y="27200"/>
-                    <a:pt x="13152" y="9172"/>
-                    <a:pt x="8524" y="4586"/>
-                  </a:cubicBezTo>
-                  <a:cubicBezTo>
-                    <a:pt x="3897" y="0"/>
-                    <a:pt x="0" y="11306"/>
-                    <a:pt x="0" y="28984"/>
-                  </a:cubicBezTo>
-                  <a:cubicBezTo>
-                    <a:pt x="0" y="46663"/>
-                    <a:pt x="3897" y="65025"/>
-                    <a:pt x="8524" y="69588"/>
-                  </a:cubicBezTo>
-                  <a:cubicBezTo>
-                    <a:pt x="13152" y="74151"/>
-                    <a:pt x="17049" y="63178"/>
-                    <a:pt x="17049" y="45189"/>
+                    <a:pt x="21198" y="26649"/>
+                    <a:pt x="16353" y="9691"/>
+                    <a:pt x="10599" y="4845"/>
+                  </a:cubicBezTo>
+                  <a:cubicBezTo>
+                    <a:pt x="4845" y="0"/>
+                    <a:pt x="0" y="9691"/>
+                    <a:pt x="0" y="25741"/>
+                  </a:cubicBezTo>
+                  <a:cubicBezTo>
+                    <a:pt x="0" y="41791"/>
+                    <a:pt x="4845" y="59053"/>
+                    <a:pt x="10599" y="63898"/>
+                  </a:cubicBezTo>
+                  <a:cubicBezTo>
+                    <a:pt x="16353" y="68744"/>
+                    <a:pt x="21198" y="59356"/>
+                    <a:pt x="21198" y="43003"/>
                   </a:cubicBezTo>
                   <a:close/>
                 </a:path>
@@ -2872,14 +3050,14 @@
         </p:sp>
         <p:sp>
           <p:nvSpPr>
-            <p:cNvPr id="39" name="right Speaker column 2 row 2 10"/>
+            <p:cNvPr id="44" name="right Speaker column 2 row 1 7"/>
             <p:cNvSpPr/>
             <p:nvPr/>
           </p:nvSpPr>
           <p:spPr>
             <a:xfrm>
-              <a:off x="8332975" y="1748446"/>
-              <a:ext cx="17049" cy="73743"/>
+              <a:off x="8330455" y="1389780"/>
+              <a:ext cx="21198" cy="68441"/>
             </a:xfrm>
             <a:custGeom>
               <a:avLst/>
@@ -2888,29 +3066,29 @@
               <a:cxnLst/>
               <a:rect l="0" t="0" r="r" b="b"/>
               <a:pathLst>
-                <a:path w="17049" h="73743" fill="norm">
+                <a:path w="21198" h="68441" fill="norm">
                   <a:moveTo>
-                    <a:pt x="17049" y="44750"/>
+                    <a:pt x="21198" y="42700"/>
                   </a:moveTo>
                   <a:cubicBezTo>
-                    <a:pt x="17049" y="26761"/>
-                    <a:pt x="13152" y="8431"/>
-                    <a:pt x="8524" y="4216"/>
-                  </a:cubicBezTo>
-                  <a:cubicBezTo>
-                    <a:pt x="3897" y="0"/>
-                    <a:pt x="0" y="10670"/>
-                    <a:pt x="0" y="28682"/>
-                  </a:cubicBezTo>
-                  <a:cubicBezTo>
-                    <a:pt x="0" y="46694"/>
-                    <a:pt x="3897" y="64691"/>
-                    <a:pt x="8524" y="69217"/>
-                  </a:cubicBezTo>
-                  <a:cubicBezTo>
-                    <a:pt x="13152" y="73743"/>
-                    <a:pt x="17049" y="62739"/>
-                    <a:pt x="17049" y="44750"/>
+                    <a:pt x="21198" y="26347"/>
+                    <a:pt x="16353" y="9085"/>
+                    <a:pt x="10599" y="4543"/>
+                  </a:cubicBezTo>
+                  <a:cubicBezTo>
+                    <a:pt x="4845" y="0"/>
+                    <a:pt x="0" y="9085"/>
+                    <a:pt x="0" y="25438"/>
+                  </a:cubicBezTo>
+                  <a:cubicBezTo>
+                    <a:pt x="0" y="41791"/>
+                    <a:pt x="4845" y="58750"/>
+                    <a:pt x="10599" y="63595"/>
+                  </a:cubicBezTo>
+                  <a:cubicBezTo>
+                    <a:pt x="16353" y="68441"/>
+                    <a:pt x="21198" y="59053"/>
+                    <a:pt x="21198" y="42700"/>
                   </a:cubicBezTo>
                   <a:close/>
                 </a:path>
@@ -2927,14 +3105,14 @@
         </p:sp>
         <p:sp>
           <p:nvSpPr>
-            <p:cNvPr id="40" name="right Speaker column 2 row 2 11"/>
+            <p:cNvPr id="45" name="right Speaker column 2 row 1 8"/>
             <p:cNvSpPr/>
             <p:nvPr/>
           </p:nvSpPr>
           <p:spPr>
             <a:xfrm>
-              <a:off x="8332975" y="1854153"/>
-              <a:ext cx="17049" cy="74002"/>
+              <a:off x="8330455" y="1485779"/>
+              <a:ext cx="21198" cy="68744"/>
             </a:xfrm>
             <a:custGeom>
               <a:avLst/>
@@ -2943,29 +3121,29 @@
               <a:cxnLst/>
               <a:rect l="0" t="0" r="r" b="b"/>
               <a:pathLst>
-                <a:path w="17049" h="74002" fill="norm">
+                <a:path w="21198" h="68744" fill="norm">
                   <a:moveTo>
-                    <a:pt x="17049" y="45311"/>
+                    <a:pt x="21198" y="43305"/>
                   </a:moveTo>
                   <a:cubicBezTo>
-                    <a:pt x="17049" y="27322"/>
-                    <a:pt x="13152" y="9023"/>
-                    <a:pt x="8524" y="4512"/>
-                  </a:cubicBezTo>
-                  <a:cubicBezTo>
-                    <a:pt x="3897" y="0"/>
-                    <a:pt x="0" y="11035"/>
-                    <a:pt x="0" y="28713"/>
-                  </a:cubicBezTo>
-                  <a:cubicBezTo>
-                    <a:pt x="0" y="46392"/>
-                    <a:pt x="3897" y="65025"/>
-                    <a:pt x="8524" y="69514"/>
-                  </a:cubicBezTo>
-                  <a:cubicBezTo>
-                    <a:pt x="13152" y="74002"/>
-                    <a:pt x="17049" y="63300"/>
-                    <a:pt x="17049" y="45311"/>
+                    <a:pt x="21198" y="26952"/>
+                    <a:pt x="16353" y="9691"/>
+                    <a:pt x="10599" y="4845"/>
+                  </a:cubicBezTo>
+                  <a:cubicBezTo>
+                    <a:pt x="4845" y="0"/>
+                    <a:pt x="0" y="9388"/>
+                    <a:pt x="0" y="25438"/>
+                  </a:cubicBezTo>
+                  <a:cubicBezTo>
+                    <a:pt x="0" y="41488"/>
+                    <a:pt x="4845" y="59053"/>
+                    <a:pt x="10599" y="63898"/>
+                  </a:cubicBezTo>
+                  <a:cubicBezTo>
+                    <a:pt x="16353" y="68744"/>
+                    <a:pt x="21198" y="59659"/>
+                    <a:pt x="21198" y="43305"/>
                   </a:cubicBezTo>
                   <a:close/>
                 </a:path>
@@ -2982,14 +3160,14 @@
         </p:sp>
         <p:sp>
           <p:nvSpPr>
-            <p:cNvPr id="41" name="right Speaker column 2 row 2 12"/>
+            <p:cNvPr id="46" name="right Speaker column 2 row 1 9"/>
             <p:cNvSpPr/>
             <p:nvPr/>
           </p:nvSpPr>
           <p:spPr>
             <a:xfrm>
-              <a:off x="8332975" y="1960194"/>
-              <a:ext cx="17049" cy="73928"/>
+              <a:off x="8330455" y="1582081"/>
+              <a:ext cx="21198" cy="68744"/>
             </a:xfrm>
             <a:custGeom>
               <a:avLst/>
@@ -2998,29 +3176,29 @@
               <a:cxnLst/>
               <a:rect l="0" t="0" r="r" b="b"/>
               <a:pathLst>
-                <a:path w="17049" h="73928" fill="norm">
+                <a:path w="21198" h="68744" fill="norm">
                   <a:moveTo>
-                    <a:pt x="17049" y="45205"/>
+                    <a:pt x="21198" y="43305"/>
                   </a:moveTo>
                   <a:cubicBezTo>
-                    <a:pt x="17049" y="27217"/>
-                    <a:pt x="13152" y="8949"/>
-                    <a:pt x="8524" y="4475"/>
-                  </a:cubicBezTo>
-                  <a:cubicBezTo>
-                    <a:pt x="3897" y="0"/>
-                    <a:pt x="0" y="10733"/>
-                    <a:pt x="0" y="28745"/>
-                  </a:cubicBezTo>
-                  <a:cubicBezTo>
-                    <a:pt x="0" y="46757"/>
-                    <a:pt x="3897" y="65025"/>
-                    <a:pt x="8524" y="69477"/>
-                  </a:cubicBezTo>
-                  <a:cubicBezTo>
-                    <a:pt x="13152" y="73928"/>
-                    <a:pt x="17049" y="63194"/>
-                    <a:pt x="17049" y="45205"/>
+                    <a:pt x="21198" y="26952"/>
+                    <a:pt x="16353" y="9691"/>
+                    <a:pt x="10599" y="4845"/>
+                  </a:cubicBezTo>
+                  <a:cubicBezTo>
+                    <a:pt x="4845" y="0"/>
+                    <a:pt x="0" y="9085"/>
+                    <a:pt x="0" y="25438"/>
+                  </a:cubicBezTo>
+                  <a:cubicBezTo>
+                    <a:pt x="0" y="41791"/>
+                    <a:pt x="4845" y="59053"/>
+                    <a:pt x="10599" y="63898"/>
+                  </a:cubicBezTo>
+                  <a:cubicBezTo>
+                    <a:pt x="16353" y="68744"/>
+                    <a:pt x="21198" y="59659"/>
+                    <a:pt x="21198" y="43305"/>
                   </a:cubicBezTo>
                   <a:close/>
                 </a:path>
@@ -3037,14 +3215,14 @@
         </p:sp>
         <p:sp>
           <p:nvSpPr>
-            <p:cNvPr id="42" name="right Speaker column 2 row 2 13"/>
+            <p:cNvPr id="47" name="right Speaker column 2 row 1 10"/>
             <p:cNvSpPr/>
             <p:nvPr/>
           </p:nvSpPr>
           <p:spPr>
             <a:xfrm>
-              <a:off x="8332975" y="2065567"/>
-              <a:ext cx="17049" cy="74854"/>
+              <a:off x="8330455" y="1677777"/>
+              <a:ext cx="21198" cy="69652"/>
             </a:xfrm>
             <a:custGeom>
               <a:avLst/>
@@ -3053,29 +3231,29 @@
               <a:cxnLst/>
               <a:rect l="0" t="0" r="r" b="b"/>
               <a:pathLst>
-                <a:path w="17049" h="74854" fill="norm">
+                <a:path w="21198" h="69652" fill="norm">
                   <a:moveTo>
-                    <a:pt x="17049" y="45767"/>
+                    <a:pt x="21198" y="43911"/>
                   </a:moveTo>
                   <a:cubicBezTo>
-                    <a:pt x="17049" y="27778"/>
-                    <a:pt x="13152" y="9542"/>
-                    <a:pt x="8524" y="4771"/>
-                  </a:cubicBezTo>
-                  <a:cubicBezTo>
-                    <a:pt x="3897" y="0"/>
-                    <a:pt x="0" y="11097"/>
-                    <a:pt x="0" y="29110"/>
-                  </a:cubicBezTo>
-                  <a:cubicBezTo>
-                    <a:pt x="0" y="47122"/>
-                    <a:pt x="3897" y="65358"/>
-                    <a:pt x="8524" y="70106"/>
-                  </a:cubicBezTo>
-                  <a:cubicBezTo>
-                    <a:pt x="13152" y="74854"/>
-                    <a:pt x="17049" y="64089"/>
-                    <a:pt x="17049" y="46100"/>
+                    <a:pt x="21198" y="27558"/>
+                    <a:pt x="16353" y="10296"/>
+                    <a:pt x="10599" y="5148"/>
+                  </a:cubicBezTo>
+                  <a:cubicBezTo>
+                    <a:pt x="4845" y="0"/>
+                    <a:pt x="0" y="9388"/>
+                    <a:pt x="0" y="25741"/>
+                  </a:cubicBezTo>
+                  <a:cubicBezTo>
+                    <a:pt x="0" y="42094"/>
+                    <a:pt x="4845" y="59356"/>
+                    <a:pt x="10599" y="64504"/>
+                  </a:cubicBezTo>
+                  <a:cubicBezTo>
+                    <a:pt x="16353" y="69652"/>
+                    <a:pt x="21198" y="60567"/>
+                    <a:pt x="21198" y="44214"/>
                   </a:cubicBezTo>
                   <a:close/>
                 </a:path>
@@ -3092,14 +3270,14 @@
         </p:sp>
         <p:sp>
           <p:nvSpPr>
-            <p:cNvPr id="43" name="right Speaker column 2 row 2 14"/>
+            <p:cNvPr id="48" name="right Speaker column 2 row 1 11"/>
             <p:cNvSpPr/>
             <p:nvPr/>
           </p:nvSpPr>
           <p:spPr>
             <a:xfrm>
-              <a:off x="8332975" y="2171941"/>
-              <a:ext cx="17049" cy="74446"/>
+              <a:off x="8330455" y="1774381"/>
+              <a:ext cx="21198" cy="69349"/>
             </a:xfrm>
             <a:custGeom>
               <a:avLst/>
@@ -3108,29 +3286,29 @@
               <a:cxnLst/>
               <a:rect l="0" t="0" r="r" b="b"/>
               <a:pathLst>
-                <a:path w="17049" h="74446" fill="norm">
+                <a:path w="21198" h="69349" fill="norm">
                   <a:moveTo>
-                    <a:pt x="17049" y="45661"/>
+                    <a:pt x="21198" y="43911"/>
                   </a:moveTo>
                   <a:cubicBezTo>
-                    <a:pt x="17049" y="27672"/>
-                    <a:pt x="13152" y="9467"/>
-                    <a:pt x="8524" y="4734"/>
-                  </a:cubicBezTo>
-                  <a:cubicBezTo>
-                    <a:pt x="3897" y="0"/>
-                    <a:pt x="0" y="10795"/>
-                    <a:pt x="0" y="28807"/>
-                  </a:cubicBezTo>
-                  <a:cubicBezTo>
-                    <a:pt x="0" y="46820"/>
-                    <a:pt x="3897" y="65025"/>
-                    <a:pt x="8524" y="69736"/>
-                  </a:cubicBezTo>
-                  <a:cubicBezTo>
-                    <a:pt x="13152" y="74446"/>
-                    <a:pt x="17049" y="63650"/>
-                    <a:pt x="17049" y="45661"/>
+                    <a:pt x="21198" y="27558"/>
+                    <a:pt x="16353" y="10296"/>
+                    <a:pt x="10599" y="5148"/>
+                  </a:cubicBezTo>
+                  <a:cubicBezTo>
+                    <a:pt x="4845" y="0"/>
+                    <a:pt x="0" y="9085"/>
+                    <a:pt x="0" y="25438"/>
+                  </a:cubicBezTo>
+                  <a:cubicBezTo>
+                    <a:pt x="0" y="41791"/>
+                    <a:pt x="4845" y="59053"/>
+                    <a:pt x="10599" y="64201"/>
+                  </a:cubicBezTo>
+                  <a:cubicBezTo>
+                    <a:pt x="16353" y="69349"/>
+                    <a:pt x="21198" y="60264"/>
+                    <a:pt x="21198" y="43911"/>
                   </a:cubicBezTo>
                   <a:close/>
                 </a:path>
@@ -3147,14 +3325,14 @@
         </p:sp>
         <p:sp>
           <p:nvSpPr>
-            <p:cNvPr id="44" name="right Speaker column 2 row 2 15"/>
+            <p:cNvPr id="49" name="right Speaker column 2 row 1 12"/>
             <p:cNvSpPr/>
             <p:nvPr/>
           </p:nvSpPr>
           <p:spPr>
             <a:xfrm>
-              <a:off x="8332975" y="2277647"/>
-              <a:ext cx="17049" cy="75039"/>
+              <a:off x="8330455" y="1870380"/>
+              <a:ext cx="21198" cy="69955"/>
             </a:xfrm>
             <a:custGeom>
               <a:avLst/>
@@ -3163,29 +3341,29 @@
               <a:cxnLst/>
               <a:rect l="0" t="0" r="r" b="b"/>
               <a:pathLst>
-                <a:path w="17049" h="75039" fill="norm">
+                <a:path w="21198" h="69955" fill="norm">
                   <a:moveTo>
-                    <a:pt x="17049" y="45889"/>
+                    <a:pt x="21198" y="44214"/>
                   </a:moveTo>
                   <a:cubicBezTo>
-                    <a:pt x="17049" y="27900"/>
-                    <a:pt x="13152" y="9393"/>
-                    <a:pt x="8524" y="4697"/>
-                  </a:cubicBezTo>
-                  <a:cubicBezTo>
-                    <a:pt x="3897" y="0"/>
-                    <a:pt x="0" y="10827"/>
-                    <a:pt x="0" y="28839"/>
-                  </a:cubicBezTo>
-                  <a:cubicBezTo>
-                    <a:pt x="0" y="46851"/>
-                    <a:pt x="3897" y="65025"/>
-                    <a:pt x="8524" y="70032"/>
-                  </a:cubicBezTo>
-                  <a:cubicBezTo>
-                    <a:pt x="13152" y="75039"/>
-                    <a:pt x="17049" y="63878"/>
-                    <a:pt x="17049" y="45889"/>
+                    <a:pt x="21198" y="27861"/>
+                    <a:pt x="16353" y="10296"/>
+                    <a:pt x="10599" y="5148"/>
+                  </a:cubicBezTo>
+                  <a:cubicBezTo>
+                    <a:pt x="4845" y="0"/>
+                    <a:pt x="0" y="9085"/>
+                    <a:pt x="0" y="25438"/>
+                  </a:cubicBezTo>
+                  <a:cubicBezTo>
+                    <a:pt x="0" y="41791"/>
+                    <a:pt x="4845" y="59053"/>
+                    <a:pt x="10599" y="64504"/>
+                  </a:cubicBezTo>
+                  <a:cubicBezTo>
+                    <a:pt x="16353" y="69955"/>
+                    <a:pt x="21198" y="60567"/>
+                    <a:pt x="21198" y="44214"/>
                   </a:cubicBezTo>
                   <a:close/>
                 </a:path>
@@ -3202,14 +3380,14 @@
         </p:sp>
         <p:sp>
           <p:nvSpPr>
-            <p:cNvPr id="45" name="right Speaker column 2 row 2 16"/>
+            <p:cNvPr id="50" name="right Speaker column 2 row 1 13"/>
             <p:cNvSpPr/>
             <p:nvPr/>
           </p:nvSpPr>
           <p:spPr>
             <a:xfrm>
-              <a:off x="8332975" y="2384021"/>
-              <a:ext cx="17049" cy="74298"/>
+              <a:off x="8330455" y="1966984"/>
+              <a:ext cx="21198" cy="69349"/>
             </a:xfrm>
             <a:custGeom>
               <a:avLst/>
@@ -3218,29 +3396,29 @@
               <a:cxnLst/>
               <a:rect l="0" t="0" r="r" b="b"/>
               <a:pathLst>
-                <a:path w="17049" h="74298" fill="norm">
+                <a:path w="21198" h="69349" fill="norm">
                   <a:moveTo>
-                    <a:pt x="17049" y="45783"/>
+                    <a:pt x="21198" y="44214"/>
                   </a:moveTo>
                   <a:cubicBezTo>
-                    <a:pt x="17049" y="27794"/>
-                    <a:pt x="13152" y="9319"/>
-                    <a:pt x="8524" y="4659"/>
-                  </a:cubicBezTo>
-                  <a:cubicBezTo>
-                    <a:pt x="3897" y="0"/>
-                    <a:pt x="0" y="10524"/>
-                    <a:pt x="0" y="28537"/>
-                  </a:cubicBezTo>
-                  <a:cubicBezTo>
-                    <a:pt x="0" y="46549"/>
-                    <a:pt x="3897" y="65025"/>
-                    <a:pt x="8524" y="69661"/>
-                  </a:cubicBezTo>
-                  <a:cubicBezTo>
-                    <a:pt x="13152" y="74298"/>
-                    <a:pt x="17049" y="63772"/>
-                    <a:pt x="17049" y="45783"/>
+                    <a:pt x="21198" y="27861"/>
+                    <a:pt x="16353" y="10296"/>
+                    <a:pt x="10599" y="5148"/>
+                  </a:cubicBezTo>
+                  <a:cubicBezTo>
+                    <a:pt x="4845" y="0"/>
+                    <a:pt x="0" y="8782"/>
+                    <a:pt x="0" y="25135"/>
+                  </a:cubicBezTo>
+                  <a:cubicBezTo>
+                    <a:pt x="0" y="41488"/>
+                    <a:pt x="4845" y="59053"/>
+                    <a:pt x="10599" y="64201"/>
+                  </a:cubicBezTo>
+                  <a:cubicBezTo>
+                    <a:pt x="16353" y="69349"/>
+                    <a:pt x="21198" y="60567"/>
+                    <a:pt x="21198" y="44214"/>
                   </a:cubicBezTo>
                   <a:close/>
                 </a:path>
@@ -3257,14 +3435,14 @@
         </p:sp>
         <p:sp>
           <p:nvSpPr>
-            <p:cNvPr id="46" name="right Speaker column 2 row 2 17"/>
+            <p:cNvPr id="51" name="right Speaker column 2 row 1 14"/>
             <p:cNvSpPr/>
             <p:nvPr/>
           </p:nvSpPr>
           <p:spPr>
             <a:xfrm>
-              <a:off x="8332975" y="2489395"/>
-              <a:ext cx="17049" cy="74557"/>
+              <a:off x="8330455" y="2062680"/>
+              <a:ext cx="21198" cy="69652"/>
             </a:xfrm>
             <a:custGeom>
               <a:avLst/>
@@ -3273,29 +3451,29 @@
               <a:cxnLst/>
               <a:rect l="0" t="0" r="r" b="b"/>
               <a:pathLst>
-                <a:path w="17049" h="74557" fill="norm">
+                <a:path w="21198" h="69652" fill="norm">
                   <a:moveTo>
-                    <a:pt x="17049" y="46345"/>
+                    <a:pt x="21198" y="44820"/>
                   </a:moveTo>
                   <a:cubicBezTo>
-                    <a:pt x="17049" y="28356"/>
-                    <a:pt x="13152" y="9911"/>
-                    <a:pt x="8524" y="4956"/>
-                  </a:cubicBezTo>
-                  <a:cubicBezTo>
-                    <a:pt x="3897" y="0"/>
-                    <a:pt x="0" y="10889"/>
-                    <a:pt x="0" y="28901"/>
-                  </a:cubicBezTo>
-                  <a:cubicBezTo>
-                    <a:pt x="0" y="46913"/>
-                    <a:pt x="3897" y="65358"/>
-                    <a:pt x="8524" y="69958"/>
-                  </a:cubicBezTo>
-                  <a:cubicBezTo>
-                    <a:pt x="13152" y="74557"/>
-                    <a:pt x="17049" y="64001"/>
-                    <a:pt x="17049" y="46012"/>
+                    <a:pt x="21198" y="28467"/>
+                    <a:pt x="16353" y="10902"/>
+                    <a:pt x="10599" y="5451"/>
+                  </a:cubicBezTo>
+                  <a:cubicBezTo>
+                    <a:pt x="4845" y="0"/>
+                    <a:pt x="0" y="9085"/>
+                    <a:pt x="0" y="25438"/>
+                  </a:cubicBezTo>
+                  <a:cubicBezTo>
+                    <a:pt x="0" y="41791"/>
+                    <a:pt x="4845" y="59356"/>
+                    <a:pt x="10599" y="64504"/>
+                  </a:cubicBezTo>
+                  <a:cubicBezTo>
+                    <a:pt x="16353" y="69652"/>
+                    <a:pt x="21198" y="60870"/>
+                    <a:pt x="21198" y="44517"/>
                   </a:cubicBezTo>
                   <a:close/>
                 </a:path>
@@ -3312,14 +3490,14 @@
         </p:sp>
         <p:sp>
           <p:nvSpPr>
-            <p:cNvPr id="47" name="right Speaker column 2 row 2 18"/>
+            <p:cNvPr id="52" name="right Speaker column 2 row 1 15"/>
             <p:cNvSpPr/>
             <p:nvPr/>
           </p:nvSpPr>
           <p:spPr>
             <a:xfrm>
-              <a:off x="8357087" y="1717766"/>
-              <a:ext cx="17049" cy="74324"/>
+              <a:off x="8360436" y="1365554"/>
+              <a:ext cx="21198" cy="69046"/>
             </a:xfrm>
             <a:custGeom>
               <a:avLst/>
@@ -3328,29 +3506,29 @@
               <a:cxnLst/>
               <a:rect l="0" t="0" r="r" b="b"/>
               <a:pathLst>
-                <a:path w="17049" h="74324" fill="norm">
+                <a:path w="21198" h="69046" fill="norm">
                   <a:moveTo>
-                    <a:pt x="17049" y="45404"/>
+                    <a:pt x="21198" y="43305"/>
                   </a:moveTo>
                   <a:cubicBezTo>
-                    <a:pt x="17049" y="27448"/>
-                    <a:pt x="13152" y="9131"/>
-                    <a:pt x="8524" y="4565"/>
-                  </a:cubicBezTo>
-                  <a:cubicBezTo>
-                    <a:pt x="3897" y="0"/>
-                    <a:pt x="0" y="10963"/>
-                    <a:pt x="0" y="28942"/>
-                  </a:cubicBezTo>
-                  <a:cubicBezTo>
-                    <a:pt x="0" y="46921"/>
-                    <a:pt x="3897" y="65239"/>
-                    <a:pt x="8524" y="69782"/>
-                  </a:cubicBezTo>
-                  <a:cubicBezTo>
-                    <a:pt x="13152" y="74324"/>
-                    <a:pt x="17049" y="63361"/>
-                    <a:pt x="17049" y="45404"/>
+                    <a:pt x="21198" y="26952"/>
+                    <a:pt x="16353" y="9691"/>
+                    <a:pt x="10599" y="4845"/>
+                  </a:cubicBezTo>
+                  <a:cubicBezTo>
+                    <a:pt x="4845" y="0"/>
+                    <a:pt x="0" y="9388"/>
+                    <a:pt x="0" y="25741"/>
+                  </a:cubicBezTo>
+                  <a:cubicBezTo>
+                    <a:pt x="0" y="42094"/>
+                    <a:pt x="4845" y="59356"/>
+                    <a:pt x="10599" y="64201"/>
+                  </a:cubicBezTo>
+                  <a:cubicBezTo>
+                    <a:pt x="16353" y="69046"/>
+                    <a:pt x="21198" y="59659"/>
+                    <a:pt x="21198" y="43305"/>
                   </a:cubicBezTo>
                   <a:close/>
                 </a:path>
@@ -3367,14 +3545,14 @@
         </p:sp>
         <p:sp>
           <p:nvSpPr>
-            <p:cNvPr id="48" name="right Speaker column 2 row 2 19"/>
+            <p:cNvPr id="53" name="right Speaker column 2 row 1 16"/>
             <p:cNvSpPr/>
             <p:nvPr/>
           </p:nvSpPr>
           <p:spPr>
             <a:xfrm>
-              <a:off x="8357087" y="1824279"/>
-              <a:ext cx="17049" cy="74251"/>
+              <a:off x="8360436" y="1462461"/>
+              <a:ext cx="21198" cy="69046"/>
             </a:xfrm>
             <a:custGeom>
               <a:avLst/>
@@ -3383,29 +3561,29 @@
               <a:cxnLst/>
               <a:rect l="0" t="0" r="r" b="b"/>
               <a:pathLst>
-                <a:path w="17049" h="74251" fill="norm">
+                <a:path w="21198" h="69046" fill="norm">
                   <a:moveTo>
-                    <a:pt x="17049" y="45299"/>
+                    <a:pt x="21198" y="43305"/>
                   </a:moveTo>
                   <a:cubicBezTo>
-                    <a:pt x="17049" y="27343"/>
-                    <a:pt x="13152" y="9057"/>
-                    <a:pt x="8524" y="4528"/>
-                  </a:cubicBezTo>
-                  <a:cubicBezTo>
-                    <a:pt x="3897" y="0"/>
-                    <a:pt x="0" y="10994"/>
-                    <a:pt x="0" y="28973"/>
-                  </a:cubicBezTo>
-                  <a:cubicBezTo>
-                    <a:pt x="0" y="46953"/>
-                    <a:pt x="3897" y="65239"/>
-                    <a:pt x="8524" y="69745"/>
-                  </a:cubicBezTo>
-                  <a:cubicBezTo>
-                    <a:pt x="13152" y="74251"/>
-                    <a:pt x="17049" y="63256"/>
-                    <a:pt x="17049" y="45299"/>
+                    <a:pt x="21198" y="26952"/>
+                    <a:pt x="16353" y="9691"/>
+                    <a:pt x="10599" y="4845"/>
+                  </a:cubicBezTo>
+                  <a:cubicBezTo>
+                    <a:pt x="4845" y="0"/>
+                    <a:pt x="0" y="9388"/>
+                    <a:pt x="0" y="25741"/>
+                  </a:cubicBezTo>
+                  <a:cubicBezTo>
+                    <a:pt x="0" y="42094"/>
+                    <a:pt x="4845" y="59356"/>
+                    <a:pt x="10599" y="64201"/>
+                  </a:cubicBezTo>
+                  <a:cubicBezTo>
+                    <a:pt x="16353" y="69046"/>
+                    <a:pt x="21198" y="59659"/>
+                    <a:pt x="21198" y="43305"/>
                   </a:cubicBezTo>
                   <a:close/>
                 </a:path>
@@ -3422,14 +3600,14 @@
         </p:sp>
         <p:sp>
           <p:nvSpPr>
-            <p:cNvPr id="49" name="right Speaker column 2 row 2 20"/>
+            <p:cNvPr id="54" name="right Speaker column 2 row 1 17"/>
             <p:cNvSpPr/>
             <p:nvPr/>
           </p:nvSpPr>
           <p:spPr>
             <a:xfrm>
-              <a:off x="8357087" y="1930126"/>
-              <a:ext cx="17049" cy="74842"/>
+              <a:off x="8360436" y="1558762"/>
+              <a:ext cx="21198" cy="69652"/>
             </a:xfrm>
             <a:custGeom>
               <a:avLst/>
@@ -3438,29 +3616,29 @@
               <a:cxnLst/>
               <a:rect l="0" t="0" r="r" b="b"/>
               <a:pathLst>
-                <a:path w="17049" h="74842" fill="norm">
+                <a:path w="21198" h="69652" fill="norm">
                   <a:moveTo>
-                    <a:pt x="17049" y="45860"/>
+                    <a:pt x="21198" y="43911"/>
                   </a:moveTo>
                   <a:cubicBezTo>
-                    <a:pt x="17049" y="27904"/>
-                    <a:pt x="13152" y="9648"/>
-                    <a:pt x="8524" y="4824"/>
-                  </a:cubicBezTo>
-                  <a:cubicBezTo>
-                    <a:pt x="3897" y="0"/>
-                    <a:pt x="0" y="11025"/>
-                    <a:pt x="0" y="29004"/>
-                  </a:cubicBezTo>
-                  <a:cubicBezTo>
-                    <a:pt x="0" y="46984"/>
-                    <a:pt x="3897" y="65239"/>
-                    <a:pt x="8524" y="70041"/>
-                  </a:cubicBezTo>
-                  <a:cubicBezTo>
-                    <a:pt x="13152" y="74842"/>
-                    <a:pt x="17049" y="63816"/>
-                    <a:pt x="17049" y="45860"/>
+                    <a:pt x="21198" y="27558"/>
+                    <a:pt x="16353" y="10296"/>
+                    <a:pt x="10599" y="5148"/>
+                  </a:cubicBezTo>
+                  <a:cubicBezTo>
+                    <a:pt x="4845" y="0"/>
+                    <a:pt x="0" y="9388"/>
+                    <a:pt x="0" y="25741"/>
+                  </a:cubicBezTo>
+                  <a:cubicBezTo>
+                    <a:pt x="0" y="42094"/>
+                    <a:pt x="4845" y="59356"/>
+                    <a:pt x="10599" y="64504"/>
+                  </a:cubicBezTo>
+                  <a:cubicBezTo>
+                    <a:pt x="16353" y="69652"/>
+                    <a:pt x="21198" y="60264"/>
+                    <a:pt x="21198" y="43911"/>
                   </a:cubicBezTo>
                   <a:close/>
                 </a:path>
@@ -3477,14 +3655,14 @@
         </p:sp>
         <p:sp>
           <p:nvSpPr>
-            <p:cNvPr id="50" name="right Speaker column 2 row 2 21"/>
+            <p:cNvPr id="55" name="right Speaker column 2 row 1 18"/>
             <p:cNvSpPr/>
             <p:nvPr/>
           </p:nvSpPr>
           <p:spPr>
             <a:xfrm>
-              <a:off x="8357087" y="2036640"/>
-              <a:ext cx="17049" cy="74436"/>
+              <a:off x="8360436" y="1655670"/>
+              <a:ext cx="21198" cy="69349"/>
             </a:xfrm>
             <a:custGeom>
               <a:avLst/>
@@ -3493,29 +3671,29 @@
               <a:cxnLst/>
               <a:rect l="0" t="0" r="r" b="b"/>
               <a:pathLst>
-                <a:path w="17049" h="74436" fill="norm">
+                <a:path w="21198" h="69349" fill="norm">
                   <a:moveTo>
-                    <a:pt x="17049" y="45422"/>
+                    <a:pt x="21198" y="43608"/>
                   </a:moveTo>
                   <a:cubicBezTo>
-                    <a:pt x="17049" y="27466"/>
-                    <a:pt x="13152" y="8909"/>
-                    <a:pt x="8524" y="4455"/>
-                  </a:cubicBezTo>
-                  <a:cubicBezTo>
-                    <a:pt x="3897" y="0"/>
-                    <a:pt x="0" y="10723"/>
-                    <a:pt x="0" y="28702"/>
-                  </a:cubicBezTo>
-                  <a:cubicBezTo>
-                    <a:pt x="0" y="46682"/>
-                    <a:pt x="3897" y="64906"/>
-                    <a:pt x="8524" y="69671"/>
-                  </a:cubicBezTo>
-                  <a:cubicBezTo>
-                    <a:pt x="13152" y="74436"/>
-                    <a:pt x="17049" y="63379"/>
-                    <a:pt x="17049" y="45422"/>
+                    <a:pt x="21198" y="27255"/>
+                    <a:pt x="16353" y="9691"/>
+                    <a:pt x="10599" y="4845"/>
+                  </a:cubicBezTo>
+                  <a:cubicBezTo>
+                    <a:pt x="4845" y="0"/>
+                    <a:pt x="0" y="9085"/>
+                    <a:pt x="0" y="25438"/>
+                  </a:cubicBezTo>
+                  <a:cubicBezTo>
+                    <a:pt x="0" y="41791"/>
+                    <a:pt x="4845" y="59053"/>
+                    <a:pt x="10599" y="64201"/>
+                  </a:cubicBezTo>
+                  <a:cubicBezTo>
+                    <a:pt x="16353" y="69349"/>
+                    <a:pt x="21198" y="59961"/>
+                    <a:pt x="21198" y="43608"/>
                   </a:cubicBezTo>
                   <a:close/>
                 </a:path>
@@ -3532,14 +3710,14 @@
         </p:sp>
         <p:sp>
           <p:nvSpPr>
-            <p:cNvPr id="51" name="right Speaker column 2 row 2 22"/>
+            <p:cNvPr id="56" name="right Speaker column 2 row 1 19"/>
             <p:cNvSpPr/>
             <p:nvPr/>
           </p:nvSpPr>
           <p:spPr>
             <a:xfrm>
-              <a:off x="8357087" y="2142487"/>
-              <a:ext cx="17049" cy="74695"/>
+              <a:off x="8360436" y="1751971"/>
+              <a:ext cx="21198" cy="69652"/>
             </a:xfrm>
             <a:custGeom>
               <a:avLst/>
@@ -3548,29 +3726,29 @@
               <a:cxnLst/>
               <a:rect l="0" t="0" r="r" b="b"/>
               <a:pathLst>
-                <a:path w="17049" h="74695" fill="norm">
+                <a:path w="21198" h="69652" fill="norm">
                   <a:moveTo>
-                    <a:pt x="17049" y="45983"/>
+                    <a:pt x="21198" y="44214"/>
                   </a:moveTo>
                   <a:cubicBezTo>
-                    <a:pt x="17049" y="28027"/>
-                    <a:pt x="13152" y="9501"/>
-                    <a:pt x="8524" y="4751"/>
-                  </a:cubicBezTo>
-                  <a:cubicBezTo>
-                    <a:pt x="3897" y="0"/>
-                    <a:pt x="0" y="10754"/>
-                    <a:pt x="0" y="28734"/>
-                  </a:cubicBezTo>
-                  <a:cubicBezTo>
-                    <a:pt x="0" y="46713"/>
-                    <a:pt x="3897" y="65239"/>
-                    <a:pt x="8524" y="69967"/>
-                  </a:cubicBezTo>
-                  <a:cubicBezTo>
-                    <a:pt x="13152" y="74695"/>
-                    <a:pt x="17049" y="63939"/>
-                    <a:pt x="17049" y="45983"/>
+                    <a:pt x="21198" y="27861"/>
+                    <a:pt x="16353" y="10296"/>
+                    <a:pt x="10599" y="5148"/>
+                  </a:cubicBezTo>
+                  <a:cubicBezTo>
+                    <a:pt x="4845" y="0"/>
+                    <a:pt x="0" y="9085"/>
+                    <a:pt x="0" y="25438"/>
+                  </a:cubicBezTo>
+                  <a:cubicBezTo>
+                    <a:pt x="0" y="41791"/>
+                    <a:pt x="4845" y="59356"/>
+                    <a:pt x="10599" y="64504"/>
+                  </a:cubicBezTo>
+                  <a:cubicBezTo>
+                    <a:pt x="16353" y="69652"/>
+                    <a:pt x="21198" y="60567"/>
+                    <a:pt x="21198" y="44214"/>
                   </a:cubicBezTo>
                   <a:close/>
                 </a:path>
@@ -3587,14 +3765,14 @@
         </p:sp>
         <p:sp>
           <p:nvSpPr>
-            <p:cNvPr id="52" name="right Speaker column 2 row 2 23"/>
+            <p:cNvPr id="57" name="right Speaker column 2 row 1 20"/>
             <p:cNvSpPr/>
             <p:nvPr/>
           </p:nvSpPr>
           <p:spPr>
             <a:xfrm>
-              <a:off x="8357087" y="2249000"/>
-              <a:ext cx="17049" cy="74621"/>
+              <a:off x="8360436" y="1848878"/>
+              <a:ext cx="21198" cy="69652"/>
             </a:xfrm>
             <a:custGeom>
               <a:avLst/>
@@ -3603,29 +3781,29 @@
               <a:cxnLst/>
               <a:rect l="0" t="0" r="r" b="b"/>
               <a:pathLst>
-                <a:path w="17049" h="74621" fill="norm">
+                <a:path w="21198" h="69652" fill="norm">
                   <a:moveTo>
-                    <a:pt x="17049" y="45878"/>
+                    <a:pt x="21198" y="44214"/>
                   </a:moveTo>
                   <a:cubicBezTo>
-                    <a:pt x="17049" y="27922"/>
-                    <a:pt x="13152" y="9427"/>
-                    <a:pt x="8524" y="4714"/>
-                  </a:cubicBezTo>
-                  <a:cubicBezTo>
-                    <a:pt x="3897" y="0"/>
-                    <a:pt x="0" y="10785"/>
-                    <a:pt x="0" y="28765"/>
-                  </a:cubicBezTo>
-                  <a:cubicBezTo>
-                    <a:pt x="0" y="46744"/>
-                    <a:pt x="3897" y="65239"/>
-                    <a:pt x="8524" y="69930"/>
-                  </a:cubicBezTo>
-                  <a:cubicBezTo>
-                    <a:pt x="13152" y="74621"/>
-                    <a:pt x="17049" y="63834"/>
-                    <a:pt x="17049" y="45878"/>
+                    <a:pt x="21198" y="27861"/>
+                    <a:pt x="16353" y="10296"/>
+                    <a:pt x="10599" y="5148"/>
+                  </a:cubicBezTo>
+                  <a:cubicBezTo>
+                    <a:pt x="4845" y="0"/>
+                    <a:pt x="0" y="9085"/>
+                    <a:pt x="0" y="25438"/>
+                  </a:cubicBezTo>
+                  <a:cubicBezTo>
+                    <a:pt x="0" y="41791"/>
+                    <a:pt x="4845" y="59356"/>
+                    <a:pt x="10599" y="64504"/>
+                  </a:cubicBezTo>
+                  <a:cubicBezTo>
+                    <a:pt x="16353" y="69652"/>
+                    <a:pt x="21198" y="60567"/>
+                    <a:pt x="21198" y="44214"/>
                   </a:cubicBezTo>
                   <a:close/>
                 </a:path>
@@ -3642,14 +3820,14 @@
         </p:sp>
         <p:sp>
           <p:nvSpPr>
-            <p:cNvPr id="53" name="right Speaker column 2 row 2 24"/>
+            <p:cNvPr id="58" name="right Speaker column 2 row 1 21"/>
             <p:cNvSpPr/>
             <p:nvPr/>
           </p:nvSpPr>
           <p:spPr>
             <a:xfrm>
-              <a:off x="8357087" y="2354847"/>
-              <a:ext cx="17049" cy="74880"/>
+              <a:off x="8360436" y="1945180"/>
+              <a:ext cx="21198" cy="69955"/>
             </a:xfrm>
             <a:custGeom>
               <a:avLst/>
@@ -3658,29 +3836,29 @@
               <a:cxnLst/>
               <a:rect l="0" t="0" r="r" b="b"/>
               <a:pathLst>
-                <a:path w="17049" h="74880" fill="norm">
+                <a:path w="21198" h="69955" fill="norm">
                   <a:moveTo>
-                    <a:pt x="17049" y="46439"/>
+                    <a:pt x="21198" y="44820"/>
                   </a:moveTo>
                   <a:cubicBezTo>
-                    <a:pt x="17049" y="28482"/>
-                    <a:pt x="13152" y="10019"/>
-                    <a:pt x="8524" y="5010"/>
-                  </a:cubicBezTo>
-                  <a:cubicBezTo>
-                    <a:pt x="3897" y="0"/>
-                    <a:pt x="0" y="10816"/>
-                    <a:pt x="0" y="29129"/>
-                  </a:cubicBezTo>
-                  <a:cubicBezTo>
-                    <a:pt x="0" y="47441"/>
-                    <a:pt x="3897" y="65572"/>
-                    <a:pt x="8524" y="70226"/>
-                  </a:cubicBezTo>
-                  <a:cubicBezTo>
-                    <a:pt x="13152" y="74880"/>
-                    <a:pt x="17049" y="64395"/>
-                    <a:pt x="17049" y="46439"/>
+                    <a:pt x="21198" y="28467"/>
+                    <a:pt x="16353" y="10902"/>
+                    <a:pt x="10599" y="5451"/>
+                  </a:cubicBezTo>
+                  <a:cubicBezTo>
+                    <a:pt x="4845" y="0"/>
+                    <a:pt x="0" y="9085"/>
+                    <a:pt x="0" y="25741"/>
+                  </a:cubicBezTo>
+                  <a:cubicBezTo>
+                    <a:pt x="0" y="42397"/>
+                    <a:pt x="4845" y="59659"/>
+                    <a:pt x="10599" y="64807"/>
+                  </a:cubicBezTo>
+                  <a:cubicBezTo>
+                    <a:pt x="16353" y="69955"/>
+                    <a:pt x="21198" y="61173"/>
+                    <a:pt x="21198" y="44820"/>
                   </a:cubicBezTo>
                   <a:close/>
                 </a:path>
@@ -3697,14 +3875,14 @@
         </p:sp>
         <p:sp>
           <p:nvSpPr>
-            <p:cNvPr id="54" name="right Speaker column 2 row 2 25"/>
+            <p:cNvPr id="59" name="right Speaker column 2 row 1 22"/>
             <p:cNvSpPr/>
             <p:nvPr/>
           </p:nvSpPr>
           <p:spPr>
             <a:xfrm>
-              <a:off x="8357087" y="2461028"/>
-              <a:ext cx="17049" cy="75139"/>
+              <a:off x="8360436" y="2041784"/>
+              <a:ext cx="21198" cy="70258"/>
             </a:xfrm>
             <a:custGeom>
               <a:avLst/>
@@ -3713,29 +3891,29 @@
               <a:cxnLst/>
               <a:rect l="0" t="0" r="r" b="b"/>
               <a:pathLst>
-                <a:path w="17049" h="75139" fill="norm">
+                <a:path w="21198" h="70258" fill="norm">
                   <a:moveTo>
-                    <a:pt x="17049" y="46334"/>
+                    <a:pt x="21198" y="44820"/>
                   </a:moveTo>
                   <a:cubicBezTo>
-                    <a:pt x="17049" y="28378"/>
-                    <a:pt x="13152" y="9945"/>
-                    <a:pt x="8524" y="4973"/>
-                  </a:cubicBezTo>
-                  <a:cubicBezTo>
-                    <a:pt x="3897" y="0"/>
-                    <a:pt x="0" y="10848"/>
-                    <a:pt x="0" y="28827"/>
-                  </a:cubicBezTo>
-                  <a:cubicBezTo>
-                    <a:pt x="0" y="46806"/>
-                    <a:pt x="3897" y="65239"/>
-                    <a:pt x="8524" y="70189"/>
-                  </a:cubicBezTo>
-                  <a:cubicBezTo>
-                    <a:pt x="13152" y="75139"/>
-                    <a:pt x="17049" y="64290"/>
-                    <a:pt x="17049" y="46334"/>
+                    <a:pt x="21198" y="28467"/>
+                    <a:pt x="16353" y="10902"/>
+                    <a:pt x="10599" y="5451"/>
+                  </a:cubicBezTo>
+                  <a:cubicBezTo>
+                    <a:pt x="4845" y="0"/>
+                    <a:pt x="0" y="9085"/>
+                    <a:pt x="0" y="25438"/>
+                  </a:cubicBezTo>
+                  <a:cubicBezTo>
+                    <a:pt x="0" y="41791"/>
+                    <a:pt x="4845" y="59356"/>
+                    <a:pt x="10599" y="64807"/>
+                  </a:cubicBezTo>
+                  <a:cubicBezTo>
+                    <a:pt x="16353" y="70258"/>
+                    <a:pt x="21198" y="61173"/>
+                    <a:pt x="21198" y="44820"/>
                   </a:cubicBezTo>
                   <a:close/>
                 </a:path>
@@ -3752,14 +3930,14 @@
         </p:sp>
         <p:sp>
           <p:nvSpPr>
-            <p:cNvPr id="55" name="right Speaker column 2 row 2 26"/>
+            <p:cNvPr id="60" name="right Speaker column 2 row 1 23"/>
             <p:cNvSpPr/>
             <p:nvPr/>
           </p:nvSpPr>
           <p:spPr>
             <a:xfrm>
-              <a:off x="8381442" y="1793882"/>
-              <a:ext cx="17049" cy="74456"/>
+              <a:off x="8390719" y="1438537"/>
+              <a:ext cx="21198" cy="69349"/>
             </a:xfrm>
             <a:custGeom>
               <a:avLst/>
@@ -3768,29 +3946,29 @@
               <a:cxnLst/>
               <a:rect l="0" t="0" r="r" b="b"/>
               <a:pathLst>
-                <a:path w="17049" h="74456" fill="norm">
+                <a:path w="21198" h="69349" fill="norm">
                   <a:moveTo>
-                    <a:pt x="17049" y="45619"/>
+                    <a:pt x="21198" y="43608"/>
                   </a:moveTo>
                   <a:cubicBezTo>
-                    <a:pt x="17049" y="27696"/>
-                    <a:pt x="13152" y="9090"/>
-                    <a:pt x="8524" y="4545"/>
-                  </a:cubicBezTo>
-                  <a:cubicBezTo>
-                    <a:pt x="3897" y="0"/>
-                    <a:pt x="0" y="10953"/>
-                    <a:pt x="0" y="28899"/>
-                  </a:cubicBezTo>
-                  <a:cubicBezTo>
-                    <a:pt x="0" y="46846"/>
-                    <a:pt x="3897" y="65120"/>
-                    <a:pt x="8524" y="69975"/>
-                  </a:cubicBezTo>
-                  <a:cubicBezTo>
-                    <a:pt x="13395" y="74456"/>
-                    <a:pt x="17049" y="63543"/>
-                    <a:pt x="17049" y="45619"/>
+                    <a:pt x="21198" y="27255"/>
+                    <a:pt x="16353" y="9691"/>
+                    <a:pt x="10599" y="4845"/>
+                  </a:cubicBezTo>
+                  <a:cubicBezTo>
+                    <a:pt x="4845" y="0"/>
+                    <a:pt x="0" y="9388"/>
+                    <a:pt x="0" y="25741"/>
+                  </a:cubicBezTo>
+                  <a:cubicBezTo>
+                    <a:pt x="0" y="42094"/>
+                    <a:pt x="4845" y="59356"/>
+                    <a:pt x="10599" y="64504"/>
+                  </a:cubicBezTo>
+                  <a:cubicBezTo>
+                    <a:pt x="16656" y="69349"/>
+                    <a:pt x="21198" y="59961"/>
+                    <a:pt x="21198" y="43608"/>
                   </a:cubicBezTo>
                   <a:close/>
                 </a:path>
@@ -3807,14 +3985,14 @@
         </p:sp>
         <p:sp>
           <p:nvSpPr>
-            <p:cNvPr id="56" name="right Speaker column 2 row 2 27"/>
+            <p:cNvPr id="61" name="right Speaker column 2 row 1 24"/>
             <p:cNvSpPr/>
             <p:nvPr/>
           </p:nvSpPr>
           <p:spPr>
             <a:xfrm>
-              <a:off x="8381442" y="1900908"/>
-              <a:ext cx="17049" cy="74338"/>
+              <a:off x="8390719" y="1536050"/>
+              <a:ext cx="21198" cy="69349"/>
             </a:xfrm>
             <a:custGeom>
               <a:avLst/>
@@ -3823,29 +4001,29 @@
               <a:cxnLst/>
               <a:rect l="0" t="0" r="r" b="b"/>
               <a:pathLst>
-                <a:path w="17049" h="74338" fill="norm">
+                <a:path w="21198" h="69349" fill="norm">
                   <a:moveTo>
-                    <a:pt x="17049" y="45472"/>
+                    <a:pt x="21198" y="43608"/>
                   </a:moveTo>
                   <a:cubicBezTo>
-                    <a:pt x="17049" y="27549"/>
-                    <a:pt x="13152" y="8974"/>
-                    <a:pt x="8524" y="4466"/>
-                  </a:cubicBezTo>
-                  <a:cubicBezTo>
-                    <a:pt x="3653" y="0"/>
-                    <a:pt x="0" y="10941"/>
-                    <a:pt x="0" y="28888"/>
-                  </a:cubicBezTo>
-                  <a:cubicBezTo>
-                    <a:pt x="0" y="46835"/>
-                    <a:pt x="3897" y="65410"/>
-                    <a:pt x="8524" y="69896"/>
-                  </a:cubicBezTo>
-                  <a:cubicBezTo>
-                    <a:pt x="13395" y="74338"/>
-                    <a:pt x="17049" y="63728"/>
-                    <a:pt x="17049" y="45472"/>
+                    <a:pt x="21198" y="27255"/>
+                    <a:pt x="16353" y="9691"/>
+                    <a:pt x="10599" y="4845"/>
+                  </a:cubicBezTo>
+                  <a:cubicBezTo>
+                    <a:pt x="4543" y="0"/>
+                    <a:pt x="0" y="9388"/>
+                    <a:pt x="0" y="25741"/>
+                  </a:cubicBezTo>
+                  <a:cubicBezTo>
+                    <a:pt x="0" y="42094"/>
+                    <a:pt x="4845" y="59659"/>
+                    <a:pt x="10599" y="64504"/>
+                  </a:cubicBezTo>
+                  <a:cubicBezTo>
+                    <a:pt x="16656" y="69349"/>
+                    <a:pt x="21198" y="60264"/>
+                    <a:pt x="21198" y="43608"/>
                   </a:cubicBezTo>
                   <a:close/>
                 </a:path>
@@ -3862,14 +4040,14 @@
         </p:sp>
         <p:sp>
           <p:nvSpPr>
-            <p:cNvPr id="57" name="right Speaker column 2 row 2 28"/>
+            <p:cNvPr id="62" name="right Speaker column 2 row 1 25"/>
             <p:cNvSpPr/>
             <p:nvPr/>
           </p:nvSpPr>
           <p:spPr>
             <a:xfrm>
-              <a:off x="8381442" y="2006897"/>
-              <a:ext cx="17049" cy="74593"/>
+              <a:off x="8390719" y="1632654"/>
+              <a:ext cx="21198" cy="69652"/>
             </a:xfrm>
             <a:custGeom>
               <a:avLst/>
@@ -3878,29 +4056,29 @@
               <a:cxnLst/>
               <a:rect l="0" t="0" r="r" b="b"/>
               <a:pathLst>
-                <a:path w="17049" h="74593" fill="norm">
+                <a:path w="21198" h="69652" fill="norm">
                   <a:moveTo>
-                    <a:pt x="17049" y="46031"/>
+                    <a:pt x="21198" y="44214"/>
                   </a:moveTo>
                   <a:cubicBezTo>
-                    <a:pt x="17049" y="28107"/>
-                    <a:pt x="13152" y="9563"/>
-                    <a:pt x="8524" y="4759"/>
-                  </a:cubicBezTo>
-                  <a:cubicBezTo>
-                    <a:pt x="3653" y="0"/>
-                    <a:pt x="0" y="10970"/>
-                    <a:pt x="0" y="28917"/>
-                  </a:cubicBezTo>
-                  <a:cubicBezTo>
-                    <a:pt x="0" y="46863"/>
-                    <a:pt x="3897" y="65408"/>
-                    <a:pt x="8524" y="69857"/>
-                  </a:cubicBezTo>
-                  <a:cubicBezTo>
-                    <a:pt x="13395" y="74593"/>
-                    <a:pt x="17049" y="63623"/>
-                    <a:pt x="17049" y="45699"/>
+                    <a:pt x="21198" y="27861"/>
+                    <a:pt x="16353" y="10296"/>
+                    <a:pt x="10599" y="5148"/>
+                  </a:cubicBezTo>
+                  <a:cubicBezTo>
+                    <a:pt x="4543" y="0"/>
+                    <a:pt x="0" y="9388"/>
+                    <a:pt x="0" y="25741"/>
+                  </a:cubicBezTo>
+                  <a:cubicBezTo>
+                    <a:pt x="0" y="42094"/>
+                    <a:pt x="4845" y="59659"/>
+                    <a:pt x="10599" y="64504"/>
+                  </a:cubicBezTo>
+                  <a:cubicBezTo>
+                    <a:pt x="16656" y="69652"/>
+                    <a:pt x="21198" y="60264"/>
+                    <a:pt x="21198" y="43911"/>
                   </a:cubicBezTo>
                   <a:close/>
                 </a:path>
@@ -3917,14 +4095,14 @@
         </p:sp>
         <p:sp>
           <p:nvSpPr>
-            <p:cNvPr id="58" name="right Speaker column 2 row 2 29"/>
+            <p:cNvPr id="63" name="right Speaker column 2 row 1 26"/>
             <p:cNvSpPr/>
             <p:nvPr/>
           </p:nvSpPr>
           <p:spPr>
             <a:xfrm>
-              <a:off x="8381442" y="2113551"/>
-              <a:ext cx="17049" cy="74848"/>
+              <a:off x="8390719" y="1729864"/>
+              <a:ext cx="21198" cy="69955"/>
             </a:xfrm>
             <a:custGeom>
               <a:avLst/>
@@ -3933,29 +4111,29 @@
               <a:cxnLst/>
               <a:rect l="0" t="0" r="r" b="b"/>
               <a:pathLst>
-                <a:path w="17049" h="74848" fill="norm">
+                <a:path w="21198" h="69955" fill="norm">
                   <a:moveTo>
-                    <a:pt x="17049" y="45925"/>
+                    <a:pt x="21198" y="44214"/>
                   </a:moveTo>
                   <a:cubicBezTo>
-                    <a:pt x="17049" y="28001"/>
-                    <a:pt x="13152" y="9487"/>
-                    <a:pt x="8524" y="4721"/>
-                  </a:cubicBezTo>
-                  <a:cubicBezTo>
-                    <a:pt x="3653" y="0"/>
-                    <a:pt x="0" y="10999"/>
-                    <a:pt x="0" y="28946"/>
-                  </a:cubicBezTo>
-                  <a:cubicBezTo>
-                    <a:pt x="0" y="46892"/>
-                    <a:pt x="3897" y="65406"/>
-                    <a:pt x="8524" y="70151"/>
-                  </a:cubicBezTo>
-                  <a:cubicBezTo>
-                    <a:pt x="13395" y="74848"/>
-                    <a:pt x="17049" y="64180"/>
-                    <a:pt x="17049" y="45925"/>
+                    <a:pt x="21198" y="27861"/>
+                    <a:pt x="16353" y="10296"/>
+                    <a:pt x="10599" y="5148"/>
+                  </a:cubicBezTo>
+                  <a:cubicBezTo>
+                    <a:pt x="4543" y="0"/>
+                    <a:pt x="0" y="9388"/>
+                    <a:pt x="0" y="25741"/>
+                  </a:cubicBezTo>
+                  <a:cubicBezTo>
+                    <a:pt x="0" y="42094"/>
+                    <a:pt x="4845" y="59659"/>
+                    <a:pt x="10599" y="64807"/>
+                  </a:cubicBezTo>
+                  <a:cubicBezTo>
+                    <a:pt x="16656" y="69955"/>
+                    <a:pt x="21198" y="60870"/>
+                    <a:pt x="21198" y="44214"/>
                   </a:cubicBezTo>
                   <a:close/>
                 </a:path>
@@ -3972,14 +4150,14 @@
         </p:sp>
         <p:sp>
           <p:nvSpPr>
-            <p:cNvPr id="59" name="right Speaker column 2 row 2 30"/>
+            <p:cNvPr id="64" name="right Speaker column 2 row 1 27"/>
             <p:cNvSpPr/>
             <p:nvPr/>
           </p:nvSpPr>
           <p:spPr>
             <a:xfrm>
-              <a:off x="8381442" y="2219491"/>
-              <a:ext cx="17049" cy="74819"/>
+              <a:off x="8390719" y="1826469"/>
+              <a:ext cx="21198" cy="69955"/>
             </a:xfrm>
             <a:custGeom>
               <a:avLst/>
@@ -3988,29 +4166,29 @@
               <a:cxnLst/>
               <a:rect l="0" t="0" r="r" b="b"/>
               <a:pathLst>
-                <a:path w="17049" h="74819" fill="norm">
+                <a:path w="21198" h="69955" fill="norm">
                   <a:moveTo>
-                    <a:pt x="17049" y="46531"/>
+                    <a:pt x="21198" y="44820"/>
                   </a:moveTo>
                   <a:cubicBezTo>
-                    <a:pt x="17049" y="28607"/>
-                    <a:pt x="13152" y="10125"/>
-                    <a:pt x="8524" y="5063"/>
-                  </a:cubicBezTo>
-                  <a:cubicBezTo>
-                    <a:pt x="3897" y="0"/>
-                    <a:pt x="0" y="11077"/>
-                    <a:pt x="0" y="29023"/>
-                  </a:cubicBezTo>
-                  <a:cubicBezTo>
-                    <a:pt x="0" y="46970"/>
-                    <a:pt x="3897" y="65453"/>
-                    <a:pt x="8524" y="70161"/>
-                  </a:cubicBezTo>
-                  <a:cubicBezTo>
-                    <a:pt x="13395" y="74819"/>
-                    <a:pt x="17049" y="64123"/>
-                    <a:pt x="17049" y="46199"/>
+                    <a:pt x="21198" y="28467"/>
+                    <a:pt x="16353" y="10902"/>
+                    <a:pt x="10599" y="5451"/>
+                  </a:cubicBezTo>
+                  <a:cubicBezTo>
+                    <a:pt x="4845" y="0"/>
+                    <a:pt x="0" y="9388"/>
+                    <a:pt x="0" y="25741"/>
+                  </a:cubicBezTo>
+                  <a:cubicBezTo>
+                    <a:pt x="0" y="42094"/>
+                    <a:pt x="4845" y="59659"/>
+                    <a:pt x="10599" y="64807"/>
+                  </a:cubicBezTo>
+                  <a:cubicBezTo>
+                    <a:pt x="16656" y="69955"/>
+                    <a:pt x="21198" y="60870"/>
+                    <a:pt x="21198" y="44517"/>
                   </a:cubicBezTo>
                   <a:close/>
                 </a:path>
@@ -4027,14 +4205,14 @@
         </p:sp>
         <p:sp>
           <p:nvSpPr>
-            <p:cNvPr id="60" name="right Speaker column 2 row 2 31"/>
+            <p:cNvPr id="65" name="right Speaker column 2 row 1 28"/>
             <p:cNvSpPr/>
             <p:nvPr/>
           </p:nvSpPr>
           <p:spPr>
             <a:xfrm>
-              <a:off x="8381442" y="2326525"/>
-              <a:ext cx="17049" cy="75025"/>
+              <a:off x="8390719" y="1923982"/>
+              <a:ext cx="21198" cy="70258"/>
             </a:xfrm>
             <a:custGeom>
               <a:avLst/>
@@ -4043,29 +4221,29 @@
               <a:cxnLst/>
               <a:rect l="0" t="0" r="r" b="b"/>
               <a:pathLst>
-                <a:path w="17049" h="75025" fill="norm">
+                <a:path w="21198" h="70258" fill="norm">
                   <a:moveTo>
-                    <a:pt x="17049" y="46044"/>
+                    <a:pt x="21198" y="44517"/>
                   </a:moveTo>
                   <a:cubicBezTo>
-                    <a:pt x="17049" y="28121"/>
-                    <a:pt x="13152" y="9337"/>
-                    <a:pt x="8524" y="4643"/>
-                  </a:cubicBezTo>
-                  <a:cubicBezTo>
-                    <a:pt x="3653" y="0"/>
-                    <a:pt x="0" y="10725"/>
-                    <a:pt x="0" y="28672"/>
-                  </a:cubicBezTo>
-                  <a:cubicBezTo>
-                    <a:pt x="0" y="46618"/>
-                    <a:pt x="3897" y="65070"/>
-                    <a:pt x="8524" y="70074"/>
-                  </a:cubicBezTo>
-                  <a:cubicBezTo>
-                    <a:pt x="13395" y="75025"/>
-                    <a:pt x="17049" y="64300"/>
-                    <a:pt x="17049" y="46044"/>
+                    <a:pt x="21198" y="28164"/>
+                    <a:pt x="16353" y="10296"/>
+                    <a:pt x="10599" y="5148"/>
+                  </a:cubicBezTo>
+                  <a:cubicBezTo>
+                    <a:pt x="4543" y="0"/>
+                    <a:pt x="0" y="9085"/>
+                    <a:pt x="0" y="25438"/>
+                  </a:cubicBezTo>
+                  <a:cubicBezTo>
+                    <a:pt x="0" y="41791"/>
+                    <a:pt x="4845" y="59356"/>
+                    <a:pt x="10599" y="64807"/>
+                  </a:cubicBezTo>
+                  <a:cubicBezTo>
+                    <a:pt x="16656" y="70258"/>
+                    <a:pt x="21198" y="61173"/>
+                    <a:pt x="21198" y="44517"/>
                   </a:cubicBezTo>
                   <a:close/>
                 </a:path>
@@ -4082,14 +4260,14 @@
         </p:sp>
         <p:sp>
           <p:nvSpPr>
-            <p:cNvPr id="61" name="right Speaker column 2 row 2 32"/>
+            <p:cNvPr id="66" name="right Speaker column 2 row 1 29"/>
             <p:cNvSpPr/>
             <p:nvPr/>
           </p:nvSpPr>
           <p:spPr>
             <a:xfrm>
-              <a:off x="8381442" y="2432846"/>
-              <a:ext cx="17049" cy="74948"/>
+              <a:off x="8390719" y="2020889"/>
+              <a:ext cx="21198" cy="70258"/>
             </a:xfrm>
             <a:custGeom>
               <a:avLst/>
@@ -4098,29 +4276,29 @@
               <a:cxnLst/>
               <a:rect l="0" t="0" r="r" b="b"/>
               <a:pathLst>
-                <a:path w="17049" h="74948" fill="norm">
+                <a:path w="21198" h="70258" fill="norm">
                   <a:moveTo>
-                    <a:pt x="17049" y="46270"/>
+                    <a:pt x="21198" y="44820"/>
                   </a:moveTo>
                   <a:cubicBezTo>
-                    <a:pt x="17049" y="28347"/>
-                    <a:pt x="13152" y="9594"/>
-                    <a:pt x="8524" y="4937"/>
-                  </a:cubicBezTo>
-                  <a:cubicBezTo>
-                    <a:pt x="3653" y="0"/>
-                    <a:pt x="0" y="10754"/>
-                    <a:pt x="0" y="28701"/>
-                  </a:cubicBezTo>
-                  <a:cubicBezTo>
-                    <a:pt x="0" y="46647"/>
-                    <a:pt x="3897" y="65401"/>
-                    <a:pt x="8524" y="70035"/>
-                  </a:cubicBezTo>
-                  <a:cubicBezTo>
-                    <a:pt x="13395" y="74948"/>
-                    <a:pt x="17049" y="64194"/>
-                    <a:pt x="17049" y="46270"/>
+                    <a:pt x="21198" y="28467"/>
+                    <a:pt x="16353" y="10599"/>
+                    <a:pt x="10599" y="5451"/>
+                  </a:cubicBezTo>
+                  <a:cubicBezTo>
+                    <a:pt x="4543" y="0"/>
+                    <a:pt x="0" y="9085"/>
+                    <a:pt x="0" y="25438"/>
+                  </a:cubicBezTo>
+                  <a:cubicBezTo>
+                    <a:pt x="0" y="41791"/>
+                    <a:pt x="4845" y="59659"/>
+                    <a:pt x="10599" y="64807"/>
+                  </a:cubicBezTo>
+                  <a:cubicBezTo>
+                    <a:pt x="16656" y="70258"/>
+                    <a:pt x="21198" y="61173"/>
+                    <a:pt x="21198" y="44820"/>
                   </a:cubicBezTo>
                   <a:close/>
                 </a:path>
@@ -4137,14 +4315,14 @@
         </p:sp>
         <p:sp>
           <p:nvSpPr>
-            <p:cNvPr id="62" name="right Speaker column 2 row 2 33"/>
+            <p:cNvPr id="67" name="right Speaker column 2 row 1 30"/>
             <p:cNvSpPr/>
             <p:nvPr/>
           </p:nvSpPr>
           <p:spPr>
             <a:xfrm>
-              <a:off x="8405554" y="1870502"/>
-              <a:ext cx="17536" cy="74587"/>
+              <a:off x="8420700" y="1512126"/>
+              <a:ext cx="21804" cy="69652"/>
             </a:xfrm>
             <a:custGeom>
               <a:avLst/>
@@ -4153,29 +4331,29 @@
               <a:cxnLst/>
               <a:rect l="0" t="0" r="r" b="b"/>
               <a:pathLst>
-                <a:path w="17536" h="74587" fill="norm">
+                <a:path w="21804" h="69652" fill="norm">
                   <a:moveTo>
-                    <a:pt x="17536" y="46083"/>
+                    <a:pt x="21804" y="44214"/>
                   </a:moveTo>
                   <a:cubicBezTo>
-                    <a:pt x="17536" y="27861"/>
-                    <a:pt x="13639" y="9630"/>
-                    <a:pt x="8768" y="4815"/>
-                  </a:cubicBezTo>
-                  <a:cubicBezTo>
-                    <a:pt x="3897" y="0"/>
-                    <a:pt x="0" y="11275"/>
-                    <a:pt x="0" y="29190"/>
-                  </a:cubicBezTo>
-                  <a:cubicBezTo>
-                    <a:pt x="0" y="47104"/>
-                    <a:pt x="3897" y="65667"/>
-                    <a:pt x="8768" y="70127"/>
-                  </a:cubicBezTo>
-                  <a:cubicBezTo>
-                    <a:pt x="13639" y="74587"/>
-                    <a:pt x="17536" y="63975"/>
-                    <a:pt x="17536" y="45752"/>
+                    <a:pt x="21804" y="27558"/>
+                    <a:pt x="16959" y="10296"/>
+                    <a:pt x="10902" y="5148"/>
+                  </a:cubicBezTo>
+                  <a:cubicBezTo>
+                    <a:pt x="4845" y="0"/>
+                    <a:pt x="0" y="9691"/>
+                    <a:pt x="0" y="26044"/>
+                  </a:cubicBezTo>
+                  <a:cubicBezTo>
+                    <a:pt x="0" y="42397"/>
+                    <a:pt x="4845" y="59961"/>
+                    <a:pt x="10902" y="64807"/>
+                  </a:cubicBezTo>
+                  <a:cubicBezTo>
+                    <a:pt x="16959" y="69652"/>
+                    <a:pt x="21804" y="60567"/>
+                    <a:pt x="21804" y="43911"/>
                   </a:cubicBezTo>
                   <a:close/>
                 </a:path>
@@ -4192,14 +4370,14 @@
         </p:sp>
         <p:sp>
           <p:nvSpPr>
-            <p:cNvPr id="63" name="right Speaker column 2 row 2 34"/>
+            <p:cNvPr id="68" name="right Speaker column 2 row 1 31"/>
             <p:cNvSpPr/>
             <p:nvPr/>
           </p:nvSpPr>
           <p:spPr>
             <a:xfrm>
-              <a:off x="8405554" y="1977294"/>
-              <a:ext cx="17536" cy="75173"/>
+              <a:off x="8420700" y="1609639"/>
+              <a:ext cx="21804" cy="70258"/>
             </a:xfrm>
             <a:custGeom>
               <a:avLst/>
@@ -4208,29 +4386,29 @@
               <a:cxnLst/>
               <a:rect l="0" t="0" r="r" b="b"/>
               <a:pathLst>
-                <a:path w="17536" h="75173" fill="norm">
+                <a:path w="21804" h="70258" fill="norm">
                   <a:moveTo>
-                    <a:pt x="17536" y="45976"/>
+                    <a:pt x="21804" y="44214"/>
                   </a:moveTo>
                   <a:cubicBezTo>
-                    <a:pt x="17536" y="27753"/>
-                    <a:pt x="13639" y="9553"/>
-                    <a:pt x="8768" y="4777"/>
-                  </a:cubicBezTo>
-                  <a:cubicBezTo>
-                    <a:pt x="3897" y="0"/>
-                    <a:pt x="0" y="10974"/>
-                    <a:pt x="0" y="29220"/>
-                  </a:cubicBezTo>
-                  <a:cubicBezTo>
-                    <a:pt x="0" y="47467"/>
-                    <a:pt x="3897" y="65667"/>
-                    <a:pt x="8768" y="70421"/>
-                  </a:cubicBezTo>
-                  <a:cubicBezTo>
-                    <a:pt x="13639" y="75173"/>
-                    <a:pt x="17536" y="64199"/>
-                    <a:pt x="17536" y="45976"/>
+                    <a:pt x="21804" y="27558"/>
+                    <a:pt x="16959" y="10296"/>
+                    <a:pt x="10902" y="5148"/>
+                  </a:cubicBezTo>
+                  <a:cubicBezTo>
+                    <a:pt x="4845" y="0"/>
+                    <a:pt x="0" y="9388"/>
+                    <a:pt x="0" y="26044"/>
+                  </a:cubicBezTo>
+                  <a:cubicBezTo>
+                    <a:pt x="0" y="42700"/>
+                    <a:pt x="4845" y="59961"/>
+                    <a:pt x="10902" y="65110"/>
+                  </a:cubicBezTo>
+                  <a:cubicBezTo>
+                    <a:pt x="16959" y="70258"/>
+                    <a:pt x="21804" y="60870"/>
+                    <a:pt x="21804" y="44214"/>
                   </a:cubicBezTo>
                   <a:close/>
                 </a:path>
@@ -4247,14 +4425,14 @@
         </p:sp>
         <p:sp>
           <p:nvSpPr>
-            <p:cNvPr id="64" name="right Speaker column 2 row 2 35"/>
+            <p:cNvPr id="69" name="right Speaker column 2 row 1 32"/>
             <p:cNvSpPr/>
             <p:nvPr/>
           </p:nvSpPr>
           <p:spPr>
             <a:xfrm>
-              <a:off x="8405554" y="2084750"/>
-              <a:ext cx="17536" cy="74433"/>
+              <a:off x="8420700" y="1707757"/>
+              <a:ext cx="21804" cy="69652"/>
             </a:xfrm>
             <a:custGeom>
               <a:avLst/>
@@ -4263,29 +4441,29 @@
               <a:cxnLst/>
               <a:rect l="0" t="0" r="r" b="b"/>
               <a:pathLst>
-                <a:path w="17536" h="74433" fill="norm">
+                <a:path w="21804" h="69652" fill="norm">
                   <a:moveTo>
-                    <a:pt x="17536" y="45537"/>
+                    <a:pt x="21804" y="43911"/>
                   </a:moveTo>
                   <a:cubicBezTo>
-                    <a:pt x="17536" y="27314"/>
-                    <a:pt x="13639" y="8813"/>
-                    <a:pt x="8768" y="4407"/>
-                  </a:cubicBezTo>
-                  <a:cubicBezTo>
-                    <a:pt x="3897" y="0"/>
-                    <a:pt x="0" y="10673"/>
-                    <a:pt x="0" y="28588"/>
-                  </a:cubicBezTo>
-                  <a:cubicBezTo>
-                    <a:pt x="0" y="46502"/>
-                    <a:pt x="3897" y="65004"/>
-                    <a:pt x="8768" y="69719"/>
-                  </a:cubicBezTo>
-                  <a:cubicBezTo>
-                    <a:pt x="13639" y="74433"/>
-                    <a:pt x="17536" y="63759"/>
-                    <a:pt x="17536" y="45537"/>
+                    <a:pt x="21804" y="27255"/>
+                    <a:pt x="16959" y="9691"/>
+                    <a:pt x="10902" y="4845"/>
+                  </a:cubicBezTo>
+                  <a:cubicBezTo>
+                    <a:pt x="4845" y="0"/>
+                    <a:pt x="0" y="9085"/>
+                    <a:pt x="0" y="25438"/>
+                  </a:cubicBezTo>
+                  <a:cubicBezTo>
+                    <a:pt x="0" y="41791"/>
+                    <a:pt x="4845" y="59356"/>
+                    <a:pt x="10902" y="64504"/>
+                  </a:cubicBezTo>
+                  <a:cubicBezTo>
+                    <a:pt x="16959" y="69652"/>
+                    <a:pt x="21804" y="60567"/>
+                    <a:pt x="21804" y="43911"/>
                   </a:cubicBezTo>
                   <a:close/>
                 </a:path>
@@ -4302,14 +4480,14 @@
         </p:sp>
         <p:sp>
           <p:nvSpPr>
-            <p:cNvPr id="65" name="right Speaker column 2 row 2 36"/>
+            <p:cNvPr id="70" name="right Speaker column 2 row 1 33"/>
             <p:cNvSpPr/>
             <p:nvPr/>
           </p:nvSpPr>
           <p:spPr>
             <a:xfrm>
-              <a:off x="8405554" y="2190879"/>
-              <a:ext cx="17536" cy="75020"/>
+              <a:off x="8420700" y="1804664"/>
+              <a:ext cx="21804" cy="70258"/>
             </a:xfrm>
             <a:custGeom>
               <a:avLst/>
@@ -4318,29 +4496,29 @@
               <a:cxnLst/>
               <a:rect l="0" t="0" r="r" b="b"/>
               <a:pathLst>
-                <a:path w="17536" h="75020" fill="norm">
+                <a:path w="21804" h="70258" fill="norm">
                   <a:moveTo>
-                    <a:pt x="17536" y="46093"/>
+                    <a:pt x="21804" y="44517"/>
                   </a:moveTo>
                   <a:cubicBezTo>
-                    <a:pt x="17536" y="27870"/>
-                    <a:pt x="13639" y="9400"/>
-                    <a:pt x="8768" y="4700"/>
-                  </a:cubicBezTo>
-                  <a:cubicBezTo>
-                    <a:pt x="3897" y="0"/>
-                    <a:pt x="0" y="10704"/>
-                    <a:pt x="0" y="28950"/>
-                  </a:cubicBezTo>
-                  <a:cubicBezTo>
-                    <a:pt x="0" y="47196"/>
-                    <a:pt x="3897" y="65667"/>
-                    <a:pt x="8768" y="70344"/>
-                  </a:cubicBezTo>
-                  <a:cubicBezTo>
-                    <a:pt x="13639" y="75020"/>
-                    <a:pt x="17536" y="64315"/>
-                    <a:pt x="17536" y="46093"/>
+                    <a:pt x="21804" y="27861"/>
+                    <a:pt x="16959" y="10296"/>
+                    <a:pt x="10902" y="5148"/>
+                  </a:cubicBezTo>
+                  <a:cubicBezTo>
+                    <a:pt x="4845" y="0"/>
+                    <a:pt x="0" y="9085"/>
+                    <a:pt x="0" y="25741"/>
+                  </a:cubicBezTo>
+                  <a:cubicBezTo>
+                    <a:pt x="0" y="42397"/>
+                    <a:pt x="4845" y="59961"/>
+                    <a:pt x="10902" y="65110"/>
+                  </a:cubicBezTo>
+                  <a:cubicBezTo>
+                    <a:pt x="16959" y="70258"/>
+                    <a:pt x="21804" y="61173"/>
+                    <a:pt x="21804" y="44517"/>
                   </a:cubicBezTo>
                   <a:close/>
                 </a:path>
@@ -4357,14 +4535,14 @@
         </p:sp>
         <p:sp>
           <p:nvSpPr>
-            <p:cNvPr id="66" name="right Speaker column 2 row 2 37"/>
+            <p:cNvPr id="71" name="right Speaker column 2 row 1 34"/>
             <p:cNvSpPr/>
             <p:nvPr/>
           </p:nvSpPr>
           <p:spPr>
             <a:xfrm>
-              <a:off x="8405554" y="2298003"/>
-              <a:ext cx="17536" cy="74612"/>
+              <a:off x="8420700" y="1902480"/>
+              <a:ext cx="21804" cy="69955"/>
             </a:xfrm>
             <a:custGeom>
               <a:avLst/>
@@ -4373,29 +4551,29 @@
               <a:cxnLst/>
               <a:rect l="0" t="0" r="r" b="b"/>
               <a:pathLst>
-                <a:path w="17536" h="74612" fill="norm">
+                <a:path w="21804" h="69955" fill="norm">
                   <a:moveTo>
-                    <a:pt x="17536" y="45985"/>
+                    <a:pt x="21804" y="44517"/>
                   </a:moveTo>
                   <a:cubicBezTo>
-                    <a:pt x="17536" y="27762"/>
-                    <a:pt x="13639" y="9323"/>
-                    <a:pt x="8768" y="4661"/>
-                  </a:cubicBezTo>
-                  <a:cubicBezTo>
-                    <a:pt x="3897" y="0"/>
-                    <a:pt x="0" y="10735"/>
-                    <a:pt x="0" y="28649"/>
-                  </a:cubicBezTo>
-                  <a:cubicBezTo>
-                    <a:pt x="0" y="46564"/>
-                    <a:pt x="3897" y="65336"/>
-                    <a:pt x="8768" y="69974"/>
-                  </a:cubicBezTo>
-                  <a:cubicBezTo>
-                    <a:pt x="13639" y="74612"/>
-                    <a:pt x="17536" y="63876"/>
-                    <a:pt x="17536" y="45985"/>
+                    <a:pt x="21804" y="27861"/>
+                    <a:pt x="16959" y="10296"/>
+                    <a:pt x="10902" y="5148"/>
+                  </a:cubicBezTo>
+                  <a:cubicBezTo>
+                    <a:pt x="4845" y="0"/>
+                    <a:pt x="0" y="9085"/>
+                    <a:pt x="0" y="25438"/>
+                  </a:cubicBezTo>
+                  <a:cubicBezTo>
+                    <a:pt x="0" y="41791"/>
+                    <a:pt x="4845" y="59659"/>
+                    <a:pt x="10902" y="64807"/>
+                  </a:cubicBezTo>
+                  <a:cubicBezTo>
+                    <a:pt x="16959" y="69955"/>
+                    <a:pt x="21804" y="60870"/>
+                    <a:pt x="21804" y="44517"/>
                   </a:cubicBezTo>
                   <a:close/>
                 </a:path>
@@ -4412,14 +4590,14 @@
         </p:sp>
         <p:sp>
           <p:nvSpPr>
-            <p:cNvPr id="67" name="right Speaker column 2 row 2 38"/>
+            <p:cNvPr id="72" name="right Speaker column 2 row 1 35"/>
             <p:cNvSpPr/>
             <p:nvPr/>
           </p:nvSpPr>
           <p:spPr>
             <a:xfrm>
-              <a:off x="8405554" y="2404132"/>
-              <a:ext cx="17536" cy="75530"/>
+              <a:off x="8420700" y="1999387"/>
+              <a:ext cx="21804" cy="70863"/>
             </a:xfrm>
             <a:custGeom>
               <a:avLst/>
@@ -4428,29 +4606,29 @@
               <a:cxnLst/>
               <a:rect l="0" t="0" r="r" b="b"/>
               <a:pathLst>
-                <a:path w="17536" h="75530" fill="norm">
+                <a:path w="21804" h="70863" fill="norm">
                   <a:moveTo>
-                    <a:pt x="17536" y="46541"/>
+                    <a:pt x="21804" y="45122"/>
                   </a:moveTo>
                   <a:cubicBezTo>
-                    <a:pt x="17536" y="28318"/>
-                    <a:pt x="13639" y="9909"/>
-                    <a:pt x="8768" y="4955"/>
-                  </a:cubicBezTo>
-                  <a:cubicBezTo>
-                    <a:pt x="3897" y="0"/>
-                    <a:pt x="0" y="10766"/>
-                    <a:pt x="0" y="29012"/>
-                  </a:cubicBezTo>
-                  <a:cubicBezTo>
-                    <a:pt x="0" y="47258"/>
-                    <a:pt x="3897" y="65667"/>
-                    <a:pt x="8768" y="70599"/>
-                  </a:cubicBezTo>
-                  <a:cubicBezTo>
-                    <a:pt x="13639" y="75530"/>
-                    <a:pt x="17536" y="64764"/>
-                    <a:pt x="17536" y="46541"/>
+                    <a:pt x="21804" y="28467"/>
+                    <a:pt x="16959" y="10902"/>
+                    <a:pt x="10902" y="5451"/>
+                  </a:cubicBezTo>
+                  <a:cubicBezTo>
+                    <a:pt x="4845" y="0"/>
+                    <a:pt x="0" y="9085"/>
+                    <a:pt x="0" y="25741"/>
+                  </a:cubicBezTo>
+                  <a:cubicBezTo>
+                    <a:pt x="0" y="42397"/>
+                    <a:pt x="4845" y="59961"/>
+                    <a:pt x="10902" y="65412"/>
+                  </a:cubicBezTo>
+                  <a:cubicBezTo>
+                    <a:pt x="16959" y="70863"/>
+                    <a:pt x="21804" y="61778"/>
+                    <a:pt x="21804" y="45122"/>
                   </a:cubicBezTo>
                   <a:close/>
                 </a:path>
@@ -4467,14 +4645,14 @@
         </p:sp>
         <p:sp>
           <p:nvSpPr>
-            <p:cNvPr id="68" name="right Speaker column 2 row 2 39"/>
+            <p:cNvPr id="73" name="right Speaker column 2 row 1 36"/>
             <p:cNvSpPr/>
             <p:nvPr/>
           </p:nvSpPr>
           <p:spPr>
             <a:xfrm>
-              <a:off x="8430396" y="1948122"/>
-              <a:ext cx="17536" cy="74426"/>
+              <a:off x="8451589" y="1586926"/>
+              <a:ext cx="21804" cy="69652"/>
             </a:xfrm>
             <a:custGeom>
               <a:avLst/>
@@ -4483,29 +4661,29 @@
               <a:cxnLst/>
               <a:rect l="0" t="0" r="r" b="b"/>
               <a:pathLst>
-                <a:path w="17536" h="74426" fill="norm">
+                <a:path w="21804" h="69652" fill="norm">
                   <a:moveTo>
-                    <a:pt x="17536" y="45634"/>
+                    <a:pt x="21804" y="43911"/>
                   </a:moveTo>
                   <a:cubicBezTo>
-                    <a:pt x="17536" y="27444"/>
-                    <a:pt x="13639" y="8926"/>
-                    <a:pt x="8768" y="4463"/>
-                  </a:cubicBezTo>
-                  <a:cubicBezTo>
-                    <a:pt x="3897" y="0"/>
-                    <a:pt x="0" y="10602"/>
-                    <a:pt x="0" y="28815"/>
-                  </a:cubicBezTo>
-                  <a:cubicBezTo>
-                    <a:pt x="0" y="47028"/>
-                    <a:pt x="3897" y="65547"/>
-                    <a:pt x="8768" y="69987"/>
-                  </a:cubicBezTo>
-                  <a:cubicBezTo>
-                    <a:pt x="13639" y="74426"/>
-                    <a:pt x="17536" y="63823"/>
-                    <a:pt x="17536" y="45634"/>
+                    <a:pt x="21804" y="27255"/>
+                    <a:pt x="16959" y="9691"/>
+                    <a:pt x="10902" y="4845"/>
+                  </a:cubicBezTo>
+                  <a:cubicBezTo>
+                    <a:pt x="4845" y="0"/>
+                    <a:pt x="0" y="9085"/>
+                    <a:pt x="0" y="25741"/>
+                  </a:cubicBezTo>
+                  <a:cubicBezTo>
+                    <a:pt x="0" y="42397"/>
+                    <a:pt x="4845" y="59961"/>
+                    <a:pt x="10902" y="64807"/>
+                  </a:cubicBezTo>
+                  <a:cubicBezTo>
+                    <a:pt x="16959" y="69652"/>
+                    <a:pt x="21804" y="60567"/>
+                    <a:pt x="21804" y="43911"/>
                   </a:cubicBezTo>
                   <a:close/>
                 </a:path>
@@ -4522,14 +4700,14 @@
         </p:sp>
         <p:sp>
           <p:nvSpPr>
-            <p:cNvPr id="69" name="right Speaker column 2 row 2 40"/>
+            <p:cNvPr id="74" name="right Speaker column 2 row 1 37"/>
             <p:cNvSpPr/>
             <p:nvPr/>
           </p:nvSpPr>
           <p:spPr>
             <a:xfrm>
-              <a:off x="8430396" y="2054719"/>
-              <a:ext cx="17536" cy="75343"/>
+              <a:off x="8451589" y="1684439"/>
+              <a:ext cx="21804" cy="70561"/>
             </a:xfrm>
             <a:custGeom>
               <a:avLst/>
@@ -4538,29 +4716,29 @@
               <a:cxnLst/>
               <a:rect l="0" t="0" r="r" b="b"/>
               <a:pathLst>
-                <a:path w="17536" h="75343" fill="norm">
+                <a:path w="21804" h="70561" fill="norm">
                   <a:moveTo>
-                    <a:pt x="17536" y="46189"/>
+                    <a:pt x="21804" y="44517"/>
                   </a:moveTo>
                   <a:cubicBezTo>
-                    <a:pt x="17536" y="28000"/>
-                    <a:pt x="13639" y="9511"/>
-                    <a:pt x="8768" y="4756"/>
-                  </a:cubicBezTo>
-                  <a:cubicBezTo>
-                    <a:pt x="3897" y="0"/>
-                    <a:pt x="0" y="10964"/>
-                    <a:pt x="0" y="29177"/>
-                  </a:cubicBezTo>
-                  <a:cubicBezTo>
-                    <a:pt x="0" y="47390"/>
-                    <a:pt x="3897" y="65878"/>
-                    <a:pt x="8768" y="70611"/>
-                  </a:cubicBezTo>
-                  <a:cubicBezTo>
-                    <a:pt x="13639" y="75343"/>
-                    <a:pt x="17536" y="64378"/>
-                    <a:pt x="17536" y="46189"/>
+                    <a:pt x="21804" y="27861"/>
+                    <a:pt x="16959" y="10296"/>
+                    <a:pt x="10902" y="5148"/>
+                  </a:cubicBezTo>
+                  <a:cubicBezTo>
+                    <a:pt x="4845" y="0"/>
+                    <a:pt x="0" y="9388"/>
+                    <a:pt x="0" y="26044"/>
+                  </a:cubicBezTo>
+                  <a:cubicBezTo>
+                    <a:pt x="0" y="42700"/>
+                    <a:pt x="4845" y="60264"/>
+                    <a:pt x="10902" y="65412"/>
+                  </a:cubicBezTo>
+                  <a:cubicBezTo>
+                    <a:pt x="16959" y="70561"/>
+                    <a:pt x="21804" y="61173"/>
+                    <a:pt x="21804" y="44517"/>
                   </a:cubicBezTo>
                   <a:close/>
                 </a:path>
@@ -4577,14 +4755,14 @@
         </p:sp>
         <p:sp>
           <p:nvSpPr>
-            <p:cNvPr id="70" name="right Speaker column 2 row 2 41"/>
+            <p:cNvPr id="75" name="right Speaker column 2 row 1 38"/>
             <p:cNvSpPr/>
             <p:nvPr/>
           </p:nvSpPr>
           <p:spPr>
             <a:xfrm>
-              <a:off x="8430396" y="2161978"/>
-              <a:ext cx="17536" cy="74936"/>
+              <a:off x="8451589" y="1782558"/>
+              <a:ext cx="21804" cy="70258"/>
             </a:xfrm>
             <a:custGeom>
               <a:avLst/>
@@ -4593,29 +4771,29 @@
               <a:cxnLst/>
               <a:rect l="0" t="0" r="r" b="b"/>
               <a:pathLst>
-                <a:path w="17536" h="74936" fill="norm">
+                <a:path w="21804" h="70258" fill="norm">
                   <a:moveTo>
-                    <a:pt x="17536" y="46082"/>
+                    <a:pt x="21804" y="44517"/>
                   </a:moveTo>
                   <a:cubicBezTo>
-                    <a:pt x="17536" y="27893"/>
-                    <a:pt x="13639" y="9435"/>
-                    <a:pt x="8768" y="4718"/>
-                  </a:cubicBezTo>
-                  <a:cubicBezTo>
-                    <a:pt x="3897" y="0"/>
-                    <a:pt x="0" y="10663"/>
-                    <a:pt x="0" y="28876"/>
-                  </a:cubicBezTo>
-                  <a:cubicBezTo>
-                    <a:pt x="0" y="47089"/>
-                    <a:pt x="3897" y="65547"/>
-                    <a:pt x="8768" y="70242"/>
-                  </a:cubicBezTo>
-                  <a:cubicBezTo>
-                    <a:pt x="13639" y="74936"/>
-                    <a:pt x="17536" y="64272"/>
-                    <a:pt x="17536" y="46082"/>
+                    <a:pt x="21804" y="27861"/>
+                    <a:pt x="16959" y="10296"/>
+                    <a:pt x="10902" y="5148"/>
+                  </a:cubicBezTo>
+                  <a:cubicBezTo>
+                    <a:pt x="4845" y="0"/>
+                    <a:pt x="0" y="9085"/>
+                    <a:pt x="0" y="25741"/>
+                  </a:cubicBezTo>
+                  <a:cubicBezTo>
+                    <a:pt x="0" y="42397"/>
+                    <a:pt x="4845" y="59961"/>
+                    <a:pt x="10902" y="65110"/>
+                  </a:cubicBezTo>
+                  <a:cubicBezTo>
+                    <a:pt x="16959" y="70258"/>
+                    <a:pt x="21804" y="61173"/>
+                    <a:pt x="21804" y="44517"/>
                   </a:cubicBezTo>
                   <a:close/>
                 </a:path>
@@ -4632,14 +4810,14 @@
         </p:sp>
         <p:sp>
           <p:nvSpPr>
-            <p:cNvPr id="71" name="right Speaker column 2 row 2 42"/>
+            <p:cNvPr id="76" name="right Speaker column 2 row 1 39"/>
             <p:cNvSpPr/>
             <p:nvPr/>
           </p:nvSpPr>
           <p:spPr>
             <a:xfrm>
-              <a:off x="8430396" y="2268907"/>
-              <a:ext cx="17536" cy="75521"/>
+              <a:off x="8451589" y="1880373"/>
+              <a:ext cx="21804" cy="70863"/>
             </a:xfrm>
             <a:custGeom>
               <a:avLst/>
@@ -4648,29 +4826,29 @@
               <a:cxnLst/>
               <a:rect l="0" t="0" r="r" b="b"/>
               <a:pathLst>
-                <a:path w="17536" h="75521" fill="norm">
+                <a:path w="21804" h="70863" fill="norm">
                   <a:moveTo>
-                    <a:pt x="17536" y="46306"/>
+                    <a:pt x="21804" y="44820"/>
                   </a:moveTo>
                   <a:cubicBezTo>
-                    <a:pt x="17536" y="28117"/>
-                    <a:pt x="13639" y="9359"/>
-                    <a:pt x="8768" y="4680"/>
-                  </a:cubicBezTo>
-                  <a:cubicBezTo>
-                    <a:pt x="3897" y="0"/>
-                    <a:pt x="0" y="10694"/>
-                    <a:pt x="0" y="28907"/>
-                  </a:cubicBezTo>
-                  <a:cubicBezTo>
-                    <a:pt x="0" y="47120"/>
-                    <a:pt x="3897" y="65547"/>
-                    <a:pt x="8768" y="70535"/>
-                  </a:cubicBezTo>
-                  <a:cubicBezTo>
-                    <a:pt x="13639" y="75521"/>
-                    <a:pt x="17536" y="64496"/>
-                    <a:pt x="17536" y="46306"/>
+                    <a:pt x="21804" y="28164"/>
+                    <a:pt x="16959" y="10296"/>
+                    <a:pt x="10902" y="5148"/>
+                  </a:cubicBezTo>
+                  <a:cubicBezTo>
+                    <a:pt x="4845" y="0"/>
+                    <a:pt x="0" y="9085"/>
+                    <a:pt x="0" y="25741"/>
+                  </a:cubicBezTo>
+                  <a:cubicBezTo>
+                    <a:pt x="0" y="42397"/>
+                    <a:pt x="4845" y="59961"/>
+                    <a:pt x="10902" y="65412"/>
+                  </a:cubicBezTo>
+                  <a:cubicBezTo>
+                    <a:pt x="16959" y="70863"/>
+                    <a:pt x="21804" y="61476"/>
+                    <a:pt x="21804" y="44820"/>
                   </a:cubicBezTo>
                   <a:close/>
                 </a:path>
@@ -4687,14 +4865,14 @@
         </p:sp>
         <p:sp>
           <p:nvSpPr>
-            <p:cNvPr id="72" name="right Speaker column 2 row 2 43"/>
+            <p:cNvPr id="77" name="right Speaker column 2 row 1 40"/>
             <p:cNvSpPr/>
             <p:nvPr/>
           </p:nvSpPr>
           <p:spPr>
             <a:xfrm>
-              <a:off x="8430396" y="2376166"/>
-              <a:ext cx="17536" cy="75114"/>
+              <a:off x="8451589" y="1978492"/>
+              <a:ext cx="21804" cy="70561"/>
             </a:xfrm>
             <a:custGeom>
               <a:avLst/>
@@ -4703,29 +4881,29 @@
               <a:cxnLst/>
               <a:rect l="0" t="0" r="r" b="b"/>
               <a:pathLst>
-                <a:path w="17536" h="75114" fill="norm">
+                <a:path w="21804" h="70561" fill="norm">
                   <a:moveTo>
-                    <a:pt x="17536" y="46199"/>
+                    <a:pt x="21804" y="44820"/>
                   </a:moveTo>
                   <a:cubicBezTo>
-                    <a:pt x="17536" y="28010"/>
-                    <a:pt x="13639" y="9283"/>
-                    <a:pt x="8768" y="4641"/>
-                  </a:cubicBezTo>
-                  <a:cubicBezTo>
-                    <a:pt x="3897" y="0"/>
-                    <a:pt x="0" y="10394"/>
-                    <a:pt x="0" y="28606"/>
-                  </a:cubicBezTo>
-                  <a:cubicBezTo>
-                    <a:pt x="0" y="46819"/>
-                    <a:pt x="3897" y="65216"/>
-                    <a:pt x="8768" y="70165"/>
-                  </a:cubicBezTo>
-                  <a:cubicBezTo>
-                    <a:pt x="13639" y="75114"/>
-                    <a:pt x="17536" y="64389"/>
-                    <a:pt x="17536" y="46199"/>
+                    <a:pt x="21804" y="28164"/>
+                    <a:pt x="16959" y="10296"/>
+                    <a:pt x="10902" y="5148"/>
+                  </a:cubicBezTo>
+                  <a:cubicBezTo>
+                    <a:pt x="4845" y="0"/>
+                    <a:pt x="0" y="8782"/>
+                    <a:pt x="0" y="25438"/>
+                  </a:cubicBezTo>
+                  <a:cubicBezTo>
+                    <a:pt x="0" y="42094"/>
+                    <a:pt x="4845" y="59659"/>
+                    <a:pt x="10902" y="65110"/>
+                  </a:cubicBezTo>
+                  <a:cubicBezTo>
+                    <a:pt x="16959" y="70561"/>
+                    <a:pt x="21804" y="61476"/>
+                    <a:pt x="21804" y="44820"/>
                   </a:cubicBezTo>
                   <a:close/>
                 </a:path>
@@ -4742,14 +4920,14 @@
         </p:sp>
         <p:sp>
           <p:nvSpPr>
-            <p:cNvPr id="73" name="right Speaker column 2 row 2 44"/>
+            <p:cNvPr id="78" name="right Speaker column 2 row 1 41"/>
             <p:cNvSpPr/>
             <p:nvPr/>
           </p:nvSpPr>
           <p:spPr>
             <a:xfrm>
-              <a:off x="8309106" y="2411994"/>
-              <a:ext cx="17049" cy="74993"/>
+              <a:off x="8300777" y="1987577"/>
+              <a:ext cx="21198" cy="69955"/>
             </a:xfrm>
             <a:custGeom>
               <a:avLst/>
@@ -4758,29 +4936,29 @@
               <a:cxnLst/>
               <a:rect l="0" t="0" r="r" b="b"/>
               <a:pathLst>
-                <a:path w="17049" h="74993" fill="norm">
+                <a:path w="21198" h="69955" fill="norm">
                   <a:moveTo>
-                    <a:pt x="0" y="28944"/>
+                    <a:pt x="0" y="25438"/>
                   </a:moveTo>
                   <a:cubicBezTo>
-                    <a:pt x="0" y="46989"/>
-                    <a:pt x="3653" y="65199"/>
-                    <a:pt x="8524" y="70096"/>
-                  </a:cubicBezTo>
-                  <a:cubicBezTo>
-                    <a:pt x="13395" y="74993"/>
-                    <a:pt x="17049" y="64149"/>
-                    <a:pt x="17049" y="46127"/>
-                  </a:cubicBezTo>
-                  <a:cubicBezTo>
-                    <a:pt x="17049" y="28106"/>
-                    <a:pt x="13152" y="9952"/>
-                    <a:pt x="8524" y="4976"/>
-                  </a:cubicBezTo>
-                  <a:cubicBezTo>
-                    <a:pt x="3897" y="0"/>
-                    <a:pt x="0" y="10899"/>
-                    <a:pt x="0" y="28944"/>
+                    <a:pt x="0" y="41791"/>
+                    <a:pt x="4543" y="59053"/>
+                    <a:pt x="10599" y="64504"/>
+                  </a:cubicBezTo>
+                  <a:cubicBezTo>
+                    <a:pt x="16656" y="69955"/>
+                    <a:pt x="21198" y="60870"/>
+                    <a:pt x="21198" y="44517"/>
+                  </a:cubicBezTo>
+                  <a:cubicBezTo>
+                    <a:pt x="21198" y="28164"/>
+                    <a:pt x="16353" y="10902"/>
+                    <a:pt x="10599" y="5451"/>
+                  </a:cubicBezTo>
+                  <a:cubicBezTo>
+                    <a:pt x="4845" y="0"/>
+                    <a:pt x="0" y="9085"/>
+                    <a:pt x="0" y="25438"/>
                   </a:cubicBezTo>
                   <a:close/>
                 </a:path>
@@ -4797,14 +4975,14 @@
         </p:sp>
         <p:sp>
           <p:nvSpPr>
-            <p:cNvPr id="74" name="right Speaker column 2 row 2 45"/>
+            <p:cNvPr id="79" name="right Speaker column 2 row 1 42"/>
             <p:cNvSpPr/>
             <p:nvPr/>
           </p:nvSpPr>
           <p:spPr>
             <a:xfrm>
-              <a:off x="8309106" y="2306763"/>
-              <a:ext cx="17049" cy="74068"/>
+              <a:off x="8300777" y="1892184"/>
+              <a:ext cx="21198" cy="69046"/>
             </a:xfrm>
             <a:custGeom>
               <a:avLst/>
@@ -4813,29 +4991,29 @@
               <a:cxnLst/>
               <a:rect l="0" t="0" r="r" b="b"/>
               <a:pathLst>
-                <a:path w="17049" h="74068" fill="norm">
+                <a:path w="21198" h="69046" fill="norm">
                   <a:moveTo>
-                    <a:pt x="0" y="28579"/>
+                    <a:pt x="0" y="25135"/>
                   </a:moveTo>
                   <a:cubicBezTo>
-                    <a:pt x="0" y="46624"/>
-                    <a:pt x="3653" y="64863"/>
-                    <a:pt x="8524" y="69465"/>
-                  </a:cubicBezTo>
-                  <a:cubicBezTo>
-                    <a:pt x="13395" y="74068"/>
-                    <a:pt x="17049" y="63587"/>
-                    <a:pt x="17049" y="45565"/>
-                  </a:cubicBezTo>
-                  <a:cubicBezTo>
-                    <a:pt x="17049" y="27544"/>
-                    <a:pt x="13152" y="9359"/>
-                    <a:pt x="8524" y="4679"/>
-                  </a:cubicBezTo>
-                  <a:cubicBezTo>
-                    <a:pt x="3897" y="0"/>
-                    <a:pt x="0" y="10868"/>
-                    <a:pt x="0" y="28579"/>
+                    <a:pt x="0" y="41488"/>
+                    <a:pt x="4543" y="58750"/>
+                    <a:pt x="10599" y="63898"/>
+                  </a:cubicBezTo>
+                  <a:cubicBezTo>
+                    <a:pt x="16656" y="69046"/>
+                    <a:pt x="21198" y="60264"/>
+                    <a:pt x="21198" y="43911"/>
+                  </a:cubicBezTo>
+                  <a:cubicBezTo>
+                    <a:pt x="21198" y="27558"/>
+                    <a:pt x="16353" y="10296"/>
+                    <a:pt x="10599" y="5148"/>
+                  </a:cubicBezTo>
+                  <a:cubicBezTo>
+                    <a:pt x="4845" y="0"/>
+                    <a:pt x="0" y="9085"/>
+                    <a:pt x="0" y="25135"/>
                   </a:cubicBezTo>
                   <a:close/>
                 </a:path>
@@ -4852,14 +5030,14 @@
         </p:sp>
         <p:sp>
           <p:nvSpPr>
-            <p:cNvPr id="75" name="right Speaker column 2 row 2 46"/>
+            <p:cNvPr id="80" name="right Speaker column 2 row 1 43"/>
             <p:cNvSpPr/>
             <p:nvPr/>
           </p:nvSpPr>
           <p:spPr>
             <a:xfrm>
-              <a:off x="8309106" y="2200863"/>
-              <a:ext cx="17049" cy="74479"/>
+              <a:off x="8300777" y="1796185"/>
+              <a:ext cx="21198" cy="69349"/>
             </a:xfrm>
             <a:custGeom>
               <a:avLst/>
@@ -4868,29 +5046,29 @@
               <a:cxnLst/>
               <a:rect l="0" t="0" r="r" b="b"/>
               <a:pathLst>
-                <a:path w="17049" h="74479" fill="norm">
+                <a:path w="21198" h="69349" fill="norm">
                   <a:moveTo>
-                    <a:pt x="0" y="28881"/>
+                    <a:pt x="0" y="25438"/>
                   </a:moveTo>
                   <a:cubicBezTo>
-                    <a:pt x="0" y="46926"/>
-                    <a:pt x="3653" y="65195"/>
-                    <a:pt x="8524" y="69837"/>
-                  </a:cubicBezTo>
-                  <a:cubicBezTo>
-                    <a:pt x="13395" y="74479"/>
-                    <a:pt x="17049" y="63693"/>
-                    <a:pt x="17049" y="45672"/>
-                  </a:cubicBezTo>
-                  <a:cubicBezTo>
-                    <a:pt x="17049" y="27650"/>
-                    <a:pt x="13152" y="9433"/>
-                    <a:pt x="8524" y="4717"/>
-                  </a:cubicBezTo>
-                  <a:cubicBezTo>
-                    <a:pt x="3897" y="0"/>
-                    <a:pt x="0" y="10836"/>
-                    <a:pt x="0" y="28881"/>
+                    <a:pt x="0" y="41791"/>
+                    <a:pt x="4543" y="59053"/>
+                    <a:pt x="10599" y="64201"/>
+                  </a:cubicBezTo>
+                  <a:cubicBezTo>
+                    <a:pt x="16656" y="69349"/>
+                    <a:pt x="21198" y="60264"/>
+                    <a:pt x="21198" y="43911"/>
+                  </a:cubicBezTo>
+                  <a:cubicBezTo>
+                    <a:pt x="21198" y="27558"/>
+                    <a:pt x="16353" y="10296"/>
+                    <a:pt x="10599" y="5148"/>
+                  </a:cubicBezTo>
+                  <a:cubicBezTo>
+                    <a:pt x="4845" y="0"/>
+                    <a:pt x="0" y="9085"/>
+                    <a:pt x="0" y="25438"/>
                   </a:cubicBezTo>
                   <a:close/>
                 </a:path>
@@ -4907,14 +5085,14 @@
         </p:sp>
         <p:sp>
           <p:nvSpPr>
-            <p:cNvPr id="76" name="right Speaker column 2 row 2 47"/>
+            <p:cNvPr id="81" name="right Speaker column 2 row 1 44"/>
             <p:cNvSpPr/>
             <p:nvPr/>
           </p:nvSpPr>
           <p:spPr>
             <a:xfrm>
-              <a:off x="8309106" y="2095632"/>
-              <a:ext cx="17049" cy="73554"/>
+              <a:off x="8300777" y="1700792"/>
+              <a:ext cx="21198" cy="68441"/>
             </a:xfrm>
             <a:custGeom>
               <a:avLst/>
@@ -4923,29 +5101,29 @@
               <a:cxnLst/>
               <a:rect l="0" t="0" r="r" b="b"/>
               <a:pathLst>
-                <a:path w="17049" h="73554" fill="norm">
+                <a:path w="21198" h="68441" fill="norm">
                   <a:moveTo>
-                    <a:pt x="0" y="28516"/>
+                    <a:pt x="0" y="25135"/>
                   </a:moveTo>
                   <a:cubicBezTo>
-                    <a:pt x="0" y="46561"/>
-                    <a:pt x="3653" y="64859"/>
-                    <a:pt x="8524" y="69206"/>
-                  </a:cubicBezTo>
-                  <a:cubicBezTo>
-                    <a:pt x="13395" y="73554"/>
-                    <a:pt x="17049" y="63131"/>
-                    <a:pt x="17049" y="45110"/>
-                  </a:cubicBezTo>
-                  <a:cubicBezTo>
-                    <a:pt x="17049" y="27088"/>
-                    <a:pt x="13152" y="8840"/>
-                    <a:pt x="8524" y="4420"/>
-                  </a:cubicBezTo>
-                  <a:cubicBezTo>
-                    <a:pt x="3897" y="0"/>
-                    <a:pt x="0" y="10805"/>
-                    <a:pt x="0" y="28516"/>
+                    <a:pt x="0" y="41488"/>
+                    <a:pt x="4543" y="58750"/>
+                    <a:pt x="10599" y="63595"/>
+                  </a:cubicBezTo>
+                  <a:cubicBezTo>
+                    <a:pt x="16656" y="68441"/>
+                    <a:pt x="21198" y="59659"/>
+                    <a:pt x="21198" y="43305"/>
+                  </a:cubicBezTo>
+                  <a:cubicBezTo>
+                    <a:pt x="21198" y="26952"/>
+                    <a:pt x="16353" y="9691"/>
+                    <a:pt x="10599" y="4845"/>
+                  </a:cubicBezTo>
+                  <a:cubicBezTo>
+                    <a:pt x="4845" y="0"/>
+                    <a:pt x="0" y="9085"/>
+                    <a:pt x="0" y="25135"/>
                   </a:cubicBezTo>
                   <a:close/>
                 </a:path>
@@ -4962,14 +5140,14 @@
         </p:sp>
         <p:sp>
           <p:nvSpPr>
-            <p:cNvPr id="77" name="right Speaker column 2 row 2 48"/>
+            <p:cNvPr id="82" name="right Speaker column 2 row 1 45"/>
             <p:cNvSpPr/>
             <p:nvPr/>
           </p:nvSpPr>
           <p:spPr>
             <a:xfrm>
-              <a:off x="8309106" y="1989733"/>
-              <a:ext cx="17049" cy="74298"/>
+              <a:off x="8300777" y="1604793"/>
+              <a:ext cx="21198" cy="69046"/>
             </a:xfrm>
             <a:custGeom>
               <a:avLst/>
@@ -4978,29 +5156,29 @@
               <a:cxnLst/>
               <a:rect l="0" t="0" r="r" b="b"/>
               <a:pathLst>
-                <a:path w="17049" h="74298" fill="norm">
+                <a:path w="21198" h="69046" fill="norm">
                   <a:moveTo>
-                    <a:pt x="0" y="28818"/>
+                    <a:pt x="0" y="25438"/>
                   </a:moveTo>
                   <a:cubicBezTo>
-                    <a:pt x="0" y="46863"/>
-                    <a:pt x="3653" y="64857"/>
-                    <a:pt x="8524" y="69578"/>
-                  </a:cubicBezTo>
-                  <a:cubicBezTo>
-                    <a:pt x="13395" y="74298"/>
-                    <a:pt x="17049" y="63237"/>
-                    <a:pt x="17049" y="45216"/>
-                  </a:cubicBezTo>
-                  <a:cubicBezTo>
-                    <a:pt x="17049" y="27194"/>
-                    <a:pt x="13152" y="8915"/>
-                    <a:pt x="8524" y="4458"/>
-                  </a:cubicBezTo>
-                  <a:cubicBezTo>
-                    <a:pt x="3897" y="0"/>
-                    <a:pt x="0" y="10773"/>
-                    <a:pt x="0" y="28818"/>
+                    <a:pt x="0" y="41791"/>
+                    <a:pt x="4543" y="58750"/>
+                    <a:pt x="10599" y="63898"/>
+                  </a:cubicBezTo>
+                  <a:cubicBezTo>
+                    <a:pt x="16656" y="69046"/>
+                    <a:pt x="21198" y="59659"/>
+                    <a:pt x="21198" y="43305"/>
+                  </a:cubicBezTo>
+                  <a:cubicBezTo>
+                    <a:pt x="21198" y="26952"/>
+                    <a:pt x="16353" y="9691"/>
+                    <a:pt x="10599" y="4845"/>
+                  </a:cubicBezTo>
+                  <a:cubicBezTo>
+                    <a:pt x="4845" y="0"/>
+                    <a:pt x="0" y="9085"/>
+                    <a:pt x="0" y="25438"/>
                   </a:cubicBezTo>
                   <a:close/>
                 </a:path>
@@ -5017,14 +5195,14 @@
         </p:sp>
         <p:sp>
           <p:nvSpPr>
-            <p:cNvPr id="78" name="right Speaker column 2 row 2 49"/>
+            <p:cNvPr id="83" name="right Speaker column 2 row 1 46"/>
             <p:cNvSpPr/>
             <p:nvPr/>
           </p:nvSpPr>
           <p:spPr>
             <a:xfrm>
-              <a:off x="8309106" y="1883834"/>
-              <a:ext cx="17049" cy="73707"/>
+              <a:off x="8300777" y="1508795"/>
+              <a:ext cx="21198" cy="68441"/>
             </a:xfrm>
             <a:custGeom>
               <a:avLst/>
@@ -5033,29 +5211,29 @@
               <a:cxnLst/>
               <a:rect l="0" t="0" r="r" b="b"/>
               <a:pathLst>
-                <a:path w="17049" h="73707" fill="norm">
+                <a:path w="21198" h="68441" fill="norm">
                   <a:moveTo>
-                    <a:pt x="0" y="28787"/>
+                    <a:pt x="0" y="25438"/>
                   </a:moveTo>
                   <a:cubicBezTo>
-                    <a:pt x="0" y="46832"/>
-                    <a:pt x="3653" y="64855"/>
-                    <a:pt x="8524" y="69281"/>
-                  </a:cubicBezTo>
-                  <a:cubicBezTo>
-                    <a:pt x="13395" y="73707"/>
-                    <a:pt x="17049" y="63010"/>
-                    <a:pt x="17049" y="44988"/>
-                  </a:cubicBezTo>
-                  <a:cubicBezTo>
-                    <a:pt x="17049" y="26967"/>
-                    <a:pt x="13152" y="8990"/>
-                    <a:pt x="8524" y="4495"/>
-                  </a:cubicBezTo>
-                  <a:cubicBezTo>
-                    <a:pt x="3897" y="0"/>
-                    <a:pt x="0" y="10742"/>
-                    <a:pt x="0" y="28787"/>
+                    <a:pt x="0" y="41791"/>
+                    <a:pt x="4543" y="58750"/>
+                    <a:pt x="10599" y="63595"/>
+                  </a:cubicBezTo>
+                  <a:cubicBezTo>
+                    <a:pt x="16656" y="68441"/>
+                    <a:pt x="21198" y="59356"/>
+                    <a:pt x="21198" y="43003"/>
+                  </a:cubicBezTo>
+                  <a:cubicBezTo>
+                    <a:pt x="21198" y="26649"/>
+                    <a:pt x="16353" y="9691"/>
+                    <a:pt x="10599" y="4845"/>
+                  </a:cubicBezTo>
+                  <a:cubicBezTo>
+                    <a:pt x="4845" y="0"/>
+                    <a:pt x="0" y="9085"/>
+                    <a:pt x="0" y="25438"/>
                   </a:cubicBezTo>
                   <a:close/>
                 </a:path>
@@ -5072,14 +5250,14 @@
         </p:sp>
         <p:sp>
           <p:nvSpPr>
-            <p:cNvPr id="79" name="right Speaker column 2 row 2 50"/>
+            <p:cNvPr id="84" name="right Speaker column 2 row 1 47"/>
             <p:cNvSpPr/>
             <p:nvPr/>
           </p:nvSpPr>
           <p:spPr>
             <a:xfrm>
-              <a:off x="8309106" y="1778269"/>
-              <a:ext cx="17049" cy="73784"/>
+              <a:off x="8300777" y="1413099"/>
+              <a:ext cx="21198" cy="68441"/>
             </a:xfrm>
             <a:custGeom>
               <a:avLst/>
@@ -5088,29 +5266,29 @@
               <a:cxnLst/>
               <a:rect l="0" t="0" r="r" b="b"/>
               <a:pathLst>
-                <a:path w="17049" h="73784" fill="norm">
+                <a:path w="21198" h="68441" fill="norm">
                   <a:moveTo>
-                    <a:pt x="0" y="28755"/>
+                    <a:pt x="0" y="25438"/>
                   </a:moveTo>
                   <a:cubicBezTo>
-                    <a:pt x="0" y="46800"/>
-                    <a:pt x="3653" y="64853"/>
-                    <a:pt x="8524" y="69318"/>
-                  </a:cubicBezTo>
-                  <a:cubicBezTo>
-                    <a:pt x="13395" y="73784"/>
-                    <a:pt x="17049" y="62782"/>
-                    <a:pt x="17049" y="45094"/>
-                  </a:cubicBezTo>
-                  <a:cubicBezTo>
-                    <a:pt x="17049" y="27406"/>
-                    <a:pt x="13152" y="9064"/>
-                    <a:pt x="8524" y="4532"/>
-                  </a:cubicBezTo>
-                  <a:cubicBezTo>
-                    <a:pt x="3897" y="0"/>
-                    <a:pt x="0" y="11045"/>
-                    <a:pt x="0" y="29090"/>
+                    <a:pt x="0" y="41791"/>
+                    <a:pt x="4543" y="58750"/>
+                    <a:pt x="10599" y="63595"/>
+                  </a:cubicBezTo>
+                  <a:cubicBezTo>
+                    <a:pt x="16656" y="68441"/>
+                    <a:pt x="21198" y="59053"/>
+                    <a:pt x="21198" y="43003"/>
+                  </a:cubicBezTo>
+                  <a:cubicBezTo>
+                    <a:pt x="21198" y="26952"/>
+                    <a:pt x="16353" y="9691"/>
+                    <a:pt x="10599" y="4845"/>
+                  </a:cubicBezTo>
+                  <a:cubicBezTo>
+                    <a:pt x="4845" y="0"/>
+                    <a:pt x="0" y="9388"/>
+                    <a:pt x="0" y="25741"/>
                   </a:cubicBezTo>
                   <a:close/>
                 </a:path>
@@ -5127,14 +5305,14 @@
         </p:sp>
         <p:sp>
           <p:nvSpPr>
-            <p:cNvPr id="80" name="right Speaker column 2 row 2 51"/>
+            <p:cNvPr id="85" name="right Speaker column 2 row 1 48"/>
             <p:cNvSpPr/>
             <p:nvPr/>
           </p:nvSpPr>
           <p:spPr>
             <a:xfrm>
-              <a:off x="8309106" y="1672704"/>
-              <a:ext cx="17049" cy="73193"/>
+              <a:off x="8300777" y="1317403"/>
+              <a:ext cx="21198" cy="67835"/>
             </a:xfrm>
             <a:custGeom>
               <a:avLst/>
@@ -5143,29 +5321,29 @@
               <a:cxnLst/>
               <a:rect l="0" t="0" r="r" b="b"/>
               <a:pathLst>
-                <a:path w="17049" h="73193" fill="norm">
+                <a:path w="21198" h="67835" fill="norm">
                   <a:moveTo>
-                    <a:pt x="0" y="28724"/>
+                    <a:pt x="0" y="25438"/>
                   </a:moveTo>
                   <a:cubicBezTo>
-                    <a:pt x="0" y="46769"/>
-                    <a:pt x="3653" y="64851"/>
-                    <a:pt x="8524" y="69022"/>
-                  </a:cubicBezTo>
-                  <a:cubicBezTo>
-                    <a:pt x="13395" y="73193"/>
-                    <a:pt x="17049" y="62554"/>
-                    <a:pt x="17049" y="44533"/>
-                  </a:cubicBezTo>
-                  <a:cubicBezTo>
-                    <a:pt x="17049" y="26511"/>
-                    <a:pt x="13152" y="8471"/>
-                    <a:pt x="8524" y="4236"/>
-                  </a:cubicBezTo>
-                  <a:cubicBezTo>
-                    <a:pt x="3897" y="0"/>
-                    <a:pt x="0" y="10679"/>
-                    <a:pt x="0" y="28724"/>
+                    <a:pt x="0" y="41791"/>
+                    <a:pt x="4543" y="58750"/>
+                    <a:pt x="10599" y="63293"/>
+                  </a:cubicBezTo>
+                  <a:cubicBezTo>
+                    <a:pt x="16656" y="67835"/>
+                    <a:pt x="21198" y="58750"/>
+                    <a:pt x="21198" y="42397"/>
+                  </a:cubicBezTo>
+                  <a:cubicBezTo>
+                    <a:pt x="21198" y="26044"/>
+                    <a:pt x="16353" y="9085"/>
+                    <a:pt x="10599" y="4543"/>
+                  </a:cubicBezTo>
+                  <a:cubicBezTo>
+                    <a:pt x="4845" y="0"/>
+                    <a:pt x="0" y="9085"/>
+                    <a:pt x="0" y="25438"/>
                   </a:cubicBezTo>
                   <a:close/>
                 </a:path>
@@ -5182,14 +5360,14 @@
         </p:sp>
         <p:sp>
           <p:nvSpPr>
-            <p:cNvPr id="81" name="right Speaker column 2 row 2 52"/>
+            <p:cNvPr id="86" name="right Speaker column 2 row 1 49"/>
             <p:cNvSpPr/>
             <p:nvPr/>
           </p:nvSpPr>
           <p:spPr>
             <a:xfrm>
-              <a:off x="8285482" y="2335396"/>
-              <a:ext cx="16562" cy="74205"/>
+              <a:off x="8271402" y="1913382"/>
+              <a:ext cx="20593" cy="69046"/>
             </a:xfrm>
             <a:custGeom>
               <a:avLst/>
@@ -5198,29 +5376,29 @@
               <a:cxnLst/>
               <a:rect l="0" t="0" r="r" b="b"/>
               <a:pathLst>
-                <a:path w="16562" h="74205" fill="norm">
+                <a:path w="20593" h="69046" fill="norm">
                   <a:moveTo>
-                    <a:pt x="0" y="28599"/>
+                    <a:pt x="0" y="25135"/>
                   </a:moveTo>
                   <a:cubicBezTo>
-                    <a:pt x="0" y="46342"/>
-                    <a:pt x="3653" y="64928"/>
-                    <a:pt x="8281" y="69567"/>
-                  </a:cubicBezTo>
-                  <a:cubicBezTo>
-                    <a:pt x="12908" y="74205"/>
-                    <a:pt x="16562" y="63684"/>
-                    <a:pt x="16562" y="45629"/>
-                  </a:cubicBezTo>
-                  <a:cubicBezTo>
-                    <a:pt x="16562" y="27575"/>
-                    <a:pt x="12908" y="9324"/>
-                    <a:pt x="8281" y="4662"/>
-                  </a:cubicBezTo>
-                  <a:cubicBezTo>
-                    <a:pt x="3653" y="0"/>
-                    <a:pt x="0" y="10521"/>
-                    <a:pt x="0" y="28599"/>
+                    <a:pt x="0" y="41186"/>
+                    <a:pt x="4543" y="58750"/>
+                    <a:pt x="10296" y="63898"/>
+                  </a:cubicBezTo>
+                  <a:cubicBezTo>
+                    <a:pt x="16050" y="69046"/>
+                    <a:pt x="20593" y="60264"/>
+                    <a:pt x="20593" y="43911"/>
+                  </a:cubicBezTo>
+                  <a:cubicBezTo>
+                    <a:pt x="20593" y="27558"/>
+                    <a:pt x="16050" y="10296"/>
+                    <a:pt x="10296" y="5148"/>
+                  </a:cubicBezTo>
+                  <a:cubicBezTo>
+                    <a:pt x="4543" y="0"/>
+                    <a:pt x="0" y="8782"/>
+                    <a:pt x="0" y="25135"/>
                   </a:cubicBezTo>
                   <a:close/>
                 </a:path>
@@ -5237,14 +5415,14 @@
         </p:sp>
         <p:sp>
           <p:nvSpPr>
-            <p:cNvPr id="82" name="right Speaker column 2 row 2 53"/>
+            <p:cNvPr id="87" name="right Speaker column 2 row 1 50"/>
             <p:cNvSpPr/>
             <p:nvPr/>
           </p:nvSpPr>
           <p:spPr>
             <a:xfrm>
-              <a:off x="8285482" y="2230641"/>
-              <a:ext cx="16562" cy="73611"/>
+              <a:off x="8271402" y="1818595"/>
+              <a:ext cx="20593" cy="68441"/>
             </a:xfrm>
             <a:custGeom>
               <a:avLst/>
@@ -5253,29 +5431,29 @@
               <a:cxnLst/>
               <a:rect l="0" t="0" r="r" b="b"/>
               <a:pathLst>
-                <a:path w="16562" h="73611" fill="norm">
+                <a:path w="20593" h="68441" fill="norm">
                   <a:moveTo>
-                    <a:pt x="0" y="28234"/>
+                    <a:pt x="0" y="24832"/>
                   </a:moveTo>
                   <a:cubicBezTo>
-                    <a:pt x="0" y="45977"/>
-                    <a:pt x="3653" y="64259"/>
-                    <a:pt x="8281" y="68935"/>
-                  </a:cubicBezTo>
-                  <a:cubicBezTo>
-                    <a:pt x="12908" y="73611"/>
-                    <a:pt x="16562" y="62785"/>
-                    <a:pt x="16562" y="45065"/>
-                  </a:cubicBezTo>
-                  <a:cubicBezTo>
-                    <a:pt x="16562" y="27344"/>
-                    <a:pt x="12908" y="8730"/>
-                    <a:pt x="8281" y="4365"/>
-                  </a:cubicBezTo>
-                  <a:cubicBezTo>
-                    <a:pt x="3653" y="0"/>
-                    <a:pt x="0" y="10491"/>
-                    <a:pt x="0" y="28234"/>
+                    <a:pt x="0" y="40883"/>
+                    <a:pt x="4543" y="58144"/>
+                    <a:pt x="10296" y="63293"/>
+                  </a:cubicBezTo>
+                  <a:cubicBezTo>
+                    <a:pt x="16050" y="68441"/>
+                    <a:pt x="20593" y="59356"/>
+                    <a:pt x="20593" y="43305"/>
+                  </a:cubicBezTo>
+                  <a:cubicBezTo>
+                    <a:pt x="20593" y="27255"/>
+                    <a:pt x="16050" y="9691"/>
+                    <a:pt x="10296" y="4845"/>
+                  </a:cubicBezTo>
+                  <a:cubicBezTo>
+                    <a:pt x="4543" y="0"/>
+                    <a:pt x="0" y="8782"/>
+                    <a:pt x="0" y="24832"/>
                   </a:cubicBezTo>
                   <a:close/>
                 </a:path>
@@ -5292,14 +5470,14 @@
         </p:sp>
         <p:sp>
           <p:nvSpPr>
-            <p:cNvPr id="83" name="right Speaker column 2 row 2 54"/>
+            <p:cNvPr id="88" name="right Speaker column 2 row 1 51"/>
             <p:cNvSpPr/>
             <p:nvPr/>
           </p:nvSpPr>
           <p:spPr>
             <a:xfrm>
-              <a:off x="8285482" y="2124548"/>
-              <a:ext cx="16562" cy="74356"/>
+              <a:off x="8271402" y="1722596"/>
+              <a:ext cx="20593" cy="69046"/>
             </a:xfrm>
             <a:custGeom>
               <a:avLst/>
@@ -5308,29 +5486,29 @@
               <a:cxnLst/>
               <a:rect l="0" t="0" r="r" b="b"/>
               <a:pathLst>
-                <a:path w="16562" h="74356" fill="norm">
+                <a:path w="20593" h="69046" fill="norm">
                   <a:moveTo>
-                    <a:pt x="0" y="28874"/>
+                    <a:pt x="0" y="25438"/>
                   </a:moveTo>
                   <a:cubicBezTo>
-                    <a:pt x="0" y="46617"/>
-                    <a:pt x="3653" y="64928"/>
-                    <a:pt x="8281" y="69642"/>
-                  </a:cubicBezTo>
-                  <a:cubicBezTo>
-                    <a:pt x="12908" y="74356"/>
-                    <a:pt x="16562" y="63559"/>
-                    <a:pt x="16562" y="45504"/>
-                  </a:cubicBezTo>
-                  <a:cubicBezTo>
-                    <a:pt x="16562" y="27450"/>
-                    <a:pt x="12908" y="9474"/>
-                    <a:pt x="8281" y="4737"/>
-                  </a:cubicBezTo>
-                  <a:cubicBezTo>
-                    <a:pt x="3653" y="0"/>
-                    <a:pt x="0" y="10796"/>
-                    <a:pt x="0" y="28874"/>
+                    <a:pt x="0" y="41488"/>
+                    <a:pt x="4543" y="58750"/>
+                    <a:pt x="10296" y="63898"/>
+                  </a:cubicBezTo>
+                  <a:cubicBezTo>
+                    <a:pt x="16050" y="69046"/>
+                    <a:pt x="20593" y="59961"/>
+                    <a:pt x="20593" y="43608"/>
+                  </a:cubicBezTo>
+                  <a:cubicBezTo>
+                    <a:pt x="20593" y="27255"/>
+                    <a:pt x="16050" y="10296"/>
+                    <a:pt x="10296" y="5148"/>
+                  </a:cubicBezTo>
+                  <a:cubicBezTo>
+                    <a:pt x="4543" y="0"/>
+                    <a:pt x="0" y="9085"/>
+                    <a:pt x="0" y="25438"/>
                   </a:cubicBezTo>
                   <a:close/>
                 </a:path>
@@ -5347,14 +5525,14 @@
         </p:sp>
         <p:sp>
           <p:nvSpPr>
-            <p:cNvPr id="84" name="right Speaker column 2 row 2 55"/>
+            <p:cNvPr id="89" name="right Speaker column 2 row 1 52"/>
             <p:cNvSpPr/>
             <p:nvPr/>
           </p:nvSpPr>
           <p:spPr>
             <a:xfrm>
-              <a:off x="8285482" y="2019458"/>
-              <a:ext cx="16562" cy="73427"/>
+              <a:off x="8271402" y="1627506"/>
+              <a:ext cx="20593" cy="68138"/>
             </a:xfrm>
             <a:custGeom>
               <a:avLst/>
@@ -5363,29 +5541,29 @@
               <a:cxnLst/>
               <a:rect l="0" t="0" r="r" b="b"/>
               <a:pathLst>
-                <a:path w="16562" h="73427" fill="norm">
+                <a:path w="20593" h="68138" fill="norm">
                   <a:moveTo>
-                    <a:pt x="0" y="28509"/>
+                    <a:pt x="0" y="25135"/>
                   </a:moveTo>
                   <a:cubicBezTo>
-                    <a:pt x="0" y="46252"/>
-                    <a:pt x="3653" y="64593"/>
-                    <a:pt x="8281" y="69010"/>
-                  </a:cubicBezTo>
-                  <a:cubicBezTo>
-                    <a:pt x="12908" y="73427"/>
-                    <a:pt x="16562" y="62660"/>
-                    <a:pt x="16562" y="44940"/>
-                  </a:cubicBezTo>
-                  <a:cubicBezTo>
-                    <a:pt x="16562" y="27220"/>
-                    <a:pt x="12908" y="8880"/>
-                    <a:pt x="8281" y="4440"/>
-                  </a:cubicBezTo>
-                  <a:cubicBezTo>
-                    <a:pt x="3653" y="0"/>
-                    <a:pt x="0" y="10766"/>
-                    <a:pt x="0" y="28509"/>
+                    <a:pt x="0" y="41186"/>
+                    <a:pt x="4543" y="58447"/>
+                    <a:pt x="10296" y="63293"/>
+                  </a:cubicBezTo>
+                  <a:cubicBezTo>
+                    <a:pt x="16050" y="68138"/>
+                    <a:pt x="20593" y="59053"/>
+                    <a:pt x="20593" y="43003"/>
+                  </a:cubicBezTo>
+                  <a:cubicBezTo>
+                    <a:pt x="20593" y="26952"/>
+                    <a:pt x="16050" y="9691"/>
+                    <a:pt x="10296" y="4845"/>
+                  </a:cubicBezTo>
+                  <a:cubicBezTo>
+                    <a:pt x="4543" y="0"/>
+                    <a:pt x="0" y="9085"/>
+                    <a:pt x="0" y="25135"/>
                   </a:cubicBezTo>
                   <a:close/>
                 </a:path>
@@ -5402,14 +5580,14 @@
         </p:sp>
         <p:sp>
           <p:nvSpPr>
-            <p:cNvPr id="85" name="right Speaker column 2 row 2 56"/>
+            <p:cNvPr id="90" name="right Speaker column 2 row 1 53"/>
             <p:cNvSpPr/>
             <p:nvPr/>
           </p:nvSpPr>
           <p:spPr>
             <a:xfrm>
-              <a:off x="8285482" y="1913699"/>
-              <a:ext cx="16562" cy="73837"/>
+              <a:off x="8271402" y="1531810"/>
+              <a:ext cx="20593" cy="68441"/>
             </a:xfrm>
             <a:custGeom>
               <a:avLst/>
@@ -5418,29 +5596,29 @@
               <a:cxnLst/>
               <a:rect l="0" t="0" r="r" b="b"/>
               <a:pathLst>
-                <a:path w="16562" h="73837" fill="norm">
+                <a:path w="20593" h="68441" fill="norm">
                   <a:moveTo>
-                    <a:pt x="0" y="28814"/>
+                    <a:pt x="0" y="25438"/>
                   </a:moveTo>
                   <a:cubicBezTo>
-                    <a:pt x="0" y="46557"/>
-                    <a:pt x="3653" y="64928"/>
-                    <a:pt x="8281" y="69383"/>
-                  </a:cubicBezTo>
-                  <a:cubicBezTo>
-                    <a:pt x="12908" y="73837"/>
-                    <a:pt x="16562" y="63100"/>
-                    <a:pt x="16562" y="45045"/>
-                  </a:cubicBezTo>
-                  <a:cubicBezTo>
-                    <a:pt x="16562" y="26990"/>
-                    <a:pt x="12908" y="8955"/>
-                    <a:pt x="8281" y="4478"/>
-                  </a:cubicBezTo>
-                  <a:cubicBezTo>
-                    <a:pt x="3653" y="0"/>
-                    <a:pt x="0" y="10737"/>
-                    <a:pt x="0" y="28814"/>
+                    <a:pt x="0" y="41488"/>
+                    <a:pt x="4543" y="58750"/>
+                    <a:pt x="10296" y="63595"/>
+                  </a:cubicBezTo>
+                  <a:cubicBezTo>
+                    <a:pt x="16050" y="68441"/>
+                    <a:pt x="20593" y="59356"/>
+                    <a:pt x="20593" y="43003"/>
+                  </a:cubicBezTo>
+                  <a:cubicBezTo>
+                    <a:pt x="20593" y="26649"/>
+                    <a:pt x="16050" y="9691"/>
+                    <a:pt x="10296" y="4845"/>
+                  </a:cubicBezTo>
+                  <a:cubicBezTo>
+                    <a:pt x="4543" y="0"/>
+                    <a:pt x="0" y="9085"/>
+                    <a:pt x="0" y="25438"/>
                   </a:cubicBezTo>
                   <a:close/>
                 </a:path>
@@ -5457,14 +5635,14 @@
         </p:sp>
         <p:sp>
           <p:nvSpPr>
-            <p:cNvPr id="86" name="right Speaker column 2 row 2 57"/>
+            <p:cNvPr id="91" name="right Speaker column 2 row 1 54"/>
             <p:cNvSpPr/>
             <p:nvPr/>
           </p:nvSpPr>
           <p:spPr>
             <a:xfrm>
-              <a:off x="8285482" y="1808610"/>
-              <a:ext cx="16562" cy="73243"/>
+              <a:off x="8271402" y="1436720"/>
+              <a:ext cx="20593" cy="67835"/>
             </a:xfrm>
             <a:custGeom>
               <a:avLst/>
@@ -5473,29 +5651,29 @@
               <a:cxnLst/>
               <a:rect l="0" t="0" r="r" b="b"/>
               <a:pathLst>
-                <a:path w="16562" h="73243" fill="norm">
+                <a:path w="20593" h="67835" fill="norm">
                   <a:moveTo>
-                    <a:pt x="0" y="28450"/>
+                    <a:pt x="0" y="25135"/>
                   </a:moveTo>
                   <a:cubicBezTo>
-                    <a:pt x="0" y="46193"/>
-                    <a:pt x="3653" y="64259"/>
-                    <a:pt x="8281" y="68751"/>
-                  </a:cubicBezTo>
-                  <a:cubicBezTo>
-                    <a:pt x="12908" y="73243"/>
-                    <a:pt x="16562" y="62201"/>
-                    <a:pt x="16562" y="44481"/>
-                  </a:cubicBezTo>
-                  <a:cubicBezTo>
-                    <a:pt x="16562" y="26760"/>
-                    <a:pt x="12908" y="8361"/>
-                    <a:pt x="8281" y="4181"/>
-                  </a:cubicBezTo>
-                  <a:cubicBezTo>
-                    <a:pt x="3653" y="0"/>
-                    <a:pt x="0" y="10707"/>
-                    <a:pt x="0" y="28450"/>
+                    <a:pt x="0" y="41186"/>
+                    <a:pt x="4543" y="58144"/>
+                    <a:pt x="10296" y="62990"/>
+                  </a:cubicBezTo>
+                  <a:cubicBezTo>
+                    <a:pt x="16050" y="67835"/>
+                    <a:pt x="20593" y="58447"/>
+                    <a:pt x="20593" y="42397"/>
+                  </a:cubicBezTo>
+                  <a:cubicBezTo>
+                    <a:pt x="20593" y="26347"/>
+                    <a:pt x="16050" y="9085"/>
+                    <a:pt x="10296" y="4543"/>
+                  </a:cubicBezTo>
+                  <a:cubicBezTo>
+                    <a:pt x="4543" y="0"/>
+                    <a:pt x="0" y="9085"/>
+                    <a:pt x="0" y="25135"/>
                   </a:cubicBezTo>
                   <a:close/>
                 </a:path>
@@ -5512,14 +5690,14 @@
         </p:sp>
         <p:sp>
           <p:nvSpPr>
-            <p:cNvPr id="87" name="right Speaker column 2 row 2 58"/>
+            <p:cNvPr id="92" name="right Speaker column 2 row 1 55"/>
             <p:cNvSpPr/>
             <p:nvPr/>
           </p:nvSpPr>
           <p:spPr>
             <a:xfrm>
-              <a:off x="8285482" y="1702516"/>
-              <a:ext cx="16562" cy="73988"/>
+              <a:off x="8271402" y="1340721"/>
+              <a:ext cx="20593" cy="68441"/>
             </a:xfrm>
             <a:custGeom>
               <a:avLst/>
@@ -5528,29 +5706,29 @@
               <a:cxnLst/>
               <a:rect l="0" t="0" r="r" b="b"/>
               <a:pathLst>
-                <a:path w="16562" h="73988" fill="norm">
+                <a:path w="20593" h="68441" fill="norm">
                   <a:moveTo>
-                    <a:pt x="0" y="29090"/>
+                    <a:pt x="0" y="25741"/>
                   </a:moveTo>
                   <a:cubicBezTo>
-                    <a:pt x="0" y="46833"/>
-                    <a:pt x="3653" y="64928"/>
-                    <a:pt x="8281" y="69458"/>
-                  </a:cubicBezTo>
-                  <a:cubicBezTo>
-                    <a:pt x="12908" y="73988"/>
-                    <a:pt x="16562" y="62975"/>
-                    <a:pt x="16562" y="44920"/>
-                  </a:cubicBezTo>
-                  <a:cubicBezTo>
-                    <a:pt x="16562" y="26866"/>
-                    <a:pt x="12908" y="9106"/>
-                    <a:pt x="8281" y="4553"/>
-                  </a:cubicBezTo>
-                  <a:cubicBezTo>
-                    <a:pt x="3653" y="0"/>
-                    <a:pt x="0" y="11012"/>
-                    <a:pt x="0" y="29090"/>
+                    <a:pt x="0" y="41791"/>
+                    <a:pt x="4543" y="58750"/>
+                    <a:pt x="10296" y="63595"/>
+                  </a:cubicBezTo>
+                  <a:cubicBezTo>
+                    <a:pt x="16050" y="68441"/>
+                    <a:pt x="20593" y="59053"/>
+                    <a:pt x="20593" y="42700"/>
+                  </a:cubicBezTo>
+                  <a:cubicBezTo>
+                    <a:pt x="20593" y="26347"/>
+                    <a:pt x="16050" y="9691"/>
+                    <a:pt x="10296" y="4845"/>
+                  </a:cubicBezTo>
+                  <a:cubicBezTo>
+                    <a:pt x="4543" y="0"/>
+                    <a:pt x="0" y="9388"/>
+                    <a:pt x="0" y="25741"/>
                   </a:cubicBezTo>
                   <a:close/>
                 </a:path>
@@ -5567,14 +5745,14 @@
         </p:sp>
         <p:sp>
           <p:nvSpPr>
-            <p:cNvPr id="88" name="right Speaker column 2 row 2 59"/>
+            <p:cNvPr id="93" name="right Speaker column 2 row 1 56"/>
             <p:cNvSpPr/>
             <p:nvPr/>
           </p:nvSpPr>
           <p:spPr>
             <a:xfrm>
-              <a:off x="8262100" y="2259161"/>
-              <a:ext cx="16562" cy="74028"/>
+              <a:off x="8242330" y="1839793"/>
+              <a:ext cx="20593" cy="68744"/>
             </a:xfrm>
             <a:custGeom>
               <a:avLst/>
@@ -5583,29 +5761,29 @@
               <a:cxnLst/>
               <a:rect l="0" t="0" r="r" b="b"/>
               <a:pathLst>
-                <a:path w="16562" h="74028" fill="norm">
+                <a:path w="20593" h="68744" fill="norm">
                   <a:moveTo>
-                    <a:pt x="0" y="28641"/>
+                    <a:pt x="0" y="25135"/>
                   </a:moveTo>
                   <a:cubicBezTo>
-                    <a:pt x="0" y="46416"/>
-                    <a:pt x="3653" y="64710"/>
-                    <a:pt x="8281" y="69369"/>
-                  </a:cubicBezTo>
-                  <a:cubicBezTo>
-                    <a:pt x="12908" y="74028"/>
-                    <a:pt x="16562" y="63162"/>
-                    <a:pt x="16562" y="45409"/>
-                  </a:cubicBezTo>
-                  <a:cubicBezTo>
-                    <a:pt x="16562" y="27657"/>
-                    <a:pt x="12908" y="9364"/>
-                    <a:pt x="8281" y="4682"/>
-                  </a:cubicBezTo>
-                  <a:cubicBezTo>
-                    <a:pt x="3653" y="0"/>
-                    <a:pt x="0" y="10866"/>
-                    <a:pt x="0" y="28641"/>
+                    <a:pt x="0" y="41186"/>
+                    <a:pt x="4543" y="58447"/>
+                    <a:pt x="10296" y="63595"/>
+                  </a:cubicBezTo>
+                  <a:cubicBezTo>
+                    <a:pt x="16050" y="68744"/>
+                    <a:pt x="20593" y="59659"/>
+                    <a:pt x="20593" y="43608"/>
+                  </a:cubicBezTo>
+                  <a:cubicBezTo>
+                    <a:pt x="20593" y="27558"/>
+                    <a:pt x="16050" y="10296"/>
+                    <a:pt x="10296" y="5148"/>
+                  </a:cubicBezTo>
+                  <a:cubicBezTo>
+                    <a:pt x="4543" y="0"/>
+                    <a:pt x="0" y="9085"/>
+                    <a:pt x="0" y="25135"/>
                   </a:cubicBezTo>
                   <a:close/>
                 </a:path>
@@ -5622,14 +5800,14 @@
         </p:sp>
         <p:sp>
           <p:nvSpPr>
-            <p:cNvPr id="89" name="right Speaker column 2 row 2 60"/>
+            <p:cNvPr id="94" name="right Speaker column 2 row 1 57"/>
             <p:cNvSpPr/>
             <p:nvPr/>
           </p:nvSpPr>
           <p:spPr>
             <a:xfrm>
-              <a:off x="8262100" y="2154216"/>
-              <a:ext cx="16562" cy="73098"/>
+              <a:off x="8242330" y="1745006"/>
+              <a:ext cx="20593" cy="67835"/>
             </a:xfrm>
             <a:custGeom>
               <a:avLst/>
@@ -5638,29 +5816,29 @@
               <a:cxnLst/>
               <a:rect l="0" t="0" r="r" b="b"/>
               <a:pathLst>
-                <a:path w="16562" h="73098" fill="norm">
+                <a:path w="20593" h="67835" fill="norm">
                   <a:moveTo>
-                    <a:pt x="0" y="28276"/>
+                    <a:pt x="0" y="24832"/>
                   </a:moveTo>
                   <a:cubicBezTo>
-                    <a:pt x="0" y="46051"/>
-                    <a:pt x="3653" y="64375"/>
-                    <a:pt x="8281" y="68737"/>
-                  </a:cubicBezTo>
-                  <a:cubicBezTo>
-                    <a:pt x="12908" y="73098"/>
-                    <a:pt x="16562" y="62597"/>
-                    <a:pt x="16562" y="44845"/>
-                  </a:cubicBezTo>
-                  <a:cubicBezTo>
-                    <a:pt x="16562" y="27092"/>
-                    <a:pt x="12908" y="8769"/>
-                    <a:pt x="8281" y="4385"/>
-                  </a:cubicBezTo>
-                  <a:cubicBezTo>
-                    <a:pt x="3653" y="0"/>
-                    <a:pt x="0" y="10501"/>
-                    <a:pt x="0" y="28276"/>
+                    <a:pt x="0" y="40883"/>
+                    <a:pt x="4543" y="58144"/>
+                    <a:pt x="10296" y="62990"/>
+                  </a:cubicBezTo>
+                  <a:cubicBezTo>
+                    <a:pt x="16050" y="67835"/>
+                    <a:pt x="20593" y="59053"/>
+                    <a:pt x="20593" y="43003"/>
+                  </a:cubicBezTo>
+                  <a:cubicBezTo>
+                    <a:pt x="20593" y="26952"/>
+                    <a:pt x="16050" y="9691"/>
+                    <a:pt x="10296" y="4845"/>
+                  </a:cubicBezTo>
+                  <a:cubicBezTo>
+                    <a:pt x="4543" y="0"/>
+                    <a:pt x="0" y="8782"/>
+                    <a:pt x="0" y="24832"/>
                   </a:cubicBezTo>
                   <a:close/>
                 </a:path>
@@ -5677,14 +5855,14 @@
         </p:sp>
         <p:sp>
           <p:nvSpPr>
-            <p:cNvPr id="90" name="right Speaker column 2 row 2 61"/>
+            <p:cNvPr id="95" name="right Speaker column 2 row 1 58"/>
             <p:cNvSpPr/>
             <p:nvPr/>
           </p:nvSpPr>
           <p:spPr>
             <a:xfrm>
-              <a:off x="8262100" y="2048601"/>
-              <a:ext cx="16562" cy="73844"/>
+              <a:off x="8242330" y="1649613"/>
+              <a:ext cx="20593" cy="68441"/>
             </a:xfrm>
             <a:custGeom>
               <a:avLst/>
@@ -5693,29 +5871,29 @@
               <a:cxnLst/>
               <a:rect l="0" t="0" r="r" b="b"/>
               <a:pathLst>
-                <a:path w="16562" h="73844" fill="norm">
+                <a:path w="20593" h="68441" fill="norm">
                   <a:moveTo>
-                    <a:pt x="0" y="28581"/>
+                    <a:pt x="0" y="25135"/>
                   </a:moveTo>
                   <a:cubicBezTo>
-                    <a:pt x="0" y="46357"/>
-                    <a:pt x="3653" y="64375"/>
-                    <a:pt x="8281" y="69110"/>
-                  </a:cubicBezTo>
-                  <a:cubicBezTo>
-                    <a:pt x="12908" y="73844"/>
-                    <a:pt x="16562" y="63038"/>
-                    <a:pt x="16562" y="44950"/>
-                  </a:cubicBezTo>
-                  <a:cubicBezTo>
-                    <a:pt x="16562" y="26863"/>
-                    <a:pt x="12908" y="8845"/>
-                    <a:pt x="8281" y="4423"/>
-                  </a:cubicBezTo>
-                  <a:cubicBezTo>
-                    <a:pt x="3653" y="0"/>
-                    <a:pt x="0" y="10806"/>
-                    <a:pt x="0" y="28581"/>
+                    <a:pt x="0" y="41186"/>
+                    <a:pt x="4543" y="58144"/>
+                    <a:pt x="10296" y="63293"/>
+                  </a:cubicBezTo>
+                  <a:cubicBezTo>
+                    <a:pt x="16050" y="68441"/>
+                    <a:pt x="20593" y="59356"/>
+                    <a:pt x="20593" y="43003"/>
+                  </a:cubicBezTo>
+                  <a:cubicBezTo>
+                    <a:pt x="20593" y="26649"/>
+                    <a:pt x="16050" y="9691"/>
+                    <a:pt x="10296" y="4845"/>
+                  </a:cubicBezTo>
+                  <a:cubicBezTo>
+                    <a:pt x="4543" y="0"/>
+                    <a:pt x="0" y="9085"/>
+                    <a:pt x="0" y="25135"/>
                   </a:cubicBezTo>
                   <a:close/>
                 </a:path>
@@ -5732,14 +5910,14 @@
         </p:sp>
         <p:sp>
           <p:nvSpPr>
-            <p:cNvPr id="91" name="right Speaker column 2 row 2 62"/>
+            <p:cNvPr id="96" name="right Speaker column 2 row 1 59"/>
             <p:cNvSpPr/>
             <p:nvPr/>
           </p:nvSpPr>
           <p:spPr>
             <a:xfrm>
-              <a:off x="8262100" y="1943321"/>
-              <a:ext cx="16562" cy="73585"/>
+              <a:off x="8242330" y="1554523"/>
+              <a:ext cx="20593" cy="68138"/>
             </a:xfrm>
             <a:custGeom>
               <a:avLst/>
@@ -5748,29 +5926,29 @@
               <a:cxnLst/>
               <a:rect l="0" t="0" r="r" b="b"/>
               <a:pathLst>
-                <a:path w="16562" h="73585" fill="norm">
+                <a:path w="20593" h="68138" fill="norm">
                   <a:moveTo>
-                    <a:pt x="0" y="28887"/>
+                    <a:pt x="0" y="25438"/>
                   </a:moveTo>
                   <a:cubicBezTo>
-                    <a:pt x="0" y="46662"/>
-                    <a:pt x="3653" y="64710"/>
-                    <a:pt x="8281" y="69148"/>
-                  </a:cubicBezTo>
-                  <a:cubicBezTo>
-                    <a:pt x="12908" y="73585"/>
-                    <a:pt x="16562" y="62808"/>
-                    <a:pt x="16562" y="45056"/>
-                  </a:cubicBezTo>
-                  <a:cubicBezTo>
-                    <a:pt x="16562" y="27303"/>
-                    <a:pt x="12908" y="8921"/>
-                    <a:pt x="8281" y="4461"/>
-                  </a:cubicBezTo>
-                  <a:cubicBezTo>
-                    <a:pt x="3653" y="0"/>
-                    <a:pt x="0" y="10776"/>
-                    <a:pt x="0" y="28551"/>
+                    <a:pt x="0" y="41488"/>
+                    <a:pt x="4543" y="58447"/>
+                    <a:pt x="10296" y="63293"/>
+                  </a:cubicBezTo>
+                  <a:cubicBezTo>
+                    <a:pt x="16050" y="68138"/>
+                    <a:pt x="20593" y="59053"/>
+                    <a:pt x="20593" y="43003"/>
+                  </a:cubicBezTo>
+                  <a:cubicBezTo>
+                    <a:pt x="20593" y="26952"/>
+                    <a:pt x="16050" y="9691"/>
+                    <a:pt x="10296" y="4845"/>
+                  </a:cubicBezTo>
+                  <a:cubicBezTo>
+                    <a:pt x="4543" y="0"/>
+                    <a:pt x="0" y="9085"/>
+                    <a:pt x="0" y="25135"/>
                   </a:cubicBezTo>
                   <a:close/>
                 </a:path>
@@ -5787,14 +5965,14 @@
         </p:sp>
         <p:sp>
           <p:nvSpPr>
-            <p:cNvPr id="92" name="right Speaker column 2 row 2 63"/>
+            <p:cNvPr id="97" name="right Speaker column 2 row 1 60"/>
             <p:cNvSpPr/>
             <p:nvPr/>
           </p:nvSpPr>
           <p:spPr>
             <a:xfrm>
-              <a:off x="8262100" y="1838041"/>
-              <a:ext cx="16562" cy="73660"/>
+              <a:off x="8242330" y="1459432"/>
+              <a:ext cx="20593" cy="68138"/>
             </a:xfrm>
             <a:custGeom>
               <a:avLst/>
@@ -5803,29 +5981,29 @@
               <a:cxnLst/>
               <a:rect l="0" t="0" r="r" b="b"/>
               <a:pathLst>
-                <a:path w="16562" h="73660" fill="norm">
+                <a:path w="20593" h="68138" fill="norm">
                   <a:moveTo>
-                    <a:pt x="0" y="28857"/>
+                    <a:pt x="0" y="25438"/>
                   </a:moveTo>
                   <a:cubicBezTo>
-                    <a:pt x="0" y="46632"/>
-                    <a:pt x="3653" y="64710"/>
-                    <a:pt x="8281" y="69186"/>
-                  </a:cubicBezTo>
-                  <a:cubicBezTo>
-                    <a:pt x="12908" y="73660"/>
-                    <a:pt x="16562" y="62914"/>
-                    <a:pt x="16562" y="44826"/>
-                  </a:cubicBezTo>
-                  <a:cubicBezTo>
-                    <a:pt x="16562" y="26739"/>
-                    <a:pt x="12908" y="8997"/>
-                    <a:pt x="8281" y="4499"/>
-                  </a:cubicBezTo>
-                  <a:cubicBezTo>
-                    <a:pt x="3653" y="0"/>
-                    <a:pt x="0" y="11082"/>
-                    <a:pt x="0" y="28857"/>
+                    <a:pt x="0" y="41488"/>
+                    <a:pt x="4543" y="58447"/>
+                    <a:pt x="10296" y="63293"/>
+                  </a:cubicBezTo>
+                  <a:cubicBezTo>
+                    <a:pt x="16050" y="68138"/>
+                    <a:pt x="20593" y="59053"/>
+                    <a:pt x="20593" y="42700"/>
+                  </a:cubicBezTo>
+                  <a:cubicBezTo>
+                    <a:pt x="20593" y="26347"/>
+                    <a:pt x="16050" y="9691"/>
+                    <a:pt x="10296" y="4845"/>
+                  </a:cubicBezTo>
+                  <a:cubicBezTo>
+                    <a:pt x="4543" y="0"/>
+                    <a:pt x="0" y="9388"/>
+                    <a:pt x="0" y="25438"/>
                   </a:cubicBezTo>
                   <a:close/>
                 </a:path>
@@ -5842,14 +6020,14 @@
         </p:sp>
         <p:sp>
           <p:nvSpPr>
-            <p:cNvPr id="93" name="right Speaker column 2 row 2 64"/>
+            <p:cNvPr id="98" name="right Speaker column 2 row 1 61"/>
             <p:cNvSpPr/>
             <p:nvPr/>
           </p:nvSpPr>
           <p:spPr>
             <a:xfrm>
-              <a:off x="8262100" y="1733097"/>
-              <a:ext cx="16562" cy="73736"/>
+              <a:off x="8242330" y="1364645"/>
+              <a:ext cx="20593" cy="68138"/>
             </a:xfrm>
             <a:custGeom>
               <a:avLst/>
@@ -5858,29 +6036,29 @@
               <a:cxnLst/>
               <a:rect l="0" t="0" r="r" b="b"/>
               <a:pathLst>
-                <a:path w="16562" h="73736" fill="norm">
+                <a:path w="20593" h="68138" fill="norm">
                   <a:moveTo>
-                    <a:pt x="0" y="28827"/>
+                    <a:pt x="0" y="25438"/>
                   </a:moveTo>
                   <a:cubicBezTo>
-                    <a:pt x="0" y="46602"/>
-                    <a:pt x="3653" y="64710"/>
-                    <a:pt x="8281" y="69223"/>
-                  </a:cubicBezTo>
-                  <a:cubicBezTo>
-                    <a:pt x="12908" y="73736"/>
-                    <a:pt x="16562" y="62684"/>
-                    <a:pt x="16562" y="44931"/>
-                  </a:cubicBezTo>
-                  <a:cubicBezTo>
-                    <a:pt x="16562" y="27179"/>
-                    <a:pt x="12908" y="9072"/>
-                    <a:pt x="8281" y="4536"/>
-                  </a:cubicBezTo>
-                  <a:cubicBezTo>
-                    <a:pt x="3653" y="0"/>
-                    <a:pt x="0" y="11052"/>
-                    <a:pt x="0" y="28827"/>
+                    <a:pt x="0" y="41488"/>
+                    <a:pt x="4543" y="58447"/>
+                    <a:pt x="10296" y="63293"/>
+                  </a:cubicBezTo>
+                  <a:cubicBezTo>
+                    <a:pt x="16050" y="68138"/>
+                    <a:pt x="20593" y="58750"/>
+                    <a:pt x="20593" y="42700"/>
+                  </a:cubicBezTo>
+                  <a:cubicBezTo>
+                    <a:pt x="20593" y="26649"/>
+                    <a:pt x="16050" y="9691"/>
+                    <a:pt x="10296" y="4845"/>
+                  </a:cubicBezTo>
+                  <a:cubicBezTo>
+                    <a:pt x="4543" y="0"/>
+                    <a:pt x="0" y="9388"/>
+                    <a:pt x="0" y="25438"/>
                   </a:cubicBezTo>
                   <a:close/>
                 </a:path>
@@ -5897,14 +6075,14 @@
         </p:sp>
         <p:sp>
           <p:nvSpPr>
-            <p:cNvPr id="94" name="right Speaker column 2 row 2 65"/>
+            <p:cNvPr id="99" name="right Speaker column 2 row 1 62"/>
             <p:cNvSpPr/>
             <p:nvPr/>
           </p:nvSpPr>
           <p:spPr>
             <a:xfrm>
-              <a:off x="8238719" y="2183399"/>
-              <a:ext cx="16562" cy="73515"/>
+              <a:off x="8213258" y="1766810"/>
+              <a:ext cx="20593" cy="68138"/>
             </a:xfrm>
             <a:custGeom>
               <a:avLst/>
@@ -5913,29 +6091,29 @@
               <a:cxnLst/>
               <a:rect l="0" t="0" r="r" b="b"/>
               <a:pathLst>
-                <a:path w="16562" h="73515" fill="norm">
+                <a:path w="20593" h="68138" fill="norm">
                   <a:moveTo>
-                    <a:pt x="0" y="28348"/>
+                    <a:pt x="0" y="24832"/>
                   </a:moveTo>
                   <a:cubicBezTo>
-                    <a:pt x="0" y="46156"/>
-                    <a:pt x="3653" y="64157"/>
-                    <a:pt x="8281" y="68836"/>
-                  </a:cubicBezTo>
-                  <a:cubicBezTo>
-                    <a:pt x="12908" y="73515"/>
-                    <a:pt x="16562" y="62638"/>
-                    <a:pt x="16562" y="44854"/>
-                  </a:cubicBezTo>
-                  <a:cubicBezTo>
-                    <a:pt x="16562" y="27069"/>
-                    <a:pt x="12908" y="8733"/>
-                    <a:pt x="8281" y="4367"/>
-                  </a:cubicBezTo>
-                  <a:cubicBezTo>
-                    <a:pt x="3653" y="0"/>
-                    <a:pt x="0" y="10541"/>
-                    <a:pt x="0" y="28348"/>
+                    <a:pt x="0" y="40883"/>
+                    <a:pt x="4543" y="57842"/>
+                    <a:pt x="10296" y="62990"/>
+                  </a:cubicBezTo>
+                  <a:cubicBezTo>
+                    <a:pt x="16050" y="68138"/>
+                    <a:pt x="20593" y="59053"/>
+                    <a:pt x="20593" y="43003"/>
+                  </a:cubicBezTo>
+                  <a:cubicBezTo>
+                    <a:pt x="20593" y="26952"/>
+                    <a:pt x="16050" y="9691"/>
+                    <a:pt x="10296" y="4845"/>
+                  </a:cubicBezTo>
+                  <a:cubicBezTo>
+                    <a:pt x="4543" y="0"/>
+                    <a:pt x="0" y="8782"/>
+                    <a:pt x="0" y="24832"/>
                   </a:cubicBezTo>
                   <a:close/>
                 </a:path>
@@ -5952,14 +6130,14 @@
         </p:sp>
         <p:sp>
           <p:nvSpPr>
-            <p:cNvPr id="95" name="right Speaker column 2 row 2 66"/>
+            <p:cNvPr id="100" name="right Speaker column 2 row 1 63"/>
             <p:cNvSpPr/>
             <p:nvPr/>
           </p:nvSpPr>
           <p:spPr>
             <a:xfrm>
-              <a:off x="8238719" y="2077591"/>
-              <a:ext cx="16562" cy="73592"/>
+              <a:off x="8213258" y="1671417"/>
+              <a:ext cx="20593" cy="68138"/>
             </a:xfrm>
             <a:custGeom>
               <a:avLst/>
@@ -5968,29 +6146,29 @@
               <a:cxnLst/>
               <a:rect l="0" t="0" r="r" b="b"/>
               <a:pathLst>
-                <a:path w="16562" h="73592" fill="norm">
+                <a:path w="20593" h="68138" fill="norm">
                   <a:moveTo>
-                    <a:pt x="0" y="28990"/>
+                    <a:pt x="0" y="25438"/>
                   </a:moveTo>
                   <a:cubicBezTo>
-                    <a:pt x="0" y="46798"/>
-                    <a:pt x="3653" y="64829"/>
-                    <a:pt x="8281" y="69210"/>
-                  </a:cubicBezTo>
-                  <a:cubicBezTo>
-                    <a:pt x="12908" y="73592"/>
-                    <a:pt x="16562" y="63081"/>
-                    <a:pt x="16562" y="45296"/>
-                  </a:cubicBezTo>
-                  <a:cubicBezTo>
-                    <a:pt x="16562" y="27512"/>
-                    <a:pt x="12908" y="9481"/>
-                    <a:pt x="8281" y="4741"/>
-                  </a:cubicBezTo>
-                  <a:cubicBezTo>
-                    <a:pt x="3653" y="0"/>
-                    <a:pt x="0" y="11182"/>
-                    <a:pt x="0" y="28654"/>
+                    <a:pt x="0" y="41488"/>
+                    <a:pt x="4543" y="58447"/>
+                    <a:pt x="10296" y="63293"/>
+                  </a:cubicBezTo>
+                  <a:cubicBezTo>
+                    <a:pt x="16050" y="68138"/>
+                    <a:pt x="20593" y="59356"/>
+                    <a:pt x="20593" y="43305"/>
+                  </a:cubicBezTo>
+                  <a:cubicBezTo>
+                    <a:pt x="20593" y="27255"/>
+                    <a:pt x="16050" y="10296"/>
+                    <a:pt x="10296" y="5148"/>
+                  </a:cubicBezTo>
+                  <a:cubicBezTo>
+                    <a:pt x="4543" y="0"/>
+                    <a:pt x="0" y="9388"/>
+                    <a:pt x="0" y="25135"/>
                   </a:cubicBezTo>
                   <a:close/>
                 </a:path>
@@ -6007,14 +6185,14 @@
         </p:sp>
         <p:sp>
           <p:nvSpPr>
-            <p:cNvPr id="96" name="right Speaker column 2 row 2 67"/>
+            <p:cNvPr id="101" name="right Speaker column 2 row 1 64"/>
             <p:cNvSpPr/>
             <p:nvPr/>
           </p:nvSpPr>
           <p:spPr>
             <a:xfrm>
-              <a:off x="8238719" y="1973126"/>
-              <a:ext cx="16562" cy="73332"/>
+              <a:off x="8213258" y="1577235"/>
+              <a:ext cx="20593" cy="67835"/>
             </a:xfrm>
             <a:custGeom>
               <a:avLst/>
@@ -6023,29 +6201,29 @@
               <a:cxnLst/>
               <a:rect l="0" t="0" r="r" b="b"/>
               <a:pathLst>
-                <a:path w="16562" h="73332" fill="norm">
+                <a:path w="20593" h="67835" fill="norm">
                   <a:moveTo>
-                    <a:pt x="0" y="28624"/>
+                    <a:pt x="0" y="25135"/>
                   </a:moveTo>
                   <a:cubicBezTo>
-                    <a:pt x="0" y="46432"/>
-                    <a:pt x="3653" y="64493"/>
-                    <a:pt x="8281" y="68912"/>
-                  </a:cubicBezTo>
-                  <a:cubicBezTo>
-                    <a:pt x="12908" y="73332"/>
-                    <a:pt x="16562" y="62515"/>
-                    <a:pt x="16562" y="44731"/>
-                  </a:cubicBezTo>
-                  <a:cubicBezTo>
-                    <a:pt x="16562" y="26946"/>
-                    <a:pt x="12908" y="8886"/>
-                    <a:pt x="8281" y="4443"/>
-                  </a:cubicBezTo>
-                  <a:cubicBezTo>
-                    <a:pt x="3653" y="0"/>
-                    <a:pt x="0" y="10816"/>
-                    <a:pt x="0" y="28624"/>
+                    <a:pt x="0" y="41186"/>
+                    <a:pt x="4543" y="58144"/>
+                    <a:pt x="10296" y="62990"/>
+                  </a:cubicBezTo>
+                  <a:cubicBezTo>
+                    <a:pt x="16050" y="67835"/>
+                    <a:pt x="20593" y="58750"/>
+                    <a:pt x="20593" y="42700"/>
+                  </a:cubicBezTo>
+                  <a:cubicBezTo>
+                    <a:pt x="20593" y="26649"/>
+                    <a:pt x="16050" y="9691"/>
+                    <a:pt x="10296" y="4845"/>
+                  </a:cubicBezTo>
+                  <a:cubicBezTo>
+                    <a:pt x="4543" y="0"/>
+                    <a:pt x="0" y="9085"/>
+                    <a:pt x="0" y="25135"/>
                   </a:cubicBezTo>
                   <a:close/>
                 </a:path>
@@ -6062,14 +6240,14 @@
         </p:sp>
         <p:sp>
           <p:nvSpPr>
-            <p:cNvPr id="97" name="right Speaker column 2 row 2 68"/>
+            <p:cNvPr id="102" name="right Speaker column 2 row 1 65"/>
             <p:cNvSpPr/>
             <p:nvPr/>
           </p:nvSpPr>
           <p:spPr>
             <a:xfrm>
-              <a:off x="8238719" y="1868326"/>
-              <a:ext cx="16562" cy="73408"/>
+              <a:off x="8213258" y="1482751"/>
+              <a:ext cx="20593" cy="67835"/>
             </a:xfrm>
             <a:custGeom>
               <a:avLst/>
@@ -6078,29 +6256,29 @@
               <a:cxnLst/>
               <a:rect l="0" t="0" r="r" b="b"/>
               <a:pathLst>
-                <a:path w="16562" h="73408" fill="norm">
+                <a:path w="20593" h="67835" fill="norm">
                   <a:moveTo>
-                    <a:pt x="0" y="28594"/>
+                    <a:pt x="0" y="25135"/>
                   </a:moveTo>
                   <a:cubicBezTo>
-                    <a:pt x="0" y="46402"/>
-                    <a:pt x="3653" y="64493"/>
-                    <a:pt x="8281" y="68950"/>
-                  </a:cubicBezTo>
-                  <a:cubicBezTo>
-                    <a:pt x="12908" y="73408"/>
-                    <a:pt x="16562" y="62621"/>
-                    <a:pt x="16562" y="44836"/>
-                  </a:cubicBezTo>
-                  <a:cubicBezTo>
-                    <a:pt x="16562" y="27052"/>
-                    <a:pt x="12908" y="8962"/>
-                    <a:pt x="8281" y="4481"/>
-                  </a:cubicBezTo>
-                  <a:cubicBezTo>
-                    <a:pt x="3653" y="0"/>
-                    <a:pt x="0" y="10786"/>
-                    <a:pt x="0" y="28594"/>
+                    <a:pt x="0" y="41186"/>
+                    <a:pt x="4543" y="58144"/>
+                    <a:pt x="10296" y="62990"/>
+                  </a:cubicBezTo>
+                  <a:cubicBezTo>
+                    <a:pt x="16050" y="67835"/>
+                    <a:pt x="20593" y="58750"/>
+                    <a:pt x="20593" y="42700"/>
+                  </a:cubicBezTo>
+                  <a:cubicBezTo>
+                    <a:pt x="20593" y="26649"/>
+                    <a:pt x="16050" y="9691"/>
+                    <a:pt x="10296" y="4845"/>
+                  </a:cubicBezTo>
+                  <a:cubicBezTo>
+                    <a:pt x="4543" y="0"/>
+                    <a:pt x="0" y="9085"/>
+                    <a:pt x="0" y="25135"/>
                   </a:cubicBezTo>
                   <a:close/>
                 </a:path>
@@ -6117,14 +6295,14 @@
         </p:sp>
         <p:sp>
           <p:nvSpPr>
-            <p:cNvPr id="98" name="right Speaker column 2 row 2 69"/>
+            <p:cNvPr id="103" name="right Speaker column 2 row 1 66"/>
             <p:cNvSpPr/>
             <p:nvPr/>
           </p:nvSpPr>
           <p:spPr>
             <a:xfrm>
-              <a:off x="8238719" y="1763525"/>
-              <a:ext cx="16562" cy="73148"/>
+              <a:off x="8213258" y="1388266"/>
+              <a:ext cx="20593" cy="67532"/>
             </a:xfrm>
             <a:custGeom>
               <a:avLst/>
@@ -6133,29 +6311,29 @@
               <a:cxnLst/>
               <a:rect l="0" t="0" r="r" b="b"/>
               <a:pathLst>
-                <a:path w="16562" h="73148" fill="norm">
+                <a:path w="20593" h="67532" fill="norm">
                   <a:moveTo>
-                    <a:pt x="0" y="28564"/>
+                    <a:pt x="0" y="25135"/>
                   </a:moveTo>
                   <a:cubicBezTo>
-                    <a:pt x="0" y="46372"/>
-                    <a:pt x="3653" y="64157"/>
-                    <a:pt x="8281" y="68653"/>
-                  </a:cubicBezTo>
-                  <a:cubicBezTo>
-                    <a:pt x="12908" y="73148"/>
-                    <a:pt x="16562" y="62056"/>
-                    <a:pt x="16562" y="44271"/>
-                  </a:cubicBezTo>
-                  <a:cubicBezTo>
-                    <a:pt x="16562" y="26486"/>
-                    <a:pt x="12908" y="8366"/>
-                    <a:pt x="8281" y="4183"/>
-                  </a:cubicBezTo>
-                  <a:cubicBezTo>
-                    <a:pt x="3653" y="0"/>
-                    <a:pt x="0" y="10756"/>
-                    <a:pt x="0" y="28564"/>
+                    <a:pt x="0" y="41186"/>
+                    <a:pt x="4543" y="57842"/>
+                    <a:pt x="10296" y="62687"/>
+                  </a:cubicBezTo>
+                  <a:cubicBezTo>
+                    <a:pt x="16050" y="67532"/>
+                    <a:pt x="20593" y="58144"/>
+                    <a:pt x="20593" y="42094"/>
+                  </a:cubicBezTo>
+                  <a:cubicBezTo>
+                    <a:pt x="20593" y="26044"/>
+                    <a:pt x="16050" y="9085"/>
+                    <a:pt x="10296" y="4543"/>
+                  </a:cubicBezTo>
+                  <a:cubicBezTo>
+                    <a:pt x="4543" y="0"/>
+                    <a:pt x="0" y="9085"/>
+                    <a:pt x="0" y="25135"/>
                   </a:cubicBezTo>
                   <a:close/>
                 </a:path>
@@ -6173,28 +6351,28 @@
       </p:grpSp>
       <p:grpSp>
         <p:nvGrpSpPr>
-          <p:cNvPr id="99" name="right Lever column 2 row 7"/>
+          <p:cNvPr id="104" name="right Lever column 2 row 7"/>
           <p:cNvGrpSpPr/>
           <p:nvPr/>
         </p:nvGrpSpPr>
         <p:grpSpPr>
           <a:xfrm>
-            <a:off x="4931150" y="4078769"/>
-            <a:ext cx="395277" cy="214603"/>
-            <a:chOff x="8131550" y="4659794"/>
-            <a:chExt cx="395277" cy="214603"/>
+            <a:off x="4874270" y="3612103"/>
+            <a:ext cx="501443" cy="272243"/>
+            <a:chOff x="8074670" y="4193128"/>
+            <a:chExt cx="501443" cy="272243"/>
           </a:xfrm>
         </p:grpSpPr>
         <p:sp>
           <p:nvSpPr>
-            <p:cNvPr id="100" name="right Lever column 2 row 7 9"/>
+            <p:cNvPr id="105" name="right Lever column 2 row 7 6"/>
             <p:cNvSpPr/>
             <p:nvPr/>
           </p:nvSpPr>
           <p:spPr>
             <a:xfrm>
-              <a:off x="8131550" y="4674496"/>
-              <a:ext cx="395277" cy="199900"/>
+              <a:off x="8074670" y="4211779"/>
+              <a:ext cx="501443" cy="253591"/>
             </a:xfrm>
             <a:custGeom>
               <a:avLst/>
@@ -6203,21 +6381,21 @@
               <a:cxnLst/>
               <a:rect l="0" t="0" r="r" b="b"/>
               <a:pathLst>
-                <a:path w="395277" h="199900" fill="norm">
+                <a:path w="501443" h="253591" fill="norm">
                   <a:moveTo>
-                    <a:pt x="395277" y="199900"/>
+                    <a:pt x="501443" y="253591"/>
                   </a:moveTo>
                   <a:lnTo>
-                    <a:pt x="162013" y="199900"/>
+                    <a:pt x="205527" y="253591"/>
                   </a:lnTo>
                   <a:lnTo>
                     <a:pt x="0" y="0"/>
                   </a:lnTo>
                   <a:lnTo>
-                    <a:pt x="227892" y="0"/>
+                    <a:pt x="289101" y="0"/>
                   </a:lnTo>
                   <a:lnTo>
-                    <a:pt x="395277" y="199900"/>
+                    <a:pt x="501443" y="253591"/>
                   </a:lnTo>
                   <a:close/>
                 </a:path>
@@ -6226,7 +6404,7 @@
             <a:solidFill>
               <a:srgbClr val="9E9D9B"/>
             </a:solidFill>
-            <a:ln w="7069" cap="rnd">
+            <a:ln w="8967" cap="rnd">
               <a:solidFill>
                 <a:srgbClr val="040000"/>
               </a:solidFill>
@@ -6236,14 +6414,14 @@
         </p:sp>
         <p:sp>
           <p:nvSpPr>
-            <p:cNvPr id="101" name="right Lever column 2 row 7 10"/>
+            <p:cNvPr id="106" name="right Lever column 2 row 7 7"/>
             <p:cNvSpPr/>
             <p:nvPr/>
           </p:nvSpPr>
           <p:spPr>
             <a:xfrm>
-              <a:off x="8293563" y="4859694"/>
-              <a:ext cx="233264" cy="14703"/>
+              <a:off x="8280197" y="4446719"/>
+              <a:ext cx="295916" cy="18652"/>
             </a:xfrm>
             <a:custGeom>
               <a:avLst/>
@@ -6252,18 +6430,18 @@
               <a:cxnLst/>
               <a:rect l="0" t="0" r="r" b="b"/>
               <a:pathLst>
-                <a:path w="233264" h="14703" fill="norm">
+                <a:path w="295916" h="18652" fill="norm">
                   <a:moveTo>
                     <a:pt x="0" y="0"/>
                   </a:moveTo>
                   <a:lnTo>
-                    <a:pt x="233264" y="0"/>
+                    <a:pt x="295916" y="0"/>
                   </a:lnTo>
                   <a:lnTo>
-                    <a:pt x="233264" y="14703"/>
+                    <a:pt x="295916" y="18652"/>
                   </a:lnTo>
                   <a:lnTo>
-                    <a:pt x="0" y="14703"/>
+                    <a:pt x="0" y="18652"/>
                   </a:lnTo>
                   <a:close/>
                 </a:path>
@@ -6272,7 +6450,7 @@
             <a:solidFill>
               <a:srgbClr val="9E9D9B"/>
             </a:solidFill>
-            <a:ln w="7069" cap="rnd">
+            <a:ln w="8967" cap="rnd">
               <a:solidFill>
                 <a:srgbClr val="040000"/>
               </a:solidFill>
@@ -6282,14 +6460,14 @@
         </p:sp>
         <p:sp>
           <p:nvSpPr>
-            <p:cNvPr id="102" name="right Lever column 2 row 7 11"/>
+            <p:cNvPr id="107" name="right Lever column 2 row 7 8"/>
             <p:cNvSpPr/>
             <p:nvPr/>
           </p:nvSpPr>
           <p:spPr>
             <a:xfrm>
-              <a:off x="8131550" y="4659794"/>
-              <a:ext cx="395277" cy="199900"/>
+              <a:off x="8074670" y="4193128"/>
+              <a:ext cx="501443" cy="253591"/>
             </a:xfrm>
             <a:custGeom>
               <a:avLst/>
@@ -6298,21 +6476,21 @@
               <a:cxnLst/>
               <a:rect l="0" t="0" r="r" b="b"/>
               <a:pathLst>
-                <a:path w="395277" h="199900" fill="norm">
+                <a:path w="501443" h="253591" fill="norm">
                   <a:moveTo>
-                    <a:pt x="395277" y="199900"/>
+                    <a:pt x="501443" y="253591"/>
                   </a:moveTo>
                   <a:lnTo>
-                    <a:pt x="162013" y="199900"/>
+                    <a:pt x="205527" y="253591"/>
                   </a:lnTo>
                   <a:lnTo>
                     <a:pt x="0" y="0"/>
                   </a:lnTo>
                   <a:lnTo>
-                    <a:pt x="227892" y="0"/>
+                    <a:pt x="289101" y="0"/>
                   </a:lnTo>
                   <a:lnTo>
-                    <a:pt x="395277" y="199900"/>
+                    <a:pt x="501443" y="253591"/>
                   </a:lnTo>
                   <a:close/>
                 </a:path>
@@ -6321,7 +6499,7 @@
             <a:solidFill>
               <a:srgbClr val="9E9D9B"/>
             </a:solidFill>
-            <a:ln w="7069" cap="rnd">
+            <a:ln w="8967" cap="rnd">
               <a:solidFill>
                 <a:srgbClr val="040000"/>
               </a:solidFill>
@@ -6331,14 +6509,14 @@
         </p:sp>
         <p:sp>
           <p:nvSpPr>
-            <p:cNvPr id="103" name="right Lever column 2 row 7 12"/>
+            <p:cNvPr id="108" name="right Lever column 2 row 7 9"/>
             <p:cNvSpPr/>
             <p:nvPr/>
           </p:nvSpPr>
           <p:spPr>
             <a:xfrm>
-              <a:off x="8131550" y="4659794"/>
-              <a:ext cx="162013" cy="214603"/>
+              <a:off x="8074670" y="4193128"/>
+              <a:ext cx="205527" cy="272243"/>
             </a:xfrm>
             <a:custGeom>
               <a:avLst/>
@@ -6347,18 +6525,18 @@
               <a:cxnLst/>
               <a:rect l="0" t="0" r="r" b="b"/>
               <a:pathLst>
-                <a:path w="162013" h="214603" fill="norm">
+                <a:path w="205527" h="272243" fill="norm">
                   <a:moveTo>
                     <a:pt x="0" y="0"/>
                   </a:moveTo>
                   <a:lnTo>
-                    <a:pt x="162013" y="199618"/>
+                    <a:pt x="205527" y="253232"/>
                   </a:lnTo>
                   <a:lnTo>
-                    <a:pt x="162013" y="214603"/>
+                    <a:pt x="205527" y="272243"/>
                   </a:lnTo>
                   <a:lnTo>
-                    <a:pt x="0" y="14703"/>
+                    <a:pt x="0" y="18652"/>
                   </a:lnTo>
                   <a:lnTo>
                     <a:pt x="0" y="0"/>
@@ -6370,7 +6548,7 @@
             <a:solidFill>
               <a:srgbClr val="9E9D9B"/>
             </a:solidFill>
-            <a:ln w="7069" cap="rnd">
+            <a:ln w="8967" cap="rnd">
               <a:solidFill>
                 <a:srgbClr val="040000"/>
               </a:solidFill>
@@ -6381,28 +6559,28 @@
       </p:grpSp>
       <p:grpSp>
         <p:nvGrpSpPr>
-          <p:cNvPr id="104" name="Box outer frame"/>
+          <p:cNvPr id="109" name="Box outer frame"/>
           <p:cNvGrpSpPr/>
           <p:nvPr/>
         </p:nvGrpSpPr>
         <p:grpSpPr>
           <a:xfrm>
-            <a:off x="9325" y="752750"/>
-            <a:ext cx="5772550" cy="5029125"/>
-            <a:chOff x="3209725" y="1333775"/>
-            <a:chExt cx="5772550" cy="5029125"/>
+            <a:off x="9325" y="670654"/>
+            <a:ext cx="5772550" cy="4473764"/>
+            <a:chOff x="3209725" y="1251679"/>
+            <a:chExt cx="5772550" cy="4473764"/>
           </a:xfrm>
         </p:grpSpPr>
         <p:sp>
           <p:nvSpPr>
-            <p:cNvPr id="105" name="Box outer frame 92"/>
+            <p:cNvPr id="110" name="Box outer frame 97"/>
             <p:cNvSpPr/>
             <p:nvPr/>
           </p:nvSpPr>
           <p:spPr>
             <a:xfrm>
-              <a:off x="3209725" y="1333775"/>
-              <a:ext cx="5772550" cy="5029125"/>
+              <a:off x="3209725" y="1251679"/>
+              <a:ext cx="5772550" cy="4473764"/>
             </a:xfrm>
             <a:custGeom>
               <a:avLst/>
@@ -6411,9 +6589,9 @@
               <a:cxnLst/>
               <a:rect l="0" t="0" r="r" b="b"/>
               <a:pathLst>
-                <a:path w="5772550" h="5029125" fill="norm">
+                <a:path w="5772550" h="4473764" fill="norm">
                   <a:moveTo>
-                    <a:pt x="5772550" y="4894529"/>
+                    <a:pt x="5772550" y="4354031"/>
                   </a:moveTo>
                   <a:lnTo>
                     <a:pt x="5772550" y="0"/>
@@ -6422,10 +6600,10 @@
                     <a:pt x="5639762" y="0"/>
                   </a:lnTo>
                   <a:lnTo>
-                    <a:pt x="5638643" y="4894529"/>
+                    <a:pt x="5638643" y="4354031"/>
                   </a:lnTo>
                   <a:lnTo>
-                    <a:pt x="134280" y="4894529"/>
+                    <a:pt x="134280" y="4354031"/>
                   </a:lnTo>
                   <a:lnTo>
                     <a:pt x="132788" y="0"/>
@@ -6434,19 +6612,19 @@
                     <a:pt x="0" y="0"/>
                   </a:lnTo>
                   <a:lnTo>
-                    <a:pt x="0" y="4894529"/>
+                    <a:pt x="0" y="4354031"/>
                   </a:lnTo>
                   <a:lnTo>
-                    <a:pt x="0" y="5029125"/>
+                    <a:pt x="0" y="4473764"/>
                   </a:lnTo>
                   <a:lnTo>
-                    <a:pt x="5772550" y="5029125"/>
+                    <a:pt x="5772550" y="4473764"/>
                   </a:lnTo>
                   <a:lnTo>
-                    <a:pt x="5772550" y="4894529"/>
+                    <a:pt x="5772550" y="4354031"/>
                   </a:lnTo>
                   <a:lnTo>
-                    <a:pt x="5772550" y="4894529"/>
+                    <a:pt x="5772550" y="4354031"/>
                   </a:lnTo>
                   <a:close/>
                 </a:path>
@@ -6466,7 +6644,7 @@
       </p:grpSp>
       <p:grpSp>
         <p:nvGrpSpPr>
-          <p:cNvPr id="106" name="Rat"/>
+          <p:cNvPr id="111" name="Rat"/>
           <p:cNvGrpSpPr/>
           <p:nvPr/>
         </p:nvGrpSpPr>
@@ -6480,7 +6658,7 @@
         </p:grpSpPr>
         <p:sp>
           <p:nvSpPr>
-            <p:cNvPr id="107" name="LE rat nose Outline 1"/>
+            <p:cNvPr id="112" name="LE rat nose Outline 1"/>
             <p:cNvSpPr/>
             <p:nvPr/>
           </p:nvSpPr>
@@ -6520,7 +6698,7 @@
         </p:sp>
         <p:sp>
           <p:nvSpPr>
-            <p:cNvPr id="108" name="LE rat nose Outline 2"/>
+            <p:cNvPr id="113" name="LE rat nose Outline 2"/>
             <p:cNvSpPr/>
             <p:nvPr/>
           </p:nvSpPr>
@@ -8350,7 +8528,7 @@
         </p:sp>
         <p:sp>
           <p:nvSpPr>
-            <p:cNvPr id="109" name="LE rat nose White fur 3"/>
+            <p:cNvPr id="114" name="LE rat nose White fur 3"/>
             <p:cNvSpPr/>
             <p:nvPr/>
           </p:nvSpPr>
@@ -8395,7 +8573,7 @@
         </p:sp>
         <p:sp>
           <p:nvSpPr>
-            <p:cNvPr id="110" name="LE rat nose White fur 4"/>
+            <p:cNvPr id="115" name="LE rat nose White fur 4"/>
             <p:cNvSpPr/>
             <p:nvPr/>
           </p:nvSpPr>
@@ -8990,7 +9168,7 @@
         </p:sp>
         <p:sp>
           <p:nvSpPr>
-            <p:cNvPr id="111" name="LE rat nose Skin 5"/>
+            <p:cNvPr id="116" name="LE rat nose Skin 5"/>
             <p:cNvSpPr/>
             <p:nvPr/>
           </p:nvSpPr>
@@ -9055,7 +9233,7 @@
         </p:sp>
         <p:sp>
           <p:nvSpPr>
-            <p:cNvPr id="112" name="LE rat nose Skin 6"/>
+            <p:cNvPr id="117" name="LE rat nose Skin 6"/>
             <p:cNvSpPr/>
             <p:nvPr/>
           </p:nvSpPr>
@@ -9280,7 +9458,7 @@
         </p:sp>
         <p:sp>
           <p:nvSpPr>
-            <p:cNvPr id="113" name="LE rat nose Skin 7"/>
+            <p:cNvPr id="118" name="LE rat nose Skin 7"/>
             <p:cNvSpPr/>
             <p:nvPr/>
           </p:nvSpPr>
@@ -9590,7 +9768,7 @@
         </p:sp>
         <p:sp>
           <p:nvSpPr>
-            <p:cNvPr id="114" name="LE rat nose Skin 8"/>
+            <p:cNvPr id="119" name="LE rat nose Skin 8"/>
             <p:cNvSpPr/>
             <p:nvPr/>
           </p:nvSpPr>
@@ -10345,7 +10523,7 @@
         </p:sp>
         <p:sp>
           <p:nvSpPr>
-            <p:cNvPr id="115" name="LE rat nose Skin 9"/>
+            <p:cNvPr id="120" name="LE rat nose Skin 9"/>
             <p:cNvSpPr/>
             <p:nvPr/>
           </p:nvSpPr>
@@ -10465,7 +10643,7 @@
         </p:sp>
         <p:sp>
           <p:nvSpPr>
-            <p:cNvPr id="116" name="LE rat nose Skin shading 10"/>
+            <p:cNvPr id="121" name="LE rat nose Skin shading 10"/>
             <p:cNvSpPr/>
             <p:nvPr/>
           </p:nvSpPr>
@@ -10520,7 +10698,7 @@
         </p:sp>
         <p:sp>
           <p:nvSpPr>
-            <p:cNvPr id="117" name="LE rat nose Skin shading 11"/>
+            <p:cNvPr id="122" name="LE rat nose Skin shading 11"/>
             <p:cNvSpPr/>
             <p:nvPr/>
           </p:nvSpPr>
@@ -10655,7 +10833,7 @@
         </p:sp>
         <p:sp>
           <p:nvSpPr>
-            <p:cNvPr id="118" name="LE rat nose Skin shading 12"/>
+            <p:cNvPr id="123" name="LE rat nose Skin shading 12"/>
             <p:cNvSpPr/>
             <p:nvPr/>
           </p:nvSpPr>
@@ -10760,7 +10938,7 @@
         </p:sp>
         <p:sp>
           <p:nvSpPr>
-            <p:cNvPr id="119" name="LE rat nose Skin shading 13"/>
+            <p:cNvPr id="124" name="LE rat nose Skin shading 13"/>
             <p:cNvSpPr/>
             <p:nvPr/>
           </p:nvSpPr>
@@ -10825,7 +11003,7 @@
         </p:sp>
         <p:sp>
           <p:nvSpPr>
-            <p:cNvPr id="120" name="LE rat nose Skin shading 14"/>
+            <p:cNvPr id="125" name="LE rat nose Skin shading 14"/>
             <p:cNvSpPr/>
             <p:nvPr/>
           </p:nvSpPr>
@@ -10940,7 +11118,7 @@
         </p:sp>
         <p:sp>
           <p:nvSpPr>
-            <p:cNvPr id="121" name="LE rat nose Skin shading 15"/>
+            <p:cNvPr id="126" name="LE rat nose Skin shading 15"/>
             <p:cNvSpPr/>
             <p:nvPr/>
           </p:nvSpPr>
@@ -11190,7 +11368,7 @@
         </p:sp>
         <p:sp>
           <p:nvSpPr>
-            <p:cNvPr id="122" name="LE rat nose Charcoal shading 16"/>
+            <p:cNvPr id="127" name="LE rat nose Charcoal shading 16"/>
             <p:cNvSpPr/>
             <p:nvPr/>
           </p:nvSpPr>
@@ -11405,7 +11583,7 @@
         </p:sp>
         <p:sp>
           <p:nvSpPr>
-            <p:cNvPr id="123" name="LE rat nose Charcoal shading 17"/>
+            <p:cNvPr id="128" name="LE rat nose Charcoal shading 17"/>
             <p:cNvSpPr/>
             <p:nvPr/>
           </p:nvSpPr>
@@ -11530,7 +11708,7 @@
         </p:sp>
         <p:sp>
           <p:nvSpPr>
-            <p:cNvPr id="124" name="LE rat nose Charcoal shading 18"/>
+            <p:cNvPr id="129" name="LE rat nose Charcoal shading 18"/>
             <p:cNvSpPr/>
             <p:nvPr/>
           </p:nvSpPr>
@@ -12748,7 +12926,7 @@
         </p:sp>
         <p:sp>
           <p:nvSpPr>
-            <p:cNvPr id="125" name="LE rat nose Eye and fur detail 19"/>
+            <p:cNvPr id="130" name="LE rat nose Eye and fur detail 19"/>
             <p:cNvSpPr/>
             <p:nvPr/>
           </p:nvSpPr>

--- a/docs/reference-style.pptx
+++ b/docs/reference-style.pptx
@@ -1781,7 +1781,4607 @@
       </p:grpSp>
       <p:grpSp>
         <p:nvGrpSpPr>
-          <p:cNvPr id="20" name="Box glass ceiling"/>
+          <p:cNvPr id="20" name="left House light column 3 row 2"/>
+          <p:cNvGrpSpPr/>
+          <p:nvPr/>
+        </p:nvGrpSpPr>
+        <p:grpSpPr>
+          <a:xfrm>
+            <a:off x="931026" y="1276881"/>
+            <a:ext cx="508543" cy="342276"/>
+            <a:chOff x="4131426" y="1857906"/>
+            <a:chExt cx="508543" cy="342276"/>
+          </a:xfrm>
+        </p:grpSpPr>
+        <p:sp>
+          <p:nvSpPr>
+            <p:cNvPr id="21" name="left House light column 3 row 2 3"/>
+            <p:cNvSpPr/>
+            <p:nvPr/>
+          </p:nvSpPr>
+          <p:spPr>
+            <a:xfrm>
+              <a:off x="4131426" y="1858534"/>
+              <a:ext cx="102777" cy="341648"/>
+            </a:xfrm>
+            <a:custGeom>
+              <a:avLst/>
+              <a:gdLst/>
+              <a:ahLst/>
+              <a:cxnLst/>
+              <a:rect l="0" t="0" r="r" b="b"/>
+              <a:pathLst>
+                <a:path w="102777" h="341648" fill="norm">
+                  <a:moveTo>
+                    <a:pt x="102777" y="341333"/>
+                  </a:moveTo>
+                  <a:lnTo>
+                    <a:pt x="54689" y="341333"/>
+                  </a:lnTo>
+                  <a:cubicBezTo>
+                    <a:pt x="24201" y="341333"/>
+                    <a:pt x="0" y="265272"/>
+                    <a:pt x="0" y="170981"/>
+                  </a:cubicBezTo>
+                  <a:cubicBezTo>
+                    <a:pt x="0" y="76690"/>
+                    <a:pt x="24201" y="0"/>
+                    <a:pt x="54689" y="0"/>
+                  </a:cubicBezTo>
+                  <a:lnTo>
+                    <a:pt x="102777" y="0"/>
+                  </a:lnTo>
+                  <a:cubicBezTo>
+                    <a:pt x="93977" y="0"/>
+                    <a:pt x="86119" y="5972"/>
+                    <a:pt x="79204" y="16972"/>
+                  </a:cubicBezTo>
+                  <a:cubicBezTo>
+                    <a:pt x="60346" y="44631"/>
+                    <a:pt x="47774" y="103091"/>
+                    <a:pt x="47774" y="170981"/>
+                  </a:cubicBezTo>
+                  <a:cubicBezTo>
+                    <a:pt x="47774" y="238870"/>
+                    <a:pt x="60346" y="297331"/>
+                    <a:pt x="79204" y="324990"/>
+                  </a:cubicBezTo>
+                  <a:cubicBezTo>
+                    <a:pt x="86433" y="335362"/>
+                    <a:pt x="93977" y="341648"/>
+                    <a:pt x="102777" y="341648"/>
+                  </a:cubicBezTo>
+                  <a:close/>
+                </a:path>
+              </a:pathLst>
+            </a:custGeom>
+            <a:solidFill>
+              <a:srgbClr val="000000"/>
+            </a:solidFill>
+            <a:ln w="9429" cap="rnd">
+              <a:solidFill>
+                <a:srgbClr val="231815"/>
+              </a:solidFill>
+              <a:round/>
+            </a:ln>
+          </p:spPr>
+        </p:sp>
+        <p:sp>
+          <p:nvSpPr>
+            <p:cNvPr id="22" name="left House light column 3 row 2 4"/>
+            <p:cNvSpPr/>
+            <p:nvPr/>
+          </p:nvSpPr>
+          <p:spPr>
+            <a:xfrm>
+              <a:off x="4179200" y="1857906"/>
+              <a:ext cx="109692" cy="341648"/>
+            </a:xfrm>
+            <a:custGeom>
+              <a:avLst/>
+              <a:gdLst/>
+              <a:ahLst/>
+              <a:cxnLst/>
+              <a:rect l="0" t="0" r="r" b="b"/>
+              <a:pathLst>
+                <a:path w="109692" h="341648" fill="norm">
+                  <a:moveTo>
+                    <a:pt x="109692" y="171295"/>
+                  </a:moveTo>
+                  <a:cubicBezTo>
+                    <a:pt x="109692" y="265586"/>
+                    <a:pt x="85490" y="341648"/>
+                    <a:pt x="55003" y="341648"/>
+                  </a:cubicBezTo>
+                  <a:cubicBezTo>
+                    <a:pt x="46203" y="341648"/>
+                    <a:pt x="38345" y="335676"/>
+                    <a:pt x="31430" y="324990"/>
+                  </a:cubicBezTo>
+                  <a:cubicBezTo>
+                    <a:pt x="12572" y="297331"/>
+                    <a:pt x="0" y="238870"/>
+                    <a:pt x="0" y="170981"/>
+                  </a:cubicBezTo>
+                  <a:cubicBezTo>
+                    <a:pt x="0" y="103091"/>
+                    <a:pt x="12572" y="44631"/>
+                    <a:pt x="31430" y="16972"/>
+                  </a:cubicBezTo>
+                  <a:cubicBezTo>
+                    <a:pt x="38659" y="5972"/>
+                    <a:pt x="46203" y="0"/>
+                    <a:pt x="55003" y="0"/>
+                  </a:cubicBezTo>
+                  <a:cubicBezTo>
+                    <a:pt x="85490" y="0"/>
+                    <a:pt x="109692" y="76061"/>
+                    <a:pt x="109692" y="170981"/>
+                  </a:cubicBezTo>
+                  <a:close/>
+                </a:path>
+              </a:pathLst>
+            </a:custGeom>
+            <a:solidFill>
+              <a:srgbClr val="B3B3B3"/>
+            </a:solidFill>
+            <a:ln w="9429" cap="rnd">
+              <a:solidFill>
+                <a:srgbClr val="231815"/>
+              </a:solidFill>
+              <a:round/>
+            </a:ln>
+          </p:spPr>
+        </p:sp>
+        <p:sp>
+          <p:nvSpPr>
+            <p:cNvPr id="23" name="left House light column 3 row 2 5"/>
+            <p:cNvSpPr/>
+            <p:nvPr/>
+          </p:nvSpPr>
+          <p:spPr>
+            <a:xfrm>
+              <a:off x="4265634" y="1872678"/>
+              <a:ext cx="96177" cy="110949"/>
+            </a:xfrm>
+            <a:custGeom>
+              <a:avLst/>
+              <a:gdLst/>
+              <a:ahLst/>
+              <a:cxnLst/>
+              <a:rect l="0" t="0" r="r" b="b"/>
+              <a:pathLst>
+                <a:path w="96177" h="110949" fill="norm">
+                  <a:moveTo>
+                    <a:pt x="95862" y="110949"/>
+                  </a:moveTo>
+                  <a:lnTo>
+                    <a:pt x="0" y="110949"/>
+                  </a:lnTo>
+                  <a:cubicBezTo>
+                    <a:pt x="629" y="104349"/>
+                    <a:pt x="1257" y="98691"/>
+                    <a:pt x="2200" y="92719"/>
+                  </a:cubicBezTo>
+                  <a:cubicBezTo>
+                    <a:pt x="4400" y="75747"/>
+                    <a:pt x="7858" y="60032"/>
+                    <a:pt x="12258" y="47460"/>
+                  </a:cubicBezTo>
+                  <a:cubicBezTo>
+                    <a:pt x="19487" y="23887"/>
+                    <a:pt x="29230" y="7229"/>
+                    <a:pt x="40231" y="2200"/>
+                  </a:cubicBezTo>
+                  <a:cubicBezTo>
+                    <a:pt x="40859" y="2200"/>
+                    <a:pt x="40859" y="1572"/>
+                    <a:pt x="41488" y="1572"/>
+                  </a:cubicBezTo>
+                  <a:cubicBezTo>
+                    <a:pt x="43688" y="314"/>
+                    <a:pt x="45888" y="0"/>
+                    <a:pt x="48088" y="0"/>
+                  </a:cubicBezTo>
+                  <a:cubicBezTo>
+                    <a:pt x="70718" y="0"/>
+                    <a:pt x="89891" y="46203"/>
+                    <a:pt x="96177" y="110949"/>
+                  </a:cubicBezTo>
+                  <a:close/>
+                </a:path>
+              </a:pathLst>
+            </a:custGeom>
+            <a:solidFill>
+              <a:srgbClr val="B3B3B3"/>
+            </a:solidFill>
+            <a:ln w="7858" cap="rnd">
+              <a:solidFill>
+                <a:srgbClr val="4D4D4D"/>
+              </a:solidFill>
+              <a:round/>
+            </a:ln>
+          </p:spPr>
+        </p:sp>
+        <p:sp>
+          <p:nvSpPr>
+            <p:cNvPr id="24" name="left House light column 3 row 2 6"/>
+            <p:cNvSpPr/>
+            <p:nvPr/>
+          </p:nvSpPr>
+          <p:spPr>
+            <a:xfrm>
+              <a:off x="4526505" y="1872364"/>
+              <a:ext cx="76376" cy="313046"/>
+            </a:xfrm>
+            <a:custGeom>
+              <a:avLst/>
+              <a:gdLst/>
+              <a:ahLst/>
+              <a:cxnLst/>
+              <a:rect l="0" t="0" r="r" b="b"/>
+              <a:pathLst>
+                <a:path w="76376" h="313046" fill="norm">
+                  <a:moveTo>
+                    <a:pt x="76376" y="313046"/>
+                  </a:moveTo>
+                  <a:lnTo>
+                    <a:pt x="37088" y="313046"/>
+                  </a:lnTo>
+                  <a:cubicBezTo>
+                    <a:pt x="16029" y="313046"/>
+                    <a:pt x="0" y="242956"/>
+                    <a:pt x="0" y="156837"/>
+                  </a:cubicBezTo>
+                  <a:cubicBezTo>
+                    <a:pt x="0" y="140808"/>
+                    <a:pt x="629" y="125407"/>
+                    <a:pt x="1572" y="110949"/>
+                  </a:cubicBezTo>
+                  <a:cubicBezTo>
+                    <a:pt x="5972" y="46517"/>
+                    <a:pt x="19801" y="0"/>
+                    <a:pt x="36773" y="0"/>
+                  </a:cubicBezTo>
+                  <a:lnTo>
+                    <a:pt x="76061" y="0"/>
+                  </a:lnTo>
+                  <a:cubicBezTo>
+                    <a:pt x="68832" y="0"/>
+                    <a:pt x="62232" y="8800"/>
+                    <a:pt x="56260" y="24830"/>
+                  </a:cubicBezTo>
+                  <a:cubicBezTo>
+                    <a:pt x="50603" y="39602"/>
+                    <a:pt x="46203" y="60032"/>
+                    <a:pt x="43688" y="84862"/>
+                  </a:cubicBezTo>
+                  <a:cubicBezTo>
+                    <a:pt x="42431" y="93034"/>
+                    <a:pt x="42117" y="101834"/>
+                    <a:pt x="41488" y="110635"/>
+                  </a:cubicBezTo>
+                  <a:cubicBezTo>
+                    <a:pt x="40231" y="125093"/>
+                    <a:pt x="39917" y="140494"/>
+                    <a:pt x="39917" y="156523"/>
+                  </a:cubicBezTo>
+                  <a:cubicBezTo>
+                    <a:pt x="39917" y="211526"/>
+                    <a:pt x="45888" y="260243"/>
+                    <a:pt x="56575" y="287902"/>
+                  </a:cubicBezTo>
+                  <a:cubicBezTo>
+                    <a:pt x="62546" y="303931"/>
+                    <a:pt x="69147" y="312732"/>
+                    <a:pt x="76376" y="312732"/>
+                  </a:cubicBezTo>
+                  <a:close/>
+                </a:path>
+              </a:pathLst>
+            </a:custGeom>
+            <a:solidFill>
+              <a:srgbClr val="666666"/>
+            </a:solidFill>
+            <a:ln w="0" cap="rnd">
+              <a:noFill/>
+              <a:round/>
+            </a:ln>
+          </p:spPr>
+        </p:sp>
+        <p:sp>
+          <p:nvSpPr>
+            <p:cNvPr id="25" name="left House light column 3 row 2 7"/>
+            <p:cNvSpPr/>
+            <p:nvPr/>
+          </p:nvSpPr>
+          <p:spPr>
+            <a:xfrm>
+              <a:off x="4281977" y="1894679"/>
+              <a:ext cx="323732" cy="88948"/>
+            </a:xfrm>
+            <a:custGeom>
+              <a:avLst/>
+              <a:gdLst/>
+              <a:ahLst/>
+              <a:cxnLst/>
+              <a:rect l="0" t="0" r="r" b="b"/>
+              <a:pathLst>
+                <a:path w="323732" h="88948" fill="norm">
+                  <a:moveTo>
+                    <a:pt x="323418" y="0"/>
+                  </a:moveTo>
+                  <a:lnTo>
+                    <a:pt x="323418" y="88948"/>
+                  </a:lnTo>
+                  <a:lnTo>
+                    <a:pt x="0" y="88948"/>
+                  </a:lnTo>
+                  <a:cubicBezTo>
+                    <a:pt x="5029" y="36773"/>
+                    <a:pt x="17601" y="0"/>
+                    <a:pt x="32688" y="0"/>
+                  </a:cubicBezTo>
+                  <a:lnTo>
+                    <a:pt x="323732" y="0"/>
+                  </a:lnTo>
+                  <a:close/>
+                </a:path>
+              </a:pathLst>
+            </a:custGeom>
+            <a:solidFill>
+              <a:srgbClr val="97CDDE">
+                <a:alpha val="80000"/>
+              </a:srgbClr>
+            </a:solidFill>
+            <a:ln w="0" cap="rnd">
+              <a:noFill/>
+              <a:round/>
+            </a:ln>
+          </p:spPr>
+        </p:sp>
+        <p:sp>
+          <p:nvSpPr>
+            <p:cNvPr id="26" name="left House light column 3 row 2 8"/>
+            <p:cNvSpPr/>
+            <p:nvPr/>
+          </p:nvSpPr>
+          <p:spPr>
+            <a:xfrm>
+              <a:off x="4222260" y="1872678"/>
+              <a:ext cx="417709" cy="312732"/>
+            </a:xfrm>
+            <a:custGeom>
+              <a:avLst/>
+              <a:gdLst/>
+              <a:ahLst/>
+              <a:cxnLst/>
+              <a:rect l="0" t="0" r="r" b="b"/>
+              <a:pathLst>
+                <a:path w="417709" h="312732" fill="norm">
+                  <a:moveTo>
+                    <a:pt x="417709" y="156523"/>
+                  </a:moveTo>
+                  <a:cubicBezTo>
+                    <a:pt x="417709" y="242642"/>
+                    <a:pt x="401051" y="312732"/>
+                    <a:pt x="380621" y="312732"/>
+                  </a:cubicBezTo>
+                  <a:lnTo>
+                    <a:pt x="50289" y="312732"/>
+                  </a:lnTo>
+                  <a:cubicBezTo>
+                    <a:pt x="22630" y="312732"/>
+                    <a:pt x="0" y="242642"/>
+                    <a:pt x="0" y="156523"/>
+                  </a:cubicBezTo>
+                  <a:cubicBezTo>
+                    <a:pt x="0" y="70404"/>
+                    <a:pt x="22630" y="0"/>
+                    <a:pt x="50289" y="0"/>
+                  </a:cubicBezTo>
+                  <a:lnTo>
+                    <a:pt x="91148" y="0"/>
+                  </a:lnTo>
+                  <a:cubicBezTo>
+                    <a:pt x="88948" y="0"/>
+                    <a:pt x="86748" y="629"/>
+                    <a:pt x="84548" y="1572"/>
+                  </a:cubicBezTo>
+                  <a:cubicBezTo>
+                    <a:pt x="83919" y="1572"/>
+                    <a:pt x="83919" y="2200"/>
+                    <a:pt x="83290" y="2200"/>
+                  </a:cubicBezTo>
+                  <a:cubicBezTo>
+                    <a:pt x="72290" y="7229"/>
+                    <a:pt x="62232" y="23573"/>
+                    <a:pt x="55317" y="47460"/>
+                  </a:cubicBezTo>
+                  <a:cubicBezTo>
+                    <a:pt x="50917" y="60661"/>
+                    <a:pt x="47460" y="75433"/>
+                    <a:pt x="45260" y="92719"/>
+                  </a:cubicBezTo>
+                  <a:cubicBezTo>
+                    <a:pt x="44002" y="98691"/>
+                    <a:pt x="43688" y="104349"/>
+                    <a:pt x="43060" y="110949"/>
+                  </a:cubicBezTo>
+                  <a:lnTo>
+                    <a:pt x="306131" y="110949"/>
+                  </a:lnTo>
+                  <a:cubicBezTo>
+                    <a:pt x="310532" y="46517"/>
+                    <a:pt x="324361" y="0"/>
+                    <a:pt x="341333" y="0"/>
+                  </a:cubicBezTo>
+                  <a:lnTo>
+                    <a:pt x="380621" y="0"/>
+                  </a:lnTo>
+                  <a:cubicBezTo>
+                    <a:pt x="397279" y="0"/>
+                    <a:pt x="411423" y="46203"/>
+                    <a:pt x="415823" y="110949"/>
+                  </a:cubicBezTo>
+                  <a:cubicBezTo>
+                    <a:pt x="417080" y="125407"/>
+                    <a:pt x="417395" y="140808"/>
+                    <a:pt x="417395" y="156837"/>
+                  </a:cubicBezTo>
+                  <a:close/>
+                </a:path>
+              </a:pathLst>
+            </a:custGeom>
+            <a:solidFill>
+              <a:srgbClr val="000000"/>
+            </a:solidFill>
+            <a:ln w="9429" cap="rnd">
+              <a:solidFill>
+                <a:srgbClr val="231815"/>
+              </a:solidFill>
+              <a:round/>
+            </a:ln>
+          </p:spPr>
+        </p:sp>
+        <p:sp>
+          <p:nvSpPr>
+            <p:cNvPr id="27" name="left House light column 3 row 2 9"/>
+            <p:cNvSpPr/>
+            <p:nvPr/>
+          </p:nvSpPr>
+          <p:spPr>
+            <a:xfrm>
+              <a:off x="4566422" y="1872678"/>
+              <a:ext cx="73547" cy="312732"/>
+            </a:xfrm>
+            <a:custGeom>
+              <a:avLst/>
+              <a:gdLst/>
+              <a:ahLst/>
+              <a:cxnLst/>
+              <a:rect l="0" t="0" r="r" b="b"/>
+              <a:pathLst>
+                <a:path w="73547" h="312732" fill="norm">
+                  <a:moveTo>
+                    <a:pt x="73547" y="156523"/>
+                  </a:moveTo>
+                  <a:cubicBezTo>
+                    <a:pt x="73547" y="242642"/>
+                    <a:pt x="56889" y="312732"/>
+                    <a:pt x="36459" y="312732"/>
+                  </a:cubicBezTo>
+                  <a:cubicBezTo>
+                    <a:pt x="29230" y="312732"/>
+                    <a:pt x="22630" y="303931"/>
+                    <a:pt x="16658" y="287902"/>
+                  </a:cubicBezTo>
+                  <a:cubicBezTo>
+                    <a:pt x="6286" y="260243"/>
+                    <a:pt x="0" y="211840"/>
+                    <a:pt x="0" y="156523"/>
+                  </a:cubicBezTo>
+                  <a:cubicBezTo>
+                    <a:pt x="0" y="140494"/>
+                    <a:pt x="629" y="125093"/>
+                    <a:pt x="1572" y="110635"/>
+                  </a:cubicBezTo>
+                  <a:cubicBezTo>
+                    <a:pt x="2200" y="101834"/>
+                    <a:pt x="2829" y="93034"/>
+                    <a:pt x="3772" y="84862"/>
+                  </a:cubicBezTo>
+                  <a:cubicBezTo>
+                    <a:pt x="6600" y="60032"/>
+                    <a:pt x="11001" y="39602"/>
+                    <a:pt x="16344" y="24830"/>
+                  </a:cubicBezTo>
+                  <a:cubicBezTo>
+                    <a:pt x="22316" y="8800"/>
+                    <a:pt x="28916" y="0"/>
+                    <a:pt x="36145" y="0"/>
+                  </a:cubicBezTo>
+                  <a:cubicBezTo>
+                    <a:pt x="52803" y="0"/>
+                    <a:pt x="66947" y="46203"/>
+                    <a:pt x="71347" y="110949"/>
+                  </a:cubicBezTo>
+                  <a:cubicBezTo>
+                    <a:pt x="72604" y="125407"/>
+                    <a:pt x="72918" y="140808"/>
+                    <a:pt x="72918" y="156837"/>
+                  </a:cubicBezTo>
+                  <a:close/>
+                </a:path>
+              </a:pathLst>
+            </a:custGeom>
+            <a:solidFill>
+              <a:srgbClr val="B3B3B3"/>
+            </a:solidFill>
+            <a:ln w="9429" cap="rnd">
+              <a:solidFill>
+                <a:srgbClr val="231815"/>
+              </a:solidFill>
+              <a:round/>
+            </a:ln>
+          </p:spPr>
+        </p:sp>
+      </p:grpSp>
+      <p:grpSp>
+        <p:nvGrpSpPr>
+          <p:cNvPr id="28" name="left Water well column 2 row 5"/>
+          <p:cNvGrpSpPr/>
+          <p:nvPr/>
+        </p:nvGrpSpPr>
+        <p:grpSpPr>
+          <a:xfrm>
+            <a:off x="565601" y="2633061"/>
+            <a:ext cx="232834" cy="963055"/>
+            <a:chOff x="3766001" y="3214086"/>
+            <a:chExt cx="232834" cy="963055"/>
+          </a:xfrm>
+        </p:grpSpPr>
+        <p:sp>
+          <p:nvSpPr>
+            <p:cNvPr id="29" name="left Water well column 2 row 5 3"/>
+            <p:cNvSpPr/>
+            <p:nvPr/>
+          </p:nvSpPr>
+          <p:spPr>
+            <a:xfrm>
+              <a:off x="3766001" y="3214086"/>
+              <a:ext cx="232834" cy="963055"/>
+            </a:xfrm>
+            <a:custGeom>
+              <a:avLst/>
+              <a:gdLst/>
+              <a:ahLst/>
+              <a:cxnLst/>
+              <a:rect l="0" t="0" r="r" b="b"/>
+              <a:pathLst>
+                <a:path w="232834" h="963055" fill="norm">
+                  <a:moveTo>
+                    <a:pt x="0" y="252265"/>
+                  </a:moveTo>
+                  <a:lnTo>
+                    <a:pt x="0" y="963055"/>
+                  </a:lnTo>
+                  <a:lnTo>
+                    <a:pt x="232834" y="667636"/>
+                  </a:lnTo>
+                  <a:lnTo>
+                    <a:pt x="232834" y="0"/>
+                  </a:lnTo>
+                  <a:lnTo>
+                    <a:pt x="0" y="252265"/>
+                  </a:lnTo>
+                  <a:close/>
+                </a:path>
+              </a:pathLst>
+            </a:custGeom>
+            <a:solidFill>
+              <a:srgbClr val="D5D3D1"/>
+            </a:solidFill>
+            <a:ln w="18650" cap="rnd">
+              <a:solidFill>
+                <a:srgbClr val="040000"/>
+              </a:solidFill>
+              <a:round/>
+            </a:ln>
+          </p:spPr>
+        </p:sp>
+        <p:sp>
+          <p:nvSpPr>
+            <p:cNvPr id="30" name="left Water well column 2 row 5 4"/>
+            <p:cNvSpPr/>
+            <p:nvPr/>
+          </p:nvSpPr>
+          <p:spPr>
+            <a:xfrm>
+              <a:off x="3766001" y="3214086"/>
+              <a:ext cx="232834" cy="818647"/>
+            </a:xfrm>
+            <a:custGeom>
+              <a:avLst/>
+              <a:gdLst/>
+              <a:ahLst/>
+              <a:cxnLst/>
+              <a:rect l="0" t="0" r="r" b="b"/>
+              <a:pathLst>
+                <a:path w="232834" h="818647" fill="norm">
+                  <a:moveTo>
+                    <a:pt x="0" y="252265"/>
+                  </a:moveTo>
+                  <a:lnTo>
+                    <a:pt x="0" y="818647"/>
+                  </a:lnTo>
+                  <a:lnTo>
+                    <a:pt x="232834" y="667636"/>
+                  </a:lnTo>
+                  <a:lnTo>
+                    <a:pt x="232834" y="0"/>
+                  </a:lnTo>
+                  <a:lnTo>
+                    <a:pt x="0" y="252265"/>
+                  </a:lnTo>
+                  <a:close/>
+                </a:path>
+              </a:pathLst>
+            </a:custGeom>
+            <a:solidFill>
+              <a:srgbClr val="D5D3D1"/>
+            </a:solidFill>
+            <a:ln w="18650" cap="rnd">
+              <a:solidFill>
+                <a:srgbClr val="040000"/>
+              </a:solidFill>
+              <a:round/>
+            </a:ln>
+          </p:spPr>
+        </p:sp>
+        <p:sp>
+          <p:nvSpPr>
+            <p:cNvPr id="31" name="left Water well column 2 row 5 5"/>
+            <p:cNvSpPr/>
+            <p:nvPr/>
+          </p:nvSpPr>
+          <p:spPr>
+            <a:xfrm>
+              <a:off x="3775330" y="3898232"/>
+              <a:ext cx="163432" cy="207261"/>
+            </a:xfrm>
+            <a:custGeom>
+              <a:avLst/>
+              <a:gdLst/>
+              <a:ahLst/>
+              <a:cxnLst/>
+              <a:rect l="0" t="0" r="r" b="b"/>
+              <a:pathLst>
+                <a:path w="163432" h="207261" fill="norm">
+                  <a:moveTo>
+                    <a:pt x="163432" y="0"/>
+                  </a:moveTo>
+                  <a:lnTo>
+                    <a:pt x="163432" y="48560"/>
+                  </a:lnTo>
+                  <a:cubicBezTo>
+                    <a:pt x="163432" y="74443"/>
+                    <a:pt x="93499" y="141462"/>
+                    <a:pt x="0" y="207261"/>
+                  </a:cubicBezTo>
+                  <a:lnTo>
+                    <a:pt x="0" y="158424"/>
+                  </a:lnTo>
+                  <a:cubicBezTo>
+                    <a:pt x="16130" y="147051"/>
+                    <a:pt x="31630" y="135582"/>
+                    <a:pt x="46268" y="124274"/>
+                  </a:cubicBezTo>
+                  <a:cubicBezTo>
+                    <a:pt x="86940" y="92978"/>
+                    <a:pt x="119775" y="63171"/>
+                    <a:pt x="140671" y="39238"/>
+                  </a:cubicBezTo>
+                  <a:cubicBezTo>
+                    <a:pt x="154850" y="22725"/>
+                    <a:pt x="163432" y="8659"/>
+                    <a:pt x="163432" y="0"/>
+                  </a:cubicBezTo>
+                  <a:close/>
+                </a:path>
+              </a:pathLst>
+            </a:custGeom>
+            <a:solidFill>
+              <a:srgbClr val="D5D3D1"/>
+            </a:solidFill>
+            <a:ln w="0" cap="rnd">
+              <a:noFill/>
+              <a:round/>
+            </a:ln>
+          </p:spPr>
+        </p:sp>
+        <p:sp>
+          <p:nvSpPr>
+            <p:cNvPr id="32" name="left Water well column 2 row 5 6"/>
+            <p:cNvSpPr/>
+            <p:nvPr/>
+          </p:nvSpPr>
+          <p:spPr>
+            <a:xfrm>
+              <a:off x="3775330" y="3898232"/>
+              <a:ext cx="163432" cy="207261"/>
+            </a:xfrm>
+            <a:custGeom>
+              <a:avLst/>
+              <a:gdLst/>
+              <a:ahLst/>
+              <a:cxnLst/>
+              <a:rect l="0" t="0" r="r" b="b"/>
+              <a:pathLst>
+                <a:path w="163432" h="207261" fill="none">
+                  <a:moveTo>
+                    <a:pt x="163432" y="0"/>
+                  </a:moveTo>
+                  <a:lnTo>
+                    <a:pt x="163432" y="48560"/>
+                  </a:lnTo>
+                  <a:cubicBezTo>
+                    <a:pt x="163432" y="74443"/>
+                    <a:pt x="93499" y="141462"/>
+                    <a:pt x="0" y="207261"/>
+                  </a:cubicBezTo>
+                </a:path>
+              </a:pathLst>
+            </a:custGeom>
+            <a:noFill/>
+            <a:ln w="18650" cap="rnd">
+              <a:solidFill>
+                <a:srgbClr val="040000"/>
+              </a:solidFill>
+              <a:round/>
+            </a:ln>
+          </p:spPr>
+        </p:sp>
+        <p:sp>
+          <p:nvSpPr>
+            <p:cNvPr id="33" name="left Water well column 2 row 5 7"/>
+            <p:cNvSpPr/>
+            <p:nvPr/>
+          </p:nvSpPr>
+          <p:spPr>
+            <a:xfrm>
+              <a:off x="3775330" y="3898232"/>
+              <a:ext cx="163432" cy="158424"/>
+            </a:xfrm>
+            <a:custGeom>
+              <a:avLst/>
+              <a:gdLst/>
+              <a:ahLst/>
+              <a:cxnLst/>
+              <a:rect l="0" t="0" r="r" b="b"/>
+              <a:pathLst>
+                <a:path w="163432" h="158424" fill="none">
+                  <a:moveTo>
+                    <a:pt x="0" y="158424"/>
+                  </a:moveTo>
+                  <a:cubicBezTo>
+                    <a:pt x="16130" y="147051"/>
+                    <a:pt x="31630" y="135582"/>
+                    <a:pt x="46268" y="124274"/>
+                  </a:cubicBezTo>
+                  <a:cubicBezTo>
+                    <a:pt x="86940" y="92978"/>
+                    <a:pt x="119775" y="63171"/>
+                    <a:pt x="140671" y="39238"/>
+                  </a:cubicBezTo>
+                  <a:cubicBezTo>
+                    <a:pt x="154850" y="22725"/>
+                    <a:pt x="163432" y="8659"/>
+                    <a:pt x="163432" y="0"/>
+                  </a:cubicBezTo>
+                </a:path>
+              </a:pathLst>
+            </a:custGeom>
+            <a:noFill/>
+            <a:ln w="18650" cap="rnd">
+              <a:solidFill>
+                <a:srgbClr val="040000"/>
+              </a:solidFill>
+              <a:round/>
+            </a:ln>
+          </p:spPr>
+        </p:sp>
+        <p:sp>
+          <p:nvSpPr>
+            <p:cNvPr id="34" name="left Water well column 2 row 5 8"/>
+            <p:cNvSpPr/>
+            <p:nvPr/>
+          </p:nvSpPr>
+          <p:spPr>
+            <a:xfrm>
+              <a:off x="3775330" y="3872497"/>
+              <a:ext cx="163432" cy="184159"/>
+            </a:xfrm>
+            <a:custGeom>
+              <a:avLst/>
+              <a:gdLst/>
+              <a:ahLst/>
+              <a:cxnLst/>
+              <a:rect l="0" t="0" r="r" b="b"/>
+              <a:pathLst>
+                <a:path w="163432" h="184159" fill="norm">
+                  <a:moveTo>
+                    <a:pt x="163432" y="25735"/>
+                  </a:moveTo>
+                  <a:cubicBezTo>
+                    <a:pt x="163432" y="34564"/>
+                    <a:pt x="155223" y="48217"/>
+                    <a:pt x="140671" y="64973"/>
+                  </a:cubicBezTo>
+                  <a:cubicBezTo>
+                    <a:pt x="120148" y="88664"/>
+                    <a:pt x="86940" y="118713"/>
+                    <a:pt x="46268" y="150009"/>
+                  </a:cubicBezTo>
+                  <a:cubicBezTo>
+                    <a:pt x="31630" y="161317"/>
+                    <a:pt x="16130" y="172786"/>
+                    <a:pt x="0" y="184159"/>
+                  </a:cubicBezTo>
+                  <a:lnTo>
+                    <a:pt x="0" y="79005"/>
+                  </a:lnTo>
+                  <a:cubicBezTo>
+                    <a:pt x="93499" y="23790"/>
+                    <a:pt x="163432" y="0"/>
+                    <a:pt x="163432" y="25735"/>
+                  </a:cubicBezTo>
+                  <a:close/>
+                </a:path>
+              </a:pathLst>
+            </a:custGeom>
+            <a:solidFill>
+              <a:srgbClr val="D5D3D1"/>
+            </a:solidFill>
+            <a:ln w="0" cap="rnd">
+              <a:noFill/>
+              <a:round/>
+            </a:ln>
+          </p:spPr>
+        </p:sp>
+        <p:sp>
+          <p:nvSpPr>
+            <p:cNvPr id="35" name="left Water well column 2 row 5 9"/>
+            <p:cNvSpPr/>
+            <p:nvPr/>
+          </p:nvSpPr>
+          <p:spPr>
+            <a:xfrm>
+              <a:off x="3775330" y="3898232"/>
+              <a:ext cx="163432" cy="158424"/>
+            </a:xfrm>
+            <a:custGeom>
+              <a:avLst/>
+              <a:gdLst/>
+              <a:ahLst/>
+              <a:cxnLst/>
+              <a:rect l="0" t="0" r="r" b="b"/>
+              <a:pathLst>
+                <a:path w="163432" h="158424" fill="none">
+                  <a:moveTo>
+                    <a:pt x="163432" y="0"/>
+                  </a:moveTo>
+                  <a:cubicBezTo>
+                    <a:pt x="163432" y="8829"/>
+                    <a:pt x="155223" y="22482"/>
+                    <a:pt x="140671" y="39238"/>
+                  </a:cubicBezTo>
+                  <a:cubicBezTo>
+                    <a:pt x="120148" y="62929"/>
+                    <a:pt x="86940" y="92978"/>
+                    <a:pt x="46268" y="124274"/>
+                  </a:cubicBezTo>
+                  <a:cubicBezTo>
+                    <a:pt x="31630" y="135582"/>
+                    <a:pt x="16130" y="147051"/>
+                    <a:pt x="0" y="158424"/>
+                  </a:cubicBezTo>
+                </a:path>
+              </a:pathLst>
+            </a:custGeom>
+            <a:noFill/>
+            <a:ln w="18650" cap="rnd">
+              <a:solidFill>
+                <a:srgbClr val="040000"/>
+              </a:solidFill>
+              <a:round/>
+            </a:ln>
+          </p:spPr>
+        </p:sp>
+        <p:sp>
+          <p:nvSpPr>
+            <p:cNvPr id="36" name="left Water well column 2 row 5 10"/>
+            <p:cNvSpPr/>
+            <p:nvPr/>
+          </p:nvSpPr>
+          <p:spPr>
+            <a:xfrm>
+              <a:off x="3775330" y="3872497"/>
+              <a:ext cx="163432" cy="79005"/>
+            </a:xfrm>
+            <a:custGeom>
+              <a:avLst/>
+              <a:gdLst/>
+              <a:ahLst/>
+              <a:cxnLst/>
+              <a:rect l="0" t="0" r="r" b="b"/>
+              <a:pathLst>
+                <a:path w="163432" h="79005" fill="none">
+                  <a:moveTo>
+                    <a:pt x="0" y="79005"/>
+                  </a:moveTo>
+                  <a:cubicBezTo>
+                    <a:pt x="93499" y="23790"/>
+                    <a:pt x="163432" y="0"/>
+                    <a:pt x="163432" y="25735"/>
+                  </a:cubicBezTo>
+                </a:path>
+              </a:pathLst>
+            </a:custGeom>
+            <a:noFill/>
+            <a:ln w="18650" cap="rnd">
+              <a:solidFill>
+                <a:srgbClr val="040000"/>
+              </a:solidFill>
+              <a:round/>
+            </a:ln>
+          </p:spPr>
+        </p:sp>
+        <p:sp>
+          <p:nvSpPr>
+            <p:cNvPr id="37" name="left Water well column 2 row 5 11"/>
+            <p:cNvSpPr/>
+            <p:nvPr/>
+          </p:nvSpPr>
+          <p:spPr>
+            <a:xfrm>
+              <a:off x="3775330" y="3944156"/>
+              <a:ext cx="83313" cy="95163"/>
+            </a:xfrm>
+            <a:custGeom>
+              <a:avLst/>
+              <a:gdLst/>
+              <a:ahLst/>
+              <a:cxnLst/>
+              <a:rect l="0" t="0" r="r" b="b"/>
+              <a:pathLst>
+                <a:path w="83313" h="95163" fill="norm">
+                  <a:moveTo>
+                    <a:pt x="82805" y="13330"/>
+                  </a:moveTo>
+                  <a:cubicBezTo>
+                    <a:pt x="82805" y="18188"/>
+                    <a:pt x="77731" y="26218"/>
+                    <a:pt x="69104" y="35971"/>
+                  </a:cubicBezTo>
+                  <a:cubicBezTo>
+                    <a:pt x="56418" y="49972"/>
+                    <a:pt x="36373" y="67693"/>
+                    <a:pt x="11761" y="86391"/>
+                  </a:cubicBezTo>
+                  <a:cubicBezTo>
+                    <a:pt x="7944" y="89288"/>
+                    <a:pt x="4019" y="92217"/>
+                    <a:pt x="0" y="95163"/>
+                  </a:cubicBezTo>
+                  <a:lnTo>
+                    <a:pt x="0" y="38597"/>
+                  </a:lnTo>
+                  <a:cubicBezTo>
+                    <a:pt x="48521" y="11424"/>
+                    <a:pt x="83313" y="0"/>
+                    <a:pt x="83313" y="13001"/>
+                  </a:cubicBezTo>
+                  <a:lnTo>
+                    <a:pt x="82805" y="13330"/>
+                  </a:lnTo>
+                  <a:close/>
+                </a:path>
+              </a:pathLst>
+            </a:custGeom>
+            <a:solidFill>
+              <a:srgbClr val="68A7D9">
+                <a:alpha val="90000"/>
+              </a:srgbClr>
+            </a:solidFill>
+            <a:ln w="0" cap="rnd">
+              <a:noFill/>
+              <a:round/>
+            </a:ln>
+          </p:spPr>
+        </p:sp>
+      </p:grpSp>
+      <p:grpSp>
+        <p:nvGrpSpPr>
+          <p:cNvPr id="38" name="right Speaker column 2 row 1"/>
+          <p:cNvGrpSpPr/>
+          <p:nvPr/>
+        </p:nvGrpSpPr>
+        <p:grpSpPr>
+          <a:xfrm>
+            <a:off x="4987703" y="1176448"/>
+            <a:ext cx="310446" cy="734841"/>
+            <a:chOff x="8188103" y="1757473"/>
+            <a:chExt cx="310446" cy="734841"/>
+          </a:xfrm>
+        </p:grpSpPr>
+        <p:sp>
+          <p:nvSpPr>
+            <p:cNvPr id="39" name="right Speaker column 2 row 1 6"/>
+            <p:cNvSpPr/>
+            <p:nvPr/>
+          </p:nvSpPr>
+          <p:spPr>
+            <a:xfrm>
+              <a:off x="8327966" y="1757473"/>
+              <a:ext cx="25298" cy="63511"/>
+            </a:xfrm>
+            <a:custGeom>
+              <a:avLst/>
+              <a:gdLst/>
+              <a:ahLst/>
+              <a:cxnLst/>
+              <a:rect l="0" t="0" r="r" b="b"/>
+              <a:pathLst>
+                <a:path w="25298" h="63511" fill="norm">
+                  <a:moveTo>
+                    <a:pt x="25298" y="42603"/>
+                  </a:moveTo>
+                  <a:cubicBezTo>
+                    <a:pt x="25298" y="28352"/>
+                    <a:pt x="19516" y="12053"/>
+                    <a:pt x="12649" y="6027"/>
+                  </a:cubicBezTo>
+                  <a:cubicBezTo>
+                    <a:pt x="5782" y="0"/>
+                    <a:pt x="0" y="6921"/>
+                    <a:pt x="0" y="20902"/>
+                  </a:cubicBezTo>
+                  <a:cubicBezTo>
+                    <a:pt x="0" y="34882"/>
+                    <a:pt x="5782" y="51445"/>
+                    <a:pt x="12649" y="57478"/>
+                  </a:cubicBezTo>
+                  <a:cubicBezTo>
+                    <a:pt x="19516" y="63511"/>
+                    <a:pt x="25298" y="56855"/>
+                    <a:pt x="25298" y="42603"/>
+                  </a:cubicBezTo>
+                  <a:close/>
+                </a:path>
+              </a:pathLst>
+            </a:custGeom>
+            <a:solidFill>
+              <a:srgbClr val="666666"/>
+            </a:solidFill>
+            <a:ln w="0" cap="rnd">
+              <a:noFill/>
+              <a:round/>
+            </a:ln>
+          </p:spPr>
+        </p:sp>
+        <p:sp>
+          <p:nvSpPr>
+            <p:cNvPr id="40" name="right Speaker column 2 row 1 7"/>
+            <p:cNvSpPr/>
+            <p:nvPr/>
+          </p:nvSpPr>
+          <p:spPr>
+            <a:xfrm>
+              <a:off x="8327966" y="1841631"/>
+              <a:ext cx="25298" cy="63269"/>
+            </a:xfrm>
+            <a:custGeom>
+              <a:avLst/>
+              <a:gdLst/>
+              <a:ahLst/>
+              <a:cxnLst/>
+              <a:rect l="0" t="0" r="r" b="b"/>
+              <a:pathLst>
+                <a:path w="25298" h="63269" fill="norm">
+                  <a:moveTo>
+                    <a:pt x="25298" y="42370"/>
+                  </a:moveTo>
+                  <a:cubicBezTo>
+                    <a:pt x="25298" y="28119"/>
+                    <a:pt x="19516" y="11547"/>
+                    <a:pt x="12649" y="5774"/>
+                  </a:cubicBezTo>
+                  <a:cubicBezTo>
+                    <a:pt x="5782" y="0"/>
+                    <a:pt x="0" y="6384"/>
+                    <a:pt x="0" y="20629"/>
+                  </a:cubicBezTo>
+                  <a:cubicBezTo>
+                    <a:pt x="0" y="34873"/>
+                    <a:pt x="5782" y="51181"/>
+                    <a:pt x="12649" y="57225"/>
+                  </a:cubicBezTo>
+                  <a:cubicBezTo>
+                    <a:pt x="19516" y="63269"/>
+                    <a:pt x="25298" y="56622"/>
+                    <a:pt x="25298" y="42370"/>
+                  </a:cubicBezTo>
+                  <a:close/>
+                </a:path>
+              </a:pathLst>
+            </a:custGeom>
+            <a:solidFill>
+              <a:srgbClr val="666666"/>
+            </a:solidFill>
+            <a:ln w="0" cap="rnd">
+              <a:noFill/>
+              <a:round/>
+            </a:ln>
+          </p:spPr>
+        </p:sp>
+        <p:sp>
+          <p:nvSpPr>
+            <p:cNvPr id="41" name="right Speaker column 2 row 1 8"/>
+            <p:cNvSpPr/>
+            <p:nvPr/>
+          </p:nvSpPr>
+          <p:spPr>
+            <a:xfrm>
+              <a:off x="8327966" y="1925262"/>
+              <a:ext cx="25298" cy="63555"/>
+            </a:xfrm>
+            <a:custGeom>
+              <a:avLst/>
+              <a:gdLst/>
+              <a:ahLst/>
+              <a:cxnLst/>
+              <a:rect l="0" t="0" r="r" b="b"/>
+              <a:pathLst>
+                <a:path w="25298" h="63555" fill="norm">
+                  <a:moveTo>
+                    <a:pt x="25298" y="42929"/>
+                  </a:moveTo>
+                  <a:cubicBezTo>
+                    <a:pt x="25298" y="28677"/>
+                    <a:pt x="19516" y="12097"/>
+                    <a:pt x="12649" y="6048"/>
+                  </a:cubicBezTo>
+                  <a:cubicBezTo>
+                    <a:pt x="5782" y="0"/>
+                    <a:pt x="0" y="6639"/>
+                    <a:pt x="0" y="20619"/>
+                  </a:cubicBezTo>
+                  <a:cubicBezTo>
+                    <a:pt x="0" y="34600"/>
+                    <a:pt x="5782" y="51445"/>
+                    <a:pt x="12649" y="57500"/>
+                  </a:cubicBezTo>
+                  <a:cubicBezTo>
+                    <a:pt x="19516" y="63555"/>
+                    <a:pt x="25298" y="57180"/>
+                    <a:pt x="25298" y="42929"/>
+                  </a:cubicBezTo>
+                  <a:close/>
+                </a:path>
+              </a:pathLst>
+            </a:custGeom>
+            <a:solidFill>
+              <a:srgbClr val="666666"/>
+            </a:solidFill>
+            <a:ln w="0" cap="rnd">
+              <a:noFill/>
+              <a:round/>
+            </a:ln>
+          </p:spPr>
+        </p:sp>
+        <p:sp>
+          <p:nvSpPr>
+            <p:cNvPr id="42" name="right Speaker column 2 row 1 9"/>
+            <p:cNvSpPr/>
+            <p:nvPr/>
+          </p:nvSpPr>
+          <p:spPr>
+            <a:xfrm>
+              <a:off x="8327966" y="2009157"/>
+              <a:ext cx="25298" cy="63576"/>
+            </a:xfrm>
+            <a:custGeom>
+              <a:avLst/>
+              <a:gdLst/>
+              <a:ahLst/>
+              <a:cxnLst/>
+              <a:rect l="0" t="0" r="r" b="b"/>
+              <a:pathLst>
+                <a:path w="25298" h="63576" fill="norm">
+                  <a:moveTo>
+                    <a:pt x="25298" y="42959"/>
+                  </a:moveTo>
+                  <a:cubicBezTo>
+                    <a:pt x="25298" y="28708"/>
+                    <a:pt x="19516" y="12118"/>
+                    <a:pt x="12649" y="6059"/>
+                  </a:cubicBezTo>
+                  <a:cubicBezTo>
+                    <a:pt x="5782" y="0"/>
+                    <a:pt x="0" y="6366"/>
+                    <a:pt x="0" y="20610"/>
+                  </a:cubicBezTo>
+                  <a:cubicBezTo>
+                    <a:pt x="0" y="34855"/>
+                    <a:pt x="5782" y="51445"/>
+                    <a:pt x="12649" y="57511"/>
+                  </a:cubicBezTo>
+                  <a:cubicBezTo>
+                    <a:pt x="19516" y="63576"/>
+                    <a:pt x="25298" y="57211"/>
+                    <a:pt x="25298" y="42959"/>
+                  </a:cubicBezTo>
+                  <a:close/>
+                </a:path>
+              </a:pathLst>
+            </a:custGeom>
+            <a:solidFill>
+              <a:srgbClr val="666666"/>
+            </a:solidFill>
+            <a:ln w="0" cap="rnd">
+              <a:noFill/>
+              <a:round/>
+            </a:ln>
+          </p:spPr>
+        </p:sp>
+        <p:sp>
+          <p:nvSpPr>
+            <p:cNvPr id="43" name="right Speaker column 2 row 1 10"/>
+            <p:cNvSpPr/>
+            <p:nvPr/>
+          </p:nvSpPr>
+          <p:spPr>
+            <a:xfrm>
+              <a:off x="8327966" y="2092524"/>
+              <a:ext cx="25298" cy="64389"/>
+            </a:xfrm>
+            <a:custGeom>
+              <a:avLst/>
+              <a:gdLst/>
+              <a:ahLst/>
+              <a:cxnLst/>
+              <a:rect l="0" t="0" r="r" b="b"/>
+              <a:pathLst>
+                <a:path w="25298" h="64389" fill="norm">
+                  <a:moveTo>
+                    <a:pt x="25298" y="43518"/>
+                  </a:moveTo>
+                  <a:cubicBezTo>
+                    <a:pt x="25298" y="29266"/>
+                    <a:pt x="19516" y="12667"/>
+                    <a:pt x="12649" y="6334"/>
+                  </a:cubicBezTo>
+                  <a:cubicBezTo>
+                    <a:pt x="5782" y="0"/>
+                    <a:pt x="0" y="6620"/>
+                    <a:pt x="0" y="20865"/>
+                  </a:cubicBezTo>
+                  <a:cubicBezTo>
+                    <a:pt x="0" y="35110"/>
+                    <a:pt x="5782" y="51709"/>
+                    <a:pt x="12649" y="58049"/>
+                  </a:cubicBezTo>
+                  <a:cubicBezTo>
+                    <a:pt x="19516" y="64389"/>
+                    <a:pt x="25298" y="58033"/>
+                    <a:pt x="25298" y="43782"/>
+                  </a:cubicBezTo>
+                  <a:close/>
+                </a:path>
+              </a:pathLst>
+            </a:custGeom>
+            <a:solidFill>
+              <a:srgbClr val="666666"/>
+            </a:solidFill>
+            <a:ln w="0" cap="rnd">
+              <a:noFill/>
+              <a:round/>
+            </a:ln>
+          </p:spPr>
+        </p:sp>
+        <p:sp>
+          <p:nvSpPr>
+            <p:cNvPr id="44" name="right Speaker column 2 row 1 11"/>
+            <p:cNvSpPr/>
+            <p:nvPr/>
+          </p:nvSpPr>
+          <p:spPr>
+            <a:xfrm>
+              <a:off x="8327966" y="2176682"/>
+              <a:ext cx="25298" cy="64147"/>
+            </a:xfrm>
+            <a:custGeom>
+              <a:avLst/>
+              <a:gdLst/>
+              <a:ahLst/>
+              <a:cxnLst/>
+              <a:rect l="0" t="0" r="r" b="b"/>
+              <a:pathLst>
+                <a:path w="25298" h="64147" fill="norm">
+                  <a:moveTo>
+                    <a:pt x="25298" y="43549"/>
+                  </a:moveTo>
+                  <a:cubicBezTo>
+                    <a:pt x="25298" y="29297"/>
+                    <a:pt x="19516" y="12689"/>
+                    <a:pt x="12649" y="6345"/>
+                  </a:cubicBezTo>
+                  <a:cubicBezTo>
+                    <a:pt x="5782" y="0"/>
+                    <a:pt x="0" y="6347"/>
+                    <a:pt x="0" y="20592"/>
+                  </a:cubicBezTo>
+                  <a:cubicBezTo>
+                    <a:pt x="0" y="34837"/>
+                    <a:pt x="5782" y="51445"/>
+                    <a:pt x="12649" y="57796"/>
+                  </a:cubicBezTo>
+                  <a:cubicBezTo>
+                    <a:pt x="19516" y="64147"/>
+                    <a:pt x="25298" y="57800"/>
+                    <a:pt x="25298" y="43549"/>
+                  </a:cubicBezTo>
+                  <a:close/>
+                </a:path>
+              </a:pathLst>
+            </a:custGeom>
+            <a:solidFill>
+              <a:srgbClr val="666666"/>
+            </a:solidFill>
+            <a:ln w="0" cap="rnd">
+              <a:noFill/>
+              <a:round/>
+            </a:ln>
+          </p:spPr>
+        </p:sp>
+        <p:sp>
+          <p:nvSpPr>
+            <p:cNvPr id="45" name="right Speaker column 2 row 1 12"/>
+            <p:cNvSpPr/>
+            <p:nvPr/>
+          </p:nvSpPr>
+          <p:spPr>
+            <a:xfrm>
+              <a:off x="8327966" y="2260313"/>
+              <a:ext cx="25298" cy="64697"/>
+            </a:xfrm>
+            <a:custGeom>
+              <a:avLst/>
+              <a:gdLst/>
+              <a:ahLst/>
+              <a:cxnLst/>
+              <a:rect l="0" t="0" r="r" b="b"/>
+              <a:pathLst>
+                <a:path w="25298" h="64697" fill="norm">
+                  <a:moveTo>
+                    <a:pt x="25298" y="43843"/>
+                  </a:moveTo>
+                  <a:cubicBezTo>
+                    <a:pt x="25298" y="29592"/>
+                    <a:pt x="19516" y="12711"/>
+                    <a:pt x="12649" y="6355"/>
+                  </a:cubicBezTo>
+                  <a:cubicBezTo>
+                    <a:pt x="5782" y="0"/>
+                    <a:pt x="0" y="6338"/>
+                    <a:pt x="0" y="20583"/>
+                  </a:cubicBezTo>
+                  <a:cubicBezTo>
+                    <a:pt x="0" y="34828"/>
+                    <a:pt x="5782" y="51445"/>
+                    <a:pt x="12649" y="58071"/>
+                  </a:cubicBezTo>
+                  <a:cubicBezTo>
+                    <a:pt x="19516" y="64697"/>
+                    <a:pt x="25298" y="58095"/>
+                    <a:pt x="25298" y="43843"/>
+                  </a:cubicBezTo>
+                  <a:close/>
+                </a:path>
+              </a:pathLst>
+            </a:custGeom>
+            <a:solidFill>
+              <a:srgbClr val="666666"/>
+            </a:solidFill>
+            <a:ln w="0" cap="rnd">
+              <a:noFill/>
+              <a:round/>
+            </a:ln>
+          </p:spPr>
+        </p:sp>
+        <p:sp>
+          <p:nvSpPr>
+            <p:cNvPr id="46" name="right Speaker column 2 row 1 13"/>
+            <p:cNvSpPr/>
+            <p:nvPr/>
+          </p:nvSpPr>
+          <p:spPr>
+            <a:xfrm>
+              <a:off x="8327966" y="2344471"/>
+              <a:ext cx="25298" cy="64191"/>
+            </a:xfrm>
+            <a:custGeom>
+              <a:avLst/>
+              <a:gdLst/>
+              <a:ahLst/>
+              <a:cxnLst/>
+              <a:rect l="0" t="0" r="r" b="b"/>
+              <a:pathLst>
+                <a:path w="25298" h="64191" fill="norm">
+                  <a:moveTo>
+                    <a:pt x="25298" y="43874"/>
+                  </a:moveTo>
+                  <a:cubicBezTo>
+                    <a:pt x="25298" y="29623"/>
+                    <a:pt x="19516" y="12732"/>
+                    <a:pt x="12649" y="6366"/>
+                  </a:cubicBezTo>
+                  <a:cubicBezTo>
+                    <a:pt x="5782" y="0"/>
+                    <a:pt x="0" y="6065"/>
+                    <a:pt x="0" y="20310"/>
+                  </a:cubicBezTo>
+                  <a:cubicBezTo>
+                    <a:pt x="0" y="34555"/>
+                    <a:pt x="5782" y="51445"/>
+                    <a:pt x="12649" y="57818"/>
+                  </a:cubicBezTo>
+                  <a:cubicBezTo>
+                    <a:pt x="19516" y="64191"/>
+                    <a:pt x="25298" y="58125"/>
+                    <a:pt x="25298" y="43874"/>
+                  </a:cubicBezTo>
+                  <a:close/>
+                </a:path>
+              </a:pathLst>
+            </a:custGeom>
+            <a:solidFill>
+              <a:srgbClr val="666666"/>
+            </a:solidFill>
+            <a:ln w="0" cap="rnd">
+              <a:noFill/>
+              <a:round/>
+            </a:ln>
+          </p:spPr>
+        </p:sp>
+        <p:sp>
+          <p:nvSpPr>
+            <p:cNvPr id="47" name="right Speaker column 2 row 1 14"/>
+            <p:cNvSpPr/>
+            <p:nvPr/>
+          </p:nvSpPr>
+          <p:spPr>
+            <a:xfrm>
+              <a:off x="8327966" y="2427838"/>
+              <a:ext cx="25298" cy="64476"/>
+            </a:xfrm>
+            <a:custGeom>
+              <a:avLst/>
+              <a:gdLst/>
+              <a:ahLst/>
+              <a:cxnLst/>
+              <a:rect l="0" t="0" r="r" b="b"/>
+              <a:pathLst>
+                <a:path w="25298" h="64476" fill="norm">
+                  <a:moveTo>
+                    <a:pt x="25298" y="44432"/>
+                  </a:moveTo>
+                  <a:cubicBezTo>
+                    <a:pt x="25298" y="30181"/>
+                    <a:pt x="19516" y="13282"/>
+                    <a:pt x="12649" y="6641"/>
+                  </a:cubicBezTo>
+                  <a:cubicBezTo>
+                    <a:pt x="5782" y="0"/>
+                    <a:pt x="0" y="6320"/>
+                    <a:pt x="0" y="20565"/>
+                  </a:cubicBezTo>
+                  <a:cubicBezTo>
+                    <a:pt x="0" y="34809"/>
+                    <a:pt x="5782" y="51709"/>
+                    <a:pt x="12649" y="58092"/>
+                  </a:cubicBezTo>
+                  <a:cubicBezTo>
+                    <a:pt x="19516" y="64476"/>
+                    <a:pt x="25298" y="58420"/>
+                    <a:pt x="25298" y="44168"/>
+                  </a:cubicBezTo>
+                  <a:close/>
+                </a:path>
+              </a:pathLst>
+            </a:custGeom>
+            <a:solidFill>
+              <a:srgbClr val="666666"/>
+            </a:solidFill>
+            <a:ln w="0" cap="rnd">
+              <a:noFill/>
+              <a:round/>
+            </a:ln>
+          </p:spPr>
+        </p:sp>
+        <p:sp>
+          <p:nvSpPr>
+            <p:cNvPr id="48" name="right Speaker column 2 row 1 15"/>
+            <p:cNvSpPr/>
+            <p:nvPr/>
+          </p:nvSpPr>
+          <p:spPr>
+            <a:xfrm>
+              <a:off x="8363745" y="1829963"/>
+              <a:ext cx="25298" cy="63822"/>
+            </a:xfrm>
+            <a:custGeom>
+              <a:avLst/>
+              <a:gdLst/>
+              <a:ahLst/>
+              <a:cxnLst/>
+              <a:rect l="0" t="0" r="r" b="b"/>
+              <a:pathLst>
+                <a:path w="25298" h="63822" fill="norm">
+                  <a:moveTo>
+                    <a:pt x="25298" y="42902"/>
+                  </a:moveTo>
+                  <a:cubicBezTo>
+                    <a:pt x="25298" y="28641"/>
+                    <a:pt x="19516" y="12065"/>
+                    <a:pt x="12649" y="6033"/>
+                  </a:cubicBezTo>
+                  <a:cubicBezTo>
+                    <a:pt x="5782" y="0"/>
+                    <a:pt x="0" y="6660"/>
+                    <a:pt x="0" y="20914"/>
+                  </a:cubicBezTo>
+                  <a:cubicBezTo>
+                    <a:pt x="0" y="35168"/>
+                    <a:pt x="5782" y="51743"/>
+                    <a:pt x="12649" y="57782"/>
+                  </a:cubicBezTo>
+                  <a:cubicBezTo>
+                    <a:pt x="19516" y="63822"/>
+                    <a:pt x="25298" y="57163"/>
+                    <a:pt x="25298" y="42902"/>
+                  </a:cubicBezTo>
+                  <a:close/>
+                </a:path>
+              </a:pathLst>
+            </a:custGeom>
+            <a:solidFill>
+              <a:srgbClr val="666666"/>
+            </a:solidFill>
+            <a:ln w="0" cap="rnd">
+              <a:noFill/>
+              <a:round/>
+            </a:ln>
+          </p:spPr>
+        </p:sp>
+        <p:sp>
+          <p:nvSpPr>
+            <p:cNvPr id="49" name="right Speaker column 2 row 1 16"/>
+            <p:cNvSpPr/>
+            <p:nvPr/>
+          </p:nvSpPr>
+          <p:spPr>
+            <a:xfrm>
+              <a:off x="8363745" y="1914441"/>
+              <a:ext cx="25298" cy="63843"/>
+            </a:xfrm>
+            <a:custGeom>
+              <a:avLst/>
+              <a:gdLst/>
+              <a:ahLst/>
+              <a:cxnLst/>
+              <a:rect l="0" t="0" r="r" b="b"/>
+              <a:pathLst>
+                <a:path w="25298" h="63843" fill="norm">
+                  <a:moveTo>
+                    <a:pt x="25298" y="42932"/>
+                  </a:moveTo>
+                  <a:cubicBezTo>
+                    <a:pt x="25298" y="28671"/>
+                    <a:pt x="19516" y="12087"/>
+                    <a:pt x="12649" y="6043"/>
+                  </a:cubicBezTo>
+                  <a:cubicBezTo>
+                    <a:pt x="5782" y="0"/>
+                    <a:pt x="0" y="6651"/>
+                    <a:pt x="0" y="20905"/>
+                  </a:cubicBezTo>
+                  <a:cubicBezTo>
+                    <a:pt x="0" y="35159"/>
+                    <a:pt x="5782" y="51743"/>
+                    <a:pt x="12649" y="57793"/>
+                  </a:cubicBezTo>
+                  <a:cubicBezTo>
+                    <a:pt x="19516" y="63843"/>
+                    <a:pt x="25298" y="57193"/>
+                    <a:pt x="25298" y="42932"/>
+                  </a:cubicBezTo>
+                  <a:close/>
+                </a:path>
+              </a:pathLst>
+            </a:custGeom>
+            <a:solidFill>
+              <a:srgbClr val="666666"/>
+            </a:solidFill>
+            <a:ln w="0" cap="rnd">
+              <a:noFill/>
+              <a:round/>
+            </a:ln>
+          </p:spPr>
+        </p:sp>
+        <p:sp>
+          <p:nvSpPr>
+            <p:cNvPr id="50" name="right Speaker column 2 row 1 17"/>
+            <p:cNvSpPr/>
+            <p:nvPr/>
+          </p:nvSpPr>
+          <p:spPr>
+            <a:xfrm>
+              <a:off x="8363745" y="1998392"/>
+              <a:ext cx="25298" cy="64393"/>
+            </a:xfrm>
+            <a:custGeom>
+              <a:avLst/>
+              <a:gdLst/>
+              <a:ahLst/>
+              <a:cxnLst/>
+              <a:rect l="0" t="0" r="r" b="b"/>
+              <a:pathLst>
+                <a:path w="25298" h="64393" fill="norm">
+                  <a:moveTo>
+                    <a:pt x="25298" y="43491"/>
+                  </a:moveTo>
+                  <a:cubicBezTo>
+                    <a:pt x="25298" y="29230"/>
+                    <a:pt x="19516" y="12636"/>
+                    <a:pt x="12649" y="6318"/>
+                  </a:cubicBezTo>
+                  <a:cubicBezTo>
+                    <a:pt x="5782" y="0"/>
+                    <a:pt x="0" y="6641"/>
+                    <a:pt x="0" y="20896"/>
+                  </a:cubicBezTo>
+                  <a:cubicBezTo>
+                    <a:pt x="0" y="35150"/>
+                    <a:pt x="5782" y="51743"/>
+                    <a:pt x="12649" y="58068"/>
+                  </a:cubicBezTo>
+                  <a:cubicBezTo>
+                    <a:pt x="19516" y="64393"/>
+                    <a:pt x="25298" y="57752"/>
+                    <a:pt x="25298" y="43491"/>
+                  </a:cubicBezTo>
+                  <a:close/>
+                </a:path>
+              </a:pathLst>
+            </a:custGeom>
+            <a:solidFill>
+              <a:srgbClr val="666666"/>
+            </a:solidFill>
+            <a:ln w="0" cap="rnd">
+              <a:noFill/>
+              <a:round/>
+            </a:ln>
+          </p:spPr>
+        </p:sp>
+        <p:sp>
+          <p:nvSpPr>
+            <p:cNvPr id="51" name="right Speaker column 2 row 1 18"/>
+            <p:cNvSpPr/>
+            <p:nvPr/>
+          </p:nvSpPr>
+          <p:spPr>
+            <a:xfrm>
+              <a:off x="8363745" y="2082871"/>
+              <a:ext cx="25298" cy="64150"/>
+            </a:xfrm>
+            <a:custGeom>
+              <a:avLst/>
+              <a:gdLst/>
+              <a:ahLst/>
+              <a:cxnLst/>
+              <a:rect l="0" t="0" r="r" b="b"/>
+              <a:pathLst>
+                <a:path w="25298" h="64150" fill="norm">
+                  <a:moveTo>
+                    <a:pt x="25298" y="43257"/>
+                  </a:moveTo>
+                  <a:cubicBezTo>
+                    <a:pt x="25298" y="28996"/>
+                    <a:pt x="19516" y="12130"/>
+                    <a:pt x="12649" y="6065"/>
+                  </a:cubicBezTo>
+                  <a:cubicBezTo>
+                    <a:pt x="5782" y="0"/>
+                    <a:pt x="0" y="6368"/>
+                    <a:pt x="0" y="20623"/>
+                  </a:cubicBezTo>
+                  <a:cubicBezTo>
+                    <a:pt x="0" y="34877"/>
+                    <a:pt x="5782" y="51479"/>
+                    <a:pt x="12649" y="57815"/>
+                  </a:cubicBezTo>
+                  <a:cubicBezTo>
+                    <a:pt x="19516" y="64150"/>
+                    <a:pt x="25298" y="57518"/>
+                    <a:pt x="25298" y="43257"/>
+                  </a:cubicBezTo>
+                  <a:close/>
+                </a:path>
+              </a:pathLst>
+            </a:custGeom>
+            <a:solidFill>
+              <a:srgbClr val="666666"/>
+            </a:solidFill>
+            <a:ln w="0" cap="rnd">
+              <a:noFill/>
+              <a:round/>
+            </a:ln>
+          </p:spPr>
+        </p:sp>
+        <p:sp>
+          <p:nvSpPr>
+            <p:cNvPr id="52" name="right Speaker column 2 row 1 19"/>
+            <p:cNvSpPr/>
+            <p:nvPr/>
+          </p:nvSpPr>
+          <p:spPr>
+            <a:xfrm>
+              <a:off x="8363745" y="2166822"/>
+              <a:ext cx="25298" cy="64436"/>
+            </a:xfrm>
+            <a:custGeom>
+              <a:avLst/>
+              <a:gdLst/>
+              <a:ahLst/>
+              <a:cxnLst/>
+              <a:rect l="0" t="0" r="r" b="b"/>
+              <a:pathLst>
+                <a:path w="25298" h="64436" fill="norm">
+                  <a:moveTo>
+                    <a:pt x="25298" y="43816"/>
+                  </a:moveTo>
+                  <a:cubicBezTo>
+                    <a:pt x="25298" y="29555"/>
+                    <a:pt x="19516" y="12679"/>
+                    <a:pt x="12649" y="6340"/>
+                  </a:cubicBezTo>
+                  <a:cubicBezTo>
+                    <a:pt x="5782" y="0"/>
+                    <a:pt x="0" y="6359"/>
+                    <a:pt x="0" y="20614"/>
+                  </a:cubicBezTo>
+                  <a:cubicBezTo>
+                    <a:pt x="0" y="34868"/>
+                    <a:pt x="5782" y="51743"/>
+                    <a:pt x="12649" y="58089"/>
+                  </a:cubicBezTo>
+                  <a:cubicBezTo>
+                    <a:pt x="19516" y="64436"/>
+                    <a:pt x="25298" y="58077"/>
+                    <a:pt x="25298" y="43816"/>
+                  </a:cubicBezTo>
+                  <a:close/>
+                </a:path>
+              </a:pathLst>
+            </a:custGeom>
+            <a:solidFill>
+              <a:srgbClr val="666666"/>
+            </a:solidFill>
+            <a:ln w="0" cap="rnd">
+              <a:noFill/>
+              <a:round/>
+            </a:ln>
+          </p:spPr>
+        </p:sp>
+        <p:sp>
+          <p:nvSpPr>
+            <p:cNvPr id="53" name="right Speaker column 2 row 1 20"/>
+            <p:cNvSpPr/>
+            <p:nvPr/>
+          </p:nvSpPr>
+          <p:spPr>
+            <a:xfrm>
+              <a:off x="8363745" y="2251300"/>
+              <a:ext cx="25298" cy="64457"/>
+            </a:xfrm>
+            <a:custGeom>
+              <a:avLst/>
+              <a:gdLst/>
+              <a:ahLst/>
+              <a:cxnLst/>
+              <a:rect l="0" t="0" r="r" b="b"/>
+              <a:pathLst>
+                <a:path w="25298" h="64457" fill="norm">
+                  <a:moveTo>
+                    <a:pt x="25298" y="43846"/>
+                  </a:moveTo>
+                  <a:cubicBezTo>
+                    <a:pt x="25298" y="29585"/>
+                    <a:pt x="19516" y="12701"/>
+                    <a:pt x="12649" y="6350"/>
+                  </a:cubicBezTo>
+                  <a:cubicBezTo>
+                    <a:pt x="5782" y="0"/>
+                    <a:pt x="0" y="6350"/>
+                    <a:pt x="0" y="20605"/>
+                  </a:cubicBezTo>
+                  <a:cubicBezTo>
+                    <a:pt x="0" y="34859"/>
+                    <a:pt x="5782" y="51743"/>
+                    <a:pt x="12649" y="58100"/>
+                  </a:cubicBezTo>
+                  <a:cubicBezTo>
+                    <a:pt x="19516" y="64457"/>
+                    <a:pt x="25298" y="58107"/>
+                    <a:pt x="25298" y="43846"/>
+                  </a:cubicBezTo>
+                  <a:close/>
+                </a:path>
+              </a:pathLst>
+            </a:custGeom>
+            <a:solidFill>
+              <a:srgbClr val="666666"/>
+            </a:solidFill>
+            <a:ln w="0" cap="rnd">
+              <a:noFill/>
+              <a:round/>
+            </a:ln>
+          </p:spPr>
+        </p:sp>
+        <p:sp>
+          <p:nvSpPr>
+            <p:cNvPr id="54" name="right Speaker column 2 row 1 21"/>
+            <p:cNvSpPr/>
+            <p:nvPr/>
+          </p:nvSpPr>
+          <p:spPr>
+            <a:xfrm>
+              <a:off x="8363745" y="2335251"/>
+              <a:ext cx="25298" cy="64743"/>
+            </a:xfrm>
+            <a:custGeom>
+              <a:avLst/>
+              <a:gdLst/>
+              <a:ahLst/>
+              <a:cxnLst/>
+              <a:rect l="0" t="0" r="r" b="b"/>
+              <a:pathLst>
+                <a:path w="25298" h="64743" fill="norm">
+                  <a:moveTo>
+                    <a:pt x="25298" y="44405"/>
+                  </a:moveTo>
+                  <a:cubicBezTo>
+                    <a:pt x="25298" y="30144"/>
+                    <a:pt x="19516" y="13250"/>
+                    <a:pt x="12649" y="6625"/>
+                  </a:cubicBezTo>
+                  <a:cubicBezTo>
+                    <a:pt x="5782" y="0"/>
+                    <a:pt x="0" y="6341"/>
+                    <a:pt x="0" y="20859"/>
+                  </a:cubicBezTo>
+                  <a:cubicBezTo>
+                    <a:pt x="0" y="35378"/>
+                    <a:pt x="5782" y="52007"/>
+                    <a:pt x="12649" y="58375"/>
+                  </a:cubicBezTo>
+                  <a:cubicBezTo>
+                    <a:pt x="19516" y="64743"/>
+                    <a:pt x="25298" y="58666"/>
+                    <a:pt x="25298" y="44405"/>
+                  </a:cubicBezTo>
+                  <a:close/>
+                </a:path>
+              </a:pathLst>
+            </a:custGeom>
+            <a:solidFill>
+              <a:srgbClr val="666666"/>
+            </a:solidFill>
+            <a:ln w="0" cap="rnd">
+              <a:noFill/>
+              <a:round/>
+            </a:ln>
+          </p:spPr>
+        </p:sp>
+        <p:sp>
+          <p:nvSpPr>
+            <p:cNvPr id="55" name="right Speaker column 2 row 1 22"/>
+            <p:cNvSpPr/>
+            <p:nvPr/>
+          </p:nvSpPr>
+          <p:spPr>
+            <a:xfrm>
+              <a:off x="8363745" y="2419466"/>
+              <a:ext cx="25298" cy="65028"/>
+            </a:xfrm>
+            <a:custGeom>
+              <a:avLst/>
+              <a:gdLst/>
+              <a:ahLst/>
+              <a:cxnLst/>
+              <a:rect l="0" t="0" r="r" b="b"/>
+              <a:pathLst>
+                <a:path w="25298" h="65028" fill="norm">
+                  <a:moveTo>
+                    <a:pt x="25298" y="44435"/>
+                  </a:moveTo>
+                  <a:cubicBezTo>
+                    <a:pt x="25298" y="30175"/>
+                    <a:pt x="19516" y="13272"/>
+                    <a:pt x="12649" y="6636"/>
+                  </a:cubicBezTo>
+                  <a:cubicBezTo>
+                    <a:pt x="5782" y="0"/>
+                    <a:pt x="0" y="6332"/>
+                    <a:pt x="0" y="20586"/>
+                  </a:cubicBezTo>
+                  <a:cubicBezTo>
+                    <a:pt x="0" y="34841"/>
+                    <a:pt x="5782" y="51743"/>
+                    <a:pt x="12649" y="58386"/>
+                  </a:cubicBezTo>
+                  <a:cubicBezTo>
+                    <a:pt x="19516" y="65028"/>
+                    <a:pt x="25298" y="58696"/>
+                    <a:pt x="25298" y="44435"/>
+                  </a:cubicBezTo>
+                  <a:close/>
+                </a:path>
+              </a:pathLst>
+            </a:custGeom>
+            <a:solidFill>
+              <a:srgbClr val="666666"/>
+            </a:solidFill>
+            <a:ln w="0" cap="rnd">
+              <a:noFill/>
+              <a:round/>
+            </a:ln>
+          </p:spPr>
+        </p:sp>
+        <p:sp>
+          <p:nvSpPr>
+            <p:cNvPr id="56" name="right Speaker column 2 row 1 23"/>
+            <p:cNvSpPr/>
+            <p:nvPr/>
+          </p:nvSpPr>
+          <p:spPr>
+            <a:xfrm>
+              <a:off x="8399885" y="1903134"/>
+              <a:ext cx="25298" cy="64228"/>
+            </a:xfrm>
+            <a:custGeom>
+              <a:avLst/>
+              <a:gdLst/>
+              <a:ahLst/>
+              <a:cxnLst/>
+              <a:rect l="0" t="0" r="r" b="b"/>
+              <a:pathLst>
+                <a:path w="25298" h="64228" fill="norm">
+                  <a:moveTo>
+                    <a:pt x="25298" y="43200"/>
+                  </a:moveTo>
+                  <a:cubicBezTo>
+                    <a:pt x="25298" y="28929"/>
+                    <a:pt x="19516" y="12077"/>
+                    <a:pt x="12649" y="6039"/>
+                  </a:cubicBezTo>
+                  <a:cubicBezTo>
+                    <a:pt x="5782" y="0"/>
+                    <a:pt x="0" y="6662"/>
+                    <a:pt x="0" y="20926"/>
+                  </a:cubicBezTo>
+                  <a:cubicBezTo>
+                    <a:pt x="0" y="35190"/>
+                    <a:pt x="5782" y="51778"/>
+                    <a:pt x="12649" y="58087"/>
+                  </a:cubicBezTo>
+                  <a:cubicBezTo>
+                    <a:pt x="19877" y="64228"/>
+                    <a:pt x="25298" y="57470"/>
+                    <a:pt x="25298" y="43200"/>
+                  </a:cubicBezTo>
+                  <a:close/>
+                </a:path>
+              </a:pathLst>
+            </a:custGeom>
+            <a:solidFill>
+              <a:srgbClr val="666666"/>
+            </a:solidFill>
+            <a:ln w="0" cap="rnd">
+              <a:noFill/>
+              <a:round/>
+            </a:ln>
+          </p:spPr>
+        </p:sp>
+        <p:sp>
+          <p:nvSpPr>
+            <p:cNvPr id="57" name="right Speaker column 2 row 1 24"/>
+            <p:cNvSpPr/>
+            <p:nvPr/>
+          </p:nvSpPr>
+          <p:spPr>
+            <a:xfrm>
+              <a:off x="8399885" y="1988102"/>
+              <a:ext cx="25298" cy="64346"/>
+            </a:xfrm>
+            <a:custGeom>
+              <a:avLst/>
+              <a:gdLst/>
+              <a:ahLst/>
+              <a:cxnLst/>
+              <a:rect l="0" t="0" r="r" b="b"/>
+              <a:pathLst>
+                <a:path w="25298" h="64346" fill="norm">
+                  <a:moveTo>
+                    <a:pt x="25298" y="43326"/>
+                  </a:moveTo>
+                  <a:cubicBezTo>
+                    <a:pt x="25298" y="29056"/>
+                    <a:pt x="19516" y="12195"/>
+                    <a:pt x="12649" y="6145"/>
+                  </a:cubicBezTo>
+                  <a:cubicBezTo>
+                    <a:pt x="5421" y="0"/>
+                    <a:pt x="0" y="6749"/>
+                    <a:pt x="0" y="21013"/>
+                  </a:cubicBezTo>
+                  <a:cubicBezTo>
+                    <a:pt x="0" y="35277"/>
+                    <a:pt x="5782" y="52138"/>
+                    <a:pt x="12649" y="58194"/>
+                  </a:cubicBezTo>
+                  <a:cubicBezTo>
+                    <a:pt x="19877" y="64346"/>
+                    <a:pt x="25298" y="57861"/>
+                    <a:pt x="25298" y="43326"/>
+                  </a:cubicBezTo>
+                  <a:close/>
+                </a:path>
+              </a:pathLst>
+            </a:custGeom>
+            <a:solidFill>
+              <a:srgbClr val="666666"/>
+            </a:solidFill>
+            <a:ln w="0" cap="rnd">
+              <a:noFill/>
+              <a:round/>
+            </a:ln>
+          </p:spPr>
+        </p:sp>
+        <p:sp>
+          <p:nvSpPr>
+            <p:cNvPr id="58" name="right Speaker column 2 row 1 25"/>
+            <p:cNvSpPr/>
+            <p:nvPr/>
+          </p:nvSpPr>
+          <p:spPr>
+            <a:xfrm>
+              <a:off x="8399885" y="2072372"/>
+              <a:ext cx="25298" cy="64633"/>
+            </a:xfrm>
+            <a:custGeom>
+              <a:avLst/>
+              <a:gdLst/>
+              <a:ahLst/>
+              <a:cxnLst/>
+              <a:rect l="0" t="0" r="r" b="b"/>
+              <a:pathLst>
+                <a:path w="25298" h="64633" fill="norm">
+                  <a:moveTo>
+                    <a:pt x="25298" y="43885"/>
+                  </a:moveTo>
+                  <a:cubicBezTo>
+                    <a:pt x="25298" y="29615"/>
+                    <a:pt x="19516" y="12745"/>
+                    <a:pt x="12649" y="6421"/>
+                  </a:cubicBezTo>
+                  <a:cubicBezTo>
+                    <a:pt x="5421" y="0"/>
+                    <a:pt x="0" y="6741"/>
+                    <a:pt x="0" y="21005"/>
+                  </a:cubicBezTo>
+                  <a:cubicBezTo>
+                    <a:pt x="0" y="35269"/>
+                    <a:pt x="5782" y="52139"/>
+                    <a:pt x="12649" y="58205"/>
+                  </a:cubicBezTo>
+                  <a:cubicBezTo>
+                    <a:pt x="19877" y="64633"/>
+                    <a:pt x="25298" y="57892"/>
+                    <a:pt x="25298" y="43621"/>
+                  </a:cubicBezTo>
+                  <a:close/>
+                </a:path>
+              </a:pathLst>
+            </a:custGeom>
+            <a:solidFill>
+              <a:srgbClr val="666666"/>
+            </a:solidFill>
+            <a:ln w="0" cap="rnd">
+              <a:noFill/>
+              <a:round/>
+            </a:ln>
+          </p:spPr>
+        </p:sp>
+        <p:sp>
+          <p:nvSpPr>
+            <p:cNvPr id="59" name="right Speaker column 2 row 1 26"/>
+            <p:cNvSpPr/>
+            <p:nvPr/>
+          </p:nvSpPr>
+          <p:spPr>
+            <a:xfrm>
+              <a:off x="8399885" y="2157171"/>
+              <a:ext cx="25298" cy="64919"/>
+            </a:xfrm>
+            <a:custGeom>
+              <a:avLst/>
+              <a:gdLst/>
+              <a:ahLst/>
+              <a:cxnLst/>
+              <a:rect l="0" t="0" r="r" b="b"/>
+              <a:pathLst>
+                <a:path w="25298" h="64919" fill="norm">
+                  <a:moveTo>
+                    <a:pt x="25298" y="43916"/>
+                  </a:moveTo>
+                  <a:cubicBezTo>
+                    <a:pt x="25298" y="29646"/>
+                    <a:pt x="19516" y="12767"/>
+                    <a:pt x="12649" y="6432"/>
+                  </a:cubicBezTo>
+                  <a:cubicBezTo>
+                    <a:pt x="5421" y="0"/>
+                    <a:pt x="0" y="6732"/>
+                    <a:pt x="0" y="20996"/>
+                  </a:cubicBezTo>
+                  <a:cubicBezTo>
+                    <a:pt x="0" y="35260"/>
+                    <a:pt x="5782" y="52139"/>
+                    <a:pt x="12649" y="58480"/>
+                  </a:cubicBezTo>
+                  <a:cubicBezTo>
+                    <a:pt x="19877" y="64919"/>
+                    <a:pt x="25298" y="58451"/>
+                    <a:pt x="25298" y="43916"/>
+                  </a:cubicBezTo>
+                  <a:close/>
+                </a:path>
+              </a:pathLst>
+            </a:custGeom>
+            <a:solidFill>
+              <a:srgbClr val="666666"/>
+            </a:solidFill>
+            <a:ln w="0" cap="rnd">
+              <a:noFill/>
+              <a:round/>
+            </a:ln>
+          </p:spPr>
+        </p:sp>
+        <p:sp>
+          <p:nvSpPr>
+            <p:cNvPr id="60" name="right Speaker column 2 row 1 27"/>
+            <p:cNvSpPr/>
+            <p:nvPr/>
+          </p:nvSpPr>
+          <p:spPr>
+            <a:xfrm>
+              <a:off x="8399885" y="2241539"/>
+              <a:ext cx="25298" cy="64844"/>
+            </a:xfrm>
+            <a:custGeom>
+              <a:avLst/>
+              <a:gdLst/>
+              <a:ahLst/>
+              <a:cxnLst/>
+              <a:rect l="0" t="0" r="r" b="b"/>
+              <a:pathLst>
+                <a:path w="25298" h="64844" fill="norm">
+                  <a:moveTo>
+                    <a:pt x="25298" y="44378"/>
+                  </a:moveTo>
+                  <a:cubicBezTo>
+                    <a:pt x="25298" y="30108"/>
+                    <a:pt x="19516" y="13220"/>
+                    <a:pt x="12649" y="6610"/>
+                  </a:cubicBezTo>
+                  <a:cubicBezTo>
+                    <a:pt x="5782" y="0"/>
+                    <a:pt x="0" y="6626"/>
+                    <a:pt x="0" y="20890"/>
+                  </a:cubicBezTo>
+                  <a:cubicBezTo>
+                    <a:pt x="0" y="35154"/>
+                    <a:pt x="5782" y="52042"/>
+                    <a:pt x="12649" y="58394"/>
+                  </a:cubicBezTo>
+                  <a:cubicBezTo>
+                    <a:pt x="19877" y="64844"/>
+                    <a:pt x="25298" y="58384"/>
+                    <a:pt x="25298" y="44114"/>
+                  </a:cubicBezTo>
+                  <a:close/>
+                </a:path>
+              </a:pathLst>
+            </a:custGeom>
+            <a:solidFill>
+              <a:srgbClr val="666666"/>
+            </a:solidFill>
+            <a:ln w="0" cap="rnd">
+              <a:noFill/>
+              <a:round/>
+            </a:ln>
+          </p:spPr>
+        </p:sp>
+        <p:sp>
+          <p:nvSpPr>
+            <p:cNvPr id="61" name="right Speaker column 2 row 1 28"/>
+            <p:cNvSpPr/>
+            <p:nvPr/>
+          </p:nvSpPr>
+          <p:spPr>
+            <a:xfrm>
+              <a:off x="8399885" y="2326505"/>
+              <a:ext cx="25298" cy="65229"/>
+            </a:xfrm>
+            <a:custGeom>
+              <a:avLst/>
+              <a:gdLst/>
+              <a:ahLst/>
+              <a:cxnLst/>
+              <a:rect l="0" t="0" r="r" b="b"/>
+              <a:pathLst>
+                <a:path w="25298" h="65229" fill="norm">
+                  <a:moveTo>
+                    <a:pt x="25298" y="44242"/>
+                  </a:moveTo>
+                  <a:cubicBezTo>
+                    <a:pt x="25298" y="29972"/>
+                    <a:pt x="19516" y="12811"/>
+                    <a:pt x="12649" y="6454"/>
+                  </a:cubicBezTo>
+                  <a:cubicBezTo>
+                    <a:pt x="5421" y="0"/>
+                    <a:pt x="0" y="6451"/>
+                    <a:pt x="0" y="20715"/>
+                  </a:cubicBezTo>
+                  <a:cubicBezTo>
+                    <a:pt x="0" y="34979"/>
+                    <a:pt x="5782" y="51876"/>
+                    <a:pt x="12649" y="58503"/>
+                  </a:cubicBezTo>
+                  <a:cubicBezTo>
+                    <a:pt x="19877" y="65229"/>
+                    <a:pt x="25298" y="58777"/>
+                    <a:pt x="25298" y="44242"/>
+                  </a:cubicBezTo>
+                  <a:close/>
+                </a:path>
+              </a:pathLst>
+            </a:custGeom>
+            <a:solidFill>
+              <a:srgbClr val="666666"/>
+            </a:solidFill>
+            <a:ln w="0" cap="rnd">
+              <a:noFill/>
+              <a:round/>
+            </a:ln>
+          </p:spPr>
+        </p:sp>
+        <p:sp>
+          <p:nvSpPr>
+            <p:cNvPr id="62" name="right Speaker column 2 row 1 29"/>
+            <p:cNvSpPr/>
+            <p:nvPr/>
+          </p:nvSpPr>
+          <p:spPr>
+            <a:xfrm>
+              <a:off x="8399885" y="2411040"/>
+              <a:ext cx="25298" cy="65251"/>
+            </a:xfrm>
+            <a:custGeom>
+              <a:avLst/>
+              <a:gdLst/>
+              <a:ahLst/>
+              <a:cxnLst/>
+              <a:rect l="0" t="0" r="r" b="b"/>
+              <a:pathLst>
+                <a:path w="25298" h="65251" fill="norm">
+                  <a:moveTo>
+                    <a:pt x="25298" y="44538"/>
+                  </a:moveTo>
+                  <a:cubicBezTo>
+                    <a:pt x="25298" y="30267"/>
+                    <a:pt x="19516" y="13097"/>
+                    <a:pt x="12649" y="6730"/>
+                  </a:cubicBezTo>
+                  <a:cubicBezTo>
+                    <a:pt x="5421" y="0"/>
+                    <a:pt x="0" y="6443"/>
+                    <a:pt x="0" y="20707"/>
+                  </a:cubicBezTo>
+                  <a:cubicBezTo>
+                    <a:pt x="0" y="34971"/>
+                    <a:pt x="5782" y="52141"/>
+                    <a:pt x="12649" y="58514"/>
+                  </a:cubicBezTo>
+                  <a:cubicBezTo>
+                    <a:pt x="19877" y="65251"/>
+                    <a:pt x="25298" y="58808"/>
+                    <a:pt x="25298" y="44538"/>
+                  </a:cubicBezTo>
+                  <a:close/>
+                </a:path>
+              </a:pathLst>
+            </a:custGeom>
+            <a:solidFill>
+              <a:srgbClr val="666666"/>
+            </a:solidFill>
+            <a:ln w="0" cap="rnd">
+              <a:noFill/>
+              <a:round/>
+            </a:ln>
+          </p:spPr>
+        </p:sp>
+        <p:sp>
+          <p:nvSpPr>
+            <p:cNvPr id="63" name="right Speaker column 2 row 1 30"/>
+            <p:cNvSpPr/>
+            <p:nvPr/>
+          </p:nvSpPr>
+          <p:spPr>
+            <a:xfrm>
+              <a:off x="8435664" y="1976798"/>
+              <a:ext cx="26021" cy="64634"/>
+            </a:xfrm>
+            <a:custGeom>
+              <a:avLst/>
+              <a:gdLst/>
+              <a:ahLst/>
+              <a:cxnLst/>
+              <a:rect l="0" t="0" r="r" b="b"/>
+              <a:pathLst>
+                <a:path w="26021" h="64634" fill="norm">
+                  <a:moveTo>
+                    <a:pt x="26021" y="43954"/>
+                  </a:moveTo>
+                  <a:cubicBezTo>
+                    <a:pt x="26021" y="29409"/>
+                    <a:pt x="20239" y="12809"/>
+                    <a:pt x="13011" y="6404"/>
+                  </a:cubicBezTo>
+                  <a:cubicBezTo>
+                    <a:pt x="5782" y="0"/>
+                    <a:pt x="0" y="6930"/>
+                    <a:pt x="0" y="21203"/>
+                  </a:cubicBezTo>
+                  <a:cubicBezTo>
+                    <a:pt x="0" y="35476"/>
+                    <a:pt x="5782" y="52340"/>
+                    <a:pt x="13011" y="58487"/>
+                  </a:cubicBezTo>
+                  <a:cubicBezTo>
+                    <a:pt x="20239" y="64634"/>
+                    <a:pt x="26021" y="58234"/>
+                    <a:pt x="26021" y="43689"/>
+                  </a:cubicBezTo>
+                  <a:close/>
+                </a:path>
+              </a:pathLst>
+            </a:custGeom>
+            <a:solidFill>
+              <a:srgbClr val="666666"/>
+            </a:solidFill>
+            <a:ln w="0" cap="rnd">
+              <a:noFill/>
+              <a:round/>
+            </a:ln>
+          </p:spPr>
+        </p:sp>
+        <p:sp>
+          <p:nvSpPr>
+            <p:cNvPr id="64" name="right Speaker column 2 row 1 31"/>
+            <p:cNvSpPr/>
+            <p:nvPr/>
+          </p:nvSpPr>
+          <p:spPr>
+            <a:xfrm>
+              <a:off x="8435664" y="2061917"/>
+              <a:ext cx="26021" cy="65185"/>
+            </a:xfrm>
+            <a:custGeom>
+              <a:avLst/>
+              <a:gdLst/>
+              <a:ahLst/>
+              <a:cxnLst/>
+              <a:rect l="0" t="0" r="r" b="b"/>
+              <a:pathLst>
+                <a:path w="26021" h="65185" fill="norm">
+                  <a:moveTo>
+                    <a:pt x="26021" y="43985"/>
+                  </a:moveTo>
+                  <a:cubicBezTo>
+                    <a:pt x="26021" y="29441"/>
+                    <a:pt x="20239" y="12831"/>
+                    <a:pt x="13011" y="6416"/>
+                  </a:cubicBezTo>
+                  <a:cubicBezTo>
+                    <a:pt x="5782" y="0"/>
+                    <a:pt x="0" y="6656"/>
+                    <a:pt x="0" y="21194"/>
+                  </a:cubicBezTo>
+                  <a:cubicBezTo>
+                    <a:pt x="0" y="35731"/>
+                    <a:pt x="5782" y="52340"/>
+                    <a:pt x="13011" y="58763"/>
+                  </a:cubicBezTo>
+                  <a:cubicBezTo>
+                    <a:pt x="20239" y="65185"/>
+                    <a:pt x="26021" y="58529"/>
+                    <a:pt x="26021" y="43985"/>
+                  </a:cubicBezTo>
+                  <a:close/>
+                </a:path>
+              </a:pathLst>
+            </a:custGeom>
+            <a:solidFill>
+              <a:srgbClr val="666666"/>
+            </a:solidFill>
+            <a:ln w="0" cap="rnd">
+              <a:noFill/>
+              <a:round/>
+            </a:ln>
+          </p:spPr>
+        </p:sp>
+        <p:sp>
+          <p:nvSpPr>
+            <p:cNvPr id="65" name="right Speaker column 2 row 1 32"/>
+            <p:cNvSpPr/>
+            <p:nvPr/>
+          </p:nvSpPr>
+          <p:spPr>
+            <a:xfrm>
+              <a:off x="8435664" y="2147565"/>
+              <a:ext cx="26021" cy="64679"/>
+            </a:xfrm>
+            <a:custGeom>
+              <a:avLst/>
+              <a:gdLst/>
+              <a:ahLst/>
+              <a:cxnLst/>
+              <a:rect l="0" t="0" r="r" b="b"/>
+              <a:pathLst>
+                <a:path w="26021" h="64679" fill="norm">
+                  <a:moveTo>
+                    <a:pt x="26021" y="43752"/>
+                  </a:moveTo>
+                  <a:cubicBezTo>
+                    <a:pt x="26021" y="29208"/>
+                    <a:pt x="20239" y="12325"/>
+                    <a:pt x="13011" y="6162"/>
+                  </a:cubicBezTo>
+                  <a:cubicBezTo>
+                    <a:pt x="5782" y="0"/>
+                    <a:pt x="0" y="6383"/>
+                    <a:pt x="0" y="20656"/>
+                  </a:cubicBezTo>
+                  <a:cubicBezTo>
+                    <a:pt x="0" y="34929"/>
+                    <a:pt x="5782" y="51812"/>
+                    <a:pt x="13011" y="58245"/>
+                  </a:cubicBezTo>
+                  <a:cubicBezTo>
+                    <a:pt x="20239" y="64679"/>
+                    <a:pt x="26021" y="58296"/>
+                    <a:pt x="26021" y="43752"/>
+                  </a:cubicBezTo>
+                  <a:close/>
+                </a:path>
+              </a:pathLst>
+            </a:custGeom>
+            <a:solidFill>
+              <a:srgbClr val="666666"/>
+            </a:solidFill>
+            <a:ln w="0" cap="rnd">
+              <a:noFill/>
+              <a:round/>
+            </a:ln>
+          </p:spPr>
+        </p:sp>
+        <p:sp>
+          <p:nvSpPr>
+            <p:cNvPr id="66" name="right Speaker column 2 row 1 33"/>
+            <p:cNvSpPr/>
+            <p:nvPr/>
+          </p:nvSpPr>
+          <p:spPr>
+            <a:xfrm>
+              <a:off x="8435664" y="2232156"/>
+              <a:ext cx="26021" cy="65230"/>
+            </a:xfrm>
+            <a:custGeom>
+              <a:avLst/>
+              <a:gdLst/>
+              <a:ahLst/>
+              <a:cxnLst/>
+              <a:rect l="0" t="0" r="r" b="b"/>
+              <a:pathLst>
+                <a:path w="26021" h="65230" fill="norm">
+                  <a:moveTo>
+                    <a:pt x="26021" y="44312"/>
+                  </a:moveTo>
+                  <a:cubicBezTo>
+                    <a:pt x="26021" y="29768"/>
+                    <a:pt x="20239" y="12876"/>
+                    <a:pt x="13011" y="6438"/>
+                  </a:cubicBezTo>
+                  <a:cubicBezTo>
+                    <a:pt x="5782" y="0"/>
+                    <a:pt x="0" y="6374"/>
+                    <a:pt x="0" y="20911"/>
+                  </a:cubicBezTo>
+                  <a:cubicBezTo>
+                    <a:pt x="0" y="35449"/>
+                    <a:pt x="5782" y="52340"/>
+                    <a:pt x="13011" y="58785"/>
+                  </a:cubicBezTo>
+                  <a:cubicBezTo>
+                    <a:pt x="20239" y="65230"/>
+                    <a:pt x="26021" y="58856"/>
+                    <a:pt x="26021" y="44312"/>
+                  </a:cubicBezTo>
+                  <a:close/>
+                </a:path>
+              </a:pathLst>
+            </a:custGeom>
+            <a:solidFill>
+              <a:srgbClr val="666666"/>
+            </a:solidFill>
+            <a:ln w="0" cap="rnd">
+              <a:noFill/>
+              <a:round/>
+            </a:ln>
+          </p:spPr>
+        </p:sp>
+        <p:sp>
+          <p:nvSpPr>
+            <p:cNvPr id="67" name="right Speaker column 2 row 1 34"/>
+            <p:cNvSpPr/>
+            <p:nvPr/>
+          </p:nvSpPr>
+          <p:spPr>
+            <a:xfrm>
+              <a:off x="8435664" y="2317539"/>
+              <a:ext cx="26021" cy="64988"/>
+            </a:xfrm>
+            <a:custGeom>
+              <a:avLst/>
+              <a:gdLst/>
+              <a:ahLst/>
+              <a:cxnLst/>
+              <a:rect l="0" t="0" r="r" b="b"/>
+              <a:pathLst>
+                <a:path w="26021" h="64988" fill="norm">
+                  <a:moveTo>
+                    <a:pt x="26021" y="44343"/>
+                  </a:moveTo>
+                  <a:cubicBezTo>
+                    <a:pt x="26021" y="29799"/>
+                    <a:pt x="20239" y="12898"/>
+                    <a:pt x="13011" y="6449"/>
+                  </a:cubicBezTo>
+                  <a:cubicBezTo>
+                    <a:pt x="5782" y="0"/>
+                    <a:pt x="0" y="6365"/>
+                    <a:pt x="0" y="20638"/>
+                  </a:cubicBezTo>
+                  <a:cubicBezTo>
+                    <a:pt x="0" y="34911"/>
+                    <a:pt x="5782" y="52076"/>
+                    <a:pt x="13011" y="58532"/>
+                  </a:cubicBezTo>
+                  <a:cubicBezTo>
+                    <a:pt x="20239" y="64988"/>
+                    <a:pt x="26021" y="58623"/>
+                    <a:pt x="26021" y="44343"/>
+                  </a:cubicBezTo>
+                  <a:close/>
+                </a:path>
+              </a:pathLst>
+            </a:custGeom>
+            <a:solidFill>
+              <a:srgbClr val="666666"/>
+            </a:solidFill>
+            <a:ln w="0" cap="rnd">
+              <a:noFill/>
+              <a:round/>
+            </a:ln>
+          </p:spPr>
+        </p:sp>
+        <p:sp>
+          <p:nvSpPr>
+            <p:cNvPr id="68" name="right Speaker column 2 row 1 35"/>
+            <p:cNvSpPr/>
+            <p:nvPr/>
+          </p:nvSpPr>
+          <p:spPr>
+            <a:xfrm>
+              <a:off x="8435664" y="2402130"/>
+              <a:ext cx="26021" cy="65804"/>
+            </a:xfrm>
+            <a:custGeom>
+              <a:avLst/>
+              <a:gdLst/>
+              <a:ahLst/>
+              <a:cxnLst/>
+              <a:rect l="0" t="0" r="r" b="b"/>
+              <a:pathLst>
+                <a:path w="26021" h="65804" fill="norm">
+                  <a:moveTo>
+                    <a:pt x="26021" y="44903"/>
+                  </a:moveTo>
+                  <a:cubicBezTo>
+                    <a:pt x="26021" y="30359"/>
+                    <a:pt x="20239" y="13449"/>
+                    <a:pt x="13011" y="6725"/>
+                  </a:cubicBezTo>
+                  <a:cubicBezTo>
+                    <a:pt x="5782" y="0"/>
+                    <a:pt x="0" y="6356"/>
+                    <a:pt x="0" y="20894"/>
+                  </a:cubicBezTo>
+                  <a:cubicBezTo>
+                    <a:pt x="0" y="35431"/>
+                    <a:pt x="5782" y="52340"/>
+                    <a:pt x="13011" y="59072"/>
+                  </a:cubicBezTo>
+                  <a:cubicBezTo>
+                    <a:pt x="20239" y="65804"/>
+                    <a:pt x="26021" y="59448"/>
+                    <a:pt x="26021" y="44903"/>
+                  </a:cubicBezTo>
+                  <a:close/>
+                </a:path>
+              </a:pathLst>
+            </a:custGeom>
+            <a:solidFill>
+              <a:srgbClr val="666666"/>
+            </a:solidFill>
+            <a:ln w="0" cap="rnd">
+              <a:noFill/>
+              <a:round/>
+            </a:ln>
+          </p:spPr>
+        </p:sp>
+        <p:sp>
+          <p:nvSpPr>
+            <p:cNvPr id="69" name="right Speaker column 2 row 1 36"/>
+            <p:cNvSpPr/>
+            <p:nvPr/>
+          </p:nvSpPr>
+          <p:spPr>
+            <a:xfrm>
+              <a:off x="8472527" y="2051864"/>
+              <a:ext cx="26021" cy="64681"/>
+            </a:xfrm>
+            <a:custGeom>
+              <a:avLst/>
+              <a:gdLst/>
+              <a:ahLst/>
+              <a:cxnLst/>
+              <a:rect l="0" t="0" r="r" b="b"/>
+              <a:pathLst>
+                <a:path w="26021" h="64681" fill="norm">
+                  <a:moveTo>
+                    <a:pt x="26021" y="43724"/>
+                  </a:moveTo>
+                  <a:cubicBezTo>
+                    <a:pt x="26021" y="29170"/>
+                    <a:pt x="20239" y="12292"/>
+                    <a:pt x="13011" y="6146"/>
+                  </a:cubicBezTo>
+                  <a:cubicBezTo>
+                    <a:pt x="5782" y="0"/>
+                    <a:pt x="0" y="6404"/>
+                    <a:pt x="0" y="20951"/>
+                  </a:cubicBezTo>
+                  <a:cubicBezTo>
+                    <a:pt x="0" y="35498"/>
+                    <a:pt x="5782" y="52375"/>
+                    <a:pt x="13011" y="58528"/>
+                  </a:cubicBezTo>
+                  <a:cubicBezTo>
+                    <a:pt x="20239" y="64681"/>
+                    <a:pt x="26021" y="58278"/>
+                    <a:pt x="26021" y="43724"/>
+                  </a:cubicBezTo>
+                  <a:close/>
+                </a:path>
+              </a:pathLst>
+            </a:custGeom>
+            <a:solidFill>
+              <a:srgbClr val="666666"/>
+            </a:solidFill>
+            <a:ln w="0" cap="rnd">
+              <a:noFill/>
+              <a:round/>
+            </a:ln>
+          </p:spPr>
+        </p:sp>
+        <p:sp>
+          <p:nvSpPr>
+            <p:cNvPr id="70" name="right Speaker column 2 row 1 37"/>
+            <p:cNvSpPr/>
+            <p:nvPr/>
+          </p:nvSpPr>
+          <p:spPr>
+            <a:xfrm>
+              <a:off x="8472527" y="2137040"/>
+              <a:ext cx="26021" cy="65497"/>
+            </a:xfrm>
+            <a:custGeom>
+              <a:avLst/>
+              <a:gdLst/>
+              <a:ahLst/>
+              <a:cxnLst/>
+              <a:rect l="0" t="0" r="r" b="b"/>
+              <a:pathLst>
+                <a:path w="26021" h="65497" fill="norm">
+                  <a:moveTo>
+                    <a:pt x="26021" y="44284"/>
+                  </a:moveTo>
+                  <a:cubicBezTo>
+                    <a:pt x="26021" y="29730"/>
+                    <a:pt x="20239" y="12843"/>
+                    <a:pt x="13011" y="6422"/>
+                  </a:cubicBezTo>
+                  <a:cubicBezTo>
+                    <a:pt x="5782" y="0"/>
+                    <a:pt x="0" y="6659"/>
+                    <a:pt x="0" y="21206"/>
+                  </a:cubicBezTo>
+                  <a:cubicBezTo>
+                    <a:pt x="0" y="35754"/>
+                    <a:pt x="5782" y="52640"/>
+                    <a:pt x="13011" y="59068"/>
+                  </a:cubicBezTo>
+                  <a:cubicBezTo>
+                    <a:pt x="20239" y="65497"/>
+                    <a:pt x="26021" y="58838"/>
+                    <a:pt x="26021" y="44284"/>
+                  </a:cubicBezTo>
+                  <a:close/>
+                </a:path>
+              </a:pathLst>
+            </a:custGeom>
+            <a:solidFill>
+              <a:srgbClr val="666666"/>
+            </a:solidFill>
+            <a:ln w="0" cap="rnd">
+              <a:noFill/>
+              <a:round/>
+            </a:ln>
+          </p:spPr>
+        </p:sp>
+        <p:sp>
+          <p:nvSpPr>
+            <p:cNvPr id="71" name="right Speaker column 2 row 1 38"/>
+            <p:cNvSpPr/>
+            <p:nvPr/>
+          </p:nvSpPr>
+          <p:spPr>
+            <a:xfrm>
+              <a:off x="8472527" y="2222745"/>
+              <a:ext cx="26021" cy="65255"/>
+            </a:xfrm>
+            <a:custGeom>
+              <a:avLst/>
+              <a:gdLst/>
+              <a:ahLst/>
+              <a:cxnLst/>
+              <a:rect l="0" t="0" r="r" b="b"/>
+              <a:pathLst>
+                <a:path w="26021" h="65255" fill="norm">
+                  <a:moveTo>
+                    <a:pt x="26021" y="44315"/>
+                  </a:moveTo>
+                  <a:cubicBezTo>
+                    <a:pt x="26021" y="29761"/>
+                    <a:pt x="20239" y="12866"/>
+                    <a:pt x="13011" y="6433"/>
+                  </a:cubicBezTo>
+                  <a:cubicBezTo>
+                    <a:pt x="5782" y="0"/>
+                    <a:pt x="0" y="6386"/>
+                    <a:pt x="0" y="20933"/>
+                  </a:cubicBezTo>
+                  <a:cubicBezTo>
+                    <a:pt x="0" y="35480"/>
+                    <a:pt x="5782" y="52375"/>
+                    <a:pt x="13011" y="58815"/>
+                  </a:cubicBezTo>
+                  <a:cubicBezTo>
+                    <a:pt x="20239" y="65255"/>
+                    <a:pt x="26021" y="58869"/>
+                    <a:pt x="26021" y="44315"/>
+                  </a:cubicBezTo>
+                  <a:close/>
+                </a:path>
+              </a:pathLst>
+            </a:custGeom>
+            <a:solidFill>
+              <a:srgbClr val="666666"/>
+            </a:solidFill>
+            <a:ln w="0" cap="rnd">
+              <a:noFill/>
+              <a:round/>
+            </a:ln>
+          </p:spPr>
+        </p:sp>
+        <p:sp>
+          <p:nvSpPr>
+            <p:cNvPr id="72" name="right Speaker column 2 row 1 39"/>
+            <p:cNvSpPr/>
+            <p:nvPr/>
+          </p:nvSpPr>
+          <p:spPr>
+            <a:xfrm>
+              <a:off x="8472527" y="2308186"/>
+              <a:ext cx="26021" cy="65806"/>
+            </a:xfrm>
+            <a:custGeom>
+              <a:avLst/>
+              <a:gdLst/>
+              <a:ahLst/>
+              <a:cxnLst/>
+              <a:rect l="0" t="0" r="r" b="b"/>
+              <a:pathLst>
+                <a:path w="26021" h="65806" fill="norm">
+                  <a:moveTo>
+                    <a:pt x="26021" y="44611"/>
+                  </a:moveTo>
+                  <a:cubicBezTo>
+                    <a:pt x="26021" y="30057"/>
+                    <a:pt x="20239" y="12888"/>
+                    <a:pt x="13011" y="6444"/>
+                  </a:cubicBezTo>
+                  <a:cubicBezTo>
+                    <a:pt x="5782" y="0"/>
+                    <a:pt x="0" y="6377"/>
+                    <a:pt x="0" y="20924"/>
+                  </a:cubicBezTo>
+                  <a:cubicBezTo>
+                    <a:pt x="0" y="35471"/>
+                    <a:pt x="5782" y="52375"/>
+                    <a:pt x="13011" y="59091"/>
+                  </a:cubicBezTo>
+                  <a:cubicBezTo>
+                    <a:pt x="20239" y="65806"/>
+                    <a:pt x="26021" y="59165"/>
+                    <a:pt x="26021" y="44611"/>
+                  </a:cubicBezTo>
+                  <a:close/>
+                </a:path>
+              </a:pathLst>
+            </a:custGeom>
+            <a:solidFill>
+              <a:srgbClr val="666666"/>
+            </a:solidFill>
+            <a:ln w="0" cap="rnd">
+              <a:noFill/>
+              <a:round/>
+            </a:ln>
+          </p:spPr>
+        </p:sp>
+        <p:sp>
+          <p:nvSpPr>
+            <p:cNvPr id="73" name="right Speaker column 2 row 1 40"/>
+            <p:cNvSpPr/>
+            <p:nvPr/>
+          </p:nvSpPr>
+          <p:spPr>
+            <a:xfrm>
+              <a:off x="8472527" y="2393891"/>
+              <a:ext cx="26021" cy="65564"/>
+            </a:xfrm>
+            <a:custGeom>
+              <a:avLst/>
+              <a:gdLst/>
+              <a:ahLst/>
+              <a:cxnLst/>
+              <a:rect l="0" t="0" r="r" b="b"/>
+              <a:pathLst>
+                <a:path w="26021" h="65564" fill="norm">
+                  <a:moveTo>
+                    <a:pt x="26021" y="44642"/>
+                  </a:moveTo>
+                  <a:cubicBezTo>
+                    <a:pt x="26021" y="30088"/>
+                    <a:pt x="20239" y="12910"/>
+                    <a:pt x="13011" y="6455"/>
+                  </a:cubicBezTo>
+                  <a:cubicBezTo>
+                    <a:pt x="5782" y="0"/>
+                    <a:pt x="0" y="6103"/>
+                    <a:pt x="0" y="20651"/>
+                  </a:cubicBezTo>
+                  <a:cubicBezTo>
+                    <a:pt x="0" y="35198"/>
+                    <a:pt x="5782" y="52111"/>
+                    <a:pt x="13011" y="58837"/>
+                  </a:cubicBezTo>
+                  <a:cubicBezTo>
+                    <a:pt x="20239" y="65564"/>
+                    <a:pt x="26021" y="59196"/>
+                    <a:pt x="26021" y="44642"/>
+                  </a:cubicBezTo>
+                  <a:close/>
+                </a:path>
+              </a:pathLst>
+            </a:custGeom>
+            <a:solidFill>
+              <a:srgbClr val="666666"/>
+            </a:solidFill>
+            <a:ln w="0" cap="rnd">
+              <a:noFill/>
+              <a:round/>
+            </a:ln>
+          </p:spPr>
+        </p:sp>
+        <p:sp>
+          <p:nvSpPr>
+            <p:cNvPr id="74" name="right Speaker column 2 row 1 41"/>
+            <p:cNvSpPr/>
+            <p:nvPr/>
+          </p:nvSpPr>
+          <p:spPr>
+            <a:xfrm>
+              <a:off x="8292549" y="2352681"/>
+              <a:ext cx="25298" cy="64793"/>
+            </a:xfrm>
+            <a:custGeom>
+              <a:avLst/>
+              <a:gdLst/>
+              <a:ahLst/>
+              <a:cxnLst/>
+              <a:rect l="0" t="0" r="r" b="b"/>
+              <a:pathLst>
+                <a:path w="25298" h="64793" fill="norm">
+                  <a:moveTo>
+                    <a:pt x="0" y="20552"/>
+                  </a:moveTo>
+                  <a:cubicBezTo>
+                    <a:pt x="0" y="34787"/>
+                    <a:pt x="5421" y="51311"/>
+                    <a:pt x="12649" y="58052"/>
+                  </a:cubicBezTo>
+                  <a:cubicBezTo>
+                    <a:pt x="19877" y="64793"/>
+                    <a:pt x="25298" y="58377"/>
+                    <a:pt x="25298" y="44135"/>
+                  </a:cubicBezTo>
+                  <a:cubicBezTo>
+                    <a:pt x="25298" y="29893"/>
+                    <a:pt x="19516" y="13270"/>
+                    <a:pt x="12649" y="6635"/>
+                  </a:cubicBezTo>
+                  <a:cubicBezTo>
+                    <a:pt x="5782" y="0"/>
+                    <a:pt x="0" y="6317"/>
+                    <a:pt x="0" y="20552"/>
+                  </a:cubicBezTo>
+                  <a:close/>
+                </a:path>
+              </a:pathLst>
+            </a:custGeom>
+            <a:solidFill>
+              <a:srgbClr val="666666"/>
+            </a:solidFill>
+            <a:ln w="0" cap="rnd">
+              <a:noFill/>
+              <a:round/>
+            </a:ln>
+          </p:spPr>
+        </p:sp>
+        <p:sp>
+          <p:nvSpPr>
+            <p:cNvPr id="75" name="right Speaker column 2 row 1 42"/>
+            <p:cNvSpPr/>
+            <p:nvPr/>
+          </p:nvSpPr>
+          <p:spPr>
+            <a:xfrm>
+              <a:off x="8292549" y="2269634"/>
+              <a:ext cx="25298" cy="63980"/>
+            </a:xfrm>
+            <a:custGeom>
+              <a:avLst/>
+              <a:gdLst/>
+              <a:ahLst/>
+              <a:cxnLst/>
+              <a:rect l="0" t="0" r="r" b="b"/>
+              <a:pathLst>
+                <a:path w="25298" h="63980" fill="norm">
+                  <a:moveTo>
+                    <a:pt x="0" y="20298"/>
+                  </a:moveTo>
+                  <a:cubicBezTo>
+                    <a:pt x="0" y="34533"/>
+                    <a:pt x="5421" y="51047"/>
+                    <a:pt x="12649" y="57514"/>
+                  </a:cubicBezTo>
+                  <a:cubicBezTo>
+                    <a:pt x="19877" y="63980"/>
+                    <a:pt x="25298" y="57819"/>
+                    <a:pt x="25298" y="43577"/>
+                  </a:cubicBezTo>
+                  <a:cubicBezTo>
+                    <a:pt x="25298" y="29335"/>
+                    <a:pt x="19516" y="12721"/>
+                    <a:pt x="12649" y="6360"/>
+                  </a:cubicBezTo>
+                  <a:cubicBezTo>
+                    <a:pt x="5782" y="0"/>
+                    <a:pt x="0" y="6326"/>
+                    <a:pt x="0" y="20298"/>
+                  </a:cubicBezTo>
+                  <a:close/>
+                </a:path>
+              </a:pathLst>
+            </a:custGeom>
+            <a:solidFill>
+              <a:srgbClr val="666666"/>
+            </a:solidFill>
+            <a:ln w="0" cap="rnd">
+              <a:noFill/>
+              <a:round/>
+            </a:ln>
+          </p:spPr>
+        </p:sp>
+        <p:sp>
+          <p:nvSpPr>
+            <p:cNvPr id="76" name="right Speaker column 2 row 1 43"/>
+            <p:cNvSpPr/>
+            <p:nvPr/>
+          </p:nvSpPr>
+          <p:spPr>
+            <a:xfrm>
+              <a:off x="8292549" y="2186059"/>
+              <a:ext cx="25298" cy="64221"/>
+            </a:xfrm>
+            <a:custGeom>
+              <a:avLst/>
+              <a:gdLst/>
+              <a:ahLst/>
+              <a:cxnLst/>
+              <a:rect l="0" t="0" r="r" b="b"/>
+              <a:pathLst>
+                <a:path w="25298" h="64221" fill="norm">
+                  <a:moveTo>
+                    <a:pt x="0" y="20571"/>
+                  </a:moveTo>
+                  <a:cubicBezTo>
+                    <a:pt x="0" y="34806"/>
+                    <a:pt x="5421" y="51312"/>
+                    <a:pt x="12649" y="57767"/>
+                  </a:cubicBezTo>
+                  <a:cubicBezTo>
+                    <a:pt x="19877" y="64221"/>
+                    <a:pt x="25298" y="57788"/>
+                    <a:pt x="25298" y="43546"/>
+                  </a:cubicBezTo>
+                  <a:cubicBezTo>
+                    <a:pt x="25298" y="29304"/>
+                    <a:pt x="19516" y="12699"/>
+                    <a:pt x="12649" y="6349"/>
+                  </a:cubicBezTo>
+                  <a:cubicBezTo>
+                    <a:pt x="5782" y="0"/>
+                    <a:pt x="0" y="6335"/>
+                    <a:pt x="0" y="20571"/>
+                  </a:cubicBezTo>
+                  <a:close/>
+                </a:path>
+              </a:pathLst>
+            </a:custGeom>
+            <a:solidFill>
+              <a:srgbClr val="666666"/>
+            </a:solidFill>
+            <a:ln w="0" cap="rnd">
+              <a:noFill/>
+              <a:round/>
+            </a:ln>
+          </p:spPr>
+        </p:sp>
+        <p:sp>
+          <p:nvSpPr>
+            <p:cNvPr id="77" name="right Speaker column 2 row 1 44"/>
+            <p:cNvSpPr/>
+            <p:nvPr/>
+          </p:nvSpPr>
+          <p:spPr>
+            <a:xfrm>
+              <a:off x="8292549" y="2103012"/>
+              <a:ext cx="25298" cy="63408"/>
+            </a:xfrm>
+            <a:custGeom>
+              <a:avLst/>
+              <a:gdLst/>
+              <a:ahLst/>
+              <a:cxnLst/>
+              <a:rect l="0" t="0" r="r" b="b"/>
+              <a:pathLst>
+                <a:path w="25298" h="63408" fill="norm">
+                  <a:moveTo>
+                    <a:pt x="0" y="20316"/>
+                  </a:moveTo>
+                  <a:cubicBezTo>
+                    <a:pt x="0" y="34551"/>
+                    <a:pt x="5421" y="51049"/>
+                    <a:pt x="12649" y="57228"/>
+                  </a:cubicBezTo>
+                  <a:cubicBezTo>
+                    <a:pt x="19877" y="63408"/>
+                    <a:pt x="25298" y="57229"/>
+                    <a:pt x="25298" y="42987"/>
+                  </a:cubicBezTo>
+                  <a:cubicBezTo>
+                    <a:pt x="25298" y="28745"/>
+                    <a:pt x="19516" y="12150"/>
+                    <a:pt x="12649" y="6075"/>
+                  </a:cubicBezTo>
+                  <a:cubicBezTo>
+                    <a:pt x="5782" y="0"/>
+                    <a:pt x="0" y="6345"/>
+                    <a:pt x="0" y="20316"/>
+                  </a:cubicBezTo>
+                  <a:close/>
+                </a:path>
+              </a:pathLst>
+            </a:custGeom>
+            <a:solidFill>
+              <a:srgbClr val="666666"/>
+            </a:solidFill>
+            <a:ln w="0" cap="rnd">
+              <a:noFill/>
+              <a:round/>
+            </a:ln>
+          </p:spPr>
+        </p:sp>
+        <p:sp>
+          <p:nvSpPr>
+            <p:cNvPr id="78" name="right Speaker column 2 row 1 45"/>
+            <p:cNvSpPr/>
+            <p:nvPr/>
+          </p:nvSpPr>
+          <p:spPr>
+            <a:xfrm>
+              <a:off x="8292549" y="2019437"/>
+              <a:ext cx="25298" cy="63913"/>
+            </a:xfrm>
+            <a:custGeom>
+              <a:avLst/>
+              <a:gdLst/>
+              <a:ahLst/>
+              <a:cxnLst/>
+              <a:rect l="0" t="0" r="r" b="b"/>
+              <a:pathLst>
+                <a:path w="25298" h="63913" fill="norm">
+                  <a:moveTo>
+                    <a:pt x="0" y="20589"/>
+                  </a:moveTo>
+                  <a:cubicBezTo>
+                    <a:pt x="0" y="34824"/>
+                    <a:pt x="5421" y="51049"/>
+                    <a:pt x="12649" y="57481"/>
+                  </a:cubicBezTo>
+                  <a:cubicBezTo>
+                    <a:pt x="19877" y="63913"/>
+                    <a:pt x="25298" y="57198"/>
+                    <a:pt x="25298" y="42956"/>
+                  </a:cubicBezTo>
+                  <a:cubicBezTo>
+                    <a:pt x="25298" y="28714"/>
+                    <a:pt x="19516" y="12128"/>
+                    <a:pt x="12649" y="6064"/>
+                  </a:cubicBezTo>
+                  <a:cubicBezTo>
+                    <a:pt x="5782" y="0"/>
+                    <a:pt x="0" y="6354"/>
+                    <a:pt x="0" y="20589"/>
+                  </a:cubicBezTo>
+                  <a:close/>
+                </a:path>
+              </a:pathLst>
+            </a:custGeom>
+            <a:solidFill>
+              <a:srgbClr val="666666"/>
+            </a:solidFill>
+            <a:ln w="0" cap="rnd">
+              <a:noFill/>
+              <a:round/>
+            </a:ln>
+          </p:spPr>
+        </p:sp>
+        <p:sp>
+          <p:nvSpPr>
+            <p:cNvPr id="79" name="right Speaker column 2 row 1 46"/>
+            <p:cNvSpPr/>
+            <p:nvPr/>
+          </p:nvSpPr>
+          <p:spPr>
+            <a:xfrm>
+              <a:off x="8292549" y="1935862"/>
+              <a:ext cx="25298" cy="63363"/>
+            </a:xfrm>
+            <a:custGeom>
+              <a:avLst/>
+              <a:gdLst/>
+              <a:ahLst/>
+              <a:cxnLst/>
+              <a:rect l="0" t="0" r="r" b="b"/>
+              <a:pathLst>
+                <a:path w="25298" h="63363" fill="norm">
+                  <a:moveTo>
+                    <a:pt x="0" y="20598"/>
+                  </a:moveTo>
+                  <a:cubicBezTo>
+                    <a:pt x="0" y="34833"/>
+                    <a:pt x="5421" y="51050"/>
+                    <a:pt x="12649" y="57207"/>
+                  </a:cubicBezTo>
+                  <a:cubicBezTo>
+                    <a:pt x="19877" y="63363"/>
+                    <a:pt x="25298" y="56904"/>
+                    <a:pt x="25298" y="42662"/>
+                  </a:cubicBezTo>
+                  <a:cubicBezTo>
+                    <a:pt x="25298" y="28420"/>
+                    <a:pt x="19516" y="12106"/>
+                    <a:pt x="12649" y="6053"/>
+                  </a:cubicBezTo>
+                  <a:cubicBezTo>
+                    <a:pt x="5782" y="0"/>
+                    <a:pt x="0" y="6363"/>
+                    <a:pt x="0" y="20598"/>
+                  </a:cubicBezTo>
+                  <a:close/>
+                </a:path>
+              </a:pathLst>
+            </a:custGeom>
+            <a:solidFill>
+              <a:srgbClr val="666666"/>
+            </a:solidFill>
+            <a:ln w="0" cap="rnd">
+              <a:noFill/>
+              <a:round/>
+            </a:ln>
+          </p:spPr>
+        </p:sp>
+        <p:sp>
+          <p:nvSpPr>
+            <p:cNvPr id="80" name="right Speaker column 2 row 1 47"/>
+            <p:cNvSpPr/>
+            <p:nvPr/>
+          </p:nvSpPr>
+          <p:spPr>
+            <a:xfrm>
+              <a:off x="8292549" y="1852551"/>
+              <a:ext cx="25298" cy="63341"/>
+            </a:xfrm>
+            <a:custGeom>
+              <a:avLst/>
+              <a:gdLst/>
+              <a:ahLst/>
+              <a:cxnLst/>
+              <a:rect l="0" t="0" r="r" b="b"/>
+              <a:pathLst>
+                <a:path w="25298" h="63341" fill="norm">
+                  <a:moveTo>
+                    <a:pt x="0" y="20607"/>
+                  </a:moveTo>
+                  <a:cubicBezTo>
+                    <a:pt x="0" y="34842"/>
+                    <a:pt x="5421" y="51050"/>
+                    <a:pt x="12649" y="57196"/>
+                  </a:cubicBezTo>
+                  <a:cubicBezTo>
+                    <a:pt x="19877" y="63341"/>
+                    <a:pt x="25298" y="56609"/>
+                    <a:pt x="25298" y="42631"/>
+                  </a:cubicBezTo>
+                  <a:cubicBezTo>
+                    <a:pt x="25298" y="28653"/>
+                    <a:pt x="19516" y="12085"/>
+                    <a:pt x="12649" y="6042"/>
+                  </a:cubicBezTo>
+                  <a:cubicBezTo>
+                    <a:pt x="5782" y="0"/>
+                    <a:pt x="0" y="6636"/>
+                    <a:pt x="0" y="20871"/>
+                  </a:cubicBezTo>
+                  <a:close/>
+                </a:path>
+              </a:pathLst>
+            </a:custGeom>
+            <a:solidFill>
+              <a:srgbClr val="666666"/>
+            </a:solidFill>
+            <a:ln w="0" cap="rnd">
+              <a:noFill/>
+              <a:round/>
+            </a:ln>
+          </p:spPr>
+        </p:sp>
+        <p:sp>
+          <p:nvSpPr>
+            <p:cNvPr id="81" name="right Speaker column 2 row 1 48"/>
+            <p:cNvSpPr/>
+            <p:nvPr/>
+          </p:nvSpPr>
+          <p:spPr>
+            <a:xfrm>
+              <a:off x="8292549" y="1769240"/>
+              <a:ext cx="25298" cy="62791"/>
+            </a:xfrm>
+            <a:custGeom>
+              <a:avLst/>
+              <a:gdLst/>
+              <a:ahLst/>
+              <a:cxnLst/>
+              <a:rect l="0" t="0" r="r" b="b"/>
+              <a:pathLst>
+                <a:path w="25298" h="62791" fill="norm">
+                  <a:moveTo>
+                    <a:pt x="0" y="20616"/>
+                  </a:moveTo>
+                  <a:cubicBezTo>
+                    <a:pt x="0" y="34852"/>
+                    <a:pt x="5421" y="51051"/>
+                    <a:pt x="12649" y="56921"/>
+                  </a:cubicBezTo>
+                  <a:cubicBezTo>
+                    <a:pt x="19877" y="62791"/>
+                    <a:pt x="25298" y="56315"/>
+                    <a:pt x="25298" y="42073"/>
+                  </a:cubicBezTo>
+                  <a:cubicBezTo>
+                    <a:pt x="25298" y="27831"/>
+                    <a:pt x="19516" y="11535"/>
+                    <a:pt x="12649" y="5768"/>
+                  </a:cubicBezTo>
+                  <a:cubicBezTo>
+                    <a:pt x="5782" y="0"/>
+                    <a:pt x="0" y="6381"/>
+                    <a:pt x="0" y="20616"/>
+                  </a:cubicBezTo>
+                  <a:close/>
+                </a:path>
+              </a:pathLst>
+            </a:custGeom>
+            <a:solidFill>
+              <a:srgbClr val="666666"/>
+            </a:solidFill>
+            <a:ln w="0" cap="rnd">
+              <a:noFill/>
+              <a:round/>
+            </a:ln>
+          </p:spPr>
+        </p:sp>
+        <p:sp>
+          <p:nvSpPr>
+            <p:cNvPr id="82" name="right Speaker column 2 row 1 49"/>
+            <p:cNvSpPr/>
+            <p:nvPr/>
+          </p:nvSpPr>
+          <p:spPr>
+            <a:xfrm>
+              <a:off x="8257492" y="2278373"/>
+              <a:ext cx="24575" cy="63856"/>
+            </a:xfrm>
+            <a:custGeom>
+              <a:avLst/>
+              <a:gdLst/>
+              <a:ahLst/>
+              <a:cxnLst/>
+              <a:rect l="0" t="0" r="r" b="b"/>
+              <a:pathLst>
+                <a:path w="24575" h="63856" fill="norm">
+                  <a:moveTo>
+                    <a:pt x="0" y="20376"/>
+                  </a:moveTo>
+                  <a:cubicBezTo>
+                    <a:pt x="0" y="34338"/>
+                    <a:pt x="5421" y="51112"/>
+                    <a:pt x="12288" y="57484"/>
+                  </a:cubicBezTo>
+                  <a:cubicBezTo>
+                    <a:pt x="19154" y="63856"/>
+                    <a:pt x="24575" y="57707"/>
+                    <a:pt x="24575" y="43474"/>
+                  </a:cubicBezTo>
+                  <a:cubicBezTo>
+                    <a:pt x="24575" y="29242"/>
+                    <a:pt x="19154" y="12731"/>
+                    <a:pt x="12288" y="6365"/>
+                  </a:cubicBezTo>
+                  <a:cubicBezTo>
+                    <a:pt x="5421" y="0"/>
+                    <a:pt x="0" y="6150"/>
+                    <a:pt x="0" y="20376"/>
+                  </a:cubicBezTo>
+                  <a:close/>
+                </a:path>
+              </a:pathLst>
+            </a:custGeom>
+            <a:solidFill>
+              <a:srgbClr val="666666"/>
+            </a:solidFill>
+            <a:ln w="0" cap="rnd">
+              <a:noFill/>
+              <a:round/>
+            </a:ln>
+          </p:spPr>
+        </p:sp>
+        <p:sp>
+          <p:nvSpPr>
+            <p:cNvPr id="83" name="right Speaker column 2 row 1 50"/>
+            <p:cNvSpPr/>
+            <p:nvPr/>
+          </p:nvSpPr>
+          <p:spPr>
+            <a:xfrm>
+              <a:off x="8257492" y="2195909"/>
+              <a:ext cx="24575" cy="63308"/>
+            </a:xfrm>
+            <a:custGeom>
+              <a:avLst/>
+              <a:gdLst/>
+              <a:ahLst/>
+              <a:cxnLst/>
+              <a:rect l="0" t="0" r="r" b="b"/>
+              <a:pathLst>
+                <a:path w="24575" h="63308" fill="norm">
+                  <a:moveTo>
+                    <a:pt x="0" y="20121"/>
+                  </a:moveTo>
+                  <a:cubicBezTo>
+                    <a:pt x="0" y="34083"/>
+                    <a:pt x="5421" y="50585"/>
+                    <a:pt x="12288" y="56946"/>
+                  </a:cubicBezTo>
+                  <a:cubicBezTo>
+                    <a:pt x="19154" y="63308"/>
+                    <a:pt x="24575" y="56886"/>
+                    <a:pt x="24575" y="42917"/>
+                  </a:cubicBezTo>
+                  <a:cubicBezTo>
+                    <a:pt x="24575" y="28948"/>
+                    <a:pt x="19154" y="12182"/>
+                    <a:pt x="12288" y="6091"/>
+                  </a:cubicBezTo>
+                  <a:cubicBezTo>
+                    <a:pt x="5421" y="0"/>
+                    <a:pt x="0" y="6159"/>
+                    <a:pt x="0" y="20121"/>
+                  </a:cubicBezTo>
+                  <a:close/>
+                </a:path>
+              </a:pathLst>
+            </a:custGeom>
+            <a:solidFill>
+              <a:srgbClr val="666666"/>
+            </a:solidFill>
+            <a:ln w="0" cap="rnd">
+              <a:noFill/>
+              <a:round/>
+            </a:ln>
+          </p:spPr>
+        </p:sp>
+        <p:sp>
+          <p:nvSpPr>
+            <p:cNvPr id="84" name="right Speaker column 2 row 1 51"/>
+            <p:cNvSpPr/>
+            <p:nvPr/>
+          </p:nvSpPr>
+          <p:spPr>
+            <a:xfrm>
+              <a:off x="8257492" y="2112391"/>
+              <a:ext cx="24575" cy="63813"/>
+            </a:xfrm>
+            <a:custGeom>
+              <a:avLst/>
+              <a:gdLst/>
+              <a:ahLst/>
+              <a:cxnLst/>
+              <a:rect l="0" t="0" r="r" b="b"/>
+              <a:pathLst>
+                <a:path w="24575" h="63813" fill="norm">
+                  <a:moveTo>
+                    <a:pt x="0" y="20656"/>
+                  </a:moveTo>
+                  <a:cubicBezTo>
+                    <a:pt x="0" y="34618"/>
+                    <a:pt x="5421" y="51112"/>
+                    <a:pt x="12288" y="57462"/>
+                  </a:cubicBezTo>
+                  <a:cubicBezTo>
+                    <a:pt x="19154" y="63813"/>
+                    <a:pt x="24575" y="57382"/>
+                    <a:pt x="24575" y="43150"/>
+                  </a:cubicBezTo>
+                  <a:cubicBezTo>
+                    <a:pt x="24575" y="28918"/>
+                    <a:pt x="19154" y="12687"/>
+                    <a:pt x="12288" y="6344"/>
+                  </a:cubicBezTo>
+                  <a:cubicBezTo>
+                    <a:pt x="5421" y="0"/>
+                    <a:pt x="0" y="6431"/>
+                    <a:pt x="0" y="20656"/>
+                  </a:cubicBezTo>
+                  <a:close/>
+                </a:path>
+              </a:pathLst>
+            </a:custGeom>
+            <a:solidFill>
+              <a:srgbClr val="666666"/>
+            </a:solidFill>
+            <a:ln w="0" cap="rnd">
+              <a:noFill/>
+              <a:round/>
+            </a:ln>
+          </p:spPr>
+        </p:sp>
+        <p:sp>
+          <p:nvSpPr>
+            <p:cNvPr id="85" name="right Speaker column 2 row 1 52"/>
+            <p:cNvSpPr/>
+            <p:nvPr/>
+          </p:nvSpPr>
+          <p:spPr>
+            <a:xfrm>
+              <a:off x="8257492" y="2029663"/>
+              <a:ext cx="24575" cy="63000"/>
+            </a:xfrm>
+            <a:custGeom>
+              <a:avLst/>
+              <a:gdLst/>
+              <a:ahLst/>
+              <a:cxnLst/>
+              <a:rect l="0" t="0" r="r" b="b"/>
+              <a:pathLst>
+                <a:path w="24575" h="63000" fill="norm">
+                  <a:moveTo>
+                    <a:pt x="0" y="20402"/>
+                  </a:moveTo>
+                  <a:cubicBezTo>
+                    <a:pt x="0" y="34364"/>
+                    <a:pt x="5421" y="50849"/>
+                    <a:pt x="12288" y="56924"/>
+                  </a:cubicBezTo>
+                  <a:cubicBezTo>
+                    <a:pt x="19154" y="63000"/>
+                    <a:pt x="24575" y="56561"/>
+                    <a:pt x="24575" y="42592"/>
+                  </a:cubicBezTo>
+                  <a:cubicBezTo>
+                    <a:pt x="24575" y="28624"/>
+                    <a:pt x="19154" y="12138"/>
+                    <a:pt x="12288" y="6069"/>
+                  </a:cubicBezTo>
+                  <a:cubicBezTo>
+                    <a:pt x="5421" y="0"/>
+                    <a:pt x="0" y="6439"/>
+                    <a:pt x="0" y="20402"/>
+                  </a:cubicBezTo>
+                  <a:close/>
+                </a:path>
+              </a:pathLst>
+            </a:custGeom>
+            <a:solidFill>
+              <a:srgbClr val="666666"/>
+            </a:solidFill>
+            <a:ln w="0" cap="rnd">
+              <a:noFill/>
+              <a:round/>
+            </a:ln>
+          </p:spPr>
+        </p:sp>
+        <p:sp>
+          <p:nvSpPr>
+            <p:cNvPr id="86" name="right Speaker column 2 row 1 53"/>
+            <p:cNvSpPr/>
+            <p:nvPr/>
+          </p:nvSpPr>
+          <p:spPr>
+            <a:xfrm>
+              <a:off x="8257492" y="1946408"/>
+              <a:ext cx="24575" cy="63242"/>
+            </a:xfrm>
+            <a:custGeom>
+              <a:avLst/>
+              <a:gdLst/>
+              <a:ahLst/>
+              <a:cxnLst/>
+              <a:rect l="0" t="0" r="r" b="b"/>
+              <a:pathLst>
+                <a:path w="24575" h="63242" fill="norm">
+                  <a:moveTo>
+                    <a:pt x="0" y="20674"/>
+                  </a:moveTo>
+                  <a:cubicBezTo>
+                    <a:pt x="0" y="34636"/>
+                    <a:pt x="5421" y="51112"/>
+                    <a:pt x="12288" y="57177"/>
+                  </a:cubicBezTo>
+                  <a:cubicBezTo>
+                    <a:pt x="19154" y="63242"/>
+                    <a:pt x="24575" y="56794"/>
+                    <a:pt x="24575" y="42562"/>
+                  </a:cubicBezTo>
+                  <a:cubicBezTo>
+                    <a:pt x="24575" y="28329"/>
+                    <a:pt x="19154" y="12116"/>
+                    <a:pt x="12288" y="6058"/>
+                  </a:cubicBezTo>
+                  <a:cubicBezTo>
+                    <a:pt x="5421" y="0"/>
+                    <a:pt x="0" y="6448"/>
+                    <a:pt x="0" y="20674"/>
+                  </a:cubicBezTo>
+                  <a:close/>
+                </a:path>
+              </a:pathLst>
+            </a:custGeom>
+            <a:solidFill>
+              <a:srgbClr val="666666"/>
+            </a:solidFill>
+            <a:ln w="0" cap="rnd">
+              <a:noFill/>
+              <a:round/>
+            </a:ln>
+          </p:spPr>
+        </p:sp>
+        <p:sp>
+          <p:nvSpPr>
+            <p:cNvPr id="87" name="right Speaker column 2 row 1 54"/>
+            <p:cNvSpPr/>
+            <p:nvPr/>
+          </p:nvSpPr>
+          <p:spPr>
+            <a:xfrm>
+              <a:off x="8257492" y="1863681"/>
+              <a:ext cx="24575" cy="62693"/>
+            </a:xfrm>
+            <a:custGeom>
+              <a:avLst/>
+              <a:gdLst/>
+              <a:ahLst/>
+              <a:cxnLst/>
+              <a:rect l="0" t="0" r="r" b="b"/>
+              <a:pathLst>
+                <a:path w="24575" h="62693" fill="norm">
+                  <a:moveTo>
+                    <a:pt x="0" y="20419"/>
+                  </a:moveTo>
+                  <a:cubicBezTo>
+                    <a:pt x="0" y="34381"/>
+                    <a:pt x="5421" y="50585"/>
+                    <a:pt x="12288" y="56639"/>
+                  </a:cubicBezTo>
+                  <a:cubicBezTo>
+                    <a:pt x="19154" y="62693"/>
+                    <a:pt x="24575" y="55973"/>
+                    <a:pt x="24575" y="42004"/>
+                  </a:cubicBezTo>
+                  <a:cubicBezTo>
+                    <a:pt x="24575" y="28035"/>
+                    <a:pt x="19154" y="11567"/>
+                    <a:pt x="12288" y="5784"/>
+                  </a:cubicBezTo>
+                  <a:cubicBezTo>
+                    <a:pt x="5421" y="0"/>
+                    <a:pt x="0" y="6457"/>
+                    <a:pt x="0" y="20419"/>
+                  </a:cubicBezTo>
+                  <a:close/>
+                </a:path>
+              </a:pathLst>
+            </a:custGeom>
+            <a:solidFill>
+              <a:srgbClr val="666666"/>
+            </a:solidFill>
+            <a:ln w="0" cap="rnd">
+              <a:noFill/>
+              <a:round/>
+            </a:ln>
+          </p:spPr>
+        </p:sp>
+        <p:sp>
+          <p:nvSpPr>
+            <p:cNvPr id="88" name="right Speaker column 2 row 1 55"/>
+            <p:cNvSpPr/>
+            <p:nvPr/>
+          </p:nvSpPr>
+          <p:spPr>
+            <a:xfrm>
+              <a:off x="8257492" y="1780162"/>
+              <a:ext cx="24575" cy="63198"/>
+            </a:xfrm>
+            <a:custGeom>
+              <a:avLst/>
+              <a:gdLst/>
+              <a:ahLst/>
+              <a:cxnLst/>
+              <a:rect l="0" t="0" r="r" b="b"/>
+              <a:pathLst>
+                <a:path w="24575" h="63198" fill="norm">
+                  <a:moveTo>
+                    <a:pt x="0" y="20954"/>
+                  </a:moveTo>
+                  <a:cubicBezTo>
+                    <a:pt x="0" y="34917"/>
+                    <a:pt x="5421" y="51112"/>
+                    <a:pt x="12288" y="57155"/>
+                  </a:cubicBezTo>
+                  <a:cubicBezTo>
+                    <a:pt x="19154" y="63198"/>
+                    <a:pt x="24575" y="56469"/>
+                    <a:pt x="24575" y="42237"/>
+                  </a:cubicBezTo>
+                  <a:cubicBezTo>
+                    <a:pt x="24575" y="28005"/>
+                    <a:pt x="19154" y="12073"/>
+                    <a:pt x="12288" y="6036"/>
+                  </a:cubicBezTo>
+                  <a:cubicBezTo>
+                    <a:pt x="5421" y="0"/>
+                    <a:pt x="0" y="6729"/>
+                    <a:pt x="0" y="20954"/>
+                  </a:cubicBezTo>
+                  <a:close/>
+                </a:path>
+              </a:pathLst>
+            </a:custGeom>
+            <a:solidFill>
+              <a:srgbClr val="666666"/>
+            </a:solidFill>
+            <a:ln w="0" cap="rnd">
+              <a:noFill/>
+              <a:round/>
+            </a:ln>
+          </p:spPr>
+        </p:sp>
+        <p:sp>
+          <p:nvSpPr>
+            <p:cNvPr id="89" name="right Speaker column 2 row 1 56"/>
+            <p:cNvSpPr/>
+            <p:nvPr/>
+          </p:nvSpPr>
+          <p:spPr>
+            <a:xfrm>
+              <a:off x="8222798" y="2204848"/>
+              <a:ext cx="24575" cy="63547"/>
+            </a:xfrm>
+            <a:custGeom>
+              <a:avLst/>
+              <a:gdLst/>
+              <a:ahLst/>
+              <a:cxnLst/>
+              <a:rect l="0" t="0" r="r" b="b"/>
+              <a:pathLst>
+                <a:path w="24575" h="63547" fill="norm">
+                  <a:moveTo>
+                    <a:pt x="0" y="20363"/>
+                  </a:moveTo>
+                  <a:cubicBezTo>
+                    <a:pt x="0" y="34316"/>
+                    <a:pt x="5421" y="50815"/>
+                    <a:pt x="12288" y="57181"/>
+                  </a:cubicBezTo>
+                  <a:cubicBezTo>
+                    <a:pt x="19154" y="63547"/>
+                    <a:pt x="24575" y="57137"/>
+                    <a:pt x="24575" y="43177"/>
+                  </a:cubicBezTo>
+                  <a:cubicBezTo>
+                    <a:pt x="24575" y="29218"/>
+                    <a:pt x="19154" y="12719"/>
+                    <a:pt x="12288" y="6360"/>
+                  </a:cubicBezTo>
+                  <a:cubicBezTo>
+                    <a:pt x="5421" y="0"/>
+                    <a:pt x="0" y="6410"/>
+                    <a:pt x="0" y="20363"/>
+                  </a:cubicBezTo>
+                  <a:close/>
+                </a:path>
+              </a:pathLst>
+            </a:custGeom>
+            <a:solidFill>
+              <a:srgbClr val="666666"/>
+            </a:solidFill>
+            <a:ln w="0" cap="rnd">
+              <a:noFill/>
+              <a:round/>
+            </a:ln>
+          </p:spPr>
+        </p:sp>
+        <p:sp>
+          <p:nvSpPr>
+            <p:cNvPr id="90" name="right Speaker column 2 row 1 57"/>
+            <p:cNvSpPr/>
+            <p:nvPr/>
+          </p:nvSpPr>
+          <p:spPr>
+            <a:xfrm>
+              <a:off x="8222798" y="2122439"/>
+              <a:ext cx="24575" cy="62735"/>
+            </a:xfrm>
+            <a:custGeom>
+              <a:avLst/>
+              <a:gdLst/>
+              <a:ahLst/>
+              <a:cxnLst/>
+              <a:rect l="0" t="0" r="r" b="b"/>
+              <a:pathLst>
+                <a:path w="24575" h="62735" fill="norm">
+                  <a:moveTo>
+                    <a:pt x="0" y="20109"/>
+                  </a:moveTo>
+                  <a:cubicBezTo>
+                    <a:pt x="0" y="34061"/>
+                    <a:pt x="5421" y="50551"/>
+                    <a:pt x="12288" y="56643"/>
+                  </a:cubicBezTo>
+                  <a:cubicBezTo>
+                    <a:pt x="19154" y="62735"/>
+                    <a:pt x="24575" y="56580"/>
+                    <a:pt x="24575" y="42620"/>
+                  </a:cubicBezTo>
+                  <a:cubicBezTo>
+                    <a:pt x="24575" y="28661"/>
+                    <a:pt x="19154" y="12171"/>
+                    <a:pt x="12288" y="6085"/>
+                  </a:cubicBezTo>
+                  <a:cubicBezTo>
+                    <a:pt x="5421" y="0"/>
+                    <a:pt x="0" y="6156"/>
+                    <a:pt x="0" y="20109"/>
+                  </a:cubicBezTo>
+                  <a:close/>
+                </a:path>
+              </a:pathLst>
+            </a:custGeom>
+            <a:solidFill>
+              <a:srgbClr val="666666"/>
+            </a:solidFill>
+            <a:ln w="0" cap="rnd">
+              <a:noFill/>
+              <a:round/>
+            </a:ln>
+          </p:spPr>
+        </p:sp>
+        <p:sp>
+          <p:nvSpPr>
+            <p:cNvPr id="91" name="right Speaker column 2 row 1 58"/>
+            <p:cNvSpPr/>
+            <p:nvPr/>
+          </p:nvSpPr>
+          <p:spPr>
+            <a:xfrm>
+              <a:off x="8222798" y="2039504"/>
+              <a:ext cx="24575" cy="63240"/>
+            </a:xfrm>
+            <a:custGeom>
+              <a:avLst/>
+              <a:gdLst/>
+              <a:ahLst/>
+              <a:cxnLst/>
+              <a:rect l="0" t="0" r="r" b="b"/>
+              <a:pathLst>
+                <a:path w="24575" h="63240" fill="norm">
+                  <a:moveTo>
+                    <a:pt x="0" y="20381"/>
+                  </a:moveTo>
+                  <a:cubicBezTo>
+                    <a:pt x="0" y="34333"/>
+                    <a:pt x="5421" y="50551"/>
+                    <a:pt x="12288" y="56895"/>
+                  </a:cubicBezTo>
+                  <a:cubicBezTo>
+                    <a:pt x="19154" y="63240"/>
+                    <a:pt x="24575" y="56812"/>
+                    <a:pt x="24575" y="42589"/>
+                  </a:cubicBezTo>
+                  <a:cubicBezTo>
+                    <a:pt x="24575" y="28366"/>
+                    <a:pt x="19154" y="12148"/>
+                    <a:pt x="12288" y="6074"/>
+                  </a:cubicBezTo>
+                  <a:cubicBezTo>
+                    <a:pt x="5421" y="0"/>
+                    <a:pt x="0" y="6428"/>
+                    <a:pt x="0" y="20381"/>
+                  </a:cubicBezTo>
+                  <a:close/>
+                </a:path>
+              </a:pathLst>
+            </a:custGeom>
+            <a:solidFill>
+              <a:srgbClr val="666666"/>
+            </a:solidFill>
+            <a:ln w="0" cap="rnd">
+              <a:noFill/>
+              <a:round/>
+            </a:ln>
+          </p:spPr>
+        </p:sp>
+        <p:sp>
+          <p:nvSpPr>
+            <p:cNvPr id="92" name="right Speaker column 2 row 1 59"/>
+            <p:cNvSpPr/>
+            <p:nvPr/>
+          </p:nvSpPr>
+          <p:spPr>
+            <a:xfrm>
+              <a:off x="8222798" y="1956832"/>
+              <a:ext cx="24575" cy="62954"/>
+            </a:xfrm>
+            <a:custGeom>
+              <a:avLst/>
+              <a:gdLst/>
+              <a:ahLst/>
+              <a:cxnLst/>
+              <a:rect l="0" t="0" r="r" b="b"/>
+              <a:pathLst>
+                <a:path w="24575" h="62954" fill="norm">
+                  <a:moveTo>
+                    <a:pt x="0" y="20653"/>
+                  </a:moveTo>
+                  <a:cubicBezTo>
+                    <a:pt x="0" y="34605"/>
+                    <a:pt x="5421" y="50815"/>
+                    <a:pt x="12288" y="56884"/>
+                  </a:cubicBezTo>
+                  <a:cubicBezTo>
+                    <a:pt x="19154" y="62954"/>
+                    <a:pt x="24575" y="56518"/>
+                    <a:pt x="24575" y="42559"/>
+                  </a:cubicBezTo>
+                  <a:cubicBezTo>
+                    <a:pt x="24575" y="28599"/>
+                    <a:pt x="19154" y="12126"/>
+                    <a:pt x="12288" y="6063"/>
+                  </a:cubicBezTo>
+                  <a:cubicBezTo>
+                    <a:pt x="5421" y="0"/>
+                    <a:pt x="0" y="6437"/>
+                    <a:pt x="0" y="20389"/>
+                  </a:cubicBezTo>
+                  <a:close/>
+                </a:path>
+              </a:pathLst>
+            </a:custGeom>
+            <a:solidFill>
+              <a:srgbClr val="666666"/>
+            </a:solidFill>
+            <a:ln w="0" cap="rnd">
+              <a:noFill/>
+              <a:round/>
+            </a:ln>
+          </p:spPr>
+        </p:sp>
+        <p:sp>
+          <p:nvSpPr>
+            <p:cNvPr id="93" name="right Speaker column 2 row 1 60"/>
+            <p:cNvSpPr/>
+            <p:nvPr/>
+          </p:nvSpPr>
+          <p:spPr>
+            <a:xfrm>
+              <a:off x="8222798" y="1874159"/>
+              <a:ext cx="24575" cy="62932"/>
+            </a:xfrm>
+            <a:custGeom>
+              <a:avLst/>
+              <a:gdLst/>
+              <a:ahLst/>
+              <a:cxnLst/>
+              <a:rect l="0" t="0" r="r" b="b"/>
+              <a:pathLst>
+                <a:path w="24575" h="62932" fill="norm">
+                  <a:moveTo>
+                    <a:pt x="0" y="20661"/>
+                  </a:moveTo>
+                  <a:cubicBezTo>
+                    <a:pt x="0" y="34614"/>
+                    <a:pt x="5421" y="50815"/>
+                    <a:pt x="12288" y="56873"/>
+                  </a:cubicBezTo>
+                  <a:cubicBezTo>
+                    <a:pt x="19154" y="62932"/>
+                    <a:pt x="24575" y="56487"/>
+                    <a:pt x="24575" y="42265"/>
+                  </a:cubicBezTo>
+                  <a:cubicBezTo>
+                    <a:pt x="24575" y="28042"/>
+                    <a:pt x="19154" y="12104"/>
+                    <a:pt x="12288" y="6052"/>
+                  </a:cubicBezTo>
+                  <a:cubicBezTo>
+                    <a:pt x="5421" y="0"/>
+                    <a:pt x="0" y="6709"/>
+                    <a:pt x="0" y="20661"/>
+                  </a:cubicBezTo>
+                  <a:close/>
+                </a:path>
+              </a:pathLst>
+            </a:custGeom>
+            <a:solidFill>
+              <a:srgbClr val="666666"/>
+            </a:solidFill>
+            <a:ln w="0" cap="rnd">
+              <a:noFill/>
+              <a:round/>
+            </a:ln>
+          </p:spPr>
+        </p:sp>
+        <p:sp>
+          <p:nvSpPr>
+            <p:cNvPr id="94" name="right Speaker column 2 row 1 61"/>
+            <p:cNvSpPr/>
+            <p:nvPr/>
+          </p:nvSpPr>
+          <p:spPr>
+            <a:xfrm>
+              <a:off x="8222798" y="1791750"/>
+              <a:ext cx="24575" cy="62910"/>
+            </a:xfrm>
+            <a:custGeom>
+              <a:avLst/>
+              <a:gdLst/>
+              <a:ahLst/>
+              <a:cxnLst/>
+              <a:rect l="0" t="0" r="r" b="b"/>
+              <a:pathLst>
+                <a:path w="24575" h="62910" fill="norm">
+                  <a:moveTo>
+                    <a:pt x="0" y="20670"/>
+                  </a:moveTo>
+                  <a:cubicBezTo>
+                    <a:pt x="0" y="34623"/>
+                    <a:pt x="5421" y="50815"/>
+                    <a:pt x="12288" y="56862"/>
+                  </a:cubicBezTo>
+                  <a:cubicBezTo>
+                    <a:pt x="19154" y="62910"/>
+                    <a:pt x="24575" y="56193"/>
+                    <a:pt x="24575" y="42234"/>
+                  </a:cubicBezTo>
+                  <a:cubicBezTo>
+                    <a:pt x="24575" y="28274"/>
+                    <a:pt x="19154" y="12082"/>
+                    <a:pt x="12288" y="6041"/>
+                  </a:cubicBezTo>
+                  <a:cubicBezTo>
+                    <a:pt x="5421" y="0"/>
+                    <a:pt x="0" y="6717"/>
+                    <a:pt x="0" y="20670"/>
+                  </a:cubicBezTo>
+                  <a:close/>
+                </a:path>
+              </a:pathLst>
+            </a:custGeom>
+            <a:solidFill>
+              <a:srgbClr val="666666"/>
+            </a:solidFill>
+            <a:ln w="0" cap="rnd">
+              <a:noFill/>
+              <a:round/>
+            </a:ln>
+          </p:spPr>
+        </p:sp>
+        <p:sp>
+          <p:nvSpPr>
+            <p:cNvPr id="95" name="right Speaker column 2 row 1 62"/>
+            <p:cNvSpPr/>
+            <p:nvPr/>
+          </p:nvSpPr>
+          <p:spPr>
+            <a:xfrm>
+              <a:off x="8188103" y="2131908"/>
+              <a:ext cx="24575" cy="62975"/>
+            </a:xfrm>
+            <a:custGeom>
+              <a:avLst/>
+              <a:gdLst/>
+              <a:ahLst/>
+              <a:cxnLst/>
+              <a:rect l="0" t="0" r="r" b="b"/>
+              <a:pathLst>
+                <a:path w="24575" h="62975" fill="norm">
+                  <a:moveTo>
+                    <a:pt x="0" y="20088"/>
+                  </a:moveTo>
+                  <a:cubicBezTo>
+                    <a:pt x="0" y="34031"/>
+                    <a:pt x="5421" y="50254"/>
+                    <a:pt x="12288" y="56614"/>
+                  </a:cubicBezTo>
+                  <a:cubicBezTo>
+                    <a:pt x="19154" y="62975"/>
+                    <a:pt x="24575" y="56567"/>
+                    <a:pt x="24575" y="42617"/>
+                  </a:cubicBezTo>
+                  <a:cubicBezTo>
+                    <a:pt x="24575" y="28667"/>
+                    <a:pt x="19154" y="12181"/>
+                    <a:pt x="12288" y="6090"/>
+                  </a:cubicBezTo>
+                  <a:cubicBezTo>
+                    <a:pt x="5421" y="0"/>
+                    <a:pt x="0" y="6144"/>
+                    <a:pt x="0" y="20088"/>
+                  </a:cubicBezTo>
+                  <a:close/>
+                </a:path>
+              </a:pathLst>
+            </a:custGeom>
+            <a:solidFill>
+              <a:srgbClr val="666666"/>
+            </a:solidFill>
+            <a:ln w="0" cap="rnd">
+              <a:noFill/>
+              <a:round/>
+            </a:ln>
+          </p:spPr>
+        </p:sp>
+        <p:sp>
+          <p:nvSpPr>
+            <p:cNvPr id="96" name="right Speaker column 2 row 1 63"/>
+            <p:cNvSpPr/>
+            <p:nvPr/>
+          </p:nvSpPr>
+          <p:spPr>
+            <a:xfrm>
+              <a:off x="8188103" y="2049028"/>
+              <a:ext cx="24575" cy="62952"/>
+            </a:xfrm>
+            <a:custGeom>
+              <a:avLst/>
+              <a:gdLst/>
+              <a:ahLst/>
+              <a:cxnLst/>
+              <a:rect l="0" t="0" r="r" b="b"/>
+              <a:pathLst>
+                <a:path w="24575" h="62952" fill="norm">
+                  <a:moveTo>
+                    <a:pt x="0" y="20623"/>
+                  </a:moveTo>
+                  <a:cubicBezTo>
+                    <a:pt x="0" y="34566"/>
+                    <a:pt x="5421" y="50780"/>
+                    <a:pt x="12288" y="56866"/>
+                  </a:cubicBezTo>
+                  <a:cubicBezTo>
+                    <a:pt x="19154" y="62952"/>
+                    <a:pt x="24575" y="56800"/>
+                    <a:pt x="24575" y="42850"/>
+                  </a:cubicBezTo>
+                  <a:cubicBezTo>
+                    <a:pt x="24575" y="28900"/>
+                    <a:pt x="19154" y="12685"/>
+                    <a:pt x="12288" y="6342"/>
+                  </a:cubicBezTo>
+                  <a:cubicBezTo>
+                    <a:pt x="5421" y="0"/>
+                    <a:pt x="0" y="6679"/>
+                    <a:pt x="0" y="20359"/>
+                  </a:cubicBezTo>
+                  <a:close/>
+                </a:path>
+              </a:pathLst>
+            </a:custGeom>
+            <a:solidFill>
+              <a:srgbClr val="666666"/>
+            </a:solidFill>
+            <a:ln w="0" cap="rnd">
+              <a:noFill/>
+              <a:round/>
+            </a:ln>
+          </p:spPr>
+        </p:sp>
+        <p:sp>
+          <p:nvSpPr>
+            <p:cNvPr id="97" name="right Speaker column 2 row 1 64"/>
+            <p:cNvSpPr/>
+            <p:nvPr/>
+          </p:nvSpPr>
+          <p:spPr>
+            <a:xfrm>
+              <a:off x="8188103" y="1967201"/>
+              <a:ext cx="24575" cy="62667"/>
+            </a:xfrm>
+            <a:custGeom>
+              <a:avLst/>
+              <a:gdLst/>
+              <a:ahLst/>
+              <a:cxnLst/>
+              <a:rect l="0" t="0" r="r" b="b"/>
+              <a:pathLst>
+                <a:path w="24575" h="62667" fill="norm">
+                  <a:moveTo>
+                    <a:pt x="0" y="20368"/>
+                  </a:moveTo>
+                  <a:cubicBezTo>
+                    <a:pt x="0" y="34311"/>
+                    <a:pt x="5421" y="50517"/>
+                    <a:pt x="12288" y="56592"/>
+                  </a:cubicBezTo>
+                  <a:cubicBezTo>
+                    <a:pt x="19154" y="62667"/>
+                    <a:pt x="24575" y="56242"/>
+                    <a:pt x="24575" y="42292"/>
+                  </a:cubicBezTo>
+                  <a:cubicBezTo>
+                    <a:pt x="24575" y="28342"/>
+                    <a:pt x="19154" y="12137"/>
+                    <a:pt x="12288" y="6068"/>
+                  </a:cubicBezTo>
+                  <a:cubicBezTo>
+                    <a:pt x="5421" y="0"/>
+                    <a:pt x="0" y="6425"/>
+                    <a:pt x="0" y="20368"/>
+                  </a:cubicBezTo>
+                  <a:close/>
+                </a:path>
+              </a:pathLst>
+            </a:custGeom>
+            <a:solidFill>
+              <a:srgbClr val="666666"/>
+            </a:solidFill>
+            <a:ln w="0" cap="rnd">
+              <a:noFill/>
+              <a:round/>
+            </a:ln>
+          </p:spPr>
+        </p:sp>
+        <p:sp>
+          <p:nvSpPr>
+            <p:cNvPr id="98" name="right Speaker column 2 row 1 65"/>
+            <p:cNvSpPr/>
+            <p:nvPr/>
+          </p:nvSpPr>
+          <p:spPr>
+            <a:xfrm>
+              <a:off x="8188103" y="1885111"/>
+              <a:ext cx="24575" cy="62645"/>
+            </a:xfrm>
+            <a:custGeom>
+              <a:avLst/>
+              <a:gdLst/>
+              <a:ahLst/>
+              <a:cxnLst/>
+              <a:rect l="0" t="0" r="r" b="b"/>
+              <a:pathLst>
+                <a:path w="24575" h="62645" fill="norm">
+                  <a:moveTo>
+                    <a:pt x="0" y="20377"/>
+                  </a:moveTo>
+                  <a:cubicBezTo>
+                    <a:pt x="0" y="34320"/>
+                    <a:pt x="5421" y="50517"/>
+                    <a:pt x="12288" y="56581"/>
+                  </a:cubicBezTo>
+                  <a:cubicBezTo>
+                    <a:pt x="19154" y="62645"/>
+                    <a:pt x="24575" y="56212"/>
+                    <a:pt x="24575" y="42262"/>
+                  </a:cubicBezTo>
+                  <a:cubicBezTo>
+                    <a:pt x="24575" y="28312"/>
+                    <a:pt x="19154" y="12114"/>
+                    <a:pt x="12288" y="6057"/>
+                  </a:cubicBezTo>
+                  <a:cubicBezTo>
+                    <a:pt x="5421" y="0"/>
+                    <a:pt x="0" y="6434"/>
+                    <a:pt x="0" y="20377"/>
+                  </a:cubicBezTo>
+                  <a:close/>
+                </a:path>
+              </a:pathLst>
+            </a:custGeom>
+            <a:solidFill>
+              <a:srgbClr val="666666"/>
+            </a:solidFill>
+            <a:ln w="0" cap="rnd">
+              <a:noFill/>
+              <a:round/>
+            </a:ln>
+          </p:spPr>
+        </p:sp>
+        <p:sp>
+          <p:nvSpPr>
+            <p:cNvPr id="99" name="right Speaker column 2 row 1 66"/>
+            <p:cNvSpPr/>
+            <p:nvPr/>
+          </p:nvSpPr>
+          <p:spPr>
+            <a:xfrm>
+              <a:off x="8188103" y="1803021"/>
+              <a:ext cx="24575" cy="62360"/>
+            </a:xfrm>
+            <a:custGeom>
+              <a:avLst/>
+              <a:gdLst/>
+              <a:ahLst/>
+              <a:cxnLst/>
+              <a:rect l="0" t="0" r="r" b="b"/>
+              <a:pathLst>
+                <a:path w="24575" h="62360" fill="norm">
+                  <a:moveTo>
+                    <a:pt x="0" y="20386"/>
+                  </a:moveTo>
+                  <a:cubicBezTo>
+                    <a:pt x="0" y="34329"/>
+                    <a:pt x="5421" y="50254"/>
+                    <a:pt x="12288" y="56307"/>
+                  </a:cubicBezTo>
+                  <a:cubicBezTo>
+                    <a:pt x="19154" y="62360"/>
+                    <a:pt x="24575" y="55654"/>
+                    <a:pt x="24575" y="41704"/>
+                  </a:cubicBezTo>
+                  <a:cubicBezTo>
+                    <a:pt x="24575" y="27754"/>
+                    <a:pt x="19154" y="11566"/>
+                    <a:pt x="12288" y="5783"/>
+                  </a:cubicBezTo>
+                  <a:cubicBezTo>
+                    <a:pt x="5421" y="0"/>
+                    <a:pt x="0" y="6442"/>
+                    <a:pt x="0" y="20386"/>
+                  </a:cubicBezTo>
+                  <a:close/>
+                </a:path>
+              </a:pathLst>
+            </a:custGeom>
+            <a:solidFill>
+              <a:srgbClr val="666666"/>
+            </a:solidFill>
+            <a:ln w="0" cap="rnd">
+              <a:noFill/>
+              <a:round/>
+            </a:ln>
+          </p:spPr>
+        </p:sp>
+      </p:grpSp>
+      <p:grpSp>
+        <p:nvGrpSpPr>
+          <p:cNvPr id="100" name="right Lever column 2 row 7"/>
+          <p:cNvGrpSpPr/>
+          <p:nvPr/>
+        </p:nvGrpSpPr>
+        <p:grpSpPr>
+          <a:xfrm>
+            <a:off x="4908734" y="3707950"/>
+            <a:ext cx="437116" cy="237318"/>
+            <a:chOff x="8109134" y="4288975"/>
+            <a:chExt cx="437116" cy="237318"/>
+          </a:xfrm>
+        </p:grpSpPr>
+        <p:sp>
+          <p:nvSpPr>
+            <p:cNvPr id="101" name="right Lever column 2 row 7 6"/>
+            <p:cNvSpPr/>
+            <p:nvPr/>
+          </p:nvSpPr>
+          <p:spPr>
+            <a:xfrm>
+              <a:off x="8109134" y="4305234"/>
+              <a:ext cx="437116" cy="221059"/>
+            </a:xfrm>
+            <a:custGeom>
+              <a:avLst/>
+              <a:gdLst/>
+              <a:ahLst/>
+              <a:cxnLst/>
+              <a:rect l="0" t="0" r="r" b="b"/>
+              <a:pathLst>
+                <a:path w="437116" h="221059" fill="norm">
+                  <a:moveTo>
+                    <a:pt x="437116" y="221059"/>
+                  </a:moveTo>
+                  <a:lnTo>
+                    <a:pt x="179161" y="221059"/>
+                  </a:lnTo>
+                  <a:lnTo>
+                    <a:pt x="0" y="0"/>
+                  </a:lnTo>
+                  <a:lnTo>
+                    <a:pt x="252014" y="0"/>
+                  </a:lnTo>
+                  <a:lnTo>
+                    <a:pt x="437116" y="221059"/>
+                  </a:lnTo>
+                  <a:close/>
+                </a:path>
+              </a:pathLst>
+            </a:custGeom>
+            <a:solidFill>
+              <a:srgbClr val="9E9D9B"/>
+            </a:solidFill>
+            <a:ln w="7817" cap="rnd">
+              <a:solidFill>
+                <a:srgbClr val="040000"/>
+              </a:solidFill>
+              <a:round/>
+            </a:ln>
+          </p:spPr>
+        </p:sp>
+        <p:sp>
+          <p:nvSpPr>
+            <p:cNvPr id="102" name="right Lever column 2 row 7 7"/>
+            <p:cNvSpPr/>
+            <p:nvPr/>
+          </p:nvSpPr>
+          <p:spPr>
+            <a:xfrm>
+              <a:off x="8288295" y="4510034"/>
+              <a:ext cx="257955" cy="16259"/>
+            </a:xfrm>
+            <a:custGeom>
+              <a:avLst/>
+              <a:gdLst/>
+              <a:ahLst/>
+              <a:cxnLst/>
+              <a:rect l="0" t="0" r="r" b="b"/>
+              <a:pathLst>
+                <a:path w="257955" h="16259" fill="norm">
+                  <a:moveTo>
+                    <a:pt x="0" y="0"/>
+                  </a:moveTo>
+                  <a:lnTo>
+                    <a:pt x="257955" y="0"/>
+                  </a:lnTo>
+                  <a:lnTo>
+                    <a:pt x="257955" y="16259"/>
+                  </a:lnTo>
+                  <a:lnTo>
+                    <a:pt x="0" y="16259"/>
+                  </a:lnTo>
+                  <a:close/>
+                </a:path>
+              </a:pathLst>
+            </a:custGeom>
+            <a:solidFill>
+              <a:srgbClr val="9E9D9B"/>
+            </a:solidFill>
+            <a:ln w="7817" cap="rnd">
+              <a:solidFill>
+                <a:srgbClr val="040000"/>
+              </a:solidFill>
+              <a:round/>
+            </a:ln>
+          </p:spPr>
+        </p:sp>
+        <p:sp>
+          <p:nvSpPr>
+            <p:cNvPr id="103" name="right Lever column 2 row 7 8"/>
+            <p:cNvSpPr/>
+            <p:nvPr/>
+          </p:nvSpPr>
+          <p:spPr>
+            <a:xfrm>
+              <a:off x="8109134" y="4288975"/>
+              <a:ext cx="437116" cy="221059"/>
+            </a:xfrm>
+            <a:custGeom>
+              <a:avLst/>
+              <a:gdLst/>
+              <a:ahLst/>
+              <a:cxnLst/>
+              <a:rect l="0" t="0" r="r" b="b"/>
+              <a:pathLst>
+                <a:path w="437116" h="221059" fill="norm">
+                  <a:moveTo>
+                    <a:pt x="437116" y="221059"/>
+                  </a:moveTo>
+                  <a:lnTo>
+                    <a:pt x="179161" y="221059"/>
+                  </a:lnTo>
+                  <a:lnTo>
+                    <a:pt x="0" y="0"/>
+                  </a:lnTo>
+                  <a:lnTo>
+                    <a:pt x="252014" y="0"/>
+                  </a:lnTo>
+                  <a:lnTo>
+                    <a:pt x="437116" y="221059"/>
+                  </a:lnTo>
+                  <a:close/>
+                </a:path>
+              </a:pathLst>
+            </a:custGeom>
+            <a:solidFill>
+              <a:srgbClr val="9E9D9B"/>
+            </a:solidFill>
+            <a:ln w="7817" cap="rnd">
+              <a:solidFill>
+                <a:srgbClr val="040000"/>
+              </a:solidFill>
+              <a:round/>
+            </a:ln>
+          </p:spPr>
+        </p:sp>
+        <p:sp>
+          <p:nvSpPr>
+            <p:cNvPr id="104" name="right Lever column 2 row 7 9"/>
+            <p:cNvSpPr/>
+            <p:nvPr/>
+          </p:nvSpPr>
+          <p:spPr>
+            <a:xfrm>
+              <a:off x="8109134" y="4288975"/>
+              <a:ext cx="179161" cy="237318"/>
+            </a:xfrm>
+            <a:custGeom>
+              <a:avLst/>
+              <a:gdLst/>
+              <a:ahLst/>
+              <a:cxnLst/>
+              <a:rect l="0" t="0" r="r" b="b"/>
+              <a:pathLst>
+                <a:path w="179161" h="237318" fill="norm">
+                  <a:moveTo>
+                    <a:pt x="0" y="0"/>
+                  </a:moveTo>
+                  <a:lnTo>
+                    <a:pt x="179161" y="220747"/>
+                  </a:lnTo>
+                  <a:lnTo>
+                    <a:pt x="179161" y="237318"/>
+                  </a:lnTo>
+                  <a:lnTo>
+                    <a:pt x="0" y="16259"/>
+                  </a:lnTo>
+                  <a:lnTo>
+                    <a:pt x="0" y="0"/>
+                  </a:lnTo>
+                  <a:close/>
+                </a:path>
+              </a:pathLst>
+            </a:custGeom>
+            <a:solidFill>
+              <a:srgbClr val="9E9D9B"/>
+            </a:solidFill>
+            <a:ln w="7817" cap="rnd">
+              <a:solidFill>
+                <a:srgbClr val="040000"/>
+              </a:solidFill>
+              <a:round/>
+            </a:ln>
+          </p:spPr>
+        </p:sp>
+      </p:grpSp>
+      <p:grpSp>
+        <p:nvGrpSpPr>
+          <p:cNvPr id="105" name="Box glass ceiling"/>
           <p:cNvGrpSpPr/>
           <p:nvPr/>
         </p:nvGrpSpPr>
@@ -1795,7 +6395,7 @@
         </p:grpSpPr>
         <p:sp>
           <p:nvSpPr>
-            <p:cNvPr id="21" name="Box glass ceiling 13"/>
+            <p:cNvPr id="106" name="Box glass ceiling 94"/>
             <p:cNvSpPr/>
             <p:nvPr/>
           </p:nvSpPr>
@@ -1844,7 +6444,7 @@
         </p:sp>
         <p:sp>
           <p:nvSpPr>
-            <p:cNvPr id="22" name="Box glass ceiling 14"/>
+            <p:cNvPr id="107" name="Box glass ceiling 95"/>
             <p:cNvSpPr/>
             <p:nvPr/>
           </p:nvSpPr>
@@ -1911,7 +6511,7 @@
         </p:sp>
         <p:sp>
           <p:nvSpPr>
-            <p:cNvPr id="23" name="Box glass ceiling 15"/>
+            <p:cNvPr id="108" name="Box glass ceiling 96"/>
             <p:cNvSpPr/>
             <p:nvPr/>
           </p:nvSpPr>
@@ -1951,4606 +6551,6 @@
             <a:ln w="9325" cap="rnd">
               <a:solidFill>
                 <a:srgbClr val="6F7C7E"/>
-              </a:solidFill>
-              <a:round/>
-            </a:ln>
-          </p:spPr>
-        </p:sp>
-      </p:grpSp>
-      <p:grpSp>
-        <p:nvGrpSpPr>
-          <p:cNvPr id="24" name="left House light column 3 row 2"/>
-          <p:cNvGrpSpPr/>
-          <p:nvPr/>
-        </p:nvGrpSpPr>
-        <p:grpSpPr>
-          <a:xfrm>
-            <a:off x="897231" y="1104645"/>
-            <a:ext cx="579618" cy="390114"/>
-            <a:chOff x="4097631" y="1685670"/>
-            <a:chExt cx="579618" cy="390114"/>
-          </a:xfrm>
-        </p:grpSpPr>
-        <p:sp>
-          <p:nvSpPr>
-            <p:cNvPr id="25" name="left House light column 3 row 2 3"/>
-            <p:cNvSpPr/>
-            <p:nvPr/>
-          </p:nvSpPr>
-          <p:spPr>
-            <a:xfrm>
-              <a:off x="4097631" y="1686386"/>
-              <a:ext cx="117142" cy="389397"/>
-            </a:xfrm>
-            <a:custGeom>
-              <a:avLst/>
-              <a:gdLst/>
-              <a:ahLst/>
-              <a:cxnLst/>
-              <a:rect l="0" t="0" r="r" b="b"/>
-              <a:pathLst>
-                <a:path w="117142" h="389397" fill="norm">
-                  <a:moveTo>
-                    <a:pt x="117142" y="389039"/>
-                  </a:moveTo>
-                  <a:lnTo>
-                    <a:pt x="62332" y="389039"/>
-                  </a:lnTo>
-                  <a:cubicBezTo>
-                    <a:pt x="27584" y="389039"/>
-                    <a:pt x="0" y="302347"/>
-                    <a:pt x="0" y="194878"/>
-                  </a:cubicBezTo>
-                  <a:cubicBezTo>
-                    <a:pt x="0" y="87408"/>
-                    <a:pt x="27584" y="0"/>
-                    <a:pt x="62332" y="0"/>
-                  </a:cubicBezTo>
-                  <a:lnTo>
-                    <a:pt x="117142" y="0"/>
-                  </a:lnTo>
-                  <a:cubicBezTo>
-                    <a:pt x="107111" y="0"/>
-                    <a:pt x="98155" y="6806"/>
-                    <a:pt x="90274" y="19344"/>
-                  </a:cubicBezTo>
-                  <a:cubicBezTo>
-                    <a:pt x="68780" y="50869"/>
-                    <a:pt x="54451" y="117500"/>
-                    <a:pt x="54451" y="194878"/>
-                  </a:cubicBezTo>
-                  <a:cubicBezTo>
-                    <a:pt x="54451" y="272256"/>
-                    <a:pt x="68780" y="338887"/>
-                    <a:pt x="90274" y="370411"/>
-                  </a:cubicBezTo>
-                  <a:cubicBezTo>
-                    <a:pt x="98514" y="382233"/>
-                    <a:pt x="107111" y="389397"/>
-                    <a:pt x="117142" y="389397"/>
-                  </a:cubicBezTo>
-                  <a:close/>
-                </a:path>
-              </a:pathLst>
-            </a:custGeom>
-            <a:solidFill>
-              <a:srgbClr val="000000"/>
-            </a:solidFill>
-            <a:ln w="10747" cap="rnd">
-              <a:solidFill>
-                <a:srgbClr val="231815"/>
-              </a:solidFill>
-              <a:round/>
-            </a:ln>
-          </p:spPr>
-        </p:sp>
-        <p:sp>
-          <p:nvSpPr>
-            <p:cNvPr id="26" name="left House light column 3 row 2 4"/>
-            <p:cNvSpPr/>
-            <p:nvPr/>
-          </p:nvSpPr>
-          <p:spPr>
-            <a:xfrm>
-              <a:off x="4152082" y="1685670"/>
-              <a:ext cx="125023" cy="389397"/>
-            </a:xfrm>
-            <a:custGeom>
-              <a:avLst/>
-              <a:gdLst/>
-              <a:ahLst/>
-              <a:cxnLst/>
-              <a:rect l="0" t="0" r="r" b="b"/>
-              <a:pathLst>
-                <a:path w="125023" h="389397" fill="norm">
-                  <a:moveTo>
-                    <a:pt x="125023" y="195236"/>
-                  </a:moveTo>
-                  <a:cubicBezTo>
-                    <a:pt x="125023" y="302705"/>
-                    <a:pt x="97439" y="389397"/>
-                    <a:pt x="62690" y="389397"/>
-                  </a:cubicBezTo>
-                  <a:cubicBezTo>
-                    <a:pt x="52660" y="389397"/>
-                    <a:pt x="43704" y="382591"/>
-                    <a:pt x="35823" y="370411"/>
-                  </a:cubicBezTo>
-                  <a:cubicBezTo>
-                    <a:pt x="14329" y="338887"/>
-                    <a:pt x="0" y="272256"/>
-                    <a:pt x="0" y="194878"/>
-                  </a:cubicBezTo>
-                  <a:cubicBezTo>
-                    <a:pt x="0" y="117500"/>
-                    <a:pt x="14329" y="50869"/>
-                    <a:pt x="35823" y="19344"/>
-                  </a:cubicBezTo>
-                  <a:cubicBezTo>
-                    <a:pt x="44062" y="6806"/>
-                    <a:pt x="52660" y="0"/>
-                    <a:pt x="62690" y="0"/>
-                  </a:cubicBezTo>
-                  <a:cubicBezTo>
-                    <a:pt x="97439" y="0"/>
-                    <a:pt x="125023" y="86692"/>
-                    <a:pt x="125023" y="194878"/>
-                  </a:cubicBezTo>
-                  <a:close/>
-                </a:path>
-              </a:pathLst>
-            </a:custGeom>
-            <a:solidFill>
-              <a:srgbClr val="B3B3B3"/>
-            </a:solidFill>
-            <a:ln w="10747" cap="rnd">
-              <a:solidFill>
-                <a:srgbClr val="231815"/>
-              </a:solidFill>
-              <a:round/>
-            </a:ln>
-          </p:spPr>
-        </p:sp>
-        <p:sp>
-          <p:nvSpPr>
-            <p:cNvPr id="27" name="left House light column 3 row 2 5"/>
-            <p:cNvSpPr/>
-            <p:nvPr/>
-          </p:nvSpPr>
-          <p:spPr>
-            <a:xfrm>
-              <a:off x="4250596" y="1702507"/>
-              <a:ext cx="109619" cy="126456"/>
-            </a:xfrm>
-            <a:custGeom>
-              <a:avLst/>
-              <a:gdLst/>
-              <a:ahLst/>
-              <a:cxnLst/>
-              <a:rect l="0" t="0" r="r" b="b"/>
-              <a:pathLst>
-                <a:path w="109619" h="126456" fill="norm">
-                  <a:moveTo>
-                    <a:pt x="109260" y="126456"/>
-                  </a:moveTo>
-                  <a:lnTo>
-                    <a:pt x="0" y="126456"/>
-                  </a:lnTo>
-                  <a:cubicBezTo>
-                    <a:pt x="716" y="118933"/>
-                    <a:pt x="1433" y="112485"/>
-                    <a:pt x="2508" y="105678"/>
-                  </a:cubicBezTo>
-                  <a:cubicBezTo>
-                    <a:pt x="5015" y="86334"/>
-                    <a:pt x="8956" y="68422"/>
-                    <a:pt x="13971" y="54093"/>
-                  </a:cubicBezTo>
-                  <a:cubicBezTo>
-                    <a:pt x="22210" y="27226"/>
-                    <a:pt x="33315" y="8239"/>
-                    <a:pt x="45854" y="2508"/>
-                  </a:cubicBezTo>
-                  <a:cubicBezTo>
-                    <a:pt x="46570" y="2508"/>
-                    <a:pt x="46570" y="1791"/>
-                    <a:pt x="47287" y="1791"/>
-                  </a:cubicBezTo>
-                  <a:cubicBezTo>
-                    <a:pt x="49794" y="358"/>
-                    <a:pt x="52302" y="0"/>
-                    <a:pt x="54809" y="0"/>
-                  </a:cubicBezTo>
-                  <a:cubicBezTo>
-                    <a:pt x="80602" y="0"/>
-                    <a:pt x="102454" y="52660"/>
-                    <a:pt x="109619" y="126456"/>
-                  </a:cubicBezTo>
-                  <a:close/>
-                </a:path>
-              </a:pathLst>
-            </a:custGeom>
-            <a:solidFill>
-              <a:srgbClr val="B3B3B3"/>
-            </a:solidFill>
-            <a:ln w="8956" cap="rnd">
-              <a:solidFill>
-                <a:srgbClr val="4D4D4D"/>
-              </a:solidFill>
-              <a:round/>
-            </a:ln>
-          </p:spPr>
-        </p:sp>
-        <p:sp>
-          <p:nvSpPr>
-            <p:cNvPr id="28" name="left House light column 3 row 2 6"/>
-            <p:cNvSpPr/>
-            <p:nvPr/>
-          </p:nvSpPr>
-          <p:spPr>
-            <a:xfrm>
-              <a:off x="4547928" y="1702149"/>
-              <a:ext cx="87050" cy="356798"/>
-            </a:xfrm>
-            <a:custGeom>
-              <a:avLst/>
-              <a:gdLst/>
-              <a:ahLst/>
-              <a:cxnLst/>
-              <a:rect l="0" t="0" r="r" b="b"/>
-              <a:pathLst>
-                <a:path w="87050" h="356798" fill="norm">
-                  <a:moveTo>
-                    <a:pt x="87050" y="356798"/>
-                  </a:moveTo>
-                  <a:lnTo>
-                    <a:pt x="42271" y="356798"/>
-                  </a:lnTo>
-                  <a:cubicBezTo>
-                    <a:pt x="18270" y="356798"/>
-                    <a:pt x="0" y="276913"/>
-                    <a:pt x="0" y="178757"/>
-                  </a:cubicBezTo>
-                  <a:cubicBezTo>
-                    <a:pt x="0" y="160488"/>
-                    <a:pt x="716" y="142934"/>
-                    <a:pt x="1791" y="126456"/>
-                  </a:cubicBezTo>
-                  <a:cubicBezTo>
-                    <a:pt x="6806" y="53018"/>
-                    <a:pt x="22569" y="0"/>
-                    <a:pt x="41913" y="0"/>
-                  </a:cubicBezTo>
-                  <a:lnTo>
-                    <a:pt x="86692" y="0"/>
-                  </a:lnTo>
-                  <a:cubicBezTo>
-                    <a:pt x="78453" y="0"/>
-                    <a:pt x="70930" y="10030"/>
-                    <a:pt x="64123" y="28300"/>
-                  </a:cubicBezTo>
-                  <a:cubicBezTo>
-                    <a:pt x="57675" y="45137"/>
-                    <a:pt x="52660" y="68422"/>
-                    <a:pt x="49794" y="96722"/>
-                  </a:cubicBezTo>
-                  <a:cubicBezTo>
-                    <a:pt x="48361" y="106036"/>
-                    <a:pt x="48003" y="116067"/>
-                    <a:pt x="47287" y="126097"/>
-                  </a:cubicBezTo>
-                  <a:cubicBezTo>
-                    <a:pt x="45854" y="142576"/>
-                    <a:pt x="45495" y="160129"/>
-                    <a:pt x="45495" y="178399"/>
-                  </a:cubicBezTo>
-                  <a:cubicBezTo>
-                    <a:pt x="45495" y="241090"/>
-                    <a:pt x="52302" y="296615"/>
-                    <a:pt x="64482" y="328140"/>
-                  </a:cubicBezTo>
-                  <a:cubicBezTo>
-                    <a:pt x="71288" y="346409"/>
-                    <a:pt x="78811" y="356440"/>
-                    <a:pt x="87050" y="356440"/>
-                  </a:cubicBezTo>
-                  <a:close/>
-                </a:path>
-              </a:pathLst>
-            </a:custGeom>
-            <a:solidFill>
-              <a:srgbClr val="666666"/>
-            </a:solidFill>
-            <a:ln w="0" cap="rnd">
-              <a:noFill/>
-              <a:round/>
-            </a:ln>
-          </p:spPr>
-        </p:sp>
-        <p:sp>
-          <p:nvSpPr>
-            <p:cNvPr id="29" name="left House light column 3 row 2 7"/>
-            <p:cNvSpPr/>
-            <p:nvPr/>
-          </p:nvSpPr>
-          <p:spPr>
-            <a:xfrm>
-              <a:off x="4269224" y="1727583"/>
-              <a:ext cx="368978" cy="101379"/>
-            </a:xfrm>
-            <a:custGeom>
-              <a:avLst/>
-              <a:gdLst/>
-              <a:ahLst/>
-              <a:cxnLst/>
-              <a:rect l="0" t="0" r="r" b="b"/>
-              <a:pathLst>
-                <a:path w="368978" h="101379" fill="norm">
-                  <a:moveTo>
-                    <a:pt x="368620" y="0"/>
-                  </a:moveTo>
-                  <a:lnTo>
-                    <a:pt x="368620" y="101379"/>
-                  </a:lnTo>
-                  <a:lnTo>
-                    <a:pt x="0" y="101379"/>
-                  </a:lnTo>
-                  <a:cubicBezTo>
-                    <a:pt x="5732" y="41913"/>
-                    <a:pt x="20061" y="0"/>
-                    <a:pt x="37256" y="0"/>
-                  </a:cubicBezTo>
-                  <a:lnTo>
-                    <a:pt x="368978" y="0"/>
-                  </a:lnTo>
-                  <a:close/>
-                </a:path>
-              </a:pathLst>
-            </a:custGeom>
-            <a:solidFill>
-              <a:srgbClr val="97CDDE">
-                <a:alpha val="80000"/>
-              </a:srgbClr>
-            </a:solidFill>
-            <a:ln w="0" cap="rnd">
-              <a:noFill/>
-              <a:round/>
-            </a:ln>
-          </p:spPr>
-        </p:sp>
-        <p:sp>
-          <p:nvSpPr>
-            <p:cNvPr id="30" name="left House light column 3 row 2 8"/>
-            <p:cNvSpPr/>
-            <p:nvPr/>
-          </p:nvSpPr>
-          <p:spPr>
-            <a:xfrm>
-              <a:off x="4201160" y="1702507"/>
-              <a:ext cx="476089" cy="356440"/>
-            </a:xfrm>
-            <a:custGeom>
-              <a:avLst/>
-              <a:gdLst/>
-              <a:ahLst/>
-              <a:cxnLst/>
-              <a:rect l="0" t="0" r="r" b="b"/>
-              <a:pathLst>
-                <a:path w="476089" h="356440" fill="norm">
-                  <a:moveTo>
-                    <a:pt x="476089" y="178399"/>
-                  </a:moveTo>
-                  <a:cubicBezTo>
-                    <a:pt x="476089" y="276554"/>
-                    <a:pt x="457103" y="356440"/>
-                    <a:pt x="433818" y="356440"/>
-                  </a:cubicBezTo>
-                  <a:lnTo>
-                    <a:pt x="57317" y="356440"/>
-                  </a:lnTo>
-                  <a:cubicBezTo>
-                    <a:pt x="25793" y="356440"/>
-                    <a:pt x="0" y="276554"/>
-                    <a:pt x="0" y="178399"/>
-                  </a:cubicBezTo>
-                  <a:cubicBezTo>
-                    <a:pt x="0" y="80244"/>
-                    <a:pt x="25793" y="0"/>
-                    <a:pt x="57317" y="0"/>
-                  </a:cubicBezTo>
-                  <a:lnTo>
-                    <a:pt x="103887" y="0"/>
-                  </a:lnTo>
-                  <a:cubicBezTo>
-                    <a:pt x="101379" y="0"/>
-                    <a:pt x="98872" y="716"/>
-                    <a:pt x="96364" y="1791"/>
-                  </a:cubicBezTo>
-                  <a:cubicBezTo>
-                    <a:pt x="95648" y="1791"/>
-                    <a:pt x="95648" y="2508"/>
-                    <a:pt x="94931" y="2508"/>
-                  </a:cubicBezTo>
-                  <a:cubicBezTo>
-                    <a:pt x="82393" y="8239"/>
-                    <a:pt x="70930" y="26867"/>
-                    <a:pt x="63049" y="54093"/>
-                  </a:cubicBezTo>
-                  <a:cubicBezTo>
-                    <a:pt x="58033" y="69139"/>
-                    <a:pt x="54093" y="85975"/>
-                    <a:pt x="51585" y="105678"/>
-                  </a:cubicBezTo>
-                  <a:cubicBezTo>
-                    <a:pt x="50152" y="112485"/>
-                    <a:pt x="49794" y="118933"/>
-                    <a:pt x="49078" y="126456"/>
-                  </a:cubicBezTo>
-                  <a:lnTo>
-                    <a:pt x="348917" y="126456"/>
-                  </a:lnTo>
-                  <a:cubicBezTo>
-                    <a:pt x="353932" y="53018"/>
-                    <a:pt x="369695" y="0"/>
-                    <a:pt x="389039" y="0"/>
-                  </a:cubicBezTo>
-                  <a:lnTo>
-                    <a:pt x="433818" y="0"/>
-                  </a:lnTo>
-                  <a:cubicBezTo>
-                    <a:pt x="452804" y="0"/>
-                    <a:pt x="468925" y="52660"/>
-                    <a:pt x="473940" y="126456"/>
-                  </a:cubicBezTo>
-                  <a:cubicBezTo>
-                    <a:pt x="475373" y="142934"/>
-                    <a:pt x="475731" y="160488"/>
-                    <a:pt x="475731" y="178757"/>
-                  </a:cubicBezTo>
-                  <a:close/>
-                </a:path>
-              </a:pathLst>
-            </a:custGeom>
-            <a:solidFill>
-              <a:srgbClr val="000000"/>
-            </a:solidFill>
-            <a:ln w="10747" cap="rnd">
-              <a:solidFill>
-                <a:srgbClr val="231815"/>
-              </a:solidFill>
-              <a:round/>
-            </a:ln>
-          </p:spPr>
-        </p:sp>
-        <p:sp>
-          <p:nvSpPr>
-            <p:cNvPr id="31" name="left House light column 3 row 2 9"/>
-            <p:cNvSpPr/>
-            <p:nvPr/>
-          </p:nvSpPr>
-          <p:spPr>
-            <a:xfrm>
-              <a:off x="4593423" y="1702507"/>
-              <a:ext cx="83826" cy="356440"/>
-            </a:xfrm>
-            <a:custGeom>
-              <a:avLst/>
-              <a:gdLst/>
-              <a:ahLst/>
-              <a:cxnLst/>
-              <a:rect l="0" t="0" r="r" b="b"/>
-              <a:pathLst>
-                <a:path w="83826" h="356440" fill="norm">
-                  <a:moveTo>
-                    <a:pt x="83826" y="178399"/>
-                  </a:moveTo>
-                  <a:cubicBezTo>
-                    <a:pt x="83826" y="276554"/>
-                    <a:pt x="64840" y="356440"/>
-                    <a:pt x="41555" y="356440"/>
-                  </a:cubicBezTo>
-                  <a:cubicBezTo>
-                    <a:pt x="33315" y="356440"/>
-                    <a:pt x="25793" y="346409"/>
-                    <a:pt x="18986" y="328140"/>
-                  </a:cubicBezTo>
-                  <a:cubicBezTo>
-                    <a:pt x="7165" y="296615"/>
-                    <a:pt x="0" y="241448"/>
-                    <a:pt x="0" y="178399"/>
-                  </a:cubicBezTo>
-                  <a:cubicBezTo>
-                    <a:pt x="0" y="160129"/>
-                    <a:pt x="716" y="142576"/>
-                    <a:pt x="1791" y="126097"/>
-                  </a:cubicBezTo>
-                  <a:cubicBezTo>
-                    <a:pt x="2508" y="116067"/>
-                    <a:pt x="3224" y="106036"/>
-                    <a:pt x="4299" y="96722"/>
-                  </a:cubicBezTo>
-                  <a:cubicBezTo>
-                    <a:pt x="7523" y="68422"/>
-                    <a:pt x="12538" y="45137"/>
-                    <a:pt x="18628" y="28300"/>
-                  </a:cubicBezTo>
-                  <a:cubicBezTo>
-                    <a:pt x="25434" y="10030"/>
-                    <a:pt x="32957" y="0"/>
-                    <a:pt x="41197" y="0"/>
-                  </a:cubicBezTo>
-                  <a:cubicBezTo>
-                    <a:pt x="60183" y="0"/>
-                    <a:pt x="76303" y="52660"/>
-                    <a:pt x="81318" y="126456"/>
-                  </a:cubicBezTo>
-                  <a:cubicBezTo>
-                    <a:pt x="82751" y="142934"/>
-                    <a:pt x="83110" y="160488"/>
-                    <a:pt x="83110" y="178757"/>
-                  </a:cubicBezTo>
-                  <a:close/>
-                </a:path>
-              </a:pathLst>
-            </a:custGeom>
-            <a:solidFill>
-              <a:srgbClr val="B3B3B3"/>
-            </a:solidFill>
-            <a:ln w="10747" cap="rnd">
-              <a:solidFill>
-                <a:srgbClr val="231815"/>
-              </a:solidFill>
-              <a:round/>
-            </a:ln>
-          </p:spPr>
-        </p:sp>
-      </p:grpSp>
-      <p:grpSp>
-        <p:nvGrpSpPr>
-          <p:cNvPr id="32" name="left Water well column 2 row 5"/>
-          <p:cNvGrpSpPr/>
-          <p:nvPr/>
-        </p:nvGrpSpPr>
-        <p:grpSpPr>
-          <a:xfrm>
-            <a:off x="565601" y="2459887"/>
-            <a:ext cx="232834" cy="992278"/>
-            <a:chOff x="3766001" y="3040912"/>
-            <a:chExt cx="232834" cy="992278"/>
-          </a:xfrm>
-        </p:grpSpPr>
-        <p:sp>
-          <p:nvSpPr>
-            <p:cNvPr id="33" name="left Water well column 2 row 5 3"/>
-            <p:cNvSpPr/>
-            <p:nvPr/>
-          </p:nvSpPr>
-          <p:spPr>
-            <a:xfrm>
-              <a:off x="3766001" y="3040912"/>
-              <a:ext cx="232834" cy="992278"/>
-            </a:xfrm>
-            <a:custGeom>
-              <a:avLst/>
-              <a:gdLst/>
-              <a:ahLst/>
-              <a:cxnLst/>
-              <a:rect l="0" t="0" r="r" b="b"/>
-              <a:pathLst>
-                <a:path w="232834" h="992278" fill="norm">
-                  <a:moveTo>
-                    <a:pt x="0" y="164127"/>
-                  </a:moveTo>
-                  <a:lnTo>
-                    <a:pt x="0" y="992278"/>
-                  </a:lnTo>
-                  <a:lnTo>
-                    <a:pt x="232834" y="743263"/>
-                  </a:lnTo>
-                  <a:lnTo>
-                    <a:pt x="232834" y="0"/>
-                  </a:lnTo>
-                  <a:lnTo>
-                    <a:pt x="0" y="164127"/>
-                  </a:lnTo>
-                  <a:close/>
-                </a:path>
-              </a:pathLst>
-            </a:custGeom>
-            <a:solidFill>
-              <a:srgbClr val="D5D3D1"/>
-            </a:solidFill>
-            <a:ln w="18650" cap="rnd">
-              <a:solidFill>
-                <a:srgbClr val="040000"/>
-              </a:solidFill>
-              <a:round/>
-            </a:ln>
-          </p:spPr>
-        </p:sp>
-        <p:sp>
-          <p:nvSpPr>
-            <p:cNvPr id="34" name="left Water well column 2 row 5 4"/>
-            <p:cNvSpPr/>
-            <p:nvPr/>
-          </p:nvSpPr>
-          <p:spPr>
-            <a:xfrm>
-              <a:off x="3766001" y="3040912"/>
-              <a:ext cx="232834" cy="824026"/>
-            </a:xfrm>
-            <a:custGeom>
-              <a:avLst/>
-              <a:gdLst/>
-              <a:ahLst/>
-              <a:cxnLst/>
-              <a:rect l="0" t="0" r="r" b="b"/>
-              <a:pathLst>
-                <a:path w="232834" h="824026" fill="norm">
-                  <a:moveTo>
-                    <a:pt x="0" y="164127"/>
-                  </a:moveTo>
-                  <a:lnTo>
-                    <a:pt x="0" y="824026"/>
-                  </a:lnTo>
-                  <a:lnTo>
-                    <a:pt x="232834" y="743263"/>
-                  </a:lnTo>
-                  <a:lnTo>
-                    <a:pt x="232834" y="0"/>
-                  </a:lnTo>
-                  <a:lnTo>
-                    <a:pt x="0" y="164127"/>
-                  </a:lnTo>
-                  <a:close/>
-                </a:path>
-              </a:pathLst>
-            </a:custGeom>
-            <a:solidFill>
-              <a:srgbClr val="D5D3D1"/>
-            </a:solidFill>
-            <a:ln w="18650" cap="rnd">
-              <a:solidFill>
-                <a:srgbClr val="040000"/>
-              </a:solidFill>
-              <a:round/>
-            </a:ln>
-          </p:spPr>
-        </p:sp>
-        <p:sp>
-          <p:nvSpPr>
-            <p:cNvPr id="35" name="left Water well column 2 row 5 5"/>
-            <p:cNvSpPr/>
-            <p:nvPr/>
-          </p:nvSpPr>
-          <p:spPr>
-            <a:xfrm>
-              <a:off x="3775330" y="3780900"/>
-              <a:ext cx="163432" cy="172702"/>
-            </a:xfrm>
-            <a:custGeom>
-              <a:avLst/>
-              <a:gdLst/>
-              <a:ahLst/>
-              <a:cxnLst/>
-              <a:rect l="0" t="0" r="r" b="b"/>
-              <a:pathLst>
-                <a:path w="163432" h="172702" fill="norm">
-                  <a:moveTo>
-                    <a:pt x="163432" y="0"/>
-                  </a:moveTo>
-                  <a:lnTo>
-                    <a:pt x="163432" y="54729"/>
-                  </a:lnTo>
-                  <a:cubicBezTo>
-                    <a:pt x="163432" y="83900"/>
-                    <a:pt x="93499" y="134052"/>
-                    <a:pt x="0" y="172702"/>
-                  </a:cubicBezTo>
-                  <a:lnTo>
-                    <a:pt x="0" y="115898"/>
-                  </a:lnTo>
-                  <a:cubicBezTo>
-                    <a:pt x="16130" y="109502"/>
-                    <a:pt x="31630" y="102681"/>
-                    <a:pt x="46268" y="95650"/>
-                  </a:cubicBezTo>
-                  <a:cubicBezTo>
-                    <a:pt x="86940" y="76067"/>
-                    <a:pt x="119775" y="54884"/>
-                    <a:pt x="140671" y="35720"/>
-                  </a:cubicBezTo>
-                  <a:cubicBezTo>
-                    <a:pt x="154850" y="22406"/>
-                    <a:pt x="163432" y="9759"/>
-                    <a:pt x="163432" y="0"/>
-                  </a:cubicBezTo>
-                  <a:close/>
-                </a:path>
-              </a:pathLst>
-            </a:custGeom>
-            <a:solidFill>
-              <a:srgbClr val="D5D3D1"/>
-            </a:solidFill>
-            <a:ln w="0" cap="rnd">
-              <a:noFill/>
-              <a:round/>
-            </a:ln>
-          </p:spPr>
-        </p:sp>
-        <p:sp>
-          <p:nvSpPr>
-            <p:cNvPr id="36" name="left Water well column 2 row 5 6"/>
-            <p:cNvSpPr/>
-            <p:nvPr/>
-          </p:nvSpPr>
-          <p:spPr>
-            <a:xfrm>
-              <a:off x="3775330" y="3780900"/>
-              <a:ext cx="163432" cy="172702"/>
-            </a:xfrm>
-            <a:custGeom>
-              <a:avLst/>
-              <a:gdLst/>
-              <a:ahLst/>
-              <a:cxnLst/>
-              <a:rect l="0" t="0" r="r" b="b"/>
-              <a:pathLst>
-                <a:path w="163432" h="172702" fill="none">
-                  <a:moveTo>
-                    <a:pt x="163432" y="0"/>
-                  </a:moveTo>
-                  <a:lnTo>
-                    <a:pt x="163432" y="54729"/>
-                  </a:lnTo>
-                  <a:cubicBezTo>
-                    <a:pt x="163432" y="83900"/>
-                    <a:pt x="93499" y="134052"/>
-                    <a:pt x="0" y="172702"/>
-                  </a:cubicBezTo>
-                </a:path>
-              </a:pathLst>
-            </a:custGeom>
-            <a:noFill/>
-            <a:ln w="18650" cap="rnd">
-              <a:solidFill>
-                <a:srgbClr val="040000"/>
-              </a:solidFill>
-              <a:round/>
-            </a:ln>
-          </p:spPr>
-        </p:sp>
-        <p:sp>
-          <p:nvSpPr>
-            <p:cNvPr id="37" name="left Water well column 2 row 5 7"/>
-            <p:cNvSpPr/>
-            <p:nvPr/>
-          </p:nvSpPr>
-          <p:spPr>
-            <a:xfrm>
-              <a:off x="3775330" y="3780900"/>
-              <a:ext cx="163432" cy="115898"/>
-            </a:xfrm>
-            <a:custGeom>
-              <a:avLst/>
-              <a:gdLst/>
-              <a:ahLst/>
-              <a:cxnLst/>
-              <a:rect l="0" t="0" r="r" b="b"/>
-              <a:pathLst>
-                <a:path w="163432" h="115898" fill="none">
-                  <a:moveTo>
-                    <a:pt x="0" y="115898"/>
-                  </a:moveTo>
-                  <a:cubicBezTo>
-                    <a:pt x="16130" y="109502"/>
-                    <a:pt x="31630" y="102681"/>
-                    <a:pt x="46268" y="95650"/>
-                  </a:cubicBezTo>
-                  <a:cubicBezTo>
-                    <a:pt x="86940" y="76067"/>
-                    <a:pt x="119775" y="54884"/>
-                    <a:pt x="140671" y="35720"/>
-                  </a:cubicBezTo>
-                  <a:cubicBezTo>
-                    <a:pt x="154850" y="22406"/>
-                    <a:pt x="163432" y="9759"/>
-                    <a:pt x="163432" y="0"/>
-                  </a:cubicBezTo>
-                </a:path>
-              </a:pathLst>
-            </a:custGeom>
-            <a:noFill/>
-            <a:ln w="18650" cap="rnd">
-              <a:solidFill>
-                <a:srgbClr val="040000"/>
-              </a:solidFill>
-              <a:round/>
-            </a:ln>
-          </p:spPr>
-        </p:sp>
-        <p:sp>
-          <p:nvSpPr>
-            <p:cNvPr id="38" name="left Water well column 2 row 5 8"/>
-            <p:cNvSpPr/>
-            <p:nvPr/>
-          </p:nvSpPr>
-          <p:spPr>
-            <a:xfrm>
-              <a:off x="3775330" y="3751079"/>
-              <a:ext cx="163432" cy="145719"/>
-            </a:xfrm>
-            <a:custGeom>
-              <a:avLst/>
-              <a:gdLst/>
-              <a:ahLst/>
-              <a:cxnLst/>
-              <a:rect l="0" t="0" r="r" b="b"/>
-              <a:pathLst>
-                <a:path w="163432" h="145719" fill="norm">
-                  <a:moveTo>
-                    <a:pt x="163432" y="29821"/>
-                  </a:moveTo>
-                  <a:cubicBezTo>
-                    <a:pt x="163432" y="39772"/>
-                    <a:pt x="155223" y="52093"/>
-                    <a:pt x="140671" y="65541"/>
-                  </a:cubicBezTo>
-                  <a:cubicBezTo>
-                    <a:pt x="120148" y="84574"/>
-                    <a:pt x="86940" y="105888"/>
-                    <a:pt x="46268" y="125471"/>
-                  </a:cubicBezTo>
-                  <a:cubicBezTo>
-                    <a:pt x="31630" y="132502"/>
-                    <a:pt x="16130" y="139323"/>
-                    <a:pt x="0" y="145719"/>
-                  </a:cubicBezTo>
-                  <a:lnTo>
-                    <a:pt x="0" y="23414"/>
-                  </a:lnTo>
-                  <a:cubicBezTo>
-                    <a:pt x="93499" y="0"/>
-                    <a:pt x="163432" y="817"/>
-                    <a:pt x="163432" y="29821"/>
-                  </a:cubicBezTo>
-                  <a:close/>
-                </a:path>
-              </a:pathLst>
-            </a:custGeom>
-            <a:solidFill>
-              <a:srgbClr val="D5D3D1"/>
-            </a:solidFill>
-            <a:ln w="0" cap="rnd">
-              <a:noFill/>
-              <a:round/>
-            </a:ln>
-          </p:spPr>
-        </p:sp>
-        <p:sp>
-          <p:nvSpPr>
-            <p:cNvPr id="39" name="left Water well column 2 row 5 9"/>
-            <p:cNvSpPr/>
-            <p:nvPr/>
-          </p:nvSpPr>
-          <p:spPr>
-            <a:xfrm>
-              <a:off x="3775330" y="3780900"/>
-              <a:ext cx="163432" cy="115898"/>
-            </a:xfrm>
-            <a:custGeom>
-              <a:avLst/>
-              <a:gdLst/>
-              <a:ahLst/>
-              <a:cxnLst/>
-              <a:rect l="0" t="0" r="r" b="b"/>
-              <a:pathLst>
-                <a:path w="163432" h="115898" fill="none">
-                  <a:moveTo>
-                    <a:pt x="163432" y="0"/>
-                  </a:moveTo>
-                  <a:cubicBezTo>
-                    <a:pt x="163432" y="9951"/>
-                    <a:pt x="155223" y="22272"/>
-                    <a:pt x="140671" y="35720"/>
-                  </a:cubicBezTo>
-                  <a:cubicBezTo>
-                    <a:pt x="120148" y="54753"/>
-                    <a:pt x="86940" y="76067"/>
-                    <a:pt x="46268" y="95650"/>
-                  </a:cubicBezTo>
-                  <a:cubicBezTo>
-                    <a:pt x="31630" y="102681"/>
-                    <a:pt x="16130" y="109502"/>
-                    <a:pt x="0" y="115898"/>
-                  </a:cubicBezTo>
-                </a:path>
-              </a:pathLst>
-            </a:custGeom>
-            <a:noFill/>
-            <a:ln w="18650" cap="rnd">
-              <a:solidFill>
-                <a:srgbClr val="040000"/>
-              </a:solidFill>
-              <a:round/>
-            </a:ln>
-          </p:spPr>
-        </p:sp>
-        <p:sp>
-          <p:nvSpPr>
-            <p:cNvPr id="40" name="left Water well column 2 row 5 10"/>
-            <p:cNvSpPr/>
-            <p:nvPr/>
-          </p:nvSpPr>
-          <p:spPr>
-            <a:xfrm>
-              <a:off x="3775330" y="3751079"/>
-              <a:ext cx="163432" cy="29821"/>
-            </a:xfrm>
-            <a:custGeom>
-              <a:avLst/>
-              <a:gdLst/>
-              <a:ahLst/>
-              <a:cxnLst/>
-              <a:rect l="0" t="0" r="r" b="b"/>
-              <a:pathLst>
-                <a:path w="163432" h="29821" fill="none">
-                  <a:moveTo>
-                    <a:pt x="0" y="23414"/>
-                  </a:moveTo>
-                  <a:cubicBezTo>
-                    <a:pt x="93499" y="0"/>
-                    <a:pt x="163432" y="817"/>
-                    <a:pt x="163432" y="29821"/>
-                  </a:cubicBezTo>
-                </a:path>
-              </a:pathLst>
-            </a:custGeom>
-            <a:noFill/>
-            <a:ln w="18650" cap="rnd">
-              <a:solidFill>
-                <a:srgbClr val="040000"/>
-              </a:solidFill>
-              <a:round/>
-            </a:ln>
-          </p:spPr>
-        </p:sp>
-        <p:sp>
-          <p:nvSpPr>
-            <p:cNvPr id="41" name="left Water well column 2 row 5 11"/>
-            <p:cNvSpPr/>
-            <p:nvPr/>
-          </p:nvSpPr>
-          <p:spPr>
-            <a:xfrm>
-              <a:off x="3775330" y="3800331"/>
-              <a:ext cx="83313" cy="76302"/>
-            </a:xfrm>
-            <a:custGeom>
-              <a:avLst/>
-              <a:gdLst/>
-              <a:ahLst/>
-              <a:cxnLst/>
-              <a:rect l="0" t="0" r="r" b="b"/>
-              <a:pathLst>
-                <a:path w="83313" h="76302" fill="norm">
-                  <a:moveTo>
-                    <a:pt x="82805" y="16378"/>
-                  </a:moveTo>
-                  <a:cubicBezTo>
-                    <a:pt x="82805" y="21942"/>
-                    <a:pt x="77731" y="29089"/>
-                    <a:pt x="69104" y="36776"/>
-                  </a:cubicBezTo>
-                  <a:cubicBezTo>
-                    <a:pt x="56418" y="47686"/>
-                    <a:pt x="36373" y="59832"/>
-                    <a:pt x="11761" y="71130"/>
-                  </a:cubicBezTo>
-                  <a:cubicBezTo>
-                    <a:pt x="7944" y="72869"/>
-                    <a:pt x="4019" y="74597"/>
-                    <a:pt x="0" y="76302"/>
-                  </a:cubicBezTo>
-                  <a:lnTo>
-                    <a:pt x="0" y="10509"/>
-                  </a:lnTo>
-                  <a:cubicBezTo>
-                    <a:pt x="48521" y="0"/>
-                    <a:pt x="83313" y="1321"/>
-                    <a:pt x="83313" y="16207"/>
-                  </a:cubicBezTo>
-                  <a:lnTo>
-                    <a:pt x="82805" y="16378"/>
-                  </a:lnTo>
-                  <a:close/>
-                </a:path>
-              </a:pathLst>
-            </a:custGeom>
-            <a:solidFill>
-              <a:srgbClr val="68A7D9">
-                <a:alpha val="90000"/>
-              </a:srgbClr>
-            </a:solidFill>
-            <a:ln w="0" cap="rnd">
-              <a:noFill/>
-              <a:round/>
-            </a:ln>
-          </p:spPr>
-        </p:sp>
-      </p:grpSp>
-      <p:grpSp>
-        <p:nvGrpSpPr>
-          <p:cNvPr id="42" name="right Speaker column 2 row 1"/>
-          <p:cNvGrpSpPr/>
-          <p:nvPr/>
-        </p:nvGrpSpPr>
-        <p:grpSpPr>
-          <a:xfrm>
-            <a:off x="5012858" y="712151"/>
-            <a:ext cx="260135" cy="839156"/>
-            <a:chOff x="8213258" y="1293176"/>
-            <a:chExt cx="260135" cy="839156"/>
-          </a:xfrm>
-        </p:grpSpPr>
-        <p:sp>
-          <p:nvSpPr>
-            <p:cNvPr id="43" name="right Speaker column 2 row 1 6"/>
-            <p:cNvSpPr/>
-            <p:nvPr/>
-          </p:nvSpPr>
-          <p:spPr>
-            <a:xfrm>
-              <a:off x="8330455" y="1293176"/>
-              <a:ext cx="21198" cy="68744"/>
-            </a:xfrm>
-            <a:custGeom>
-              <a:avLst/>
-              <a:gdLst/>
-              <a:ahLst/>
-              <a:cxnLst/>
-              <a:rect l="0" t="0" r="r" b="b"/>
-              <a:pathLst>
-                <a:path w="21198" h="68744" fill="norm">
-                  <a:moveTo>
-                    <a:pt x="21198" y="43003"/>
-                  </a:moveTo>
-                  <a:cubicBezTo>
-                    <a:pt x="21198" y="26649"/>
-                    <a:pt x="16353" y="9691"/>
-                    <a:pt x="10599" y="4845"/>
-                  </a:cubicBezTo>
-                  <a:cubicBezTo>
-                    <a:pt x="4845" y="0"/>
-                    <a:pt x="0" y="9691"/>
-                    <a:pt x="0" y="25741"/>
-                  </a:cubicBezTo>
-                  <a:cubicBezTo>
-                    <a:pt x="0" y="41791"/>
-                    <a:pt x="4845" y="59053"/>
-                    <a:pt x="10599" y="63898"/>
-                  </a:cubicBezTo>
-                  <a:cubicBezTo>
-                    <a:pt x="16353" y="68744"/>
-                    <a:pt x="21198" y="59356"/>
-                    <a:pt x="21198" y="43003"/>
-                  </a:cubicBezTo>
-                  <a:close/>
-                </a:path>
-              </a:pathLst>
-            </a:custGeom>
-            <a:solidFill>
-              <a:srgbClr val="666666"/>
-            </a:solidFill>
-            <a:ln w="0" cap="rnd">
-              <a:noFill/>
-              <a:round/>
-            </a:ln>
-          </p:spPr>
-        </p:sp>
-        <p:sp>
-          <p:nvSpPr>
-            <p:cNvPr id="44" name="right Speaker column 2 row 1 7"/>
-            <p:cNvSpPr/>
-            <p:nvPr/>
-          </p:nvSpPr>
-          <p:spPr>
-            <a:xfrm>
-              <a:off x="8330455" y="1389780"/>
-              <a:ext cx="21198" cy="68441"/>
-            </a:xfrm>
-            <a:custGeom>
-              <a:avLst/>
-              <a:gdLst/>
-              <a:ahLst/>
-              <a:cxnLst/>
-              <a:rect l="0" t="0" r="r" b="b"/>
-              <a:pathLst>
-                <a:path w="21198" h="68441" fill="norm">
-                  <a:moveTo>
-                    <a:pt x="21198" y="42700"/>
-                  </a:moveTo>
-                  <a:cubicBezTo>
-                    <a:pt x="21198" y="26347"/>
-                    <a:pt x="16353" y="9085"/>
-                    <a:pt x="10599" y="4543"/>
-                  </a:cubicBezTo>
-                  <a:cubicBezTo>
-                    <a:pt x="4845" y="0"/>
-                    <a:pt x="0" y="9085"/>
-                    <a:pt x="0" y="25438"/>
-                  </a:cubicBezTo>
-                  <a:cubicBezTo>
-                    <a:pt x="0" y="41791"/>
-                    <a:pt x="4845" y="58750"/>
-                    <a:pt x="10599" y="63595"/>
-                  </a:cubicBezTo>
-                  <a:cubicBezTo>
-                    <a:pt x="16353" y="68441"/>
-                    <a:pt x="21198" y="59053"/>
-                    <a:pt x="21198" y="42700"/>
-                  </a:cubicBezTo>
-                  <a:close/>
-                </a:path>
-              </a:pathLst>
-            </a:custGeom>
-            <a:solidFill>
-              <a:srgbClr val="666666"/>
-            </a:solidFill>
-            <a:ln w="0" cap="rnd">
-              <a:noFill/>
-              <a:round/>
-            </a:ln>
-          </p:spPr>
-        </p:sp>
-        <p:sp>
-          <p:nvSpPr>
-            <p:cNvPr id="45" name="right Speaker column 2 row 1 8"/>
-            <p:cNvSpPr/>
-            <p:nvPr/>
-          </p:nvSpPr>
-          <p:spPr>
-            <a:xfrm>
-              <a:off x="8330455" y="1485779"/>
-              <a:ext cx="21198" cy="68744"/>
-            </a:xfrm>
-            <a:custGeom>
-              <a:avLst/>
-              <a:gdLst/>
-              <a:ahLst/>
-              <a:cxnLst/>
-              <a:rect l="0" t="0" r="r" b="b"/>
-              <a:pathLst>
-                <a:path w="21198" h="68744" fill="norm">
-                  <a:moveTo>
-                    <a:pt x="21198" y="43305"/>
-                  </a:moveTo>
-                  <a:cubicBezTo>
-                    <a:pt x="21198" y="26952"/>
-                    <a:pt x="16353" y="9691"/>
-                    <a:pt x="10599" y="4845"/>
-                  </a:cubicBezTo>
-                  <a:cubicBezTo>
-                    <a:pt x="4845" y="0"/>
-                    <a:pt x="0" y="9388"/>
-                    <a:pt x="0" y="25438"/>
-                  </a:cubicBezTo>
-                  <a:cubicBezTo>
-                    <a:pt x="0" y="41488"/>
-                    <a:pt x="4845" y="59053"/>
-                    <a:pt x="10599" y="63898"/>
-                  </a:cubicBezTo>
-                  <a:cubicBezTo>
-                    <a:pt x="16353" y="68744"/>
-                    <a:pt x="21198" y="59659"/>
-                    <a:pt x="21198" y="43305"/>
-                  </a:cubicBezTo>
-                  <a:close/>
-                </a:path>
-              </a:pathLst>
-            </a:custGeom>
-            <a:solidFill>
-              <a:srgbClr val="666666"/>
-            </a:solidFill>
-            <a:ln w="0" cap="rnd">
-              <a:noFill/>
-              <a:round/>
-            </a:ln>
-          </p:spPr>
-        </p:sp>
-        <p:sp>
-          <p:nvSpPr>
-            <p:cNvPr id="46" name="right Speaker column 2 row 1 9"/>
-            <p:cNvSpPr/>
-            <p:nvPr/>
-          </p:nvSpPr>
-          <p:spPr>
-            <a:xfrm>
-              <a:off x="8330455" y="1582081"/>
-              <a:ext cx="21198" cy="68744"/>
-            </a:xfrm>
-            <a:custGeom>
-              <a:avLst/>
-              <a:gdLst/>
-              <a:ahLst/>
-              <a:cxnLst/>
-              <a:rect l="0" t="0" r="r" b="b"/>
-              <a:pathLst>
-                <a:path w="21198" h="68744" fill="norm">
-                  <a:moveTo>
-                    <a:pt x="21198" y="43305"/>
-                  </a:moveTo>
-                  <a:cubicBezTo>
-                    <a:pt x="21198" y="26952"/>
-                    <a:pt x="16353" y="9691"/>
-                    <a:pt x="10599" y="4845"/>
-                  </a:cubicBezTo>
-                  <a:cubicBezTo>
-                    <a:pt x="4845" y="0"/>
-                    <a:pt x="0" y="9085"/>
-                    <a:pt x="0" y="25438"/>
-                  </a:cubicBezTo>
-                  <a:cubicBezTo>
-                    <a:pt x="0" y="41791"/>
-                    <a:pt x="4845" y="59053"/>
-                    <a:pt x="10599" y="63898"/>
-                  </a:cubicBezTo>
-                  <a:cubicBezTo>
-                    <a:pt x="16353" y="68744"/>
-                    <a:pt x="21198" y="59659"/>
-                    <a:pt x="21198" y="43305"/>
-                  </a:cubicBezTo>
-                  <a:close/>
-                </a:path>
-              </a:pathLst>
-            </a:custGeom>
-            <a:solidFill>
-              <a:srgbClr val="666666"/>
-            </a:solidFill>
-            <a:ln w="0" cap="rnd">
-              <a:noFill/>
-              <a:round/>
-            </a:ln>
-          </p:spPr>
-        </p:sp>
-        <p:sp>
-          <p:nvSpPr>
-            <p:cNvPr id="47" name="right Speaker column 2 row 1 10"/>
-            <p:cNvSpPr/>
-            <p:nvPr/>
-          </p:nvSpPr>
-          <p:spPr>
-            <a:xfrm>
-              <a:off x="8330455" y="1677777"/>
-              <a:ext cx="21198" cy="69652"/>
-            </a:xfrm>
-            <a:custGeom>
-              <a:avLst/>
-              <a:gdLst/>
-              <a:ahLst/>
-              <a:cxnLst/>
-              <a:rect l="0" t="0" r="r" b="b"/>
-              <a:pathLst>
-                <a:path w="21198" h="69652" fill="norm">
-                  <a:moveTo>
-                    <a:pt x="21198" y="43911"/>
-                  </a:moveTo>
-                  <a:cubicBezTo>
-                    <a:pt x="21198" y="27558"/>
-                    <a:pt x="16353" y="10296"/>
-                    <a:pt x="10599" y="5148"/>
-                  </a:cubicBezTo>
-                  <a:cubicBezTo>
-                    <a:pt x="4845" y="0"/>
-                    <a:pt x="0" y="9388"/>
-                    <a:pt x="0" y="25741"/>
-                  </a:cubicBezTo>
-                  <a:cubicBezTo>
-                    <a:pt x="0" y="42094"/>
-                    <a:pt x="4845" y="59356"/>
-                    <a:pt x="10599" y="64504"/>
-                  </a:cubicBezTo>
-                  <a:cubicBezTo>
-                    <a:pt x="16353" y="69652"/>
-                    <a:pt x="21198" y="60567"/>
-                    <a:pt x="21198" y="44214"/>
-                  </a:cubicBezTo>
-                  <a:close/>
-                </a:path>
-              </a:pathLst>
-            </a:custGeom>
-            <a:solidFill>
-              <a:srgbClr val="666666"/>
-            </a:solidFill>
-            <a:ln w="0" cap="rnd">
-              <a:noFill/>
-              <a:round/>
-            </a:ln>
-          </p:spPr>
-        </p:sp>
-        <p:sp>
-          <p:nvSpPr>
-            <p:cNvPr id="48" name="right Speaker column 2 row 1 11"/>
-            <p:cNvSpPr/>
-            <p:nvPr/>
-          </p:nvSpPr>
-          <p:spPr>
-            <a:xfrm>
-              <a:off x="8330455" y="1774381"/>
-              <a:ext cx="21198" cy="69349"/>
-            </a:xfrm>
-            <a:custGeom>
-              <a:avLst/>
-              <a:gdLst/>
-              <a:ahLst/>
-              <a:cxnLst/>
-              <a:rect l="0" t="0" r="r" b="b"/>
-              <a:pathLst>
-                <a:path w="21198" h="69349" fill="norm">
-                  <a:moveTo>
-                    <a:pt x="21198" y="43911"/>
-                  </a:moveTo>
-                  <a:cubicBezTo>
-                    <a:pt x="21198" y="27558"/>
-                    <a:pt x="16353" y="10296"/>
-                    <a:pt x="10599" y="5148"/>
-                  </a:cubicBezTo>
-                  <a:cubicBezTo>
-                    <a:pt x="4845" y="0"/>
-                    <a:pt x="0" y="9085"/>
-                    <a:pt x="0" y="25438"/>
-                  </a:cubicBezTo>
-                  <a:cubicBezTo>
-                    <a:pt x="0" y="41791"/>
-                    <a:pt x="4845" y="59053"/>
-                    <a:pt x="10599" y="64201"/>
-                  </a:cubicBezTo>
-                  <a:cubicBezTo>
-                    <a:pt x="16353" y="69349"/>
-                    <a:pt x="21198" y="60264"/>
-                    <a:pt x="21198" y="43911"/>
-                  </a:cubicBezTo>
-                  <a:close/>
-                </a:path>
-              </a:pathLst>
-            </a:custGeom>
-            <a:solidFill>
-              <a:srgbClr val="666666"/>
-            </a:solidFill>
-            <a:ln w="0" cap="rnd">
-              <a:noFill/>
-              <a:round/>
-            </a:ln>
-          </p:spPr>
-        </p:sp>
-        <p:sp>
-          <p:nvSpPr>
-            <p:cNvPr id="49" name="right Speaker column 2 row 1 12"/>
-            <p:cNvSpPr/>
-            <p:nvPr/>
-          </p:nvSpPr>
-          <p:spPr>
-            <a:xfrm>
-              <a:off x="8330455" y="1870380"/>
-              <a:ext cx="21198" cy="69955"/>
-            </a:xfrm>
-            <a:custGeom>
-              <a:avLst/>
-              <a:gdLst/>
-              <a:ahLst/>
-              <a:cxnLst/>
-              <a:rect l="0" t="0" r="r" b="b"/>
-              <a:pathLst>
-                <a:path w="21198" h="69955" fill="norm">
-                  <a:moveTo>
-                    <a:pt x="21198" y="44214"/>
-                  </a:moveTo>
-                  <a:cubicBezTo>
-                    <a:pt x="21198" y="27861"/>
-                    <a:pt x="16353" y="10296"/>
-                    <a:pt x="10599" y="5148"/>
-                  </a:cubicBezTo>
-                  <a:cubicBezTo>
-                    <a:pt x="4845" y="0"/>
-                    <a:pt x="0" y="9085"/>
-                    <a:pt x="0" y="25438"/>
-                  </a:cubicBezTo>
-                  <a:cubicBezTo>
-                    <a:pt x="0" y="41791"/>
-                    <a:pt x="4845" y="59053"/>
-                    <a:pt x="10599" y="64504"/>
-                  </a:cubicBezTo>
-                  <a:cubicBezTo>
-                    <a:pt x="16353" y="69955"/>
-                    <a:pt x="21198" y="60567"/>
-                    <a:pt x="21198" y="44214"/>
-                  </a:cubicBezTo>
-                  <a:close/>
-                </a:path>
-              </a:pathLst>
-            </a:custGeom>
-            <a:solidFill>
-              <a:srgbClr val="666666"/>
-            </a:solidFill>
-            <a:ln w="0" cap="rnd">
-              <a:noFill/>
-              <a:round/>
-            </a:ln>
-          </p:spPr>
-        </p:sp>
-        <p:sp>
-          <p:nvSpPr>
-            <p:cNvPr id="50" name="right Speaker column 2 row 1 13"/>
-            <p:cNvSpPr/>
-            <p:nvPr/>
-          </p:nvSpPr>
-          <p:spPr>
-            <a:xfrm>
-              <a:off x="8330455" y="1966984"/>
-              <a:ext cx="21198" cy="69349"/>
-            </a:xfrm>
-            <a:custGeom>
-              <a:avLst/>
-              <a:gdLst/>
-              <a:ahLst/>
-              <a:cxnLst/>
-              <a:rect l="0" t="0" r="r" b="b"/>
-              <a:pathLst>
-                <a:path w="21198" h="69349" fill="norm">
-                  <a:moveTo>
-                    <a:pt x="21198" y="44214"/>
-                  </a:moveTo>
-                  <a:cubicBezTo>
-                    <a:pt x="21198" y="27861"/>
-                    <a:pt x="16353" y="10296"/>
-                    <a:pt x="10599" y="5148"/>
-                  </a:cubicBezTo>
-                  <a:cubicBezTo>
-                    <a:pt x="4845" y="0"/>
-                    <a:pt x="0" y="8782"/>
-                    <a:pt x="0" y="25135"/>
-                  </a:cubicBezTo>
-                  <a:cubicBezTo>
-                    <a:pt x="0" y="41488"/>
-                    <a:pt x="4845" y="59053"/>
-                    <a:pt x="10599" y="64201"/>
-                  </a:cubicBezTo>
-                  <a:cubicBezTo>
-                    <a:pt x="16353" y="69349"/>
-                    <a:pt x="21198" y="60567"/>
-                    <a:pt x="21198" y="44214"/>
-                  </a:cubicBezTo>
-                  <a:close/>
-                </a:path>
-              </a:pathLst>
-            </a:custGeom>
-            <a:solidFill>
-              <a:srgbClr val="666666"/>
-            </a:solidFill>
-            <a:ln w="0" cap="rnd">
-              <a:noFill/>
-              <a:round/>
-            </a:ln>
-          </p:spPr>
-        </p:sp>
-        <p:sp>
-          <p:nvSpPr>
-            <p:cNvPr id="51" name="right Speaker column 2 row 1 14"/>
-            <p:cNvSpPr/>
-            <p:nvPr/>
-          </p:nvSpPr>
-          <p:spPr>
-            <a:xfrm>
-              <a:off x="8330455" y="2062680"/>
-              <a:ext cx="21198" cy="69652"/>
-            </a:xfrm>
-            <a:custGeom>
-              <a:avLst/>
-              <a:gdLst/>
-              <a:ahLst/>
-              <a:cxnLst/>
-              <a:rect l="0" t="0" r="r" b="b"/>
-              <a:pathLst>
-                <a:path w="21198" h="69652" fill="norm">
-                  <a:moveTo>
-                    <a:pt x="21198" y="44820"/>
-                  </a:moveTo>
-                  <a:cubicBezTo>
-                    <a:pt x="21198" y="28467"/>
-                    <a:pt x="16353" y="10902"/>
-                    <a:pt x="10599" y="5451"/>
-                  </a:cubicBezTo>
-                  <a:cubicBezTo>
-                    <a:pt x="4845" y="0"/>
-                    <a:pt x="0" y="9085"/>
-                    <a:pt x="0" y="25438"/>
-                  </a:cubicBezTo>
-                  <a:cubicBezTo>
-                    <a:pt x="0" y="41791"/>
-                    <a:pt x="4845" y="59356"/>
-                    <a:pt x="10599" y="64504"/>
-                  </a:cubicBezTo>
-                  <a:cubicBezTo>
-                    <a:pt x="16353" y="69652"/>
-                    <a:pt x="21198" y="60870"/>
-                    <a:pt x="21198" y="44517"/>
-                  </a:cubicBezTo>
-                  <a:close/>
-                </a:path>
-              </a:pathLst>
-            </a:custGeom>
-            <a:solidFill>
-              <a:srgbClr val="666666"/>
-            </a:solidFill>
-            <a:ln w="0" cap="rnd">
-              <a:noFill/>
-              <a:round/>
-            </a:ln>
-          </p:spPr>
-        </p:sp>
-        <p:sp>
-          <p:nvSpPr>
-            <p:cNvPr id="52" name="right Speaker column 2 row 1 15"/>
-            <p:cNvSpPr/>
-            <p:nvPr/>
-          </p:nvSpPr>
-          <p:spPr>
-            <a:xfrm>
-              <a:off x="8360436" y="1365554"/>
-              <a:ext cx="21198" cy="69046"/>
-            </a:xfrm>
-            <a:custGeom>
-              <a:avLst/>
-              <a:gdLst/>
-              <a:ahLst/>
-              <a:cxnLst/>
-              <a:rect l="0" t="0" r="r" b="b"/>
-              <a:pathLst>
-                <a:path w="21198" h="69046" fill="norm">
-                  <a:moveTo>
-                    <a:pt x="21198" y="43305"/>
-                  </a:moveTo>
-                  <a:cubicBezTo>
-                    <a:pt x="21198" y="26952"/>
-                    <a:pt x="16353" y="9691"/>
-                    <a:pt x="10599" y="4845"/>
-                  </a:cubicBezTo>
-                  <a:cubicBezTo>
-                    <a:pt x="4845" y="0"/>
-                    <a:pt x="0" y="9388"/>
-                    <a:pt x="0" y="25741"/>
-                  </a:cubicBezTo>
-                  <a:cubicBezTo>
-                    <a:pt x="0" y="42094"/>
-                    <a:pt x="4845" y="59356"/>
-                    <a:pt x="10599" y="64201"/>
-                  </a:cubicBezTo>
-                  <a:cubicBezTo>
-                    <a:pt x="16353" y="69046"/>
-                    <a:pt x="21198" y="59659"/>
-                    <a:pt x="21198" y="43305"/>
-                  </a:cubicBezTo>
-                  <a:close/>
-                </a:path>
-              </a:pathLst>
-            </a:custGeom>
-            <a:solidFill>
-              <a:srgbClr val="666666"/>
-            </a:solidFill>
-            <a:ln w="0" cap="rnd">
-              <a:noFill/>
-              <a:round/>
-            </a:ln>
-          </p:spPr>
-        </p:sp>
-        <p:sp>
-          <p:nvSpPr>
-            <p:cNvPr id="53" name="right Speaker column 2 row 1 16"/>
-            <p:cNvSpPr/>
-            <p:nvPr/>
-          </p:nvSpPr>
-          <p:spPr>
-            <a:xfrm>
-              <a:off x="8360436" y="1462461"/>
-              <a:ext cx="21198" cy="69046"/>
-            </a:xfrm>
-            <a:custGeom>
-              <a:avLst/>
-              <a:gdLst/>
-              <a:ahLst/>
-              <a:cxnLst/>
-              <a:rect l="0" t="0" r="r" b="b"/>
-              <a:pathLst>
-                <a:path w="21198" h="69046" fill="norm">
-                  <a:moveTo>
-                    <a:pt x="21198" y="43305"/>
-                  </a:moveTo>
-                  <a:cubicBezTo>
-                    <a:pt x="21198" y="26952"/>
-                    <a:pt x="16353" y="9691"/>
-                    <a:pt x="10599" y="4845"/>
-                  </a:cubicBezTo>
-                  <a:cubicBezTo>
-                    <a:pt x="4845" y="0"/>
-                    <a:pt x="0" y="9388"/>
-                    <a:pt x="0" y="25741"/>
-                  </a:cubicBezTo>
-                  <a:cubicBezTo>
-                    <a:pt x="0" y="42094"/>
-                    <a:pt x="4845" y="59356"/>
-                    <a:pt x="10599" y="64201"/>
-                  </a:cubicBezTo>
-                  <a:cubicBezTo>
-                    <a:pt x="16353" y="69046"/>
-                    <a:pt x="21198" y="59659"/>
-                    <a:pt x="21198" y="43305"/>
-                  </a:cubicBezTo>
-                  <a:close/>
-                </a:path>
-              </a:pathLst>
-            </a:custGeom>
-            <a:solidFill>
-              <a:srgbClr val="666666"/>
-            </a:solidFill>
-            <a:ln w="0" cap="rnd">
-              <a:noFill/>
-              <a:round/>
-            </a:ln>
-          </p:spPr>
-        </p:sp>
-        <p:sp>
-          <p:nvSpPr>
-            <p:cNvPr id="54" name="right Speaker column 2 row 1 17"/>
-            <p:cNvSpPr/>
-            <p:nvPr/>
-          </p:nvSpPr>
-          <p:spPr>
-            <a:xfrm>
-              <a:off x="8360436" y="1558762"/>
-              <a:ext cx="21198" cy="69652"/>
-            </a:xfrm>
-            <a:custGeom>
-              <a:avLst/>
-              <a:gdLst/>
-              <a:ahLst/>
-              <a:cxnLst/>
-              <a:rect l="0" t="0" r="r" b="b"/>
-              <a:pathLst>
-                <a:path w="21198" h="69652" fill="norm">
-                  <a:moveTo>
-                    <a:pt x="21198" y="43911"/>
-                  </a:moveTo>
-                  <a:cubicBezTo>
-                    <a:pt x="21198" y="27558"/>
-                    <a:pt x="16353" y="10296"/>
-                    <a:pt x="10599" y="5148"/>
-                  </a:cubicBezTo>
-                  <a:cubicBezTo>
-                    <a:pt x="4845" y="0"/>
-                    <a:pt x="0" y="9388"/>
-                    <a:pt x="0" y="25741"/>
-                  </a:cubicBezTo>
-                  <a:cubicBezTo>
-                    <a:pt x="0" y="42094"/>
-                    <a:pt x="4845" y="59356"/>
-                    <a:pt x="10599" y="64504"/>
-                  </a:cubicBezTo>
-                  <a:cubicBezTo>
-                    <a:pt x="16353" y="69652"/>
-                    <a:pt x="21198" y="60264"/>
-                    <a:pt x="21198" y="43911"/>
-                  </a:cubicBezTo>
-                  <a:close/>
-                </a:path>
-              </a:pathLst>
-            </a:custGeom>
-            <a:solidFill>
-              <a:srgbClr val="666666"/>
-            </a:solidFill>
-            <a:ln w="0" cap="rnd">
-              <a:noFill/>
-              <a:round/>
-            </a:ln>
-          </p:spPr>
-        </p:sp>
-        <p:sp>
-          <p:nvSpPr>
-            <p:cNvPr id="55" name="right Speaker column 2 row 1 18"/>
-            <p:cNvSpPr/>
-            <p:nvPr/>
-          </p:nvSpPr>
-          <p:spPr>
-            <a:xfrm>
-              <a:off x="8360436" y="1655670"/>
-              <a:ext cx="21198" cy="69349"/>
-            </a:xfrm>
-            <a:custGeom>
-              <a:avLst/>
-              <a:gdLst/>
-              <a:ahLst/>
-              <a:cxnLst/>
-              <a:rect l="0" t="0" r="r" b="b"/>
-              <a:pathLst>
-                <a:path w="21198" h="69349" fill="norm">
-                  <a:moveTo>
-                    <a:pt x="21198" y="43608"/>
-                  </a:moveTo>
-                  <a:cubicBezTo>
-                    <a:pt x="21198" y="27255"/>
-                    <a:pt x="16353" y="9691"/>
-                    <a:pt x="10599" y="4845"/>
-                  </a:cubicBezTo>
-                  <a:cubicBezTo>
-                    <a:pt x="4845" y="0"/>
-                    <a:pt x="0" y="9085"/>
-                    <a:pt x="0" y="25438"/>
-                  </a:cubicBezTo>
-                  <a:cubicBezTo>
-                    <a:pt x="0" y="41791"/>
-                    <a:pt x="4845" y="59053"/>
-                    <a:pt x="10599" y="64201"/>
-                  </a:cubicBezTo>
-                  <a:cubicBezTo>
-                    <a:pt x="16353" y="69349"/>
-                    <a:pt x="21198" y="59961"/>
-                    <a:pt x="21198" y="43608"/>
-                  </a:cubicBezTo>
-                  <a:close/>
-                </a:path>
-              </a:pathLst>
-            </a:custGeom>
-            <a:solidFill>
-              <a:srgbClr val="666666"/>
-            </a:solidFill>
-            <a:ln w="0" cap="rnd">
-              <a:noFill/>
-              <a:round/>
-            </a:ln>
-          </p:spPr>
-        </p:sp>
-        <p:sp>
-          <p:nvSpPr>
-            <p:cNvPr id="56" name="right Speaker column 2 row 1 19"/>
-            <p:cNvSpPr/>
-            <p:nvPr/>
-          </p:nvSpPr>
-          <p:spPr>
-            <a:xfrm>
-              <a:off x="8360436" y="1751971"/>
-              <a:ext cx="21198" cy="69652"/>
-            </a:xfrm>
-            <a:custGeom>
-              <a:avLst/>
-              <a:gdLst/>
-              <a:ahLst/>
-              <a:cxnLst/>
-              <a:rect l="0" t="0" r="r" b="b"/>
-              <a:pathLst>
-                <a:path w="21198" h="69652" fill="norm">
-                  <a:moveTo>
-                    <a:pt x="21198" y="44214"/>
-                  </a:moveTo>
-                  <a:cubicBezTo>
-                    <a:pt x="21198" y="27861"/>
-                    <a:pt x="16353" y="10296"/>
-                    <a:pt x="10599" y="5148"/>
-                  </a:cubicBezTo>
-                  <a:cubicBezTo>
-                    <a:pt x="4845" y="0"/>
-                    <a:pt x="0" y="9085"/>
-                    <a:pt x="0" y="25438"/>
-                  </a:cubicBezTo>
-                  <a:cubicBezTo>
-                    <a:pt x="0" y="41791"/>
-                    <a:pt x="4845" y="59356"/>
-                    <a:pt x="10599" y="64504"/>
-                  </a:cubicBezTo>
-                  <a:cubicBezTo>
-                    <a:pt x="16353" y="69652"/>
-                    <a:pt x="21198" y="60567"/>
-                    <a:pt x="21198" y="44214"/>
-                  </a:cubicBezTo>
-                  <a:close/>
-                </a:path>
-              </a:pathLst>
-            </a:custGeom>
-            <a:solidFill>
-              <a:srgbClr val="666666"/>
-            </a:solidFill>
-            <a:ln w="0" cap="rnd">
-              <a:noFill/>
-              <a:round/>
-            </a:ln>
-          </p:spPr>
-        </p:sp>
-        <p:sp>
-          <p:nvSpPr>
-            <p:cNvPr id="57" name="right Speaker column 2 row 1 20"/>
-            <p:cNvSpPr/>
-            <p:nvPr/>
-          </p:nvSpPr>
-          <p:spPr>
-            <a:xfrm>
-              <a:off x="8360436" y="1848878"/>
-              <a:ext cx="21198" cy="69652"/>
-            </a:xfrm>
-            <a:custGeom>
-              <a:avLst/>
-              <a:gdLst/>
-              <a:ahLst/>
-              <a:cxnLst/>
-              <a:rect l="0" t="0" r="r" b="b"/>
-              <a:pathLst>
-                <a:path w="21198" h="69652" fill="norm">
-                  <a:moveTo>
-                    <a:pt x="21198" y="44214"/>
-                  </a:moveTo>
-                  <a:cubicBezTo>
-                    <a:pt x="21198" y="27861"/>
-                    <a:pt x="16353" y="10296"/>
-                    <a:pt x="10599" y="5148"/>
-                  </a:cubicBezTo>
-                  <a:cubicBezTo>
-                    <a:pt x="4845" y="0"/>
-                    <a:pt x="0" y="9085"/>
-                    <a:pt x="0" y="25438"/>
-                  </a:cubicBezTo>
-                  <a:cubicBezTo>
-                    <a:pt x="0" y="41791"/>
-                    <a:pt x="4845" y="59356"/>
-                    <a:pt x="10599" y="64504"/>
-                  </a:cubicBezTo>
-                  <a:cubicBezTo>
-                    <a:pt x="16353" y="69652"/>
-                    <a:pt x="21198" y="60567"/>
-                    <a:pt x="21198" y="44214"/>
-                  </a:cubicBezTo>
-                  <a:close/>
-                </a:path>
-              </a:pathLst>
-            </a:custGeom>
-            <a:solidFill>
-              <a:srgbClr val="666666"/>
-            </a:solidFill>
-            <a:ln w="0" cap="rnd">
-              <a:noFill/>
-              <a:round/>
-            </a:ln>
-          </p:spPr>
-        </p:sp>
-        <p:sp>
-          <p:nvSpPr>
-            <p:cNvPr id="58" name="right Speaker column 2 row 1 21"/>
-            <p:cNvSpPr/>
-            <p:nvPr/>
-          </p:nvSpPr>
-          <p:spPr>
-            <a:xfrm>
-              <a:off x="8360436" y="1945180"/>
-              <a:ext cx="21198" cy="69955"/>
-            </a:xfrm>
-            <a:custGeom>
-              <a:avLst/>
-              <a:gdLst/>
-              <a:ahLst/>
-              <a:cxnLst/>
-              <a:rect l="0" t="0" r="r" b="b"/>
-              <a:pathLst>
-                <a:path w="21198" h="69955" fill="norm">
-                  <a:moveTo>
-                    <a:pt x="21198" y="44820"/>
-                  </a:moveTo>
-                  <a:cubicBezTo>
-                    <a:pt x="21198" y="28467"/>
-                    <a:pt x="16353" y="10902"/>
-                    <a:pt x="10599" y="5451"/>
-                  </a:cubicBezTo>
-                  <a:cubicBezTo>
-                    <a:pt x="4845" y="0"/>
-                    <a:pt x="0" y="9085"/>
-                    <a:pt x="0" y="25741"/>
-                  </a:cubicBezTo>
-                  <a:cubicBezTo>
-                    <a:pt x="0" y="42397"/>
-                    <a:pt x="4845" y="59659"/>
-                    <a:pt x="10599" y="64807"/>
-                  </a:cubicBezTo>
-                  <a:cubicBezTo>
-                    <a:pt x="16353" y="69955"/>
-                    <a:pt x="21198" y="61173"/>
-                    <a:pt x="21198" y="44820"/>
-                  </a:cubicBezTo>
-                  <a:close/>
-                </a:path>
-              </a:pathLst>
-            </a:custGeom>
-            <a:solidFill>
-              <a:srgbClr val="666666"/>
-            </a:solidFill>
-            <a:ln w="0" cap="rnd">
-              <a:noFill/>
-              <a:round/>
-            </a:ln>
-          </p:spPr>
-        </p:sp>
-        <p:sp>
-          <p:nvSpPr>
-            <p:cNvPr id="59" name="right Speaker column 2 row 1 22"/>
-            <p:cNvSpPr/>
-            <p:nvPr/>
-          </p:nvSpPr>
-          <p:spPr>
-            <a:xfrm>
-              <a:off x="8360436" y="2041784"/>
-              <a:ext cx="21198" cy="70258"/>
-            </a:xfrm>
-            <a:custGeom>
-              <a:avLst/>
-              <a:gdLst/>
-              <a:ahLst/>
-              <a:cxnLst/>
-              <a:rect l="0" t="0" r="r" b="b"/>
-              <a:pathLst>
-                <a:path w="21198" h="70258" fill="norm">
-                  <a:moveTo>
-                    <a:pt x="21198" y="44820"/>
-                  </a:moveTo>
-                  <a:cubicBezTo>
-                    <a:pt x="21198" y="28467"/>
-                    <a:pt x="16353" y="10902"/>
-                    <a:pt x="10599" y="5451"/>
-                  </a:cubicBezTo>
-                  <a:cubicBezTo>
-                    <a:pt x="4845" y="0"/>
-                    <a:pt x="0" y="9085"/>
-                    <a:pt x="0" y="25438"/>
-                  </a:cubicBezTo>
-                  <a:cubicBezTo>
-                    <a:pt x="0" y="41791"/>
-                    <a:pt x="4845" y="59356"/>
-                    <a:pt x="10599" y="64807"/>
-                  </a:cubicBezTo>
-                  <a:cubicBezTo>
-                    <a:pt x="16353" y="70258"/>
-                    <a:pt x="21198" y="61173"/>
-                    <a:pt x="21198" y="44820"/>
-                  </a:cubicBezTo>
-                  <a:close/>
-                </a:path>
-              </a:pathLst>
-            </a:custGeom>
-            <a:solidFill>
-              <a:srgbClr val="666666"/>
-            </a:solidFill>
-            <a:ln w="0" cap="rnd">
-              <a:noFill/>
-              <a:round/>
-            </a:ln>
-          </p:spPr>
-        </p:sp>
-        <p:sp>
-          <p:nvSpPr>
-            <p:cNvPr id="60" name="right Speaker column 2 row 1 23"/>
-            <p:cNvSpPr/>
-            <p:nvPr/>
-          </p:nvSpPr>
-          <p:spPr>
-            <a:xfrm>
-              <a:off x="8390719" y="1438537"/>
-              <a:ext cx="21198" cy="69349"/>
-            </a:xfrm>
-            <a:custGeom>
-              <a:avLst/>
-              <a:gdLst/>
-              <a:ahLst/>
-              <a:cxnLst/>
-              <a:rect l="0" t="0" r="r" b="b"/>
-              <a:pathLst>
-                <a:path w="21198" h="69349" fill="norm">
-                  <a:moveTo>
-                    <a:pt x="21198" y="43608"/>
-                  </a:moveTo>
-                  <a:cubicBezTo>
-                    <a:pt x="21198" y="27255"/>
-                    <a:pt x="16353" y="9691"/>
-                    <a:pt x="10599" y="4845"/>
-                  </a:cubicBezTo>
-                  <a:cubicBezTo>
-                    <a:pt x="4845" y="0"/>
-                    <a:pt x="0" y="9388"/>
-                    <a:pt x="0" y="25741"/>
-                  </a:cubicBezTo>
-                  <a:cubicBezTo>
-                    <a:pt x="0" y="42094"/>
-                    <a:pt x="4845" y="59356"/>
-                    <a:pt x="10599" y="64504"/>
-                  </a:cubicBezTo>
-                  <a:cubicBezTo>
-                    <a:pt x="16656" y="69349"/>
-                    <a:pt x="21198" y="59961"/>
-                    <a:pt x="21198" y="43608"/>
-                  </a:cubicBezTo>
-                  <a:close/>
-                </a:path>
-              </a:pathLst>
-            </a:custGeom>
-            <a:solidFill>
-              <a:srgbClr val="666666"/>
-            </a:solidFill>
-            <a:ln w="0" cap="rnd">
-              <a:noFill/>
-              <a:round/>
-            </a:ln>
-          </p:spPr>
-        </p:sp>
-        <p:sp>
-          <p:nvSpPr>
-            <p:cNvPr id="61" name="right Speaker column 2 row 1 24"/>
-            <p:cNvSpPr/>
-            <p:nvPr/>
-          </p:nvSpPr>
-          <p:spPr>
-            <a:xfrm>
-              <a:off x="8390719" y="1536050"/>
-              <a:ext cx="21198" cy="69349"/>
-            </a:xfrm>
-            <a:custGeom>
-              <a:avLst/>
-              <a:gdLst/>
-              <a:ahLst/>
-              <a:cxnLst/>
-              <a:rect l="0" t="0" r="r" b="b"/>
-              <a:pathLst>
-                <a:path w="21198" h="69349" fill="norm">
-                  <a:moveTo>
-                    <a:pt x="21198" y="43608"/>
-                  </a:moveTo>
-                  <a:cubicBezTo>
-                    <a:pt x="21198" y="27255"/>
-                    <a:pt x="16353" y="9691"/>
-                    <a:pt x="10599" y="4845"/>
-                  </a:cubicBezTo>
-                  <a:cubicBezTo>
-                    <a:pt x="4543" y="0"/>
-                    <a:pt x="0" y="9388"/>
-                    <a:pt x="0" y="25741"/>
-                  </a:cubicBezTo>
-                  <a:cubicBezTo>
-                    <a:pt x="0" y="42094"/>
-                    <a:pt x="4845" y="59659"/>
-                    <a:pt x="10599" y="64504"/>
-                  </a:cubicBezTo>
-                  <a:cubicBezTo>
-                    <a:pt x="16656" y="69349"/>
-                    <a:pt x="21198" y="60264"/>
-                    <a:pt x="21198" y="43608"/>
-                  </a:cubicBezTo>
-                  <a:close/>
-                </a:path>
-              </a:pathLst>
-            </a:custGeom>
-            <a:solidFill>
-              <a:srgbClr val="666666"/>
-            </a:solidFill>
-            <a:ln w="0" cap="rnd">
-              <a:noFill/>
-              <a:round/>
-            </a:ln>
-          </p:spPr>
-        </p:sp>
-        <p:sp>
-          <p:nvSpPr>
-            <p:cNvPr id="62" name="right Speaker column 2 row 1 25"/>
-            <p:cNvSpPr/>
-            <p:nvPr/>
-          </p:nvSpPr>
-          <p:spPr>
-            <a:xfrm>
-              <a:off x="8390719" y="1632654"/>
-              <a:ext cx="21198" cy="69652"/>
-            </a:xfrm>
-            <a:custGeom>
-              <a:avLst/>
-              <a:gdLst/>
-              <a:ahLst/>
-              <a:cxnLst/>
-              <a:rect l="0" t="0" r="r" b="b"/>
-              <a:pathLst>
-                <a:path w="21198" h="69652" fill="norm">
-                  <a:moveTo>
-                    <a:pt x="21198" y="44214"/>
-                  </a:moveTo>
-                  <a:cubicBezTo>
-                    <a:pt x="21198" y="27861"/>
-                    <a:pt x="16353" y="10296"/>
-                    <a:pt x="10599" y="5148"/>
-                  </a:cubicBezTo>
-                  <a:cubicBezTo>
-                    <a:pt x="4543" y="0"/>
-                    <a:pt x="0" y="9388"/>
-                    <a:pt x="0" y="25741"/>
-                  </a:cubicBezTo>
-                  <a:cubicBezTo>
-                    <a:pt x="0" y="42094"/>
-                    <a:pt x="4845" y="59659"/>
-                    <a:pt x="10599" y="64504"/>
-                  </a:cubicBezTo>
-                  <a:cubicBezTo>
-                    <a:pt x="16656" y="69652"/>
-                    <a:pt x="21198" y="60264"/>
-                    <a:pt x="21198" y="43911"/>
-                  </a:cubicBezTo>
-                  <a:close/>
-                </a:path>
-              </a:pathLst>
-            </a:custGeom>
-            <a:solidFill>
-              <a:srgbClr val="666666"/>
-            </a:solidFill>
-            <a:ln w="0" cap="rnd">
-              <a:noFill/>
-              <a:round/>
-            </a:ln>
-          </p:spPr>
-        </p:sp>
-        <p:sp>
-          <p:nvSpPr>
-            <p:cNvPr id="63" name="right Speaker column 2 row 1 26"/>
-            <p:cNvSpPr/>
-            <p:nvPr/>
-          </p:nvSpPr>
-          <p:spPr>
-            <a:xfrm>
-              <a:off x="8390719" y="1729864"/>
-              <a:ext cx="21198" cy="69955"/>
-            </a:xfrm>
-            <a:custGeom>
-              <a:avLst/>
-              <a:gdLst/>
-              <a:ahLst/>
-              <a:cxnLst/>
-              <a:rect l="0" t="0" r="r" b="b"/>
-              <a:pathLst>
-                <a:path w="21198" h="69955" fill="norm">
-                  <a:moveTo>
-                    <a:pt x="21198" y="44214"/>
-                  </a:moveTo>
-                  <a:cubicBezTo>
-                    <a:pt x="21198" y="27861"/>
-                    <a:pt x="16353" y="10296"/>
-                    <a:pt x="10599" y="5148"/>
-                  </a:cubicBezTo>
-                  <a:cubicBezTo>
-                    <a:pt x="4543" y="0"/>
-                    <a:pt x="0" y="9388"/>
-                    <a:pt x="0" y="25741"/>
-                  </a:cubicBezTo>
-                  <a:cubicBezTo>
-                    <a:pt x="0" y="42094"/>
-                    <a:pt x="4845" y="59659"/>
-                    <a:pt x="10599" y="64807"/>
-                  </a:cubicBezTo>
-                  <a:cubicBezTo>
-                    <a:pt x="16656" y="69955"/>
-                    <a:pt x="21198" y="60870"/>
-                    <a:pt x="21198" y="44214"/>
-                  </a:cubicBezTo>
-                  <a:close/>
-                </a:path>
-              </a:pathLst>
-            </a:custGeom>
-            <a:solidFill>
-              <a:srgbClr val="666666"/>
-            </a:solidFill>
-            <a:ln w="0" cap="rnd">
-              <a:noFill/>
-              <a:round/>
-            </a:ln>
-          </p:spPr>
-        </p:sp>
-        <p:sp>
-          <p:nvSpPr>
-            <p:cNvPr id="64" name="right Speaker column 2 row 1 27"/>
-            <p:cNvSpPr/>
-            <p:nvPr/>
-          </p:nvSpPr>
-          <p:spPr>
-            <a:xfrm>
-              <a:off x="8390719" y="1826469"/>
-              <a:ext cx="21198" cy="69955"/>
-            </a:xfrm>
-            <a:custGeom>
-              <a:avLst/>
-              <a:gdLst/>
-              <a:ahLst/>
-              <a:cxnLst/>
-              <a:rect l="0" t="0" r="r" b="b"/>
-              <a:pathLst>
-                <a:path w="21198" h="69955" fill="norm">
-                  <a:moveTo>
-                    <a:pt x="21198" y="44820"/>
-                  </a:moveTo>
-                  <a:cubicBezTo>
-                    <a:pt x="21198" y="28467"/>
-                    <a:pt x="16353" y="10902"/>
-                    <a:pt x="10599" y="5451"/>
-                  </a:cubicBezTo>
-                  <a:cubicBezTo>
-                    <a:pt x="4845" y="0"/>
-                    <a:pt x="0" y="9388"/>
-                    <a:pt x="0" y="25741"/>
-                  </a:cubicBezTo>
-                  <a:cubicBezTo>
-                    <a:pt x="0" y="42094"/>
-                    <a:pt x="4845" y="59659"/>
-                    <a:pt x="10599" y="64807"/>
-                  </a:cubicBezTo>
-                  <a:cubicBezTo>
-                    <a:pt x="16656" y="69955"/>
-                    <a:pt x="21198" y="60870"/>
-                    <a:pt x="21198" y="44517"/>
-                  </a:cubicBezTo>
-                  <a:close/>
-                </a:path>
-              </a:pathLst>
-            </a:custGeom>
-            <a:solidFill>
-              <a:srgbClr val="666666"/>
-            </a:solidFill>
-            <a:ln w="0" cap="rnd">
-              <a:noFill/>
-              <a:round/>
-            </a:ln>
-          </p:spPr>
-        </p:sp>
-        <p:sp>
-          <p:nvSpPr>
-            <p:cNvPr id="65" name="right Speaker column 2 row 1 28"/>
-            <p:cNvSpPr/>
-            <p:nvPr/>
-          </p:nvSpPr>
-          <p:spPr>
-            <a:xfrm>
-              <a:off x="8390719" y="1923982"/>
-              <a:ext cx="21198" cy="70258"/>
-            </a:xfrm>
-            <a:custGeom>
-              <a:avLst/>
-              <a:gdLst/>
-              <a:ahLst/>
-              <a:cxnLst/>
-              <a:rect l="0" t="0" r="r" b="b"/>
-              <a:pathLst>
-                <a:path w="21198" h="70258" fill="norm">
-                  <a:moveTo>
-                    <a:pt x="21198" y="44517"/>
-                  </a:moveTo>
-                  <a:cubicBezTo>
-                    <a:pt x="21198" y="28164"/>
-                    <a:pt x="16353" y="10296"/>
-                    <a:pt x="10599" y="5148"/>
-                  </a:cubicBezTo>
-                  <a:cubicBezTo>
-                    <a:pt x="4543" y="0"/>
-                    <a:pt x="0" y="9085"/>
-                    <a:pt x="0" y="25438"/>
-                  </a:cubicBezTo>
-                  <a:cubicBezTo>
-                    <a:pt x="0" y="41791"/>
-                    <a:pt x="4845" y="59356"/>
-                    <a:pt x="10599" y="64807"/>
-                  </a:cubicBezTo>
-                  <a:cubicBezTo>
-                    <a:pt x="16656" y="70258"/>
-                    <a:pt x="21198" y="61173"/>
-                    <a:pt x="21198" y="44517"/>
-                  </a:cubicBezTo>
-                  <a:close/>
-                </a:path>
-              </a:pathLst>
-            </a:custGeom>
-            <a:solidFill>
-              <a:srgbClr val="666666"/>
-            </a:solidFill>
-            <a:ln w="0" cap="rnd">
-              <a:noFill/>
-              <a:round/>
-            </a:ln>
-          </p:spPr>
-        </p:sp>
-        <p:sp>
-          <p:nvSpPr>
-            <p:cNvPr id="66" name="right Speaker column 2 row 1 29"/>
-            <p:cNvSpPr/>
-            <p:nvPr/>
-          </p:nvSpPr>
-          <p:spPr>
-            <a:xfrm>
-              <a:off x="8390719" y="2020889"/>
-              <a:ext cx="21198" cy="70258"/>
-            </a:xfrm>
-            <a:custGeom>
-              <a:avLst/>
-              <a:gdLst/>
-              <a:ahLst/>
-              <a:cxnLst/>
-              <a:rect l="0" t="0" r="r" b="b"/>
-              <a:pathLst>
-                <a:path w="21198" h="70258" fill="norm">
-                  <a:moveTo>
-                    <a:pt x="21198" y="44820"/>
-                  </a:moveTo>
-                  <a:cubicBezTo>
-                    <a:pt x="21198" y="28467"/>
-                    <a:pt x="16353" y="10599"/>
-                    <a:pt x="10599" y="5451"/>
-                  </a:cubicBezTo>
-                  <a:cubicBezTo>
-                    <a:pt x="4543" y="0"/>
-                    <a:pt x="0" y="9085"/>
-                    <a:pt x="0" y="25438"/>
-                  </a:cubicBezTo>
-                  <a:cubicBezTo>
-                    <a:pt x="0" y="41791"/>
-                    <a:pt x="4845" y="59659"/>
-                    <a:pt x="10599" y="64807"/>
-                  </a:cubicBezTo>
-                  <a:cubicBezTo>
-                    <a:pt x="16656" y="70258"/>
-                    <a:pt x="21198" y="61173"/>
-                    <a:pt x="21198" y="44820"/>
-                  </a:cubicBezTo>
-                  <a:close/>
-                </a:path>
-              </a:pathLst>
-            </a:custGeom>
-            <a:solidFill>
-              <a:srgbClr val="666666"/>
-            </a:solidFill>
-            <a:ln w="0" cap="rnd">
-              <a:noFill/>
-              <a:round/>
-            </a:ln>
-          </p:spPr>
-        </p:sp>
-        <p:sp>
-          <p:nvSpPr>
-            <p:cNvPr id="67" name="right Speaker column 2 row 1 30"/>
-            <p:cNvSpPr/>
-            <p:nvPr/>
-          </p:nvSpPr>
-          <p:spPr>
-            <a:xfrm>
-              <a:off x="8420700" y="1512126"/>
-              <a:ext cx="21804" cy="69652"/>
-            </a:xfrm>
-            <a:custGeom>
-              <a:avLst/>
-              <a:gdLst/>
-              <a:ahLst/>
-              <a:cxnLst/>
-              <a:rect l="0" t="0" r="r" b="b"/>
-              <a:pathLst>
-                <a:path w="21804" h="69652" fill="norm">
-                  <a:moveTo>
-                    <a:pt x="21804" y="44214"/>
-                  </a:moveTo>
-                  <a:cubicBezTo>
-                    <a:pt x="21804" y="27558"/>
-                    <a:pt x="16959" y="10296"/>
-                    <a:pt x="10902" y="5148"/>
-                  </a:cubicBezTo>
-                  <a:cubicBezTo>
-                    <a:pt x="4845" y="0"/>
-                    <a:pt x="0" y="9691"/>
-                    <a:pt x="0" y="26044"/>
-                  </a:cubicBezTo>
-                  <a:cubicBezTo>
-                    <a:pt x="0" y="42397"/>
-                    <a:pt x="4845" y="59961"/>
-                    <a:pt x="10902" y="64807"/>
-                  </a:cubicBezTo>
-                  <a:cubicBezTo>
-                    <a:pt x="16959" y="69652"/>
-                    <a:pt x="21804" y="60567"/>
-                    <a:pt x="21804" y="43911"/>
-                  </a:cubicBezTo>
-                  <a:close/>
-                </a:path>
-              </a:pathLst>
-            </a:custGeom>
-            <a:solidFill>
-              <a:srgbClr val="666666"/>
-            </a:solidFill>
-            <a:ln w="0" cap="rnd">
-              <a:noFill/>
-              <a:round/>
-            </a:ln>
-          </p:spPr>
-        </p:sp>
-        <p:sp>
-          <p:nvSpPr>
-            <p:cNvPr id="68" name="right Speaker column 2 row 1 31"/>
-            <p:cNvSpPr/>
-            <p:nvPr/>
-          </p:nvSpPr>
-          <p:spPr>
-            <a:xfrm>
-              <a:off x="8420700" y="1609639"/>
-              <a:ext cx="21804" cy="70258"/>
-            </a:xfrm>
-            <a:custGeom>
-              <a:avLst/>
-              <a:gdLst/>
-              <a:ahLst/>
-              <a:cxnLst/>
-              <a:rect l="0" t="0" r="r" b="b"/>
-              <a:pathLst>
-                <a:path w="21804" h="70258" fill="norm">
-                  <a:moveTo>
-                    <a:pt x="21804" y="44214"/>
-                  </a:moveTo>
-                  <a:cubicBezTo>
-                    <a:pt x="21804" y="27558"/>
-                    <a:pt x="16959" y="10296"/>
-                    <a:pt x="10902" y="5148"/>
-                  </a:cubicBezTo>
-                  <a:cubicBezTo>
-                    <a:pt x="4845" y="0"/>
-                    <a:pt x="0" y="9388"/>
-                    <a:pt x="0" y="26044"/>
-                  </a:cubicBezTo>
-                  <a:cubicBezTo>
-                    <a:pt x="0" y="42700"/>
-                    <a:pt x="4845" y="59961"/>
-                    <a:pt x="10902" y="65110"/>
-                  </a:cubicBezTo>
-                  <a:cubicBezTo>
-                    <a:pt x="16959" y="70258"/>
-                    <a:pt x="21804" y="60870"/>
-                    <a:pt x="21804" y="44214"/>
-                  </a:cubicBezTo>
-                  <a:close/>
-                </a:path>
-              </a:pathLst>
-            </a:custGeom>
-            <a:solidFill>
-              <a:srgbClr val="666666"/>
-            </a:solidFill>
-            <a:ln w="0" cap="rnd">
-              <a:noFill/>
-              <a:round/>
-            </a:ln>
-          </p:spPr>
-        </p:sp>
-        <p:sp>
-          <p:nvSpPr>
-            <p:cNvPr id="69" name="right Speaker column 2 row 1 32"/>
-            <p:cNvSpPr/>
-            <p:nvPr/>
-          </p:nvSpPr>
-          <p:spPr>
-            <a:xfrm>
-              <a:off x="8420700" y="1707757"/>
-              <a:ext cx="21804" cy="69652"/>
-            </a:xfrm>
-            <a:custGeom>
-              <a:avLst/>
-              <a:gdLst/>
-              <a:ahLst/>
-              <a:cxnLst/>
-              <a:rect l="0" t="0" r="r" b="b"/>
-              <a:pathLst>
-                <a:path w="21804" h="69652" fill="norm">
-                  <a:moveTo>
-                    <a:pt x="21804" y="43911"/>
-                  </a:moveTo>
-                  <a:cubicBezTo>
-                    <a:pt x="21804" y="27255"/>
-                    <a:pt x="16959" y="9691"/>
-                    <a:pt x="10902" y="4845"/>
-                  </a:cubicBezTo>
-                  <a:cubicBezTo>
-                    <a:pt x="4845" y="0"/>
-                    <a:pt x="0" y="9085"/>
-                    <a:pt x="0" y="25438"/>
-                  </a:cubicBezTo>
-                  <a:cubicBezTo>
-                    <a:pt x="0" y="41791"/>
-                    <a:pt x="4845" y="59356"/>
-                    <a:pt x="10902" y="64504"/>
-                  </a:cubicBezTo>
-                  <a:cubicBezTo>
-                    <a:pt x="16959" y="69652"/>
-                    <a:pt x="21804" y="60567"/>
-                    <a:pt x="21804" y="43911"/>
-                  </a:cubicBezTo>
-                  <a:close/>
-                </a:path>
-              </a:pathLst>
-            </a:custGeom>
-            <a:solidFill>
-              <a:srgbClr val="666666"/>
-            </a:solidFill>
-            <a:ln w="0" cap="rnd">
-              <a:noFill/>
-              <a:round/>
-            </a:ln>
-          </p:spPr>
-        </p:sp>
-        <p:sp>
-          <p:nvSpPr>
-            <p:cNvPr id="70" name="right Speaker column 2 row 1 33"/>
-            <p:cNvSpPr/>
-            <p:nvPr/>
-          </p:nvSpPr>
-          <p:spPr>
-            <a:xfrm>
-              <a:off x="8420700" y="1804664"/>
-              <a:ext cx="21804" cy="70258"/>
-            </a:xfrm>
-            <a:custGeom>
-              <a:avLst/>
-              <a:gdLst/>
-              <a:ahLst/>
-              <a:cxnLst/>
-              <a:rect l="0" t="0" r="r" b="b"/>
-              <a:pathLst>
-                <a:path w="21804" h="70258" fill="norm">
-                  <a:moveTo>
-                    <a:pt x="21804" y="44517"/>
-                  </a:moveTo>
-                  <a:cubicBezTo>
-                    <a:pt x="21804" y="27861"/>
-                    <a:pt x="16959" y="10296"/>
-                    <a:pt x="10902" y="5148"/>
-                  </a:cubicBezTo>
-                  <a:cubicBezTo>
-                    <a:pt x="4845" y="0"/>
-                    <a:pt x="0" y="9085"/>
-                    <a:pt x="0" y="25741"/>
-                  </a:cubicBezTo>
-                  <a:cubicBezTo>
-                    <a:pt x="0" y="42397"/>
-                    <a:pt x="4845" y="59961"/>
-                    <a:pt x="10902" y="65110"/>
-                  </a:cubicBezTo>
-                  <a:cubicBezTo>
-                    <a:pt x="16959" y="70258"/>
-                    <a:pt x="21804" y="61173"/>
-                    <a:pt x="21804" y="44517"/>
-                  </a:cubicBezTo>
-                  <a:close/>
-                </a:path>
-              </a:pathLst>
-            </a:custGeom>
-            <a:solidFill>
-              <a:srgbClr val="666666"/>
-            </a:solidFill>
-            <a:ln w="0" cap="rnd">
-              <a:noFill/>
-              <a:round/>
-            </a:ln>
-          </p:spPr>
-        </p:sp>
-        <p:sp>
-          <p:nvSpPr>
-            <p:cNvPr id="71" name="right Speaker column 2 row 1 34"/>
-            <p:cNvSpPr/>
-            <p:nvPr/>
-          </p:nvSpPr>
-          <p:spPr>
-            <a:xfrm>
-              <a:off x="8420700" y="1902480"/>
-              <a:ext cx="21804" cy="69955"/>
-            </a:xfrm>
-            <a:custGeom>
-              <a:avLst/>
-              <a:gdLst/>
-              <a:ahLst/>
-              <a:cxnLst/>
-              <a:rect l="0" t="0" r="r" b="b"/>
-              <a:pathLst>
-                <a:path w="21804" h="69955" fill="norm">
-                  <a:moveTo>
-                    <a:pt x="21804" y="44517"/>
-                  </a:moveTo>
-                  <a:cubicBezTo>
-                    <a:pt x="21804" y="27861"/>
-                    <a:pt x="16959" y="10296"/>
-                    <a:pt x="10902" y="5148"/>
-                  </a:cubicBezTo>
-                  <a:cubicBezTo>
-                    <a:pt x="4845" y="0"/>
-                    <a:pt x="0" y="9085"/>
-                    <a:pt x="0" y="25438"/>
-                  </a:cubicBezTo>
-                  <a:cubicBezTo>
-                    <a:pt x="0" y="41791"/>
-                    <a:pt x="4845" y="59659"/>
-                    <a:pt x="10902" y="64807"/>
-                  </a:cubicBezTo>
-                  <a:cubicBezTo>
-                    <a:pt x="16959" y="69955"/>
-                    <a:pt x="21804" y="60870"/>
-                    <a:pt x="21804" y="44517"/>
-                  </a:cubicBezTo>
-                  <a:close/>
-                </a:path>
-              </a:pathLst>
-            </a:custGeom>
-            <a:solidFill>
-              <a:srgbClr val="666666"/>
-            </a:solidFill>
-            <a:ln w="0" cap="rnd">
-              <a:noFill/>
-              <a:round/>
-            </a:ln>
-          </p:spPr>
-        </p:sp>
-        <p:sp>
-          <p:nvSpPr>
-            <p:cNvPr id="72" name="right Speaker column 2 row 1 35"/>
-            <p:cNvSpPr/>
-            <p:nvPr/>
-          </p:nvSpPr>
-          <p:spPr>
-            <a:xfrm>
-              <a:off x="8420700" y="1999387"/>
-              <a:ext cx="21804" cy="70863"/>
-            </a:xfrm>
-            <a:custGeom>
-              <a:avLst/>
-              <a:gdLst/>
-              <a:ahLst/>
-              <a:cxnLst/>
-              <a:rect l="0" t="0" r="r" b="b"/>
-              <a:pathLst>
-                <a:path w="21804" h="70863" fill="norm">
-                  <a:moveTo>
-                    <a:pt x="21804" y="45122"/>
-                  </a:moveTo>
-                  <a:cubicBezTo>
-                    <a:pt x="21804" y="28467"/>
-                    <a:pt x="16959" y="10902"/>
-                    <a:pt x="10902" y="5451"/>
-                  </a:cubicBezTo>
-                  <a:cubicBezTo>
-                    <a:pt x="4845" y="0"/>
-                    <a:pt x="0" y="9085"/>
-                    <a:pt x="0" y="25741"/>
-                  </a:cubicBezTo>
-                  <a:cubicBezTo>
-                    <a:pt x="0" y="42397"/>
-                    <a:pt x="4845" y="59961"/>
-                    <a:pt x="10902" y="65412"/>
-                  </a:cubicBezTo>
-                  <a:cubicBezTo>
-                    <a:pt x="16959" y="70863"/>
-                    <a:pt x="21804" y="61778"/>
-                    <a:pt x="21804" y="45122"/>
-                  </a:cubicBezTo>
-                  <a:close/>
-                </a:path>
-              </a:pathLst>
-            </a:custGeom>
-            <a:solidFill>
-              <a:srgbClr val="666666"/>
-            </a:solidFill>
-            <a:ln w="0" cap="rnd">
-              <a:noFill/>
-              <a:round/>
-            </a:ln>
-          </p:spPr>
-        </p:sp>
-        <p:sp>
-          <p:nvSpPr>
-            <p:cNvPr id="73" name="right Speaker column 2 row 1 36"/>
-            <p:cNvSpPr/>
-            <p:nvPr/>
-          </p:nvSpPr>
-          <p:spPr>
-            <a:xfrm>
-              <a:off x="8451589" y="1586926"/>
-              <a:ext cx="21804" cy="69652"/>
-            </a:xfrm>
-            <a:custGeom>
-              <a:avLst/>
-              <a:gdLst/>
-              <a:ahLst/>
-              <a:cxnLst/>
-              <a:rect l="0" t="0" r="r" b="b"/>
-              <a:pathLst>
-                <a:path w="21804" h="69652" fill="norm">
-                  <a:moveTo>
-                    <a:pt x="21804" y="43911"/>
-                  </a:moveTo>
-                  <a:cubicBezTo>
-                    <a:pt x="21804" y="27255"/>
-                    <a:pt x="16959" y="9691"/>
-                    <a:pt x="10902" y="4845"/>
-                  </a:cubicBezTo>
-                  <a:cubicBezTo>
-                    <a:pt x="4845" y="0"/>
-                    <a:pt x="0" y="9085"/>
-                    <a:pt x="0" y="25741"/>
-                  </a:cubicBezTo>
-                  <a:cubicBezTo>
-                    <a:pt x="0" y="42397"/>
-                    <a:pt x="4845" y="59961"/>
-                    <a:pt x="10902" y="64807"/>
-                  </a:cubicBezTo>
-                  <a:cubicBezTo>
-                    <a:pt x="16959" y="69652"/>
-                    <a:pt x="21804" y="60567"/>
-                    <a:pt x="21804" y="43911"/>
-                  </a:cubicBezTo>
-                  <a:close/>
-                </a:path>
-              </a:pathLst>
-            </a:custGeom>
-            <a:solidFill>
-              <a:srgbClr val="666666"/>
-            </a:solidFill>
-            <a:ln w="0" cap="rnd">
-              <a:noFill/>
-              <a:round/>
-            </a:ln>
-          </p:spPr>
-        </p:sp>
-        <p:sp>
-          <p:nvSpPr>
-            <p:cNvPr id="74" name="right Speaker column 2 row 1 37"/>
-            <p:cNvSpPr/>
-            <p:nvPr/>
-          </p:nvSpPr>
-          <p:spPr>
-            <a:xfrm>
-              <a:off x="8451589" y="1684439"/>
-              <a:ext cx="21804" cy="70561"/>
-            </a:xfrm>
-            <a:custGeom>
-              <a:avLst/>
-              <a:gdLst/>
-              <a:ahLst/>
-              <a:cxnLst/>
-              <a:rect l="0" t="0" r="r" b="b"/>
-              <a:pathLst>
-                <a:path w="21804" h="70561" fill="norm">
-                  <a:moveTo>
-                    <a:pt x="21804" y="44517"/>
-                  </a:moveTo>
-                  <a:cubicBezTo>
-                    <a:pt x="21804" y="27861"/>
-                    <a:pt x="16959" y="10296"/>
-                    <a:pt x="10902" y="5148"/>
-                  </a:cubicBezTo>
-                  <a:cubicBezTo>
-                    <a:pt x="4845" y="0"/>
-                    <a:pt x="0" y="9388"/>
-                    <a:pt x="0" y="26044"/>
-                  </a:cubicBezTo>
-                  <a:cubicBezTo>
-                    <a:pt x="0" y="42700"/>
-                    <a:pt x="4845" y="60264"/>
-                    <a:pt x="10902" y="65412"/>
-                  </a:cubicBezTo>
-                  <a:cubicBezTo>
-                    <a:pt x="16959" y="70561"/>
-                    <a:pt x="21804" y="61173"/>
-                    <a:pt x="21804" y="44517"/>
-                  </a:cubicBezTo>
-                  <a:close/>
-                </a:path>
-              </a:pathLst>
-            </a:custGeom>
-            <a:solidFill>
-              <a:srgbClr val="666666"/>
-            </a:solidFill>
-            <a:ln w="0" cap="rnd">
-              <a:noFill/>
-              <a:round/>
-            </a:ln>
-          </p:spPr>
-        </p:sp>
-        <p:sp>
-          <p:nvSpPr>
-            <p:cNvPr id="75" name="right Speaker column 2 row 1 38"/>
-            <p:cNvSpPr/>
-            <p:nvPr/>
-          </p:nvSpPr>
-          <p:spPr>
-            <a:xfrm>
-              <a:off x="8451589" y="1782558"/>
-              <a:ext cx="21804" cy="70258"/>
-            </a:xfrm>
-            <a:custGeom>
-              <a:avLst/>
-              <a:gdLst/>
-              <a:ahLst/>
-              <a:cxnLst/>
-              <a:rect l="0" t="0" r="r" b="b"/>
-              <a:pathLst>
-                <a:path w="21804" h="70258" fill="norm">
-                  <a:moveTo>
-                    <a:pt x="21804" y="44517"/>
-                  </a:moveTo>
-                  <a:cubicBezTo>
-                    <a:pt x="21804" y="27861"/>
-                    <a:pt x="16959" y="10296"/>
-                    <a:pt x="10902" y="5148"/>
-                  </a:cubicBezTo>
-                  <a:cubicBezTo>
-                    <a:pt x="4845" y="0"/>
-                    <a:pt x="0" y="9085"/>
-                    <a:pt x="0" y="25741"/>
-                  </a:cubicBezTo>
-                  <a:cubicBezTo>
-                    <a:pt x="0" y="42397"/>
-                    <a:pt x="4845" y="59961"/>
-                    <a:pt x="10902" y="65110"/>
-                  </a:cubicBezTo>
-                  <a:cubicBezTo>
-                    <a:pt x="16959" y="70258"/>
-                    <a:pt x="21804" y="61173"/>
-                    <a:pt x="21804" y="44517"/>
-                  </a:cubicBezTo>
-                  <a:close/>
-                </a:path>
-              </a:pathLst>
-            </a:custGeom>
-            <a:solidFill>
-              <a:srgbClr val="666666"/>
-            </a:solidFill>
-            <a:ln w="0" cap="rnd">
-              <a:noFill/>
-              <a:round/>
-            </a:ln>
-          </p:spPr>
-        </p:sp>
-        <p:sp>
-          <p:nvSpPr>
-            <p:cNvPr id="76" name="right Speaker column 2 row 1 39"/>
-            <p:cNvSpPr/>
-            <p:nvPr/>
-          </p:nvSpPr>
-          <p:spPr>
-            <a:xfrm>
-              <a:off x="8451589" y="1880373"/>
-              <a:ext cx="21804" cy="70863"/>
-            </a:xfrm>
-            <a:custGeom>
-              <a:avLst/>
-              <a:gdLst/>
-              <a:ahLst/>
-              <a:cxnLst/>
-              <a:rect l="0" t="0" r="r" b="b"/>
-              <a:pathLst>
-                <a:path w="21804" h="70863" fill="norm">
-                  <a:moveTo>
-                    <a:pt x="21804" y="44820"/>
-                  </a:moveTo>
-                  <a:cubicBezTo>
-                    <a:pt x="21804" y="28164"/>
-                    <a:pt x="16959" y="10296"/>
-                    <a:pt x="10902" y="5148"/>
-                  </a:cubicBezTo>
-                  <a:cubicBezTo>
-                    <a:pt x="4845" y="0"/>
-                    <a:pt x="0" y="9085"/>
-                    <a:pt x="0" y="25741"/>
-                  </a:cubicBezTo>
-                  <a:cubicBezTo>
-                    <a:pt x="0" y="42397"/>
-                    <a:pt x="4845" y="59961"/>
-                    <a:pt x="10902" y="65412"/>
-                  </a:cubicBezTo>
-                  <a:cubicBezTo>
-                    <a:pt x="16959" y="70863"/>
-                    <a:pt x="21804" y="61476"/>
-                    <a:pt x="21804" y="44820"/>
-                  </a:cubicBezTo>
-                  <a:close/>
-                </a:path>
-              </a:pathLst>
-            </a:custGeom>
-            <a:solidFill>
-              <a:srgbClr val="666666"/>
-            </a:solidFill>
-            <a:ln w="0" cap="rnd">
-              <a:noFill/>
-              <a:round/>
-            </a:ln>
-          </p:spPr>
-        </p:sp>
-        <p:sp>
-          <p:nvSpPr>
-            <p:cNvPr id="77" name="right Speaker column 2 row 1 40"/>
-            <p:cNvSpPr/>
-            <p:nvPr/>
-          </p:nvSpPr>
-          <p:spPr>
-            <a:xfrm>
-              <a:off x="8451589" y="1978492"/>
-              <a:ext cx="21804" cy="70561"/>
-            </a:xfrm>
-            <a:custGeom>
-              <a:avLst/>
-              <a:gdLst/>
-              <a:ahLst/>
-              <a:cxnLst/>
-              <a:rect l="0" t="0" r="r" b="b"/>
-              <a:pathLst>
-                <a:path w="21804" h="70561" fill="norm">
-                  <a:moveTo>
-                    <a:pt x="21804" y="44820"/>
-                  </a:moveTo>
-                  <a:cubicBezTo>
-                    <a:pt x="21804" y="28164"/>
-                    <a:pt x="16959" y="10296"/>
-                    <a:pt x="10902" y="5148"/>
-                  </a:cubicBezTo>
-                  <a:cubicBezTo>
-                    <a:pt x="4845" y="0"/>
-                    <a:pt x="0" y="8782"/>
-                    <a:pt x="0" y="25438"/>
-                  </a:cubicBezTo>
-                  <a:cubicBezTo>
-                    <a:pt x="0" y="42094"/>
-                    <a:pt x="4845" y="59659"/>
-                    <a:pt x="10902" y="65110"/>
-                  </a:cubicBezTo>
-                  <a:cubicBezTo>
-                    <a:pt x="16959" y="70561"/>
-                    <a:pt x="21804" y="61476"/>
-                    <a:pt x="21804" y="44820"/>
-                  </a:cubicBezTo>
-                  <a:close/>
-                </a:path>
-              </a:pathLst>
-            </a:custGeom>
-            <a:solidFill>
-              <a:srgbClr val="666666"/>
-            </a:solidFill>
-            <a:ln w="0" cap="rnd">
-              <a:noFill/>
-              <a:round/>
-            </a:ln>
-          </p:spPr>
-        </p:sp>
-        <p:sp>
-          <p:nvSpPr>
-            <p:cNvPr id="78" name="right Speaker column 2 row 1 41"/>
-            <p:cNvSpPr/>
-            <p:nvPr/>
-          </p:nvSpPr>
-          <p:spPr>
-            <a:xfrm>
-              <a:off x="8300777" y="1987577"/>
-              <a:ext cx="21198" cy="69955"/>
-            </a:xfrm>
-            <a:custGeom>
-              <a:avLst/>
-              <a:gdLst/>
-              <a:ahLst/>
-              <a:cxnLst/>
-              <a:rect l="0" t="0" r="r" b="b"/>
-              <a:pathLst>
-                <a:path w="21198" h="69955" fill="norm">
-                  <a:moveTo>
-                    <a:pt x="0" y="25438"/>
-                  </a:moveTo>
-                  <a:cubicBezTo>
-                    <a:pt x="0" y="41791"/>
-                    <a:pt x="4543" y="59053"/>
-                    <a:pt x="10599" y="64504"/>
-                  </a:cubicBezTo>
-                  <a:cubicBezTo>
-                    <a:pt x="16656" y="69955"/>
-                    <a:pt x="21198" y="60870"/>
-                    <a:pt x="21198" y="44517"/>
-                  </a:cubicBezTo>
-                  <a:cubicBezTo>
-                    <a:pt x="21198" y="28164"/>
-                    <a:pt x="16353" y="10902"/>
-                    <a:pt x="10599" y="5451"/>
-                  </a:cubicBezTo>
-                  <a:cubicBezTo>
-                    <a:pt x="4845" y="0"/>
-                    <a:pt x="0" y="9085"/>
-                    <a:pt x="0" y="25438"/>
-                  </a:cubicBezTo>
-                  <a:close/>
-                </a:path>
-              </a:pathLst>
-            </a:custGeom>
-            <a:solidFill>
-              <a:srgbClr val="666666"/>
-            </a:solidFill>
-            <a:ln w="0" cap="rnd">
-              <a:noFill/>
-              <a:round/>
-            </a:ln>
-          </p:spPr>
-        </p:sp>
-        <p:sp>
-          <p:nvSpPr>
-            <p:cNvPr id="79" name="right Speaker column 2 row 1 42"/>
-            <p:cNvSpPr/>
-            <p:nvPr/>
-          </p:nvSpPr>
-          <p:spPr>
-            <a:xfrm>
-              <a:off x="8300777" y="1892184"/>
-              <a:ext cx="21198" cy="69046"/>
-            </a:xfrm>
-            <a:custGeom>
-              <a:avLst/>
-              <a:gdLst/>
-              <a:ahLst/>
-              <a:cxnLst/>
-              <a:rect l="0" t="0" r="r" b="b"/>
-              <a:pathLst>
-                <a:path w="21198" h="69046" fill="norm">
-                  <a:moveTo>
-                    <a:pt x="0" y="25135"/>
-                  </a:moveTo>
-                  <a:cubicBezTo>
-                    <a:pt x="0" y="41488"/>
-                    <a:pt x="4543" y="58750"/>
-                    <a:pt x="10599" y="63898"/>
-                  </a:cubicBezTo>
-                  <a:cubicBezTo>
-                    <a:pt x="16656" y="69046"/>
-                    <a:pt x="21198" y="60264"/>
-                    <a:pt x="21198" y="43911"/>
-                  </a:cubicBezTo>
-                  <a:cubicBezTo>
-                    <a:pt x="21198" y="27558"/>
-                    <a:pt x="16353" y="10296"/>
-                    <a:pt x="10599" y="5148"/>
-                  </a:cubicBezTo>
-                  <a:cubicBezTo>
-                    <a:pt x="4845" y="0"/>
-                    <a:pt x="0" y="9085"/>
-                    <a:pt x="0" y="25135"/>
-                  </a:cubicBezTo>
-                  <a:close/>
-                </a:path>
-              </a:pathLst>
-            </a:custGeom>
-            <a:solidFill>
-              <a:srgbClr val="666666"/>
-            </a:solidFill>
-            <a:ln w="0" cap="rnd">
-              <a:noFill/>
-              <a:round/>
-            </a:ln>
-          </p:spPr>
-        </p:sp>
-        <p:sp>
-          <p:nvSpPr>
-            <p:cNvPr id="80" name="right Speaker column 2 row 1 43"/>
-            <p:cNvSpPr/>
-            <p:nvPr/>
-          </p:nvSpPr>
-          <p:spPr>
-            <a:xfrm>
-              <a:off x="8300777" y="1796185"/>
-              <a:ext cx="21198" cy="69349"/>
-            </a:xfrm>
-            <a:custGeom>
-              <a:avLst/>
-              <a:gdLst/>
-              <a:ahLst/>
-              <a:cxnLst/>
-              <a:rect l="0" t="0" r="r" b="b"/>
-              <a:pathLst>
-                <a:path w="21198" h="69349" fill="norm">
-                  <a:moveTo>
-                    <a:pt x="0" y="25438"/>
-                  </a:moveTo>
-                  <a:cubicBezTo>
-                    <a:pt x="0" y="41791"/>
-                    <a:pt x="4543" y="59053"/>
-                    <a:pt x="10599" y="64201"/>
-                  </a:cubicBezTo>
-                  <a:cubicBezTo>
-                    <a:pt x="16656" y="69349"/>
-                    <a:pt x="21198" y="60264"/>
-                    <a:pt x="21198" y="43911"/>
-                  </a:cubicBezTo>
-                  <a:cubicBezTo>
-                    <a:pt x="21198" y="27558"/>
-                    <a:pt x="16353" y="10296"/>
-                    <a:pt x="10599" y="5148"/>
-                  </a:cubicBezTo>
-                  <a:cubicBezTo>
-                    <a:pt x="4845" y="0"/>
-                    <a:pt x="0" y="9085"/>
-                    <a:pt x="0" y="25438"/>
-                  </a:cubicBezTo>
-                  <a:close/>
-                </a:path>
-              </a:pathLst>
-            </a:custGeom>
-            <a:solidFill>
-              <a:srgbClr val="666666"/>
-            </a:solidFill>
-            <a:ln w="0" cap="rnd">
-              <a:noFill/>
-              <a:round/>
-            </a:ln>
-          </p:spPr>
-        </p:sp>
-        <p:sp>
-          <p:nvSpPr>
-            <p:cNvPr id="81" name="right Speaker column 2 row 1 44"/>
-            <p:cNvSpPr/>
-            <p:nvPr/>
-          </p:nvSpPr>
-          <p:spPr>
-            <a:xfrm>
-              <a:off x="8300777" y="1700792"/>
-              <a:ext cx="21198" cy="68441"/>
-            </a:xfrm>
-            <a:custGeom>
-              <a:avLst/>
-              <a:gdLst/>
-              <a:ahLst/>
-              <a:cxnLst/>
-              <a:rect l="0" t="0" r="r" b="b"/>
-              <a:pathLst>
-                <a:path w="21198" h="68441" fill="norm">
-                  <a:moveTo>
-                    <a:pt x="0" y="25135"/>
-                  </a:moveTo>
-                  <a:cubicBezTo>
-                    <a:pt x="0" y="41488"/>
-                    <a:pt x="4543" y="58750"/>
-                    <a:pt x="10599" y="63595"/>
-                  </a:cubicBezTo>
-                  <a:cubicBezTo>
-                    <a:pt x="16656" y="68441"/>
-                    <a:pt x="21198" y="59659"/>
-                    <a:pt x="21198" y="43305"/>
-                  </a:cubicBezTo>
-                  <a:cubicBezTo>
-                    <a:pt x="21198" y="26952"/>
-                    <a:pt x="16353" y="9691"/>
-                    <a:pt x="10599" y="4845"/>
-                  </a:cubicBezTo>
-                  <a:cubicBezTo>
-                    <a:pt x="4845" y="0"/>
-                    <a:pt x="0" y="9085"/>
-                    <a:pt x="0" y="25135"/>
-                  </a:cubicBezTo>
-                  <a:close/>
-                </a:path>
-              </a:pathLst>
-            </a:custGeom>
-            <a:solidFill>
-              <a:srgbClr val="666666"/>
-            </a:solidFill>
-            <a:ln w="0" cap="rnd">
-              <a:noFill/>
-              <a:round/>
-            </a:ln>
-          </p:spPr>
-        </p:sp>
-        <p:sp>
-          <p:nvSpPr>
-            <p:cNvPr id="82" name="right Speaker column 2 row 1 45"/>
-            <p:cNvSpPr/>
-            <p:nvPr/>
-          </p:nvSpPr>
-          <p:spPr>
-            <a:xfrm>
-              <a:off x="8300777" y="1604793"/>
-              <a:ext cx="21198" cy="69046"/>
-            </a:xfrm>
-            <a:custGeom>
-              <a:avLst/>
-              <a:gdLst/>
-              <a:ahLst/>
-              <a:cxnLst/>
-              <a:rect l="0" t="0" r="r" b="b"/>
-              <a:pathLst>
-                <a:path w="21198" h="69046" fill="norm">
-                  <a:moveTo>
-                    <a:pt x="0" y="25438"/>
-                  </a:moveTo>
-                  <a:cubicBezTo>
-                    <a:pt x="0" y="41791"/>
-                    <a:pt x="4543" y="58750"/>
-                    <a:pt x="10599" y="63898"/>
-                  </a:cubicBezTo>
-                  <a:cubicBezTo>
-                    <a:pt x="16656" y="69046"/>
-                    <a:pt x="21198" y="59659"/>
-                    <a:pt x="21198" y="43305"/>
-                  </a:cubicBezTo>
-                  <a:cubicBezTo>
-                    <a:pt x="21198" y="26952"/>
-                    <a:pt x="16353" y="9691"/>
-                    <a:pt x="10599" y="4845"/>
-                  </a:cubicBezTo>
-                  <a:cubicBezTo>
-                    <a:pt x="4845" y="0"/>
-                    <a:pt x="0" y="9085"/>
-                    <a:pt x="0" y="25438"/>
-                  </a:cubicBezTo>
-                  <a:close/>
-                </a:path>
-              </a:pathLst>
-            </a:custGeom>
-            <a:solidFill>
-              <a:srgbClr val="666666"/>
-            </a:solidFill>
-            <a:ln w="0" cap="rnd">
-              <a:noFill/>
-              <a:round/>
-            </a:ln>
-          </p:spPr>
-        </p:sp>
-        <p:sp>
-          <p:nvSpPr>
-            <p:cNvPr id="83" name="right Speaker column 2 row 1 46"/>
-            <p:cNvSpPr/>
-            <p:nvPr/>
-          </p:nvSpPr>
-          <p:spPr>
-            <a:xfrm>
-              <a:off x="8300777" y="1508795"/>
-              <a:ext cx="21198" cy="68441"/>
-            </a:xfrm>
-            <a:custGeom>
-              <a:avLst/>
-              <a:gdLst/>
-              <a:ahLst/>
-              <a:cxnLst/>
-              <a:rect l="0" t="0" r="r" b="b"/>
-              <a:pathLst>
-                <a:path w="21198" h="68441" fill="norm">
-                  <a:moveTo>
-                    <a:pt x="0" y="25438"/>
-                  </a:moveTo>
-                  <a:cubicBezTo>
-                    <a:pt x="0" y="41791"/>
-                    <a:pt x="4543" y="58750"/>
-                    <a:pt x="10599" y="63595"/>
-                  </a:cubicBezTo>
-                  <a:cubicBezTo>
-                    <a:pt x="16656" y="68441"/>
-                    <a:pt x="21198" y="59356"/>
-                    <a:pt x="21198" y="43003"/>
-                  </a:cubicBezTo>
-                  <a:cubicBezTo>
-                    <a:pt x="21198" y="26649"/>
-                    <a:pt x="16353" y="9691"/>
-                    <a:pt x="10599" y="4845"/>
-                  </a:cubicBezTo>
-                  <a:cubicBezTo>
-                    <a:pt x="4845" y="0"/>
-                    <a:pt x="0" y="9085"/>
-                    <a:pt x="0" y="25438"/>
-                  </a:cubicBezTo>
-                  <a:close/>
-                </a:path>
-              </a:pathLst>
-            </a:custGeom>
-            <a:solidFill>
-              <a:srgbClr val="666666"/>
-            </a:solidFill>
-            <a:ln w="0" cap="rnd">
-              <a:noFill/>
-              <a:round/>
-            </a:ln>
-          </p:spPr>
-        </p:sp>
-        <p:sp>
-          <p:nvSpPr>
-            <p:cNvPr id="84" name="right Speaker column 2 row 1 47"/>
-            <p:cNvSpPr/>
-            <p:nvPr/>
-          </p:nvSpPr>
-          <p:spPr>
-            <a:xfrm>
-              <a:off x="8300777" y="1413099"/>
-              <a:ext cx="21198" cy="68441"/>
-            </a:xfrm>
-            <a:custGeom>
-              <a:avLst/>
-              <a:gdLst/>
-              <a:ahLst/>
-              <a:cxnLst/>
-              <a:rect l="0" t="0" r="r" b="b"/>
-              <a:pathLst>
-                <a:path w="21198" h="68441" fill="norm">
-                  <a:moveTo>
-                    <a:pt x="0" y="25438"/>
-                  </a:moveTo>
-                  <a:cubicBezTo>
-                    <a:pt x="0" y="41791"/>
-                    <a:pt x="4543" y="58750"/>
-                    <a:pt x="10599" y="63595"/>
-                  </a:cubicBezTo>
-                  <a:cubicBezTo>
-                    <a:pt x="16656" y="68441"/>
-                    <a:pt x="21198" y="59053"/>
-                    <a:pt x="21198" y="43003"/>
-                  </a:cubicBezTo>
-                  <a:cubicBezTo>
-                    <a:pt x="21198" y="26952"/>
-                    <a:pt x="16353" y="9691"/>
-                    <a:pt x="10599" y="4845"/>
-                  </a:cubicBezTo>
-                  <a:cubicBezTo>
-                    <a:pt x="4845" y="0"/>
-                    <a:pt x="0" y="9388"/>
-                    <a:pt x="0" y="25741"/>
-                  </a:cubicBezTo>
-                  <a:close/>
-                </a:path>
-              </a:pathLst>
-            </a:custGeom>
-            <a:solidFill>
-              <a:srgbClr val="666666"/>
-            </a:solidFill>
-            <a:ln w="0" cap="rnd">
-              <a:noFill/>
-              <a:round/>
-            </a:ln>
-          </p:spPr>
-        </p:sp>
-        <p:sp>
-          <p:nvSpPr>
-            <p:cNvPr id="85" name="right Speaker column 2 row 1 48"/>
-            <p:cNvSpPr/>
-            <p:nvPr/>
-          </p:nvSpPr>
-          <p:spPr>
-            <a:xfrm>
-              <a:off x="8300777" y="1317403"/>
-              <a:ext cx="21198" cy="67835"/>
-            </a:xfrm>
-            <a:custGeom>
-              <a:avLst/>
-              <a:gdLst/>
-              <a:ahLst/>
-              <a:cxnLst/>
-              <a:rect l="0" t="0" r="r" b="b"/>
-              <a:pathLst>
-                <a:path w="21198" h="67835" fill="norm">
-                  <a:moveTo>
-                    <a:pt x="0" y="25438"/>
-                  </a:moveTo>
-                  <a:cubicBezTo>
-                    <a:pt x="0" y="41791"/>
-                    <a:pt x="4543" y="58750"/>
-                    <a:pt x="10599" y="63293"/>
-                  </a:cubicBezTo>
-                  <a:cubicBezTo>
-                    <a:pt x="16656" y="67835"/>
-                    <a:pt x="21198" y="58750"/>
-                    <a:pt x="21198" y="42397"/>
-                  </a:cubicBezTo>
-                  <a:cubicBezTo>
-                    <a:pt x="21198" y="26044"/>
-                    <a:pt x="16353" y="9085"/>
-                    <a:pt x="10599" y="4543"/>
-                  </a:cubicBezTo>
-                  <a:cubicBezTo>
-                    <a:pt x="4845" y="0"/>
-                    <a:pt x="0" y="9085"/>
-                    <a:pt x="0" y="25438"/>
-                  </a:cubicBezTo>
-                  <a:close/>
-                </a:path>
-              </a:pathLst>
-            </a:custGeom>
-            <a:solidFill>
-              <a:srgbClr val="666666"/>
-            </a:solidFill>
-            <a:ln w="0" cap="rnd">
-              <a:noFill/>
-              <a:round/>
-            </a:ln>
-          </p:spPr>
-        </p:sp>
-        <p:sp>
-          <p:nvSpPr>
-            <p:cNvPr id="86" name="right Speaker column 2 row 1 49"/>
-            <p:cNvSpPr/>
-            <p:nvPr/>
-          </p:nvSpPr>
-          <p:spPr>
-            <a:xfrm>
-              <a:off x="8271402" y="1913382"/>
-              <a:ext cx="20593" cy="69046"/>
-            </a:xfrm>
-            <a:custGeom>
-              <a:avLst/>
-              <a:gdLst/>
-              <a:ahLst/>
-              <a:cxnLst/>
-              <a:rect l="0" t="0" r="r" b="b"/>
-              <a:pathLst>
-                <a:path w="20593" h="69046" fill="norm">
-                  <a:moveTo>
-                    <a:pt x="0" y="25135"/>
-                  </a:moveTo>
-                  <a:cubicBezTo>
-                    <a:pt x="0" y="41186"/>
-                    <a:pt x="4543" y="58750"/>
-                    <a:pt x="10296" y="63898"/>
-                  </a:cubicBezTo>
-                  <a:cubicBezTo>
-                    <a:pt x="16050" y="69046"/>
-                    <a:pt x="20593" y="60264"/>
-                    <a:pt x="20593" y="43911"/>
-                  </a:cubicBezTo>
-                  <a:cubicBezTo>
-                    <a:pt x="20593" y="27558"/>
-                    <a:pt x="16050" y="10296"/>
-                    <a:pt x="10296" y="5148"/>
-                  </a:cubicBezTo>
-                  <a:cubicBezTo>
-                    <a:pt x="4543" y="0"/>
-                    <a:pt x="0" y="8782"/>
-                    <a:pt x="0" y="25135"/>
-                  </a:cubicBezTo>
-                  <a:close/>
-                </a:path>
-              </a:pathLst>
-            </a:custGeom>
-            <a:solidFill>
-              <a:srgbClr val="666666"/>
-            </a:solidFill>
-            <a:ln w="0" cap="rnd">
-              <a:noFill/>
-              <a:round/>
-            </a:ln>
-          </p:spPr>
-        </p:sp>
-        <p:sp>
-          <p:nvSpPr>
-            <p:cNvPr id="87" name="right Speaker column 2 row 1 50"/>
-            <p:cNvSpPr/>
-            <p:nvPr/>
-          </p:nvSpPr>
-          <p:spPr>
-            <a:xfrm>
-              <a:off x="8271402" y="1818595"/>
-              <a:ext cx="20593" cy="68441"/>
-            </a:xfrm>
-            <a:custGeom>
-              <a:avLst/>
-              <a:gdLst/>
-              <a:ahLst/>
-              <a:cxnLst/>
-              <a:rect l="0" t="0" r="r" b="b"/>
-              <a:pathLst>
-                <a:path w="20593" h="68441" fill="norm">
-                  <a:moveTo>
-                    <a:pt x="0" y="24832"/>
-                  </a:moveTo>
-                  <a:cubicBezTo>
-                    <a:pt x="0" y="40883"/>
-                    <a:pt x="4543" y="58144"/>
-                    <a:pt x="10296" y="63293"/>
-                  </a:cubicBezTo>
-                  <a:cubicBezTo>
-                    <a:pt x="16050" y="68441"/>
-                    <a:pt x="20593" y="59356"/>
-                    <a:pt x="20593" y="43305"/>
-                  </a:cubicBezTo>
-                  <a:cubicBezTo>
-                    <a:pt x="20593" y="27255"/>
-                    <a:pt x="16050" y="9691"/>
-                    <a:pt x="10296" y="4845"/>
-                  </a:cubicBezTo>
-                  <a:cubicBezTo>
-                    <a:pt x="4543" y="0"/>
-                    <a:pt x="0" y="8782"/>
-                    <a:pt x="0" y="24832"/>
-                  </a:cubicBezTo>
-                  <a:close/>
-                </a:path>
-              </a:pathLst>
-            </a:custGeom>
-            <a:solidFill>
-              <a:srgbClr val="666666"/>
-            </a:solidFill>
-            <a:ln w="0" cap="rnd">
-              <a:noFill/>
-              <a:round/>
-            </a:ln>
-          </p:spPr>
-        </p:sp>
-        <p:sp>
-          <p:nvSpPr>
-            <p:cNvPr id="88" name="right Speaker column 2 row 1 51"/>
-            <p:cNvSpPr/>
-            <p:nvPr/>
-          </p:nvSpPr>
-          <p:spPr>
-            <a:xfrm>
-              <a:off x="8271402" y="1722596"/>
-              <a:ext cx="20593" cy="69046"/>
-            </a:xfrm>
-            <a:custGeom>
-              <a:avLst/>
-              <a:gdLst/>
-              <a:ahLst/>
-              <a:cxnLst/>
-              <a:rect l="0" t="0" r="r" b="b"/>
-              <a:pathLst>
-                <a:path w="20593" h="69046" fill="norm">
-                  <a:moveTo>
-                    <a:pt x="0" y="25438"/>
-                  </a:moveTo>
-                  <a:cubicBezTo>
-                    <a:pt x="0" y="41488"/>
-                    <a:pt x="4543" y="58750"/>
-                    <a:pt x="10296" y="63898"/>
-                  </a:cubicBezTo>
-                  <a:cubicBezTo>
-                    <a:pt x="16050" y="69046"/>
-                    <a:pt x="20593" y="59961"/>
-                    <a:pt x="20593" y="43608"/>
-                  </a:cubicBezTo>
-                  <a:cubicBezTo>
-                    <a:pt x="20593" y="27255"/>
-                    <a:pt x="16050" y="10296"/>
-                    <a:pt x="10296" y="5148"/>
-                  </a:cubicBezTo>
-                  <a:cubicBezTo>
-                    <a:pt x="4543" y="0"/>
-                    <a:pt x="0" y="9085"/>
-                    <a:pt x="0" y="25438"/>
-                  </a:cubicBezTo>
-                  <a:close/>
-                </a:path>
-              </a:pathLst>
-            </a:custGeom>
-            <a:solidFill>
-              <a:srgbClr val="666666"/>
-            </a:solidFill>
-            <a:ln w="0" cap="rnd">
-              <a:noFill/>
-              <a:round/>
-            </a:ln>
-          </p:spPr>
-        </p:sp>
-        <p:sp>
-          <p:nvSpPr>
-            <p:cNvPr id="89" name="right Speaker column 2 row 1 52"/>
-            <p:cNvSpPr/>
-            <p:nvPr/>
-          </p:nvSpPr>
-          <p:spPr>
-            <a:xfrm>
-              <a:off x="8271402" y="1627506"/>
-              <a:ext cx="20593" cy="68138"/>
-            </a:xfrm>
-            <a:custGeom>
-              <a:avLst/>
-              <a:gdLst/>
-              <a:ahLst/>
-              <a:cxnLst/>
-              <a:rect l="0" t="0" r="r" b="b"/>
-              <a:pathLst>
-                <a:path w="20593" h="68138" fill="norm">
-                  <a:moveTo>
-                    <a:pt x="0" y="25135"/>
-                  </a:moveTo>
-                  <a:cubicBezTo>
-                    <a:pt x="0" y="41186"/>
-                    <a:pt x="4543" y="58447"/>
-                    <a:pt x="10296" y="63293"/>
-                  </a:cubicBezTo>
-                  <a:cubicBezTo>
-                    <a:pt x="16050" y="68138"/>
-                    <a:pt x="20593" y="59053"/>
-                    <a:pt x="20593" y="43003"/>
-                  </a:cubicBezTo>
-                  <a:cubicBezTo>
-                    <a:pt x="20593" y="26952"/>
-                    <a:pt x="16050" y="9691"/>
-                    <a:pt x="10296" y="4845"/>
-                  </a:cubicBezTo>
-                  <a:cubicBezTo>
-                    <a:pt x="4543" y="0"/>
-                    <a:pt x="0" y="9085"/>
-                    <a:pt x="0" y="25135"/>
-                  </a:cubicBezTo>
-                  <a:close/>
-                </a:path>
-              </a:pathLst>
-            </a:custGeom>
-            <a:solidFill>
-              <a:srgbClr val="666666"/>
-            </a:solidFill>
-            <a:ln w="0" cap="rnd">
-              <a:noFill/>
-              <a:round/>
-            </a:ln>
-          </p:spPr>
-        </p:sp>
-        <p:sp>
-          <p:nvSpPr>
-            <p:cNvPr id="90" name="right Speaker column 2 row 1 53"/>
-            <p:cNvSpPr/>
-            <p:nvPr/>
-          </p:nvSpPr>
-          <p:spPr>
-            <a:xfrm>
-              <a:off x="8271402" y="1531810"/>
-              <a:ext cx="20593" cy="68441"/>
-            </a:xfrm>
-            <a:custGeom>
-              <a:avLst/>
-              <a:gdLst/>
-              <a:ahLst/>
-              <a:cxnLst/>
-              <a:rect l="0" t="0" r="r" b="b"/>
-              <a:pathLst>
-                <a:path w="20593" h="68441" fill="norm">
-                  <a:moveTo>
-                    <a:pt x="0" y="25438"/>
-                  </a:moveTo>
-                  <a:cubicBezTo>
-                    <a:pt x="0" y="41488"/>
-                    <a:pt x="4543" y="58750"/>
-                    <a:pt x="10296" y="63595"/>
-                  </a:cubicBezTo>
-                  <a:cubicBezTo>
-                    <a:pt x="16050" y="68441"/>
-                    <a:pt x="20593" y="59356"/>
-                    <a:pt x="20593" y="43003"/>
-                  </a:cubicBezTo>
-                  <a:cubicBezTo>
-                    <a:pt x="20593" y="26649"/>
-                    <a:pt x="16050" y="9691"/>
-                    <a:pt x="10296" y="4845"/>
-                  </a:cubicBezTo>
-                  <a:cubicBezTo>
-                    <a:pt x="4543" y="0"/>
-                    <a:pt x="0" y="9085"/>
-                    <a:pt x="0" y="25438"/>
-                  </a:cubicBezTo>
-                  <a:close/>
-                </a:path>
-              </a:pathLst>
-            </a:custGeom>
-            <a:solidFill>
-              <a:srgbClr val="666666"/>
-            </a:solidFill>
-            <a:ln w="0" cap="rnd">
-              <a:noFill/>
-              <a:round/>
-            </a:ln>
-          </p:spPr>
-        </p:sp>
-        <p:sp>
-          <p:nvSpPr>
-            <p:cNvPr id="91" name="right Speaker column 2 row 1 54"/>
-            <p:cNvSpPr/>
-            <p:nvPr/>
-          </p:nvSpPr>
-          <p:spPr>
-            <a:xfrm>
-              <a:off x="8271402" y="1436720"/>
-              <a:ext cx="20593" cy="67835"/>
-            </a:xfrm>
-            <a:custGeom>
-              <a:avLst/>
-              <a:gdLst/>
-              <a:ahLst/>
-              <a:cxnLst/>
-              <a:rect l="0" t="0" r="r" b="b"/>
-              <a:pathLst>
-                <a:path w="20593" h="67835" fill="norm">
-                  <a:moveTo>
-                    <a:pt x="0" y="25135"/>
-                  </a:moveTo>
-                  <a:cubicBezTo>
-                    <a:pt x="0" y="41186"/>
-                    <a:pt x="4543" y="58144"/>
-                    <a:pt x="10296" y="62990"/>
-                  </a:cubicBezTo>
-                  <a:cubicBezTo>
-                    <a:pt x="16050" y="67835"/>
-                    <a:pt x="20593" y="58447"/>
-                    <a:pt x="20593" y="42397"/>
-                  </a:cubicBezTo>
-                  <a:cubicBezTo>
-                    <a:pt x="20593" y="26347"/>
-                    <a:pt x="16050" y="9085"/>
-                    <a:pt x="10296" y="4543"/>
-                  </a:cubicBezTo>
-                  <a:cubicBezTo>
-                    <a:pt x="4543" y="0"/>
-                    <a:pt x="0" y="9085"/>
-                    <a:pt x="0" y="25135"/>
-                  </a:cubicBezTo>
-                  <a:close/>
-                </a:path>
-              </a:pathLst>
-            </a:custGeom>
-            <a:solidFill>
-              <a:srgbClr val="666666"/>
-            </a:solidFill>
-            <a:ln w="0" cap="rnd">
-              <a:noFill/>
-              <a:round/>
-            </a:ln>
-          </p:spPr>
-        </p:sp>
-        <p:sp>
-          <p:nvSpPr>
-            <p:cNvPr id="92" name="right Speaker column 2 row 1 55"/>
-            <p:cNvSpPr/>
-            <p:nvPr/>
-          </p:nvSpPr>
-          <p:spPr>
-            <a:xfrm>
-              <a:off x="8271402" y="1340721"/>
-              <a:ext cx="20593" cy="68441"/>
-            </a:xfrm>
-            <a:custGeom>
-              <a:avLst/>
-              <a:gdLst/>
-              <a:ahLst/>
-              <a:cxnLst/>
-              <a:rect l="0" t="0" r="r" b="b"/>
-              <a:pathLst>
-                <a:path w="20593" h="68441" fill="norm">
-                  <a:moveTo>
-                    <a:pt x="0" y="25741"/>
-                  </a:moveTo>
-                  <a:cubicBezTo>
-                    <a:pt x="0" y="41791"/>
-                    <a:pt x="4543" y="58750"/>
-                    <a:pt x="10296" y="63595"/>
-                  </a:cubicBezTo>
-                  <a:cubicBezTo>
-                    <a:pt x="16050" y="68441"/>
-                    <a:pt x="20593" y="59053"/>
-                    <a:pt x="20593" y="42700"/>
-                  </a:cubicBezTo>
-                  <a:cubicBezTo>
-                    <a:pt x="20593" y="26347"/>
-                    <a:pt x="16050" y="9691"/>
-                    <a:pt x="10296" y="4845"/>
-                  </a:cubicBezTo>
-                  <a:cubicBezTo>
-                    <a:pt x="4543" y="0"/>
-                    <a:pt x="0" y="9388"/>
-                    <a:pt x="0" y="25741"/>
-                  </a:cubicBezTo>
-                  <a:close/>
-                </a:path>
-              </a:pathLst>
-            </a:custGeom>
-            <a:solidFill>
-              <a:srgbClr val="666666"/>
-            </a:solidFill>
-            <a:ln w="0" cap="rnd">
-              <a:noFill/>
-              <a:round/>
-            </a:ln>
-          </p:spPr>
-        </p:sp>
-        <p:sp>
-          <p:nvSpPr>
-            <p:cNvPr id="93" name="right Speaker column 2 row 1 56"/>
-            <p:cNvSpPr/>
-            <p:nvPr/>
-          </p:nvSpPr>
-          <p:spPr>
-            <a:xfrm>
-              <a:off x="8242330" y="1839793"/>
-              <a:ext cx="20593" cy="68744"/>
-            </a:xfrm>
-            <a:custGeom>
-              <a:avLst/>
-              <a:gdLst/>
-              <a:ahLst/>
-              <a:cxnLst/>
-              <a:rect l="0" t="0" r="r" b="b"/>
-              <a:pathLst>
-                <a:path w="20593" h="68744" fill="norm">
-                  <a:moveTo>
-                    <a:pt x="0" y="25135"/>
-                  </a:moveTo>
-                  <a:cubicBezTo>
-                    <a:pt x="0" y="41186"/>
-                    <a:pt x="4543" y="58447"/>
-                    <a:pt x="10296" y="63595"/>
-                  </a:cubicBezTo>
-                  <a:cubicBezTo>
-                    <a:pt x="16050" y="68744"/>
-                    <a:pt x="20593" y="59659"/>
-                    <a:pt x="20593" y="43608"/>
-                  </a:cubicBezTo>
-                  <a:cubicBezTo>
-                    <a:pt x="20593" y="27558"/>
-                    <a:pt x="16050" y="10296"/>
-                    <a:pt x="10296" y="5148"/>
-                  </a:cubicBezTo>
-                  <a:cubicBezTo>
-                    <a:pt x="4543" y="0"/>
-                    <a:pt x="0" y="9085"/>
-                    <a:pt x="0" y="25135"/>
-                  </a:cubicBezTo>
-                  <a:close/>
-                </a:path>
-              </a:pathLst>
-            </a:custGeom>
-            <a:solidFill>
-              <a:srgbClr val="666666"/>
-            </a:solidFill>
-            <a:ln w="0" cap="rnd">
-              <a:noFill/>
-              <a:round/>
-            </a:ln>
-          </p:spPr>
-        </p:sp>
-        <p:sp>
-          <p:nvSpPr>
-            <p:cNvPr id="94" name="right Speaker column 2 row 1 57"/>
-            <p:cNvSpPr/>
-            <p:nvPr/>
-          </p:nvSpPr>
-          <p:spPr>
-            <a:xfrm>
-              <a:off x="8242330" y="1745006"/>
-              <a:ext cx="20593" cy="67835"/>
-            </a:xfrm>
-            <a:custGeom>
-              <a:avLst/>
-              <a:gdLst/>
-              <a:ahLst/>
-              <a:cxnLst/>
-              <a:rect l="0" t="0" r="r" b="b"/>
-              <a:pathLst>
-                <a:path w="20593" h="67835" fill="norm">
-                  <a:moveTo>
-                    <a:pt x="0" y="24832"/>
-                  </a:moveTo>
-                  <a:cubicBezTo>
-                    <a:pt x="0" y="40883"/>
-                    <a:pt x="4543" y="58144"/>
-                    <a:pt x="10296" y="62990"/>
-                  </a:cubicBezTo>
-                  <a:cubicBezTo>
-                    <a:pt x="16050" y="67835"/>
-                    <a:pt x="20593" y="59053"/>
-                    <a:pt x="20593" y="43003"/>
-                  </a:cubicBezTo>
-                  <a:cubicBezTo>
-                    <a:pt x="20593" y="26952"/>
-                    <a:pt x="16050" y="9691"/>
-                    <a:pt x="10296" y="4845"/>
-                  </a:cubicBezTo>
-                  <a:cubicBezTo>
-                    <a:pt x="4543" y="0"/>
-                    <a:pt x="0" y="8782"/>
-                    <a:pt x="0" y="24832"/>
-                  </a:cubicBezTo>
-                  <a:close/>
-                </a:path>
-              </a:pathLst>
-            </a:custGeom>
-            <a:solidFill>
-              <a:srgbClr val="666666"/>
-            </a:solidFill>
-            <a:ln w="0" cap="rnd">
-              <a:noFill/>
-              <a:round/>
-            </a:ln>
-          </p:spPr>
-        </p:sp>
-        <p:sp>
-          <p:nvSpPr>
-            <p:cNvPr id="95" name="right Speaker column 2 row 1 58"/>
-            <p:cNvSpPr/>
-            <p:nvPr/>
-          </p:nvSpPr>
-          <p:spPr>
-            <a:xfrm>
-              <a:off x="8242330" y="1649613"/>
-              <a:ext cx="20593" cy="68441"/>
-            </a:xfrm>
-            <a:custGeom>
-              <a:avLst/>
-              <a:gdLst/>
-              <a:ahLst/>
-              <a:cxnLst/>
-              <a:rect l="0" t="0" r="r" b="b"/>
-              <a:pathLst>
-                <a:path w="20593" h="68441" fill="norm">
-                  <a:moveTo>
-                    <a:pt x="0" y="25135"/>
-                  </a:moveTo>
-                  <a:cubicBezTo>
-                    <a:pt x="0" y="41186"/>
-                    <a:pt x="4543" y="58144"/>
-                    <a:pt x="10296" y="63293"/>
-                  </a:cubicBezTo>
-                  <a:cubicBezTo>
-                    <a:pt x="16050" y="68441"/>
-                    <a:pt x="20593" y="59356"/>
-                    <a:pt x="20593" y="43003"/>
-                  </a:cubicBezTo>
-                  <a:cubicBezTo>
-                    <a:pt x="20593" y="26649"/>
-                    <a:pt x="16050" y="9691"/>
-                    <a:pt x="10296" y="4845"/>
-                  </a:cubicBezTo>
-                  <a:cubicBezTo>
-                    <a:pt x="4543" y="0"/>
-                    <a:pt x="0" y="9085"/>
-                    <a:pt x="0" y="25135"/>
-                  </a:cubicBezTo>
-                  <a:close/>
-                </a:path>
-              </a:pathLst>
-            </a:custGeom>
-            <a:solidFill>
-              <a:srgbClr val="666666"/>
-            </a:solidFill>
-            <a:ln w="0" cap="rnd">
-              <a:noFill/>
-              <a:round/>
-            </a:ln>
-          </p:spPr>
-        </p:sp>
-        <p:sp>
-          <p:nvSpPr>
-            <p:cNvPr id="96" name="right Speaker column 2 row 1 59"/>
-            <p:cNvSpPr/>
-            <p:nvPr/>
-          </p:nvSpPr>
-          <p:spPr>
-            <a:xfrm>
-              <a:off x="8242330" y="1554523"/>
-              <a:ext cx="20593" cy="68138"/>
-            </a:xfrm>
-            <a:custGeom>
-              <a:avLst/>
-              <a:gdLst/>
-              <a:ahLst/>
-              <a:cxnLst/>
-              <a:rect l="0" t="0" r="r" b="b"/>
-              <a:pathLst>
-                <a:path w="20593" h="68138" fill="norm">
-                  <a:moveTo>
-                    <a:pt x="0" y="25438"/>
-                  </a:moveTo>
-                  <a:cubicBezTo>
-                    <a:pt x="0" y="41488"/>
-                    <a:pt x="4543" y="58447"/>
-                    <a:pt x="10296" y="63293"/>
-                  </a:cubicBezTo>
-                  <a:cubicBezTo>
-                    <a:pt x="16050" y="68138"/>
-                    <a:pt x="20593" y="59053"/>
-                    <a:pt x="20593" y="43003"/>
-                  </a:cubicBezTo>
-                  <a:cubicBezTo>
-                    <a:pt x="20593" y="26952"/>
-                    <a:pt x="16050" y="9691"/>
-                    <a:pt x="10296" y="4845"/>
-                  </a:cubicBezTo>
-                  <a:cubicBezTo>
-                    <a:pt x="4543" y="0"/>
-                    <a:pt x="0" y="9085"/>
-                    <a:pt x="0" y="25135"/>
-                  </a:cubicBezTo>
-                  <a:close/>
-                </a:path>
-              </a:pathLst>
-            </a:custGeom>
-            <a:solidFill>
-              <a:srgbClr val="666666"/>
-            </a:solidFill>
-            <a:ln w="0" cap="rnd">
-              <a:noFill/>
-              <a:round/>
-            </a:ln>
-          </p:spPr>
-        </p:sp>
-        <p:sp>
-          <p:nvSpPr>
-            <p:cNvPr id="97" name="right Speaker column 2 row 1 60"/>
-            <p:cNvSpPr/>
-            <p:nvPr/>
-          </p:nvSpPr>
-          <p:spPr>
-            <a:xfrm>
-              <a:off x="8242330" y="1459432"/>
-              <a:ext cx="20593" cy="68138"/>
-            </a:xfrm>
-            <a:custGeom>
-              <a:avLst/>
-              <a:gdLst/>
-              <a:ahLst/>
-              <a:cxnLst/>
-              <a:rect l="0" t="0" r="r" b="b"/>
-              <a:pathLst>
-                <a:path w="20593" h="68138" fill="norm">
-                  <a:moveTo>
-                    <a:pt x="0" y="25438"/>
-                  </a:moveTo>
-                  <a:cubicBezTo>
-                    <a:pt x="0" y="41488"/>
-                    <a:pt x="4543" y="58447"/>
-                    <a:pt x="10296" y="63293"/>
-                  </a:cubicBezTo>
-                  <a:cubicBezTo>
-                    <a:pt x="16050" y="68138"/>
-                    <a:pt x="20593" y="59053"/>
-                    <a:pt x="20593" y="42700"/>
-                  </a:cubicBezTo>
-                  <a:cubicBezTo>
-                    <a:pt x="20593" y="26347"/>
-                    <a:pt x="16050" y="9691"/>
-                    <a:pt x="10296" y="4845"/>
-                  </a:cubicBezTo>
-                  <a:cubicBezTo>
-                    <a:pt x="4543" y="0"/>
-                    <a:pt x="0" y="9388"/>
-                    <a:pt x="0" y="25438"/>
-                  </a:cubicBezTo>
-                  <a:close/>
-                </a:path>
-              </a:pathLst>
-            </a:custGeom>
-            <a:solidFill>
-              <a:srgbClr val="666666"/>
-            </a:solidFill>
-            <a:ln w="0" cap="rnd">
-              <a:noFill/>
-              <a:round/>
-            </a:ln>
-          </p:spPr>
-        </p:sp>
-        <p:sp>
-          <p:nvSpPr>
-            <p:cNvPr id="98" name="right Speaker column 2 row 1 61"/>
-            <p:cNvSpPr/>
-            <p:nvPr/>
-          </p:nvSpPr>
-          <p:spPr>
-            <a:xfrm>
-              <a:off x="8242330" y="1364645"/>
-              <a:ext cx="20593" cy="68138"/>
-            </a:xfrm>
-            <a:custGeom>
-              <a:avLst/>
-              <a:gdLst/>
-              <a:ahLst/>
-              <a:cxnLst/>
-              <a:rect l="0" t="0" r="r" b="b"/>
-              <a:pathLst>
-                <a:path w="20593" h="68138" fill="norm">
-                  <a:moveTo>
-                    <a:pt x="0" y="25438"/>
-                  </a:moveTo>
-                  <a:cubicBezTo>
-                    <a:pt x="0" y="41488"/>
-                    <a:pt x="4543" y="58447"/>
-                    <a:pt x="10296" y="63293"/>
-                  </a:cubicBezTo>
-                  <a:cubicBezTo>
-                    <a:pt x="16050" y="68138"/>
-                    <a:pt x="20593" y="58750"/>
-                    <a:pt x="20593" y="42700"/>
-                  </a:cubicBezTo>
-                  <a:cubicBezTo>
-                    <a:pt x="20593" y="26649"/>
-                    <a:pt x="16050" y="9691"/>
-                    <a:pt x="10296" y="4845"/>
-                  </a:cubicBezTo>
-                  <a:cubicBezTo>
-                    <a:pt x="4543" y="0"/>
-                    <a:pt x="0" y="9388"/>
-                    <a:pt x="0" y="25438"/>
-                  </a:cubicBezTo>
-                  <a:close/>
-                </a:path>
-              </a:pathLst>
-            </a:custGeom>
-            <a:solidFill>
-              <a:srgbClr val="666666"/>
-            </a:solidFill>
-            <a:ln w="0" cap="rnd">
-              <a:noFill/>
-              <a:round/>
-            </a:ln>
-          </p:spPr>
-        </p:sp>
-        <p:sp>
-          <p:nvSpPr>
-            <p:cNvPr id="99" name="right Speaker column 2 row 1 62"/>
-            <p:cNvSpPr/>
-            <p:nvPr/>
-          </p:nvSpPr>
-          <p:spPr>
-            <a:xfrm>
-              <a:off x="8213258" y="1766810"/>
-              <a:ext cx="20593" cy="68138"/>
-            </a:xfrm>
-            <a:custGeom>
-              <a:avLst/>
-              <a:gdLst/>
-              <a:ahLst/>
-              <a:cxnLst/>
-              <a:rect l="0" t="0" r="r" b="b"/>
-              <a:pathLst>
-                <a:path w="20593" h="68138" fill="norm">
-                  <a:moveTo>
-                    <a:pt x="0" y="24832"/>
-                  </a:moveTo>
-                  <a:cubicBezTo>
-                    <a:pt x="0" y="40883"/>
-                    <a:pt x="4543" y="57842"/>
-                    <a:pt x="10296" y="62990"/>
-                  </a:cubicBezTo>
-                  <a:cubicBezTo>
-                    <a:pt x="16050" y="68138"/>
-                    <a:pt x="20593" y="59053"/>
-                    <a:pt x="20593" y="43003"/>
-                  </a:cubicBezTo>
-                  <a:cubicBezTo>
-                    <a:pt x="20593" y="26952"/>
-                    <a:pt x="16050" y="9691"/>
-                    <a:pt x="10296" y="4845"/>
-                  </a:cubicBezTo>
-                  <a:cubicBezTo>
-                    <a:pt x="4543" y="0"/>
-                    <a:pt x="0" y="8782"/>
-                    <a:pt x="0" y="24832"/>
-                  </a:cubicBezTo>
-                  <a:close/>
-                </a:path>
-              </a:pathLst>
-            </a:custGeom>
-            <a:solidFill>
-              <a:srgbClr val="666666"/>
-            </a:solidFill>
-            <a:ln w="0" cap="rnd">
-              <a:noFill/>
-              <a:round/>
-            </a:ln>
-          </p:spPr>
-        </p:sp>
-        <p:sp>
-          <p:nvSpPr>
-            <p:cNvPr id="100" name="right Speaker column 2 row 1 63"/>
-            <p:cNvSpPr/>
-            <p:nvPr/>
-          </p:nvSpPr>
-          <p:spPr>
-            <a:xfrm>
-              <a:off x="8213258" y="1671417"/>
-              <a:ext cx="20593" cy="68138"/>
-            </a:xfrm>
-            <a:custGeom>
-              <a:avLst/>
-              <a:gdLst/>
-              <a:ahLst/>
-              <a:cxnLst/>
-              <a:rect l="0" t="0" r="r" b="b"/>
-              <a:pathLst>
-                <a:path w="20593" h="68138" fill="norm">
-                  <a:moveTo>
-                    <a:pt x="0" y="25438"/>
-                  </a:moveTo>
-                  <a:cubicBezTo>
-                    <a:pt x="0" y="41488"/>
-                    <a:pt x="4543" y="58447"/>
-                    <a:pt x="10296" y="63293"/>
-                  </a:cubicBezTo>
-                  <a:cubicBezTo>
-                    <a:pt x="16050" y="68138"/>
-                    <a:pt x="20593" y="59356"/>
-                    <a:pt x="20593" y="43305"/>
-                  </a:cubicBezTo>
-                  <a:cubicBezTo>
-                    <a:pt x="20593" y="27255"/>
-                    <a:pt x="16050" y="10296"/>
-                    <a:pt x="10296" y="5148"/>
-                  </a:cubicBezTo>
-                  <a:cubicBezTo>
-                    <a:pt x="4543" y="0"/>
-                    <a:pt x="0" y="9388"/>
-                    <a:pt x="0" y="25135"/>
-                  </a:cubicBezTo>
-                  <a:close/>
-                </a:path>
-              </a:pathLst>
-            </a:custGeom>
-            <a:solidFill>
-              <a:srgbClr val="666666"/>
-            </a:solidFill>
-            <a:ln w="0" cap="rnd">
-              <a:noFill/>
-              <a:round/>
-            </a:ln>
-          </p:spPr>
-        </p:sp>
-        <p:sp>
-          <p:nvSpPr>
-            <p:cNvPr id="101" name="right Speaker column 2 row 1 64"/>
-            <p:cNvSpPr/>
-            <p:nvPr/>
-          </p:nvSpPr>
-          <p:spPr>
-            <a:xfrm>
-              <a:off x="8213258" y="1577235"/>
-              <a:ext cx="20593" cy="67835"/>
-            </a:xfrm>
-            <a:custGeom>
-              <a:avLst/>
-              <a:gdLst/>
-              <a:ahLst/>
-              <a:cxnLst/>
-              <a:rect l="0" t="0" r="r" b="b"/>
-              <a:pathLst>
-                <a:path w="20593" h="67835" fill="norm">
-                  <a:moveTo>
-                    <a:pt x="0" y="25135"/>
-                  </a:moveTo>
-                  <a:cubicBezTo>
-                    <a:pt x="0" y="41186"/>
-                    <a:pt x="4543" y="58144"/>
-                    <a:pt x="10296" y="62990"/>
-                  </a:cubicBezTo>
-                  <a:cubicBezTo>
-                    <a:pt x="16050" y="67835"/>
-                    <a:pt x="20593" y="58750"/>
-                    <a:pt x="20593" y="42700"/>
-                  </a:cubicBezTo>
-                  <a:cubicBezTo>
-                    <a:pt x="20593" y="26649"/>
-                    <a:pt x="16050" y="9691"/>
-                    <a:pt x="10296" y="4845"/>
-                  </a:cubicBezTo>
-                  <a:cubicBezTo>
-                    <a:pt x="4543" y="0"/>
-                    <a:pt x="0" y="9085"/>
-                    <a:pt x="0" y="25135"/>
-                  </a:cubicBezTo>
-                  <a:close/>
-                </a:path>
-              </a:pathLst>
-            </a:custGeom>
-            <a:solidFill>
-              <a:srgbClr val="666666"/>
-            </a:solidFill>
-            <a:ln w="0" cap="rnd">
-              <a:noFill/>
-              <a:round/>
-            </a:ln>
-          </p:spPr>
-        </p:sp>
-        <p:sp>
-          <p:nvSpPr>
-            <p:cNvPr id="102" name="right Speaker column 2 row 1 65"/>
-            <p:cNvSpPr/>
-            <p:nvPr/>
-          </p:nvSpPr>
-          <p:spPr>
-            <a:xfrm>
-              <a:off x="8213258" y="1482751"/>
-              <a:ext cx="20593" cy="67835"/>
-            </a:xfrm>
-            <a:custGeom>
-              <a:avLst/>
-              <a:gdLst/>
-              <a:ahLst/>
-              <a:cxnLst/>
-              <a:rect l="0" t="0" r="r" b="b"/>
-              <a:pathLst>
-                <a:path w="20593" h="67835" fill="norm">
-                  <a:moveTo>
-                    <a:pt x="0" y="25135"/>
-                  </a:moveTo>
-                  <a:cubicBezTo>
-                    <a:pt x="0" y="41186"/>
-                    <a:pt x="4543" y="58144"/>
-                    <a:pt x="10296" y="62990"/>
-                  </a:cubicBezTo>
-                  <a:cubicBezTo>
-                    <a:pt x="16050" y="67835"/>
-                    <a:pt x="20593" y="58750"/>
-                    <a:pt x="20593" y="42700"/>
-                  </a:cubicBezTo>
-                  <a:cubicBezTo>
-                    <a:pt x="20593" y="26649"/>
-                    <a:pt x="16050" y="9691"/>
-                    <a:pt x="10296" y="4845"/>
-                  </a:cubicBezTo>
-                  <a:cubicBezTo>
-                    <a:pt x="4543" y="0"/>
-                    <a:pt x="0" y="9085"/>
-                    <a:pt x="0" y="25135"/>
-                  </a:cubicBezTo>
-                  <a:close/>
-                </a:path>
-              </a:pathLst>
-            </a:custGeom>
-            <a:solidFill>
-              <a:srgbClr val="666666"/>
-            </a:solidFill>
-            <a:ln w="0" cap="rnd">
-              <a:noFill/>
-              <a:round/>
-            </a:ln>
-          </p:spPr>
-        </p:sp>
-        <p:sp>
-          <p:nvSpPr>
-            <p:cNvPr id="103" name="right Speaker column 2 row 1 66"/>
-            <p:cNvSpPr/>
-            <p:nvPr/>
-          </p:nvSpPr>
-          <p:spPr>
-            <a:xfrm>
-              <a:off x="8213258" y="1388266"/>
-              <a:ext cx="20593" cy="67532"/>
-            </a:xfrm>
-            <a:custGeom>
-              <a:avLst/>
-              <a:gdLst/>
-              <a:ahLst/>
-              <a:cxnLst/>
-              <a:rect l="0" t="0" r="r" b="b"/>
-              <a:pathLst>
-                <a:path w="20593" h="67532" fill="norm">
-                  <a:moveTo>
-                    <a:pt x="0" y="25135"/>
-                  </a:moveTo>
-                  <a:cubicBezTo>
-                    <a:pt x="0" y="41186"/>
-                    <a:pt x="4543" y="57842"/>
-                    <a:pt x="10296" y="62687"/>
-                  </a:cubicBezTo>
-                  <a:cubicBezTo>
-                    <a:pt x="16050" y="67532"/>
-                    <a:pt x="20593" y="58144"/>
-                    <a:pt x="20593" y="42094"/>
-                  </a:cubicBezTo>
-                  <a:cubicBezTo>
-                    <a:pt x="20593" y="26044"/>
-                    <a:pt x="16050" y="9085"/>
-                    <a:pt x="10296" y="4543"/>
-                  </a:cubicBezTo>
-                  <a:cubicBezTo>
-                    <a:pt x="4543" y="0"/>
-                    <a:pt x="0" y="9085"/>
-                    <a:pt x="0" y="25135"/>
-                  </a:cubicBezTo>
-                  <a:close/>
-                </a:path>
-              </a:pathLst>
-            </a:custGeom>
-            <a:solidFill>
-              <a:srgbClr val="666666"/>
-            </a:solidFill>
-            <a:ln w="0" cap="rnd">
-              <a:noFill/>
-              <a:round/>
-            </a:ln>
-          </p:spPr>
-        </p:sp>
-      </p:grpSp>
-      <p:grpSp>
-        <p:nvGrpSpPr>
-          <p:cNvPr id="104" name="right Lever column 2 row 7"/>
-          <p:cNvGrpSpPr/>
-          <p:nvPr/>
-        </p:nvGrpSpPr>
-        <p:grpSpPr>
-          <a:xfrm>
-            <a:off x="4874270" y="3612103"/>
-            <a:ext cx="501443" cy="272243"/>
-            <a:chOff x="8074670" y="4193128"/>
-            <a:chExt cx="501443" cy="272243"/>
-          </a:xfrm>
-        </p:grpSpPr>
-        <p:sp>
-          <p:nvSpPr>
-            <p:cNvPr id="105" name="right Lever column 2 row 7 6"/>
-            <p:cNvSpPr/>
-            <p:nvPr/>
-          </p:nvSpPr>
-          <p:spPr>
-            <a:xfrm>
-              <a:off x="8074670" y="4211779"/>
-              <a:ext cx="501443" cy="253591"/>
-            </a:xfrm>
-            <a:custGeom>
-              <a:avLst/>
-              <a:gdLst/>
-              <a:ahLst/>
-              <a:cxnLst/>
-              <a:rect l="0" t="0" r="r" b="b"/>
-              <a:pathLst>
-                <a:path w="501443" h="253591" fill="norm">
-                  <a:moveTo>
-                    <a:pt x="501443" y="253591"/>
-                  </a:moveTo>
-                  <a:lnTo>
-                    <a:pt x="205527" y="253591"/>
-                  </a:lnTo>
-                  <a:lnTo>
-                    <a:pt x="0" y="0"/>
-                  </a:lnTo>
-                  <a:lnTo>
-                    <a:pt x="289101" y="0"/>
-                  </a:lnTo>
-                  <a:lnTo>
-                    <a:pt x="501443" y="253591"/>
-                  </a:lnTo>
-                  <a:close/>
-                </a:path>
-              </a:pathLst>
-            </a:custGeom>
-            <a:solidFill>
-              <a:srgbClr val="9E9D9B"/>
-            </a:solidFill>
-            <a:ln w="8967" cap="rnd">
-              <a:solidFill>
-                <a:srgbClr val="040000"/>
-              </a:solidFill>
-              <a:round/>
-            </a:ln>
-          </p:spPr>
-        </p:sp>
-        <p:sp>
-          <p:nvSpPr>
-            <p:cNvPr id="106" name="right Lever column 2 row 7 7"/>
-            <p:cNvSpPr/>
-            <p:nvPr/>
-          </p:nvSpPr>
-          <p:spPr>
-            <a:xfrm>
-              <a:off x="8280197" y="4446719"/>
-              <a:ext cx="295916" cy="18652"/>
-            </a:xfrm>
-            <a:custGeom>
-              <a:avLst/>
-              <a:gdLst/>
-              <a:ahLst/>
-              <a:cxnLst/>
-              <a:rect l="0" t="0" r="r" b="b"/>
-              <a:pathLst>
-                <a:path w="295916" h="18652" fill="norm">
-                  <a:moveTo>
-                    <a:pt x="0" y="0"/>
-                  </a:moveTo>
-                  <a:lnTo>
-                    <a:pt x="295916" y="0"/>
-                  </a:lnTo>
-                  <a:lnTo>
-                    <a:pt x="295916" y="18652"/>
-                  </a:lnTo>
-                  <a:lnTo>
-                    <a:pt x="0" y="18652"/>
-                  </a:lnTo>
-                  <a:close/>
-                </a:path>
-              </a:pathLst>
-            </a:custGeom>
-            <a:solidFill>
-              <a:srgbClr val="9E9D9B"/>
-            </a:solidFill>
-            <a:ln w="8967" cap="rnd">
-              <a:solidFill>
-                <a:srgbClr val="040000"/>
-              </a:solidFill>
-              <a:round/>
-            </a:ln>
-          </p:spPr>
-        </p:sp>
-        <p:sp>
-          <p:nvSpPr>
-            <p:cNvPr id="107" name="right Lever column 2 row 7 8"/>
-            <p:cNvSpPr/>
-            <p:nvPr/>
-          </p:nvSpPr>
-          <p:spPr>
-            <a:xfrm>
-              <a:off x="8074670" y="4193128"/>
-              <a:ext cx="501443" cy="253591"/>
-            </a:xfrm>
-            <a:custGeom>
-              <a:avLst/>
-              <a:gdLst/>
-              <a:ahLst/>
-              <a:cxnLst/>
-              <a:rect l="0" t="0" r="r" b="b"/>
-              <a:pathLst>
-                <a:path w="501443" h="253591" fill="norm">
-                  <a:moveTo>
-                    <a:pt x="501443" y="253591"/>
-                  </a:moveTo>
-                  <a:lnTo>
-                    <a:pt x="205527" y="253591"/>
-                  </a:lnTo>
-                  <a:lnTo>
-                    <a:pt x="0" y="0"/>
-                  </a:lnTo>
-                  <a:lnTo>
-                    <a:pt x="289101" y="0"/>
-                  </a:lnTo>
-                  <a:lnTo>
-                    <a:pt x="501443" y="253591"/>
-                  </a:lnTo>
-                  <a:close/>
-                </a:path>
-              </a:pathLst>
-            </a:custGeom>
-            <a:solidFill>
-              <a:srgbClr val="9E9D9B"/>
-            </a:solidFill>
-            <a:ln w="8967" cap="rnd">
-              <a:solidFill>
-                <a:srgbClr val="040000"/>
-              </a:solidFill>
-              <a:round/>
-            </a:ln>
-          </p:spPr>
-        </p:sp>
-        <p:sp>
-          <p:nvSpPr>
-            <p:cNvPr id="108" name="right Lever column 2 row 7 9"/>
-            <p:cNvSpPr/>
-            <p:nvPr/>
-          </p:nvSpPr>
-          <p:spPr>
-            <a:xfrm>
-              <a:off x="8074670" y="4193128"/>
-              <a:ext cx="205527" cy="272243"/>
-            </a:xfrm>
-            <a:custGeom>
-              <a:avLst/>
-              <a:gdLst/>
-              <a:ahLst/>
-              <a:cxnLst/>
-              <a:rect l="0" t="0" r="r" b="b"/>
-              <a:pathLst>
-                <a:path w="205527" h="272243" fill="norm">
-                  <a:moveTo>
-                    <a:pt x="0" y="0"/>
-                  </a:moveTo>
-                  <a:lnTo>
-                    <a:pt x="205527" y="253232"/>
-                  </a:lnTo>
-                  <a:lnTo>
-                    <a:pt x="205527" y="272243"/>
-                  </a:lnTo>
-                  <a:lnTo>
-                    <a:pt x="0" y="18652"/>
-                  </a:lnTo>
-                  <a:lnTo>
-                    <a:pt x="0" y="0"/>
-                  </a:lnTo>
-                  <a:close/>
-                </a:path>
-              </a:pathLst>
-            </a:custGeom>
-            <a:solidFill>
-              <a:srgbClr val="9E9D9B"/>
-            </a:solidFill>
-            <a:ln w="8967" cap="rnd">
-              <a:solidFill>
-                <a:srgbClr val="040000"/>
               </a:solidFill>
               <a:round/>
             </a:ln>

--- a/docs/reference-style.pptx
+++ b/docs/reference-style.pptx
@@ -10,7 +10,7 @@
   <p:sldIdLst>
     <p:sldId xmlns:r="http://schemas.openxmlformats.org/officeDocument/2006/relationships" id="256" r:id="Rc4578536c6514910"/>
   </p:sldIdLst>
-  <p:sldSz cx="5791200" cy="5153743" type="custom"/>
+  <p:sldSz cx="5791200" cy="5791200" type="custom"/>
   <p:notesSz cx="6858000" cy="9144000"/>
 </p:presentation>
 </file>
@@ -1060,28 +1060,28 @@
       </p:grpSpPr>
       <p:grpSp>
         <p:nvGrpSpPr>
-          <p:cNvPr id="2" name="Box back"/>
+          <p:cNvPr id="2" name="Box glass ceiling"/>
           <p:cNvGrpSpPr/>
           <p:nvPr/>
         </p:nvGrpSpPr>
         <p:grpSpPr>
           <a:xfrm>
-            <a:off x="1154435" y="9325"/>
-            <a:ext cx="3482329" cy="3684122"/>
-            <a:chOff x="4354835" y="590350"/>
-            <a:chExt cx="3482329" cy="3684122"/>
+            <a:off x="38100" y="38100"/>
+            <a:ext cx="5715000" cy="857250"/>
+            <a:chOff x="3238500" y="619125"/>
+            <a:chExt cx="5715000" cy="857250"/>
           </a:xfrm>
         </p:grpSpPr>
         <p:sp>
           <p:nvSpPr>
-            <p:cNvPr id="3" name="Box back 0"/>
+            <p:cNvPr id="3" name="Box glass ceiling 0"/>
             <p:cNvSpPr/>
             <p:nvPr/>
           </p:nvSpPr>
           <p:spPr>
             <a:xfrm>
-              <a:off x="4354835" y="590350"/>
-              <a:ext cx="3482329" cy="3684122"/>
+              <a:off x="3238500" y="619125"/>
+              <a:ext cx="5715000" cy="857250"/>
             </a:xfrm>
             <a:custGeom>
               <a:avLst/>
@@ -1090,18 +1090,79 @@
               <a:cxnLst/>
               <a:rect l="0" t="0" r="r" b="b"/>
               <a:pathLst>
-                <a:path w="3482329" h="3684122" fill="norm">
+                <a:path w="5715000" h="857250" fill="norm">
                   <a:moveTo>
                     <a:pt x="0" y="0"/>
                   </a:moveTo>
                   <a:lnTo>
-                    <a:pt x="3482329" y="0"/>
+                    <a:pt x="5715000" y="0"/>
                   </a:lnTo>
                   <a:lnTo>
-                    <a:pt x="3482329" y="3684122"/>
+                    <a:pt x="4524375" y="857250"/>
                   </a:lnTo>
                   <a:lnTo>
-                    <a:pt x="0" y="3684122"/>
+                    <a:pt x="1190625" y="857250"/>
+                  </a:lnTo>
+                  <a:close/>
+                </a:path>
+              </a:pathLst>
+            </a:custGeom>
+            <a:solidFill>
+              <a:srgbClr val="F3F9FB"/>
+            </a:solidFill>
+            <a:ln w="7620" cap="rnd">
+              <a:solidFill>
+                <a:srgbClr val="6F7C7E"/>
+              </a:solidFill>
+              <a:round/>
+            </a:ln>
+          </p:spPr>
+        </p:sp>
+      </p:grpSp>
+      <p:grpSp>
+        <p:nvGrpSpPr>
+          <p:cNvPr id="4" name="Box back"/>
+          <p:cNvGrpSpPr/>
+          <p:nvPr/>
+        </p:nvGrpSpPr>
+        <p:grpSpPr>
+          <a:xfrm>
+            <a:off x="1228725" y="895350"/>
+            <a:ext cx="3333750" cy="3429000"/>
+            <a:chOff x="4429125" y="1476375"/>
+            <a:chExt cx="3333750" cy="3429000"/>
+          </a:xfrm>
+        </p:grpSpPr>
+        <p:sp>
+          <p:nvSpPr>
+            <p:cNvPr id="5" name="Box back 1"/>
+            <p:cNvSpPr/>
+            <p:nvPr/>
+          </p:nvSpPr>
+          <p:spPr>
+            <a:xfrm>
+              <a:off x="4429125" y="1476375"/>
+              <a:ext cx="3333750" cy="3429000"/>
+            </a:xfrm>
+            <a:custGeom>
+              <a:avLst/>
+              <a:gdLst/>
+              <a:ahLst/>
+              <a:cxnLst/>
+              <a:rect l="0" t="0" r="r" b="b"/>
+              <a:pathLst>
+                <a:path w="3333750" h="3429000" fill="norm">
+                  <a:moveTo>
+                    <a:pt x="0" y="0"/>
+                  </a:moveTo>
+                  <a:lnTo>
+                    <a:pt x="3333750" y="0"/>
+                  </a:lnTo>
+                  <a:lnTo>
+                    <a:pt x="3333750" y="3429000"/>
+                  </a:lnTo>
+                  <a:lnTo>
+                    <a:pt x="0" y="3429000"/>
                   </a:lnTo>
                   <a:close/>
                 </a:path>
@@ -1110,7 +1171,7 @@
             <a:solidFill>
               <a:srgbClr val="EFEEEB"/>
             </a:solidFill>
-            <a:ln w="18650" cap="rnd">
+            <a:ln w="11906" cap="rnd">
               <a:solidFill>
                 <a:srgbClr val="040000"/>
               </a:solidFill>
@@ -1121,28 +1182,28 @@
       </p:grpSp>
       <p:grpSp>
         <p:nvGrpSpPr>
-          <p:cNvPr id="4" name="left wall"/>
+          <p:cNvPr id="6" name="Floor"/>
           <p:cNvGrpSpPr/>
           <p:nvPr/>
         </p:nvGrpSpPr>
         <p:grpSpPr>
           <a:xfrm>
-            <a:off x="142113" y="9325"/>
-            <a:ext cx="1012322" cy="5015360"/>
-            <a:chOff x="3342513" y="590350"/>
-            <a:chExt cx="1012322" cy="5015360"/>
+            <a:off x="38100" y="4324350"/>
+            <a:ext cx="5715000" cy="1143000"/>
+            <a:chOff x="3238500" y="4905375"/>
+            <a:chExt cx="5715000" cy="1143000"/>
           </a:xfrm>
         </p:grpSpPr>
         <p:sp>
           <p:nvSpPr>
-            <p:cNvPr id="5" name="left wall 1"/>
+            <p:cNvPr id="7" name="Floor 2"/>
             <p:cNvSpPr/>
             <p:nvPr/>
           </p:nvSpPr>
           <p:spPr>
             <a:xfrm>
-              <a:off x="3342513" y="590350"/>
-              <a:ext cx="1012322" cy="5015360"/>
+              <a:off x="3238500" y="4905375"/>
+              <a:ext cx="5715000" cy="1143000"/>
             </a:xfrm>
             <a:custGeom>
               <a:avLst/>
@@ -1151,75 +1212,27 @@
               <a:cxnLst/>
               <a:rect l="0" t="0" r="r" b="b"/>
               <a:pathLst>
-                <a:path w="1012322" h="5015360" fill="norm">
-                  <a:moveTo>
-                    <a:pt x="0" y="661329"/>
+                <a:path w="5715000" h="1143000" fill="norm">
+                  <a:moveTo>
+                    <a:pt x="1190625" y="0"/>
                   </a:moveTo>
                   <a:lnTo>
-                    <a:pt x="0" y="5015360"/>
+                    <a:pt x="4524375" y="0"/>
                   </a:lnTo>
                   <a:lnTo>
-                    <a:pt x="1012322" y="3775134"/>
+                    <a:pt x="5715000" y="1143000"/>
                   </a:lnTo>
                   <a:lnTo>
-                    <a:pt x="1012322" y="0"/>
-                  </a:lnTo>
-                  <a:lnTo>
-                    <a:pt x="0" y="661329"/>
+                    <a:pt x="0" y="1143000"/>
                   </a:lnTo>
                   <a:close/>
                 </a:path>
               </a:pathLst>
             </a:custGeom>
             <a:solidFill>
-              <a:srgbClr val="D5D3D1"/>
+              <a:srgbClr val="E0DFDC"/>
             </a:solidFill>
-            <a:ln w="0" cap="rnd">
-              <a:noFill/>
-              <a:round/>
-            </a:ln>
-          </p:spPr>
-        </p:sp>
-        <p:sp>
-          <p:nvSpPr>
-            <p:cNvPr id="6" name="left wall 2"/>
-            <p:cNvSpPr/>
-            <p:nvPr/>
-          </p:nvSpPr>
-          <p:spPr>
-            <a:xfrm>
-              <a:off x="3342513" y="590350"/>
-              <a:ext cx="1012322" cy="5015360"/>
-            </a:xfrm>
-            <a:custGeom>
-              <a:avLst/>
-              <a:gdLst/>
-              <a:ahLst/>
-              <a:cxnLst/>
-              <a:rect l="0" t="0" r="r" b="b"/>
-              <a:pathLst>
-                <a:path w="1012322" h="5015360" fill="none">
-                  <a:moveTo>
-                    <a:pt x="0" y="661329"/>
-                  </a:moveTo>
-                  <a:lnTo>
-                    <a:pt x="0" y="5015360"/>
-                  </a:lnTo>
-                  <a:lnTo>
-                    <a:pt x="1012322" y="3775134"/>
-                  </a:lnTo>
-                  <a:lnTo>
-                    <a:pt x="1012322" y="0"/>
-                  </a:lnTo>
-                  <a:lnTo>
-                    <a:pt x="0" y="661329"/>
-                  </a:lnTo>
-                  <a:close/>
-                </a:path>
-              </a:pathLst>
-            </a:custGeom>
-            <a:noFill/>
-            <a:ln w="18650" cap="rnd">
+            <a:ln w="11906" cap="rnd">
               <a:solidFill>
                 <a:srgbClr val="040000"/>
               </a:solidFill>
@@ -1230,28 +1243,28 @@
       </p:grpSp>
       <p:grpSp>
         <p:nvGrpSpPr>
-          <p:cNvPr id="7" name="right wall"/>
+          <p:cNvPr id="8" name="left wall"/>
           <p:cNvGrpSpPr/>
           <p:nvPr/>
         </p:nvGrpSpPr>
         <p:grpSpPr>
           <a:xfrm>
-            <a:off x="4636765" y="9325"/>
-            <a:ext cx="1012322" cy="5015360"/>
-            <a:chOff x="7837165" y="590350"/>
-            <a:chExt cx="1012322" cy="5015360"/>
+            <a:off x="38100" y="38100"/>
+            <a:ext cx="1190625" cy="5429250"/>
+            <a:chOff x="3238500" y="619125"/>
+            <a:chExt cx="1190625" cy="5429250"/>
           </a:xfrm>
         </p:grpSpPr>
         <p:sp>
           <p:nvSpPr>
-            <p:cNvPr id="8" name="right wall 3"/>
+            <p:cNvPr id="9" name="left wall 3"/>
             <p:cNvSpPr/>
             <p:nvPr/>
           </p:nvSpPr>
           <p:spPr>
             <a:xfrm>
-              <a:off x="7846490" y="607881"/>
-              <a:ext cx="993672" cy="4971719"/>
+              <a:off x="3238500" y="619125"/>
+              <a:ext cx="1190625" cy="5429250"/>
             </a:xfrm>
             <a:custGeom>
               <a:avLst/>
@@ -1260,21 +1273,18 @@
               <a:cxnLst/>
               <a:rect l="0" t="0" r="r" b="b"/>
               <a:pathLst>
-                <a:path w="993672" h="4971719" fill="norm">
-                  <a:moveTo>
-                    <a:pt x="0" y="3754246"/>
+                <a:path w="1190625" h="5429250" fill="norm">
+                  <a:moveTo>
+                    <a:pt x="0" y="0"/>
                   </a:moveTo>
                   <a:lnTo>
-                    <a:pt x="0" y="0"/>
+                    <a:pt x="1190625" y="857250"/>
                   </a:lnTo>
                   <a:lnTo>
-                    <a:pt x="993672" y="649020"/>
+                    <a:pt x="1190625" y="4286250"/>
                   </a:lnTo>
                   <a:lnTo>
-                    <a:pt x="993672" y="4971719"/>
-                  </a:lnTo>
-                  <a:lnTo>
-                    <a:pt x="0" y="3754246"/>
+                    <a:pt x="0" y="5429250"/>
                   </a:lnTo>
                   <a:close/>
                 </a:path>
@@ -1283,117 +1293,7 @@
             <a:solidFill>
               <a:srgbClr val="D5D3D1"/>
             </a:solidFill>
-            <a:ln w="0" cap="rnd">
-              <a:noFill/>
-              <a:round/>
-            </a:ln>
-          </p:spPr>
-        </p:sp>
-        <p:sp>
-          <p:nvSpPr>
-            <p:cNvPr id="9" name="right wall 4"/>
-            <p:cNvSpPr/>
-            <p:nvPr/>
-          </p:nvSpPr>
-          <p:spPr>
-            <a:xfrm>
-              <a:off x="7837165" y="590350"/>
-              <a:ext cx="1012322" cy="5015360"/>
-            </a:xfrm>
-            <a:custGeom>
-              <a:avLst/>
-              <a:gdLst/>
-              <a:ahLst/>
-              <a:cxnLst/>
-              <a:rect l="0" t="0" r="r" b="b"/>
-              <a:pathLst>
-                <a:path w="1012322" h="5015360" fill="norm">
-                  <a:moveTo>
-                    <a:pt x="18650" y="34689"/>
-                  </a:moveTo>
-                  <a:lnTo>
-                    <a:pt x="993672" y="671400"/>
-                  </a:lnTo>
-                  <a:lnTo>
-                    <a:pt x="993672" y="4963140"/>
-                  </a:lnTo>
-                  <a:lnTo>
-                    <a:pt x="18650" y="3768420"/>
-                  </a:lnTo>
-                  <a:lnTo>
-                    <a:pt x="18650" y="34689"/>
-                  </a:lnTo>
-                  <a:moveTo>
-                    <a:pt x="0" y="0"/>
-                  </a:moveTo>
-                  <a:lnTo>
-                    <a:pt x="0" y="3774761"/>
-                  </a:lnTo>
-                  <a:lnTo>
-                    <a:pt x="1012322" y="5015360"/>
-                  </a:lnTo>
-                  <a:lnTo>
-                    <a:pt x="1012322" y="661329"/>
-                  </a:lnTo>
-                  <a:lnTo>
-                    <a:pt x="0" y="0"/>
-                  </a:lnTo>
-                  <a:lnTo>
-                    <a:pt x="0" y="0"/>
-                  </a:lnTo>
-                  <a:close/>
-                </a:path>
-              </a:pathLst>
-            </a:custGeom>
-            <a:solidFill>
-              <a:srgbClr val="D4D3D0"/>
-            </a:solidFill>
-            <a:ln w="0" cap="rnd">
-              <a:noFill/>
-              <a:round/>
-            </a:ln>
-          </p:spPr>
-        </p:sp>
-        <p:sp>
-          <p:nvSpPr>
-            <p:cNvPr id="10" name="right wall 5"/>
-            <p:cNvSpPr/>
-            <p:nvPr/>
-          </p:nvSpPr>
-          <p:spPr>
-            <a:xfrm>
-              <a:off x="7837165" y="590350"/>
-              <a:ext cx="1012322" cy="5015360"/>
-            </a:xfrm>
-            <a:custGeom>
-              <a:avLst/>
-              <a:gdLst/>
-              <a:ahLst/>
-              <a:cxnLst/>
-              <a:rect l="0" t="0" r="r" b="b"/>
-              <a:pathLst>
-                <a:path w="1012322" h="5015360" fill="none">
-                  <a:moveTo>
-                    <a:pt x="1012322" y="661329"/>
-                  </a:moveTo>
-                  <a:lnTo>
-                    <a:pt x="1012322" y="5015360"/>
-                  </a:lnTo>
-                  <a:lnTo>
-                    <a:pt x="0" y="3775134"/>
-                  </a:lnTo>
-                  <a:lnTo>
-                    <a:pt x="0" y="0"/>
-                  </a:lnTo>
-                  <a:lnTo>
-                    <a:pt x="1012322" y="661329"/>
-                  </a:lnTo>
-                  <a:close/>
-                </a:path>
-              </a:pathLst>
-            </a:custGeom>
-            <a:noFill/>
-            <a:ln w="18650" cap="rnd">
+            <a:ln w="11906" cap="rnd">
               <a:solidFill>
                 <a:srgbClr val="040000"/>
               </a:solidFill>
@@ -1404,28 +1304,28 @@
       </p:grpSp>
       <p:grpSp>
         <p:nvGrpSpPr>
-          <p:cNvPr id="11" name="Box frame"/>
+          <p:cNvPr id="10" name="right wall"/>
           <p:cNvGrpSpPr/>
           <p:nvPr/>
         </p:nvGrpSpPr>
         <p:grpSpPr>
           <a:xfrm>
-            <a:off x="9325" y="9325"/>
-            <a:ext cx="5772550" cy="661329"/>
-            <a:chOff x="3209725" y="590350"/>
-            <a:chExt cx="5772550" cy="661329"/>
+            <a:off x="4562475" y="38100"/>
+            <a:ext cx="1190625" cy="5429250"/>
+            <a:chOff x="7762875" y="619125"/>
+            <a:chExt cx="1190625" cy="5429250"/>
           </a:xfrm>
         </p:grpSpPr>
         <p:sp>
           <p:nvSpPr>
-            <p:cNvPr id="12" name="Box frame 6"/>
+            <p:cNvPr id="11" name="right wall 4"/>
             <p:cNvSpPr/>
             <p:nvPr/>
           </p:nvSpPr>
           <p:spPr>
             <a:xfrm>
-              <a:off x="3209725" y="590350"/>
-              <a:ext cx="1142126" cy="661329"/>
+              <a:off x="7762875" y="619125"/>
+              <a:ext cx="1190625" cy="5429250"/>
             </a:xfrm>
             <a:custGeom>
               <a:avLst/>
@@ -1434,343 +1334,27 @@
               <a:cxnLst/>
               <a:rect l="0" t="0" r="r" b="b"/>
               <a:pathLst>
-                <a:path w="1142126" h="661329" fill="norm">
-                  <a:moveTo>
-                    <a:pt x="0" y="661329"/>
+                <a:path w="1190625" h="5429250" fill="norm">
+                  <a:moveTo>
+                    <a:pt x="0" y="857250"/>
                   </a:moveTo>
                   <a:lnTo>
-                    <a:pt x="1007846" y="0"/>
+                    <a:pt x="1190625" y="0"/>
                   </a:lnTo>
                   <a:lnTo>
-                    <a:pt x="1142126" y="0"/>
+                    <a:pt x="1190625" y="5429250"/>
                   </a:lnTo>
                   <a:lnTo>
-                    <a:pt x="132788" y="661329"/>
-                  </a:lnTo>
-                  <a:lnTo>
-                    <a:pt x="0" y="661329"/>
+                    <a:pt x="0" y="4286250"/>
                   </a:lnTo>
                   <a:close/>
                 </a:path>
               </a:pathLst>
             </a:custGeom>
             <a:solidFill>
-              <a:srgbClr val="EFEEEB"/>
+              <a:srgbClr val="D5D3D1"/>
             </a:solidFill>
-            <a:ln w="0" cap="rnd">
-              <a:noFill/>
-              <a:round/>
-            </a:ln>
-          </p:spPr>
-        </p:sp>
-        <p:sp>
-          <p:nvSpPr>
-            <p:cNvPr id="13" name="Box frame 7"/>
-            <p:cNvSpPr/>
-            <p:nvPr/>
-          </p:nvSpPr>
-          <p:spPr>
-            <a:xfrm>
-              <a:off x="3209725" y="590350"/>
-              <a:ext cx="1142126" cy="661329"/>
-            </a:xfrm>
-            <a:custGeom>
-              <a:avLst/>
-              <a:gdLst/>
-              <a:ahLst/>
-              <a:cxnLst/>
-              <a:rect l="0" t="0" r="r" b="b"/>
-              <a:pathLst>
-                <a:path w="1142126" h="661329" fill="none">
-                  <a:moveTo>
-                    <a:pt x="0" y="661329"/>
-                  </a:moveTo>
-                  <a:lnTo>
-                    <a:pt x="1007846" y="0"/>
-                  </a:lnTo>
-                  <a:lnTo>
-                    <a:pt x="1142126" y="0"/>
-                  </a:lnTo>
-                  <a:lnTo>
-                    <a:pt x="132788" y="661329"/>
-                  </a:lnTo>
-                  <a:lnTo>
-                    <a:pt x="0" y="661329"/>
-                  </a:lnTo>
-                  <a:close/>
-                </a:path>
-              </a:pathLst>
-            </a:custGeom>
-            <a:noFill/>
-            <a:ln w="9325" cap="rnd">
-              <a:solidFill>
-                <a:srgbClr val="4D4D4D"/>
-              </a:solidFill>
-              <a:round/>
-            </a:ln>
-          </p:spPr>
-        </p:sp>
-        <p:sp>
-          <p:nvSpPr>
-            <p:cNvPr id="14" name="Box frame 8"/>
-            <p:cNvSpPr/>
-            <p:nvPr/>
-          </p:nvSpPr>
-          <p:spPr>
-            <a:xfrm>
-              <a:off x="7840149" y="590350"/>
-              <a:ext cx="1142126" cy="661329"/>
-            </a:xfrm>
-            <a:custGeom>
-              <a:avLst/>
-              <a:gdLst/>
-              <a:ahLst/>
-              <a:cxnLst/>
-              <a:rect l="0" t="0" r="r" b="b"/>
-              <a:pathLst>
-                <a:path w="1142126" h="661329" fill="norm">
-                  <a:moveTo>
-                    <a:pt x="1142126" y="661329"/>
-                  </a:moveTo>
-                  <a:lnTo>
-                    <a:pt x="134280" y="0"/>
-                  </a:lnTo>
-                  <a:lnTo>
-                    <a:pt x="0" y="0"/>
-                  </a:lnTo>
-                  <a:lnTo>
-                    <a:pt x="1009338" y="661329"/>
-                  </a:lnTo>
-                  <a:lnTo>
-                    <a:pt x="1142126" y="661329"/>
-                  </a:lnTo>
-                  <a:close/>
-                </a:path>
-              </a:pathLst>
-            </a:custGeom>
-            <a:solidFill>
-              <a:srgbClr val="EFEEEB"/>
-            </a:solidFill>
-            <a:ln w="0" cap="rnd">
-              <a:noFill/>
-              <a:round/>
-            </a:ln>
-          </p:spPr>
-        </p:sp>
-        <p:sp>
-          <p:nvSpPr>
-            <p:cNvPr id="15" name="Box frame 9"/>
-            <p:cNvSpPr/>
-            <p:nvPr/>
-          </p:nvSpPr>
-          <p:spPr>
-            <a:xfrm>
-              <a:off x="7840149" y="590350"/>
-              <a:ext cx="1142126" cy="661329"/>
-            </a:xfrm>
-            <a:custGeom>
-              <a:avLst/>
-              <a:gdLst/>
-              <a:ahLst/>
-              <a:cxnLst/>
-              <a:rect l="0" t="0" r="r" b="b"/>
-              <a:pathLst>
-                <a:path w="1142126" h="661329" fill="none">
-                  <a:moveTo>
-                    <a:pt x="1142126" y="661329"/>
-                  </a:moveTo>
-                  <a:lnTo>
-                    <a:pt x="134280" y="0"/>
-                  </a:lnTo>
-                  <a:lnTo>
-                    <a:pt x="0" y="0"/>
-                  </a:lnTo>
-                  <a:lnTo>
-                    <a:pt x="1009338" y="661329"/>
-                  </a:lnTo>
-                  <a:lnTo>
-                    <a:pt x="1142126" y="661329"/>
-                  </a:lnTo>
-                  <a:close/>
-                </a:path>
-              </a:pathLst>
-            </a:custGeom>
-            <a:noFill/>
-            <a:ln w="9325" cap="rnd">
-              <a:solidFill>
-                <a:srgbClr val="4D4D4D"/>
-              </a:solidFill>
-              <a:round/>
-            </a:ln>
-          </p:spPr>
-        </p:sp>
-      </p:grpSp>
-      <p:grpSp>
-        <p:nvGrpSpPr>
-          <p:cNvPr id="16" name="Floor"/>
-          <p:cNvGrpSpPr/>
-          <p:nvPr/>
-        </p:nvGrpSpPr>
-        <p:grpSpPr>
-          <a:xfrm>
-            <a:off x="142113" y="3693820"/>
-            <a:ext cx="5506974" cy="1330864"/>
-            <a:chOff x="3342513" y="4274845"/>
-            <a:chExt cx="5506974" cy="1330864"/>
-          </a:xfrm>
-        </p:grpSpPr>
-        <p:sp>
-          <p:nvSpPr>
-            <p:cNvPr id="17" name="Floor 10"/>
-            <p:cNvSpPr/>
-            <p:nvPr/>
-          </p:nvSpPr>
-          <p:spPr>
-            <a:xfrm>
-              <a:off x="3361163" y="4284170"/>
-              <a:ext cx="5469674" cy="1312214"/>
-            </a:xfrm>
-            <a:custGeom>
-              <a:avLst/>
-              <a:gdLst/>
-              <a:ahLst/>
-              <a:cxnLst/>
-              <a:rect l="0" t="0" r="r" b="b"/>
-              <a:pathLst>
-                <a:path w="5469674" h="1312214" fill="norm">
-                  <a:moveTo>
-                    <a:pt x="0" y="1312214"/>
-                  </a:moveTo>
-                  <a:lnTo>
-                    <a:pt x="998148" y="0"/>
-                  </a:lnTo>
-                  <a:lnTo>
-                    <a:pt x="4471526" y="0"/>
-                  </a:lnTo>
-                  <a:lnTo>
-                    <a:pt x="5469674" y="1312214"/>
-                  </a:lnTo>
-                  <a:lnTo>
-                    <a:pt x="0" y="1312214"/>
-                  </a:lnTo>
-                  <a:close/>
-                </a:path>
-              </a:pathLst>
-            </a:custGeom>
-            <a:solidFill>
-              <a:srgbClr val="E0DFDC"/>
-            </a:solidFill>
-            <a:ln w="0" cap="rnd">
-              <a:noFill/>
-              <a:round/>
-            </a:ln>
-          </p:spPr>
-        </p:sp>
-        <p:sp>
-          <p:nvSpPr>
-            <p:cNvPr id="18" name="Floor 11"/>
-            <p:cNvSpPr/>
-            <p:nvPr/>
-          </p:nvSpPr>
-          <p:spPr>
-            <a:xfrm>
-              <a:off x="3342513" y="4274845"/>
-              <a:ext cx="5506974" cy="1330864"/>
-            </a:xfrm>
-            <a:custGeom>
-              <a:avLst/>
-              <a:gdLst/>
-              <a:ahLst/>
-              <a:cxnLst/>
-              <a:rect l="0" t="0" r="r" b="b"/>
-              <a:pathLst>
-                <a:path w="5506974" h="1330864" fill="norm">
-                  <a:moveTo>
-                    <a:pt x="4485700" y="18650"/>
-                  </a:moveTo>
-                  <a:lnTo>
-                    <a:pt x="5469674" y="1312214"/>
-                  </a:lnTo>
-                  <a:lnTo>
-                    <a:pt x="38046" y="1312214"/>
-                  </a:lnTo>
-                  <a:lnTo>
-                    <a:pt x="1022020" y="18650"/>
-                  </a:lnTo>
-                  <a:lnTo>
-                    <a:pt x="4486073" y="18650"/>
-                  </a:lnTo>
-                  <a:moveTo>
-                    <a:pt x="4494652" y="0"/>
-                  </a:moveTo>
-                  <a:lnTo>
-                    <a:pt x="1012322" y="0"/>
-                  </a:lnTo>
-                  <a:lnTo>
-                    <a:pt x="0" y="1330864"/>
-                  </a:lnTo>
-                  <a:lnTo>
-                    <a:pt x="5506974" y="1330864"/>
-                  </a:lnTo>
-                  <a:lnTo>
-                    <a:pt x="4494652" y="0"/>
-                  </a:lnTo>
-                  <a:lnTo>
-                    <a:pt x="4494652" y="0"/>
-                  </a:lnTo>
-                  <a:close/>
-                </a:path>
-              </a:pathLst>
-            </a:custGeom>
-            <a:solidFill>
-              <a:srgbClr val="D4D3D0"/>
-            </a:solidFill>
-            <a:ln w="0" cap="rnd">
-              <a:noFill/>
-              <a:round/>
-            </a:ln>
-          </p:spPr>
-        </p:sp>
-        <p:sp>
-          <p:nvSpPr>
-            <p:cNvPr id="19" name="Floor 12"/>
-            <p:cNvSpPr/>
-            <p:nvPr/>
-          </p:nvSpPr>
-          <p:spPr>
-            <a:xfrm>
-              <a:off x="3342513" y="4274845"/>
-              <a:ext cx="5506974" cy="1330864"/>
-            </a:xfrm>
-            <a:custGeom>
-              <a:avLst/>
-              <a:gdLst/>
-              <a:ahLst/>
-              <a:cxnLst/>
-              <a:rect l="0" t="0" r="r" b="b"/>
-              <a:pathLst>
-                <a:path w="5506974" h="1330864" fill="none">
-                  <a:moveTo>
-                    <a:pt x="5506974" y="1330864"/>
-                  </a:moveTo>
-                  <a:lnTo>
-                    <a:pt x="0" y="1330864"/>
-                  </a:lnTo>
-                  <a:lnTo>
-                    <a:pt x="1012322" y="0"/>
-                  </a:lnTo>
-                  <a:lnTo>
-                    <a:pt x="4494652" y="0"/>
-                  </a:lnTo>
-                  <a:lnTo>
-                    <a:pt x="5506974" y="1330864"/>
-                  </a:lnTo>
-                  <a:close/>
-                </a:path>
-              </a:pathLst>
-            </a:custGeom>
-            <a:noFill/>
-            <a:ln w="18650" cap="rnd">
+            <a:ln w="11906" cap="rnd">
               <a:solidFill>
                 <a:srgbClr val="040000"/>
               </a:solidFill>
@@ -1781,28 +1365,28 @@
       </p:grpSp>
       <p:grpSp>
         <p:nvGrpSpPr>
-          <p:cNvPr id="20" name="left House light column 3 row 2"/>
+          <p:cNvPr id="12" name="Box frame"/>
           <p:cNvGrpSpPr/>
           <p:nvPr/>
         </p:nvGrpSpPr>
         <p:grpSpPr>
           <a:xfrm>
-            <a:off x="931026" y="1276881"/>
-            <a:ext cx="508543" cy="342276"/>
-            <a:chOff x="4131426" y="1857906"/>
-            <a:chExt cx="508543" cy="342276"/>
+            <a:off x="38100" y="38100"/>
+            <a:ext cx="5715095" cy="5715000"/>
+            <a:chOff x="3238500" y="619125"/>
+            <a:chExt cx="5715095" cy="5715000"/>
           </a:xfrm>
         </p:grpSpPr>
         <p:sp>
           <p:nvSpPr>
-            <p:cNvPr id="21" name="left House light column 3 row 2 3"/>
+            <p:cNvPr id="13" name="Box frame 5"/>
             <p:cNvSpPr/>
             <p:nvPr/>
           </p:nvSpPr>
           <p:spPr>
             <a:xfrm>
-              <a:off x="4131426" y="1858534"/>
-              <a:ext cx="102777" cy="341648"/>
+              <a:off x="3238500" y="619125"/>
+              <a:ext cx="5715000" cy="95"/>
             </a:xfrm>
             <a:custGeom>
               <a:avLst/>
@@ -1811,45 +1395,698 @@
               <a:cxnLst/>
               <a:rect l="0" t="0" r="r" b="b"/>
               <a:pathLst>
-                <a:path w="102777" h="341648" fill="norm">
-                  <a:moveTo>
-                    <a:pt x="102777" y="341333"/>
+                <a:path w="5715000" h="95" fill="none">
+                  <a:moveTo>
+                    <a:pt x="0" y="0"/>
                   </a:moveTo>
                   <a:lnTo>
-                    <a:pt x="54689" y="341333"/>
+                    <a:pt x="5715000" y="0"/>
                   </a:lnTo>
-                  <a:cubicBezTo>
-                    <a:pt x="24201" y="341333"/>
-                    <a:pt x="0" y="265272"/>
-                    <a:pt x="0" y="170981"/>
-                  </a:cubicBezTo>
-                  <a:cubicBezTo>
-                    <a:pt x="0" y="76690"/>
-                    <a:pt x="24201" y="0"/>
-                    <a:pt x="54689" y="0"/>
-                  </a:cubicBezTo>
+                </a:path>
+              </a:pathLst>
+            </a:custGeom>
+            <a:noFill/>
+            <a:ln w="23813" cap="rnd">
+              <a:solidFill>
+                <a:srgbClr val="040000"/>
+              </a:solidFill>
+              <a:round/>
+            </a:ln>
+          </p:spPr>
+        </p:sp>
+        <p:sp>
+          <p:nvSpPr>
+            <p:cNvPr id="14" name="Box frame 6"/>
+            <p:cNvSpPr/>
+            <p:nvPr/>
+          </p:nvSpPr>
+          <p:spPr>
+            <a:xfrm>
+              <a:off x="3238500" y="619125"/>
+              <a:ext cx="5715000" cy="95"/>
+            </a:xfrm>
+            <a:custGeom>
+              <a:avLst/>
+              <a:gdLst/>
+              <a:ahLst/>
+              <a:cxnLst/>
+              <a:rect l="0" t="0" r="r" b="b"/>
+              <a:pathLst>
+                <a:path w="5715000" h="95" fill="none">
+                  <a:moveTo>
+                    <a:pt x="0" y="0"/>
+                  </a:moveTo>
                   <a:lnTo>
-                    <a:pt x="102777" y="0"/>
+                    <a:pt x="5715000" y="0"/>
                   </a:lnTo>
-                  <a:cubicBezTo>
-                    <a:pt x="93977" y="0"/>
-                    <a:pt x="86119" y="5972"/>
-                    <a:pt x="79204" y="16972"/>
-                  </a:cubicBezTo>
-                  <a:cubicBezTo>
-                    <a:pt x="60346" y="44631"/>
-                    <a:pt x="47774" y="103091"/>
-                    <a:pt x="47774" y="170981"/>
-                  </a:cubicBezTo>
-                  <a:cubicBezTo>
-                    <a:pt x="47774" y="238870"/>
-                    <a:pt x="60346" y="297331"/>
-                    <a:pt x="79204" y="324990"/>
-                  </a:cubicBezTo>
-                  <a:cubicBezTo>
-                    <a:pt x="86433" y="335362"/>
-                    <a:pt x="93977" y="341648"/>
-                    <a:pt x="102777" y="341648"/>
+                </a:path>
+              </a:pathLst>
+            </a:custGeom>
+            <a:noFill/>
+            <a:ln w="9525" cap="rnd">
+              <a:solidFill>
+                <a:srgbClr val="EFEEEB"/>
+              </a:solidFill>
+              <a:round/>
+            </a:ln>
+          </p:spPr>
+        </p:sp>
+        <p:sp>
+          <p:nvSpPr>
+            <p:cNvPr id="15" name="Box frame 7"/>
+            <p:cNvSpPr/>
+            <p:nvPr/>
+          </p:nvSpPr>
+          <p:spPr>
+            <a:xfrm>
+              <a:off x="3238500" y="619125"/>
+              <a:ext cx="1190625" cy="857250"/>
+            </a:xfrm>
+            <a:custGeom>
+              <a:avLst/>
+              <a:gdLst/>
+              <a:ahLst/>
+              <a:cxnLst/>
+              <a:rect l="0" t="0" r="r" b="b"/>
+              <a:pathLst>
+                <a:path w="1190625" h="857250" fill="none">
+                  <a:moveTo>
+                    <a:pt x="0" y="0"/>
+                  </a:moveTo>
+                  <a:lnTo>
+                    <a:pt x="1190625" y="857250"/>
+                  </a:lnTo>
+                </a:path>
+              </a:pathLst>
+            </a:custGeom>
+            <a:noFill/>
+            <a:ln w="23813" cap="rnd">
+              <a:solidFill>
+                <a:srgbClr val="040000"/>
+              </a:solidFill>
+              <a:round/>
+            </a:ln>
+          </p:spPr>
+        </p:sp>
+        <p:sp>
+          <p:nvSpPr>
+            <p:cNvPr id="16" name="Box frame 8"/>
+            <p:cNvSpPr/>
+            <p:nvPr/>
+          </p:nvSpPr>
+          <p:spPr>
+            <a:xfrm>
+              <a:off x="3238500" y="619125"/>
+              <a:ext cx="1190625" cy="857250"/>
+            </a:xfrm>
+            <a:custGeom>
+              <a:avLst/>
+              <a:gdLst/>
+              <a:ahLst/>
+              <a:cxnLst/>
+              <a:rect l="0" t="0" r="r" b="b"/>
+              <a:pathLst>
+                <a:path w="1190625" h="857250" fill="none">
+                  <a:moveTo>
+                    <a:pt x="0" y="0"/>
+                  </a:moveTo>
+                  <a:lnTo>
+                    <a:pt x="1190625" y="857250"/>
+                  </a:lnTo>
+                </a:path>
+              </a:pathLst>
+            </a:custGeom>
+            <a:noFill/>
+            <a:ln w="9525" cap="rnd">
+              <a:solidFill>
+                <a:srgbClr val="EFEEEB"/>
+              </a:solidFill>
+              <a:round/>
+            </a:ln>
+          </p:spPr>
+        </p:sp>
+        <p:sp>
+          <p:nvSpPr>
+            <p:cNvPr id="17" name="Box frame 9"/>
+            <p:cNvSpPr/>
+            <p:nvPr/>
+          </p:nvSpPr>
+          <p:spPr>
+            <a:xfrm>
+              <a:off x="7762875" y="619125"/>
+              <a:ext cx="1190625" cy="857250"/>
+            </a:xfrm>
+            <a:custGeom>
+              <a:avLst/>
+              <a:gdLst/>
+              <a:ahLst/>
+              <a:cxnLst/>
+              <a:rect l="0" t="0" r="r" b="b"/>
+              <a:pathLst>
+                <a:path w="1190625" h="857250" fill="none">
+                  <a:moveTo>
+                    <a:pt x="0" y="857250"/>
+                  </a:moveTo>
+                  <a:lnTo>
+                    <a:pt x="1190625" y="0"/>
+                  </a:lnTo>
+                </a:path>
+              </a:pathLst>
+            </a:custGeom>
+            <a:noFill/>
+            <a:ln w="23813" cap="rnd">
+              <a:solidFill>
+                <a:srgbClr val="040000"/>
+              </a:solidFill>
+              <a:round/>
+            </a:ln>
+          </p:spPr>
+        </p:sp>
+        <p:sp>
+          <p:nvSpPr>
+            <p:cNvPr id="18" name="Box frame 10"/>
+            <p:cNvSpPr/>
+            <p:nvPr/>
+          </p:nvSpPr>
+          <p:spPr>
+            <a:xfrm>
+              <a:off x="7762875" y="619125"/>
+              <a:ext cx="1190625" cy="857250"/>
+            </a:xfrm>
+            <a:custGeom>
+              <a:avLst/>
+              <a:gdLst/>
+              <a:ahLst/>
+              <a:cxnLst/>
+              <a:rect l="0" t="0" r="r" b="b"/>
+              <a:pathLst>
+                <a:path w="1190625" h="857250" fill="none">
+                  <a:moveTo>
+                    <a:pt x="0" y="857250"/>
+                  </a:moveTo>
+                  <a:lnTo>
+                    <a:pt x="1190625" y="0"/>
+                  </a:lnTo>
+                </a:path>
+              </a:pathLst>
+            </a:custGeom>
+            <a:noFill/>
+            <a:ln w="9525" cap="rnd">
+              <a:solidFill>
+                <a:srgbClr val="EFEEEB"/>
+              </a:solidFill>
+              <a:round/>
+            </a:ln>
+          </p:spPr>
+        </p:sp>
+        <p:sp>
+          <p:nvSpPr>
+            <p:cNvPr id="19" name="Box frame 11"/>
+            <p:cNvSpPr/>
+            <p:nvPr/>
+          </p:nvSpPr>
+          <p:spPr>
+            <a:xfrm>
+              <a:off x="4429125" y="1476375"/>
+              <a:ext cx="3333750" cy="95"/>
+            </a:xfrm>
+            <a:custGeom>
+              <a:avLst/>
+              <a:gdLst/>
+              <a:ahLst/>
+              <a:cxnLst/>
+              <a:rect l="0" t="0" r="r" b="b"/>
+              <a:pathLst>
+                <a:path w="3333750" h="95" fill="none">
+                  <a:moveTo>
+                    <a:pt x="0" y="0"/>
+                  </a:moveTo>
+                  <a:lnTo>
+                    <a:pt x="3333750" y="0"/>
+                  </a:lnTo>
+                </a:path>
+              </a:pathLst>
+            </a:custGeom>
+            <a:noFill/>
+            <a:ln w="23813" cap="rnd">
+              <a:solidFill>
+                <a:srgbClr val="040000"/>
+              </a:solidFill>
+              <a:round/>
+            </a:ln>
+          </p:spPr>
+        </p:sp>
+        <p:sp>
+          <p:nvSpPr>
+            <p:cNvPr id="20" name="Box frame 12"/>
+            <p:cNvSpPr/>
+            <p:nvPr/>
+          </p:nvSpPr>
+          <p:spPr>
+            <a:xfrm>
+              <a:off x="4429125" y="1476375"/>
+              <a:ext cx="3333750" cy="95"/>
+            </a:xfrm>
+            <a:custGeom>
+              <a:avLst/>
+              <a:gdLst/>
+              <a:ahLst/>
+              <a:cxnLst/>
+              <a:rect l="0" t="0" r="r" b="b"/>
+              <a:pathLst>
+                <a:path w="3333750" h="95" fill="none">
+                  <a:moveTo>
+                    <a:pt x="0" y="0"/>
+                  </a:moveTo>
+                  <a:lnTo>
+                    <a:pt x="3333750" y="0"/>
+                  </a:lnTo>
+                </a:path>
+              </a:pathLst>
+            </a:custGeom>
+            <a:noFill/>
+            <a:ln w="9525" cap="rnd">
+              <a:solidFill>
+                <a:srgbClr val="EFEEEB"/>
+              </a:solidFill>
+              <a:round/>
+            </a:ln>
+          </p:spPr>
+        </p:sp>
+        <p:sp>
+          <p:nvSpPr>
+            <p:cNvPr id="21" name="Box frame 13"/>
+            <p:cNvSpPr/>
+            <p:nvPr/>
+          </p:nvSpPr>
+          <p:spPr>
+            <a:xfrm>
+              <a:off x="4429125" y="1476375"/>
+              <a:ext cx="95" cy="3429000"/>
+            </a:xfrm>
+            <a:custGeom>
+              <a:avLst/>
+              <a:gdLst/>
+              <a:ahLst/>
+              <a:cxnLst/>
+              <a:rect l="0" t="0" r="r" b="b"/>
+              <a:pathLst>
+                <a:path w="95" h="3429000" fill="none">
+                  <a:moveTo>
+                    <a:pt x="0" y="0"/>
+                  </a:moveTo>
+                  <a:lnTo>
+                    <a:pt x="0" y="3429000"/>
+                  </a:lnTo>
+                </a:path>
+              </a:pathLst>
+            </a:custGeom>
+            <a:noFill/>
+            <a:ln w="23813" cap="rnd">
+              <a:solidFill>
+                <a:srgbClr val="040000"/>
+              </a:solidFill>
+              <a:round/>
+            </a:ln>
+          </p:spPr>
+        </p:sp>
+        <p:sp>
+          <p:nvSpPr>
+            <p:cNvPr id="22" name="Box frame 14"/>
+            <p:cNvSpPr/>
+            <p:nvPr/>
+          </p:nvSpPr>
+          <p:spPr>
+            <a:xfrm>
+              <a:off x="4429125" y="1476375"/>
+              <a:ext cx="95" cy="3429000"/>
+            </a:xfrm>
+            <a:custGeom>
+              <a:avLst/>
+              <a:gdLst/>
+              <a:ahLst/>
+              <a:cxnLst/>
+              <a:rect l="0" t="0" r="r" b="b"/>
+              <a:pathLst>
+                <a:path w="95" h="3429000" fill="none">
+                  <a:moveTo>
+                    <a:pt x="0" y="0"/>
+                  </a:moveTo>
+                  <a:lnTo>
+                    <a:pt x="0" y="3429000"/>
+                  </a:lnTo>
+                </a:path>
+              </a:pathLst>
+            </a:custGeom>
+            <a:noFill/>
+            <a:ln w="9525" cap="rnd">
+              <a:solidFill>
+                <a:srgbClr val="EFEEEB"/>
+              </a:solidFill>
+              <a:round/>
+            </a:ln>
+          </p:spPr>
+        </p:sp>
+        <p:sp>
+          <p:nvSpPr>
+            <p:cNvPr id="23" name="Box frame 15"/>
+            <p:cNvSpPr/>
+            <p:nvPr/>
+          </p:nvSpPr>
+          <p:spPr>
+            <a:xfrm>
+              <a:off x="7762875" y="1476375"/>
+              <a:ext cx="95" cy="3429000"/>
+            </a:xfrm>
+            <a:custGeom>
+              <a:avLst/>
+              <a:gdLst/>
+              <a:ahLst/>
+              <a:cxnLst/>
+              <a:rect l="0" t="0" r="r" b="b"/>
+              <a:pathLst>
+                <a:path w="95" h="3429000" fill="none">
+                  <a:moveTo>
+                    <a:pt x="0" y="0"/>
+                  </a:moveTo>
+                  <a:lnTo>
+                    <a:pt x="0" y="3429000"/>
+                  </a:lnTo>
+                </a:path>
+              </a:pathLst>
+            </a:custGeom>
+            <a:noFill/>
+            <a:ln w="23813" cap="rnd">
+              <a:solidFill>
+                <a:srgbClr val="040000"/>
+              </a:solidFill>
+              <a:round/>
+            </a:ln>
+          </p:spPr>
+        </p:sp>
+        <p:sp>
+          <p:nvSpPr>
+            <p:cNvPr id="24" name="Box frame 16"/>
+            <p:cNvSpPr/>
+            <p:nvPr/>
+          </p:nvSpPr>
+          <p:spPr>
+            <a:xfrm>
+              <a:off x="7762875" y="1476375"/>
+              <a:ext cx="95" cy="3429000"/>
+            </a:xfrm>
+            <a:custGeom>
+              <a:avLst/>
+              <a:gdLst/>
+              <a:ahLst/>
+              <a:cxnLst/>
+              <a:rect l="0" t="0" r="r" b="b"/>
+              <a:pathLst>
+                <a:path w="95" h="3429000" fill="none">
+                  <a:moveTo>
+                    <a:pt x="0" y="0"/>
+                  </a:moveTo>
+                  <a:lnTo>
+                    <a:pt x="0" y="3429000"/>
+                  </a:lnTo>
+                </a:path>
+              </a:pathLst>
+            </a:custGeom>
+            <a:noFill/>
+            <a:ln w="9525" cap="rnd">
+              <a:solidFill>
+                <a:srgbClr val="EFEEEB"/>
+              </a:solidFill>
+              <a:round/>
+            </a:ln>
+          </p:spPr>
+        </p:sp>
+        <p:sp>
+          <p:nvSpPr>
+            <p:cNvPr id="25" name="Box frame 17"/>
+            <p:cNvSpPr/>
+            <p:nvPr/>
+          </p:nvSpPr>
+          <p:spPr>
+            <a:xfrm>
+              <a:off x="3238500" y="619125"/>
+              <a:ext cx="95" cy="5429250"/>
+            </a:xfrm>
+            <a:custGeom>
+              <a:avLst/>
+              <a:gdLst/>
+              <a:ahLst/>
+              <a:cxnLst/>
+              <a:rect l="0" t="0" r="r" b="b"/>
+              <a:pathLst>
+                <a:path w="95" h="5429250" fill="none">
+                  <a:moveTo>
+                    <a:pt x="0" y="0"/>
+                  </a:moveTo>
+                  <a:lnTo>
+                    <a:pt x="0" y="5429250"/>
+                  </a:lnTo>
+                </a:path>
+              </a:pathLst>
+            </a:custGeom>
+            <a:noFill/>
+            <a:ln w="23813" cap="rnd">
+              <a:solidFill>
+                <a:srgbClr val="040000"/>
+              </a:solidFill>
+              <a:round/>
+            </a:ln>
+          </p:spPr>
+        </p:sp>
+        <p:sp>
+          <p:nvSpPr>
+            <p:cNvPr id="26" name="Box frame 18"/>
+            <p:cNvSpPr/>
+            <p:nvPr/>
+          </p:nvSpPr>
+          <p:spPr>
+            <a:xfrm>
+              <a:off x="3238500" y="619125"/>
+              <a:ext cx="95" cy="5429250"/>
+            </a:xfrm>
+            <a:custGeom>
+              <a:avLst/>
+              <a:gdLst/>
+              <a:ahLst/>
+              <a:cxnLst/>
+              <a:rect l="0" t="0" r="r" b="b"/>
+              <a:pathLst>
+                <a:path w="95" h="5429250" fill="none">
+                  <a:moveTo>
+                    <a:pt x="0" y="0"/>
+                  </a:moveTo>
+                  <a:lnTo>
+                    <a:pt x="0" y="5429250"/>
+                  </a:lnTo>
+                </a:path>
+              </a:pathLst>
+            </a:custGeom>
+            <a:noFill/>
+            <a:ln w="9525" cap="rnd">
+              <a:solidFill>
+                <a:srgbClr val="EFEEEB"/>
+              </a:solidFill>
+              <a:round/>
+            </a:ln>
+          </p:spPr>
+        </p:sp>
+        <p:sp>
+          <p:nvSpPr>
+            <p:cNvPr id="27" name="Box frame 19"/>
+            <p:cNvSpPr/>
+            <p:nvPr/>
+          </p:nvSpPr>
+          <p:spPr>
+            <a:xfrm>
+              <a:off x="8953500" y="619125"/>
+              <a:ext cx="95" cy="5429250"/>
+            </a:xfrm>
+            <a:custGeom>
+              <a:avLst/>
+              <a:gdLst/>
+              <a:ahLst/>
+              <a:cxnLst/>
+              <a:rect l="0" t="0" r="r" b="b"/>
+              <a:pathLst>
+                <a:path w="95" h="5429250" fill="none">
+                  <a:moveTo>
+                    <a:pt x="0" y="0"/>
+                  </a:moveTo>
+                  <a:lnTo>
+                    <a:pt x="0" y="5429250"/>
+                  </a:lnTo>
+                </a:path>
+              </a:pathLst>
+            </a:custGeom>
+            <a:noFill/>
+            <a:ln w="23813" cap="rnd">
+              <a:solidFill>
+                <a:srgbClr val="040000"/>
+              </a:solidFill>
+              <a:round/>
+            </a:ln>
+          </p:spPr>
+        </p:sp>
+        <p:sp>
+          <p:nvSpPr>
+            <p:cNvPr id="28" name="Box frame 20"/>
+            <p:cNvSpPr/>
+            <p:nvPr/>
+          </p:nvSpPr>
+          <p:spPr>
+            <a:xfrm>
+              <a:off x="8953500" y="619125"/>
+              <a:ext cx="95" cy="5429250"/>
+            </a:xfrm>
+            <a:custGeom>
+              <a:avLst/>
+              <a:gdLst/>
+              <a:ahLst/>
+              <a:cxnLst/>
+              <a:rect l="0" t="0" r="r" b="b"/>
+              <a:pathLst>
+                <a:path w="95" h="5429250" fill="none">
+                  <a:moveTo>
+                    <a:pt x="0" y="0"/>
+                  </a:moveTo>
+                  <a:lnTo>
+                    <a:pt x="0" y="5429250"/>
+                  </a:lnTo>
+                </a:path>
+              </a:pathLst>
+            </a:custGeom>
+            <a:noFill/>
+            <a:ln w="9525" cap="rnd">
+              <a:solidFill>
+                <a:srgbClr val="EFEEEB"/>
+              </a:solidFill>
+              <a:round/>
+            </a:ln>
+          </p:spPr>
+        </p:sp>
+        <p:sp>
+          <p:nvSpPr>
+            <p:cNvPr id="29" name="Box frame 21"/>
+            <p:cNvSpPr/>
+            <p:nvPr/>
+          </p:nvSpPr>
+          <p:spPr>
+            <a:xfrm>
+              <a:off x="3238500" y="6048375"/>
+              <a:ext cx="5715000" cy="285750"/>
+            </a:xfrm>
+            <a:custGeom>
+              <a:avLst/>
+              <a:gdLst/>
+              <a:ahLst/>
+              <a:cxnLst/>
+              <a:rect l="0" t="0" r="r" b="b"/>
+              <a:pathLst>
+                <a:path w="5715000" h="285750" fill="norm">
+                  <a:moveTo>
+                    <a:pt x="0" y="0"/>
+                  </a:moveTo>
+                  <a:lnTo>
+                    <a:pt x="5715000" y="0"/>
+                  </a:lnTo>
+                  <a:lnTo>
+                    <a:pt x="5715000" y="285750"/>
+                  </a:lnTo>
+                  <a:lnTo>
+                    <a:pt x="0" y="285750"/>
+                  </a:lnTo>
+                  <a:close/>
+                </a:path>
+              </a:pathLst>
+            </a:custGeom>
+            <a:solidFill>
+              <a:srgbClr val="EFEEEB"/>
+            </a:solidFill>
+            <a:ln w="11906" cap="rnd">
+              <a:solidFill>
+                <a:srgbClr val="040000"/>
+              </a:solidFill>
+              <a:round/>
+            </a:ln>
+          </p:spPr>
+        </p:sp>
+      </p:grpSp>
+      <p:grpSp>
+        <p:nvGrpSpPr>
+          <p:cNvPr id="30" name="left House light column 3 row 2"/>
+          <p:cNvGrpSpPr/>
+          <p:nvPr/>
+        </p:nvGrpSpPr>
+        <p:grpSpPr>
+          <a:xfrm>
+            <a:off x="1001899" y="1248029"/>
+            <a:ext cx="263976" cy="385136"/>
+            <a:chOff x="4202299" y="1829054"/>
+            <a:chExt cx="263976" cy="385136"/>
+          </a:xfrm>
+        </p:grpSpPr>
+        <p:sp>
+          <p:nvSpPr>
+            <p:cNvPr id="31" name="left House light column 3 row 2 4"/>
+            <p:cNvSpPr/>
+            <p:nvPr/>
+          </p:nvSpPr>
+          <p:spPr>
+            <a:xfrm>
+              <a:off x="4202299" y="1829054"/>
+              <a:ext cx="53350" cy="356247"/>
+            </a:xfrm>
+            <a:custGeom>
+              <a:avLst/>
+              <a:gdLst/>
+              <a:ahLst/>
+              <a:cxnLst/>
+              <a:rect l="0" t="0" r="r" b="b"/>
+              <a:pathLst>
+                <a:path w="53350" h="356247" fill="norm">
+                  <a:moveTo>
+                    <a:pt x="53350" y="355928"/>
+                  </a:moveTo>
+                  <a:lnTo>
+                    <a:pt x="28388" y="350501"/>
+                  </a:lnTo>
+                  <a:cubicBezTo>
+                    <a:pt x="12563" y="347061"/>
+                    <a:pt x="0" y="266992"/>
+                    <a:pt x="0" y="171119"/>
+                  </a:cubicBezTo>
+                  <a:cubicBezTo>
+                    <a:pt x="0" y="75246"/>
+                    <a:pt x="12563" y="0"/>
+                    <a:pt x="28388" y="3440"/>
+                  </a:cubicBezTo>
+                  <a:lnTo>
+                    <a:pt x="53350" y="8867"/>
+                  </a:lnTo>
+                  <a:cubicBezTo>
+                    <a:pt x="48782" y="7874"/>
+                    <a:pt x="44703" y="13059"/>
+                    <a:pt x="41114" y="23464"/>
+                  </a:cubicBezTo>
+                  <a:cubicBezTo>
+                    <a:pt x="31325" y="49459"/>
+                    <a:pt x="24799" y="107481"/>
+                    <a:pt x="24799" y="176510"/>
+                  </a:cubicBezTo>
+                  <a:cubicBezTo>
+                    <a:pt x="24799" y="245539"/>
+                    <a:pt x="31325" y="306399"/>
+                    <a:pt x="41114" y="336650"/>
+                  </a:cubicBezTo>
+                  <a:cubicBezTo>
+                    <a:pt x="44866" y="348012"/>
+                    <a:pt x="48782" y="355254"/>
+                    <a:pt x="53350" y="356247"/>
                   </a:cubicBezTo>
                   <a:close/>
                 </a:path>
@@ -1858,7 +2095,7 @@
             <a:solidFill>
               <a:srgbClr val="000000"/>
             </a:solidFill>
-            <a:ln w="9429" cap="rnd">
+            <a:ln w="9587" cap="rnd">
               <a:solidFill>
                 <a:srgbClr val="231815"/>
               </a:solidFill>
@@ -1868,14 +2105,14 @@
         </p:sp>
         <p:sp>
           <p:nvSpPr>
-            <p:cNvPr id="22" name="left House light column 3 row 2 4"/>
+            <p:cNvPr id="32" name="left House light column 3 row 2 5"/>
             <p:cNvSpPr/>
             <p:nvPr/>
           </p:nvSpPr>
           <p:spPr>
             <a:xfrm>
-              <a:off x="4179200" y="1857906"/>
-              <a:ext cx="109692" cy="341648"/>
+              <a:off x="4227098" y="1836288"/>
+              <a:ext cx="56939" cy="351814"/>
             </a:xfrm>
             <a:custGeom>
               <a:avLst/>
@@ -1884,39 +2121,39 @@
               <a:cxnLst/>
               <a:rect l="0" t="0" r="r" b="b"/>
               <a:pathLst>
-                <a:path w="109692" h="341648" fill="norm">
-                  <a:moveTo>
-                    <a:pt x="109692" y="171295"/>
-                  </a:moveTo>
-                  <a:cubicBezTo>
-                    <a:pt x="109692" y="265586"/>
-                    <a:pt x="85490" y="341648"/>
-                    <a:pt x="55003" y="341648"/>
-                  </a:cubicBezTo>
-                  <a:cubicBezTo>
-                    <a:pt x="46203" y="341648"/>
-                    <a:pt x="38345" y="335676"/>
-                    <a:pt x="31430" y="324990"/>
-                  </a:cubicBezTo>
-                  <a:cubicBezTo>
-                    <a:pt x="12572" y="297331"/>
-                    <a:pt x="0" y="238870"/>
-                    <a:pt x="0" y="170981"/>
-                  </a:cubicBezTo>
-                  <a:cubicBezTo>
-                    <a:pt x="0" y="103091"/>
-                    <a:pt x="12572" y="44631"/>
-                    <a:pt x="31430" y="16972"/>
-                  </a:cubicBezTo>
-                  <a:cubicBezTo>
-                    <a:pt x="38659" y="5972"/>
-                    <a:pt x="46203" y="0"/>
-                    <a:pt x="55003" y="0"/>
-                  </a:cubicBezTo>
-                  <a:cubicBezTo>
-                    <a:pt x="85490" y="0"/>
-                    <a:pt x="109692" y="76061"/>
-                    <a:pt x="109692" y="170981"/>
+                <a:path w="56939" h="351814" fill="norm">
+                  <a:moveTo>
+                    <a:pt x="56939" y="181334"/>
+                  </a:moveTo>
+                  <a:cubicBezTo>
+                    <a:pt x="56939" y="277207"/>
+                    <a:pt x="44377" y="351814"/>
+                    <a:pt x="28551" y="348374"/>
+                  </a:cubicBezTo>
+                  <a:cubicBezTo>
+                    <a:pt x="23983" y="347381"/>
+                    <a:pt x="19904" y="340422"/>
+                    <a:pt x="16315" y="328776"/>
+                  </a:cubicBezTo>
+                  <a:cubicBezTo>
+                    <a:pt x="6526" y="298525"/>
+                    <a:pt x="0" y="237665"/>
+                    <a:pt x="0" y="168636"/>
+                  </a:cubicBezTo>
+                  <a:cubicBezTo>
+                    <a:pt x="0" y="99608"/>
+                    <a:pt x="6526" y="41585"/>
+                    <a:pt x="16315" y="15590"/>
+                  </a:cubicBezTo>
+                  <a:cubicBezTo>
+                    <a:pt x="20067" y="5221"/>
+                    <a:pt x="23983" y="0"/>
+                    <a:pt x="28551" y="993"/>
+                  </a:cubicBezTo>
+                  <a:cubicBezTo>
+                    <a:pt x="44377" y="4433"/>
+                    <a:pt x="56939" y="84502"/>
+                    <a:pt x="56939" y="181014"/>
                   </a:cubicBezTo>
                   <a:close/>
                 </a:path>
@@ -1925,7 +2162,7 @@
             <a:solidFill>
               <a:srgbClr val="B3B3B3"/>
             </a:solidFill>
-            <a:ln w="9429" cap="rnd">
+            <a:ln w="9587" cap="rnd">
               <a:solidFill>
                 <a:srgbClr val="231815"/>
               </a:solidFill>
@@ -1935,14 +2172,14 @@
         </p:sp>
         <p:sp>
           <p:nvSpPr>
-            <p:cNvPr id="23" name="left House light column 3 row 2 5"/>
+            <p:cNvPr id="33" name="left House light column 3 row 2 6"/>
             <p:cNvSpPr/>
             <p:nvPr/>
           </p:nvSpPr>
           <p:spPr>
             <a:xfrm>
-              <a:off x="4265634" y="1872678"/>
-              <a:ext cx="96177" cy="110949"/>
+              <a:off x="4271964" y="1861026"/>
+              <a:ext cx="49924" cy="118486"/>
             </a:xfrm>
             <a:custGeom>
               <a:avLst/>
@@ -1951,42 +2188,42 @@
               <a:cxnLst/>
               <a:rect l="0" t="0" r="r" b="b"/>
               <a:pathLst>
-                <a:path w="96177" h="110949" fill="norm">
-                  <a:moveTo>
-                    <a:pt x="95862" y="110949"/>
+                <a:path w="49924" h="118486" fill="norm">
+                  <a:moveTo>
+                    <a:pt x="49761" y="118450"/>
                   </a:moveTo>
                   <a:lnTo>
-                    <a:pt x="0" y="110949"/>
+                    <a:pt x="0" y="107633"/>
                   </a:lnTo>
                   <a:cubicBezTo>
-                    <a:pt x="629" y="104349"/>
-                    <a:pt x="1257" y="98691"/>
-                    <a:pt x="2200" y="92719"/>
-                  </a:cubicBezTo>
-                  <a:cubicBezTo>
-                    <a:pt x="4400" y="75747"/>
-                    <a:pt x="7858" y="60032"/>
-                    <a:pt x="12258" y="47460"/>
-                  </a:cubicBezTo>
-                  <a:cubicBezTo>
-                    <a:pt x="19487" y="23887"/>
-                    <a:pt x="29230" y="7229"/>
-                    <a:pt x="40231" y="2200"/>
-                  </a:cubicBezTo>
-                  <a:cubicBezTo>
-                    <a:pt x="40859" y="2200"/>
-                    <a:pt x="40859" y="1572"/>
-                    <a:pt x="41488" y="1572"/>
-                  </a:cubicBezTo>
-                  <a:cubicBezTo>
-                    <a:pt x="43688" y="314"/>
-                    <a:pt x="45888" y="0"/>
-                    <a:pt x="48088" y="0"/>
-                  </a:cubicBezTo>
-                  <a:cubicBezTo>
-                    <a:pt x="70718" y="0"/>
-                    <a:pt x="89891" y="46203"/>
-                    <a:pt x="96177" y="110949"/>
+                    <a:pt x="326" y="100992"/>
+                    <a:pt x="653" y="95311"/>
+                    <a:pt x="1142" y="89345"/>
+                  </a:cubicBezTo>
+                  <a:cubicBezTo>
+                    <a:pt x="2284" y="72336"/>
+                    <a:pt x="4079" y="56748"/>
+                    <a:pt x="6363" y="44461"/>
+                  </a:cubicBezTo>
+                  <a:cubicBezTo>
+                    <a:pt x="10115" y="21309"/>
+                    <a:pt x="15173" y="5471"/>
+                    <a:pt x="20883" y="1599"/>
+                  </a:cubicBezTo>
+                  <a:cubicBezTo>
+                    <a:pt x="21209" y="1670"/>
+                    <a:pt x="21209" y="1030"/>
+                    <a:pt x="21536" y="1101"/>
+                  </a:cubicBezTo>
+                  <a:cubicBezTo>
+                    <a:pt x="22678" y="71"/>
+                    <a:pt x="23820" y="0"/>
+                    <a:pt x="24962" y="248"/>
+                  </a:cubicBezTo>
+                  <a:cubicBezTo>
+                    <a:pt x="36709" y="2802"/>
+                    <a:pt x="46661" y="51943"/>
+                    <a:pt x="49924" y="118486"/>
                   </a:cubicBezTo>
                   <a:close/>
                 </a:path>
@@ -1995,7 +2232,7 @@
             <a:solidFill>
               <a:srgbClr val="B3B3B3"/>
             </a:solidFill>
-            <a:ln w="7858" cap="rnd">
+            <a:ln w="7989" cap="rnd">
               <a:solidFill>
                 <a:srgbClr val="4D4D4D"/>
               </a:solidFill>
@@ -2005,14 +2242,14 @@
         </p:sp>
         <p:sp>
           <p:nvSpPr>
-            <p:cNvPr id="24" name="left House light column 3 row 2 6"/>
+            <p:cNvPr id="34" name="left House light column 3 row 2 7"/>
             <p:cNvSpPr/>
             <p:nvPr/>
           </p:nvSpPr>
           <p:spPr>
             <a:xfrm>
-              <a:off x="4526505" y="1872364"/>
-              <a:ext cx="76376" cy="313046"/>
+              <a:off x="4407379" y="1887201"/>
+              <a:ext cx="39645" cy="324683"/>
             </a:xfrm>
             <a:custGeom>
               <a:avLst/>
@@ -2021,60 +2258,60 @@
               <a:cxnLst/>
               <a:rect l="0" t="0" r="r" b="b"/>
               <a:pathLst>
-                <a:path w="76376" h="313046" fill="norm">
-                  <a:moveTo>
-                    <a:pt x="76376" y="313046"/>
+                <a:path w="39645" h="324683" fill="norm">
+                  <a:moveTo>
+                    <a:pt x="39645" y="324683"/>
                   </a:moveTo>
                   <a:lnTo>
-                    <a:pt x="37088" y="313046"/>
+                    <a:pt x="19252" y="320250"/>
                   </a:lnTo>
                   <a:cubicBezTo>
-                    <a:pt x="16029" y="313046"/>
-                    <a:pt x="0" y="242956"/>
-                    <a:pt x="0" y="156837"/>
-                  </a:cubicBezTo>
-                  <a:cubicBezTo>
-                    <a:pt x="0" y="140808"/>
-                    <a:pt x="629" y="125407"/>
-                    <a:pt x="1572" y="110949"/>
-                  </a:cubicBezTo>
-                  <a:cubicBezTo>
-                    <a:pt x="5972" y="46517"/>
-                    <a:pt x="19801" y="0"/>
-                    <a:pt x="36773" y="0"/>
+                    <a:pt x="8321" y="317873"/>
+                    <a:pt x="0" y="244799"/>
+                    <a:pt x="0" y="157235"/>
+                  </a:cubicBezTo>
+                  <a:cubicBezTo>
+                    <a:pt x="0" y="140936"/>
+                    <a:pt x="326" y="125348"/>
+                    <a:pt x="816" y="110754"/>
+                  </a:cubicBezTo>
+                  <a:cubicBezTo>
+                    <a:pt x="3100" y="45737"/>
+                    <a:pt x="10278" y="0"/>
+                    <a:pt x="19089" y="1915"/>
                   </a:cubicBezTo>
                   <a:lnTo>
-                    <a:pt x="76061" y="0"/>
+                    <a:pt x="39482" y="6349"/>
                   </a:lnTo>
                   <a:cubicBezTo>
-                    <a:pt x="68832" y="0"/>
-                    <a:pt x="62232" y="8800"/>
-                    <a:pt x="56260" y="24830"/>
-                  </a:cubicBezTo>
-                  <a:cubicBezTo>
-                    <a:pt x="50603" y="39602"/>
-                    <a:pt x="46203" y="60032"/>
-                    <a:pt x="43688" y="84862"/>
-                  </a:cubicBezTo>
-                  <a:cubicBezTo>
-                    <a:pt x="42431" y="93034"/>
-                    <a:pt x="42117" y="101834"/>
-                    <a:pt x="41488" y="110635"/>
-                  </a:cubicBezTo>
-                  <a:cubicBezTo>
-                    <a:pt x="40231" y="125093"/>
-                    <a:pt x="39917" y="140494"/>
-                    <a:pt x="39917" y="156523"/>
-                  </a:cubicBezTo>
-                  <a:cubicBezTo>
-                    <a:pt x="39917" y="211526"/>
-                    <a:pt x="45888" y="260243"/>
-                    <a:pt x="56575" y="287902"/>
-                  </a:cubicBezTo>
-                  <a:cubicBezTo>
-                    <a:pt x="62546" y="303931"/>
-                    <a:pt x="69147" y="312732"/>
-                    <a:pt x="76376" y="312732"/>
+                    <a:pt x="35730" y="5533"/>
+                    <a:pt x="32304" y="13736"/>
+                    <a:pt x="29204" y="29361"/>
+                  </a:cubicBezTo>
+                  <a:cubicBezTo>
+                    <a:pt x="26267" y="43743"/>
+                    <a:pt x="23983" y="64019"/>
+                    <a:pt x="22678" y="88981"/>
+                  </a:cubicBezTo>
+                  <a:cubicBezTo>
+                    <a:pt x="22025" y="97149"/>
+                    <a:pt x="21862" y="106061"/>
+                    <a:pt x="21536" y="114938"/>
+                  </a:cubicBezTo>
+                  <a:cubicBezTo>
+                    <a:pt x="20883" y="129497"/>
+                    <a:pt x="20720" y="145121"/>
+                    <a:pt x="20720" y="161419"/>
+                  </a:cubicBezTo>
+                  <a:cubicBezTo>
+                    <a:pt x="20720" y="217345"/>
+                    <a:pt x="23820" y="267554"/>
+                    <a:pt x="29367" y="296882"/>
+                  </a:cubicBezTo>
+                  <a:cubicBezTo>
+                    <a:pt x="32467" y="313855"/>
+                    <a:pt x="35893" y="323548"/>
+                    <a:pt x="39645" y="324364"/>
                   </a:cubicBezTo>
                   <a:close/>
                 </a:path>
@@ -2091,14 +2328,14 @@
         </p:sp>
         <p:sp>
           <p:nvSpPr>
-            <p:cNvPr id="25" name="left House light column 3 row 2 7"/>
+            <p:cNvPr id="35" name="left House light column 3 row 2 8"/>
             <p:cNvSpPr/>
             <p:nvPr/>
           </p:nvSpPr>
           <p:spPr>
             <a:xfrm>
-              <a:off x="4281977" y="1894679"/>
-              <a:ext cx="323732" cy="88948"/>
+              <a:off x="4280448" y="1882049"/>
+              <a:ext cx="168044" cy="124950"/>
             </a:xfrm>
             <a:custGeom>
               <a:avLst/>
@@ -2107,23 +2344,23 @@
               <a:cxnLst/>
               <a:rect l="0" t="0" r="r" b="b"/>
               <a:pathLst>
-                <a:path w="323732" h="88948" fill="norm">
-                  <a:moveTo>
-                    <a:pt x="323418" y="0"/>
+                <a:path w="168044" h="124950" fill="norm">
+                  <a:moveTo>
+                    <a:pt x="167881" y="34510"/>
                   </a:moveTo>
                   <a:lnTo>
-                    <a:pt x="323418" y="88948"/>
+                    <a:pt x="167881" y="124950"/>
                   </a:lnTo>
                   <a:lnTo>
-                    <a:pt x="0" y="88948"/>
+                    <a:pt x="0" y="88454"/>
                   </a:lnTo>
                   <a:cubicBezTo>
-                    <a:pt x="5029" y="36773"/>
-                    <a:pt x="17601" y="0"/>
-                    <a:pt x="32688" y="0"/>
+                    <a:pt x="2610" y="35972"/>
+                    <a:pt x="9136" y="0"/>
+                    <a:pt x="16968" y="1702"/>
                   </a:cubicBezTo>
                   <a:lnTo>
-                    <a:pt x="323732" y="0"/>
+                    <a:pt x="168044" y="34545"/>
                   </a:lnTo>
                   <a:close/>
                 </a:path>
@@ -2142,14 +2379,14 @@
         </p:sp>
         <p:sp>
           <p:nvSpPr>
-            <p:cNvPr id="26" name="left House light column 3 row 2 8"/>
+            <p:cNvPr id="36" name="left House light column 3 row 2 9"/>
             <p:cNvSpPr/>
             <p:nvPr/>
           </p:nvSpPr>
           <p:spPr>
             <a:xfrm>
-              <a:off x="4222260" y="1872678"/>
-              <a:ext cx="417709" cy="312732"/>
+              <a:off x="4249450" y="1853507"/>
+              <a:ext cx="216826" cy="360682"/>
             </a:xfrm>
             <a:custGeom>
               <a:avLst/>
@@ -2158,76 +2395,76 @@
               <a:cxnLst/>
               <a:rect l="0" t="0" r="r" b="b"/>
               <a:pathLst>
-                <a:path w="417709" h="312732" fill="norm">
-                  <a:moveTo>
-                    <a:pt x="417709" y="156523"/>
-                  </a:moveTo>
-                  <a:cubicBezTo>
-                    <a:pt x="417709" y="242642"/>
-                    <a:pt x="401051" y="312732"/>
-                    <a:pt x="380621" y="312732"/>
+                <a:path w="216826" h="360682" fill="norm">
+                  <a:moveTo>
+                    <a:pt x="216826" y="203732"/>
+                  </a:moveTo>
+                  <a:cubicBezTo>
+                    <a:pt x="216826" y="291296"/>
+                    <a:pt x="208179" y="360682"/>
+                    <a:pt x="197574" y="358377"/>
                   </a:cubicBezTo>
                   <a:lnTo>
-                    <a:pt x="50289" y="312732"/>
+                    <a:pt x="26104" y="321101"/>
                   </a:lnTo>
                   <a:cubicBezTo>
-                    <a:pt x="22630" y="312732"/>
-                    <a:pt x="0" y="242642"/>
-                    <a:pt x="0" y="156523"/>
-                  </a:cubicBezTo>
-                  <a:cubicBezTo>
-                    <a:pt x="0" y="70404"/>
-                    <a:pt x="22630" y="0"/>
-                    <a:pt x="50289" y="0"/>
+                    <a:pt x="11747" y="317979"/>
+                    <a:pt x="0" y="244160"/>
+                    <a:pt x="0" y="156596"/>
+                  </a:cubicBezTo>
+                  <a:cubicBezTo>
+                    <a:pt x="0" y="69032"/>
+                    <a:pt x="11747" y="0"/>
+                    <a:pt x="26104" y="3121"/>
                   </a:cubicBezTo>
                   <a:lnTo>
-                    <a:pt x="91148" y="0"/>
+                    <a:pt x="47313" y="7732"/>
                   </a:lnTo>
                   <a:cubicBezTo>
-                    <a:pt x="88948" y="0"/>
-                    <a:pt x="86748" y="629"/>
-                    <a:pt x="84548" y="1572"/>
-                  </a:cubicBezTo>
-                  <a:cubicBezTo>
-                    <a:pt x="83919" y="1572"/>
-                    <a:pt x="83919" y="2200"/>
-                    <a:pt x="83290" y="2200"/>
-                  </a:cubicBezTo>
-                  <a:cubicBezTo>
-                    <a:pt x="72290" y="7229"/>
-                    <a:pt x="62232" y="23573"/>
-                    <a:pt x="55317" y="47460"/>
-                  </a:cubicBezTo>
-                  <a:cubicBezTo>
-                    <a:pt x="50917" y="60661"/>
-                    <a:pt x="47460" y="75433"/>
-                    <a:pt x="45260" y="92719"/>
-                  </a:cubicBezTo>
-                  <a:cubicBezTo>
-                    <a:pt x="44002" y="98691"/>
-                    <a:pt x="43688" y="104349"/>
-                    <a:pt x="43060" y="110949"/>
+                    <a:pt x="46171" y="7484"/>
+                    <a:pt x="45029" y="7874"/>
+                    <a:pt x="43887" y="8585"/>
+                  </a:cubicBezTo>
+                  <a:cubicBezTo>
+                    <a:pt x="43561" y="8514"/>
+                    <a:pt x="43561" y="9153"/>
+                    <a:pt x="43235" y="9082"/>
+                  </a:cubicBezTo>
+                  <a:cubicBezTo>
+                    <a:pt x="37524" y="12954"/>
+                    <a:pt x="32304" y="28437"/>
+                    <a:pt x="28714" y="51945"/>
+                  </a:cubicBezTo>
+                  <a:cubicBezTo>
+                    <a:pt x="26430" y="64870"/>
+                    <a:pt x="24636" y="79500"/>
+                    <a:pt x="23494" y="96829"/>
+                  </a:cubicBezTo>
+                  <a:cubicBezTo>
+                    <a:pt x="22841" y="102759"/>
+                    <a:pt x="22678" y="108476"/>
+                    <a:pt x="22352" y="115116"/>
                   </a:cubicBezTo>
                   <a:lnTo>
-                    <a:pt x="306131" y="110949"/>
+                    <a:pt x="158908" y="144802"/>
                   </a:lnTo>
                   <a:cubicBezTo>
-                    <a:pt x="310532" y="46517"/>
-                    <a:pt x="324361" y="0"/>
-                    <a:pt x="341333" y="0"/>
+                    <a:pt x="161192" y="79786"/>
+                    <a:pt x="168371" y="34049"/>
+                    <a:pt x="177181" y="35964"/>
                   </a:cubicBezTo>
                   <a:lnTo>
-                    <a:pt x="380621" y="0"/>
+                    <a:pt x="197574" y="40397"/>
                   </a:lnTo>
                   <a:cubicBezTo>
-                    <a:pt x="397279" y="0"/>
-                    <a:pt x="411423" y="46203"/>
-                    <a:pt x="415823" y="110949"/>
-                  </a:cubicBezTo>
-                  <a:cubicBezTo>
-                    <a:pt x="417080" y="125407"/>
-                    <a:pt x="417395" y="140808"/>
-                    <a:pt x="417395" y="156837"/>
+                    <a:pt x="206221" y="42277"/>
+                    <a:pt x="213563" y="90851"/>
+                    <a:pt x="215847" y="157180"/>
+                  </a:cubicBezTo>
+                  <a:cubicBezTo>
+                    <a:pt x="216500" y="172023"/>
+                    <a:pt x="216663" y="187718"/>
+                    <a:pt x="216663" y="204016"/>
                   </a:cubicBezTo>
                   <a:close/>
                 </a:path>
@@ -2236,7 +2473,7 @@
             <a:solidFill>
               <a:srgbClr val="000000"/>
             </a:solidFill>
-            <a:ln w="9429" cap="rnd">
+            <a:ln w="9587" cap="rnd">
               <a:solidFill>
                 <a:srgbClr val="231815"/>
               </a:solidFill>
@@ -2246,14 +2483,14 @@
         </p:sp>
         <p:sp>
           <p:nvSpPr>
-            <p:cNvPr id="27" name="left House light column 3 row 2 9"/>
+            <p:cNvPr id="37" name="left House light column 3 row 2 10"/>
             <p:cNvSpPr/>
             <p:nvPr/>
           </p:nvSpPr>
           <p:spPr>
             <a:xfrm>
-              <a:off x="4566422" y="1872678"/>
-              <a:ext cx="73547" cy="312732"/>
+              <a:off x="4428099" y="1893054"/>
+              <a:ext cx="38177" cy="321136"/>
             </a:xfrm>
             <a:custGeom>
               <a:avLst/>
@@ -2262,54 +2499,54 @@
               <a:cxnLst/>
               <a:rect l="0" t="0" r="r" b="b"/>
               <a:pathLst>
-                <a:path w="73547" h="312732" fill="norm">
-                  <a:moveTo>
-                    <a:pt x="73547" y="156523"/>
-                  </a:moveTo>
-                  <a:cubicBezTo>
-                    <a:pt x="73547" y="242642"/>
-                    <a:pt x="56889" y="312732"/>
-                    <a:pt x="36459" y="312732"/>
-                  </a:cubicBezTo>
-                  <a:cubicBezTo>
-                    <a:pt x="29230" y="312732"/>
-                    <a:pt x="22630" y="303931"/>
-                    <a:pt x="16658" y="287902"/>
-                  </a:cubicBezTo>
-                  <a:cubicBezTo>
-                    <a:pt x="6286" y="260243"/>
-                    <a:pt x="0" y="211840"/>
-                    <a:pt x="0" y="156523"/>
-                  </a:cubicBezTo>
-                  <a:cubicBezTo>
-                    <a:pt x="0" y="140494"/>
-                    <a:pt x="629" y="125093"/>
-                    <a:pt x="1572" y="110635"/>
-                  </a:cubicBezTo>
-                  <a:cubicBezTo>
-                    <a:pt x="2200" y="101834"/>
-                    <a:pt x="2829" y="93034"/>
-                    <a:pt x="3772" y="84862"/>
-                  </a:cubicBezTo>
-                  <a:cubicBezTo>
-                    <a:pt x="6600" y="60032"/>
-                    <a:pt x="11001" y="39602"/>
-                    <a:pt x="16344" y="24830"/>
-                  </a:cubicBezTo>
-                  <a:cubicBezTo>
-                    <a:pt x="22316" y="8800"/>
-                    <a:pt x="28916" y="0"/>
-                    <a:pt x="36145" y="0"/>
-                  </a:cubicBezTo>
-                  <a:cubicBezTo>
-                    <a:pt x="52803" y="0"/>
-                    <a:pt x="66947" y="46203"/>
-                    <a:pt x="71347" y="110949"/>
-                  </a:cubicBezTo>
-                  <a:cubicBezTo>
-                    <a:pt x="72604" y="125407"/>
-                    <a:pt x="72918" y="140808"/>
-                    <a:pt x="72918" y="156837"/>
+                <a:path w="38177" h="321136" fill="norm">
+                  <a:moveTo>
+                    <a:pt x="38177" y="164186"/>
+                  </a:moveTo>
+                  <a:cubicBezTo>
+                    <a:pt x="38177" y="251750"/>
+                    <a:pt x="29530" y="321136"/>
+                    <a:pt x="18925" y="318831"/>
+                  </a:cubicBezTo>
+                  <a:cubicBezTo>
+                    <a:pt x="15173" y="318015"/>
+                    <a:pt x="11747" y="308322"/>
+                    <a:pt x="8647" y="291350"/>
+                  </a:cubicBezTo>
+                  <a:cubicBezTo>
+                    <a:pt x="3263" y="262056"/>
+                    <a:pt x="0" y="212132"/>
+                    <a:pt x="0" y="155887"/>
+                  </a:cubicBezTo>
+                  <a:cubicBezTo>
+                    <a:pt x="0" y="139588"/>
+                    <a:pt x="326" y="124000"/>
+                    <a:pt x="816" y="109406"/>
+                  </a:cubicBezTo>
+                  <a:cubicBezTo>
+                    <a:pt x="1142" y="100528"/>
+                    <a:pt x="1468" y="91651"/>
+                    <a:pt x="1958" y="83448"/>
+                  </a:cubicBezTo>
+                  <a:cubicBezTo>
+                    <a:pt x="3426" y="58521"/>
+                    <a:pt x="5710" y="38245"/>
+                    <a:pt x="8484" y="23828"/>
+                  </a:cubicBezTo>
+                  <a:cubicBezTo>
+                    <a:pt x="11584" y="8203"/>
+                    <a:pt x="15010" y="0"/>
+                    <a:pt x="18762" y="816"/>
+                  </a:cubicBezTo>
+                  <a:cubicBezTo>
+                    <a:pt x="27409" y="2696"/>
+                    <a:pt x="34751" y="51269"/>
+                    <a:pt x="37035" y="117599"/>
+                  </a:cubicBezTo>
+                  <a:cubicBezTo>
+                    <a:pt x="37688" y="132441"/>
+                    <a:pt x="37851" y="148136"/>
+                    <a:pt x="37851" y="164435"/>
                   </a:cubicBezTo>
                   <a:close/>
                 </a:path>
@@ -2318,7 +2555,7 @@
             <a:solidFill>
               <a:srgbClr val="B3B3B3"/>
             </a:solidFill>
-            <a:ln w="9429" cap="rnd">
+            <a:ln w="9587" cap="rnd">
               <a:solidFill>
                 <a:srgbClr val="231815"/>
               </a:solidFill>
@@ -2329,28 +2566,28 @@
       </p:grpSp>
       <p:grpSp>
         <p:nvGrpSpPr>
-          <p:cNvPr id="28" name="left Water well column 2 row 5"/>
+          <p:cNvPr id="38" name="left Water well column 2 row 5"/>
           <p:cNvGrpSpPr/>
           <p:nvPr/>
         </p:nvGrpSpPr>
         <p:grpSpPr>
           <a:xfrm>
-            <a:off x="565601" y="2633061"/>
-            <a:ext cx="232834" cy="963055"/>
-            <a:chOff x="3766001" y="3214086"/>
-            <a:chExt cx="232834" cy="963055"/>
+            <a:off x="536178" y="2711750"/>
+            <a:ext cx="273844" cy="1048957"/>
+            <a:chOff x="3736578" y="3292775"/>
+            <a:chExt cx="273844" cy="1048957"/>
           </a:xfrm>
         </p:grpSpPr>
         <p:sp>
           <p:nvSpPr>
-            <p:cNvPr id="29" name="left Water well column 2 row 5 3"/>
+            <p:cNvPr id="39" name="left Water well column 2 row 5 4"/>
             <p:cNvSpPr/>
             <p:nvPr/>
           </p:nvSpPr>
           <p:spPr>
             <a:xfrm>
-              <a:off x="3766001" y="3214086"/>
-              <a:ext cx="232834" cy="963055"/>
+              <a:off x="3736578" y="3292775"/>
+              <a:ext cx="273844" cy="1048957"/>
             </a:xfrm>
             <a:custGeom>
               <a:avLst/>
@@ -2359,21 +2596,21 @@
               <a:cxnLst/>
               <a:rect l="0" t="0" r="r" b="b"/>
               <a:pathLst>
-                <a:path w="232834" h="963055" fill="norm">
-                  <a:moveTo>
-                    <a:pt x="0" y="252265"/>
+                <a:path w="273844" h="1048957" fill="norm">
+                  <a:moveTo>
+                    <a:pt x="0" y="47382"/>
                   </a:moveTo>
                   <a:lnTo>
-                    <a:pt x="0" y="963055"/>
+                    <a:pt x="0" y="1048957"/>
                   </a:lnTo>
                   <a:lnTo>
-                    <a:pt x="232834" y="667636"/>
+                    <a:pt x="273844" y="879780"/>
                   </a:lnTo>
                   <a:lnTo>
-                    <a:pt x="232834" y="0"/>
+                    <a:pt x="273844" y="0"/>
                   </a:lnTo>
                   <a:lnTo>
-                    <a:pt x="0" y="252265"/>
+                    <a:pt x="0" y="47382"/>
                   </a:lnTo>
                   <a:close/>
                 </a:path>
@@ -2392,14 +2629,14 @@
         </p:sp>
         <p:sp>
           <p:nvSpPr>
-            <p:cNvPr id="30" name="left Water well column 2 row 5 4"/>
+            <p:cNvPr id="40" name="left Water well column 2 row 5 5"/>
             <p:cNvSpPr/>
             <p:nvPr/>
           </p:nvSpPr>
           <p:spPr>
             <a:xfrm>
-              <a:off x="3766001" y="3214086"/>
-              <a:ext cx="232834" cy="818647"/>
+              <a:off x="3736578" y="3292775"/>
+              <a:ext cx="273844" cy="879780"/>
             </a:xfrm>
             <a:custGeom>
               <a:avLst/>
@@ -2408,21 +2645,21 @@
               <a:cxnLst/>
               <a:rect l="0" t="0" r="r" b="b"/>
               <a:pathLst>
-                <a:path w="232834" h="818647" fill="norm">
-                  <a:moveTo>
-                    <a:pt x="0" y="252265"/>
+                <a:path w="273844" h="879780" fill="norm">
+                  <a:moveTo>
+                    <a:pt x="0" y="47382"/>
                   </a:moveTo>
                   <a:lnTo>
-                    <a:pt x="0" y="818647"/>
+                    <a:pt x="0" y="845471"/>
                   </a:lnTo>
                   <a:lnTo>
-                    <a:pt x="232834" y="667636"/>
+                    <a:pt x="273844" y="879780"/>
                   </a:lnTo>
                   <a:lnTo>
-                    <a:pt x="232834" y="0"/>
+                    <a:pt x="273844" y="0"/>
                   </a:lnTo>
                   <a:lnTo>
-                    <a:pt x="0" y="252265"/>
+                    <a:pt x="0" y="47382"/>
                   </a:lnTo>
                   <a:close/>
                 </a:path>
@@ -2441,14 +2678,14 @@
         </p:sp>
         <p:sp>
           <p:nvSpPr>
-            <p:cNvPr id="31" name="left Water well column 2 row 5 5"/>
+            <p:cNvPr id="41" name="left Water well column 2 row 5 6"/>
             <p:cNvSpPr/>
             <p:nvPr/>
           </p:nvSpPr>
           <p:spPr>
             <a:xfrm>
-              <a:off x="3775330" y="3898232"/>
-              <a:ext cx="163432" cy="207261"/>
+              <a:off x="3747549" y="4135670"/>
+              <a:ext cx="192217" cy="121277"/>
             </a:xfrm>
             <a:custGeom>
               <a:avLst/>
@@ -2457,35 +2694,35 @@
               <a:cxnLst/>
               <a:rect l="0" t="0" r="r" b="b"/>
               <a:pathLst>
-                <a:path w="163432" h="207261" fill="norm">
-                  <a:moveTo>
-                    <a:pt x="163432" y="0"/>
+                <a:path w="192217" h="121277" fill="norm">
+                  <a:moveTo>
+                    <a:pt x="192217" y="0"/>
                   </a:moveTo>
                   <a:lnTo>
-                    <a:pt x="163432" y="48560"/>
+                    <a:pt x="192217" y="65168"/>
                   </a:lnTo>
                   <a:cubicBezTo>
-                    <a:pt x="163432" y="74443"/>
-                    <a:pt x="93499" y="141462"/>
-                    <a:pt x="0" y="207261"/>
+                    <a:pt x="192217" y="99902"/>
+                    <a:pt x="109967" y="121277"/>
+                    <a:pt x="0" y="115135"/>
                   </a:cubicBezTo>
                   <a:lnTo>
-                    <a:pt x="0" y="158424"/>
+                    <a:pt x="0" y="46490"/>
                   </a:lnTo>
                   <a:cubicBezTo>
-                    <a:pt x="16130" y="147051"/>
-                    <a:pt x="31630" y="135582"/>
-                    <a:pt x="46268" y="124274"/>
-                  </a:cubicBezTo>
-                  <a:cubicBezTo>
-                    <a:pt x="86940" y="92978"/>
-                    <a:pt x="119775" y="63171"/>
-                    <a:pt x="140671" y="39238"/>
-                  </a:cubicBezTo>
-                  <a:cubicBezTo>
-                    <a:pt x="154850" y="22725"/>
-                    <a:pt x="163432" y="8659"/>
-                    <a:pt x="163432" y="0"/>
+                    <a:pt x="18972" y="48041"/>
+                    <a:pt x="37202" y="48693"/>
+                    <a:pt x="54418" y="48575"/>
+                  </a:cubicBezTo>
+                  <a:cubicBezTo>
+                    <a:pt x="102253" y="48086"/>
+                    <a:pt x="140872" y="41149"/>
+                    <a:pt x="165447" y="29915"/>
+                  </a:cubicBezTo>
+                  <a:cubicBezTo>
+                    <a:pt x="182124" y="21922"/>
+                    <a:pt x="192217" y="11621"/>
+                    <a:pt x="192217" y="0"/>
                   </a:cubicBezTo>
                   <a:close/>
                 </a:path>
@@ -2502,14 +2739,14 @@
         </p:sp>
         <p:sp>
           <p:nvSpPr>
-            <p:cNvPr id="32" name="left Water well column 2 row 5 6"/>
+            <p:cNvPr id="42" name="left Water well column 2 row 5 7"/>
             <p:cNvSpPr/>
             <p:nvPr/>
           </p:nvSpPr>
           <p:spPr>
             <a:xfrm>
-              <a:off x="3775330" y="3898232"/>
-              <a:ext cx="163432" cy="207261"/>
+              <a:off x="3747549" y="4135670"/>
+              <a:ext cx="192217" cy="121277"/>
             </a:xfrm>
             <a:custGeom>
               <a:avLst/>
@@ -2518,17 +2755,17 @@
               <a:cxnLst/>
               <a:rect l="0" t="0" r="r" b="b"/>
               <a:pathLst>
-                <a:path w="163432" h="207261" fill="none">
-                  <a:moveTo>
-                    <a:pt x="163432" y="0"/>
+                <a:path w="192217" h="121277" fill="none">
+                  <a:moveTo>
+                    <a:pt x="192217" y="0"/>
                   </a:moveTo>
                   <a:lnTo>
-                    <a:pt x="163432" y="48560"/>
+                    <a:pt x="192217" y="65168"/>
                   </a:lnTo>
                   <a:cubicBezTo>
-                    <a:pt x="163432" y="74443"/>
-                    <a:pt x="93499" y="141462"/>
-                    <a:pt x="0" y="207261"/>
+                    <a:pt x="192217" y="99902"/>
+                    <a:pt x="109967" y="121277"/>
+                    <a:pt x="0" y="115135"/>
                   </a:cubicBezTo>
                 </a:path>
               </a:pathLst>
@@ -2544,14 +2781,14 @@
         </p:sp>
         <p:sp>
           <p:nvSpPr>
-            <p:cNvPr id="33" name="left Water well column 2 row 5 7"/>
+            <p:cNvPr id="43" name="left Water well column 2 row 5 8"/>
             <p:cNvSpPr/>
             <p:nvPr/>
           </p:nvSpPr>
           <p:spPr>
             <a:xfrm>
-              <a:off x="3775330" y="3898232"/>
-              <a:ext cx="163432" cy="158424"/>
+              <a:off x="3747549" y="4135670"/>
+              <a:ext cx="192217" cy="48693"/>
             </a:xfrm>
             <a:custGeom>
               <a:avLst/>
@@ -2560,24 +2797,24 @@
               <a:cxnLst/>
               <a:rect l="0" t="0" r="r" b="b"/>
               <a:pathLst>
-                <a:path w="163432" h="158424" fill="none">
-                  <a:moveTo>
-                    <a:pt x="0" y="158424"/>
-                  </a:moveTo>
-                  <a:cubicBezTo>
-                    <a:pt x="16130" y="147051"/>
-                    <a:pt x="31630" y="135582"/>
-                    <a:pt x="46268" y="124274"/>
-                  </a:cubicBezTo>
-                  <a:cubicBezTo>
-                    <a:pt x="86940" y="92978"/>
-                    <a:pt x="119775" y="63171"/>
-                    <a:pt x="140671" y="39238"/>
-                  </a:cubicBezTo>
-                  <a:cubicBezTo>
-                    <a:pt x="154850" y="22725"/>
-                    <a:pt x="163432" y="8659"/>
-                    <a:pt x="163432" y="0"/>
+                <a:path w="192217" h="48693" fill="none">
+                  <a:moveTo>
+                    <a:pt x="0" y="46490"/>
+                  </a:moveTo>
+                  <a:cubicBezTo>
+                    <a:pt x="18972" y="48041"/>
+                    <a:pt x="37202" y="48693"/>
+                    <a:pt x="54418" y="48575"/>
+                  </a:cubicBezTo>
+                  <a:cubicBezTo>
+                    <a:pt x="102253" y="48086"/>
+                    <a:pt x="140872" y="41149"/>
+                    <a:pt x="165447" y="29915"/>
+                  </a:cubicBezTo>
+                  <a:cubicBezTo>
+                    <a:pt x="182124" y="21922"/>
+                    <a:pt x="192217" y="11621"/>
+                    <a:pt x="192217" y="0"/>
                   </a:cubicBezTo>
                 </a:path>
               </a:pathLst>
@@ -2593,14 +2830,14 @@
         </p:sp>
         <p:sp>
           <p:nvSpPr>
-            <p:cNvPr id="34" name="left Water well column 2 row 5 8"/>
+            <p:cNvPr id="44" name="left Water well column 2 row 5 9"/>
             <p:cNvSpPr/>
             <p:nvPr/>
           </p:nvSpPr>
           <p:spPr>
             <a:xfrm>
-              <a:off x="3775330" y="3872497"/>
-              <a:ext cx="163432" cy="184159"/>
+              <a:off x="3747549" y="4034359"/>
+              <a:ext cx="192217" cy="150004"/>
             </a:xfrm>
             <a:custGeom>
               <a:avLst/>
@@ -2609,32 +2846,32 @@
               <a:cxnLst/>
               <a:rect l="0" t="0" r="r" b="b"/>
               <a:pathLst>
-                <a:path w="163432" h="184159" fill="norm">
-                  <a:moveTo>
-                    <a:pt x="163432" y="25735"/>
-                  </a:moveTo>
-                  <a:cubicBezTo>
-                    <a:pt x="163432" y="34564"/>
-                    <a:pt x="155223" y="48217"/>
-                    <a:pt x="140671" y="64973"/>
-                  </a:cubicBezTo>
-                  <a:cubicBezTo>
-                    <a:pt x="120148" y="88664"/>
-                    <a:pt x="86940" y="118713"/>
-                    <a:pt x="46268" y="150009"/>
-                  </a:cubicBezTo>
-                  <a:cubicBezTo>
-                    <a:pt x="31630" y="161317"/>
-                    <a:pt x="16130" y="172786"/>
-                    <a:pt x="0" y="184159"/>
+                <a:path w="192217" h="150004" fill="norm">
+                  <a:moveTo>
+                    <a:pt x="192217" y="101311"/>
+                  </a:moveTo>
+                  <a:cubicBezTo>
+                    <a:pt x="192217" y="113160"/>
+                    <a:pt x="182562" y="123281"/>
+                    <a:pt x="165447" y="131227"/>
+                  </a:cubicBezTo>
+                  <a:cubicBezTo>
+                    <a:pt x="141310" y="142512"/>
+                    <a:pt x="102253" y="149397"/>
+                    <a:pt x="54418" y="149886"/>
+                  </a:cubicBezTo>
+                  <a:cubicBezTo>
+                    <a:pt x="37202" y="150004"/>
+                    <a:pt x="18972" y="149352"/>
+                    <a:pt x="0" y="147801"/>
                   </a:cubicBezTo>
                   <a:lnTo>
-                    <a:pt x="0" y="79005"/>
+                    <a:pt x="0" y="0"/>
                   </a:lnTo>
                   <a:cubicBezTo>
-                    <a:pt x="93499" y="23790"/>
-                    <a:pt x="163432" y="0"/>
-                    <a:pt x="163432" y="25735"/>
+                    <a:pt x="109967" y="26174"/>
+                    <a:pt x="192217" y="66775"/>
+                    <a:pt x="192217" y="101311"/>
                   </a:cubicBezTo>
                   <a:close/>
                 </a:path>
@@ -2651,14 +2888,14 @@
         </p:sp>
         <p:sp>
           <p:nvSpPr>
-            <p:cNvPr id="35" name="left Water well column 2 row 5 9"/>
+            <p:cNvPr id="45" name="left Water well column 2 row 5 10"/>
             <p:cNvSpPr/>
             <p:nvPr/>
           </p:nvSpPr>
           <p:spPr>
             <a:xfrm>
-              <a:off x="3775330" y="3898232"/>
-              <a:ext cx="163432" cy="158424"/>
+              <a:off x="3747549" y="4135670"/>
+              <a:ext cx="192217" cy="48693"/>
             </a:xfrm>
             <a:custGeom>
               <a:avLst/>
@@ -2667,24 +2904,24 @@
               <a:cxnLst/>
               <a:rect l="0" t="0" r="r" b="b"/>
               <a:pathLst>
-                <a:path w="163432" h="158424" fill="none">
-                  <a:moveTo>
-                    <a:pt x="163432" y="0"/>
-                  </a:moveTo>
-                  <a:cubicBezTo>
-                    <a:pt x="163432" y="8829"/>
-                    <a:pt x="155223" y="22482"/>
-                    <a:pt x="140671" y="39238"/>
-                  </a:cubicBezTo>
-                  <a:cubicBezTo>
-                    <a:pt x="120148" y="62929"/>
-                    <a:pt x="86940" y="92978"/>
-                    <a:pt x="46268" y="124274"/>
-                  </a:cubicBezTo>
-                  <a:cubicBezTo>
-                    <a:pt x="31630" y="135582"/>
-                    <a:pt x="16130" y="147051"/>
-                    <a:pt x="0" y="158424"/>
+                <a:path w="192217" h="48693" fill="none">
+                  <a:moveTo>
+                    <a:pt x="192217" y="0"/>
+                  </a:moveTo>
+                  <a:cubicBezTo>
+                    <a:pt x="192217" y="11849"/>
+                    <a:pt x="182562" y="21970"/>
+                    <a:pt x="165447" y="29915"/>
+                  </a:cubicBezTo>
+                  <a:cubicBezTo>
+                    <a:pt x="141310" y="41200"/>
+                    <a:pt x="102253" y="48086"/>
+                    <a:pt x="54418" y="48575"/>
+                  </a:cubicBezTo>
+                  <a:cubicBezTo>
+                    <a:pt x="37202" y="48693"/>
+                    <a:pt x="18972" y="48041"/>
+                    <a:pt x="0" y="46490"/>
                   </a:cubicBezTo>
                 </a:path>
               </a:pathLst>
@@ -2700,14 +2937,14 @@
         </p:sp>
         <p:sp>
           <p:nvSpPr>
-            <p:cNvPr id="36" name="left Water well column 2 row 5 10"/>
+            <p:cNvPr id="46" name="left Water well column 2 row 5 11"/>
             <p:cNvSpPr/>
             <p:nvPr/>
           </p:nvSpPr>
           <p:spPr>
             <a:xfrm>
-              <a:off x="3775330" y="3872497"/>
-              <a:ext cx="163432" cy="79005"/>
+              <a:off x="3747549" y="4034359"/>
+              <a:ext cx="192217" cy="101311"/>
             </a:xfrm>
             <a:custGeom>
               <a:avLst/>
@@ -2716,14 +2953,14 @@
               <a:cxnLst/>
               <a:rect l="0" t="0" r="r" b="b"/>
               <a:pathLst>
-                <a:path w="163432" h="79005" fill="none">
-                  <a:moveTo>
-                    <a:pt x="0" y="79005"/>
-                  </a:moveTo>
-                  <a:cubicBezTo>
-                    <a:pt x="93499" y="23790"/>
-                    <a:pt x="163432" y="0"/>
-                    <a:pt x="163432" y="25735"/>
+                <a:path w="192217" h="101311" fill="none">
+                  <a:moveTo>
+                    <a:pt x="0" y="0"/>
+                  </a:moveTo>
+                  <a:cubicBezTo>
+                    <a:pt x="109967" y="26174"/>
+                    <a:pt x="192217" y="66775"/>
+                    <a:pt x="192217" y="101311"/>
                   </a:cubicBezTo>
                 </a:path>
               </a:pathLst>
@@ -2739,14 +2976,14 @@
         </p:sp>
         <p:sp>
           <p:nvSpPr>
-            <p:cNvPr id="37" name="left Water well column 2 row 5 11"/>
+            <p:cNvPr id="47" name="left Water well column 2 row 5 12"/>
             <p:cNvSpPr/>
             <p:nvPr/>
           </p:nvSpPr>
           <p:spPr>
             <a:xfrm>
-              <a:off x="3775330" y="3944156"/>
-              <a:ext cx="83313" cy="95163"/>
+              <a:off x="3747549" y="4078284"/>
+              <a:ext cx="97987" cy="80576"/>
             </a:xfrm>
             <a:custGeom>
               <a:avLst/>
@@ -2755,35 +2992,35 @@
               <a:cxnLst/>
               <a:rect l="0" t="0" r="r" b="b"/>
               <a:pathLst>
-                <a:path w="83313" h="95163" fill="norm">
-                  <a:moveTo>
-                    <a:pt x="82805" y="13330"/>
-                  </a:moveTo>
-                  <a:cubicBezTo>
-                    <a:pt x="82805" y="18188"/>
-                    <a:pt x="77731" y="26218"/>
-                    <a:pt x="69104" y="35971"/>
-                  </a:cubicBezTo>
-                  <a:cubicBezTo>
-                    <a:pt x="56418" y="49972"/>
-                    <a:pt x="36373" y="67693"/>
-                    <a:pt x="11761" y="86391"/>
-                  </a:cubicBezTo>
-                  <a:cubicBezTo>
-                    <a:pt x="7944" y="89288"/>
-                    <a:pt x="4019" y="92217"/>
-                    <a:pt x="0" y="95163"/>
+                <a:path w="97987" h="80576" fill="norm">
+                  <a:moveTo>
+                    <a:pt x="97390" y="54843"/>
+                  </a:moveTo>
+                  <a:cubicBezTo>
+                    <a:pt x="97390" y="61518"/>
+                    <a:pt x="91422" y="67212"/>
+                    <a:pt x="81275" y="71535"/>
+                  </a:cubicBezTo>
+                  <a:cubicBezTo>
+                    <a:pt x="66354" y="77419"/>
+                    <a:pt x="42779" y="80576"/>
+                    <a:pt x="13833" y="80052"/>
+                  </a:cubicBezTo>
+                  <a:cubicBezTo>
+                    <a:pt x="9343" y="79950"/>
+                    <a:pt x="4726" y="79771"/>
+                    <a:pt x="0" y="79509"/>
                   </a:cubicBezTo>
                   <a:lnTo>
-                    <a:pt x="0" y="38597"/>
+                    <a:pt x="0" y="0"/>
                   </a:lnTo>
                   <a:cubicBezTo>
-                    <a:pt x="48521" y="11424"/>
-                    <a:pt x="83313" y="0"/>
-                    <a:pt x="83313" y="13001"/>
+                    <a:pt x="57068" y="15522"/>
+                    <a:pt x="97987" y="37068"/>
+                    <a:pt x="97987" y="54927"/>
                   </a:cubicBezTo>
                   <a:lnTo>
-                    <a:pt x="82805" y="13330"/>
+                    <a:pt x="97390" y="54843"/>
                   </a:lnTo>
                   <a:close/>
                 </a:path>
@@ -2803,28 +3040,28 @@
       </p:grpSp>
       <p:grpSp>
         <p:nvGrpSpPr>
-          <p:cNvPr id="38" name="right Speaker column 2 row 1"/>
+          <p:cNvPr id="48" name="right Speaker column 2 row 1"/>
           <p:cNvGrpSpPr/>
           <p:nvPr/>
         </p:nvGrpSpPr>
         <p:grpSpPr>
           <a:xfrm>
-            <a:off x="4987703" y="1176448"/>
-            <a:ext cx="310446" cy="734841"/>
-            <a:chOff x="8188103" y="1757473"/>
-            <a:chExt cx="310446" cy="734841"/>
+            <a:off x="4975225" y="520292"/>
+            <a:ext cx="365125" cy="1001619"/>
+            <a:chOff x="8175625" y="1101317"/>
+            <a:chExt cx="365125" cy="1001619"/>
           </a:xfrm>
         </p:grpSpPr>
         <p:sp>
           <p:nvSpPr>
-            <p:cNvPr id="39" name="right Speaker column 2 row 1 6"/>
+            <p:cNvPr id="49" name="right Speaker column 2 row 1 5"/>
             <p:cNvSpPr/>
             <p:nvPr/>
           </p:nvSpPr>
           <p:spPr>
             <a:xfrm>
-              <a:off x="8327966" y="1757473"/>
-              <a:ext cx="25298" cy="63511"/>
+              <a:off x="8340123" y="1101317"/>
+              <a:ext cx="29754" cy="80343"/>
             </a:xfrm>
             <a:custGeom>
               <a:avLst/>
@@ -2833,29 +3070,29 @@
               <a:cxnLst/>
               <a:rect l="0" t="0" r="r" b="b"/>
               <a:pathLst>
-                <a:path w="25298" h="63511" fill="norm">
-                  <a:moveTo>
-                    <a:pt x="25298" y="42603"/>
-                  </a:moveTo>
-                  <a:cubicBezTo>
-                    <a:pt x="25298" y="28352"/>
-                    <a:pt x="19516" y="12053"/>
-                    <a:pt x="12649" y="6027"/>
-                  </a:cubicBezTo>
-                  <a:cubicBezTo>
-                    <a:pt x="5782" y="0"/>
-                    <a:pt x="0" y="6921"/>
-                    <a:pt x="0" y="20902"/>
-                  </a:cubicBezTo>
-                  <a:cubicBezTo>
-                    <a:pt x="0" y="34882"/>
-                    <a:pt x="5782" y="51445"/>
-                    <a:pt x="12649" y="57478"/>
-                  </a:cubicBezTo>
-                  <a:cubicBezTo>
-                    <a:pt x="19516" y="63511"/>
-                    <a:pt x="25298" y="56855"/>
-                    <a:pt x="25298" y="42603"/>
+                <a:path w="29754" h="80343" fill="norm">
+                  <a:moveTo>
+                    <a:pt x="29754" y="31121"/>
+                  </a:moveTo>
+                  <a:cubicBezTo>
+                    <a:pt x="29754" y="11435"/>
+                    <a:pt x="22953" y="0"/>
+                    <a:pt x="14877" y="4834"/>
+                  </a:cubicBezTo>
+                  <a:cubicBezTo>
+                    <a:pt x="6801" y="9671"/>
+                    <a:pt x="0" y="30199"/>
+                    <a:pt x="0" y="49374"/>
+                  </a:cubicBezTo>
+                  <a:cubicBezTo>
+                    <a:pt x="0" y="68548"/>
+                    <a:pt x="6801" y="80343"/>
+                    <a:pt x="14877" y="75652"/>
+                  </a:cubicBezTo>
+                  <a:cubicBezTo>
+                    <a:pt x="22953" y="70965"/>
+                    <a:pt x="29754" y="50807"/>
+                    <a:pt x="29754" y="31121"/>
                   </a:cubicBezTo>
                   <a:close/>
                 </a:path>
@@ -2872,14 +3109,14 @@
         </p:sp>
         <p:sp>
           <p:nvSpPr>
-            <p:cNvPr id="40" name="right Speaker column 2 row 1 7"/>
+            <p:cNvPr id="50" name="right Speaker column 2 row 1 6"/>
             <p:cNvSpPr/>
             <p:nvPr/>
           </p:nvSpPr>
           <p:spPr>
             <a:xfrm>
-              <a:off x="8327966" y="1841631"/>
-              <a:ext cx="25298" cy="63269"/>
+              <a:off x="8340123" y="1216680"/>
+              <a:ext cx="29754" cy="80230"/>
             </a:xfrm>
             <a:custGeom>
               <a:avLst/>
@@ -2888,29 +3125,29 @@
               <a:cxnLst/>
               <a:rect l="0" t="0" r="r" b="b"/>
               <a:pathLst>
-                <a:path w="25298" h="63269" fill="norm">
-                  <a:moveTo>
-                    <a:pt x="25298" y="42370"/>
-                  </a:moveTo>
-                  <a:cubicBezTo>
-                    <a:pt x="25298" y="28119"/>
-                    <a:pt x="19516" y="11547"/>
-                    <a:pt x="12649" y="5774"/>
-                  </a:cubicBezTo>
-                  <a:cubicBezTo>
-                    <a:pt x="5782" y="0"/>
-                    <a:pt x="0" y="6384"/>
-                    <a:pt x="0" y="20629"/>
-                  </a:cubicBezTo>
-                  <a:cubicBezTo>
-                    <a:pt x="0" y="34873"/>
-                    <a:pt x="5782" y="51181"/>
-                    <a:pt x="12649" y="57225"/>
-                  </a:cubicBezTo>
-                  <a:cubicBezTo>
-                    <a:pt x="19516" y="63269"/>
-                    <a:pt x="25298" y="56622"/>
-                    <a:pt x="25298" y="42370"/>
+                <a:path w="29754" h="80230" fill="norm">
+                  <a:moveTo>
+                    <a:pt x="29754" y="31685"/>
+                  </a:moveTo>
+                  <a:cubicBezTo>
+                    <a:pt x="29754" y="11999"/>
+                    <a:pt x="22953" y="0"/>
+                    <a:pt x="14877" y="4960"/>
+                  </a:cubicBezTo>
+                  <a:cubicBezTo>
+                    <a:pt x="6801" y="9920"/>
+                    <a:pt x="0" y="29523"/>
+                    <a:pt x="0" y="49059"/>
+                  </a:cubicBezTo>
+                  <a:cubicBezTo>
+                    <a:pt x="0" y="68596"/>
+                    <a:pt x="6801" y="80230"/>
+                    <a:pt x="14877" y="75778"/>
+                  </a:cubicBezTo>
+                  <a:cubicBezTo>
+                    <a:pt x="22953" y="71329"/>
+                    <a:pt x="29754" y="51371"/>
+                    <a:pt x="29754" y="31685"/>
                   </a:cubicBezTo>
                   <a:close/>
                 </a:path>
@@ -2927,14 +3164,14 @@
         </p:sp>
         <p:sp>
           <p:nvSpPr>
-            <p:cNvPr id="41" name="right Speaker column 2 row 1 8"/>
+            <p:cNvPr id="51" name="right Speaker column 2 row 1 7"/>
             <p:cNvSpPr/>
             <p:nvPr/>
           </p:nvSpPr>
           <p:spPr>
             <a:xfrm>
-              <a:off x="8327966" y="1925262"/>
-              <a:ext cx="25298" cy="63555"/>
+              <a:off x="8340123" y="1332771"/>
+              <a:ext cx="29754" cy="79389"/>
             </a:xfrm>
             <a:custGeom>
               <a:avLst/>
@@ -2943,29 +3180,29 @@
               <a:cxnLst/>
               <a:rect l="0" t="0" r="r" b="b"/>
               <a:pathLst>
-                <a:path w="25298" h="63555" fill="norm">
-                  <a:moveTo>
-                    <a:pt x="25298" y="42929"/>
-                  </a:moveTo>
-                  <a:cubicBezTo>
-                    <a:pt x="25298" y="28677"/>
-                    <a:pt x="19516" y="12097"/>
-                    <a:pt x="12649" y="6048"/>
-                  </a:cubicBezTo>
-                  <a:cubicBezTo>
-                    <a:pt x="5782" y="0"/>
-                    <a:pt x="0" y="6639"/>
-                    <a:pt x="0" y="20619"/>
-                  </a:cubicBezTo>
-                  <a:cubicBezTo>
-                    <a:pt x="0" y="34600"/>
-                    <a:pt x="5782" y="51445"/>
-                    <a:pt x="12649" y="57500"/>
-                  </a:cubicBezTo>
-                  <a:cubicBezTo>
-                    <a:pt x="19516" y="63555"/>
-                    <a:pt x="25298" y="57180"/>
-                    <a:pt x="25298" y="42929"/>
+                <a:path w="29754" h="79389" fill="norm">
+                  <a:moveTo>
+                    <a:pt x="29754" y="31886"/>
+                  </a:moveTo>
+                  <a:cubicBezTo>
+                    <a:pt x="29754" y="12200"/>
+                    <a:pt x="22953" y="0"/>
+                    <a:pt x="14877" y="4357"/>
+                  </a:cubicBezTo>
+                  <a:cubicBezTo>
+                    <a:pt x="6801" y="8717"/>
+                    <a:pt x="0" y="28480"/>
+                    <a:pt x="0" y="47655"/>
+                  </a:cubicBezTo>
+                  <a:cubicBezTo>
+                    <a:pt x="0" y="66830"/>
+                    <a:pt x="6801" y="79389"/>
+                    <a:pt x="14877" y="75176"/>
+                  </a:cubicBezTo>
+                  <a:cubicBezTo>
+                    <a:pt x="22953" y="70965"/>
+                    <a:pt x="29754" y="51572"/>
+                    <a:pt x="29754" y="31886"/>
                   </a:cubicBezTo>
                   <a:close/>
                 </a:path>
@@ -2982,14 +3219,14 @@
         </p:sp>
         <p:sp>
           <p:nvSpPr>
-            <p:cNvPr id="42" name="right Speaker column 2 row 1 9"/>
+            <p:cNvPr id="52" name="right Speaker column 2 row 1 8"/>
             <p:cNvSpPr/>
             <p:nvPr/>
           </p:nvSpPr>
           <p:spPr>
             <a:xfrm>
-              <a:off x="8327966" y="2009157"/>
-              <a:ext cx="25298" cy="63576"/>
+              <a:off x="8340123" y="1448498"/>
+              <a:ext cx="29754" cy="78912"/>
             </a:xfrm>
             <a:custGeom>
               <a:avLst/>
@@ -2998,29 +3235,29 @@
               <a:cxnLst/>
               <a:rect l="0" t="0" r="r" b="b"/>
               <a:pathLst>
-                <a:path w="25298" h="63576" fill="norm">
-                  <a:moveTo>
-                    <a:pt x="25298" y="42959"/>
-                  </a:moveTo>
-                  <a:cubicBezTo>
-                    <a:pt x="25298" y="28708"/>
-                    <a:pt x="19516" y="12118"/>
-                    <a:pt x="12649" y="6059"/>
-                  </a:cubicBezTo>
-                  <a:cubicBezTo>
-                    <a:pt x="5782" y="0"/>
-                    <a:pt x="0" y="6366"/>
-                    <a:pt x="0" y="20610"/>
-                  </a:cubicBezTo>
-                  <a:cubicBezTo>
-                    <a:pt x="0" y="34855"/>
-                    <a:pt x="5782" y="51445"/>
-                    <a:pt x="12649" y="57511"/>
-                  </a:cubicBezTo>
-                  <a:cubicBezTo>
-                    <a:pt x="19516" y="63576"/>
-                    <a:pt x="25298" y="57211"/>
-                    <a:pt x="25298" y="42959"/>
+                <a:path w="29754" h="78912" fill="norm">
+                  <a:moveTo>
+                    <a:pt x="29754" y="32086"/>
+                  </a:moveTo>
+                  <a:cubicBezTo>
+                    <a:pt x="29754" y="12400"/>
+                    <a:pt x="22953" y="0"/>
+                    <a:pt x="14877" y="4119"/>
+                  </a:cubicBezTo>
+                  <a:cubicBezTo>
+                    <a:pt x="6801" y="8240"/>
+                    <a:pt x="0" y="27440"/>
+                    <a:pt x="0" y="46976"/>
+                  </a:cubicBezTo>
+                  <a:cubicBezTo>
+                    <a:pt x="0" y="66513"/>
+                    <a:pt x="6801" y="78912"/>
+                    <a:pt x="14877" y="74938"/>
+                  </a:cubicBezTo>
+                  <a:cubicBezTo>
+                    <a:pt x="22953" y="70965"/>
+                    <a:pt x="29754" y="51772"/>
+                    <a:pt x="29754" y="32086"/>
                   </a:cubicBezTo>
                   <a:close/>
                 </a:path>
@@ -3037,14 +3274,14 @@
         </p:sp>
         <p:sp>
           <p:nvSpPr>
-            <p:cNvPr id="43" name="right Speaker column 2 row 1 10"/>
+            <p:cNvPr id="53" name="right Speaker column 2 row 1 9"/>
             <p:cNvSpPr/>
             <p:nvPr/>
           </p:nvSpPr>
           <p:spPr>
             <a:xfrm>
-              <a:off x="8327966" y="2092524"/>
-              <a:ext cx="25298" cy="64389"/>
+              <a:off x="8340123" y="1564225"/>
+              <a:ext cx="29754" cy="78073"/>
             </a:xfrm>
             <a:custGeom>
               <a:avLst/>
@@ -3053,29 +3290,29 @@
               <a:cxnLst/>
               <a:rect l="0" t="0" r="r" b="b"/>
               <a:pathLst>
-                <a:path w="25298" h="64389" fill="norm">
-                  <a:moveTo>
-                    <a:pt x="25298" y="43518"/>
-                  </a:moveTo>
-                  <a:cubicBezTo>
-                    <a:pt x="25298" y="29266"/>
-                    <a:pt x="19516" y="12667"/>
-                    <a:pt x="12649" y="6334"/>
-                  </a:cubicBezTo>
-                  <a:cubicBezTo>
-                    <a:pt x="5782" y="0"/>
-                    <a:pt x="0" y="6620"/>
-                    <a:pt x="0" y="20865"/>
-                  </a:cubicBezTo>
-                  <a:cubicBezTo>
-                    <a:pt x="0" y="35110"/>
-                    <a:pt x="5782" y="51709"/>
-                    <a:pt x="12649" y="58049"/>
-                  </a:cubicBezTo>
-                  <a:cubicBezTo>
-                    <a:pt x="19516" y="64389"/>
-                    <a:pt x="25298" y="58033"/>
-                    <a:pt x="25298" y="43782"/>
+                <a:path w="29754" h="78073" fill="norm">
+                  <a:moveTo>
+                    <a:pt x="29754" y="32287"/>
+                  </a:moveTo>
+                  <a:cubicBezTo>
+                    <a:pt x="29754" y="12601"/>
+                    <a:pt x="22953" y="0"/>
+                    <a:pt x="14877" y="3517"/>
+                  </a:cubicBezTo>
+                  <a:cubicBezTo>
+                    <a:pt x="6801" y="7038"/>
+                    <a:pt x="0" y="26399"/>
+                    <a:pt x="0" y="45936"/>
+                  </a:cubicBezTo>
+                  <a:cubicBezTo>
+                    <a:pt x="0" y="65473"/>
+                    <a:pt x="6801" y="78073"/>
+                    <a:pt x="14877" y="74699"/>
+                  </a:cubicBezTo>
+                  <a:cubicBezTo>
+                    <a:pt x="22953" y="71329"/>
+                    <a:pt x="29754" y="52337"/>
+                    <a:pt x="29754" y="32651"/>
                   </a:cubicBezTo>
                   <a:close/>
                 </a:path>
@@ -3092,14 +3329,14 @@
         </p:sp>
         <p:sp>
           <p:nvSpPr>
-            <p:cNvPr id="44" name="right Speaker column 2 row 1 11"/>
+            <p:cNvPr id="54" name="right Speaker column 2 row 1 10"/>
             <p:cNvSpPr/>
             <p:nvPr/>
           </p:nvSpPr>
           <p:spPr>
             <a:xfrm>
-              <a:off x="8327966" y="2176682"/>
-              <a:ext cx="25298" cy="64147"/>
+              <a:off x="8340123" y="1680316"/>
+              <a:ext cx="29754" cy="77232"/>
             </a:xfrm>
             <a:custGeom>
               <a:avLst/>
@@ -3108,29 +3345,29 @@
               <a:cxnLst/>
               <a:rect l="0" t="0" r="r" b="b"/>
               <a:pathLst>
-                <a:path w="25298" h="64147" fill="norm">
-                  <a:moveTo>
-                    <a:pt x="25298" y="43549"/>
-                  </a:moveTo>
-                  <a:cubicBezTo>
-                    <a:pt x="25298" y="29297"/>
-                    <a:pt x="19516" y="12689"/>
-                    <a:pt x="12649" y="6345"/>
-                  </a:cubicBezTo>
-                  <a:cubicBezTo>
-                    <a:pt x="5782" y="0"/>
-                    <a:pt x="0" y="6347"/>
-                    <a:pt x="0" y="20592"/>
-                  </a:cubicBezTo>
-                  <a:cubicBezTo>
-                    <a:pt x="0" y="34837"/>
-                    <a:pt x="5782" y="51445"/>
-                    <a:pt x="12649" y="57796"/>
-                  </a:cubicBezTo>
-                  <a:cubicBezTo>
-                    <a:pt x="19516" y="64147"/>
-                    <a:pt x="25298" y="57800"/>
-                    <a:pt x="25298" y="43549"/>
+                <a:path w="29754" h="77232" fill="norm">
+                  <a:moveTo>
+                    <a:pt x="29754" y="32487"/>
+                  </a:moveTo>
+                  <a:cubicBezTo>
+                    <a:pt x="29754" y="12802"/>
+                    <a:pt x="22953" y="0"/>
+                    <a:pt x="14877" y="3278"/>
+                  </a:cubicBezTo>
+                  <a:cubicBezTo>
+                    <a:pt x="6801" y="6559"/>
+                    <a:pt x="0" y="25357"/>
+                    <a:pt x="0" y="44894"/>
+                  </a:cubicBezTo>
+                  <a:cubicBezTo>
+                    <a:pt x="0" y="64430"/>
+                    <a:pt x="6801" y="77232"/>
+                    <a:pt x="14877" y="74097"/>
+                  </a:cubicBezTo>
+                  <a:cubicBezTo>
+                    <a:pt x="22953" y="70965"/>
+                    <a:pt x="29754" y="52173"/>
+                    <a:pt x="29754" y="32487"/>
                   </a:cubicBezTo>
                   <a:close/>
                 </a:path>
@@ -3147,14 +3384,14 @@
         </p:sp>
         <p:sp>
           <p:nvSpPr>
-            <p:cNvPr id="45" name="right Speaker column 2 row 1 12"/>
+            <p:cNvPr id="55" name="right Speaker column 2 row 1 11"/>
             <p:cNvSpPr/>
             <p:nvPr/>
           </p:nvSpPr>
           <p:spPr>
             <a:xfrm>
-              <a:off x="8327966" y="2260313"/>
-              <a:ext cx="25298" cy="64697"/>
+              <a:off x="8340123" y="1795679"/>
+              <a:ext cx="29754" cy="76756"/>
             </a:xfrm>
             <a:custGeom>
               <a:avLst/>
@@ -3163,29 +3400,29 @@
               <a:cxnLst/>
               <a:rect l="0" t="0" r="r" b="b"/>
               <a:pathLst>
-                <a:path w="25298" h="64697" fill="norm">
-                  <a:moveTo>
-                    <a:pt x="25298" y="43843"/>
-                  </a:moveTo>
-                  <a:cubicBezTo>
-                    <a:pt x="25298" y="29592"/>
-                    <a:pt x="19516" y="12711"/>
-                    <a:pt x="12649" y="6355"/>
-                  </a:cubicBezTo>
-                  <a:cubicBezTo>
-                    <a:pt x="5782" y="0"/>
-                    <a:pt x="0" y="6338"/>
-                    <a:pt x="0" y="20583"/>
-                  </a:cubicBezTo>
-                  <a:cubicBezTo>
-                    <a:pt x="0" y="34828"/>
-                    <a:pt x="5782" y="51445"/>
-                    <a:pt x="12649" y="58071"/>
-                  </a:cubicBezTo>
-                  <a:cubicBezTo>
-                    <a:pt x="19516" y="64697"/>
-                    <a:pt x="25298" y="58095"/>
-                    <a:pt x="25298" y="43843"/>
+                <a:path w="29754" h="76756" fill="norm">
+                  <a:moveTo>
+                    <a:pt x="29754" y="33052"/>
+                  </a:moveTo>
+                  <a:cubicBezTo>
+                    <a:pt x="29754" y="13366"/>
+                    <a:pt x="22953" y="0"/>
+                    <a:pt x="14877" y="3041"/>
+                  </a:cubicBezTo>
+                  <a:cubicBezTo>
+                    <a:pt x="6801" y="6084"/>
+                    <a:pt x="0" y="24681"/>
+                    <a:pt x="0" y="44217"/>
+                  </a:cubicBezTo>
+                  <a:cubicBezTo>
+                    <a:pt x="0" y="63754"/>
+                    <a:pt x="6801" y="76756"/>
+                    <a:pt x="14877" y="74223"/>
+                  </a:cubicBezTo>
+                  <a:cubicBezTo>
+                    <a:pt x="22953" y="71693"/>
+                    <a:pt x="29754" y="52737"/>
+                    <a:pt x="29754" y="33052"/>
                   </a:cubicBezTo>
                   <a:close/>
                 </a:path>
@@ -3202,14 +3439,14 @@
         </p:sp>
         <p:sp>
           <p:nvSpPr>
-            <p:cNvPr id="46" name="right Speaker column 2 row 1 13"/>
+            <p:cNvPr id="56" name="right Speaker column 2 row 1 12"/>
             <p:cNvSpPr/>
             <p:nvPr/>
           </p:nvSpPr>
           <p:spPr>
             <a:xfrm>
-              <a:off x="8327966" y="2344471"/>
-              <a:ext cx="25298" cy="64191"/>
+              <a:off x="8340123" y="1911770"/>
+              <a:ext cx="29754" cy="76277"/>
             </a:xfrm>
             <a:custGeom>
               <a:avLst/>
@@ -3218,29 +3455,29 @@
               <a:cxnLst/>
               <a:rect l="0" t="0" r="r" b="b"/>
               <a:pathLst>
-                <a:path w="25298" h="64191" fill="norm">
-                  <a:moveTo>
-                    <a:pt x="25298" y="43874"/>
-                  </a:moveTo>
-                  <a:cubicBezTo>
-                    <a:pt x="25298" y="29623"/>
-                    <a:pt x="19516" y="12732"/>
-                    <a:pt x="12649" y="6366"/>
-                  </a:cubicBezTo>
-                  <a:cubicBezTo>
-                    <a:pt x="5782" y="0"/>
-                    <a:pt x="0" y="6065"/>
-                    <a:pt x="0" y="20310"/>
-                  </a:cubicBezTo>
-                  <a:cubicBezTo>
-                    <a:pt x="0" y="34555"/>
-                    <a:pt x="5782" y="51445"/>
-                    <a:pt x="12649" y="57818"/>
-                  </a:cubicBezTo>
-                  <a:cubicBezTo>
-                    <a:pt x="19516" y="64191"/>
-                    <a:pt x="25298" y="58125"/>
-                    <a:pt x="25298" y="43874"/>
+                <a:path w="29754" h="76277" fill="norm">
+                  <a:moveTo>
+                    <a:pt x="29754" y="33253"/>
+                  </a:moveTo>
+                  <a:cubicBezTo>
+                    <a:pt x="29754" y="13567"/>
+                    <a:pt x="22953" y="0"/>
+                    <a:pt x="14877" y="2802"/>
+                  </a:cubicBezTo>
+                  <a:cubicBezTo>
+                    <a:pt x="6801" y="5605"/>
+                    <a:pt x="0" y="23638"/>
+                    <a:pt x="0" y="43175"/>
+                  </a:cubicBezTo>
+                  <a:cubicBezTo>
+                    <a:pt x="0" y="62711"/>
+                    <a:pt x="6801" y="76277"/>
+                    <a:pt x="14877" y="73620"/>
+                  </a:cubicBezTo>
+                  <a:cubicBezTo>
+                    <a:pt x="22953" y="70965"/>
+                    <a:pt x="29754" y="52938"/>
+                    <a:pt x="29754" y="33253"/>
                   </a:cubicBezTo>
                   <a:close/>
                 </a:path>
@@ -3257,14 +3494,14 @@
         </p:sp>
         <p:sp>
           <p:nvSpPr>
-            <p:cNvPr id="47" name="right Speaker column 2 row 1 14"/>
+            <p:cNvPr id="57" name="right Speaker column 2 row 1 13"/>
             <p:cNvSpPr/>
             <p:nvPr/>
           </p:nvSpPr>
           <p:spPr>
             <a:xfrm>
-              <a:off x="8327966" y="2427838"/>
-              <a:ext cx="25298" cy="64476"/>
+              <a:off x="8340123" y="2027497"/>
+              <a:ext cx="29754" cy="75438"/>
             </a:xfrm>
             <a:custGeom>
               <a:avLst/>
@@ -3273,29 +3510,29 @@
               <a:cxnLst/>
               <a:rect l="0" t="0" r="r" b="b"/>
               <a:pathLst>
-                <a:path w="25298" h="64476" fill="norm">
-                  <a:moveTo>
-                    <a:pt x="25298" y="44432"/>
-                  </a:moveTo>
-                  <a:cubicBezTo>
-                    <a:pt x="25298" y="30181"/>
-                    <a:pt x="19516" y="13282"/>
-                    <a:pt x="12649" y="6641"/>
-                  </a:cubicBezTo>
-                  <a:cubicBezTo>
-                    <a:pt x="5782" y="0"/>
-                    <a:pt x="0" y="6320"/>
-                    <a:pt x="0" y="20565"/>
-                  </a:cubicBezTo>
-                  <a:cubicBezTo>
-                    <a:pt x="0" y="34809"/>
-                    <a:pt x="5782" y="51709"/>
-                    <a:pt x="12649" y="58092"/>
-                  </a:cubicBezTo>
-                  <a:cubicBezTo>
-                    <a:pt x="19516" y="64476"/>
-                    <a:pt x="25298" y="58420"/>
-                    <a:pt x="25298" y="44168"/>
+                <a:path w="29754" h="75438" fill="norm">
+                  <a:moveTo>
+                    <a:pt x="29754" y="33453"/>
+                  </a:moveTo>
+                  <a:cubicBezTo>
+                    <a:pt x="29754" y="13767"/>
+                    <a:pt x="22953" y="0"/>
+                    <a:pt x="14877" y="2200"/>
+                  </a:cubicBezTo>
+                  <a:cubicBezTo>
+                    <a:pt x="6801" y="4403"/>
+                    <a:pt x="0" y="22598"/>
+                    <a:pt x="0" y="42134"/>
+                  </a:cubicBezTo>
+                  <a:cubicBezTo>
+                    <a:pt x="0" y="61671"/>
+                    <a:pt x="6801" y="75438"/>
+                    <a:pt x="14877" y="73019"/>
+                  </a:cubicBezTo>
+                  <a:cubicBezTo>
+                    <a:pt x="22953" y="70601"/>
+                    <a:pt x="29754" y="52774"/>
+                    <a:pt x="29754" y="33088"/>
                   </a:cubicBezTo>
                   <a:close/>
                 </a:path>
@@ -3312,14 +3549,14 @@
         </p:sp>
         <p:sp>
           <p:nvSpPr>
-            <p:cNvPr id="48" name="right Speaker column 2 row 1 15"/>
+            <p:cNvPr id="58" name="right Speaker column 2 row 1 14"/>
             <p:cNvSpPr/>
             <p:nvPr/>
           </p:nvSpPr>
           <p:spPr>
             <a:xfrm>
-              <a:off x="8363745" y="1829963"/>
-              <a:ext cx="25298" cy="63822"/>
+              <a:off x="8382203" y="1133425"/>
+              <a:ext cx="29754" cy="81204"/>
             </a:xfrm>
             <a:custGeom>
               <a:avLst/>
@@ -3328,29 +3565,29 @@
               <a:cxnLst/>
               <a:rect l="0" t="0" r="r" b="b"/>
               <a:pathLst>
-                <a:path w="25298" h="63822" fill="norm">
-                  <a:moveTo>
-                    <a:pt x="25298" y="42902"/>
-                  </a:moveTo>
-                  <a:cubicBezTo>
-                    <a:pt x="25298" y="28641"/>
-                    <a:pt x="19516" y="12065"/>
-                    <a:pt x="12649" y="6033"/>
-                  </a:cubicBezTo>
-                  <a:cubicBezTo>
-                    <a:pt x="5782" y="0"/>
-                    <a:pt x="0" y="6660"/>
-                    <a:pt x="0" y="20914"/>
-                  </a:cubicBezTo>
-                  <a:cubicBezTo>
-                    <a:pt x="0" y="35168"/>
-                    <a:pt x="5782" y="51743"/>
-                    <a:pt x="12649" y="57782"/>
-                  </a:cubicBezTo>
-                  <a:cubicBezTo>
-                    <a:pt x="19516" y="63822"/>
-                    <a:pt x="25298" y="57163"/>
-                    <a:pt x="25298" y="42902"/>
+                <a:path w="29754" h="81204" fill="norm">
+                  <a:moveTo>
+                    <a:pt x="29754" y="31975"/>
+                  </a:moveTo>
+                  <a:cubicBezTo>
+                    <a:pt x="29754" y="12080"/>
+                    <a:pt x="22953" y="0"/>
+                    <a:pt x="14877" y="4701"/>
+                  </a:cubicBezTo>
+                  <a:cubicBezTo>
+                    <a:pt x="6801" y="9406"/>
+                    <a:pt x="0" y="29633"/>
+                    <a:pt x="0" y="49380"/>
+                  </a:cubicBezTo>
+                  <a:cubicBezTo>
+                    <a:pt x="0" y="69128"/>
+                    <a:pt x="6801" y="81204"/>
+                    <a:pt x="14877" y="76645"/>
+                  </a:cubicBezTo>
+                  <a:cubicBezTo>
+                    <a:pt x="22953" y="72089"/>
+                    <a:pt x="29754" y="51870"/>
+                    <a:pt x="29754" y="31975"/>
                   </a:cubicBezTo>
                   <a:close/>
                 </a:path>
@@ -3367,14 +3604,14 @@
         </p:sp>
         <p:sp>
           <p:nvSpPr>
-            <p:cNvPr id="49" name="right Speaker column 2 row 1 16"/>
+            <p:cNvPr id="59" name="right Speaker column 2 row 1 15"/>
             <p:cNvSpPr/>
             <p:nvPr/>
           </p:nvSpPr>
           <p:spPr>
             <a:xfrm>
-              <a:off x="8363745" y="1914441"/>
-              <a:ext cx="25298" cy="63843"/>
+              <a:off x="8382203" y="1251121"/>
+              <a:ext cx="29754" cy="80729"/>
             </a:xfrm>
             <a:custGeom>
               <a:avLst/>
@@ -3383,29 +3620,29 @@
               <a:cxnLst/>
               <a:rect l="0" t="0" r="r" b="b"/>
               <a:pathLst>
-                <a:path w="25298" h="63843" fill="norm">
-                  <a:moveTo>
-                    <a:pt x="25298" y="42932"/>
-                  </a:moveTo>
-                  <a:cubicBezTo>
-                    <a:pt x="25298" y="28671"/>
-                    <a:pt x="19516" y="12087"/>
-                    <a:pt x="12649" y="6043"/>
-                  </a:cubicBezTo>
-                  <a:cubicBezTo>
-                    <a:pt x="5782" y="0"/>
-                    <a:pt x="0" y="6651"/>
-                    <a:pt x="0" y="20905"/>
-                  </a:cubicBezTo>
-                  <a:cubicBezTo>
-                    <a:pt x="0" y="35159"/>
-                    <a:pt x="5782" y="51743"/>
-                    <a:pt x="12649" y="57793"/>
-                  </a:cubicBezTo>
-                  <a:cubicBezTo>
-                    <a:pt x="19516" y="63843"/>
-                    <a:pt x="25298" y="57193"/>
-                    <a:pt x="25298" y="42932"/>
+                <a:path w="29754" h="80729" fill="norm">
+                  <a:moveTo>
+                    <a:pt x="29754" y="32174"/>
+                  </a:moveTo>
+                  <a:cubicBezTo>
+                    <a:pt x="29754" y="12279"/>
+                    <a:pt x="22953" y="0"/>
+                    <a:pt x="14877" y="4464"/>
+                  </a:cubicBezTo>
+                  <a:cubicBezTo>
+                    <a:pt x="6801" y="8930"/>
+                    <a:pt x="0" y="28957"/>
+                    <a:pt x="0" y="48705"/>
+                  </a:cubicBezTo>
+                  <a:cubicBezTo>
+                    <a:pt x="0" y="68452"/>
+                    <a:pt x="6801" y="80729"/>
+                    <a:pt x="14877" y="76408"/>
+                  </a:cubicBezTo>
+                  <a:cubicBezTo>
+                    <a:pt x="22953" y="72089"/>
+                    <a:pt x="29754" y="52069"/>
+                    <a:pt x="29754" y="32174"/>
                   </a:cubicBezTo>
                   <a:close/>
                 </a:path>
@@ -3422,14 +3659,14 @@
         </p:sp>
         <p:sp>
           <p:nvSpPr>
-            <p:cNvPr id="50" name="right Speaker column 2 row 1 17"/>
+            <p:cNvPr id="60" name="right Speaker column 2 row 1 16"/>
             <p:cNvSpPr/>
             <p:nvPr/>
           </p:nvSpPr>
           <p:spPr>
             <a:xfrm>
-              <a:off x="8363745" y="1998392"/>
-              <a:ext cx="25298" cy="64393"/>
+              <a:off x="8382203" y="1368818"/>
+              <a:ext cx="29754" cy="79521"/>
             </a:xfrm>
             <a:custGeom>
               <a:avLst/>
@@ -3438,29 +3675,29 @@
               <a:cxnLst/>
               <a:rect l="0" t="0" r="r" b="b"/>
               <a:pathLst>
-                <a:path w="25298" h="64393" fill="norm">
-                  <a:moveTo>
-                    <a:pt x="25298" y="43491"/>
-                  </a:moveTo>
-                  <a:cubicBezTo>
-                    <a:pt x="25298" y="29230"/>
-                    <a:pt x="19516" y="12636"/>
-                    <a:pt x="12649" y="6318"/>
-                  </a:cubicBezTo>
-                  <a:cubicBezTo>
-                    <a:pt x="5782" y="0"/>
-                    <a:pt x="0" y="6641"/>
-                    <a:pt x="0" y="20896"/>
-                  </a:cubicBezTo>
-                  <a:cubicBezTo>
-                    <a:pt x="0" y="35150"/>
-                    <a:pt x="5782" y="51743"/>
-                    <a:pt x="12649" y="58068"/>
-                  </a:cubicBezTo>
-                  <a:cubicBezTo>
-                    <a:pt x="19516" y="64393"/>
-                    <a:pt x="25298" y="57752"/>
-                    <a:pt x="25298" y="43491"/>
+                <a:path w="29754" h="79521" fill="norm">
+                  <a:moveTo>
+                    <a:pt x="29754" y="32374"/>
+                  </a:moveTo>
+                  <a:cubicBezTo>
+                    <a:pt x="29754" y="12479"/>
+                    <a:pt x="22953" y="0"/>
+                    <a:pt x="14877" y="3860"/>
+                  </a:cubicBezTo>
+                  <a:cubicBezTo>
+                    <a:pt x="6801" y="7723"/>
+                    <a:pt x="0" y="27550"/>
+                    <a:pt x="0" y="47298"/>
+                  </a:cubicBezTo>
+                  <a:cubicBezTo>
+                    <a:pt x="0" y="67045"/>
+                    <a:pt x="6801" y="79521"/>
+                    <a:pt x="14877" y="75803"/>
+                  </a:cubicBezTo>
+                  <a:cubicBezTo>
+                    <a:pt x="22953" y="72089"/>
+                    <a:pt x="29754" y="52269"/>
+                    <a:pt x="29754" y="32374"/>
                   </a:cubicBezTo>
                   <a:close/>
                 </a:path>
@@ -3477,14 +3714,14 @@
         </p:sp>
         <p:sp>
           <p:nvSpPr>
-            <p:cNvPr id="51" name="right Speaker column 2 row 1 18"/>
+            <p:cNvPr id="61" name="right Speaker column 2 row 1 17"/>
             <p:cNvSpPr/>
             <p:nvPr/>
           </p:nvSpPr>
           <p:spPr>
             <a:xfrm>
-              <a:off x="8363745" y="2082871"/>
-              <a:ext cx="25298" cy="64150"/>
+              <a:off x="8382203" y="1485779"/>
+              <a:ext cx="29754" cy="79415"/>
             </a:xfrm>
             <a:custGeom>
               <a:avLst/>
@@ -3493,29 +3730,29 @@
               <a:cxnLst/>
               <a:rect l="0" t="0" r="r" b="b"/>
               <a:pathLst>
-                <a:path w="25298" h="64150" fill="norm">
-                  <a:moveTo>
-                    <a:pt x="25298" y="43257"/>
-                  </a:moveTo>
-                  <a:cubicBezTo>
-                    <a:pt x="25298" y="28996"/>
-                    <a:pt x="19516" y="12130"/>
-                    <a:pt x="12649" y="6065"/>
-                  </a:cubicBezTo>
-                  <a:cubicBezTo>
-                    <a:pt x="5782" y="0"/>
-                    <a:pt x="0" y="6368"/>
-                    <a:pt x="0" y="20623"/>
-                  </a:cubicBezTo>
-                  <a:cubicBezTo>
-                    <a:pt x="0" y="34877"/>
-                    <a:pt x="5782" y="51479"/>
-                    <a:pt x="12649" y="57815"/>
-                  </a:cubicBezTo>
-                  <a:cubicBezTo>
-                    <a:pt x="19516" y="64150"/>
-                    <a:pt x="25298" y="57518"/>
-                    <a:pt x="25298" y="43257"/>
+                <a:path w="29754" h="79415" fill="norm">
+                  <a:moveTo>
+                    <a:pt x="29754" y="32940"/>
+                  </a:moveTo>
+                  <a:cubicBezTo>
+                    <a:pt x="29754" y="13045"/>
+                    <a:pt x="22953" y="0"/>
+                    <a:pt x="14877" y="3991"/>
+                  </a:cubicBezTo>
+                  <a:cubicBezTo>
+                    <a:pt x="6801" y="7983"/>
+                    <a:pt x="0" y="27244"/>
+                    <a:pt x="0" y="46992"/>
+                  </a:cubicBezTo>
+                  <a:cubicBezTo>
+                    <a:pt x="0" y="66739"/>
+                    <a:pt x="6801" y="79415"/>
+                    <a:pt x="14877" y="75935"/>
+                  </a:cubicBezTo>
+                  <a:cubicBezTo>
+                    <a:pt x="22953" y="72457"/>
+                    <a:pt x="29754" y="52835"/>
+                    <a:pt x="29754" y="32940"/>
                   </a:cubicBezTo>
                   <a:close/>
                 </a:path>
@@ -3532,14 +3769,14 @@
         </p:sp>
         <p:sp>
           <p:nvSpPr>
-            <p:cNvPr id="52" name="right Speaker column 2 row 1 19"/>
+            <p:cNvPr id="62" name="right Speaker column 2 row 1 18"/>
             <p:cNvSpPr/>
             <p:nvPr/>
           </p:nvSpPr>
           <p:spPr>
             <a:xfrm>
-              <a:off x="8363745" y="2166822"/>
-              <a:ext cx="25298" cy="64436"/>
+              <a:off x="8382203" y="1603476"/>
+              <a:ext cx="29754" cy="78574"/>
             </a:xfrm>
             <a:custGeom>
               <a:avLst/>
@@ -3548,29 +3785,29 @@
               <a:cxnLst/>
               <a:rect l="0" t="0" r="r" b="b"/>
               <a:pathLst>
-                <a:path w="25298" h="64436" fill="norm">
-                  <a:moveTo>
-                    <a:pt x="25298" y="43816"/>
-                  </a:moveTo>
-                  <a:cubicBezTo>
-                    <a:pt x="25298" y="29555"/>
-                    <a:pt x="19516" y="12679"/>
-                    <a:pt x="12649" y="6340"/>
-                  </a:cubicBezTo>
-                  <a:cubicBezTo>
-                    <a:pt x="5782" y="0"/>
-                    <a:pt x="0" y="6359"/>
-                    <a:pt x="0" y="20614"/>
-                  </a:cubicBezTo>
-                  <a:cubicBezTo>
-                    <a:pt x="0" y="34868"/>
-                    <a:pt x="5782" y="51743"/>
-                    <a:pt x="12649" y="58089"/>
-                  </a:cubicBezTo>
-                  <a:cubicBezTo>
-                    <a:pt x="19516" y="64436"/>
-                    <a:pt x="25298" y="58077"/>
-                    <a:pt x="25298" y="43816"/>
+                <a:path w="29754" h="78574" fill="norm">
+                  <a:moveTo>
+                    <a:pt x="29754" y="33140"/>
+                  </a:moveTo>
+                  <a:cubicBezTo>
+                    <a:pt x="29754" y="13245"/>
+                    <a:pt x="22953" y="0"/>
+                    <a:pt x="14877" y="3386"/>
+                  </a:cubicBezTo>
+                  <a:cubicBezTo>
+                    <a:pt x="6801" y="6775"/>
+                    <a:pt x="0" y="25837"/>
+                    <a:pt x="0" y="45585"/>
+                  </a:cubicBezTo>
+                  <a:cubicBezTo>
+                    <a:pt x="0" y="65332"/>
+                    <a:pt x="6801" y="78574"/>
+                    <a:pt x="14877" y="75330"/>
+                  </a:cubicBezTo>
+                  <a:cubicBezTo>
+                    <a:pt x="22953" y="72089"/>
+                    <a:pt x="29754" y="53035"/>
+                    <a:pt x="29754" y="33140"/>
                   </a:cubicBezTo>
                   <a:close/>
                 </a:path>
@@ -3587,14 +3824,14 @@
         </p:sp>
         <p:sp>
           <p:nvSpPr>
-            <p:cNvPr id="53" name="right Speaker column 2 row 1 20"/>
+            <p:cNvPr id="63" name="right Speaker column 2 row 1 19"/>
             <p:cNvSpPr/>
             <p:nvPr/>
           </p:nvSpPr>
           <p:spPr>
             <a:xfrm>
-              <a:off x="8363745" y="2251300"/>
-              <a:ext cx="25298" cy="64457"/>
+              <a:off x="8382203" y="1721173"/>
+              <a:ext cx="29754" cy="78099"/>
             </a:xfrm>
             <a:custGeom>
               <a:avLst/>
@@ -3603,29 +3840,29 @@
               <a:cxnLst/>
               <a:rect l="0" t="0" r="r" b="b"/>
               <a:pathLst>
-                <a:path w="25298" h="64457" fill="norm">
-                  <a:moveTo>
-                    <a:pt x="25298" y="43846"/>
-                  </a:moveTo>
-                  <a:cubicBezTo>
-                    <a:pt x="25298" y="29585"/>
-                    <a:pt x="19516" y="12701"/>
-                    <a:pt x="12649" y="6350"/>
-                  </a:cubicBezTo>
-                  <a:cubicBezTo>
-                    <a:pt x="5782" y="0"/>
-                    <a:pt x="0" y="6350"/>
-                    <a:pt x="0" y="20605"/>
-                  </a:cubicBezTo>
-                  <a:cubicBezTo>
-                    <a:pt x="0" y="34859"/>
-                    <a:pt x="5782" y="51743"/>
-                    <a:pt x="12649" y="58100"/>
-                  </a:cubicBezTo>
-                  <a:cubicBezTo>
-                    <a:pt x="19516" y="64457"/>
-                    <a:pt x="25298" y="58107"/>
-                    <a:pt x="25298" y="43846"/>
+                <a:path w="29754" h="78099" fill="norm">
+                  <a:moveTo>
+                    <a:pt x="29754" y="33339"/>
+                  </a:moveTo>
+                  <a:cubicBezTo>
+                    <a:pt x="29754" y="13444"/>
+                    <a:pt x="22953" y="0"/>
+                    <a:pt x="14877" y="3149"/>
+                  </a:cubicBezTo>
+                  <a:cubicBezTo>
+                    <a:pt x="6801" y="6300"/>
+                    <a:pt x="0" y="25162"/>
+                    <a:pt x="0" y="44909"/>
+                  </a:cubicBezTo>
+                  <a:cubicBezTo>
+                    <a:pt x="0" y="64656"/>
+                    <a:pt x="6801" y="78099"/>
+                    <a:pt x="14877" y="75093"/>
+                  </a:cubicBezTo>
+                  <a:cubicBezTo>
+                    <a:pt x="22953" y="72089"/>
+                    <a:pt x="29754" y="53234"/>
+                    <a:pt x="29754" y="33339"/>
                   </a:cubicBezTo>
                   <a:close/>
                 </a:path>
@@ -3642,14 +3879,14 @@
         </p:sp>
         <p:sp>
           <p:nvSpPr>
-            <p:cNvPr id="54" name="right Speaker column 2 row 1 21"/>
+            <p:cNvPr id="64" name="right Speaker column 2 row 1 20"/>
             <p:cNvSpPr/>
             <p:nvPr/>
           </p:nvSpPr>
           <p:spPr>
             <a:xfrm>
-              <a:off x="8363745" y="2335251"/>
-              <a:ext cx="25298" cy="64743"/>
+              <a:off x="8382203" y="1838869"/>
+              <a:ext cx="29754" cy="77257"/>
             </a:xfrm>
             <a:custGeom>
               <a:avLst/>
@@ -3658,29 +3895,29 @@
               <a:cxnLst/>
               <a:rect l="0" t="0" r="r" b="b"/>
               <a:pathLst>
-                <a:path w="25298" h="64743" fill="norm">
-                  <a:moveTo>
-                    <a:pt x="25298" y="44405"/>
-                  </a:moveTo>
-                  <a:cubicBezTo>
-                    <a:pt x="25298" y="30144"/>
-                    <a:pt x="19516" y="13250"/>
-                    <a:pt x="12649" y="6625"/>
-                  </a:cubicBezTo>
-                  <a:cubicBezTo>
-                    <a:pt x="5782" y="0"/>
-                    <a:pt x="0" y="6341"/>
-                    <a:pt x="0" y="20859"/>
-                  </a:cubicBezTo>
-                  <a:cubicBezTo>
-                    <a:pt x="0" y="35378"/>
-                    <a:pt x="5782" y="52007"/>
-                    <a:pt x="12649" y="58375"/>
-                  </a:cubicBezTo>
-                  <a:cubicBezTo>
-                    <a:pt x="19516" y="64743"/>
-                    <a:pt x="25298" y="58666"/>
-                    <a:pt x="25298" y="44405"/>
+                <a:path w="29754" h="77257" fill="norm">
+                  <a:moveTo>
+                    <a:pt x="29754" y="33539"/>
+                  </a:moveTo>
+                  <a:cubicBezTo>
+                    <a:pt x="29754" y="13644"/>
+                    <a:pt x="22953" y="0"/>
+                    <a:pt x="14877" y="2545"/>
+                  </a:cubicBezTo>
+                  <a:cubicBezTo>
+                    <a:pt x="6801" y="5093"/>
+                    <a:pt x="0" y="23754"/>
+                    <a:pt x="0" y="43867"/>
+                  </a:cubicBezTo>
+                  <a:cubicBezTo>
+                    <a:pt x="0" y="63980"/>
+                    <a:pt x="6801" y="77257"/>
+                    <a:pt x="14877" y="74489"/>
+                  </a:cubicBezTo>
+                  <a:cubicBezTo>
+                    <a:pt x="22953" y="71721"/>
+                    <a:pt x="29754" y="53434"/>
+                    <a:pt x="29754" y="33539"/>
                   </a:cubicBezTo>
                   <a:close/>
                 </a:path>
@@ -3697,14 +3934,14 @@
         </p:sp>
         <p:sp>
           <p:nvSpPr>
-            <p:cNvPr id="55" name="right Speaker column 2 row 1 22"/>
+            <p:cNvPr id="65" name="right Speaker column 2 row 1 21"/>
             <p:cNvSpPr/>
             <p:nvPr/>
           </p:nvSpPr>
           <p:spPr>
             <a:xfrm>
-              <a:off x="8363745" y="2419466"/>
-              <a:ext cx="25298" cy="65028"/>
+              <a:off x="8382203" y="1956198"/>
+              <a:ext cx="29754" cy="76417"/>
             </a:xfrm>
             <a:custGeom>
               <a:avLst/>
@@ -3713,29 +3950,29 @@
               <a:cxnLst/>
               <a:rect l="0" t="0" r="r" b="b"/>
               <a:pathLst>
-                <a:path w="25298" h="65028" fill="norm">
-                  <a:moveTo>
-                    <a:pt x="25298" y="44435"/>
-                  </a:moveTo>
-                  <a:cubicBezTo>
-                    <a:pt x="25298" y="30175"/>
-                    <a:pt x="19516" y="13272"/>
-                    <a:pt x="12649" y="6636"/>
-                  </a:cubicBezTo>
-                  <a:cubicBezTo>
-                    <a:pt x="5782" y="0"/>
-                    <a:pt x="0" y="6332"/>
-                    <a:pt x="0" y="20586"/>
-                  </a:cubicBezTo>
-                  <a:cubicBezTo>
-                    <a:pt x="0" y="34841"/>
-                    <a:pt x="5782" y="51743"/>
-                    <a:pt x="12649" y="58386"/>
-                  </a:cubicBezTo>
-                  <a:cubicBezTo>
-                    <a:pt x="19516" y="65028"/>
-                    <a:pt x="25298" y="58696"/>
-                    <a:pt x="25298" y="44435"/>
+                <a:path w="29754" h="76417" fill="norm">
+                  <a:moveTo>
+                    <a:pt x="29754" y="33738"/>
+                  </a:moveTo>
+                  <a:cubicBezTo>
+                    <a:pt x="29754" y="13843"/>
+                    <a:pt x="22953" y="0"/>
+                    <a:pt x="14877" y="2308"/>
+                  </a:cubicBezTo>
+                  <a:cubicBezTo>
+                    <a:pt x="6801" y="4619"/>
+                    <a:pt x="0" y="23081"/>
+                    <a:pt x="0" y="42828"/>
+                  </a:cubicBezTo>
+                  <a:cubicBezTo>
+                    <a:pt x="0" y="62575"/>
+                    <a:pt x="6801" y="76417"/>
+                    <a:pt x="14877" y="74252"/>
+                  </a:cubicBezTo>
+                  <a:cubicBezTo>
+                    <a:pt x="22953" y="72089"/>
+                    <a:pt x="29754" y="53633"/>
+                    <a:pt x="29754" y="33738"/>
                   </a:cubicBezTo>
                   <a:close/>
                 </a:path>
@@ -3752,14 +3989,14 @@
         </p:sp>
         <p:sp>
           <p:nvSpPr>
-            <p:cNvPr id="56" name="right Speaker column 2 row 1 23"/>
+            <p:cNvPr id="66" name="right Speaker column 2 row 1 22"/>
             <p:cNvSpPr/>
             <p:nvPr/>
           </p:nvSpPr>
           <p:spPr>
             <a:xfrm>
-              <a:off x="8399885" y="1903134"/>
-              <a:ext cx="25298" cy="64228"/>
+              <a:off x="8424709" y="1167007"/>
+              <a:ext cx="29754" cy="81705"/>
             </a:xfrm>
             <a:custGeom>
               <a:avLst/>
@@ -3768,29 +4005,29 @@
               <a:cxnLst/>
               <a:rect l="0" t="0" r="r" b="b"/>
               <a:pathLst>
-                <a:path w="25298" h="64228" fill="norm">
-                  <a:moveTo>
-                    <a:pt x="25298" y="43200"/>
-                  </a:moveTo>
-                  <a:cubicBezTo>
-                    <a:pt x="25298" y="28929"/>
-                    <a:pt x="19516" y="12077"/>
-                    <a:pt x="12649" y="6039"/>
-                  </a:cubicBezTo>
-                  <a:cubicBezTo>
-                    <a:pt x="5782" y="0"/>
-                    <a:pt x="0" y="6662"/>
-                    <a:pt x="0" y="20926"/>
-                  </a:cubicBezTo>
-                  <a:cubicBezTo>
-                    <a:pt x="0" y="35190"/>
-                    <a:pt x="5782" y="51778"/>
-                    <a:pt x="12649" y="58087"/>
-                  </a:cubicBezTo>
-                  <a:cubicBezTo>
-                    <a:pt x="19877" y="64228"/>
-                    <a:pt x="25298" y="57470"/>
-                    <a:pt x="25298" y="43200"/>
+                <a:path w="29754" h="81705" fill="norm">
+                  <a:moveTo>
+                    <a:pt x="29754" y="32835"/>
+                  </a:moveTo>
+                  <a:cubicBezTo>
+                    <a:pt x="29754" y="12731"/>
+                    <a:pt x="22953" y="0"/>
+                    <a:pt x="14877" y="4570"/>
+                  </a:cubicBezTo>
+                  <a:cubicBezTo>
+                    <a:pt x="6801" y="9143"/>
+                    <a:pt x="0" y="29434"/>
+                    <a:pt x="0" y="49391"/>
+                  </a:cubicBezTo>
+                  <a:cubicBezTo>
+                    <a:pt x="0" y="69349"/>
+                    <a:pt x="6801" y="81705"/>
+                    <a:pt x="14877" y="77647"/>
+                  </a:cubicBezTo>
+                  <a:cubicBezTo>
+                    <a:pt x="23378" y="72675"/>
+                    <a:pt x="29754" y="52939"/>
+                    <a:pt x="29754" y="32835"/>
                   </a:cubicBezTo>
                   <a:close/>
                 </a:path>
@@ -3807,14 +4044,14 @@
         </p:sp>
         <p:sp>
           <p:nvSpPr>
-            <p:cNvPr id="57" name="right Speaker column 2 row 1 24"/>
+            <p:cNvPr id="67" name="right Speaker column 2 row 1 23"/>
             <p:cNvSpPr/>
             <p:nvPr/>
           </p:nvSpPr>
           <p:spPr>
             <a:xfrm>
-              <a:off x="8399885" y="1988102"/>
-              <a:ext cx="25298" cy="64346"/>
+              <a:off x="8424709" y="1286688"/>
+              <a:ext cx="29754" cy="81602"/>
             </a:xfrm>
             <a:custGeom>
               <a:avLst/>
@@ -3823,29 +4060,29 @@
               <a:cxnLst/>
               <a:rect l="0" t="0" r="r" b="b"/>
               <a:pathLst>
-                <a:path w="25298" h="64346" fill="norm">
-                  <a:moveTo>
-                    <a:pt x="25298" y="43326"/>
-                  </a:moveTo>
-                  <a:cubicBezTo>
-                    <a:pt x="25298" y="29056"/>
-                    <a:pt x="19516" y="12195"/>
-                    <a:pt x="12649" y="6145"/>
-                  </a:cubicBezTo>
-                  <a:cubicBezTo>
-                    <a:pt x="5421" y="0"/>
-                    <a:pt x="0" y="6749"/>
-                    <a:pt x="0" y="21013"/>
-                  </a:cubicBezTo>
-                  <a:cubicBezTo>
-                    <a:pt x="0" y="35277"/>
-                    <a:pt x="5782" y="52138"/>
-                    <a:pt x="12649" y="58194"/>
-                  </a:cubicBezTo>
-                  <a:cubicBezTo>
-                    <a:pt x="19877" y="64346"/>
-                    <a:pt x="25298" y="57861"/>
-                    <a:pt x="25298" y="43326"/>
+                <a:path w="29754" h="81602" fill="norm">
+                  <a:moveTo>
+                    <a:pt x="29754" y="33033"/>
+                  </a:moveTo>
+                  <a:cubicBezTo>
+                    <a:pt x="29754" y="12929"/>
+                    <a:pt x="22953" y="0"/>
+                    <a:pt x="14877" y="4334"/>
+                  </a:cubicBezTo>
+                  <a:cubicBezTo>
+                    <a:pt x="6376" y="9210"/>
+                    <a:pt x="0" y="28761"/>
+                    <a:pt x="0" y="48719"/>
+                  </a:cubicBezTo>
+                  <a:cubicBezTo>
+                    <a:pt x="0" y="68677"/>
+                    <a:pt x="6801" y="81602"/>
+                    <a:pt x="14877" y="77411"/>
+                  </a:cubicBezTo>
+                  <a:cubicBezTo>
+                    <a:pt x="23378" y="72688"/>
+                    <a:pt x="29754" y="53510"/>
+                    <a:pt x="29754" y="33033"/>
                   </a:cubicBezTo>
                   <a:close/>
                 </a:path>
@@ -3862,14 +4099,14 @@
         </p:sp>
         <p:sp>
           <p:nvSpPr>
-            <p:cNvPr id="58" name="right Speaker column 2 row 1 25"/>
+            <p:cNvPr id="68" name="right Speaker column 2 row 1 24"/>
             <p:cNvSpPr/>
             <p:nvPr/>
           </p:nvSpPr>
           <p:spPr>
             <a:xfrm>
-              <a:off x="8399885" y="2072372"/>
-              <a:ext cx="25298" cy="64633"/>
+              <a:off x="8424709" y="1405998"/>
+              <a:ext cx="29754" cy="80390"/>
             </a:xfrm>
             <a:custGeom>
               <a:avLst/>
@@ -3878,29 +4115,29 @@
               <a:cxnLst/>
               <a:rect l="0" t="0" r="r" b="b"/>
               <a:pathLst>
-                <a:path w="25298" h="64633" fill="norm">
-                  <a:moveTo>
-                    <a:pt x="25298" y="43885"/>
-                  </a:moveTo>
-                  <a:cubicBezTo>
-                    <a:pt x="25298" y="29615"/>
-                    <a:pt x="19516" y="12745"/>
-                    <a:pt x="12649" y="6421"/>
-                  </a:cubicBezTo>
-                  <a:cubicBezTo>
-                    <a:pt x="5421" y="0"/>
-                    <a:pt x="0" y="6741"/>
-                    <a:pt x="0" y="21005"/>
-                  </a:cubicBezTo>
-                  <a:cubicBezTo>
-                    <a:pt x="0" y="35269"/>
-                    <a:pt x="5782" y="52139"/>
-                    <a:pt x="12649" y="58205"/>
-                  </a:cubicBezTo>
-                  <a:cubicBezTo>
-                    <a:pt x="19877" y="64633"/>
-                    <a:pt x="25298" y="57892"/>
-                    <a:pt x="25298" y="43621"/>
+                <a:path w="29754" h="80390" fill="norm">
+                  <a:moveTo>
+                    <a:pt x="29754" y="33231"/>
+                  </a:moveTo>
+                  <a:cubicBezTo>
+                    <a:pt x="29754" y="13127"/>
+                    <a:pt x="22953" y="0"/>
+                    <a:pt x="14877" y="3727"/>
+                  </a:cubicBezTo>
+                  <a:cubicBezTo>
+                    <a:pt x="6376" y="7986"/>
+                    <a:pt x="0" y="27351"/>
+                    <a:pt x="0" y="47309"/>
+                  </a:cubicBezTo>
+                  <a:cubicBezTo>
+                    <a:pt x="0" y="67267"/>
+                    <a:pt x="6801" y="80390"/>
+                    <a:pt x="14877" y="76433"/>
+                  </a:cubicBezTo>
+                  <a:cubicBezTo>
+                    <a:pt x="23378" y="72328"/>
+                    <a:pt x="29754" y="52963"/>
+                    <a:pt x="29754" y="32859"/>
                   </a:cubicBezTo>
                   <a:close/>
                 </a:path>
@@ -3917,14 +4154,14 @@
         </p:sp>
         <p:sp>
           <p:nvSpPr>
-            <p:cNvPr id="59" name="right Speaker column 2 row 1 26"/>
+            <p:cNvPr id="69" name="right Speaker column 2 row 1 25"/>
             <p:cNvSpPr/>
             <p:nvPr/>
           </p:nvSpPr>
           <p:spPr>
             <a:xfrm>
-              <a:off x="8399885" y="2157171"/>
-              <a:ext cx="25298" cy="64919"/>
+              <a:off x="8424709" y="1525308"/>
+              <a:ext cx="29754" cy="79918"/>
             </a:xfrm>
             <a:custGeom>
               <a:avLst/>
@@ -3933,29 +4170,29 @@
               <a:cxnLst/>
               <a:rect l="0" t="0" r="r" b="b"/>
               <a:pathLst>
-                <a:path w="25298" h="64919" fill="norm">
-                  <a:moveTo>
-                    <a:pt x="25298" y="43916"/>
-                  </a:moveTo>
-                  <a:cubicBezTo>
-                    <a:pt x="25298" y="29646"/>
-                    <a:pt x="19516" y="12767"/>
-                    <a:pt x="12649" y="6432"/>
-                  </a:cubicBezTo>
-                  <a:cubicBezTo>
-                    <a:pt x="5421" y="0"/>
-                    <a:pt x="0" y="6732"/>
-                    <a:pt x="0" y="20996"/>
-                  </a:cubicBezTo>
-                  <a:cubicBezTo>
-                    <a:pt x="0" y="35260"/>
-                    <a:pt x="5782" y="52139"/>
-                    <a:pt x="12649" y="58480"/>
-                  </a:cubicBezTo>
-                  <a:cubicBezTo>
-                    <a:pt x="19877" y="64919"/>
-                    <a:pt x="25298" y="58451"/>
-                    <a:pt x="25298" y="43916"/>
+                <a:path w="29754" h="79918" fill="norm">
+                  <a:moveTo>
+                    <a:pt x="29754" y="33429"/>
+                  </a:moveTo>
+                  <a:cubicBezTo>
+                    <a:pt x="29754" y="13325"/>
+                    <a:pt x="22953" y="0"/>
+                    <a:pt x="14877" y="3492"/>
+                  </a:cubicBezTo>
+                  <a:cubicBezTo>
+                    <a:pt x="6376" y="7502"/>
+                    <a:pt x="0" y="26680"/>
+                    <a:pt x="0" y="46638"/>
+                  </a:cubicBezTo>
+                  <a:cubicBezTo>
+                    <a:pt x="0" y="66596"/>
+                    <a:pt x="6801" y="79918"/>
+                    <a:pt x="14877" y="76568"/>
+                  </a:cubicBezTo>
+                  <a:cubicBezTo>
+                    <a:pt x="23378" y="72713"/>
+                    <a:pt x="29754" y="53906"/>
+                    <a:pt x="29754" y="33429"/>
                   </a:cubicBezTo>
                   <a:close/>
                 </a:path>
@@ -3972,14 +4209,14 @@
         </p:sp>
         <p:sp>
           <p:nvSpPr>
-            <p:cNvPr id="60" name="right Speaker column 2 row 1 27"/>
+            <p:cNvPr id="70" name="right Speaker column 2 row 1 26"/>
             <p:cNvSpPr/>
             <p:nvPr/>
           </p:nvSpPr>
           <p:spPr>
             <a:xfrm>
-              <a:off x="8399885" y="2241539"/>
-              <a:ext cx="25298" cy="64844"/>
+              <a:off x="8424709" y="1644617"/>
+              <a:ext cx="29754" cy="78706"/>
             </a:xfrm>
             <a:custGeom>
               <a:avLst/>
@@ -3988,29 +4225,29 @@
               <a:cxnLst/>
               <a:rect l="0" t="0" r="r" b="b"/>
               <a:pathLst>
-                <a:path w="25298" h="64844" fill="norm">
-                  <a:moveTo>
-                    <a:pt x="25298" y="44378"/>
-                  </a:moveTo>
-                  <a:cubicBezTo>
-                    <a:pt x="25298" y="30108"/>
-                    <a:pt x="19516" y="13220"/>
-                    <a:pt x="12649" y="6610"/>
-                  </a:cubicBezTo>
-                  <a:cubicBezTo>
-                    <a:pt x="5782" y="0"/>
-                    <a:pt x="0" y="6626"/>
-                    <a:pt x="0" y="20890"/>
-                  </a:cubicBezTo>
-                  <a:cubicBezTo>
-                    <a:pt x="0" y="35154"/>
-                    <a:pt x="5782" y="52042"/>
-                    <a:pt x="12649" y="58394"/>
-                  </a:cubicBezTo>
-                  <a:cubicBezTo>
-                    <a:pt x="19877" y="64844"/>
-                    <a:pt x="25298" y="58384"/>
-                    <a:pt x="25298" y="44114"/>
+                <a:path w="29754" h="78706" fill="norm">
+                  <a:moveTo>
+                    <a:pt x="29754" y="33627"/>
+                  </a:moveTo>
+                  <a:cubicBezTo>
+                    <a:pt x="29754" y="13523"/>
+                    <a:pt x="22953" y="0"/>
+                    <a:pt x="14877" y="2885"/>
+                  </a:cubicBezTo>
+                  <a:cubicBezTo>
+                    <a:pt x="6801" y="5774"/>
+                    <a:pt x="0" y="25270"/>
+                    <a:pt x="0" y="45228"/>
+                  </a:cubicBezTo>
+                  <a:cubicBezTo>
+                    <a:pt x="0" y="65186"/>
+                    <a:pt x="6801" y="78706"/>
+                    <a:pt x="14877" y="75591"/>
+                  </a:cubicBezTo>
+                  <a:cubicBezTo>
+                    <a:pt x="23378" y="71981"/>
+                    <a:pt x="29754" y="53359"/>
+                    <a:pt x="29754" y="33255"/>
                   </a:cubicBezTo>
                   <a:close/>
                 </a:path>
@@ -4027,14 +4264,14 @@
         </p:sp>
         <p:sp>
           <p:nvSpPr>
-            <p:cNvPr id="61" name="right Speaker column 2 row 1 28"/>
+            <p:cNvPr id="71" name="right Speaker column 2 row 1 27"/>
             <p:cNvSpPr/>
             <p:nvPr/>
           </p:nvSpPr>
           <p:spPr>
             <a:xfrm>
-              <a:off x="8399885" y="2326505"/>
-              <a:ext cx="25298" cy="65229"/>
+              <a:off x="8424709" y="1763555"/>
+              <a:ext cx="29754" cy="78606"/>
             </a:xfrm>
             <a:custGeom>
               <a:avLst/>
@@ -4043,29 +4280,29 @@
               <a:cxnLst/>
               <a:rect l="0" t="0" r="r" b="b"/>
               <a:pathLst>
-                <a:path w="25298" h="65229" fill="norm">
-                  <a:moveTo>
-                    <a:pt x="25298" y="44242"/>
-                  </a:moveTo>
-                  <a:cubicBezTo>
-                    <a:pt x="25298" y="29972"/>
-                    <a:pt x="19516" y="12811"/>
-                    <a:pt x="12649" y="6454"/>
-                  </a:cubicBezTo>
-                  <a:cubicBezTo>
-                    <a:pt x="5421" y="0"/>
-                    <a:pt x="0" y="6451"/>
-                    <a:pt x="0" y="20715"/>
-                  </a:cubicBezTo>
-                  <a:cubicBezTo>
-                    <a:pt x="0" y="34979"/>
-                    <a:pt x="5782" y="51876"/>
-                    <a:pt x="12649" y="58503"/>
-                  </a:cubicBezTo>
-                  <a:cubicBezTo>
-                    <a:pt x="19877" y="65229"/>
-                    <a:pt x="25298" y="58777"/>
-                    <a:pt x="25298" y="44242"/>
+                <a:path w="29754" h="78606" fill="norm">
+                  <a:moveTo>
+                    <a:pt x="29754" y="34197"/>
+                  </a:moveTo>
+                  <a:cubicBezTo>
+                    <a:pt x="29754" y="14093"/>
+                    <a:pt x="22953" y="0"/>
+                    <a:pt x="14877" y="3021"/>
+                  </a:cubicBezTo>
+                  <a:cubicBezTo>
+                    <a:pt x="6376" y="6535"/>
+                    <a:pt x="0" y="24971"/>
+                    <a:pt x="0" y="44929"/>
+                  </a:cubicBezTo>
+                  <a:cubicBezTo>
+                    <a:pt x="0" y="64887"/>
+                    <a:pt x="6801" y="78606"/>
+                    <a:pt x="14877" y="76098"/>
+                  </a:cubicBezTo>
+                  <a:cubicBezTo>
+                    <a:pt x="23378" y="73109"/>
+                    <a:pt x="29754" y="54674"/>
+                    <a:pt x="29754" y="34197"/>
                   </a:cubicBezTo>
                   <a:close/>
                 </a:path>
@@ -4082,14 +4319,14 @@
         </p:sp>
         <p:sp>
           <p:nvSpPr>
-            <p:cNvPr id="62" name="right Speaker column 2 row 1 29"/>
+            <p:cNvPr id="72" name="right Speaker column 2 row 1 28"/>
             <p:cNvSpPr/>
             <p:nvPr/>
           </p:nvSpPr>
           <p:spPr>
             <a:xfrm>
-              <a:off x="8399885" y="2411040"/>
-              <a:ext cx="25298" cy="65251"/>
+              <a:off x="8424709" y="1882865"/>
+              <a:ext cx="29754" cy="78135"/>
             </a:xfrm>
             <a:custGeom>
               <a:avLst/>
@@ -4098,29 +4335,29 @@
               <a:cxnLst/>
               <a:rect l="0" t="0" r="r" b="b"/>
               <a:pathLst>
-                <a:path w="25298" h="65251" fill="norm">
-                  <a:moveTo>
-                    <a:pt x="25298" y="44538"/>
-                  </a:moveTo>
-                  <a:cubicBezTo>
-                    <a:pt x="25298" y="30267"/>
-                    <a:pt x="19516" y="13097"/>
-                    <a:pt x="12649" y="6730"/>
-                  </a:cubicBezTo>
-                  <a:cubicBezTo>
-                    <a:pt x="5421" y="0"/>
-                    <a:pt x="0" y="6443"/>
-                    <a:pt x="0" y="20707"/>
-                  </a:cubicBezTo>
-                  <a:cubicBezTo>
-                    <a:pt x="0" y="34971"/>
-                    <a:pt x="5782" y="52141"/>
-                    <a:pt x="12649" y="58514"/>
-                  </a:cubicBezTo>
-                  <a:cubicBezTo>
-                    <a:pt x="19877" y="65251"/>
-                    <a:pt x="25298" y="58808"/>
-                    <a:pt x="25298" y="44538"/>
+                <a:path w="29754" h="78135" fill="norm">
+                  <a:moveTo>
+                    <a:pt x="29754" y="34395"/>
+                  </a:moveTo>
+                  <a:cubicBezTo>
+                    <a:pt x="29754" y="14291"/>
+                    <a:pt x="22953" y="0"/>
+                    <a:pt x="14877" y="2786"/>
+                  </a:cubicBezTo>
+                  <a:cubicBezTo>
+                    <a:pt x="6376" y="5681"/>
+                    <a:pt x="0" y="23930"/>
+                    <a:pt x="0" y="43888"/>
+                  </a:cubicBezTo>
+                  <a:cubicBezTo>
+                    <a:pt x="0" y="63846"/>
+                    <a:pt x="6801" y="78135"/>
+                    <a:pt x="14877" y="75491"/>
+                  </a:cubicBezTo>
+                  <a:cubicBezTo>
+                    <a:pt x="23378" y="72750"/>
+                    <a:pt x="29754" y="54499"/>
+                    <a:pt x="29754" y="34395"/>
                   </a:cubicBezTo>
                   <a:close/>
                 </a:path>
@@ -4137,14 +4374,14 @@
         </p:sp>
         <p:sp>
           <p:nvSpPr>
-            <p:cNvPr id="63" name="right Speaker column 2 row 1 30"/>
+            <p:cNvPr id="73" name="right Speaker column 2 row 1 29"/>
             <p:cNvSpPr/>
             <p:nvPr/>
           </p:nvSpPr>
           <p:spPr>
             <a:xfrm>
-              <a:off x="8435664" y="1976798"/>
-              <a:ext cx="26021" cy="64634"/>
+              <a:off x="8466790" y="1202828"/>
+              <a:ext cx="30604" cy="83289"/>
             </a:xfrm>
             <a:custGeom>
               <a:avLst/>
@@ -4153,29 +4390,29 @@
               <a:cxnLst/>
               <a:rect l="0" t="0" r="r" b="b"/>
               <a:pathLst>
-                <a:path w="26021" h="64634" fill="norm">
-                  <a:moveTo>
-                    <a:pt x="26021" y="43954"/>
-                  </a:moveTo>
-                  <a:cubicBezTo>
-                    <a:pt x="26021" y="29409"/>
-                    <a:pt x="20239" y="12809"/>
-                    <a:pt x="13011" y="6404"/>
-                  </a:cubicBezTo>
-                  <a:cubicBezTo>
-                    <a:pt x="5782" y="0"/>
-                    <a:pt x="0" y="6930"/>
-                    <a:pt x="0" y="21203"/>
-                  </a:cubicBezTo>
-                  <a:cubicBezTo>
-                    <a:pt x="0" y="35476"/>
-                    <a:pt x="5782" y="52340"/>
-                    <a:pt x="13011" y="58487"/>
-                  </a:cubicBezTo>
-                  <a:cubicBezTo>
-                    <a:pt x="20239" y="64634"/>
-                    <a:pt x="26021" y="58234"/>
-                    <a:pt x="26021" y="43689"/>
+                <a:path w="30604" h="83289" fill="norm">
+                  <a:moveTo>
+                    <a:pt x="30604" y="33326"/>
+                  </a:moveTo>
+                  <a:cubicBezTo>
+                    <a:pt x="30604" y="12637"/>
+                    <a:pt x="23803" y="0"/>
+                    <a:pt x="15302" y="4614"/>
+                  </a:cubicBezTo>
+                  <a:cubicBezTo>
+                    <a:pt x="6801" y="9231"/>
+                    <a:pt x="0" y="29955"/>
+                    <a:pt x="0" y="50119"/>
+                  </a:cubicBezTo>
+                  <a:cubicBezTo>
+                    <a:pt x="0" y="70283"/>
+                    <a:pt x="6801" y="83289"/>
+                    <a:pt x="15302" y="78448"/>
+                  </a:cubicBezTo>
+                  <a:cubicBezTo>
+                    <a:pt x="23803" y="73609"/>
+                    <a:pt x="30604" y="53639"/>
+                    <a:pt x="30604" y="32950"/>
                   </a:cubicBezTo>
                   <a:close/>
                 </a:path>
@@ -4192,14 +4429,14 @@
         </p:sp>
         <p:sp>
           <p:nvSpPr>
-            <p:cNvPr id="64" name="right Speaker column 2 row 1 31"/>
+            <p:cNvPr id="74" name="right Speaker column 2 row 1 30"/>
             <p:cNvSpPr/>
             <p:nvPr/>
           </p:nvSpPr>
           <p:spPr>
             <a:xfrm>
-              <a:off x="8435664" y="2061917"/>
-              <a:ext cx="26021" cy="65185"/>
+              <a:off x="8466790" y="1323758"/>
+              <a:ext cx="30604" cy="82796"/>
             </a:xfrm>
             <a:custGeom>
               <a:avLst/>
@@ -4208,29 +4445,29 @@
               <a:cxnLst/>
               <a:rect l="0" t="0" r="r" b="b"/>
               <a:pathLst>
-                <a:path w="26021" h="65185" fill="norm">
-                  <a:moveTo>
-                    <a:pt x="26021" y="43985"/>
-                  </a:moveTo>
-                  <a:cubicBezTo>
-                    <a:pt x="26021" y="29441"/>
-                    <a:pt x="20239" y="12831"/>
-                    <a:pt x="13011" y="6416"/>
-                  </a:cubicBezTo>
-                  <a:cubicBezTo>
-                    <a:pt x="5782" y="0"/>
-                    <a:pt x="0" y="6656"/>
-                    <a:pt x="0" y="21194"/>
-                  </a:cubicBezTo>
-                  <a:cubicBezTo>
-                    <a:pt x="0" y="35731"/>
-                    <a:pt x="5782" y="52340"/>
-                    <a:pt x="13011" y="58763"/>
-                  </a:cubicBezTo>
-                  <a:cubicBezTo>
-                    <a:pt x="20239" y="65185"/>
-                    <a:pt x="26021" y="58529"/>
-                    <a:pt x="26021" y="43985"/>
+                <a:path w="30604" h="82796" fill="norm">
+                  <a:moveTo>
+                    <a:pt x="30604" y="33523"/>
+                  </a:moveTo>
+                  <a:cubicBezTo>
+                    <a:pt x="30604" y="12833"/>
+                    <a:pt x="23803" y="0"/>
+                    <a:pt x="15302" y="4368"/>
+                  </a:cubicBezTo>
+                  <a:cubicBezTo>
+                    <a:pt x="6801" y="8738"/>
+                    <a:pt x="0" y="28891"/>
+                    <a:pt x="0" y="49428"/>
+                  </a:cubicBezTo>
+                  <a:cubicBezTo>
+                    <a:pt x="0" y="69966"/>
+                    <a:pt x="6801" y="82796"/>
+                    <a:pt x="15302" y="78577"/>
+                  </a:cubicBezTo>
+                  <a:cubicBezTo>
+                    <a:pt x="23803" y="74361"/>
+                    <a:pt x="30604" y="54212"/>
+                    <a:pt x="30604" y="33523"/>
                   </a:cubicBezTo>
                   <a:close/>
                 </a:path>
@@ -4247,14 +4484,14 @@
         </p:sp>
         <p:sp>
           <p:nvSpPr>
-            <p:cNvPr id="65" name="right Speaker column 2 row 1 32"/>
+            <p:cNvPr id="75" name="right Speaker column 2 row 1 31"/>
             <p:cNvSpPr/>
             <p:nvPr/>
           </p:nvSpPr>
           <p:spPr>
             <a:xfrm>
-              <a:off x="8435664" y="2147565"/>
-              <a:ext cx="26021" cy="64679"/>
+              <a:off x="8466790" y="1444688"/>
+              <a:ext cx="30604" cy="82303"/>
             </a:xfrm>
             <a:custGeom>
               <a:avLst/>
@@ -4263,29 +4500,29 @@
               <a:cxnLst/>
               <a:rect l="0" t="0" r="r" b="b"/>
               <a:pathLst>
-                <a:path w="26021" h="64679" fill="norm">
-                  <a:moveTo>
-                    <a:pt x="26021" y="43752"/>
-                  </a:moveTo>
-                  <a:cubicBezTo>
-                    <a:pt x="26021" y="29208"/>
-                    <a:pt x="20239" y="12325"/>
-                    <a:pt x="13011" y="6162"/>
-                  </a:cubicBezTo>
-                  <a:cubicBezTo>
-                    <a:pt x="5782" y="0"/>
-                    <a:pt x="0" y="6383"/>
-                    <a:pt x="0" y="20656"/>
-                  </a:cubicBezTo>
-                  <a:cubicBezTo>
-                    <a:pt x="0" y="34929"/>
-                    <a:pt x="5782" y="51812"/>
-                    <a:pt x="13011" y="58245"/>
-                  </a:cubicBezTo>
-                  <a:cubicBezTo>
-                    <a:pt x="20239" y="64679"/>
-                    <a:pt x="26021" y="58296"/>
-                    <a:pt x="26021" y="43752"/>
+                <a:path w="30604" h="82303" fill="norm">
+                  <a:moveTo>
+                    <a:pt x="30604" y="34095"/>
+                  </a:moveTo>
+                  <a:cubicBezTo>
+                    <a:pt x="30604" y="13406"/>
+                    <a:pt x="23803" y="0"/>
+                    <a:pt x="15302" y="4496"/>
+                  </a:cubicBezTo>
+                  <a:cubicBezTo>
+                    <a:pt x="6801" y="8993"/>
+                    <a:pt x="0" y="28573"/>
+                    <a:pt x="0" y="48738"/>
+                  </a:cubicBezTo>
+                  <a:cubicBezTo>
+                    <a:pt x="0" y="68902"/>
+                    <a:pt x="6801" y="82303"/>
+                    <a:pt x="15302" y="78331"/>
+                  </a:cubicBezTo>
+                  <a:cubicBezTo>
+                    <a:pt x="23803" y="74361"/>
+                    <a:pt x="30604" y="54785"/>
+                    <a:pt x="30604" y="34095"/>
                   </a:cubicBezTo>
                   <a:close/>
                 </a:path>
@@ -4302,14 +4539,14 @@
         </p:sp>
         <p:sp>
           <p:nvSpPr>
-            <p:cNvPr id="66" name="right Speaker column 2 row 1 33"/>
+            <p:cNvPr id="76" name="right Speaker column 2 row 1 32"/>
             <p:cNvSpPr/>
             <p:nvPr/>
           </p:nvSpPr>
           <p:spPr>
             <a:xfrm>
-              <a:off x="8435664" y="2232156"/>
-              <a:ext cx="26021" cy="65230"/>
+              <a:off x="8466790" y="1565618"/>
+              <a:ext cx="30604" cy="81810"/>
             </a:xfrm>
             <a:custGeom>
               <a:avLst/>
@@ -4318,29 +4555,29 @@
               <a:cxnLst/>
               <a:rect l="0" t="0" r="r" b="b"/>
               <a:pathLst>
-                <a:path w="26021" h="65230" fill="norm">
-                  <a:moveTo>
-                    <a:pt x="26021" y="44312"/>
-                  </a:moveTo>
-                  <a:cubicBezTo>
-                    <a:pt x="26021" y="29768"/>
-                    <a:pt x="20239" y="12876"/>
-                    <a:pt x="13011" y="6438"/>
-                  </a:cubicBezTo>
-                  <a:cubicBezTo>
-                    <a:pt x="5782" y="0"/>
-                    <a:pt x="0" y="6374"/>
-                    <a:pt x="0" y="20911"/>
-                  </a:cubicBezTo>
-                  <a:cubicBezTo>
-                    <a:pt x="0" y="35449"/>
-                    <a:pt x="5782" y="52340"/>
-                    <a:pt x="13011" y="58785"/>
-                  </a:cubicBezTo>
-                  <a:cubicBezTo>
-                    <a:pt x="20239" y="65230"/>
-                    <a:pt x="26021" y="58856"/>
-                    <a:pt x="26021" y="44312"/>
+                <a:path w="30604" h="81810" fill="norm">
+                  <a:moveTo>
+                    <a:pt x="30604" y="34292"/>
+                  </a:moveTo>
+                  <a:cubicBezTo>
+                    <a:pt x="30604" y="13603"/>
+                    <a:pt x="23803" y="0"/>
+                    <a:pt x="15302" y="3876"/>
+                  </a:cubicBezTo>
+                  <a:cubicBezTo>
+                    <a:pt x="6801" y="7753"/>
+                    <a:pt x="0" y="27136"/>
+                    <a:pt x="0" y="47674"/>
+                  </a:cubicBezTo>
+                  <a:cubicBezTo>
+                    <a:pt x="0" y="68212"/>
+                    <a:pt x="6801" y="81810"/>
+                    <a:pt x="15302" y="78085"/>
+                  </a:cubicBezTo>
+                  <a:cubicBezTo>
+                    <a:pt x="23803" y="74361"/>
+                    <a:pt x="30604" y="54981"/>
+                    <a:pt x="30604" y="34292"/>
                   </a:cubicBezTo>
                   <a:close/>
                 </a:path>
@@ -4357,14 +4594,14 @@
         </p:sp>
         <p:sp>
           <p:nvSpPr>
-            <p:cNvPr id="67" name="right Speaker column 2 row 1 34"/>
+            <p:cNvPr id="77" name="right Speaker column 2 row 1 33"/>
             <p:cNvSpPr/>
             <p:nvPr/>
           </p:nvSpPr>
           <p:spPr>
             <a:xfrm>
-              <a:off x="8435664" y="2317539"/>
-              <a:ext cx="26021" cy="64988"/>
+              <a:off x="8466790" y="1686923"/>
+              <a:ext cx="30604" cy="80942"/>
             </a:xfrm>
             <a:custGeom>
               <a:avLst/>
@@ -4373,29 +4610,29 @@
               <a:cxnLst/>
               <a:rect l="0" t="0" r="r" b="b"/>
               <a:pathLst>
-                <a:path w="26021" h="64988" fill="norm">
-                  <a:moveTo>
-                    <a:pt x="26021" y="44343"/>
-                  </a:moveTo>
-                  <a:cubicBezTo>
-                    <a:pt x="26021" y="29799"/>
-                    <a:pt x="20239" y="12898"/>
-                    <a:pt x="13011" y="6449"/>
-                  </a:cubicBezTo>
-                  <a:cubicBezTo>
-                    <a:pt x="5782" y="0"/>
-                    <a:pt x="0" y="6365"/>
-                    <a:pt x="0" y="20638"/>
-                  </a:cubicBezTo>
-                  <a:cubicBezTo>
-                    <a:pt x="0" y="34911"/>
-                    <a:pt x="5782" y="52076"/>
-                    <a:pt x="13011" y="58532"/>
-                  </a:cubicBezTo>
-                  <a:cubicBezTo>
-                    <a:pt x="20239" y="64988"/>
-                    <a:pt x="26021" y="58623"/>
-                    <a:pt x="26021" y="44343"/>
+                <a:path w="30604" h="80942" fill="norm">
+                  <a:moveTo>
+                    <a:pt x="30604" y="34489"/>
+                  </a:moveTo>
+                  <a:cubicBezTo>
+                    <a:pt x="30604" y="13800"/>
+                    <a:pt x="23803" y="0"/>
+                    <a:pt x="15302" y="3629"/>
+                  </a:cubicBezTo>
+                  <a:cubicBezTo>
+                    <a:pt x="6801" y="7258"/>
+                    <a:pt x="0" y="26443"/>
+                    <a:pt x="0" y="46608"/>
+                  </a:cubicBezTo>
+                  <a:cubicBezTo>
+                    <a:pt x="0" y="66772"/>
+                    <a:pt x="6801" y="80942"/>
+                    <a:pt x="15302" y="77463"/>
+                  </a:cubicBezTo>
+                  <a:cubicBezTo>
+                    <a:pt x="23803" y="73985"/>
+                    <a:pt x="30604" y="54802"/>
+                    <a:pt x="30604" y="34489"/>
                   </a:cubicBezTo>
                   <a:close/>
                 </a:path>
@@ -4412,14 +4649,14 @@
         </p:sp>
         <p:sp>
           <p:nvSpPr>
-            <p:cNvPr id="68" name="right Speaker column 2 row 1 35"/>
+            <p:cNvPr id="78" name="right Speaker column 2 row 1 34"/>
             <p:cNvSpPr/>
             <p:nvPr/>
           </p:nvSpPr>
           <p:spPr>
             <a:xfrm>
-              <a:off x="8435664" y="2402130"/>
-              <a:ext cx="26021" cy="65804"/>
+              <a:off x="8466790" y="1807853"/>
+              <a:ext cx="30604" cy="80075"/>
             </a:xfrm>
             <a:custGeom>
               <a:avLst/>
@@ -4428,29 +4665,29 @@
               <a:cxnLst/>
               <a:rect l="0" t="0" r="r" b="b"/>
               <a:pathLst>
-                <a:path w="26021" h="65804" fill="norm">
-                  <a:moveTo>
-                    <a:pt x="26021" y="44903"/>
-                  </a:moveTo>
-                  <a:cubicBezTo>
-                    <a:pt x="26021" y="30359"/>
-                    <a:pt x="20239" y="13449"/>
-                    <a:pt x="13011" y="6725"/>
-                  </a:cubicBezTo>
-                  <a:cubicBezTo>
-                    <a:pt x="5782" y="0"/>
-                    <a:pt x="0" y="6356"/>
-                    <a:pt x="0" y="20894"/>
-                  </a:cubicBezTo>
-                  <a:cubicBezTo>
-                    <a:pt x="0" y="35431"/>
-                    <a:pt x="5782" y="52340"/>
-                    <a:pt x="13011" y="59072"/>
-                  </a:cubicBezTo>
-                  <a:cubicBezTo>
-                    <a:pt x="20239" y="65804"/>
-                    <a:pt x="26021" y="59448"/>
-                    <a:pt x="26021" y="44903"/>
+                <a:path w="30604" h="80075" fill="norm">
+                  <a:moveTo>
+                    <a:pt x="30604" y="34686"/>
+                  </a:moveTo>
+                  <a:cubicBezTo>
+                    <a:pt x="30604" y="13996"/>
+                    <a:pt x="23803" y="0"/>
+                    <a:pt x="15302" y="3008"/>
+                  </a:cubicBezTo>
+                  <a:cubicBezTo>
+                    <a:pt x="6801" y="6017"/>
+                    <a:pt x="0" y="25006"/>
+                    <a:pt x="0" y="45544"/>
+                  </a:cubicBezTo>
+                  <a:cubicBezTo>
+                    <a:pt x="0" y="66081"/>
+                    <a:pt x="6801" y="80075"/>
+                    <a:pt x="15302" y="77217"/>
+                  </a:cubicBezTo>
+                  <a:cubicBezTo>
+                    <a:pt x="23803" y="74361"/>
+                    <a:pt x="30604" y="55375"/>
+                    <a:pt x="30604" y="34686"/>
                   </a:cubicBezTo>
                   <a:close/>
                 </a:path>
@@ -4467,14 +4704,14 @@
         </p:sp>
         <p:sp>
           <p:nvSpPr>
-            <p:cNvPr id="69" name="right Speaker column 2 row 1 36"/>
+            <p:cNvPr id="79" name="right Speaker column 2 row 1 35"/>
             <p:cNvSpPr/>
             <p:nvPr/>
           </p:nvSpPr>
           <p:spPr>
             <a:xfrm>
-              <a:off x="8472527" y="2051864"/>
-              <a:ext cx="26021" cy="64681"/>
+              <a:off x="8510146" y="1239407"/>
+              <a:ext cx="30604" cy="84544"/>
             </a:xfrm>
             <a:custGeom>
               <a:avLst/>
@@ -4483,29 +4720,29 @@
               <a:cxnLst/>
               <a:rect l="0" t="0" r="r" b="b"/>
               <a:pathLst>
-                <a:path w="26021" h="64681" fill="norm">
-                  <a:moveTo>
-                    <a:pt x="26021" y="43724"/>
-                  </a:moveTo>
-                  <a:cubicBezTo>
-                    <a:pt x="26021" y="29170"/>
-                    <a:pt x="20239" y="12292"/>
-                    <a:pt x="13011" y="6146"/>
-                  </a:cubicBezTo>
-                  <a:cubicBezTo>
-                    <a:pt x="5782" y="0"/>
-                    <a:pt x="0" y="6404"/>
-                    <a:pt x="0" y="20951"/>
-                  </a:cubicBezTo>
-                  <a:cubicBezTo>
-                    <a:pt x="0" y="35498"/>
-                    <a:pt x="5782" y="52375"/>
-                    <a:pt x="13011" y="58528"/>
-                  </a:cubicBezTo>
-                  <a:cubicBezTo>
-                    <a:pt x="20239" y="64681"/>
-                    <a:pt x="26021" y="58278"/>
-                    <a:pt x="26021" y="43724"/>
+                <a:path w="30604" h="84544" fill="norm">
+                  <a:moveTo>
+                    <a:pt x="30604" y="34194"/>
+                  </a:moveTo>
+                  <a:cubicBezTo>
+                    <a:pt x="30604" y="13292"/>
+                    <a:pt x="23803" y="0"/>
+                    <a:pt x="15302" y="4858"/>
+                  </a:cubicBezTo>
+                  <a:cubicBezTo>
+                    <a:pt x="6801" y="9717"/>
+                    <a:pt x="0" y="29754"/>
+                    <a:pt x="0" y="50506"/>
+                  </a:cubicBezTo>
+                  <a:cubicBezTo>
+                    <a:pt x="0" y="71258"/>
+                    <a:pt x="6801" y="84544"/>
+                    <a:pt x="15302" y="79836"/>
+                  </a:cubicBezTo>
+                  <a:cubicBezTo>
+                    <a:pt x="23803" y="75128"/>
+                    <a:pt x="30604" y="55096"/>
+                    <a:pt x="30604" y="34194"/>
                   </a:cubicBezTo>
                   <a:close/>
                 </a:path>
@@ -4522,14 +4759,14 @@
         </p:sp>
         <p:sp>
           <p:nvSpPr>
-            <p:cNvPr id="70" name="right Speaker column 2 row 1 37"/>
+            <p:cNvPr id="80" name="right Speaker column 2 row 1 36"/>
             <p:cNvSpPr/>
             <p:nvPr/>
           </p:nvSpPr>
           <p:spPr>
             <a:xfrm>
-              <a:off x="8472527" y="2137040"/>
-              <a:ext cx="26021" cy="65497"/>
+              <a:off x="8510146" y="1362344"/>
+              <a:ext cx="30604" cy="83676"/>
             </a:xfrm>
             <a:custGeom>
               <a:avLst/>
@@ -4538,29 +4775,29 @@
               <a:cxnLst/>
               <a:rect l="0" t="0" r="r" b="b"/>
               <a:pathLst>
-                <a:path w="26021" h="65497" fill="norm">
-                  <a:moveTo>
-                    <a:pt x="26021" y="44284"/>
-                  </a:moveTo>
-                  <a:cubicBezTo>
-                    <a:pt x="26021" y="29730"/>
-                    <a:pt x="20239" y="12843"/>
-                    <a:pt x="13011" y="6422"/>
-                  </a:cubicBezTo>
-                  <a:cubicBezTo>
-                    <a:pt x="5782" y="0"/>
-                    <a:pt x="0" y="6659"/>
-                    <a:pt x="0" y="21206"/>
-                  </a:cubicBezTo>
-                  <a:cubicBezTo>
-                    <a:pt x="0" y="35754"/>
-                    <a:pt x="5782" y="52640"/>
-                    <a:pt x="13011" y="59068"/>
-                  </a:cubicBezTo>
-                  <a:cubicBezTo>
-                    <a:pt x="20239" y="65497"/>
-                    <a:pt x="26021" y="58838"/>
-                    <a:pt x="26021" y="44284"/>
+                <a:path w="30604" h="83676" fill="norm">
+                  <a:moveTo>
+                    <a:pt x="30604" y="34390"/>
+                  </a:moveTo>
+                  <a:cubicBezTo>
+                    <a:pt x="30604" y="13488"/>
+                    <a:pt x="23803" y="0"/>
+                    <a:pt x="15302" y="4234"/>
+                  </a:cubicBezTo>
+                  <a:cubicBezTo>
+                    <a:pt x="6801" y="8470"/>
+                    <a:pt x="0" y="28689"/>
+                    <a:pt x="0" y="49441"/>
+                  </a:cubicBezTo>
+                  <a:cubicBezTo>
+                    <a:pt x="0" y="70193"/>
+                    <a:pt x="6801" y="83676"/>
+                    <a:pt x="15302" y="79591"/>
+                  </a:cubicBezTo>
+                  <a:cubicBezTo>
+                    <a:pt x="23803" y="75507"/>
+                    <a:pt x="30604" y="55292"/>
+                    <a:pt x="30604" y="34390"/>
                   </a:cubicBezTo>
                   <a:close/>
                 </a:path>
@@ -4577,14 +4814,14 @@
         </p:sp>
         <p:sp>
           <p:nvSpPr>
-            <p:cNvPr id="71" name="right Speaker column 2 row 1 38"/>
+            <p:cNvPr id="81" name="right Speaker column 2 row 1 37"/>
             <p:cNvSpPr/>
             <p:nvPr/>
           </p:nvSpPr>
           <p:spPr>
             <a:xfrm>
-              <a:off x="8472527" y="2222745"/>
-              <a:ext cx="26021" cy="65255"/>
+              <a:off x="8510146" y="1485280"/>
+              <a:ext cx="30604" cy="82807"/>
             </a:xfrm>
             <a:custGeom>
               <a:avLst/>
@@ -4593,29 +4830,29 @@
               <a:cxnLst/>
               <a:rect l="0" t="0" r="r" b="b"/>
               <a:pathLst>
-                <a:path w="26021" h="65255" fill="norm">
-                  <a:moveTo>
-                    <a:pt x="26021" y="44315"/>
-                  </a:moveTo>
-                  <a:cubicBezTo>
-                    <a:pt x="26021" y="29761"/>
-                    <a:pt x="20239" y="12866"/>
-                    <a:pt x="13011" y="6433"/>
-                  </a:cubicBezTo>
-                  <a:cubicBezTo>
-                    <a:pt x="5782" y="0"/>
-                    <a:pt x="0" y="6386"/>
-                    <a:pt x="0" y="20933"/>
-                  </a:cubicBezTo>
-                  <a:cubicBezTo>
-                    <a:pt x="0" y="35480"/>
-                    <a:pt x="5782" y="52375"/>
-                    <a:pt x="13011" y="58815"/>
-                  </a:cubicBezTo>
-                  <a:cubicBezTo>
-                    <a:pt x="20239" y="65255"/>
-                    <a:pt x="26021" y="58869"/>
-                    <a:pt x="26021" y="44315"/>
+                <a:path w="30604" h="82807" fill="norm">
+                  <a:moveTo>
+                    <a:pt x="30604" y="34586"/>
+                  </a:moveTo>
+                  <a:cubicBezTo>
+                    <a:pt x="30604" y="13684"/>
+                    <a:pt x="23803" y="0"/>
+                    <a:pt x="15302" y="3989"/>
+                  </a:cubicBezTo>
+                  <a:cubicBezTo>
+                    <a:pt x="6801" y="7979"/>
+                    <a:pt x="0" y="27624"/>
+                    <a:pt x="0" y="48376"/>
+                  </a:cubicBezTo>
+                  <a:cubicBezTo>
+                    <a:pt x="0" y="69128"/>
+                    <a:pt x="6801" y="82807"/>
+                    <a:pt x="15302" y="78967"/>
+                  </a:cubicBezTo>
+                  <a:cubicBezTo>
+                    <a:pt x="23803" y="75128"/>
+                    <a:pt x="30604" y="55488"/>
+                    <a:pt x="30604" y="34586"/>
                   </a:cubicBezTo>
                   <a:close/>
                 </a:path>
@@ -4632,14 +4869,14 @@
         </p:sp>
         <p:sp>
           <p:nvSpPr>
-            <p:cNvPr id="72" name="right Speaker column 2 row 1 39"/>
+            <p:cNvPr id="82" name="right Speaker column 2 row 1 38"/>
             <p:cNvSpPr/>
             <p:nvPr/>
           </p:nvSpPr>
           <p:spPr>
             <a:xfrm>
-              <a:off x="8472527" y="2308186"/>
-              <a:ext cx="26021" cy="65806"/>
+              <a:off x="8510146" y="1607837"/>
+              <a:ext cx="30604" cy="82318"/>
             </a:xfrm>
             <a:custGeom>
               <a:avLst/>
@@ -4648,29 +4885,29 @@
               <a:cxnLst/>
               <a:rect l="0" t="0" r="r" b="b"/>
               <a:pathLst>
-                <a:path w="26021" h="65806" fill="norm">
-                  <a:moveTo>
-                    <a:pt x="26021" y="44611"/>
-                  </a:moveTo>
-                  <a:cubicBezTo>
-                    <a:pt x="26021" y="30057"/>
-                    <a:pt x="20239" y="12888"/>
-                    <a:pt x="13011" y="6444"/>
-                  </a:cubicBezTo>
-                  <a:cubicBezTo>
-                    <a:pt x="5782" y="0"/>
-                    <a:pt x="0" y="6377"/>
-                    <a:pt x="0" y="20924"/>
-                  </a:cubicBezTo>
-                  <a:cubicBezTo>
-                    <a:pt x="0" y="35471"/>
-                    <a:pt x="5782" y="52375"/>
-                    <a:pt x="13011" y="59091"/>
-                  </a:cubicBezTo>
-                  <a:cubicBezTo>
-                    <a:pt x="20239" y="65806"/>
-                    <a:pt x="26021" y="59165"/>
-                    <a:pt x="26021" y="44611"/>
+                <a:path w="30604" h="82318" fill="norm">
+                  <a:moveTo>
+                    <a:pt x="30604" y="35161"/>
+                  </a:moveTo>
+                  <a:cubicBezTo>
+                    <a:pt x="30604" y="14259"/>
+                    <a:pt x="23803" y="0"/>
+                    <a:pt x="15302" y="3744"/>
+                  </a:cubicBezTo>
+                  <a:cubicBezTo>
+                    <a:pt x="6801" y="7490"/>
+                    <a:pt x="0" y="26938"/>
+                    <a:pt x="0" y="47690"/>
+                  </a:cubicBezTo>
+                  <a:cubicBezTo>
+                    <a:pt x="0" y="68443"/>
+                    <a:pt x="6801" y="82318"/>
+                    <a:pt x="15302" y="79101"/>
+                  </a:cubicBezTo>
+                  <a:cubicBezTo>
+                    <a:pt x="23803" y="75887"/>
+                    <a:pt x="30604" y="56063"/>
+                    <a:pt x="30604" y="35161"/>
                   </a:cubicBezTo>
                   <a:close/>
                 </a:path>
@@ -4687,14 +4924,14 @@
         </p:sp>
         <p:sp>
           <p:nvSpPr>
-            <p:cNvPr id="73" name="right Speaker column 2 row 1 40"/>
+            <p:cNvPr id="83" name="right Speaker column 2 row 1 39"/>
             <p:cNvSpPr/>
             <p:nvPr/>
           </p:nvSpPr>
           <p:spPr>
             <a:xfrm>
-              <a:off x="8472527" y="2393891"/>
-              <a:ext cx="26021" cy="65564"/>
+              <a:off x="8510146" y="1730773"/>
+              <a:ext cx="30604" cy="81449"/>
             </a:xfrm>
             <a:custGeom>
               <a:avLst/>
@@ -4703,29 +4940,29 @@
               <a:cxnLst/>
               <a:rect l="0" t="0" r="r" b="b"/>
               <a:pathLst>
-                <a:path w="26021" h="65564" fill="norm">
-                  <a:moveTo>
-                    <a:pt x="26021" y="44642"/>
-                  </a:moveTo>
-                  <a:cubicBezTo>
-                    <a:pt x="26021" y="30088"/>
-                    <a:pt x="20239" y="12910"/>
-                    <a:pt x="13011" y="6455"/>
-                  </a:cubicBezTo>
-                  <a:cubicBezTo>
-                    <a:pt x="5782" y="0"/>
-                    <a:pt x="0" y="6103"/>
-                    <a:pt x="0" y="20651"/>
-                  </a:cubicBezTo>
-                  <a:cubicBezTo>
-                    <a:pt x="0" y="35198"/>
-                    <a:pt x="5782" y="52111"/>
-                    <a:pt x="13011" y="58837"/>
-                  </a:cubicBezTo>
-                  <a:cubicBezTo>
-                    <a:pt x="20239" y="65564"/>
-                    <a:pt x="26021" y="59196"/>
-                    <a:pt x="26021" y="44642"/>
+                <a:path w="30604" h="81449" fill="norm">
+                  <a:moveTo>
+                    <a:pt x="30604" y="35357"/>
+                  </a:moveTo>
+                  <a:cubicBezTo>
+                    <a:pt x="30604" y="14455"/>
+                    <a:pt x="23803" y="0"/>
+                    <a:pt x="15302" y="3499"/>
+                  </a:cubicBezTo>
+                  <a:cubicBezTo>
+                    <a:pt x="6801" y="6999"/>
+                    <a:pt x="0" y="25874"/>
+                    <a:pt x="0" y="46626"/>
+                  </a:cubicBezTo>
+                  <a:cubicBezTo>
+                    <a:pt x="0" y="67378"/>
+                    <a:pt x="6801" y="81449"/>
+                    <a:pt x="15302" y="78477"/>
+                  </a:cubicBezTo>
+                  <a:cubicBezTo>
+                    <a:pt x="23803" y="75507"/>
+                    <a:pt x="30604" y="56259"/>
+                    <a:pt x="30604" y="35357"/>
                   </a:cubicBezTo>
                   <a:close/>
                 </a:path>
@@ -4742,14 +4979,14 @@
         </p:sp>
         <p:sp>
           <p:nvSpPr>
-            <p:cNvPr id="74" name="right Speaker column 2 row 1 41"/>
+            <p:cNvPr id="84" name="right Speaker column 2 row 1 40"/>
             <p:cNvSpPr/>
             <p:nvPr/>
           </p:nvSpPr>
           <p:spPr>
             <a:xfrm>
-              <a:off x="8292549" y="2352681"/>
-              <a:ext cx="25298" cy="64793"/>
+              <a:off x="8298467" y="1983010"/>
+              <a:ext cx="29754" cy="75032"/>
             </a:xfrm>
             <a:custGeom>
               <a:avLst/>
@@ -4758,29 +4995,29 @@
               <a:cxnLst/>
               <a:rect l="0" t="0" r="r" b="b"/>
               <a:pathLst>
-                <a:path w="25298" h="64793" fill="norm">
-                  <a:moveTo>
-                    <a:pt x="0" y="20552"/>
-                  </a:moveTo>
-                  <a:cubicBezTo>
-                    <a:pt x="0" y="34787"/>
-                    <a:pt x="5421" y="51311"/>
-                    <a:pt x="12649" y="58052"/>
-                  </a:cubicBezTo>
-                  <a:cubicBezTo>
-                    <a:pt x="19877" y="64793"/>
-                    <a:pt x="25298" y="58377"/>
-                    <a:pt x="25298" y="44135"/>
-                  </a:cubicBezTo>
-                  <a:cubicBezTo>
-                    <a:pt x="25298" y="29893"/>
-                    <a:pt x="19516" y="13270"/>
-                    <a:pt x="12649" y="6635"/>
-                  </a:cubicBezTo>
-                  <a:cubicBezTo>
-                    <a:pt x="5782" y="0"/>
-                    <a:pt x="0" y="6317"/>
-                    <a:pt x="0" y="20552"/>
+                <a:path w="29754" h="75032" fill="norm">
+                  <a:moveTo>
+                    <a:pt x="0" y="42119"/>
+                  </a:moveTo>
+                  <a:cubicBezTo>
+                    <a:pt x="0" y="61445"/>
+                    <a:pt x="6376" y="75032"/>
+                    <a:pt x="14877" y="72391"/>
+                  </a:cubicBezTo>
+                  <a:cubicBezTo>
+                    <a:pt x="23378" y="69752"/>
+                    <a:pt x="29754" y="52084"/>
+                    <a:pt x="29754" y="32607"/>
+                  </a:cubicBezTo>
+                  <a:cubicBezTo>
+                    <a:pt x="29754" y="13131"/>
+                    <a:pt x="22953" y="0"/>
+                    <a:pt x="14877" y="2331"/>
+                  </a:cubicBezTo>
+                  <a:cubicBezTo>
+                    <a:pt x="6801" y="4665"/>
+                    <a:pt x="0" y="22793"/>
+                    <a:pt x="0" y="42119"/>
                   </a:cubicBezTo>
                   <a:close/>
                 </a:path>
@@ -4797,14 +5034,14 @@
         </p:sp>
         <p:sp>
           <p:nvSpPr>
-            <p:cNvPr id="75" name="right Speaker column 2 row 1 42"/>
+            <p:cNvPr id="85" name="right Speaker column 2 row 1 41"/>
             <p:cNvSpPr/>
             <p:nvPr/>
           </p:nvSpPr>
           <p:spPr>
             <a:xfrm>
-              <a:off x="8292549" y="2269634"/>
-              <a:ext cx="25298" cy="63980"/>
+              <a:off x="8298467" y="1868878"/>
+              <a:ext cx="29754" cy="75883"/>
             </a:xfrm>
             <a:custGeom>
               <a:avLst/>
@@ -4813,29 +5050,29 @@
               <a:cxnLst/>
               <a:rect l="0" t="0" r="r" b="b"/>
               <a:pathLst>
-                <a:path w="25298" h="63980" fill="norm">
-                  <a:moveTo>
-                    <a:pt x="0" y="20298"/>
-                  </a:moveTo>
-                  <a:cubicBezTo>
-                    <a:pt x="0" y="34533"/>
-                    <a:pt x="5421" y="51047"/>
-                    <a:pt x="12649" y="57514"/>
-                  </a:cubicBezTo>
-                  <a:cubicBezTo>
-                    <a:pt x="19877" y="63980"/>
-                    <a:pt x="25298" y="57819"/>
-                    <a:pt x="25298" y="43577"/>
-                  </a:cubicBezTo>
-                  <a:cubicBezTo>
-                    <a:pt x="25298" y="29335"/>
-                    <a:pt x="19516" y="12721"/>
-                    <a:pt x="12649" y="6360"/>
-                  </a:cubicBezTo>
-                  <a:cubicBezTo>
-                    <a:pt x="5782" y="0"/>
-                    <a:pt x="0" y="6326"/>
-                    <a:pt x="0" y="20298"/>
+                <a:path w="29754" h="75883" fill="norm">
+                  <a:moveTo>
+                    <a:pt x="0" y="43160"/>
+                  </a:moveTo>
+                  <a:cubicBezTo>
+                    <a:pt x="0" y="62486"/>
+                    <a:pt x="6376" y="75883"/>
+                    <a:pt x="14877" y="72631"/>
+                  </a:cubicBezTo>
+                  <a:cubicBezTo>
+                    <a:pt x="23378" y="69379"/>
+                    <a:pt x="29754" y="51882"/>
+                    <a:pt x="29754" y="32406"/>
+                  </a:cubicBezTo>
+                  <a:cubicBezTo>
+                    <a:pt x="29754" y="12929"/>
+                    <a:pt x="22953" y="0"/>
+                    <a:pt x="14877" y="2930"/>
+                  </a:cubicBezTo>
+                  <a:cubicBezTo>
+                    <a:pt x="6801" y="5862"/>
+                    <a:pt x="0" y="24192"/>
+                    <a:pt x="0" y="43160"/>
                   </a:cubicBezTo>
                   <a:close/>
                 </a:path>
@@ -4852,14 +5089,14 @@
         </p:sp>
         <p:sp>
           <p:nvSpPr>
-            <p:cNvPr id="76" name="right Speaker column 2 row 1 43"/>
+            <p:cNvPr id="86" name="right Speaker column 2 row 1 42"/>
             <p:cNvSpPr/>
             <p:nvPr/>
           </p:nvSpPr>
           <p:spPr>
             <a:xfrm>
-              <a:off x="8292549" y="2186059"/>
-              <a:ext cx="25298" cy="64221"/>
+              <a:off x="8298467" y="1754745"/>
+              <a:ext cx="29754" cy="76735"/>
             </a:xfrm>
             <a:custGeom>
               <a:avLst/>
@@ -4868,29 +5105,29 @@
               <a:cxnLst/>
               <a:rect l="0" t="0" r="r" b="b"/>
               <a:pathLst>
-                <a:path w="25298" h="64221" fill="norm">
-                  <a:moveTo>
-                    <a:pt x="0" y="20571"/>
-                  </a:moveTo>
-                  <a:cubicBezTo>
-                    <a:pt x="0" y="34806"/>
-                    <a:pt x="5421" y="51312"/>
-                    <a:pt x="12649" y="57767"/>
-                  </a:cubicBezTo>
-                  <a:cubicBezTo>
-                    <a:pt x="19877" y="64221"/>
-                    <a:pt x="25298" y="57788"/>
-                    <a:pt x="25298" y="43546"/>
-                  </a:cubicBezTo>
-                  <a:cubicBezTo>
-                    <a:pt x="25298" y="29304"/>
-                    <a:pt x="19516" y="12699"/>
-                    <a:pt x="12649" y="6349"/>
-                  </a:cubicBezTo>
-                  <a:cubicBezTo>
-                    <a:pt x="5782" y="0"/>
-                    <a:pt x="0" y="6335"/>
-                    <a:pt x="0" y="20571"/>
+                <a:path w="29754" h="76735" fill="norm">
+                  <a:moveTo>
+                    <a:pt x="0" y="44202"/>
+                  </a:moveTo>
+                  <a:cubicBezTo>
+                    <a:pt x="0" y="63527"/>
+                    <a:pt x="6376" y="76735"/>
+                    <a:pt x="14877" y="73230"/>
+                  </a:cubicBezTo>
+                  <a:cubicBezTo>
+                    <a:pt x="23378" y="69727"/>
+                    <a:pt x="29754" y="51680"/>
+                    <a:pt x="29754" y="32204"/>
+                  </a:cubicBezTo>
+                  <a:cubicBezTo>
+                    <a:pt x="29754" y="12727"/>
+                    <a:pt x="22953" y="0"/>
+                    <a:pt x="14877" y="3170"/>
+                  </a:cubicBezTo>
+                  <a:cubicBezTo>
+                    <a:pt x="6801" y="6343"/>
+                    <a:pt x="0" y="24876"/>
+                    <a:pt x="0" y="44202"/>
                   </a:cubicBezTo>
                   <a:close/>
                 </a:path>
@@ -4907,14 +5144,14 @@
         </p:sp>
         <p:sp>
           <p:nvSpPr>
-            <p:cNvPr id="77" name="right Speaker column 2 row 1 44"/>
+            <p:cNvPr id="87" name="right Speaker column 2 row 1 43"/>
             <p:cNvSpPr/>
             <p:nvPr/>
           </p:nvSpPr>
           <p:spPr>
             <a:xfrm>
-              <a:off x="8292549" y="2103012"/>
-              <a:ext cx="25298" cy="63408"/>
+              <a:off x="8298467" y="1640612"/>
+              <a:ext cx="29754" cy="77587"/>
             </a:xfrm>
             <a:custGeom>
               <a:avLst/>
@@ -4923,29 +5160,29 @@
               <a:cxnLst/>
               <a:rect l="0" t="0" r="r" b="b"/>
               <a:pathLst>
-                <a:path w="25298" h="63408" fill="norm">
-                  <a:moveTo>
-                    <a:pt x="0" y="20316"/>
-                  </a:moveTo>
-                  <a:cubicBezTo>
-                    <a:pt x="0" y="34551"/>
-                    <a:pt x="5421" y="51049"/>
-                    <a:pt x="12649" y="57228"/>
-                  </a:cubicBezTo>
-                  <a:cubicBezTo>
-                    <a:pt x="19877" y="63408"/>
-                    <a:pt x="25298" y="57229"/>
-                    <a:pt x="25298" y="42987"/>
-                  </a:cubicBezTo>
-                  <a:cubicBezTo>
-                    <a:pt x="25298" y="28745"/>
-                    <a:pt x="19516" y="12150"/>
-                    <a:pt x="12649" y="6075"/>
-                  </a:cubicBezTo>
-                  <a:cubicBezTo>
-                    <a:pt x="5782" y="0"/>
-                    <a:pt x="0" y="6345"/>
-                    <a:pt x="0" y="20316"/>
+                <a:path w="29754" h="77587" fill="norm">
+                  <a:moveTo>
+                    <a:pt x="0" y="45243"/>
+                  </a:moveTo>
+                  <a:cubicBezTo>
+                    <a:pt x="0" y="64569"/>
+                    <a:pt x="6376" y="77587"/>
+                    <a:pt x="14877" y="73470"/>
+                  </a:cubicBezTo>
+                  <a:cubicBezTo>
+                    <a:pt x="23378" y="69354"/>
+                    <a:pt x="29754" y="51479"/>
+                    <a:pt x="29754" y="32002"/>
+                  </a:cubicBezTo>
+                  <a:cubicBezTo>
+                    <a:pt x="29754" y="12526"/>
+                    <a:pt x="22953" y="0"/>
+                    <a:pt x="14877" y="3770"/>
+                  </a:cubicBezTo>
+                  <a:cubicBezTo>
+                    <a:pt x="6801" y="7540"/>
+                    <a:pt x="0" y="26275"/>
+                    <a:pt x="0" y="45243"/>
                   </a:cubicBezTo>
                   <a:close/>
                 </a:path>
@@ -4962,14 +5199,14 @@
         </p:sp>
         <p:sp>
           <p:nvSpPr>
-            <p:cNvPr id="78" name="right Speaker column 2 row 1 45"/>
+            <p:cNvPr id="88" name="right Speaker column 2 row 1 44"/>
             <p:cNvSpPr/>
             <p:nvPr/>
           </p:nvSpPr>
           <p:spPr>
             <a:xfrm>
-              <a:off x="8292549" y="2019437"/>
-              <a:ext cx="25298" cy="63913"/>
+              <a:off x="8298467" y="1526479"/>
+              <a:ext cx="29754" cy="78080"/>
             </a:xfrm>
             <a:custGeom>
               <a:avLst/>
@@ -4978,29 +5215,29 @@
               <a:cxnLst/>
               <a:rect l="0" t="0" r="r" b="b"/>
               <a:pathLst>
-                <a:path w="25298" h="63913" fill="norm">
-                  <a:moveTo>
-                    <a:pt x="0" y="20589"/>
-                  </a:moveTo>
-                  <a:cubicBezTo>
-                    <a:pt x="0" y="34824"/>
-                    <a:pt x="5421" y="51049"/>
-                    <a:pt x="12649" y="57481"/>
-                  </a:cubicBezTo>
-                  <a:cubicBezTo>
-                    <a:pt x="19877" y="63913"/>
-                    <a:pt x="25298" y="57198"/>
-                    <a:pt x="25298" y="42956"/>
-                  </a:cubicBezTo>
-                  <a:cubicBezTo>
-                    <a:pt x="25298" y="28714"/>
-                    <a:pt x="19516" y="12128"/>
-                    <a:pt x="12649" y="6064"/>
-                  </a:cubicBezTo>
-                  <a:cubicBezTo>
-                    <a:pt x="5782" y="0"/>
-                    <a:pt x="0" y="6354"/>
-                    <a:pt x="0" y="20589"/>
+                <a:path w="29754" h="78080" fill="norm">
+                  <a:moveTo>
+                    <a:pt x="0" y="46284"/>
+                  </a:moveTo>
+                  <a:cubicBezTo>
+                    <a:pt x="0" y="65610"/>
+                    <a:pt x="6376" y="78080"/>
+                    <a:pt x="14877" y="74070"/>
+                  </a:cubicBezTo>
+                  <a:cubicBezTo>
+                    <a:pt x="23378" y="70061"/>
+                    <a:pt x="29754" y="51277"/>
+                    <a:pt x="29754" y="31800"/>
+                  </a:cubicBezTo>
+                  <a:cubicBezTo>
+                    <a:pt x="29754" y="12324"/>
+                    <a:pt x="22953" y="0"/>
+                    <a:pt x="14877" y="4010"/>
+                  </a:cubicBezTo>
+                  <a:cubicBezTo>
+                    <a:pt x="6801" y="8021"/>
+                    <a:pt x="0" y="26959"/>
+                    <a:pt x="0" y="46284"/>
                   </a:cubicBezTo>
                   <a:close/>
                 </a:path>
@@ -5017,14 +5254,14 @@
         </p:sp>
         <p:sp>
           <p:nvSpPr>
-            <p:cNvPr id="79" name="right Speaker column 2 row 1 46"/>
+            <p:cNvPr id="89" name="right Speaker column 2 row 1 45"/>
             <p:cNvSpPr/>
             <p:nvPr/>
           </p:nvSpPr>
           <p:spPr>
             <a:xfrm>
-              <a:off x="8292549" y="1935862"/>
-              <a:ext cx="25298" cy="63363"/>
+              <a:off x="8298467" y="1412347"/>
+              <a:ext cx="29754" cy="78573"/>
             </a:xfrm>
             <a:custGeom>
               <a:avLst/>
@@ -5033,29 +5270,29 @@
               <a:cxnLst/>
               <a:rect l="0" t="0" r="r" b="b"/>
               <a:pathLst>
-                <a:path w="25298" h="63363" fill="norm">
-                  <a:moveTo>
-                    <a:pt x="0" y="20598"/>
-                  </a:moveTo>
-                  <a:cubicBezTo>
-                    <a:pt x="0" y="34833"/>
-                    <a:pt x="5421" y="51050"/>
-                    <a:pt x="12649" y="57207"/>
-                  </a:cubicBezTo>
-                  <a:cubicBezTo>
-                    <a:pt x="19877" y="63363"/>
-                    <a:pt x="25298" y="56904"/>
-                    <a:pt x="25298" y="42662"/>
-                  </a:cubicBezTo>
-                  <a:cubicBezTo>
-                    <a:pt x="25298" y="28420"/>
-                    <a:pt x="19516" y="12106"/>
-                    <a:pt x="12649" y="6053"/>
-                  </a:cubicBezTo>
-                  <a:cubicBezTo>
-                    <a:pt x="5782" y="0"/>
-                    <a:pt x="0" y="6363"/>
-                    <a:pt x="0" y="20598"/>
+                <a:path w="29754" h="78573" fill="norm">
+                  <a:moveTo>
+                    <a:pt x="0" y="46968"/>
+                  </a:moveTo>
+                  <a:cubicBezTo>
+                    <a:pt x="0" y="66294"/>
+                    <a:pt x="6376" y="78573"/>
+                    <a:pt x="14877" y="73951"/>
+                  </a:cubicBezTo>
+                  <a:cubicBezTo>
+                    <a:pt x="23378" y="69329"/>
+                    <a:pt x="29754" y="50714"/>
+                    <a:pt x="29754" y="31238"/>
+                  </a:cubicBezTo>
+                  <a:cubicBezTo>
+                    <a:pt x="29754" y="11761"/>
+                    <a:pt x="22953" y="0"/>
+                    <a:pt x="14877" y="4250"/>
+                  </a:cubicBezTo>
+                  <a:cubicBezTo>
+                    <a:pt x="6801" y="8501"/>
+                    <a:pt x="0" y="27642"/>
+                    <a:pt x="0" y="46968"/>
                   </a:cubicBezTo>
                   <a:close/>
                 </a:path>
@@ -5072,14 +5309,14 @@
         </p:sp>
         <p:sp>
           <p:nvSpPr>
-            <p:cNvPr id="80" name="right Speaker column 2 row 1 47"/>
+            <p:cNvPr id="90" name="right Speaker column 2 row 1 46"/>
             <p:cNvSpPr/>
             <p:nvPr/>
           </p:nvSpPr>
           <p:spPr>
             <a:xfrm>
-              <a:off x="8292549" y="1852551"/>
-              <a:ext cx="25298" cy="63341"/>
+              <a:off x="8298467" y="1298574"/>
+              <a:ext cx="29754" cy="79065"/>
             </a:xfrm>
             <a:custGeom>
               <a:avLst/>
@@ -5088,29 +5325,29 @@
               <a:cxnLst/>
               <a:rect l="0" t="0" r="r" b="b"/>
               <a:pathLst>
-                <a:path w="25298" h="63341" fill="norm">
-                  <a:moveTo>
-                    <a:pt x="0" y="20607"/>
-                  </a:moveTo>
-                  <a:cubicBezTo>
-                    <a:pt x="0" y="34842"/>
-                    <a:pt x="5421" y="51050"/>
-                    <a:pt x="12649" y="57196"/>
-                  </a:cubicBezTo>
-                  <a:cubicBezTo>
-                    <a:pt x="19877" y="63341"/>
-                    <a:pt x="25298" y="56609"/>
-                    <a:pt x="25298" y="42631"/>
-                  </a:cubicBezTo>
-                  <a:cubicBezTo>
-                    <a:pt x="25298" y="28653"/>
-                    <a:pt x="19516" y="12085"/>
-                    <a:pt x="12649" y="6042"/>
-                  </a:cubicBezTo>
-                  <a:cubicBezTo>
-                    <a:pt x="5782" y="0"/>
-                    <a:pt x="0" y="6636"/>
-                    <a:pt x="0" y="20871"/>
+                <a:path w="29754" h="79065" fill="norm">
+                  <a:moveTo>
+                    <a:pt x="0" y="47649"/>
+                  </a:moveTo>
+                  <a:cubicBezTo>
+                    <a:pt x="0" y="66975"/>
+                    <a:pt x="6376" y="79065"/>
+                    <a:pt x="14877" y="74190"/>
+                  </a:cubicBezTo>
+                  <a:cubicBezTo>
+                    <a:pt x="23378" y="69316"/>
+                    <a:pt x="29754" y="50153"/>
+                    <a:pt x="29754" y="31037"/>
+                  </a:cubicBezTo>
+                  <a:cubicBezTo>
+                    <a:pt x="29754" y="11921"/>
+                    <a:pt x="22953" y="0"/>
+                    <a:pt x="14877" y="4489"/>
+                  </a:cubicBezTo>
+                  <a:cubicBezTo>
+                    <a:pt x="6801" y="8980"/>
+                    <a:pt x="0" y="28681"/>
+                    <a:pt x="0" y="48007"/>
                   </a:cubicBezTo>
                   <a:close/>
                 </a:path>
@@ -5127,14 +5364,14 @@
         </p:sp>
         <p:sp>
           <p:nvSpPr>
-            <p:cNvPr id="81" name="right Speaker column 2 row 1 48"/>
+            <p:cNvPr id="91" name="right Speaker column 2 row 1 47"/>
             <p:cNvSpPr/>
             <p:nvPr/>
           </p:nvSpPr>
           <p:spPr>
             <a:xfrm>
-              <a:off x="8292549" y="1769240"/>
-              <a:ext cx="25298" cy="62791"/>
+              <a:off x="8298467" y="1184081"/>
+              <a:ext cx="29754" cy="80276"/>
             </a:xfrm>
             <a:custGeom>
               <a:avLst/>
@@ -5143,29 +5380,29 @@
               <a:cxnLst/>
               <a:rect l="0" t="0" r="r" b="b"/>
               <a:pathLst>
-                <a:path w="25298" h="62791" fill="norm">
-                  <a:moveTo>
-                    <a:pt x="0" y="20616"/>
-                  </a:moveTo>
-                  <a:cubicBezTo>
-                    <a:pt x="0" y="34852"/>
-                    <a:pt x="5421" y="51051"/>
-                    <a:pt x="12649" y="56921"/>
-                  </a:cubicBezTo>
-                  <a:cubicBezTo>
-                    <a:pt x="19877" y="62791"/>
-                    <a:pt x="25298" y="56315"/>
-                    <a:pt x="25298" y="42073"/>
-                  </a:cubicBezTo>
-                  <a:cubicBezTo>
-                    <a:pt x="25298" y="27831"/>
-                    <a:pt x="19516" y="11535"/>
-                    <a:pt x="12649" y="5768"/>
-                  </a:cubicBezTo>
-                  <a:cubicBezTo>
-                    <a:pt x="5782" y="0"/>
-                    <a:pt x="0" y="6381"/>
-                    <a:pt x="0" y="20616"/>
+                <a:path w="29754" h="80276" fill="norm">
+                  <a:moveTo>
+                    <a:pt x="0" y="49050"/>
+                  </a:moveTo>
+                  <a:cubicBezTo>
+                    <a:pt x="0" y="68376"/>
+                    <a:pt x="6376" y="80276"/>
+                    <a:pt x="14877" y="74790"/>
+                  </a:cubicBezTo>
+                  <a:cubicBezTo>
+                    <a:pt x="23378" y="69303"/>
+                    <a:pt x="29754" y="50311"/>
+                    <a:pt x="29754" y="30834"/>
+                  </a:cubicBezTo>
+                  <a:cubicBezTo>
+                    <a:pt x="29754" y="11358"/>
+                    <a:pt x="22953" y="0"/>
+                    <a:pt x="14877" y="5089"/>
+                  </a:cubicBezTo>
+                  <a:cubicBezTo>
+                    <a:pt x="6801" y="10179"/>
+                    <a:pt x="0" y="29725"/>
+                    <a:pt x="0" y="49050"/>
                   </a:cubicBezTo>
                   <a:close/>
                 </a:path>
@@ -5182,14 +5419,14 @@
         </p:sp>
         <p:sp>
           <p:nvSpPr>
-            <p:cNvPr id="82" name="right Speaker column 2 row 1 49"/>
+            <p:cNvPr id="92" name="right Speaker column 2 row 1 48"/>
             <p:cNvSpPr/>
             <p:nvPr/>
           </p:nvSpPr>
           <p:spPr>
             <a:xfrm>
-              <a:off x="8257492" y="2278373"/>
-              <a:ext cx="24575" cy="63856"/>
+              <a:off x="8257236" y="1940165"/>
+              <a:ext cx="28904" cy="74429"/>
             </a:xfrm>
             <a:custGeom>
               <a:avLst/>
@@ -5198,29 +5435,29 @@
               <a:cxnLst/>
               <a:rect l="0" t="0" r="r" b="b"/>
               <a:pathLst>
-                <a:path w="24575" h="63856" fill="norm">
-                  <a:moveTo>
-                    <a:pt x="0" y="20376"/>
-                  </a:moveTo>
-                  <a:cubicBezTo>
-                    <a:pt x="0" y="34338"/>
-                    <a:pt x="5421" y="51112"/>
-                    <a:pt x="12288" y="57484"/>
-                  </a:cubicBezTo>
-                  <a:cubicBezTo>
-                    <a:pt x="19154" y="63856"/>
-                    <a:pt x="24575" y="57707"/>
-                    <a:pt x="24575" y="43474"/>
-                  </a:cubicBezTo>
-                  <a:cubicBezTo>
-                    <a:pt x="24575" y="29242"/>
-                    <a:pt x="19154" y="12731"/>
-                    <a:pt x="12288" y="6365"/>
-                  </a:cubicBezTo>
-                  <a:cubicBezTo>
-                    <a:pt x="5421" y="0"/>
-                    <a:pt x="0" y="6150"/>
-                    <a:pt x="0" y="20376"/>
+                <a:path w="28904" h="74429" fill="norm">
+                  <a:moveTo>
+                    <a:pt x="0" y="41998"/>
+                  </a:moveTo>
+                  <a:cubicBezTo>
+                    <a:pt x="0" y="60759"/>
+                    <a:pt x="6376" y="74429"/>
+                    <a:pt x="14452" y="71757"/>
+                  </a:cubicBezTo>
+                  <a:cubicBezTo>
+                    <a:pt x="22528" y="69087"/>
+                    <a:pt x="28904" y="51847"/>
+                    <a:pt x="28904" y="32584"/>
+                  </a:cubicBezTo>
+                  <a:cubicBezTo>
+                    <a:pt x="28904" y="13321"/>
+                    <a:pt x="22528" y="0"/>
+                    <a:pt x="14452" y="2819"/>
+                  </a:cubicBezTo>
+                  <a:cubicBezTo>
+                    <a:pt x="6376" y="5639"/>
+                    <a:pt x="0" y="22883"/>
+                    <a:pt x="0" y="41998"/>
                   </a:cubicBezTo>
                   <a:close/>
                 </a:path>
@@ -5237,14 +5474,14 @@
         </p:sp>
         <p:sp>
           <p:nvSpPr>
-            <p:cNvPr id="83" name="right Speaker column 2 row 1 50"/>
+            <p:cNvPr id="93" name="right Speaker column 2 row 1 49"/>
             <p:cNvSpPr/>
             <p:nvPr/>
           </p:nvSpPr>
           <p:spPr>
             <a:xfrm>
-              <a:off x="8257492" y="2195909"/>
-              <a:ext cx="24575" cy="63308"/>
+              <a:off x="8257236" y="1827987"/>
+              <a:ext cx="28904" cy="74911"/>
             </a:xfrm>
             <a:custGeom>
               <a:avLst/>
@@ -5253,29 +5490,29 @@
               <a:cxnLst/>
               <a:rect l="0" t="0" r="r" b="b"/>
               <a:pathLst>
-                <a:path w="24575" h="63308" fill="norm">
-                  <a:moveTo>
-                    <a:pt x="0" y="20121"/>
-                  </a:moveTo>
-                  <a:cubicBezTo>
-                    <a:pt x="0" y="34083"/>
-                    <a:pt x="5421" y="50585"/>
-                    <a:pt x="12288" y="56946"/>
-                  </a:cubicBezTo>
-                  <a:cubicBezTo>
-                    <a:pt x="19154" y="63308"/>
-                    <a:pt x="24575" y="56886"/>
-                    <a:pt x="24575" y="42917"/>
-                  </a:cubicBezTo>
-                  <a:cubicBezTo>
-                    <a:pt x="24575" y="28948"/>
-                    <a:pt x="19154" y="12182"/>
-                    <a:pt x="12288" y="6091"/>
-                  </a:cubicBezTo>
-                  <a:cubicBezTo>
-                    <a:pt x="5421" y="0"/>
-                    <a:pt x="0" y="6159"/>
-                    <a:pt x="0" y="20121"/>
+                <a:path w="28904" h="74911" fill="norm">
+                  <a:moveTo>
+                    <a:pt x="0" y="43025"/>
+                  </a:moveTo>
+                  <a:cubicBezTo>
+                    <a:pt x="0" y="61786"/>
+                    <a:pt x="6376" y="74911"/>
+                    <a:pt x="14452" y="71998"/>
+                  </a:cubicBezTo>
+                  <a:cubicBezTo>
+                    <a:pt x="22528" y="69087"/>
+                    <a:pt x="28904" y="51301"/>
+                    <a:pt x="28904" y="32394"/>
+                  </a:cubicBezTo>
+                  <a:cubicBezTo>
+                    <a:pt x="28904" y="13488"/>
+                    <a:pt x="22528" y="0"/>
+                    <a:pt x="14452" y="3415"/>
+                  </a:cubicBezTo>
+                  <a:cubicBezTo>
+                    <a:pt x="6376" y="6831"/>
+                    <a:pt x="0" y="24264"/>
+                    <a:pt x="0" y="43025"/>
                   </a:cubicBezTo>
                   <a:close/>
                 </a:path>
@@ -5292,14 +5529,14 @@
         </p:sp>
         <p:sp>
           <p:nvSpPr>
-            <p:cNvPr id="84" name="right Speaker column 2 row 1 51"/>
+            <p:cNvPr id="94" name="right Speaker column 2 row 1 50"/>
             <p:cNvSpPr/>
             <p:nvPr/>
           </p:nvSpPr>
           <p:spPr>
             <a:xfrm>
-              <a:off x="8257492" y="2112391"/>
-              <a:ext cx="24575" cy="63813"/>
+              <a:off x="8257236" y="1715810"/>
+              <a:ext cx="28904" cy="75394"/>
             </a:xfrm>
             <a:custGeom>
               <a:avLst/>
@@ -5308,29 +5545,29 @@
               <a:cxnLst/>
               <a:rect l="0" t="0" r="r" b="b"/>
               <a:pathLst>
-                <a:path w="24575" h="63813" fill="norm">
-                  <a:moveTo>
-                    <a:pt x="0" y="20656"/>
-                  </a:moveTo>
-                  <a:cubicBezTo>
-                    <a:pt x="0" y="34618"/>
-                    <a:pt x="5421" y="51112"/>
-                    <a:pt x="12288" y="57462"/>
-                  </a:cubicBezTo>
-                  <a:cubicBezTo>
-                    <a:pt x="19154" y="63813"/>
-                    <a:pt x="24575" y="57382"/>
-                    <a:pt x="24575" y="43150"/>
-                  </a:cubicBezTo>
-                  <a:cubicBezTo>
-                    <a:pt x="24575" y="28918"/>
-                    <a:pt x="19154" y="12687"/>
-                    <a:pt x="12288" y="6344"/>
-                  </a:cubicBezTo>
-                  <a:cubicBezTo>
-                    <a:pt x="5421" y="0"/>
-                    <a:pt x="0" y="6431"/>
-                    <a:pt x="0" y="20656"/>
+                <a:path w="28904" h="75394" fill="norm">
+                  <a:moveTo>
+                    <a:pt x="0" y="43699"/>
+                  </a:moveTo>
+                  <a:cubicBezTo>
+                    <a:pt x="0" y="62460"/>
+                    <a:pt x="6376" y="75394"/>
+                    <a:pt x="14452" y="72239"/>
+                  </a:cubicBezTo>
+                  <a:cubicBezTo>
+                    <a:pt x="22528" y="69087"/>
+                    <a:pt x="28904" y="51111"/>
+                    <a:pt x="28904" y="31848"/>
+                  </a:cubicBezTo>
+                  <a:cubicBezTo>
+                    <a:pt x="28904" y="12585"/>
+                    <a:pt x="22528" y="0"/>
+                    <a:pt x="14452" y="3301"/>
+                  </a:cubicBezTo>
+                  <a:cubicBezTo>
+                    <a:pt x="6376" y="6604"/>
+                    <a:pt x="0" y="24584"/>
+                    <a:pt x="0" y="43699"/>
                   </a:cubicBezTo>
                   <a:close/>
                 </a:path>
@@ -5347,14 +5584,14 @@
         </p:sp>
         <p:sp>
           <p:nvSpPr>
-            <p:cNvPr id="85" name="right Speaker column 2 row 1 52"/>
+            <p:cNvPr id="95" name="right Speaker column 2 row 1 51"/>
             <p:cNvSpPr/>
             <p:nvPr/>
           </p:nvSpPr>
           <p:spPr>
             <a:xfrm>
-              <a:off x="8257492" y="2029663"/>
-              <a:ext cx="24575" cy="63000"/>
+              <a:off x="8257236" y="1603276"/>
+              <a:ext cx="28904" cy="76232"/>
             </a:xfrm>
             <a:custGeom>
               <a:avLst/>
@@ -5363,29 +5600,29 @@
               <a:cxnLst/>
               <a:rect l="0" t="0" r="r" b="b"/>
               <a:pathLst>
-                <a:path w="24575" h="63000" fill="norm">
-                  <a:moveTo>
-                    <a:pt x="0" y="20402"/>
-                  </a:moveTo>
-                  <a:cubicBezTo>
-                    <a:pt x="0" y="34364"/>
-                    <a:pt x="5421" y="50849"/>
-                    <a:pt x="12288" y="56924"/>
-                  </a:cubicBezTo>
-                  <a:cubicBezTo>
-                    <a:pt x="19154" y="63000"/>
-                    <a:pt x="24575" y="56561"/>
-                    <a:pt x="24575" y="42592"/>
-                  </a:cubicBezTo>
-                  <a:cubicBezTo>
-                    <a:pt x="24575" y="28624"/>
-                    <a:pt x="19154" y="12138"/>
-                    <a:pt x="12288" y="6069"/>
-                  </a:cubicBezTo>
-                  <a:cubicBezTo>
-                    <a:pt x="5421" y="0"/>
-                    <a:pt x="0" y="6439"/>
-                    <a:pt x="0" y="20402"/>
+                <a:path w="28904" h="76232" fill="norm">
+                  <a:moveTo>
+                    <a:pt x="0" y="44728"/>
+                  </a:moveTo>
+                  <a:cubicBezTo>
+                    <a:pt x="0" y="63489"/>
+                    <a:pt x="6376" y="76232"/>
+                    <a:pt x="14452" y="72481"/>
+                  </a:cubicBezTo>
+                  <a:cubicBezTo>
+                    <a:pt x="22528" y="68731"/>
+                    <a:pt x="28904" y="50563"/>
+                    <a:pt x="28904" y="31657"/>
+                  </a:cubicBezTo>
+                  <a:cubicBezTo>
+                    <a:pt x="28904" y="12751"/>
+                    <a:pt x="22528" y="0"/>
+                    <a:pt x="14452" y="3898"/>
+                  </a:cubicBezTo>
+                  <a:cubicBezTo>
+                    <a:pt x="6376" y="7797"/>
+                    <a:pt x="0" y="25967"/>
+                    <a:pt x="0" y="44728"/>
                   </a:cubicBezTo>
                   <a:close/>
                 </a:path>
@@ -5402,14 +5639,14 @@
         </p:sp>
         <p:sp>
           <p:nvSpPr>
-            <p:cNvPr id="86" name="right Speaker column 2 row 1 53"/>
+            <p:cNvPr id="96" name="right Speaker column 2 row 1 52"/>
             <p:cNvSpPr/>
             <p:nvPr/>
           </p:nvSpPr>
           <p:spPr>
             <a:xfrm>
-              <a:off x="8257492" y="1946408"/>
-              <a:ext cx="24575" cy="63242"/>
+              <a:off x="8257236" y="1490743"/>
+              <a:ext cx="28904" cy="77071"/>
             </a:xfrm>
             <a:custGeom>
               <a:avLst/>
@@ -5418,29 +5655,29 @@
               <a:cxnLst/>
               <a:rect l="0" t="0" r="r" b="b"/>
               <a:pathLst>
-                <a:path w="24575" h="63242" fill="norm">
-                  <a:moveTo>
-                    <a:pt x="0" y="20674"/>
-                  </a:moveTo>
-                  <a:cubicBezTo>
-                    <a:pt x="0" y="34636"/>
-                    <a:pt x="5421" y="51112"/>
-                    <a:pt x="12288" y="57177"/>
-                  </a:cubicBezTo>
-                  <a:cubicBezTo>
-                    <a:pt x="19154" y="63242"/>
-                    <a:pt x="24575" y="56794"/>
-                    <a:pt x="24575" y="42562"/>
-                  </a:cubicBezTo>
-                  <a:cubicBezTo>
-                    <a:pt x="24575" y="28329"/>
-                    <a:pt x="19154" y="12116"/>
-                    <a:pt x="12288" y="6058"/>
-                  </a:cubicBezTo>
-                  <a:cubicBezTo>
-                    <a:pt x="5421" y="0"/>
-                    <a:pt x="0" y="6448"/>
-                    <a:pt x="0" y="20674"/>
+                <a:path w="28904" h="77071" fill="norm">
+                  <a:moveTo>
+                    <a:pt x="0" y="45758"/>
+                  </a:moveTo>
+                  <a:cubicBezTo>
+                    <a:pt x="0" y="64519"/>
+                    <a:pt x="6376" y="77071"/>
+                    <a:pt x="14452" y="73078"/>
+                  </a:cubicBezTo>
+                  <a:cubicBezTo>
+                    <a:pt x="22528" y="69087"/>
+                    <a:pt x="28904" y="50730"/>
+                    <a:pt x="28904" y="31467"/>
+                  </a:cubicBezTo>
+                  <a:cubicBezTo>
+                    <a:pt x="28904" y="12204"/>
+                    <a:pt x="22528" y="0"/>
+                    <a:pt x="14452" y="4140"/>
+                  </a:cubicBezTo>
+                  <a:cubicBezTo>
+                    <a:pt x="6376" y="8281"/>
+                    <a:pt x="0" y="26643"/>
+                    <a:pt x="0" y="45758"/>
                   </a:cubicBezTo>
                   <a:close/>
                 </a:path>
@@ -5457,14 +5694,14 @@
         </p:sp>
         <p:sp>
           <p:nvSpPr>
-            <p:cNvPr id="87" name="right Speaker column 2 row 1 54"/>
+            <p:cNvPr id="97" name="right Speaker column 2 row 1 53"/>
             <p:cNvSpPr/>
             <p:nvPr/>
           </p:nvSpPr>
           <p:spPr>
             <a:xfrm>
-              <a:off x="8257492" y="1863681"/>
-              <a:ext cx="24575" cy="62693"/>
+              <a:off x="8257236" y="1378210"/>
+              <a:ext cx="28904" cy="77555"/>
             </a:xfrm>
             <a:custGeom>
               <a:avLst/>
@@ -5473,29 +5710,29 @@
               <a:cxnLst/>
               <a:rect l="0" t="0" r="r" b="b"/>
               <a:pathLst>
-                <a:path w="24575" h="62693" fill="norm">
-                  <a:moveTo>
-                    <a:pt x="0" y="20419"/>
-                  </a:moveTo>
-                  <a:cubicBezTo>
-                    <a:pt x="0" y="34381"/>
-                    <a:pt x="5421" y="50585"/>
-                    <a:pt x="12288" y="56639"/>
-                  </a:cubicBezTo>
-                  <a:cubicBezTo>
-                    <a:pt x="19154" y="62693"/>
-                    <a:pt x="24575" y="55973"/>
-                    <a:pt x="24575" y="42004"/>
-                  </a:cubicBezTo>
-                  <a:cubicBezTo>
-                    <a:pt x="24575" y="28035"/>
-                    <a:pt x="19154" y="11567"/>
-                    <a:pt x="12288" y="5784"/>
-                  </a:cubicBezTo>
-                  <a:cubicBezTo>
-                    <a:pt x="5421" y="0"/>
-                    <a:pt x="0" y="6457"/>
-                    <a:pt x="0" y="20419"/>
+                <a:path w="28904" h="77555" fill="norm">
+                  <a:moveTo>
+                    <a:pt x="0" y="46787"/>
+                  </a:moveTo>
+                  <a:cubicBezTo>
+                    <a:pt x="0" y="65548"/>
+                    <a:pt x="6376" y="77555"/>
+                    <a:pt x="14452" y="73320"/>
+                  </a:cubicBezTo>
+                  <a:cubicBezTo>
+                    <a:pt x="22528" y="69087"/>
+                    <a:pt x="28904" y="50182"/>
+                    <a:pt x="28904" y="31276"/>
+                  </a:cubicBezTo>
+                  <a:cubicBezTo>
+                    <a:pt x="28904" y="12370"/>
+                    <a:pt x="22528" y="0"/>
+                    <a:pt x="14452" y="4737"/>
+                  </a:cubicBezTo>
+                  <a:cubicBezTo>
+                    <a:pt x="6376" y="9474"/>
+                    <a:pt x="0" y="28027"/>
+                    <a:pt x="0" y="46787"/>
                   </a:cubicBezTo>
                   <a:close/>
                 </a:path>
@@ -5512,14 +5749,14 @@
         </p:sp>
         <p:sp>
           <p:nvSpPr>
-            <p:cNvPr id="88" name="right Speaker column 2 row 1 55"/>
+            <p:cNvPr id="98" name="right Speaker column 2 row 1 54"/>
             <p:cNvSpPr/>
             <p:nvPr/>
           </p:nvSpPr>
           <p:spPr>
             <a:xfrm>
-              <a:off x="8257492" y="1780162"/>
-              <a:ext cx="24575" cy="63198"/>
+              <a:off x="8257236" y="1266032"/>
+              <a:ext cx="28904" cy="78037"/>
             </a:xfrm>
             <a:custGeom>
               <a:avLst/>
@@ -5528,29 +5765,29 @@
               <a:cxnLst/>
               <a:rect l="0" t="0" r="r" b="b"/>
               <a:pathLst>
-                <a:path w="24575" h="63198" fill="norm">
-                  <a:moveTo>
-                    <a:pt x="0" y="20954"/>
-                  </a:moveTo>
-                  <a:cubicBezTo>
-                    <a:pt x="0" y="34917"/>
-                    <a:pt x="5421" y="51112"/>
-                    <a:pt x="12288" y="57155"/>
-                  </a:cubicBezTo>
-                  <a:cubicBezTo>
-                    <a:pt x="19154" y="63198"/>
-                    <a:pt x="24575" y="56469"/>
-                    <a:pt x="24575" y="42237"/>
-                  </a:cubicBezTo>
-                  <a:cubicBezTo>
-                    <a:pt x="24575" y="28005"/>
-                    <a:pt x="19154" y="12073"/>
-                    <a:pt x="12288" y="6036"/>
-                  </a:cubicBezTo>
-                  <a:cubicBezTo>
-                    <a:pt x="5421" y="0"/>
-                    <a:pt x="0" y="6729"/>
-                    <a:pt x="0" y="20954"/>
+                <a:path w="28904" h="78037" fill="norm">
+                  <a:moveTo>
+                    <a:pt x="0" y="47461"/>
+                  </a:moveTo>
+                  <a:cubicBezTo>
+                    <a:pt x="0" y="66222"/>
+                    <a:pt x="6376" y="78037"/>
+                    <a:pt x="14452" y="73561"/>
+                  </a:cubicBezTo>
+                  <a:cubicBezTo>
+                    <a:pt x="22528" y="69087"/>
+                    <a:pt x="28904" y="49992"/>
+                    <a:pt x="28904" y="30730"/>
+                  </a:cubicBezTo>
+                  <a:cubicBezTo>
+                    <a:pt x="28904" y="11467"/>
+                    <a:pt x="22528" y="0"/>
+                    <a:pt x="14452" y="4622"/>
+                  </a:cubicBezTo>
+                  <a:cubicBezTo>
+                    <a:pt x="6376" y="9248"/>
+                    <a:pt x="0" y="28346"/>
+                    <a:pt x="0" y="47461"/>
                   </a:cubicBezTo>
                   <a:close/>
                 </a:path>
@@ -5567,14 +5804,14 @@
         </p:sp>
         <p:sp>
           <p:nvSpPr>
-            <p:cNvPr id="89" name="right Speaker column 2 row 1 56"/>
+            <p:cNvPr id="99" name="right Speaker column 2 row 1 55"/>
             <p:cNvSpPr/>
             <p:nvPr/>
           </p:nvSpPr>
           <p:spPr>
             <a:xfrm>
-              <a:off x="8222798" y="2204848"/>
-              <a:ext cx="24575" cy="63547"/>
+              <a:off x="8216431" y="1899084"/>
+              <a:ext cx="28904" cy="73581"/>
             </a:xfrm>
             <a:custGeom>
               <a:avLst/>
@@ -5583,29 +5820,29 @@
               <a:cxnLst/>
               <a:rect l="0" t="0" r="r" b="b"/>
               <a:pathLst>
-                <a:path w="24575" h="63547" fill="norm">
-                  <a:moveTo>
-                    <a:pt x="0" y="20363"/>
-                  </a:moveTo>
-                  <a:cubicBezTo>
-                    <a:pt x="0" y="34316"/>
-                    <a:pt x="5421" y="50815"/>
-                    <a:pt x="12288" y="57181"/>
-                  </a:cubicBezTo>
-                  <a:cubicBezTo>
-                    <a:pt x="19154" y="63547"/>
-                    <a:pt x="24575" y="57137"/>
-                    <a:pt x="24575" y="43177"/>
-                  </a:cubicBezTo>
-                  <a:cubicBezTo>
-                    <a:pt x="24575" y="29218"/>
-                    <a:pt x="19154" y="12719"/>
-                    <a:pt x="12288" y="6360"/>
-                  </a:cubicBezTo>
-                  <a:cubicBezTo>
-                    <a:pt x="5421" y="0"/>
-                    <a:pt x="0" y="6410"/>
-                    <a:pt x="0" y="20363"/>
+                <a:path w="28904" h="73581" fill="norm">
+                  <a:moveTo>
+                    <a:pt x="0" y="41982"/>
+                  </a:moveTo>
+                  <a:cubicBezTo>
+                    <a:pt x="0" y="60537"/>
+                    <a:pt x="6376" y="73581"/>
+                    <a:pt x="14452" y="70780"/>
+                  </a:cubicBezTo>
+                  <a:cubicBezTo>
+                    <a:pt x="22528" y="67982"/>
+                    <a:pt x="28904" y="50452"/>
+                    <a:pt x="28904" y="31751"/>
+                  </a:cubicBezTo>
+                  <a:cubicBezTo>
+                    <a:pt x="28904" y="13051"/>
+                    <a:pt x="22528" y="0"/>
+                    <a:pt x="14452" y="2948"/>
+                  </a:cubicBezTo>
+                  <a:cubicBezTo>
+                    <a:pt x="6376" y="5898"/>
+                    <a:pt x="0" y="23428"/>
+                    <a:pt x="0" y="41982"/>
                   </a:cubicBezTo>
                   <a:close/>
                 </a:path>
@@ -5622,14 +5859,14 @@
         </p:sp>
         <p:sp>
           <p:nvSpPr>
-            <p:cNvPr id="90" name="right Speaker column 2 row 1 57"/>
+            <p:cNvPr id="100" name="right Speaker column 2 row 1 56"/>
             <p:cNvSpPr/>
             <p:nvPr/>
           </p:nvSpPr>
           <p:spPr>
             <a:xfrm>
-              <a:off x="8222798" y="2122439"/>
-              <a:ext cx="24575" cy="62735"/>
+              <a:off x="8216431" y="1788129"/>
+              <a:ext cx="28904" cy="74419"/>
             </a:xfrm>
             <a:custGeom>
               <a:avLst/>
@@ -5638,29 +5875,29 @@
               <a:cxnLst/>
               <a:rect l="0" t="0" r="r" b="b"/>
               <a:pathLst>
-                <a:path w="24575" h="62735" fill="norm">
-                  <a:moveTo>
-                    <a:pt x="0" y="20109"/>
-                  </a:moveTo>
-                  <a:cubicBezTo>
-                    <a:pt x="0" y="34061"/>
-                    <a:pt x="5421" y="50551"/>
-                    <a:pt x="12288" y="56643"/>
-                  </a:cubicBezTo>
-                  <a:cubicBezTo>
-                    <a:pt x="19154" y="62735"/>
-                    <a:pt x="24575" y="56580"/>
-                    <a:pt x="24575" y="42620"/>
-                  </a:cubicBezTo>
-                  <a:cubicBezTo>
-                    <a:pt x="24575" y="28661"/>
-                    <a:pt x="19154" y="12171"/>
-                    <a:pt x="12288" y="6085"/>
-                  </a:cubicBezTo>
-                  <a:cubicBezTo>
-                    <a:pt x="5421" y="0"/>
-                    <a:pt x="0" y="6156"/>
-                    <a:pt x="0" y="20109"/>
+                <a:path w="28904" h="74419" fill="norm">
+                  <a:moveTo>
+                    <a:pt x="0" y="43013"/>
+                  </a:moveTo>
+                  <a:cubicBezTo>
+                    <a:pt x="0" y="61567"/>
+                    <a:pt x="6376" y="74419"/>
+                    <a:pt x="14452" y="71024"/>
+                  </a:cubicBezTo>
+                  <a:cubicBezTo>
+                    <a:pt x="22528" y="67629"/>
+                    <a:pt x="28904" y="50260"/>
+                    <a:pt x="28904" y="31560"/>
+                  </a:cubicBezTo>
+                  <a:cubicBezTo>
+                    <a:pt x="28904" y="12859"/>
+                    <a:pt x="22528" y="0"/>
+                    <a:pt x="14452" y="3543"/>
+                  </a:cubicBezTo>
+                  <a:cubicBezTo>
+                    <a:pt x="6376" y="7087"/>
+                    <a:pt x="0" y="24459"/>
+                    <a:pt x="0" y="43013"/>
                   </a:cubicBezTo>
                   <a:close/>
                 </a:path>
@@ -5677,14 +5914,14 @@
         </p:sp>
         <p:sp>
           <p:nvSpPr>
-            <p:cNvPr id="91" name="right Speaker column 2 row 1 58"/>
+            <p:cNvPr id="101" name="right Speaker column 2 row 1 57"/>
             <p:cNvSpPr/>
             <p:nvPr/>
           </p:nvSpPr>
           <p:spPr>
             <a:xfrm>
-              <a:off x="8222798" y="2039504"/>
-              <a:ext cx="24575" cy="63240"/>
+              <a:off x="8216431" y="1677175"/>
+              <a:ext cx="28904" cy="74906"/>
             </a:xfrm>
             <a:custGeom>
               <a:avLst/>
@@ -5693,29 +5930,29 @@
               <a:cxnLst/>
               <a:rect l="0" t="0" r="r" b="b"/>
               <a:pathLst>
-                <a:path w="24575" h="63240" fill="norm">
-                  <a:moveTo>
-                    <a:pt x="0" y="20381"/>
-                  </a:moveTo>
-                  <a:cubicBezTo>
-                    <a:pt x="0" y="34333"/>
-                    <a:pt x="5421" y="50551"/>
-                    <a:pt x="12288" y="56895"/>
-                  </a:cubicBezTo>
-                  <a:cubicBezTo>
-                    <a:pt x="19154" y="63240"/>
-                    <a:pt x="24575" y="56812"/>
-                    <a:pt x="24575" y="42589"/>
-                  </a:cubicBezTo>
-                  <a:cubicBezTo>
-                    <a:pt x="24575" y="28366"/>
-                    <a:pt x="19154" y="12148"/>
-                    <a:pt x="12288" y="6074"/>
-                  </a:cubicBezTo>
-                  <a:cubicBezTo>
-                    <a:pt x="5421" y="0"/>
-                    <a:pt x="0" y="6428"/>
-                    <a:pt x="0" y="20381"/>
+                <a:path w="28904" h="74906" fill="norm">
+                  <a:moveTo>
+                    <a:pt x="0" y="44044"/>
+                  </a:moveTo>
+                  <a:cubicBezTo>
+                    <a:pt x="0" y="62598"/>
+                    <a:pt x="6376" y="74906"/>
+                    <a:pt x="14452" y="71619"/>
+                  </a:cubicBezTo>
+                  <a:cubicBezTo>
+                    <a:pt x="22528" y="68334"/>
+                    <a:pt x="28904" y="50421"/>
+                    <a:pt x="28904" y="31368"/>
+                  </a:cubicBezTo>
+                  <a:cubicBezTo>
+                    <a:pt x="28904" y="12314"/>
+                    <a:pt x="22528" y="0"/>
+                    <a:pt x="14452" y="3786"/>
+                  </a:cubicBezTo>
+                  <a:cubicBezTo>
+                    <a:pt x="6376" y="7574"/>
+                    <a:pt x="0" y="25489"/>
+                    <a:pt x="0" y="44044"/>
                   </a:cubicBezTo>
                   <a:close/>
                 </a:path>
@@ -5732,14 +5969,14 @@
         </p:sp>
         <p:sp>
           <p:nvSpPr>
-            <p:cNvPr id="92" name="right Speaker column 2 row 1 59"/>
+            <p:cNvPr id="102" name="right Speaker column 2 row 1 58"/>
             <p:cNvSpPr/>
             <p:nvPr/>
           </p:nvSpPr>
           <p:spPr>
             <a:xfrm>
-              <a:off x="8222798" y="1956832"/>
-              <a:ext cx="24575" cy="62954"/>
+              <a:off x="8216431" y="1566572"/>
+              <a:ext cx="28904" cy="75743"/>
             </a:xfrm>
             <a:custGeom>
               <a:avLst/>
@@ -5748,29 +5985,29 @@
               <a:cxnLst/>
               <a:rect l="0" t="0" r="r" b="b"/>
               <a:pathLst>
-                <a:path w="24575" h="62954" fill="norm">
-                  <a:moveTo>
-                    <a:pt x="0" y="20653"/>
-                  </a:moveTo>
-                  <a:cubicBezTo>
-                    <a:pt x="0" y="34605"/>
-                    <a:pt x="5421" y="50815"/>
-                    <a:pt x="12288" y="56884"/>
-                  </a:cubicBezTo>
-                  <a:cubicBezTo>
-                    <a:pt x="19154" y="62954"/>
-                    <a:pt x="24575" y="56518"/>
-                    <a:pt x="24575" y="42559"/>
-                  </a:cubicBezTo>
-                  <a:cubicBezTo>
-                    <a:pt x="24575" y="28599"/>
-                    <a:pt x="19154" y="12126"/>
-                    <a:pt x="12288" y="6063"/>
-                  </a:cubicBezTo>
-                  <a:cubicBezTo>
-                    <a:pt x="5421" y="0"/>
-                    <a:pt x="0" y="6437"/>
-                    <a:pt x="0" y="20389"/>
+                <a:path w="28904" h="75743" fill="norm">
+                  <a:moveTo>
+                    <a:pt x="0" y="45072"/>
+                  </a:moveTo>
+                  <a:cubicBezTo>
+                    <a:pt x="0" y="63626"/>
+                    <a:pt x="6376" y="75743"/>
+                    <a:pt x="14452" y="71862"/>
+                  </a:cubicBezTo>
+                  <a:cubicBezTo>
+                    <a:pt x="22528" y="67982"/>
+                    <a:pt x="28904" y="49877"/>
+                    <a:pt x="28904" y="31176"/>
+                  </a:cubicBezTo>
+                  <a:cubicBezTo>
+                    <a:pt x="28904" y="12476"/>
+                    <a:pt x="22528" y="0"/>
+                    <a:pt x="14452" y="4029"/>
+                  </a:cubicBezTo>
+                  <a:cubicBezTo>
+                    <a:pt x="6376" y="8060"/>
+                    <a:pt x="0" y="26168"/>
+                    <a:pt x="0" y="44722"/>
                   </a:cubicBezTo>
                   <a:close/>
                 </a:path>
@@ -5787,14 +6024,14 @@
         </p:sp>
         <p:sp>
           <p:nvSpPr>
-            <p:cNvPr id="93" name="right Speaker column 2 row 1 60"/>
+            <p:cNvPr id="103" name="right Speaker column 2 row 1 59"/>
             <p:cNvSpPr/>
             <p:nvPr/>
           </p:nvSpPr>
           <p:spPr>
             <a:xfrm>
-              <a:off x="8222798" y="1874159"/>
-              <a:ext cx="24575" cy="62932"/>
+              <a:off x="8216431" y="1455970"/>
+              <a:ext cx="28904" cy="76229"/>
             </a:xfrm>
             <a:custGeom>
               <a:avLst/>
@@ -5803,29 +6040,29 @@
               <a:cxnLst/>
               <a:rect l="0" t="0" r="r" b="b"/>
               <a:pathLst>
-                <a:path w="24575" h="62932" fill="norm">
-                  <a:moveTo>
-                    <a:pt x="0" y="20661"/>
-                  </a:moveTo>
-                  <a:cubicBezTo>
-                    <a:pt x="0" y="34614"/>
-                    <a:pt x="5421" y="50815"/>
-                    <a:pt x="12288" y="56873"/>
-                  </a:cubicBezTo>
-                  <a:cubicBezTo>
-                    <a:pt x="19154" y="62932"/>
-                    <a:pt x="24575" y="56487"/>
-                    <a:pt x="24575" y="42265"/>
-                  </a:cubicBezTo>
-                  <a:cubicBezTo>
-                    <a:pt x="24575" y="28042"/>
-                    <a:pt x="19154" y="12104"/>
-                    <a:pt x="12288" y="6052"/>
-                  </a:cubicBezTo>
-                  <a:cubicBezTo>
-                    <a:pt x="5421" y="0"/>
-                    <a:pt x="0" y="6709"/>
-                    <a:pt x="0" y="20661"/>
+                <a:path w="28904" h="76229" fill="norm">
+                  <a:moveTo>
+                    <a:pt x="0" y="45750"/>
+                  </a:moveTo>
+                  <a:cubicBezTo>
+                    <a:pt x="0" y="64304"/>
+                    <a:pt x="6376" y="76229"/>
+                    <a:pt x="14452" y="72104"/>
+                  </a:cubicBezTo>
+                  <a:cubicBezTo>
+                    <a:pt x="22528" y="67982"/>
+                    <a:pt x="28904" y="49686"/>
+                    <a:pt x="28904" y="30632"/>
+                  </a:cubicBezTo>
+                  <a:cubicBezTo>
+                    <a:pt x="28904" y="11579"/>
+                    <a:pt x="22528" y="0"/>
+                    <a:pt x="14452" y="4272"/>
+                  </a:cubicBezTo>
+                  <a:cubicBezTo>
+                    <a:pt x="6376" y="8546"/>
+                    <a:pt x="0" y="27196"/>
+                    <a:pt x="0" y="45750"/>
                   </a:cubicBezTo>
                   <a:close/>
                 </a:path>
@@ -5842,14 +6079,14 @@
         </p:sp>
         <p:sp>
           <p:nvSpPr>
-            <p:cNvPr id="94" name="right Speaker column 2 row 1 61"/>
+            <p:cNvPr id="104" name="right Speaker column 2 row 1 60"/>
             <p:cNvSpPr/>
             <p:nvPr/>
           </p:nvSpPr>
           <p:spPr>
             <a:xfrm>
-              <a:off x="8222798" y="1791750"/>
-              <a:ext cx="24575" cy="62910"/>
+              <a:off x="8216431" y="1345720"/>
+              <a:ext cx="28904" cy="76713"/>
             </a:xfrm>
             <a:custGeom>
               <a:avLst/>
@@ -5858,29 +6095,29 @@
               <a:cxnLst/>
               <a:rect l="0" t="0" r="r" b="b"/>
               <a:pathLst>
-                <a:path w="24575" h="62910" fill="norm">
-                  <a:moveTo>
-                    <a:pt x="0" y="20670"/>
-                  </a:moveTo>
-                  <a:cubicBezTo>
-                    <a:pt x="0" y="34623"/>
-                    <a:pt x="5421" y="50815"/>
-                    <a:pt x="12288" y="56862"/>
-                  </a:cubicBezTo>
-                  <a:cubicBezTo>
-                    <a:pt x="19154" y="62910"/>
-                    <a:pt x="24575" y="56193"/>
-                    <a:pt x="24575" y="42234"/>
-                  </a:cubicBezTo>
-                  <a:cubicBezTo>
-                    <a:pt x="24575" y="28274"/>
-                    <a:pt x="19154" y="12082"/>
-                    <a:pt x="12288" y="6041"/>
-                  </a:cubicBezTo>
-                  <a:cubicBezTo>
-                    <a:pt x="5421" y="0"/>
-                    <a:pt x="0" y="6717"/>
-                    <a:pt x="0" y="20670"/>
+                <a:path w="28904" h="76713" fill="norm">
+                  <a:moveTo>
+                    <a:pt x="0" y="46426"/>
+                  </a:moveTo>
+                  <a:cubicBezTo>
+                    <a:pt x="0" y="64980"/>
+                    <a:pt x="6376" y="76713"/>
+                    <a:pt x="14452" y="72346"/>
+                  </a:cubicBezTo>
+                  <a:cubicBezTo>
+                    <a:pt x="22528" y="67982"/>
+                    <a:pt x="28904" y="49142"/>
+                    <a:pt x="28904" y="30442"/>
+                  </a:cubicBezTo>
+                  <a:cubicBezTo>
+                    <a:pt x="28904" y="11741"/>
+                    <a:pt x="22528" y="0"/>
+                    <a:pt x="14452" y="4514"/>
+                  </a:cubicBezTo>
+                  <a:cubicBezTo>
+                    <a:pt x="6376" y="9030"/>
+                    <a:pt x="0" y="27872"/>
+                    <a:pt x="0" y="46426"/>
                   </a:cubicBezTo>
                   <a:close/>
                 </a:path>
@@ -5897,14 +6134,14 @@
         </p:sp>
         <p:sp>
           <p:nvSpPr>
-            <p:cNvPr id="95" name="right Speaker column 2 row 1 62"/>
+            <p:cNvPr id="105" name="right Speaker column 2 row 1 61"/>
             <p:cNvSpPr/>
             <p:nvPr/>
           </p:nvSpPr>
           <p:spPr>
             <a:xfrm>
-              <a:off x="8188103" y="2131908"/>
-              <a:ext cx="24575" cy="62975"/>
+              <a:off x="8175625" y="1859275"/>
+              <a:ext cx="28904" cy="73085"/>
             </a:xfrm>
             <a:custGeom>
               <a:avLst/>
@@ -5913,29 +6150,29 @@
               <a:cxnLst/>
               <a:rect l="0" t="0" r="r" b="b"/>
               <a:pathLst>
-                <a:path w="24575" h="62975" fill="norm">
-                  <a:moveTo>
-                    <a:pt x="0" y="20088"/>
-                  </a:moveTo>
-                  <a:cubicBezTo>
-                    <a:pt x="0" y="34031"/>
-                    <a:pt x="5421" y="50254"/>
-                    <a:pt x="12288" y="56614"/>
-                  </a:cubicBezTo>
-                  <a:cubicBezTo>
-                    <a:pt x="19154" y="62975"/>
-                    <a:pt x="24575" y="56567"/>
-                    <a:pt x="24575" y="42617"/>
-                  </a:cubicBezTo>
-                  <a:cubicBezTo>
-                    <a:pt x="24575" y="28667"/>
-                    <a:pt x="19154" y="12181"/>
-                    <a:pt x="12288" y="6090"/>
-                  </a:cubicBezTo>
-                  <a:cubicBezTo>
-                    <a:pt x="5421" y="0"/>
-                    <a:pt x="0" y="6144"/>
-                    <a:pt x="0" y="20088"/>
+                <a:path w="28904" h="73085" fill="norm">
+                  <a:moveTo>
+                    <a:pt x="0" y="42317"/>
+                  </a:moveTo>
+                  <a:cubicBezTo>
+                    <a:pt x="0" y="60662"/>
+                    <a:pt x="6376" y="73085"/>
+                    <a:pt x="14452" y="70154"/>
+                  </a:cubicBezTo>
+                  <a:cubicBezTo>
+                    <a:pt x="22528" y="67225"/>
+                    <a:pt x="28904" y="49763"/>
+                    <a:pt x="28904" y="31269"/>
+                  </a:cubicBezTo>
+                  <a:cubicBezTo>
+                    <a:pt x="28904" y="12776"/>
+                    <a:pt x="22528" y="0"/>
+                    <a:pt x="14452" y="3427"/>
+                  </a:cubicBezTo>
+                  <a:cubicBezTo>
+                    <a:pt x="6376" y="6855"/>
+                    <a:pt x="0" y="23972"/>
+                    <a:pt x="0" y="42317"/>
                   </a:cubicBezTo>
                   <a:close/>
                 </a:path>
@@ -5952,14 +6189,14 @@
         </p:sp>
         <p:sp>
           <p:nvSpPr>
-            <p:cNvPr id="96" name="right Speaker column 2 row 1 63"/>
+            <p:cNvPr id="106" name="right Speaker column 2 row 1 62"/>
             <p:cNvSpPr/>
             <p:nvPr/>
           </p:nvSpPr>
           <p:spPr>
             <a:xfrm>
-              <a:off x="8188103" y="2049028"/>
-              <a:ext cx="24575" cy="62952"/>
+              <a:off x="8175625" y="1750253"/>
+              <a:ext cx="28904" cy="73574"/>
             </a:xfrm>
             <a:custGeom>
               <a:avLst/>
@@ -5968,29 +6205,29 @@
               <a:cxnLst/>
               <a:rect l="0" t="0" r="r" b="b"/>
               <a:pathLst>
-                <a:path w="24575" h="62952" fill="norm">
-                  <a:moveTo>
-                    <a:pt x="0" y="20623"/>
-                  </a:moveTo>
-                  <a:cubicBezTo>
-                    <a:pt x="0" y="34566"/>
-                    <a:pt x="5421" y="50780"/>
-                    <a:pt x="12288" y="56866"/>
-                  </a:cubicBezTo>
-                  <a:cubicBezTo>
-                    <a:pt x="19154" y="62952"/>
-                    <a:pt x="24575" y="56800"/>
-                    <a:pt x="24575" y="42850"/>
-                  </a:cubicBezTo>
-                  <a:cubicBezTo>
-                    <a:pt x="24575" y="28900"/>
-                    <a:pt x="19154" y="12685"/>
-                    <a:pt x="12288" y="6342"/>
-                  </a:cubicBezTo>
-                  <a:cubicBezTo>
-                    <a:pt x="5421" y="0"/>
-                    <a:pt x="0" y="6679"/>
-                    <a:pt x="0" y="20359"/>
+                <a:path w="28904" h="73574" fill="norm">
+                  <a:moveTo>
+                    <a:pt x="0" y="43000"/>
+                  </a:moveTo>
+                  <a:cubicBezTo>
+                    <a:pt x="0" y="61345"/>
+                    <a:pt x="6376" y="73574"/>
+                    <a:pt x="14452" y="70051"/>
+                  </a:cubicBezTo>
+                  <a:cubicBezTo>
+                    <a:pt x="22528" y="66528"/>
+                    <a:pt x="28904" y="49221"/>
+                    <a:pt x="28904" y="30728"/>
+                  </a:cubicBezTo>
+                  <a:cubicBezTo>
+                    <a:pt x="28904" y="12234"/>
+                    <a:pt x="22528" y="0"/>
+                    <a:pt x="14452" y="3324"/>
+                  </a:cubicBezTo>
+                  <a:cubicBezTo>
+                    <a:pt x="6376" y="6651"/>
+                    <a:pt x="0" y="24655"/>
+                    <a:pt x="0" y="42654"/>
                   </a:cubicBezTo>
                   <a:close/>
                 </a:path>
@@ -6007,14 +6244,14 @@
         </p:sp>
         <p:sp>
           <p:nvSpPr>
-            <p:cNvPr id="97" name="right Speaker column 2 row 1 64"/>
+            <p:cNvPr id="107" name="right Speaker column 2 row 1 63"/>
             <p:cNvSpPr/>
             <p:nvPr/>
           </p:nvSpPr>
           <p:spPr>
             <a:xfrm>
-              <a:off x="8188103" y="1967201"/>
-              <a:ext cx="24575" cy="62667"/>
+              <a:off x="8175625" y="1641230"/>
+              <a:ext cx="28904" cy="74410"/>
             </a:xfrm>
             <a:custGeom>
               <a:avLst/>
@@ -6023,29 +6260,29 @@
               <a:cxnLst/>
               <a:rect l="0" t="0" r="r" b="b"/>
               <a:pathLst>
-                <a:path w="24575" h="62667" fill="norm">
-                  <a:moveTo>
-                    <a:pt x="0" y="20368"/>
-                  </a:moveTo>
-                  <a:cubicBezTo>
-                    <a:pt x="0" y="34311"/>
-                    <a:pt x="5421" y="50517"/>
-                    <a:pt x="12288" y="56592"/>
-                  </a:cubicBezTo>
-                  <a:cubicBezTo>
-                    <a:pt x="19154" y="62667"/>
-                    <a:pt x="24575" y="56242"/>
-                    <a:pt x="24575" y="42292"/>
-                  </a:cubicBezTo>
-                  <a:cubicBezTo>
-                    <a:pt x="24575" y="28342"/>
-                    <a:pt x="19154" y="12137"/>
-                    <a:pt x="12288" y="6068"/>
-                  </a:cubicBezTo>
-                  <a:cubicBezTo>
-                    <a:pt x="5421" y="0"/>
-                    <a:pt x="0" y="6425"/>
-                    <a:pt x="0" y="20368"/>
+                <a:path w="28904" h="74410" fill="norm">
+                  <a:moveTo>
+                    <a:pt x="0" y="44029"/>
+                  </a:moveTo>
+                  <a:cubicBezTo>
+                    <a:pt x="0" y="62374"/>
+                    <a:pt x="6376" y="74410"/>
+                    <a:pt x="14452" y="70643"/>
+                  </a:cubicBezTo>
+                  <a:cubicBezTo>
+                    <a:pt x="22528" y="66876"/>
+                    <a:pt x="28904" y="49028"/>
+                    <a:pt x="28904" y="30535"/>
+                  </a:cubicBezTo>
+                  <a:cubicBezTo>
+                    <a:pt x="28904" y="12042"/>
+                    <a:pt x="22528" y="0"/>
+                    <a:pt x="14452" y="3916"/>
+                  </a:cubicBezTo>
+                  <a:cubicBezTo>
+                    <a:pt x="6376" y="7834"/>
+                    <a:pt x="0" y="25684"/>
+                    <a:pt x="0" y="44029"/>
                   </a:cubicBezTo>
                   <a:close/>
                 </a:path>
@@ -6062,14 +6299,14 @@
         </p:sp>
         <p:sp>
           <p:nvSpPr>
-            <p:cNvPr id="98" name="right Speaker column 2 row 1 65"/>
+            <p:cNvPr id="108" name="right Speaker column 2 row 1 64"/>
             <p:cNvSpPr/>
             <p:nvPr/>
           </p:nvSpPr>
           <p:spPr>
             <a:xfrm>
-              <a:off x="8188103" y="1885111"/>
-              <a:ext cx="24575" cy="62645"/>
+              <a:off x="8175625" y="1532556"/>
+              <a:ext cx="28904" cy="74898"/>
             </a:xfrm>
             <a:custGeom>
               <a:avLst/>
@@ -6078,29 +6315,29 @@
               <a:cxnLst/>
               <a:rect l="0" t="0" r="r" b="b"/>
               <a:pathLst>
-                <a:path w="24575" h="62645" fill="norm">
-                  <a:moveTo>
-                    <a:pt x="0" y="20377"/>
-                  </a:moveTo>
-                  <a:cubicBezTo>
-                    <a:pt x="0" y="34320"/>
-                    <a:pt x="5421" y="50517"/>
-                    <a:pt x="12288" y="56581"/>
-                  </a:cubicBezTo>
-                  <a:cubicBezTo>
-                    <a:pt x="19154" y="62645"/>
-                    <a:pt x="24575" y="56212"/>
-                    <a:pt x="24575" y="42262"/>
-                  </a:cubicBezTo>
-                  <a:cubicBezTo>
-                    <a:pt x="24575" y="28312"/>
-                    <a:pt x="19154" y="12114"/>
-                    <a:pt x="12288" y="6057"/>
-                  </a:cubicBezTo>
-                  <a:cubicBezTo>
-                    <a:pt x="5421" y="0"/>
-                    <a:pt x="0" y="6434"/>
-                    <a:pt x="0" y="20377"/>
+                <a:path w="28904" h="74898" fill="norm">
+                  <a:moveTo>
+                    <a:pt x="0" y="44710"/>
+                  </a:moveTo>
+                  <a:cubicBezTo>
+                    <a:pt x="0" y="63055"/>
+                    <a:pt x="6376" y="74898"/>
+                    <a:pt x="14452" y="70886"/>
+                  </a:cubicBezTo>
+                  <a:cubicBezTo>
+                    <a:pt x="22528" y="66876"/>
+                    <a:pt x="28904" y="48836"/>
+                    <a:pt x="28904" y="30343"/>
+                  </a:cubicBezTo>
+                  <a:cubicBezTo>
+                    <a:pt x="28904" y="11850"/>
+                    <a:pt x="22528" y="0"/>
+                    <a:pt x="14452" y="4160"/>
+                  </a:cubicBezTo>
+                  <a:cubicBezTo>
+                    <a:pt x="6376" y="8322"/>
+                    <a:pt x="0" y="26365"/>
+                    <a:pt x="0" y="44710"/>
                   </a:cubicBezTo>
                   <a:close/>
                 </a:path>
@@ -6117,14 +6354,14 @@
         </p:sp>
         <p:sp>
           <p:nvSpPr>
-            <p:cNvPr id="99" name="right Speaker column 2 row 1 66"/>
+            <p:cNvPr id="109" name="right Speaker column 2 row 1 65"/>
             <p:cNvSpPr/>
             <p:nvPr/>
           </p:nvSpPr>
           <p:spPr>
             <a:xfrm>
-              <a:off x="8188103" y="1803021"/>
-              <a:ext cx="24575" cy="62360"/>
+              <a:off x="8175625" y="1423185"/>
+              <a:ext cx="28904" cy="75736"/>
             </a:xfrm>
             <a:custGeom>
               <a:avLst/>
@@ -6133,29 +6370,29 @@
               <a:cxnLst/>
               <a:rect l="0" t="0" r="r" b="b"/>
               <a:pathLst>
-                <a:path w="24575" h="62360" fill="norm">
-                  <a:moveTo>
-                    <a:pt x="0" y="20386"/>
-                  </a:moveTo>
-                  <a:cubicBezTo>
-                    <a:pt x="0" y="34329"/>
-                    <a:pt x="5421" y="50254"/>
-                    <a:pt x="12288" y="56307"/>
-                  </a:cubicBezTo>
-                  <a:cubicBezTo>
-                    <a:pt x="19154" y="62360"/>
-                    <a:pt x="24575" y="55654"/>
-                    <a:pt x="24575" y="41704"/>
-                  </a:cubicBezTo>
-                  <a:cubicBezTo>
-                    <a:pt x="24575" y="27754"/>
-                    <a:pt x="19154" y="11566"/>
-                    <a:pt x="12288" y="5783"/>
-                  </a:cubicBezTo>
-                  <a:cubicBezTo>
-                    <a:pt x="5421" y="0"/>
-                    <a:pt x="0" y="6442"/>
-                    <a:pt x="0" y="20386"/>
+                <a:path w="28904" h="75736" fill="norm">
+                  <a:moveTo>
+                    <a:pt x="0" y="46088"/>
+                  </a:moveTo>
+                  <a:cubicBezTo>
+                    <a:pt x="0" y="64433"/>
+                    <a:pt x="6376" y="75736"/>
+                    <a:pt x="14452" y="71479"/>
+                  </a:cubicBezTo>
+                  <a:cubicBezTo>
+                    <a:pt x="22528" y="67225"/>
+                    <a:pt x="28904" y="48643"/>
+                    <a:pt x="28904" y="30150"/>
+                  </a:cubicBezTo>
+                  <a:cubicBezTo>
+                    <a:pt x="28904" y="11657"/>
+                    <a:pt x="22528" y="0"/>
+                    <a:pt x="14452" y="4753"/>
+                  </a:cubicBezTo>
+                  <a:cubicBezTo>
+                    <a:pt x="6376" y="9506"/>
+                    <a:pt x="0" y="27743"/>
+                    <a:pt x="0" y="46088"/>
                   </a:cubicBezTo>
                   <a:close/>
                 </a:path>
@@ -6173,28 +6410,28 @@
       </p:grpSp>
       <p:grpSp>
         <p:nvGrpSpPr>
-          <p:cNvPr id="100" name="right Lever column 2 row 7"/>
+          <p:cNvPr id="110" name="right Lever column 2 row 7"/>
           <p:cNvGrpSpPr/>
           <p:nvPr/>
         </p:nvGrpSpPr>
         <p:grpSpPr>
           <a:xfrm>
-            <a:off x="4908734" y="3707950"/>
-            <a:ext cx="437116" cy="237318"/>
-            <a:chOff x="8109134" y="4288975"/>
-            <a:chExt cx="437116" cy="237318"/>
+            <a:off x="4903113" y="4043243"/>
+            <a:ext cx="254675" cy="215920"/>
+            <a:chOff x="8103513" y="4624268"/>
+            <a:chExt cx="254675" cy="215920"/>
           </a:xfrm>
         </p:grpSpPr>
         <p:sp>
           <p:nvSpPr>
-            <p:cNvPr id="101" name="right Lever column 2 row 7 6"/>
+            <p:cNvPr id="111" name="right Lever column 2 row 7 5"/>
             <p:cNvSpPr/>
             <p:nvPr/>
           </p:nvSpPr>
           <p:spPr>
             <a:xfrm>
-              <a:off x="8109134" y="4305234"/>
-              <a:ext cx="437116" cy="221059"/>
+              <a:off x="8103513" y="4637165"/>
+              <a:ext cx="254675" cy="203023"/>
             </a:xfrm>
             <a:custGeom>
               <a:avLst/>
@@ -6203,21 +6440,21 @@
               <a:cxnLst/>
               <a:rect l="0" t="0" r="r" b="b"/>
               <a:pathLst>
-                <a:path w="437116" h="221059" fill="norm">
-                  <a:moveTo>
-                    <a:pt x="437116" y="221059"/>
+                <a:path w="254675" h="203023" fill="norm">
+                  <a:moveTo>
+                    <a:pt x="0" y="203023"/>
                   </a:moveTo>
                   <a:lnTo>
-                    <a:pt x="179161" y="221059"/>
+                    <a:pt x="150291" y="186687"/>
                   </a:lnTo>
                   <a:lnTo>
-                    <a:pt x="0" y="0"/>
+                    <a:pt x="254675" y="0"/>
                   </a:lnTo>
                   <a:lnTo>
-                    <a:pt x="252014" y="0"/>
+                    <a:pt x="107845" y="15960"/>
                   </a:lnTo>
                   <a:lnTo>
-                    <a:pt x="437116" y="221059"/>
+                    <a:pt x="0" y="203023"/>
                   </a:lnTo>
                   <a:close/>
                 </a:path>
@@ -6226,7 +6463,7 @@
             <a:solidFill>
               <a:srgbClr val="9E9D9B"/>
             </a:solidFill>
-            <a:ln w="7817" cap="rnd">
+            <a:ln w="6200" cap="rnd">
               <a:solidFill>
                 <a:srgbClr val="040000"/>
               </a:solidFill>
@@ -6236,14 +6473,14 @@
         </p:sp>
         <p:sp>
           <p:nvSpPr>
-            <p:cNvPr id="102" name="right Lever column 2 row 7 7"/>
+            <p:cNvPr id="112" name="right Lever column 2 row 7 6"/>
             <p:cNvSpPr/>
             <p:nvPr/>
           </p:nvSpPr>
           <p:spPr>
             <a:xfrm>
-              <a:off x="8288295" y="4510034"/>
-              <a:ext cx="257955" cy="16259"/>
+              <a:off x="8103513" y="4810956"/>
+              <a:ext cx="150291" cy="29232"/>
             </a:xfrm>
             <a:custGeom>
               <a:avLst/>
@@ -6252,18 +6489,18 @@
               <a:cxnLst/>
               <a:rect l="0" t="0" r="r" b="b"/>
               <a:pathLst>
-                <a:path w="257955" h="16259" fill="norm">
-                  <a:moveTo>
-                    <a:pt x="0" y="0"/>
+                <a:path w="150291" h="29232" fill="norm">
+                  <a:moveTo>
+                    <a:pt x="150291" y="0"/>
                   </a:moveTo>
                   <a:lnTo>
-                    <a:pt x="257955" y="0"/>
+                    <a:pt x="0" y="16336"/>
                   </a:lnTo>
                   <a:lnTo>
-                    <a:pt x="257955" y="16259"/>
+                    <a:pt x="0" y="29232"/>
                   </a:lnTo>
                   <a:lnTo>
-                    <a:pt x="0" y="16259"/>
+                    <a:pt x="150291" y="12896"/>
                   </a:lnTo>
                   <a:close/>
                 </a:path>
@@ -6272,7 +6509,7 @@
             <a:solidFill>
               <a:srgbClr val="9E9D9B"/>
             </a:solidFill>
-            <a:ln w="7817" cap="rnd">
+            <a:ln w="6200" cap="rnd">
               <a:solidFill>
                 <a:srgbClr val="040000"/>
               </a:solidFill>
@@ -6282,14 +6519,14 @@
         </p:sp>
         <p:sp>
           <p:nvSpPr>
-            <p:cNvPr id="103" name="right Lever column 2 row 7 8"/>
+            <p:cNvPr id="113" name="right Lever column 2 row 7 7"/>
             <p:cNvSpPr/>
             <p:nvPr/>
           </p:nvSpPr>
           <p:spPr>
             <a:xfrm>
-              <a:off x="8109134" y="4288975"/>
-              <a:ext cx="437116" cy="221059"/>
+              <a:off x="8103513" y="4624268"/>
+              <a:ext cx="254675" cy="203023"/>
             </a:xfrm>
             <a:custGeom>
               <a:avLst/>
@@ -6298,21 +6535,21 @@
               <a:cxnLst/>
               <a:rect l="0" t="0" r="r" b="b"/>
               <a:pathLst>
-                <a:path w="437116" h="221059" fill="norm">
-                  <a:moveTo>
-                    <a:pt x="437116" y="221059"/>
+                <a:path w="254675" h="203023" fill="norm">
+                  <a:moveTo>
+                    <a:pt x="0" y="203023"/>
                   </a:moveTo>
                   <a:lnTo>
-                    <a:pt x="179161" y="221059"/>
+                    <a:pt x="150291" y="186687"/>
                   </a:lnTo>
                   <a:lnTo>
-                    <a:pt x="0" y="0"/>
+                    <a:pt x="254675" y="0"/>
                   </a:lnTo>
                   <a:lnTo>
-                    <a:pt x="252014" y="0"/>
+                    <a:pt x="107845" y="15960"/>
                   </a:lnTo>
                   <a:lnTo>
-                    <a:pt x="437116" y="221059"/>
+                    <a:pt x="0" y="203023"/>
                   </a:lnTo>
                   <a:close/>
                 </a:path>
@@ -6321,7 +6558,7 @@
             <a:solidFill>
               <a:srgbClr val="9E9D9B"/>
             </a:solidFill>
-            <a:ln w="7817" cap="rnd">
+            <a:ln w="6200" cap="rnd">
               <a:solidFill>
                 <a:srgbClr val="040000"/>
               </a:solidFill>
@@ -6331,14 +6568,14 @@
         </p:sp>
         <p:sp>
           <p:nvSpPr>
-            <p:cNvPr id="104" name="right Lever column 2 row 7 9"/>
+            <p:cNvPr id="114" name="right Lever column 2 row 7 8"/>
             <p:cNvSpPr/>
             <p:nvPr/>
           </p:nvSpPr>
           <p:spPr>
             <a:xfrm>
-              <a:off x="8109134" y="4288975"/>
-              <a:ext cx="179161" cy="237318"/>
+              <a:off x="8253804" y="4624268"/>
+              <a:ext cx="104384" cy="199584"/>
             </a:xfrm>
             <a:custGeom>
               <a:avLst/>
@@ -6347,21 +6584,21 @@
               <a:cxnLst/>
               <a:rect l="0" t="0" r="r" b="b"/>
               <a:pathLst>
-                <a:path w="179161" h="237318" fill="norm">
-                  <a:moveTo>
-                    <a:pt x="0" y="0"/>
+                <a:path w="104384" h="199584" fill="norm">
+                  <a:moveTo>
+                    <a:pt x="104384" y="0"/>
                   </a:moveTo>
                   <a:lnTo>
-                    <a:pt x="179161" y="220747"/>
+                    <a:pt x="0" y="186439"/>
                   </a:lnTo>
                   <a:lnTo>
-                    <a:pt x="179161" y="237318"/>
+                    <a:pt x="0" y="199584"/>
                   </a:lnTo>
                   <a:lnTo>
-                    <a:pt x="0" y="16259"/>
+                    <a:pt x="104384" y="12896"/>
                   </a:lnTo>
                   <a:lnTo>
-                    <a:pt x="0" y="0"/>
+                    <a:pt x="104384" y="0"/>
                   </a:lnTo>
                   <a:close/>
                 </a:path>
@@ -6370,7 +6607,7 @@
             <a:solidFill>
               <a:srgbClr val="9E9D9B"/>
             </a:solidFill>
-            <a:ln w="7817" cap="rnd">
+            <a:ln w="6200" cap="rnd">
               <a:solidFill>
                 <a:srgbClr val="040000"/>
               </a:solidFill>
@@ -6381,28 +6618,28 @@
       </p:grpSp>
       <p:grpSp>
         <p:nvGrpSpPr>
-          <p:cNvPr id="105" name="Box glass ceiling"/>
+          <p:cNvPr id="115" name="Box outer frame"/>
           <p:cNvGrpSpPr/>
           <p:nvPr/>
         </p:nvGrpSpPr>
         <p:grpSpPr>
           <a:xfrm>
-            <a:off x="9325" y="9325"/>
-            <a:ext cx="5772923" cy="661329"/>
-            <a:chOff x="3209725" y="590350"/>
-            <a:chExt cx="5772923" cy="661329"/>
+            <a:off x="0" y="0"/>
+            <a:ext cx="5791200" cy="5791200"/>
+            <a:chOff x="3200400" y="581025"/>
+            <a:chExt cx="5791200" cy="5791200"/>
           </a:xfrm>
         </p:grpSpPr>
         <p:sp>
           <p:nvSpPr>
-            <p:cNvPr id="106" name="Box glass ceiling 94"/>
+            <p:cNvPr id="116" name="Box outer frame 103"/>
             <p:cNvSpPr/>
             <p:nvPr/>
           </p:nvSpPr>
           <p:spPr>
             <a:xfrm>
-              <a:off x="3209725" y="590350"/>
-              <a:ext cx="5772550" cy="661329"/>
+              <a:off x="3200400" y="581025"/>
+              <a:ext cx="5791200" cy="38100"/>
             </a:xfrm>
             <a:custGeom>
               <a:avLst/>
@@ -6411,30 +6648,25 @@
               <a:cxnLst/>
               <a:rect l="0" t="0" r="r" b="b"/>
               <a:pathLst>
-                <a:path w="5772550" h="661329" fill="norm">
-                  <a:moveTo>
-                    <a:pt x="4764704" y="0"/>
+                <a:path w="5791200" h="38100" fill="norm">
+                  <a:moveTo>
+                    <a:pt x="0" y="0"/>
                   </a:moveTo>
                   <a:lnTo>
-                    <a:pt x="5772550" y="661329"/>
+                    <a:pt x="5791200" y="0"/>
                   </a:lnTo>
                   <a:lnTo>
-                    <a:pt x="0" y="661329"/>
+                    <a:pt x="5791200" y="38100"/>
                   </a:lnTo>
                   <a:lnTo>
-                    <a:pt x="1007846" y="0"/>
-                  </a:lnTo>
-                  <a:lnTo>
-                    <a:pt x="4764704" y="0"/>
+                    <a:pt x="0" y="38100"/>
                   </a:lnTo>
                   <a:close/>
                 </a:path>
               </a:pathLst>
             </a:custGeom>
             <a:solidFill>
-              <a:srgbClr val="F3F9FB">
-                <a:alpha val="50000"/>
-              </a:srgbClr>
+              <a:srgbClr val="040000"/>
             </a:solidFill>
             <a:ln w="0" cap="rnd">
               <a:noFill/>
@@ -6444,14 +6676,14 @@
         </p:sp>
         <p:sp>
           <p:nvSpPr>
-            <p:cNvPr id="107" name="Box glass ceiling 95"/>
+            <p:cNvPr id="117" name="Box outer frame 104"/>
             <p:cNvSpPr/>
             <p:nvPr/>
           </p:nvSpPr>
           <p:spPr>
             <a:xfrm>
-              <a:off x="3209725" y="590350"/>
-              <a:ext cx="5772923" cy="661329"/>
+              <a:off x="3200400" y="6334125"/>
+              <a:ext cx="5791200" cy="38100"/>
             </a:xfrm>
             <a:custGeom>
               <a:avLst/>
@@ -6460,48 +6692,25 @@
               <a:cxnLst/>
               <a:rect l="0" t="0" r="r" b="b"/>
               <a:pathLst>
-                <a:path w="5772923" h="661329" fill="norm">
-                  <a:moveTo>
-                    <a:pt x="4759109" y="18650"/>
+                <a:path w="5791200" h="38100" fill="norm">
+                  <a:moveTo>
+                    <a:pt x="0" y="0"/>
                   </a:moveTo>
                   <a:lnTo>
-                    <a:pt x="5710259" y="642679"/>
+                    <a:pt x="5791200" y="0"/>
                   </a:lnTo>
                   <a:lnTo>
-                    <a:pt x="62291" y="642679"/>
+                    <a:pt x="5791200" y="38100"/>
                   </a:lnTo>
                   <a:lnTo>
-                    <a:pt x="1013441" y="18650"/>
-                  </a:lnTo>
-                  <a:lnTo>
-                    <a:pt x="4758736" y="18650"/>
-                  </a:lnTo>
-                  <a:moveTo>
-                    <a:pt x="4764704" y="0"/>
-                  </a:moveTo>
-                  <a:lnTo>
-                    <a:pt x="1008219" y="0"/>
-                  </a:lnTo>
-                  <a:lnTo>
-                    <a:pt x="0" y="661329"/>
-                  </a:lnTo>
-                  <a:lnTo>
-                    <a:pt x="5772923" y="661329"/>
-                  </a:lnTo>
-                  <a:lnTo>
-                    <a:pt x="4764704" y="0"/>
-                  </a:lnTo>
-                  <a:lnTo>
-                    <a:pt x="4764704" y="0"/>
+                    <a:pt x="0" y="38100"/>
                   </a:lnTo>
                   <a:close/>
                 </a:path>
               </a:pathLst>
             </a:custGeom>
             <a:solidFill>
-              <a:srgbClr val="C1DBDF">
-                <a:alpha val="70000"/>
-              </a:srgbClr>
+              <a:srgbClr val="040000"/>
             </a:solidFill>
             <a:ln w="0" cap="rnd">
               <a:noFill/>
@@ -6511,14 +6720,14 @@
         </p:sp>
         <p:sp>
           <p:nvSpPr>
-            <p:cNvPr id="108" name="Box glass ceiling 96"/>
+            <p:cNvPr id="118" name="Box outer frame 105"/>
             <p:cNvSpPr/>
             <p:nvPr/>
           </p:nvSpPr>
           <p:spPr>
             <a:xfrm>
-              <a:off x="3209725" y="590350"/>
-              <a:ext cx="5772550" cy="661329"/>
+              <a:off x="3200400" y="581025"/>
+              <a:ext cx="38100" cy="5791200"/>
             </a:xfrm>
             <a:custGeom>
               <a:avLst/>
@@ -6527,60 +6736,42 @@
               <a:cxnLst/>
               <a:rect l="0" t="0" r="r" b="b"/>
               <a:pathLst>
-                <a:path w="5772550" h="661329" fill="none">
-                  <a:moveTo>
-                    <a:pt x="4764704" y="0"/>
+                <a:path w="38100" h="5791200" fill="norm">
+                  <a:moveTo>
+                    <a:pt x="0" y="0"/>
                   </a:moveTo>
                   <a:lnTo>
-                    <a:pt x="5772550" y="661329"/>
+                    <a:pt x="38100" y="0"/>
                   </a:lnTo>
                   <a:lnTo>
-                    <a:pt x="0" y="661329"/>
+                    <a:pt x="38100" y="5791200"/>
                   </a:lnTo>
                   <a:lnTo>
-                    <a:pt x="1007846" y="0"/>
-                  </a:lnTo>
-                  <a:lnTo>
-                    <a:pt x="4764704" y="0"/>
+                    <a:pt x="0" y="5791200"/>
                   </a:lnTo>
                   <a:close/>
                 </a:path>
               </a:pathLst>
             </a:custGeom>
-            <a:noFill/>
-            <a:ln w="9325" cap="rnd">
-              <a:solidFill>
-                <a:srgbClr val="6F7C7E"/>
-              </a:solidFill>
+            <a:solidFill>
+              <a:srgbClr val="040000"/>
+            </a:solidFill>
+            <a:ln w="0" cap="rnd">
+              <a:noFill/>
               <a:round/>
             </a:ln>
           </p:spPr>
         </p:sp>
-      </p:grpSp>
-      <p:grpSp>
-        <p:nvGrpSpPr>
-          <p:cNvPr id="109" name="Box outer frame"/>
-          <p:cNvGrpSpPr/>
-          <p:nvPr/>
-        </p:nvGrpSpPr>
-        <p:grpSpPr>
-          <a:xfrm>
-            <a:off x="9325" y="670654"/>
-            <a:ext cx="5772550" cy="4473764"/>
-            <a:chOff x="3209725" y="1251679"/>
-            <a:chExt cx="5772550" cy="4473764"/>
-          </a:xfrm>
-        </p:grpSpPr>
         <p:sp>
           <p:nvSpPr>
-            <p:cNvPr id="110" name="Box outer frame 97"/>
+            <p:cNvPr id="119" name="Box outer frame 106"/>
             <p:cNvSpPr/>
             <p:nvPr/>
           </p:nvSpPr>
           <p:spPr>
             <a:xfrm>
-              <a:off x="3209725" y="1251679"/>
-              <a:ext cx="5772550" cy="4473764"/>
+              <a:off x="8953500" y="581025"/>
+              <a:ext cx="38100" cy="5791200"/>
             </a:xfrm>
             <a:custGeom>
               <a:avLst/>
@@ -6589,42 +6780,62 @@
               <a:cxnLst/>
               <a:rect l="0" t="0" r="r" b="b"/>
               <a:pathLst>
-                <a:path w="5772550" h="4473764" fill="norm">
-                  <a:moveTo>
-                    <a:pt x="5772550" y="4354031"/>
+                <a:path w="38100" h="5791200" fill="norm">
+                  <a:moveTo>
+                    <a:pt x="0" y="0"/>
                   </a:moveTo>
                   <a:lnTo>
-                    <a:pt x="5772550" y="0"/>
+                    <a:pt x="38100" y="0"/>
                   </a:lnTo>
                   <a:lnTo>
-                    <a:pt x="5639762" y="0"/>
+                    <a:pt x="38100" y="5791200"/>
                   </a:lnTo>
                   <a:lnTo>
-                    <a:pt x="5638643" y="4354031"/>
+                    <a:pt x="0" y="5791200"/>
+                  </a:lnTo>
+                  <a:close/>
+                </a:path>
+              </a:pathLst>
+            </a:custGeom>
+            <a:solidFill>
+              <a:srgbClr val="040000"/>
+            </a:solidFill>
+            <a:ln w="0" cap="rnd">
+              <a:noFill/>
+              <a:round/>
+            </a:ln>
+          </p:spPr>
+        </p:sp>
+        <p:sp>
+          <p:nvSpPr>
+            <p:cNvPr id="120" name="Box outer frame 107"/>
+            <p:cNvSpPr/>
+            <p:nvPr/>
+          </p:nvSpPr>
+          <p:spPr>
+            <a:xfrm>
+              <a:off x="3209925" y="590550"/>
+              <a:ext cx="5772150" cy="19050"/>
+            </a:xfrm>
+            <a:custGeom>
+              <a:avLst/>
+              <a:gdLst/>
+              <a:ahLst/>
+              <a:cxnLst/>
+              <a:rect l="0" t="0" r="r" b="b"/>
+              <a:pathLst>
+                <a:path w="5772150" h="19050" fill="norm">
+                  <a:moveTo>
+                    <a:pt x="0" y="0"/>
+                  </a:moveTo>
+                  <a:lnTo>
+                    <a:pt x="5772150" y="0"/>
                   </a:lnTo>
                   <a:lnTo>
-                    <a:pt x="134280" y="4354031"/>
+                    <a:pt x="5772150" y="19050"/>
                   </a:lnTo>
                   <a:lnTo>
-                    <a:pt x="132788" y="0"/>
-                  </a:lnTo>
-                  <a:lnTo>
-                    <a:pt x="0" y="0"/>
-                  </a:lnTo>
-                  <a:lnTo>
-                    <a:pt x="0" y="4354031"/>
-                  </a:lnTo>
-                  <a:lnTo>
-                    <a:pt x="0" y="4473764"/>
-                  </a:lnTo>
-                  <a:lnTo>
-                    <a:pt x="5772550" y="4473764"/>
-                  </a:lnTo>
-                  <a:lnTo>
-                    <a:pt x="5772550" y="4354031"/>
-                  </a:lnTo>
-                  <a:lnTo>
-                    <a:pt x="5772550" y="4354031"/>
+                    <a:pt x="0" y="19050"/>
                   </a:lnTo>
                   <a:close/>
                 </a:path>
@@ -6633,10 +6844,140 @@
             <a:solidFill>
               <a:srgbClr val="EFEEEB"/>
             </a:solidFill>
-            <a:ln w="18650" cap="rnd">
-              <a:solidFill>
-                <a:srgbClr val="040000"/>
-              </a:solidFill>
+            <a:ln w="0" cap="rnd">
+              <a:noFill/>
+              <a:round/>
+            </a:ln>
+          </p:spPr>
+        </p:sp>
+        <p:sp>
+          <p:nvSpPr>
+            <p:cNvPr id="121" name="Box outer frame 108"/>
+            <p:cNvSpPr/>
+            <p:nvPr/>
+          </p:nvSpPr>
+          <p:spPr>
+            <a:xfrm>
+              <a:off x="3209925" y="6343650"/>
+              <a:ext cx="5772150" cy="19050"/>
+            </a:xfrm>
+            <a:custGeom>
+              <a:avLst/>
+              <a:gdLst/>
+              <a:ahLst/>
+              <a:cxnLst/>
+              <a:rect l="0" t="0" r="r" b="b"/>
+              <a:pathLst>
+                <a:path w="5772150" h="19050" fill="norm">
+                  <a:moveTo>
+                    <a:pt x="0" y="0"/>
+                  </a:moveTo>
+                  <a:lnTo>
+                    <a:pt x="5772150" y="0"/>
+                  </a:lnTo>
+                  <a:lnTo>
+                    <a:pt x="5772150" y="19050"/>
+                  </a:lnTo>
+                  <a:lnTo>
+                    <a:pt x="0" y="19050"/>
+                  </a:lnTo>
+                  <a:close/>
+                </a:path>
+              </a:pathLst>
+            </a:custGeom>
+            <a:solidFill>
+              <a:srgbClr val="EFEEEB"/>
+            </a:solidFill>
+            <a:ln w="0" cap="rnd">
+              <a:noFill/>
+              <a:round/>
+            </a:ln>
+          </p:spPr>
+        </p:sp>
+        <p:sp>
+          <p:nvSpPr>
+            <p:cNvPr id="122" name="Box outer frame 109"/>
+            <p:cNvSpPr/>
+            <p:nvPr/>
+          </p:nvSpPr>
+          <p:spPr>
+            <a:xfrm>
+              <a:off x="3209925" y="590550"/>
+              <a:ext cx="19050" cy="5772150"/>
+            </a:xfrm>
+            <a:custGeom>
+              <a:avLst/>
+              <a:gdLst/>
+              <a:ahLst/>
+              <a:cxnLst/>
+              <a:rect l="0" t="0" r="r" b="b"/>
+              <a:pathLst>
+                <a:path w="19050" h="5772150" fill="norm">
+                  <a:moveTo>
+                    <a:pt x="0" y="0"/>
+                  </a:moveTo>
+                  <a:lnTo>
+                    <a:pt x="19050" y="0"/>
+                  </a:lnTo>
+                  <a:lnTo>
+                    <a:pt x="19050" y="5772150"/>
+                  </a:lnTo>
+                  <a:lnTo>
+                    <a:pt x="0" y="5772150"/>
+                  </a:lnTo>
+                  <a:close/>
+                </a:path>
+              </a:pathLst>
+            </a:custGeom>
+            <a:solidFill>
+              <a:srgbClr val="EFEEEB"/>
+            </a:solidFill>
+            <a:ln w="0" cap="rnd">
+              <a:noFill/>
+              <a:round/>
+            </a:ln>
+          </p:spPr>
+        </p:sp>
+        <p:sp>
+          <p:nvSpPr>
+            <p:cNvPr id="123" name="Box outer frame 110"/>
+            <p:cNvSpPr/>
+            <p:nvPr/>
+          </p:nvSpPr>
+          <p:spPr>
+            <a:xfrm>
+              <a:off x="8963025" y="590550"/>
+              <a:ext cx="19050" cy="5772150"/>
+            </a:xfrm>
+            <a:custGeom>
+              <a:avLst/>
+              <a:gdLst/>
+              <a:ahLst/>
+              <a:cxnLst/>
+              <a:rect l="0" t="0" r="r" b="b"/>
+              <a:pathLst>
+                <a:path w="19050" h="5772150" fill="norm">
+                  <a:moveTo>
+                    <a:pt x="0" y="0"/>
+                  </a:moveTo>
+                  <a:lnTo>
+                    <a:pt x="19050" y="0"/>
+                  </a:lnTo>
+                  <a:lnTo>
+                    <a:pt x="19050" y="5772150"/>
+                  </a:lnTo>
+                  <a:lnTo>
+                    <a:pt x="0" y="5772150"/>
+                  </a:lnTo>
+                  <a:close/>
+                </a:path>
+              </a:pathLst>
+            </a:custGeom>
+            <a:solidFill>
+              <a:srgbClr val="EFEEEB"/>
+            </a:solidFill>
+            <a:ln w="0" cap="rnd">
+              <a:noFill/>
               <a:round/>
             </a:ln>
           </p:spPr>
@@ -6644,7 +6985,7 @@
       </p:grpSp>
       <p:grpSp>
         <p:nvGrpSpPr>
-          <p:cNvPr id="111" name="Rat"/>
+          <p:cNvPr id="124" name="Rat"/>
           <p:cNvGrpSpPr/>
           <p:nvPr/>
         </p:nvGrpSpPr>
@@ -6658,7 +6999,7 @@
         </p:grpSpPr>
         <p:sp>
           <p:nvSpPr>
-            <p:cNvPr id="112" name="LE rat nose Outline 1"/>
+            <p:cNvPr id="125" name="LE rat nose Outline 1"/>
             <p:cNvSpPr/>
             <p:nvPr/>
           </p:nvSpPr>
@@ -6698,7 +7039,7 @@
         </p:sp>
         <p:sp>
           <p:nvSpPr>
-            <p:cNvPr id="113" name="LE rat nose Outline 2"/>
+            <p:cNvPr id="126" name="LE rat nose Outline 2"/>
             <p:cNvSpPr/>
             <p:nvPr/>
           </p:nvSpPr>
@@ -8528,7 +8869,7 @@
         </p:sp>
         <p:sp>
           <p:nvSpPr>
-            <p:cNvPr id="114" name="LE rat nose White fur 3"/>
+            <p:cNvPr id="127" name="LE rat nose White fur 3"/>
             <p:cNvSpPr/>
             <p:nvPr/>
           </p:nvSpPr>
@@ -8573,7 +8914,7 @@
         </p:sp>
         <p:sp>
           <p:nvSpPr>
-            <p:cNvPr id="115" name="LE rat nose White fur 4"/>
+            <p:cNvPr id="128" name="LE rat nose White fur 4"/>
             <p:cNvSpPr/>
             <p:nvPr/>
           </p:nvSpPr>
@@ -9168,7 +9509,7 @@
         </p:sp>
         <p:sp>
           <p:nvSpPr>
-            <p:cNvPr id="116" name="LE rat nose Skin 5"/>
+            <p:cNvPr id="129" name="LE rat nose Skin 5"/>
             <p:cNvSpPr/>
             <p:nvPr/>
           </p:nvSpPr>
@@ -9233,7 +9574,7 @@
         </p:sp>
         <p:sp>
           <p:nvSpPr>
-            <p:cNvPr id="117" name="LE rat nose Skin 6"/>
+            <p:cNvPr id="130" name="LE rat nose Skin 6"/>
             <p:cNvSpPr/>
             <p:nvPr/>
           </p:nvSpPr>
@@ -9458,7 +9799,7 @@
         </p:sp>
         <p:sp>
           <p:nvSpPr>
-            <p:cNvPr id="118" name="LE rat nose Skin 7"/>
+            <p:cNvPr id="131" name="LE rat nose Skin 7"/>
             <p:cNvSpPr/>
             <p:nvPr/>
           </p:nvSpPr>
@@ -9768,7 +10109,7 @@
         </p:sp>
         <p:sp>
           <p:nvSpPr>
-            <p:cNvPr id="119" name="LE rat nose Skin 8"/>
+            <p:cNvPr id="132" name="LE rat nose Skin 8"/>
             <p:cNvSpPr/>
             <p:nvPr/>
           </p:nvSpPr>
@@ -10523,7 +10864,7 @@
         </p:sp>
         <p:sp>
           <p:nvSpPr>
-            <p:cNvPr id="120" name="LE rat nose Skin 9"/>
+            <p:cNvPr id="133" name="LE rat nose Skin 9"/>
             <p:cNvSpPr/>
             <p:nvPr/>
           </p:nvSpPr>
@@ -10643,7 +10984,7 @@
         </p:sp>
         <p:sp>
           <p:nvSpPr>
-            <p:cNvPr id="121" name="LE rat nose Skin shading 10"/>
+            <p:cNvPr id="134" name="LE rat nose Skin shading 10"/>
             <p:cNvSpPr/>
             <p:nvPr/>
           </p:nvSpPr>
@@ -10698,7 +11039,7 @@
         </p:sp>
         <p:sp>
           <p:nvSpPr>
-            <p:cNvPr id="122" name="LE rat nose Skin shading 11"/>
+            <p:cNvPr id="135" name="LE rat nose Skin shading 11"/>
             <p:cNvSpPr/>
             <p:nvPr/>
           </p:nvSpPr>
@@ -10833,7 +11174,7 @@
         </p:sp>
         <p:sp>
           <p:nvSpPr>
-            <p:cNvPr id="123" name="LE rat nose Skin shading 12"/>
+            <p:cNvPr id="136" name="LE rat nose Skin shading 12"/>
             <p:cNvSpPr/>
             <p:nvPr/>
           </p:nvSpPr>
@@ -10938,7 +11279,7 @@
         </p:sp>
         <p:sp>
           <p:nvSpPr>
-            <p:cNvPr id="124" name="LE rat nose Skin shading 13"/>
+            <p:cNvPr id="137" name="LE rat nose Skin shading 13"/>
             <p:cNvSpPr/>
             <p:nvPr/>
           </p:nvSpPr>
@@ -11003,7 +11344,7 @@
         </p:sp>
         <p:sp>
           <p:nvSpPr>
-            <p:cNvPr id="125" name="LE rat nose Skin shading 14"/>
+            <p:cNvPr id="138" name="LE rat nose Skin shading 14"/>
             <p:cNvSpPr/>
             <p:nvPr/>
           </p:nvSpPr>
@@ -11118,7 +11459,7 @@
         </p:sp>
         <p:sp>
           <p:nvSpPr>
-            <p:cNvPr id="126" name="LE rat nose Skin shading 15"/>
+            <p:cNvPr id="139" name="LE rat nose Skin shading 15"/>
             <p:cNvSpPr/>
             <p:nvPr/>
           </p:nvSpPr>
@@ -11368,7 +11709,7 @@
         </p:sp>
         <p:sp>
           <p:nvSpPr>
-            <p:cNvPr id="127" name="LE rat nose Charcoal shading 16"/>
+            <p:cNvPr id="140" name="LE rat nose Charcoal shading 16"/>
             <p:cNvSpPr/>
             <p:nvPr/>
           </p:nvSpPr>
@@ -11583,7 +11924,7 @@
         </p:sp>
         <p:sp>
           <p:nvSpPr>
-            <p:cNvPr id="128" name="LE rat nose Charcoal shading 17"/>
+            <p:cNvPr id="141" name="LE rat nose Charcoal shading 17"/>
             <p:cNvSpPr/>
             <p:nvPr/>
           </p:nvSpPr>
@@ -11708,7 +12049,7 @@
         </p:sp>
         <p:sp>
           <p:nvSpPr>
-            <p:cNvPr id="129" name="LE rat nose Charcoal shading 18"/>
+            <p:cNvPr id="142" name="LE rat nose Charcoal shading 18"/>
             <p:cNvSpPr/>
             <p:nvPr/>
           </p:nvSpPr>
@@ -12926,7 +13267,7 @@
         </p:sp>
         <p:sp>
           <p:nvSpPr>
-            <p:cNvPr id="130" name="LE rat nose Eye and fur detail 19"/>
+            <p:cNvPr id="143" name="LE rat nose Eye and fur detail 19"/>
             <p:cNvSpPr/>
             <p:nvPr/>
           </p:nvSpPr>

--- a/docs/reference-style.pptx
+++ b/docs/reference-style.pptx
@@ -10,7 +10,7 @@
   <p:sldIdLst>
     <p:sldId xmlns:r="http://schemas.openxmlformats.org/officeDocument/2006/relationships" id="256" r:id="Rc4578536c6514910"/>
   </p:sldIdLst>
-  <p:sldSz cx="5791200" cy="5791200" type="custom"/>
+  <p:sldSz cx="5791200" cy="5153743" type="custom"/>
   <p:notesSz cx="6858000" cy="9144000"/>
 </p:presentation>
 </file>
@@ -1060,28 +1060,28 @@
       </p:grpSpPr>
       <p:grpSp>
         <p:nvGrpSpPr>
-          <p:cNvPr id="2" name="Box glass ceiling"/>
+          <p:cNvPr id="2" name="Box back"/>
           <p:cNvGrpSpPr/>
           <p:nvPr/>
         </p:nvGrpSpPr>
         <p:grpSpPr>
           <a:xfrm>
-            <a:off x="38100" y="38100"/>
-            <a:ext cx="5715000" cy="857250"/>
-            <a:chOff x="3238500" y="619125"/>
-            <a:chExt cx="5715000" cy="857250"/>
+            <a:off x="1154435" y="9325"/>
+            <a:ext cx="3482329" cy="3684122"/>
+            <a:chOff x="4354835" y="590350"/>
+            <a:chExt cx="3482329" cy="3684122"/>
           </a:xfrm>
         </p:grpSpPr>
         <p:sp>
           <p:nvSpPr>
-            <p:cNvPr id="3" name="Box glass ceiling 0"/>
+            <p:cNvPr id="3" name="Box back 0"/>
             <p:cNvSpPr/>
             <p:nvPr/>
           </p:nvSpPr>
           <p:spPr>
             <a:xfrm>
-              <a:off x="3238500" y="619125"/>
-              <a:ext cx="5715000" cy="857250"/>
+              <a:off x="4354835" y="590350"/>
+              <a:ext cx="3482329" cy="3684122"/>
             </a:xfrm>
             <a:custGeom>
               <a:avLst/>
@@ -1090,27 +1090,865 @@
               <a:cxnLst/>
               <a:rect l="0" t="0" r="r" b="b"/>
               <a:pathLst>
-                <a:path w="5715000" h="857250" fill="norm">
+                <a:path w="3482329" h="3684122" fill="norm">
                   <a:moveTo>
                     <a:pt x="0" y="0"/>
                   </a:moveTo>
                   <a:lnTo>
-                    <a:pt x="5715000" y="0"/>
+                    <a:pt x="3482329" y="0"/>
                   </a:lnTo>
                   <a:lnTo>
-                    <a:pt x="4524375" y="857250"/>
+                    <a:pt x="3482329" y="3684122"/>
                   </a:lnTo>
                   <a:lnTo>
-                    <a:pt x="1190625" y="857250"/>
+                    <a:pt x="0" y="3684122"/>
                   </a:lnTo>
                   <a:close/>
                 </a:path>
               </a:pathLst>
             </a:custGeom>
             <a:solidFill>
-              <a:srgbClr val="F3F9FB"/>
+              <a:srgbClr val="EFEEEB"/>
             </a:solidFill>
-            <a:ln w="7620" cap="rnd">
+            <a:ln w="18650" cap="rnd">
+              <a:solidFill>
+                <a:srgbClr val="040000"/>
+              </a:solidFill>
+              <a:round/>
+            </a:ln>
+          </p:spPr>
+        </p:sp>
+      </p:grpSp>
+      <p:grpSp>
+        <p:nvGrpSpPr>
+          <p:cNvPr id="4" name="left wall"/>
+          <p:cNvGrpSpPr/>
+          <p:nvPr/>
+        </p:nvGrpSpPr>
+        <p:grpSpPr>
+          <a:xfrm>
+            <a:off x="142113" y="9325"/>
+            <a:ext cx="1012322" cy="5015360"/>
+            <a:chOff x="3342513" y="590350"/>
+            <a:chExt cx="1012322" cy="5015360"/>
+          </a:xfrm>
+        </p:grpSpPr>
+        <p:sp>
+          <p:nvSpPr>
+            <p:cNvPr id="5" name="left wall 1"/>
+            <p:cNvSpPr/>
+            <p:nvPr/>
+          </p:nvSpPr>
+          <p:spPr>
+            <a:xfrm>
+              <a:off x="3342513" y="590350"/>
+              <a:ext cx="1012322" cy="5015360"/>
+            </a:xfrm>
+            <a:custGeom>
+              <a:avLst/>
+              <a:gdLst/>
+              <a:ahLst/>
+              <a:cxnLst/>
+              <a:rect l="0" t="0" r="r" b="b"/>
+              <a:pathLst>
+                <a:path w="1012322" h="5015360" fill="norm">
+                  <a:moveTo>
+                    <a:pt x="0" y="661329"/>
+                  </a:moveTo>
+                  <a:lnTo>
+                    <a:pt x="0" y="5015360"/>
+                  </a:lnTo>
+                  <a:lnTo>
+                    <a:pt x="1012322" y="3775134"/>
+                  </a:lnTo>
+                  <a:lnTo>
+                    <a:pt x="1012322" y="0"/>
+                  </a:lnTo>
+                  <a:lnTo>
+                    <a:pt x="0" y="661329"/>
+                  </a:lnTo>
+                  <a:close/>
+                </a:path>
+              </a:pathLst>
+            </a:custGeom>
+            <a:solidFill>
+              <a:srgbClr val="D5D3D1"/>
+            </a:solidFill>
+            <a:ln w="0" cap="rnd">
+              <a:noFill/>
+              <a:round/>
+            </a:ln>
+          </p:spPr>
+        </p:sp>
+        <p:sp>
+          <p:nvSpPr>
+            <p:cNvPr id="6" name="left wall 2"/>
+            <p:cNvSpPr/>
+            <p:nvPr/>
+          </p:nvSpPr>
+          <p:spPr>
+            <a:xfrm>
+              <a:off x="3342513" y="590350"/>
+              <a:ext cx="1012322" cy="5015360"/>
+            </a:xfrm>
+            <a:custGeom>
+              <a:avLst/>
+              <a:gdLst/>
+              <a:ahLst/>
+              <a:cxnLst/>
+              <a:rect l="0" t="0" r="r" b="b"/>
+              <a:pathLst>
+                <a:path w="1012322" h="5015360" fill="none">
+                  <a:moveTo>
+                    <a:pt x="0" y="661329"/>
+                  </a:moveTo>
+                  <a:lnTo>
+                    <a:pt x="0" y="5015360"/>
+                  </a:lnTo>
+                  <a:lnTo>
+                    <a:pt x="1012322" y="3775134"/>
+                  </a:lnTo>
+                  <a:lnTo>
+                    <a:pt x="1012322" y="0"/>
+                  </a:lnTo>
+                  <a:lnTo>
+                    <a:pt x="0" y="661329"/>
+                  </a:lnTo>
+                  <a:close/>
+                </a:path>
+              </a:pathLst>
+            </a:custGeom>
+            <a:noFill/>
+            <a:ln w="18650" cap="rnd">
+              <a:solidFill>
+                <a:srgbClr val="040000"/>
+              </a:solidFill>
+              <a:round/>
+            </a:ln>
+          </p:spPr>
+        </p:sp>
+      </p:grpSp>
+      <p:grpSp>
+        <p:nvGrpSpPr>
+          <p:cNvPr id="7" name="right wall"/>
+          <p:cNvGrpSpPr/>
+          <p:nvPr/>
+        </p:nvGrpSpPr>
+        <p:grpSpPr>
+          <a:xfrm>
+            <a:off x="4636765" y="9325"/>
+            <a:ext cx="1012322" cy="5015360"/>
+            <a:chOff x="7837165" y="590350"/>
+            <a:chExt cx="1012322" cy="5015360"/>
+          </a:xfrm>
+        </p:grpSpPr>
+        <p:sp>
+          <p:nvSpPr>
+            <p:cNvPr id="8" name="right wall 3"/>
+            <p:cNvSpPr/>
+            <p:nvPr/>
+          </p:nvSpPr>
+          <p:spPr>
+            <a:xfrm>
+              <a:off x="7846490" y="607881"/>
+              <a:ext cx="993672" cy="4971719"/>
+            </a:xfrm>
+            <a:custGeom>
+              <a:avLst/>
+              <a:gdLst/>
+              <a:ahLst/>
+              <a:cxnLst/>
+              <a:rect l="0" t="0" r="r" b="b"/>
+              <a:pathLst>
+                <a:path w="993672" h="4971719" fill="norm">
+                  <a:moveTo>
+                    <a:pt x="0" y="3754246"/>
+                  </a:moveTo>
+                  <a:lnTo>
+                    <a:pt x="0" y="0"/>
+                  </a:lnTo>
+                  <a:lnTo>
+                    <a:pt x="993672" y="649020"/>
+                  </a:lnTo>
+                  <a:lnTo>
+                    <a:pt x="993672" y="4971719"/>
+                  </a:lnTo>
+                  <a:lnTo>
+                    <a:pt x="0" y="3754246"/>
+                  </a:lnTo>
+                  <a:close/>
+                </a:path>
+              </a:pathLst>
+            </a:custGeom>
+            <a:solidFill>
+              <a:srgbClr val="D5D3D1"/>
+            </a:solidFill>
+            <a:ln w="0" cap="rnd">
+              <a:noFill/>
+              <a:round/>
+            </a:ln>
+          </p:spPr>
+        </p:sp>
+        <p:sp>
+          <p:nvSpPr>
+            <p:cNvPr id="9" name="right wall 4"/>
+            <p:cNvSpPr/>
+            <p:nvPr/>
+          </p:nvSpPr>
+          <p:spPr>
+            <a:xfrm>
+              <a:off x="7837165" y="590350"/>
+              <a:ext cx="1012322" cy="5015360"/>
+            </a:xfrm>
+            <a:custGeom>
+              <a:avLst/>
+              <a:gdLst/>
+              <a:ahLst/>
+              <a:cxnLst/>
+              <a:rect l="0" t="0" r="r" b="b"/>
+              <a:pathLst>
+                <a:path w="1012322" h="5015360" fill="norm">
+                  <a:moveTo>
+                    <a:pt x="18650" y="34689"/>
+                  </a:moveTo>
+                  <a:lnTo>
+                    <a:pt x="993672" y="671400"/>
+                  </a:lnTo>
+                  <a:lnTo>
+                    <a:pt x="993672" y="4963140"/>
+                  </a:lnTo>
+                  <a:lnTo>
+                    <a:pt x="18650" y="3768420"/>
+                  </a:lnTo>
+                  <a:lnTo>
+                    <a:pt x="18650" y="34689"/>
+                  </a:lnTo>
+                  <a:moveTo>
+                    <a:pt x="0" y="0"/>
+                  </a:moveTo>
+                  <a:lnTo>
+                    <a:pt x="0" y="3774761"/>
+                  </a:lnTo>
+                  <a:lnTo>
+                    <a:pt x="1012322" y="5015360"/>
+                  </a:lnTo>
+                  <a:lnTo>
+                    <a:pt x="1012322" y="661329"/>
+                  </a:lnTo>
+                  <a:lnTo>
+                    <a:pt x="0" y="0"/>
+                  </a:lnTo>
+                  <a:lnTo>
+                    <a:pt x="0" y="0"/>
+                  </a:lnTo>
+                  <a:close/>
+                </a:path>
+              </a:pathLst>
+            </a:custGeom>
+            <a:solidFill>
+              <a:srgbClr val="D4D3D0"/>
+            </a:solidFill>
+            <a:ln w="0" cap="rnd">
+              <a:noFill/>
+              <a:round/>
+            </a:ln>
+          </p:spPr>
+        </p:sp>
+        <p:sp>
+          <p:nvSpPr>
+            <p:cNvPr id="10" name="right wall 5"/>
+            <p:cNvSpPr/>
+            <p:nvPr/>
+          </p:nvSpPr>
+          <p:spPr>
+            <a:xfrm>
+              <a:off x="7837165" y="590350"/>
+              <a:ext cx="1012322" cy="5015360"/>
+            </a:xfrm>
+            <a:custGeom>
+              <a:avLst/>
+              <a:gdLst/>
+              <a:ahLst/>
+              <a:cxnLst/>
+              <a:rect l="0" t="0" r="r" b="b"/>
+              <a:pathLst>
+                <a:path w="1012322" h="5015360" fill="none">
+                  <a:moveTo>
+                    <a:pt x="1012322" y="661329"/>
+                  </a:moveTo>
+                  <a:lnTo>
+                    <a:pt x="1012322" y="5015360"/>
+                  </a:lnTo>
+                  <a:lnTo>
+                    <a:pt x="0" y="3775134"/>
+                  </a:lnTo>
+                  <a:lnTo>
+                    <a:pt x="0" y="0"/>
+                  </a:lnTo>
+                  <a:lnTo>
+                    <a:pt x="1012322" y="661329"/>
+                  </a:lnTo>
+                  <a:close/>
+                </a:path>
+              </a:pathLst>
+            </a:custGeom>
+            <a:noFill/>
+            <a:ln w="18650" cap="rnd">
+              <a:solidFill>
+                <a:srgbClr val="040000"/>
+              </a:solidFill>
+              <a:round/>
+            </a:ln>
+          </p:spPr>
+        </p:sp>
+      </p:grpSp>
+      <p:grpSp>
+        <p:nvGrpSpPr>
+          <p:cNvPr id="11" name="Box frame"/>
+          <p:cNvGrpSpPr/>
+          <p:nvPr/>
+        </p:nvGrpSpPr>
+        <p:grpSpPr>
+          <a:xfrm>
+            <a:off x="9325" y="9325"/>
+            <a:ext cx="5772550" cy="661329"/>
+            <a:chOff x="3209725" y="590350"/>
+            <a:chExt cx="5772550" cy="661329"/>
+          </a:xfrm>
+        </p:grpSpPr>
+        <p:sp>
+          <p:nvSpPr>
+            <p:cNvPr id="12" name="Box frame 6"/>
+            <p:cNvSpPr/>
+            <p:nvPr/>
+          </p:nvSpPr>
+          <p:spPr>
+            <a:xfrm>
+              <a:off x="3209725" y="590350"/>
+              <a:ext cx="1142126" cy="661329"/>
+            </a:xfrm>
+            <a:custGeom>
+              <a:avLst/>
+              <a:gdLst/>
+              <a:ahLst/>
+              <a:cxnLst/>
+              <a:rect l="0" t="0" r="r" b="b"/>
+              <a:pathLst>
+                <a:path w="1142126" h="661329" fill="norm">
+                  <a:moveTo>
+                    <a:pt x="0" y="661329"/>
+                  </a:moveTo>
+                  <a:lnTo>
+                    <a:pt x="1007846" y="0"/>
+                  </a:lnTo>
+                  <a:lnTo>
+                    <a:pt x="1142126" y="0"/>
+                  </a:lnTo>
+                  <a:lnTo>
+                    <a:pt x="132788" y="661329"/>
+                  </a:lnTo>
+                  <a:lnTo>
+                    <a:pt x="0" y="661329"/>
+                  </a:lnTo>
+                  <a:close/>
+                </a:path>
+              </a:pathLst>
+            </a:custGeom>
+            <a:solidFill>
+              <a:srgbClr val="EFEEEB"/>
+            </a:solidFill>
+            <a:ln w="0" cap="rnd">
+              <a:noFill/>
+              <a:round/>
+            </a:ln>
+          </p:spPr>
+        </p:sp>
+        <p:sp>
+          <p:nvSpPr>
+            <p:cNvPr id="13" name="Box frame 7"/>
+            <p:cNvSpPr/>
+            <p:nvPr/>
+          </p:nvSpPr>
+          <p:spPr>
+            <a:xfrm>
+              <a:off x="3209725" y="590350"/>
+              <a:ext cx="1142126" cy="661329"/>
+            </a:xfrm>
+            <a:custGeom>
+              <a:avLst/>
+              <a:gdLst/>
+              <a:ahLst/>
+              <a:cxnLst/>
+              <a:rect l="0" t="0" r="r" b="b"/>
+              <a:pathLst>
+                <a:path w="1142126" h="661329" fill="none">
+                  <a:moveTo>
+                    <a:pt x="0" y="661329"/>
+                  </a:moveTo>
+                  <a:lnTo>
+                    <a:pt x="1007846" y="0"/>
+                  </a:lnTo>
+                  <a:lnTo>
+                    <a:pt x="1142126" y="0"/>
+                  </a:lnTo>
+                  <a:lnTo>
+                    <a:pt x="132788" y="661329"/>
+                  </a:lnTo>
+                  <a:lnTo>
+                    <a:pt x="0" y="661329"/>
+                  </a:lnTo>
+                  <a:close/>
+                </a:path>
+              </a:pathLst>
+            </a:custGeom>
+            <a:noFill/>
+            <a:ln w="9325" cap="rnd">
+              <a:solidFill>
+                <a:srgbClr val="4D4D4D"/>
+              </a:solidFill>
+              <a:round/>
+            </a:ln>
+          </p:spPr>
+        </p:sp>
+        <p:sp>
+          <p:nvSpPr>
+            <p:cNvPr id="14" name="Box frame 8"/>
+            <p:cNvSpPr/>
+            <p:nvPr/>
+          </p:nvSpPr>
+          <p:spPr>
+            <a:xfrm>
+              <a:off x="7840149" y="590350"/>
+              <a:ext cx="1142126" cy="661329"/>
+            </a:xfrm>
+            <a:custGeom>
+              <a:avLst/>
+              <a:gdLst/>
+              <a:ahLst/>
+              <a:cxnLst/>
+              <a:rect l="0" t="0" r="r" b="b"/>
+              <a:pathLst>
+                <a:path w="1142126" h="661329" fill="norm">
+                  <a:moveTo>
+                    <a:pt x="1142126" y="661329"/>
+                  </a:moveTo>
+                  <a:lnTo>
+                    <a:pt x="134280" y="0"/>
+                  </a:lnTo>
+                  <a:lnTo>
+                    <a:pt x="0" y="0"/>
+                  </a:lnTo>
+                  <a:lnTo>
+                    <a:pt x="1009338" y="661329"/>
+                  </a:lnTo>
+                  <a:lnTo>
+                    <a:pt x="1142126" y="661329"/>
+                  </a:lnTo>
+                  <a:close/>
+                </a:path>
+              </a:pathLst>
+            </a:custGeom>
+            <a:solidFill>
+              <a:srgbClr val="EFEEEB"/>
+            </a:solidFill>
+            <a:ln w="0" cap="rnd">
+              <a:noFill/>
+              <a:round/>
+            </a:ln>
+          </p:spPr>
+        </p:sp>
+        <p:sp>
+          <p:nvSpPr>
+            <p:cNvPr id="15" name="Box frame 9"/>
+            <p:cNvSpPr/>
+            <p:nvPr/>
+          </p:nvSpPr>
+          <p:spPr>
+            <a:xfrm>
+              <a:off x="7840149" y="590350"/>
+              <a:ext cx="1142126" cy="661329"/>
+            </a:xfrm>
+            <a:custGeom>
+              <a:avLst/>
+              <a:gdLst/>
+              <a:ahLst/>
+              <a:cxnLst/>
+              <a:rect l="0" t="0" r="r" b="b"/>
+              <a:pathLst>
+                <a:path w="1142126" h="661329" fill="none">
+                  <a:moveTo>
+                    <a:pt x="1142126" y="661329"/>
+                  </a:moveTo>
+                  <a:lnTo>
+                    <a:pt x="134280" y="0"/>
+                  </a:lnTo>
+                  <a:lnTo>
+                    <a:pt x="0" y="0"/>
+                  </a:lnTo>
+                  <a:lnTo>
+                    <a:pt x="1009338" y="661329"/>
+                  </a:lnTo>
+                  <a:lnTo>
+                    <a:pt x="1142126" y="661329"/>
+                  </a:lnTo>
+                  <a:close/>
+                </a:path>
+              </a:pathLst>
+            </a:custGeom>
+            <a:noFill/>
+            <a:ln w="9325" cap="rnd">
+              <a:solidFill>
+                <a:srgbClr val="4D4D4D"/>
+              </a:solidFill>
+              <a:round/>
+            </a:ln>
+          </p:spPr>
+        </p:sp>
+      </p:grpSp>
+      <p:grpSp>
+        <p:nvGrpSpPr>
+          <p:cNvPr id="16" name="Floor"/>
+          <p:cNvGrpSpPr/>
+          <p:nvPr/>
+        </p:nvGrpSpPr>
+        <p:grpSpPr>
+          <a:xfrm>
+            <a:off x="142113" y="3693820"/>
+            <a:ext cx="5506974" cy="1330864"/>
+            <a:chOff x="3342513" y="4274845"/>
+            <a:chExt cx="5506974" cy="1330864"/>
+          </a:xfrm>
+        </p:grpSpPr>
+        <p:sp>
+          <p:nvSpPr>
+            <p:cNvPr id="17" name="Floor 10"/>
+            <p:cNvSpPr/>
+            <p:nvPr/>
+          </p:nvSpPr>
+          <p:spPr>
+            <a:xfrm>
+              <a:off x="3361163" y="4284170"/>
+              <a:ext cx="5469674" cy="1312214"/>
+            </a:xfrm>
+            <a:custGeom>
+              <a:avLst/>
+              <a:gdLst/>
+              <a:ahLst/>
+              <a:cxnLst/>
+              <a:rect l="0" t="0" r="r" b="b"/>
+              <a:pathLst>
+                <a:path w="5469674" h="1312214" fill="norm">
+                  <a:moveTo>
+                    <a:pt x="0" y="1312214"/>
+                  </a:moveTo>
+                  <a:lnTo>
+                    <a:pt x="998148" y="0"/>
+                  </a:lnTo>
+                  <a:lnTo>
+                    <a:pt x="4471526" y="0"/>
+                  </a:lnTo>
+                  <a:lnTo>
+                    <a:pt x="5469674" y="1312214"/>
+                  </a:lnTo>
+                  <a:lnTo>
+                    <a:pt x="0" y="1312214"/>
+                  </a:lnTo>
+                  <a:close/>
+                </a:path>
+              </a:pathLst>
+            </a:custGeom>
+            <a:solidFill>
+              <a:srgbClr val="E0DFDC"/>
+            </a:solidFill>
+            <a:ln w="0" cap="rnd">
+              <a:noFill/>
+              <a:round/>
+            </a:ln>
+          </p:spPr>
+        </p:sp>
+        <p:sp>
+          <p:nvSpPr>
+            <p:cNvPr id="18" name="Floor 11"/>
+            <p:cNvSpPr/>
+            <p:nvPr/>
+          </p:nvSpPr>
+          <p:spPr>
+            <a:xfrm>
+              <a:off x="3342513" y="4274845"/>
+              <a:ext cx="5506974" cy="1330864"/>
+            </a:xfrm>
+            <a:custGeom>
+              <a:avLst/>
+              <a:gdLst/>
+              <a:ahLst/>
+              <a:cxnLst/>
+              <a:rect l="0" t="0" r="r" b="b"/>
+              <a:pathLst>
+                <a:path w="5506974" h="1330864" fill="norm">
+                  <a:moveTo>
+                    <a:pt x="4485700" y="18650"/>
+                  </a:moveTo>
+                  <a:lnTo>
+                    <a:pt x="5469674" y="1312214"/>
+                  </a:lnTo>
+                  <a:lnTo>
+                    <a:pt x="38046" y="1312214"/>
+                  </a:lnTo>
+                  <a:lnTo>
+                    <a:pt x="1022020" y="18650"/>
+                  </a:lnTo>
+                  <a:lnTo>
+                    <a:pt x="4486073" y="18650"/>
+                  </a:lnTo>
+                  <a:moveTo>
+                    <a:pt x="4494652" y="0"/>
+                  </a:moveTo>
+                  <a:lnTo>
+                    <a:pt x="1012322" y="0"/>
+                  </a:lnTo>
+                  <a:lnTo>
+                    <a:pt x="0" y="1330864"/>
+                  </a:lnTo>
+                  <a:lnTo>
+                    <a:pt x="5506974" y="1330864"/>
+                  </a:lnTo>
+                  <a:lnTo>
+                    <a:pt x="4494652" y="0"/>
+                  </a:lnTo>
+                  <a:lnTo>
+                    <a:pt x="4494652" y="0"/>
+                  </a:lnTo>
+                  <a:close/>
+                </a:path>
+              </a:pathLst>
+            </a:custGeom>
+            <a:solidFill>
+              <a:srgbClr val="D4D3D0"/>
+            </a:solidFill>
+            <a:ln w="0" cap="rnd">
+              <a:noFill/>
+              <a:round/>
+            </a:ln>
+          </p:spPr>
+        </p:sp>
+        <p:sp>
+          <p:nvSpPr>
+            <p:cNvPr id="19" name="Floor 12"/>
+            <p:cNvSpPr/>
+            <p:nvPr/>
+          </p:nvSpPr>
+          <p:spPr>
+            <a:xfrm>
+              <a:off x="3342513" y="4274845"/>
+              <a:ext cx="5506974" cy="1330864"/>
+            </a:xfrm>
+            <a:custGeom>
+              <a:avLst/>
+              <a:gdLst/>
+              <a:ahLst/>
+              <a:cxnLst/>
+              <a:rect l="0" t="0" r="r" b="b"/>
+              <a:pathLst>
+                <a:path w="5506974" h="1330864" fill="none">
+                  <a:moveTo>
+                    <a:pt x="5506974" y="1330864"/>
+                  </a:moveTo>
+                  <a:lnTo>
+                    <a:pt x="0" y="1330864"/>
+                  </a:lnTo>
+                  <a:lnTo>
+                    <a:pt x="1012322" y="0"/>
+                  </a:lnTo>
+                  <a:lnTo>
+                    <a:pt x="4494652" y="0"/>
+                  </a:lnTo>
+                  <a:lnTo>
+                    <a:pt x="5506974" y="1330864"/>
+                  </a:lnTo>
+                  <a:close/>
+                </a:path>
+              </a:pathLst>
+            </a:custGeom>
+            <a:noFill/>
+            <a:ln w="18650" cap="rnd">
+              <a:solidFill>
+                <a:srgbClr val="040000"/>
+              </a:solidFill>
+              <a:round/>
+            </a:ln>
+          </p:spPr>
+        </p:sp>
+      </p:grpSp>
+      <p:grpSp>
+        <p:nvGrpSpPr>
+          <p:cNvPr id="20" name="Box glass ceiling"/>
+          <p:cNvGrpSpPr/>
+          <p:nvPr/>
+        </p:nvGrpSpPr>
+        <p:grpSpPr>
+          <a:xfrm>
+            <a:off x="9325" y="9325"/>
+            <a:ext cx="5772923" cy="661329"/>
+            <a:chOff x="3209725" y="590350"/>
+            <a:chExt cx="5772923" cy="661329"/>
+          </a:xfrm>
+        </p:grpSpPr>
+        <p:sp>
+          <p:nvSpPr>
+            <p:cNvPr id="21" name="Box glass ceiling 13"/>
+            <p:cNvSpPr/>
+            <p:nvPr/>
+          </p:nvSpPr>
+          <p:spPr>
+            <a:xfrm>
+              <a:off x="3209725" y="590350"/>
+              <a:ext cx="5772550" cy="661329"/>
+            </a:xfrm>
+            <a:custGeom>
+              <a:avLst/>
+              <a:gdLst/>
+              <a:ahLst/>
+              <a:cxnLst/>
+              <a:rect l="0" t="0" r="r" b="b"/>
+              <a:pathLst>
+                <a:path w="5772550" h="661329" fill="norm">
+                  <a:moveTo>
+                    <a:pt x="4764704" y="0"/>
+                  </a:moveTo>
+                  <a:lnTo>
+                    <a:pt x="5772550" y="661329"/>
+                  </a:lnTo>
+                  <a:lnTo>
+                    <a:pt x="0" y="661329"/>
+                  </a:lnTo>
+                  <a:lnTo>
+                    <a:pt x="1007846" y="0"/>
+                  </a:lnTo>
+                  <a:lnTo>
+                    <a:pt x="4764704" y="0"/>
+                  </a:lnTo>
+                  <a:close/>
+                </a:path>
+              </a:pathLst>
+            </a:custGeom>
+            <a:solidFill>
+              <a:srgbClr val="F3F9FB">
+                <a:alpha val="50000"/>
+              </a:srgbClr>
+            </a:solidFill>
+            <a:ln w="0" cap="rnd">
+              <a:noFill/>
+              <a:round/>
+            </a:ln>
+          </p:spPr>
+        </p:sp>
+        <p:sp>
+          <p:nvSpPr>
+            <p:cNvPr id="22" name="Box glass ceiling 14"/>
+            <p:cNvSpPr/>
+            <p:nvPr/>
+          </p:nvSpPr>
+          <p:spPr>
+            <a:xfrm>
+              <a:off x="3209725" y="590350"/>
+              <a:ext cx="5772923" cy="661329"/>
+            </a:xfrm>
+            <a:custGeom>
+              <a:avLst/>
+              <a:gdLst/>
+              <a:ahLst/>
+              <a:cxnLst/>
+              <a:rect l="0" t="0" r="r" b="b"/>
+              <a:pathLst>
+                <a:path w="5772923" h="661329" fill="norm">
+                  <a:moveTo>
+                    <a:pt x="4759109" y="18650"/>
+                  </a:moveTo>
+                  <a:lnTo>
+                    <a:pt x="5710259" y="642679"/>
+                  </a:lnTo>
+                  <a:lnTo>
+                    <a:pt x="62291" y="642679"/>
+                  </a:lnTo>
+                  <a:lnTo>
+                    <a:pt x="1013441" y="18650"/>
+                  </a:lnTo>
+                  <a:lnTo>
+                    <a:pt x="4758736" y="18650"/>
+                  </a:lnTo>
+                  <a:moveTo>
+                    <a:pt x="4764704" y="0"/>
+                  </a:moveTo>
+                  <a:lnTo>
+                    <a:pt x="1008219" y="0"/>
+                  </a:lnTo>
+                  <a:lnTo>
+                    <a:pt x="0" y="661329"/>
+                  </a:lnTo>
+                  <a:lnTo>
+                    <a:pt x="5772923" y="661329"/>
+                  </a:lnTo>
+                  <a:lnTo>
+                    <a:pt x="4764704" y="0"/>
+                  </a:lnTo>
+                  <a:lnTo>
+                    <a:pt x="4764704" y="0"/>
+                  </a:lnTo>
+                  <a:close/>
+                </a:path>
+              </a:pathLst>
+            </a:custGeom>
+            <a:solidFill>
+              <a:srgbClr val="C1DBDF">
+                <a:alpha val="70000"/>
+              </a:srgbClr>
+            </a:solidFill>
+            <a:ln w="0" cap="rnd">
+              <a:noFill/>
+              <a:round/>
+            </a:ln>
+          </p:spPr>
+        </p:sp>
+        <p:sp>
+          <p:nvSpPr>
+            <p:cNvPr id="23" name="Box glass ceiling 15"/>
+            <p:cNvSpPr/>
+            <p:nvPr/>
+          </p:nvSpPr>
+          <p:spPr>
+            <a:xfrm>
+              <a:off x="3209725" y="590350"/>
+              <a:ext cx="5772550" cy="661329"/>
+            </a:xfrm>
+            <a:custGeom>
+              <a:avLst/>
+              <a:gdLst/>
+              <a:ahLst/>
+              <a:cxnLst/>
+              <a:rect l="0" t="0" r="r" b="b"/>
+              <a:pathLst>
+                <a:path w="5772550" h="661329" fill="none">
+                  <a:moveTo>
+                    <a:pt x="4764704" y="0"/>
+                  </a:moveTo>
+                  <a:lnTo>
+                    <a:pt x="5772550" y="661329"/>
+                  </a:lnTo>
+                  <a:lnTo>
+                    <a:pt x="0" y="661329"/>
+                  </a:lnTo>
+                  <a:lnTo>
+                    <a:pt x="1007846" y="0"/>
+                  </a:lnTo>
+                  <a:lnTo>
+                    <a:pt x="4764704" y="0"/>
+                  </a:lnTo>
+                  <a:close/>
+                </a:path>
+              </a:pathLst>
+            </a:custGeom>
+            <a:noFill/>
+            <a:ln w="9325" cap="rnd">
               <a:solidFill>
                 <a:srgbClr val="6F7C7E"/>
               </a:solidFill>
@@ -1121,28 +1959,28 @@
       </p:grpSp>
       <p:grpSp>
         <p:nvGrpSpPr>
-          <p:cNvPr id="4" name="Box back"/>
+          <p:cNvPr id="24" name="left House light column 3 row 2"/>
           <p:cNvGrpSpPr/>
           <p:nvPr/>
         </p:nvGrpSpPr>
         <p:grpSpPr>
           <a:xfrm>
-            <a:off x="1228725" y="895350"/>
-            <a:ext cx="3333750" cy="3429000"/>
-            <a:chOff x="4429125" y="1476375"/>
-            <a:chExt cx="3333750" cy="3429000"/>
+            <a:off x="929610" y="655582"/>
+            <a:ext cx="521709" cy="351138"/>
+            <a:chOff x="4130010" y="1236607"/>
+            <a:chExt cx="521709" cy="351138"/>
           </a:xfrm>
         </p:grpSpPr>
         <p:sp>
           <p:nvSpPr>
-            <p:cNvPr id="5" name="Box back 1"/>
+            <p:cNvPr id="25" name="left House light column 3 row 2 3"/>
             <p:cNvSpPr/>
             <p:nvPr/>
           </p:nvSpPr>
           <p:spPr>
             <a:xfrm>
-              <a:off x="4429125" y="1476375"/>
-              <a:ext cx="3333750" cy="3429000"/>
+              <a:off x="4130010" y="1237252"/>
+              <a:ext cx="105438" cy="350493"/>
             </a:xfrm>
             <a:custGeom>
               <a:avLst/>
@@ -1151,942 +1989,45 @@
               <a:cxnLst/>
               <a:rect l="0" t="0" r="r" b="b"/>
               <a:pathLst>
-                <a:path w="3333750" h="3429000" fill="norm">
+                <a:path w="105438" h="350493" fill="norm">
                   <a:moveTo>
-                    <a:pt x="0" y="0"/>
+                    <a:pt x="105438" y="350170"/>
                   </a:moveTo>
                   <a:lnTo>
-                    <a:pt x="3333750" y="0"/>
+                    <a:pt x="56105" y="350170"/>
                   </a:lnTo>
+                  <a:cubicBezTo>
+                    <a:pt x="24828" y="350170"/>
+                    <a:pt x="0" y="272140"/>
+                    <a:pt x="0" y="175408"/>
+                  </a:cubicBezTo>
+                  <a:cubicBezTo>
+                    <a:pt x="0" y="78676"/>
+                    <a:pt x="24828" y="0"/>
+                    <a:pt x="56105" y="0"/>
+                  </a:cubicBezTo>
                   <a:lnTo>
-                    <a:pt x="3333750" y="3429000"/>
+                    <a:pt x="105438" y="0"/>
                   </a:lnTo>
-                  <a:lnTo>
-                    <a:pt x="0" y="3429000"/>
-                  </a:lnTo>
-                  <a:close/>
-                </a:path>
-              </a:pathLst>
-            </a:custGeom>
-            <a:solidFill>
-              <a:srgbClr val="EFEEEB"/>
-            </a:solidFill>
-            <a:ln w="11906" cap="rnd">
-              <a:solidFill>
-                <a:srgbClr val="040000"/>
-              </a:solidFill>
-              <a:round/>
-            </a:ln>
-          </p:spPr>
-        </p:sp>
-      </p:grpSp>
-      <p:grpSp>
-        <p:nvGrpSpPr>
-          <p:cNvPr id="6" name="Floor"/>
-          <p:cNvGrpSpPr/>
-          <p:nvPr/>
-        </p:nvGrpSpPr>
-        <p:grpSpPr>
-          <a:xfrm>
-            <a:off x="38100" y="4324350"/>
-            <a:ext cx="5715000" cy="1143000"/>
-            <a:chOff x="3238500" y="4905375"/>
-            <a:chExt cx="5715000" cy="1143000"/>
-          </a:xfrm>
-        </p:grpSpPr>
-        <p:sp>
-          <p:nvSpPr>
-            <p:cNvPr id="7" name="Floor 2"/>
-            <p:cNvSpPr/>
-            <p:nvPr/>
-          </p:nvSpPr>
-          <p:spPr>
-            <a:xfrm>
-              <a:off x="3238500" y="4905375"/>
-              <a:ext cx="5715000" cy="1143000"/>
-            </a:xfrm>
-            <a:custGeom>
-              <a:avLst/>
-              <a:gdLst/>
-              <a:ahLst/>
-              <a:cxnLst/>
-              <a:rect l="0" t="0" r="r" b="b"/>
-              <a:pathLst>
-                <a:path w="5715000" h="1143000" fill="norm">
-                  <a:moveTo>
-                    <a:pt x="1190625" y="0"/>
-                  </a:moveTo>
-                  <a:lnTo>
-                    <a:pt x="4524375" y="0"/>
-                  </a:lnTo>
-                  <a:lnTo>
-                    <a:pt x="5715000" y="1143000"/>
-                  </a:lnTo>
-                  <a:lnTo>
-                    <a:pt x="0" y="1143000"/>
-                  </a:lnTo>
-                  <a:close/>
-                </a:path>
-              </a:pathLst>
-            </a:custGeom>
-            <a:solidFill>
-              <a:srgbClr val="E0DFDC"/>
-            </a:solidFill>
-            <a:ln w="11906" cap="rnd">
-              <a:solidFill>
-                <a:srgbClr val="040000"/>
-              </a:solidFill>
-              <a:round/>
-            </a:ln>
-          </p:spPr>
-        </p:sp>
-      </p:grpSp>
-      <p:grpSp>
-        <p:nvGrpSpPr>
-          <p:cNvPr id="8" name="left wall"/>
-          <p:cNvGrpSpPr/>
-          <p:nvPr/>
-        </p:nvGrpSpPr>
-        <p:grpSpPr>
-          <a:xfrm>
-            <a:off x="38100" y="38100"/>
-            <a:ext cx="1190625" cy="5429250"/>
-            <a:chOff x="3238500" y="619125"/>
-            <a:chExt cx="1190625" cy="5429250"/>
-          </a:xfrm>
-        </p:grpSpPr>
-        <p:sp>
-          <p:nvSpPr>
-            <p:cNvPr id="9" name="left wall 3"/>
-            <p:cNvSpPr/>
-            <p:nvPr/>
-          </p:nvSpPr>
-          <p:spPr>
-            <a:xfrm>
-              <a:off x="3238500" y="619125"/>
-              <a:ext cx="1190625" cy="5429250"/>
-            </a:xfrm>
-            <a:custGeom>
-              <a:avLst/>
-              <a:gdLst/>
-              <a:ahLst/>
-              <a:cxnLst/>
-              <a:rect l="0" t="0" r="r" b="b"/>
-              <a:pathLst>
-                <a:path w="1190625" h="5429250" fill="norm">
-                  <a:moveTo>
-                    <a:pt x="0" y="0"/>
-                  </a:moveTo>
-                  <a:lnTo>
-                    <a:pt x="1190625" y="857250"/>
-                  </a:lnTo>
-                  <a:lnTo>
-                    <a:pt x="1190625" y="4286250"/>
-                  </a:lnTo>
-                  <a:lnTo>
-                    <a:pt x="0" y="5429250"/>
-                  </a:lnTo>
-                  <a:close/>
-                </a:path>
-              </a:pathLst>
-            </a:custGeom>
-            <a:solidFill>
-              <a:srgbClr val="D5D3D1"/>
-            </a:solidFill>
-            <a:ln w="11906" cap="rnd">
-              <a:solidFill>
-                <a:srgbClr val="040000"/>
-              </a:solidFill>
-              <a:round/>
-            </a:ln>
-          </p:spPr>
-        </p:sp>
-      </p:grpSp>
-      <p:grpSp>
-        <p:nvGrpSpPr>
-          <p:cNvPr id="10" name="right wall"/>
-          <p:cNvGrpSpPr/>
-          <p:nvPr/>
-        </p:nvGrpSpPr>
-        <p:grpSpPr>
-          <a:xfrm>
-            <a:off x="4562475" y="38100"/>
-            <a:ext cx="1190625" cy="5429250"/>
-            <a:chOff x="7762875" y="619125"/>
-            <a:chExt cx="1190625" cy="5429250"/>
-          </a:xfrm>
-        </p:grpSpPr>
-        <p:sp>
-          <p:nvSpPr>
-            <p:cNvPr id="11" name="right wall 4"/>
-            <p:cNvSpPr/>
-            <p:nvPr/>
-          </p:nvSpPr>
-          <p:spPr>
-            <a:xfrm>
-              <a:off x="7762875" y="619125"/>
-              <a:ext cx="1190625" cy="5429250"/>
-            </a:xfrm>
-            <a:custGeom>
-              <a:avLst/>
-              <a:gdLst/>
-              <a:ahLst/>
-              <a:cxnLst/>
-              <a:rect l="0" t="0" r="r" b="b"/>
-              <a:pathLst>
-                <a:path w="1190625" h="5429250" fill="norm">
-                  <a:moveTo>
-                    <a:pt x="0" y="857250"/>
-                  </a:moveTo>
-                  <a:lnTo>
-                    <a:pt x="1190625" y="0"/>
-                  </a:lnTo>
-                  <a:lnTo>
-                    <a:pt x="1190625" y="5429250"/>
-                  </a:lnTo>
-                  <a:lnTo>
-                    <a:pt x="0" y="4286250"/>
-                  </a:lnTo>
-                  <a:close/>
-                </a:path>
-              </a:pathLst>
-            </a:custGeom>
-            <a:solidFill>
-              <a:srgbClr val="D5D3D1"/>
-            </a:solidFill>
-            <a:ln w="11906" cap="rnd">
-              <a:solidFill>
-                <a:srgbClr val="040000"/>
-              </a:solidFill>
-              <a:round/>
-            </a:ln>
-          </p:spPr>
-        </p:sp>
-      </p:grpSp>
-      <p:grpSp>
-        <p:nvGrpSpPr>
-          <p:cNvPr id="12" name="Box frame"/>
-          <p:cNvGrpSpPr/>
-          <p:nvPr/>
-        </p:nvGrpSpPr>
-        <p:grpSpPr>
-          <a:xfrm>
-            <a:off x="38100" y="38100"/>
-            <a:ext cx="5715095" cy="5715000"/>
-            <a:chOff x="3238500" y="619125"/>
-            <a:chExt cx="5715095" cy="5715000"/>
-          </a:xfrm>
-        </p:grpSpPr>
-        <p:sp>
-          <p:nvSpPr>
-            <p:cNvPr id="13" name="Box frame 5"/>
-            <p:cNvSpPr/>
-            <p:nvPr/>
-          </p:nvSpPr>
-          <p:spPr>
-            <a:xfrm>
-              <a:off x="3238500" y="619125"/>
-              <a:ext cx="5715000" cy="95"/>
-            </a:xfrm>
-            <a:custGeom>
-              <a:avLst/>
-              <a:gdLst/>
-              <a:ahLst/>
-              <a:cxnLst/>
-              <a:rect l="0" t="0" r="r" b="b"/>
-              <a:pathLst>
-                <a:path w="5715000" h="95" fill="none">
-                  <a:moveTo>
-                    <a:pt x="0" y="0"/>
-                  </a:moveTo>
-                  <a:lnTo>
-                    <a:pt x="5715000" y="0"/>
-                  </a:lnTo>
-                </a:path>
-              </a:pathLst>
-            </a:custGeom>
-            <a:noFill/>
-            <a:ln w="23813" cap="rnd">
-              <a:solidFill>
-                <a:srgbClr val="040000"/>
-              </a:solidFill>
-              <a:round/>
-            </a:ln>
-          </p:spPr>
-        </p:sp>
-        <p:sp>
-          <p:nvSpPr>
-            <p:cNvPr id="14" name="Box frame 6"/>
-            <p:cNvSpPr/>
-            <p:nvPr/>
-          </p:nvSpPr>
-          <p:spPr>
-            <a:xfrm>
-              <a:off x="3238500" y="619125"/>
-              <a:ext cx="5715000" cy="95"/>
-            </a:xfrm>
-            <a:custGeom>
-              <a:avLst/>
-              <a:gdLst/>
-              <a:ahLst/>
-              <a:cxnLst/>
-              <a:rect l="0" t="0" r="r" b="b"/>
-              <a:pathLst>
-                <a:path w="5715000" h="95" fill="none">
-                  <a:moveTo>
-                    <a:pt x="0" y="0"/>
-                  </a:moveTo>
-                  <a:lnTo>
-                    <a:pt x="5715000" y="0"/>
-                  </a:lnTo>
-                </a:path>
-              </a:pathLst>
-            </a:custGeom>
-            <a:noFill/>
-            <a:ln w="9525" cap="rnd">
-              <a:solidFill>
-                <a:srgbClr val="EFEEEB"/>
-              </a:solidFill>
-              <a:round/>
-            </a:ln>
-          </p:spPr>
-        </p:sp>
-        <p:sp>
-          <p:nvSpPr>
-            <p:cNvPr id="15" name="Box frame 7"/>
-            <p:cNvSpPr/>
-            <p:nvPr/>
-          </p:nvSpPr>
-          <p:spPr>
-            <a:xfrm>
-              <a:off x="3238500" y="619125"/>
-              <a:ext cx="1190625" cy="857250"/>
-            </a:xfrm>
-            <a:custGeom>
-              <a:avLst/>
-              <a:gdLst/>
-              <a:ahLst/>
-              <a:cxnLst/>
-              <a:rect l="0" t="0" r="r" b="b"/>
-              <a:pathLst>
-                <a:path w="1190625" h="857250" fill="none">
-                  <a:moveTo>
-                    <a:pt x="0" y="0"/>
-                  </a:moveTo>
-                  <a:lnTo>
-                    <a:pt x="1190625" y="857250"/>
-                  </a:lnTo>
-                </a:path>
-              </a:pathLst>
-            </a:custGeom>
-            <a:noFill/>
-            <a:ln w="23813" cap="rnd">
-              <a:solidFill>
-                <a:srgbClr val="040000"/>
-              </a:solidFill>
-              <a:round/>
-            </a:ln>
-          </p:spPr>
-        </p:sp>
-        <p:sp>
-          <p:nvSpPr>
-            <p:cNvPr id="16" name="Box frame 8"/>
-            <p:cNvSpPr/>
-            <p:nvPr/>
-          </p:nvSpPr>
-          <p:spPr>
-            <a:xfrm>
-              <a:off x="3238500" y="619125"/>
-              <a:ext cx="1190625" cy="857250"/>
-            </a:xfrm>
-            <a:custGeom>
-              <a:avLst/>
-              <a:gdLst/>
-              <a:ahLst/>
-              <a:cxnLst/>
-              <a:rect l="0" t="0" r="r" b="b"/>
-              <a:pathLst>
-                <a:path w="1190625" h="857250" fill="none">
-                  <a:moveTo>
-                    <a:pt x="0" y="0"/>
-                  </a:moveTo>
-                  <a:lnTo>
-                    <a:pt x="1190625" y="857250"/>
-                  </a:lnTo>
-                </a:path>
-              </a:pathLst>
-            </a:custGeom>
-            <a:noFill/>
-            <a:ln w="9525" cap="rnd">
-              <a:solidFill>
-                <a:srgbClr val="EFEEEB"/>
-              </a:solidFill>
-              <a:round/>
-            </a:ln>
-          </p:spPr>
-        </p:sp>
-        <p:sp>
-          <p:nvSpPr>
-            <p:cNvPr id="17" name="Box frame 9"/>
-            <p:cNvSpPr/>
-            <p:nvPr/>
-          </p:nvSpPr>
-          <p:spPr>
-            <a:xfrm>
-              <a:off x="7762875" y="619125"/>
-              <a:ext cx="1190625" cy="857250"/>
-            </a:xfrm>
-            <a:custGeom>
-              <a:avLst/>
-              <a:gdLst/>
-              <a:ahLst/>
-              <a:cxnLst/>
-              <a:rect l="0" t="0" r="r" b="b"/>
-              <a:pathLst>
-                <a:path w="1190625" h="857250" fill="none">
-                  <a:moveTo>
-                    <a:pt x="0" y="857250"/>
-                  </a:moveTo>
-                  <a:lnTo>
-                    <a:pt x="1190625" y="0"/>
-                  </a:lnTo>
-                </a:path>
-              </a:pathLst>
-            </a:custGeom>
-            <a:noFill/>
-            <a:ln w="23813" cap="rnd">
-              <a:solidFill>
-                <a:srgbClr val="040000"/>
-              </a:solidFill>
-              <a:round/>
-            </a:ln>
-          </p:spPr>
-        </p:sp>
-        <p:sp>
-          <p:nvSpPr>
-            <p:cNvPr id="18" name="Box frame 10"/>
-            <p:cNvSpPr/>
-            <p:nvPr/>
-          </p:nvSpPr>
-          <p:spPr>
-            <a:xfrm>
-              <a:off x="7762875" y="619125"/>
-              <a:ext cx="1190625" cy="857250"/>
-            </a:xfrm>
-            <a:custGeom>
-              <a:avLst/>
-              <a:gdLst/>
-              <a:ahLst/>
-              <a:cxnLst/>
-              <a:rect l="0" t="0" r="r" b="b"/>
-              <a:pathLst>
-                <a:path w="1190625" h="857250" fill="none">
-                  <a:moveTo>
-                    <a:pt x="0" y="857250"/>
-                  </a:moveTo>
-                  <a:lnTo>
-                    <a:pt x="1190625" y="0"/>
-                  </a:lnTo>
-                </a:path>
-              </a:pathLst>
-            </a:custGeom>
-            <a:noFill/>
-            <a:ln w="9525" cap="rnd">
-              <a:solidFill>
-                <a:srgbClr val="EFEEEB"/>
-              </a:solidFill>
-              <a:round/>
-            </a:ln>
-          </p:spPr>
-        </p:sp>
-        <p:sp>
-          <p:nvSpPr>
-            <p:cNvPr id="19" name="Box frame 11"/>
-            <p:cNvSpPr/>
-            <p:nvPr/>
-          </p:nvSpPr>
-          <p:spPr>
-            <a:xfrm>
-              <a:off x="4429125" y="1476375"/>
-              <a:ext cx="3333750" cy="95"/>
-            </a:xfrm>
-            <a:custGeom>
-              <a:avLst/>
-              <a:gdLst/>
-              <a:ahLst/>
-              <a:cxnLst/>
-              <a:rect l="0" t="0" r="r" b="b"/>
-              <a:pathLst>
-                <a:path w="3333750" h="95" fill="none">
-                  <a:moveTo>
-                    <a:pt x="0" y="0"/>
-                  </a:moveTo>
-                  <a:lnTo>
-                    <a:pt x="3333750" y="0"/>
-                  </a:lnTo>
-                </a:path>
-              </a:pathLst>
-            </a:custGeom>
-            <a:noFill/>
-            <a:ln w="23813" cap="rnd">
-              <a:solidFill>
-                <a:srgbClr val="040000"/>
-              </a:solidFill>
-              <a:round/>
-            </a:ln>
-          </p:spPr>
-        </p:sp>
-        <p:sp>
-          <p:nvSpPr>
-            <p:cNvPr id="20" name="Box frame 12"/>
-            <p:cNvSpPr/>
-            <p:nvPr/>
-          </p:nvSpPr>
-          <p:spPr>
-            <a:xfrm>
-              <a:off x="4429125" y="1476375"/>
-              <a:ext cx="3333750" cy="95"/>
-            </a:xfrm>
-            <a:custGeom>
-              <a:avLst/>
-              <a:gdLst/>
-              <a:ahLst/>
-              <a:cxnLst/>
-              <a:rect l="0" t="0" r="r" b="b"/>
-              <a:pathLst>
-                <a:path w="3333750" h="95" fill="none">
-                  <a:moveTo>
-                    <a:pt x="0" y="0"/>
-                  </a:moveTo>
-                  <a:lnTo>
-                    <a:pt x="3333750" y="0"/>
-                  </a:lnTo>
-                </a:path>
-              </a:pathLst>
-            </a:custGeom>
-            <a:noFill/>
-            <a:ln w="9525" cap="rnd">
-              <a:solidFill>
-                <a:srgbClr val="EFEEEB"/>
-              </a:solidFill>
-              <a:round/>
-            </a:ln>
-          </p:spPr>
-        </p:sp>
-        <p:sp>
-          <p:nvSpPr>
-            <p:cNvPr id="21" name="Box frame 13"/>
-            <p:cNvSpPr/>
-            <p:nvPr/>
-          </p:nvSpPr>
-          <p:spPr>
-            <a:xfrm>
-              <a:off x="4429125" y="1476375"/>
-              <a:ext cx="95" cy="3429000"/>
-            </a:xfrm>
-            <a:custGeom>
-              <a:avLst/>
-              <a:gdLst/>
-              <a:ahLst/>
-              <a:cxnLst/>
-              <a:rect l="0" t="0" r="r" b="b"/>
-              <a:pathLst>
-                <a:path w="95" h="3429000" fill="none">
-                  <a:moveTo>
-                    <a:pt x="0" y="0"/>
-                  </a:moveTo>
-                  <a:lnTo>
-                    <a:pt x="0" y="3429000"/>
-                  </a:lnTo>
-                </a:path>
-              </a:pathLst>
-            </a:custGeom>
-            <a:noFill/>
-            <a:ln w="23813" cap="rnd">
-              <a:solidFill>
-                <a:srgbClr val="040000"/>
-              </a:solidFill>
-              <a:round/>
-            </a:ln>
-          </p:spPr>
-        </p:sp>
-        <p:sp>
-          <p:nvSpPr>
-            <p:cNvPr id="22" name="Box frame 14"/>
-            <p:cNvSpPr/>
-            <p:nvPr/>
-          </p:nvSpPr>
-          <p:spPr>
-            <a:xfrm>
-              <a:off x="4429125" y="1476375"/>
-              <a:ext cx="95" cy="3429000"/>
-            </a:xfrm>
-            <a:custGeom>
-              <a:avLst/>
-              <a:gdLst/>
-              <a:ahLst/>
-              <a:cxnLst/>
-              <a:rect l="0" t="0" r="r" b="b"/>
-              <a:pathLst>
-                <a:path w="95" h="3429000" fill="none">
-                  <a:moveTo>
-                    <a:pt x="0" y="0"/>
-                  </a:moveTo>
-                  <a:lnTo>
-                    <a:pt x="0" y="3429000"/>
-                  </a:lnTo>
-                </a:path>
-              </a:pathLst>
-            </a:custGeom>
-            <a:noFill/>
-            <a:ln w="9525" cap="rnd">
-              <a:solidFill>
-                <a:srgbClr val="EFEEEB"/>
-              </a:solidFill>
-              <a:round/>
-            </a:ln>
-          </p:spPr>
-        </p:sp>
-        <p:sp>
-          <p:nvSpPr>
-            <p:cNvPr id="23" name="Box frame 15"/>
-            <p:cNvSpPr/>
-            <p:nvPr/>
-          </p:nvSpPr>
-          <p:spPr>
-            <a:xfrm>
-              <a:off x="7762875" y="1476375"/>
-              <a:ext cx="95" cy="3429000"/>
-            </a:xfrm>
-            <a:custGeom>
-              <a:avLst/>
-              <a:gdLst/>
-              <a:ahLst/>
-              <a:cxnLst/>
-              <a:rect l="0" t="0" r="r" b="b"/>
-              <a:pathLst>
-                <a:path w="95" h="3429000" fill="none">
-                  <a:moveTo>
-                    <a:pt x="0" y="0"/>
-                  </a:moveTo>
-                  <a:lnTo>
-                    <a:pt x="0" y="3429000"/>
-                  </a:lnTo>
-                </a:path>
-              </a:pathLst>
-            </a:custGeom>
-            <a:noFill/>
-            <a:ln w="23813" cap="rnd">
-              <a:solidFill>
-                <a:srgbClr val="040000"/>
-              </a:solidFill>
-              <a:round/>
-            </a:ln>
-          </p:spPr>
-        </p:sp>
-        <p:sp>
-          <p:nvSpPr>
-            <p:cNvPr id="24" name="Box frame 16"/>
-            <p:cNvSpPr/>
-            <p:nvPr/>
-          </p:nvSpPr>
-          <p:spPr>
-            <a:xfrm>
-              <a:off x="7762875" y="1476375"/>
-              <a:ext cx="95" cy="3429000"/>
-            </a:xfrm>
-            <a:custGeom>
-              <a:avLst/>
-              <a:gdLst/>
-              <a:ahLst/>
-              <a:cxnLst/>
-              <a:rect l="0" t="0" r="r" b="b"/>
-              <a:pathLst>
-                <a:path w="95" h="3429000" fill="none">
-                  <a:moveTo>
-                    <a:pt x="0" y="0"/>
-                  </a:moveTo>
-                  <a:lnTo>
-                    <a:pt x="0" y="3429000"/>
-                  </a:lnTo>
-                </a:path>
-              </a:pathLst>
-            </a:custGeom>
-            <a:noFill/>
-            <a:ln w="9525" cap="rnd">
-              <a:solidFill>
-                <a:srgbClr val="EFEEEB"/>
-              </a:solidFill>
-              <a:round/>
-            </a:ln>
-          </p:spPr>
-        </p:sp>
-        <p:sp>
-          <p:nvSpPr>
-            <p:cNvPr id="25" name="Box frame 17"/>
-            <p:cNvSpPr/>
-            <p:nvPr/>
-          </p:nvSpPr>
-          <p:spPr>
-            <a:xfrm>
-              <a:off x="3238500" y="619125"/>
-              <a:ext cx="95" cy="5429250"/>
-            </a:xfrm>
-            <a:custGeom>
-              <a:avLst/>
-              <a:gdLst/>
-              <a:ahLst/>
-              <a:cxnLst/>
-              <a:rect l="0" t="0" r="r" b="b"/>
-              <a:pathLst>
-                <a:path w="95" h="5429250" fill="none">
-                  <a:moveTo>
-                    <a:pt x="0" y="0"/>
-                  </a:moveTo>
-                  <a:lnTo>
-                    <a:pt x="0" y="5429250"/>
-                  </a:lnTo>
-                </a:path>
-              </a:pathLst>
-            </a:custGeom>
-            <a:noFill/>
-            <a:ln w="23813" cap="rnd">
-              <a:solidFill>
-                <a:srgbClr val="040000"/>
-              </a:solidFill>
-              <a:round/>
-            </a:ln>
-          </p:spPr>
-        </p:sp>
-        <p:sp>
-          <p:nvSpPr>
-            <p:cNvPr id="26" name="Box frame 18"/>
-            <p:cNvSpPr/>
-            <p:nvPr/>
-          </p:nvSpPr>
-          <p:spPr>
-            <a:xfrm>
-              <a:off x="3238500" y="619125"/>
-              <a:ext cx="95" cy="5429250"/>
-            </a:xfrm>
-            <a:custGeom>
-              <a:avLst/>
-              <a:gdLst/>
-              <a:ahLst/>
-              <a:cxnLst/>
-              <a:rect l="0" t="0" r="r" b="b"/>
-              <a:pathLst>
-                <a:path w="95" h="5429250" fill="none">
-                  <a:moveTo>
-                    <a:pt x="0" y="0"/>
-                  </a:moveTo>
-                  <a:lnTo>
-                    <a:pt x="0" y="5429250"/>
-                  </a:lnTo>
-                </a:path>
-              </a:pathLst>
-            </a:custGeom>
-            <a:noFill/>
-            <a:ln w="9525" cap="rnd">
-              <a:solidFill>
-                <a:srgbClr val="EFEEEB"/>
-              </a:solidFill>
-              <a:round/>
-            </a:ln>
-          </p:spPr>
-        </p:sp>
-        <p:sp>
-          <p:nvSpPr>
-            <p:cNvPr id="27" name="Box frame 19"/>
-            <p:cNvSpPr/>
-            <p:nvPr/>
-          </p:nvSpPr>
-          <p:spPr>
-            <a:xfrm>
-              <a:off x="8953500" y="619125"/>
-              <a:ext cx="95" cy="5429250"/>
-            </a:xfrm>
-            <a:custGeom>
-              <a:avLst/>
-              <a:gdLst/>
-              <a:ahLst/>
-              <a:cxnLst/>
-              <a:rect l="0" t="0" r="r" b="b"/>
-              <a:pathLst>
-                <a:path w="95" h="5429250" fill="none">
-                  <a:moveTo>
-                    <a:pt x="0" y="0"/>
-                  </a:moveTo>
-                  <a:lnTo>
-                    <a:pt x="0" y="5429250"/>
-                  </a:lnTo>
-                </a:path>
-              </a:pathLst>
-            </a:custGeom>
-            <a:noFill/>
-            <a:ln w="23813" cap="rnd">
-              <a:solidFill>
-                <a:srgbClr val="040000"/>
-              </a:solidFill>
-              <a:round/>
-            </a:ln>
-          </p:spPr>
-        </p:sp>
-        <p:sp>
-          <p:nvSpPr>
-            <p:cNvPr id="28" name="Box frame 20"/>
-            <p:cNvSpPr/>
-            <p:nvPr/>
-          </p:nvSpPr>
-          <p:spPr>
-            <a:xfrm>
-              <a:off x="8953500" y="619125"/>
-              <a:ext cx="95" cy="5429250"/>
-            </a:xfrm>
-            <a:custGeom>
-              <a:avLst/>
-              <a:gdLst/>
-              <a:ahLst/>
-              <a:cxnLst/>
-              <a:rect l="0" t="0" r="r" b="b"/>
-              <a:pathLst>
-                <a:path w="95" h="5429250" fill="none">
-                  <a:moveTo>
-                    <a:pt x="0" y="0"/>
-                  </a:moveTo>
-                  <a:lnTo>
-                    <a:pt x="0" y="5429250"/>
-                  </a:lnTo>
-                </a:path>
-              </a:pathLst>
-            </a:custGeom>
-            <a:noFill/>
-            <a:ln w="9525" cap="rnd">
-              <a:solidFill>
-                <a:srgbClr val="EFEEEB"/>
-              </a:solidFill>
-              <a:round/>
-            </a:ln>
-          </p:spPr>
-        </p:sp>
-        <p:sp>
-          <p:nvSpPr>
-            <p:cNvPr id="29" name="Box frame 21"/>
-            <p:cNvSpPr/>
-            <p:nvPr/>
-          </p:nvSpPr>
-          <p:spPr>
-            <a:xfrm>
-              <a:off x="3238500" y="6048375"/>
-              <a:ext cx="5715000" cy="285750"/>
-            </a:xfrm>
-            <a:custGeom>
-              <a:avLst/>
-              <a:gdLst/>
-              <a:ahLst/>
-              <a:cxnLst/>
-              <a:rect l="0" t="0" r="r" b="b"/>
-              <a:pathLst>
-                <a:path w="5715000" h="285750" fill="norm">
-                  <a:moveTo>
-                    <a:pt x="0" y="0"/>
-                  </a:moveTo>
-                  <a:lnTo>
-                    <a:pt x="5715000" y="0"/>
-                  </a:lnTo>
-                  <a:lnTo>
-                    <a:pt x="5715000" y="285750"/>
-                  </a:lnTo>
-                  <a:lnTo>
-                    <a:pt x="0" y="285750"/>
-                  </a:lnTo>
-                  <a:close/>
-                </a:path>
-              </a:pathLst>
-            </a:custGeom>
-            <a:solidFill>
-              <a:srgbClr val="EFEEEB"/>
-            </a:solidFill>
-            <a:ln w="11906" cap="rnd">
-              <a:solidFill>
-                <a:srgbClr val="040000"/>
-              </a:solidFill>
-              <a:round/>
-            </a:ln>
-          </p:spPr>
-        </p:sp>
-      </p:grpSp>
-      <p:grpSp>
-        <p:nvGrpSpPr>
-          <p:cNvPr id="30" name="left House light column 3 row 2"/>
-          <p:cNvGrpSpPr/>
-          <p:nvPr/>
-        </p:nvGrpSpPr>
-        <p:grpSpPr>
-          <a:xfrm>
-            <a:off x="1001899" y="1248029"/>
-            <a:ext cx="263976" cy="385136"/>
-            <a:chOff x="4202299" y="1829054"/>
-            <a:chExt cx="263976" cy="385136"/>
-          </a:xfrm>
-        </p:grpSpPr>
-        <p:sp>
-          <p:nvSpPr>
-            <p:cNvPr id="31" name="left House light column 3 row 2 4"/>
-            <p:cNvSpPr/>
-            <p:nvPr/>
-          </p:nvSpPr>
-          <p:spPr>
-            <a:xfrm>
-              <a:off x="4202299" y="1829054"/>
-              <a:ext cx="53350" cy="356247"/>
-            </a:xfrm>
-            <a:custGeom>
-              <a:avLst/>
-              <a:gdLst/>
-              <a:ahLst/>
-              <a:cxnLst/>
-              <a:rect l="0" t="0" r="r" b="b"/>
-              <a:pathLst>
-                <a:path w="53350" h="356247" fill="norm">
-                  <a:moveTo>
-                    <a:pt x="53350" y="355928"/>
-                  </a:moveTo>
-                  <a:lnTo>
-                    <a:pt x="28388" y="350501"/>
-                  </a:lnTo>
-                  <a:cubicBezTo>
-                    <a:pt x="12563" y="347061"/>
-                    <a:pt x="0" y="266992"/>
-                    <a:pt x="0" y="171119"/>
-                  </a:cubicBezTo>
-                  <a:cubicBezTo>
-                    <a:pt x="0" y="75246"/>
-                    <a:pt x="12563" y="0"/>
-                    <a:pt x="28388" y="3440"/>
-                  </a:cubicBezTo>
-                  <a:lnTo>
-                    <a:pt x="53350" y="8867"/>
-                  </a:lnTo>
-                  <a:cubicBezTo>
-                    <a:pt x="48782" y="7874"/>
-                    <a:pt x="44703" y="13059"/>
-                    <a:pt x="41114" y="23464"/>
-                  </a:cubicBezTo>
-                  <a:cubicBezTo>
-                    <a:pt x="31325" y="49459"/>
-                    <a:pt x="24799" y="107481"/>
-                    <a:pt x="24799" y="176510"/>
-                  </a:cubicBezTo>
-                  <a:cubicBezTo>
-                    <a:pt x="24799" y="245539"/>
-                    <a:pt x="31325" y="306399"/>
-                    <a:pt x="41114" y="336650"/>
-                  </a:cubicBezTo>
-                  <a:cubicBezTo>
-                    <a:pt x="44866" y="348012"/>
-                    <a:pt x="48782" y="355254"/>
-                    <a:pt x="53350" y="356247"/>
+                  <a:cubicBezTo>
+                    <a:pt x="96410" y="0"/>
+                    <a:pt x="88349" y="6126"/>
+                    <a:pt x="81255" y="17412"/>
+                  </a:cubicBezTo>
+                  <a:cubicBezTo>
+                    <a:pt x="61909" y="45787"/>
+                    <a:pt x="49011" y="105761"/>
+                    <a:pt x="49011" y="175408"/>
+                  </a:cubicBezTo>
+                  <a:cubicBezTo>
+                    <a:pt x="49011" y="245055"/>
+                    <a:pt x="61909" y="305029"/>
+                    <a:pt x="81255" y="333404"/>
+                  </a:cubicBezTo>
+                  <a:cubicBezTo>
+                    <a:pt x="88671" y="344044"/>
+                    <a:pt x="96410" y="350493"/>
+                    <a:pt x="105438" y="350493"/>
                   </a:cubicBezTo>
                   <a:close/>
                 </a:path>
@@ -2095,7 +2036,7 @@
             <a:solidFill>
               <a:srgbClr val="000000"/>
             </a:solidFill>
-            <a:ln w="9587" cap="rnd">
+            <a:ln w="9673" cap="rnd">
               <a:solidFill>
                 <a:srgbClr val="231815"/>
               </a:solidFill>
@@ -2105,14 +2046,14 @@
         </p:sp>
         <p:sp>
           <p:nvSpPr>
-            <p:cNvPr id="32" name="left House light column 3 row 2 5"/>
+            <p:cNvPr id="26" name="left House light column 3 row 2 4"/>
             <p:cNvSpPr/>
             <p:nvPr/>
           </p:nvSpPr>
           <p:spPr>
             <a:xfrm>
-              <a:off x="4227098" y="1836288"/>
-              <a:ext cx="56939" cy="351814"/>
+              <a:off x="4179021" y="1236607"/>
+              <a:ext cx="112532" cy="350493"/>
             </a:xfrm>
             <a:custGeom>
               <a:avLst/>
@@ -2121,39 +2062,39 @@
               <a:cxnLst/>
               <a:rect l="0" t="0" r="r" b="b"/>
               <a:pathLst>
-                <a:path w="56939" h="351814" fill="norm">
+                <a:path w="112532" h="350493" fill="norm">
                   <a:moveTo>
-                    <a:pt x="56939" y="181334"/>
+                    <a:pt x="112532" y="175730"/>
                   </a:moveTo>
                   <a:cubicBezTo>
-                    <a:pt x="56939" y="277207"/>
-                    <a:pt x="44377" y="351814"/>
-                    <a:pt x="28551" y="348374"/>
-                  </a:cubicBezTo>
-                  <a:cubicBezTo>
-                    <a:pt x="23983" y="347381"/>
-                    <a:pt x="19904" y="340422"/>
-                    <a:pt x="16315" y="328776"/>
-                  </a:cubicBezTo>
-                  <a:cubicBezTo>
-                    <a:pt x="6526" y="298525"/>
-                    <a:pt x="0" y="237665"/>
-                    <a:pt x="0" y="168636"/>
-                  </a:cubicBezTo>
-                  <a:cubicBezTo>
-                    <a:pt x="0" y="99608"/>
-                    <a:pt x="6526" y="41585"/>
-                    <a:pt x="16315" y="15590"/>
-                  </a:cubicBezTo>
-                  <a:cubicBezTo>
-                    <a:pt x="20067" y="5221"/>
-                    <a:pt x="23983" y="0"/>
-                    <a:pt x="28551" y="993"/>
-                  </a:cubicBezTo>
-                  <a:cubicBezTo>
-                    <a:pt x="44377" y="4433"/>
-                    <a:pt x="56939" y="84502"/>
-                    <a:pt x="56939" y="181014"/>
+                    <a:pt x="112532" y="272462"/>
+                    <a:pt x="87704" y="350493"/>
+                    <a:pt x="56427" y="350493"/>
+                  </a:cubicBezTo>
+                  <a:cubicBezTo>
+                    <a:pt x="47399" y="350493"/>
+                    <a:pt x="39338" y="344367"/>
+                    <a:pt x="32244" y="333404"/>
+                  </a:cubicBezTo>
+                  <a:cubicBezTo>
+                    <a:pt x="12898" y="305029"/>
+                    <a:pt x="0" y="245055"/>
+                    <a:pt x="0" y="175408"/>
+                  </a:cubicBezTo>
+                  <a:cubicBezTo>
+                    <a:pt x="0" y="105761"/>
+                    <a:pt x="12898" y="45787"/>
+                    <a:pt x="32244" y="17412"/>
+                  </a:cubicBezTo>
+                  <a:cubicBezTo>
+                    <a:pt x="39660" y="6126"/>
+                    <a:pt x="47399" y="0"/>
+                    <a:pt x="56427" y="0"/>
+                  </a:cubicBezTo>
+                  <a:cubicBezTo>
+                    <a:pt x="87704" y="0"/>
+                    <a:pt x="112532" y="78031"/>
+                    <a:pt x="112532" y="175408"/>
                   </a:cubicBezTo>
                   <a:close/>
                 </a:path>
@@ -2162,7 +2103,7 @@
             <a:solidFill>
               <a:srgbClr val="B3B3B3"/>
             </a:solidFill>
-            <a:ln w="9587" cap="rnd">
+            <a:ln w="9673" cap="rnd">
               <a:solidFill>
                 <a:srgbClr val="231815"/>
               </a:solidFill>
@@ -2172,14 +2113,14 @@
         </p:sp>
         <p:sp>
           <p:nvSpPr>
-            <p:cNvPr id="33" name="left House light column 3 row 2 6"/>
+            <p:cNvPr id="27" name="left House light column 3 row 2 5"/>
             <p:cNvSpPr/>
             <p:nvPr/>
           </p:nvSpPr>
           <p:spPr>
             <a:xfrm>
-              <a:off x="4271964" y="1861026"/>
-              <a:ext cx="49924" cy="118486"/>
+              <a:off x="4267692" y="1251762"/>
+              <a:ext cx="98667" cy="113822"/>
             </a:xfrm>
             <a:custGeom>
               <a:avLst/>
@@ -2188,42 +2129,42 @@
               <a:cxnLst/>
               <a:rect l="0" t="0" r="r" b="b"/>
               <a:pathLst>
-                <a:path w="49924" h="118486" fill="norm">
+                <a:path w="98667" h="113822" fill="norm">
                   <a:moveTo>
-                    <a:pt x="49761" y="118450"/>
+                    <a:pt x="98344" y="113822"/>
                   </a:moveTo>
                   <a:lnTo>
-                    <a:pt x="0" y="107633"/>
+                    <a:pt x="0" y="113822"/>
                   </a:lnTo>
                   <a:cubicBezTo>
-                    <a:pt x="326" y="100992"/>
-                    <a:pt x="653" y="95311"/>
-                    <a:pt x="1142" y="89345"/>
-                  </a:cubicBezTo>
-                  <a:cubicBezTo>
-                    <a:pt x="2284" y="72336"/>
-                    <a:pt x="4079" y="56748"/>
-                    <a:pt x="6363" y="44461"/>
-                  </a:cubicBezTo>
-                  <a:cubicBezTo>
-                    <a:pt x="10115" y="21309"/>
-                    <a:pt x="15173" y="5471"/>
-                    <a:pt x="20883" y="1599"/>
-                  </a:cubicBezTo>
-                  <a:cubicBezTo>
-                    <a:pt x="21209" y="1670"/>
-                    <a:pt x="21209" y="1030"/>
-                    <a:pt x="21536" y="1101"/>
-                  </a:cubicBezTo>
-                  <a:cubicBezTo>
-                    <a:pt x="22678" y="71"/>
-                    <a:pt x="23820" y="0"/>
-                    <a:pt x="24962" y="248"/>
-                  </a:cubicBezTo>
-                  <a:cubicBezTo>
-                    <a:pt x="36709" y="2802"/>
-                    <a:pt x="46661" y="51943"/>
-                    <a:pt x="49924" y="118486"/>
+                    <a:pt x="645" y="107050"/>
+                    <a:pt x="1290" y="101246"/>
+                    <a:pt x="2257" y="95120"/>
+                  </a:cubicBezTo>
+                  <a:cubicBezTo>
+                    <a:pt x="4514" y="77708"/>
+                    <a:pt x="8061" y="61586"/>
+                    <a:pt x="12575" y="48689"/>
+                  </a:cubicBezTo>
+                  <a:cubicBezTo>
+                    <a:pt x="19991" y="24505"/>
+                    <a:pt x="29987" y="7416"/>
+                    <a:pt x="41272" y="2257"/>
+                  </a:cubicBezTo>
+                  <a:cubicBezTo>
+                    <a:pt x="41917" y="2257"/>
+                    <a:pt x="41917" y="1612"/>
+                    <a:pt x="42562" y="1612"/>
+                  </a:cubicBezTo>
+                  <a:cubicBezTo>
+                    <a:pt x="44819" y="322"/>
+                    <a:pt x="47076" y="0"/>
+                    <a:pt x="49333" y="0"/>
+                  </a:cubicBezTo>
+                  <a:cubicBezTo>
+                    <a:pt x="72549" y="0"/>
+                    <a:pt x="92218" y="47399"/>
+                    <a:pt x="98667" y="113822"/>
                   </a:cubicBezTo>
                   <a:close/>
                 </a:path>
@@ -2232,7 +2173,7 @@
             <a:solidFill>
               <a:srgbClr val="B3B3B3"/>
             </a:solidFill>
-            <a:ln w="7989" cap="rnd">
+            <a:ln w="8061" cap="rnd">
               <a:solidFill>
                 <a:srgbClr val="4D4D4D"/>
               </a:solidFill>
@@ -2242,14 +2183,14 @@
         </p:sp>
         <p:sp>
           <p:nvSpPr>
-            <p:cNvPr id="34" name="left House light column 3 row 2 7"/>
+            <p:cNvPr id="28" name="left House light column 3 row 2 6"/>
             <p:cNvSpPr/>
             <p:nvPr/>
           </p:nvSpPr>
           <p:spPr>
             <a:xfrm>
-              <a:off x="4407379" y="1887201"/>
-              <a:ext cx="39645" cy="324683"/>
+              <a:off x="4535318" y="1251440"/>
+              <a:ext cx="78353" cy="321151"/>
             </a:xfrm>
             <a:custGeom>
               <a:avLst/>
@@ -2258,60 +2199,60 @@
               <a:cxnLst/>
               <a:rect l="0" t="0" r="r" b="b"/>
               <a:pathLst>
-                <a:path w="39645" h="324683" fill="norm">
+                <a:path w="78353" h="321151" fill="norm">
                   <a:moveTo>
-                    <a:pt x="39645" y="324683"/>
+                    <a:pt x="78353" y="321151"/>
                   </a:moveTo>
                   <a:lnTo>
-                    <a:pt x="19252" y="320250"/>
+                    <a:pt x="38048" y="321151"/>
                   </a:lnTo>
                   <a:cubicBezTo>
-                    <a:pt x="8321" y="317873"/>
-                    <a:pt x="0" y="244799"/>
-                    <a:pt x="0" y="157235"/>
-                  </a:cubicBezTo>
-                  <a:cubicBezTo>
-                    <a:pt x="0" y="140936"/>
-                    <a:pt x="326" y="125348"/>
-                    <a:pt x="816" y="110754"/>
-                  </a:cubicBezTo>
-                  <a:cubicBezTo>
-                    <a:pt x="3100" y="45737"/>
-                    <a:pt x="10278" y="0"/>
-                    <a:pt x="19089" y="1915"/>
+                    <a:pt x="16444" y="321151"/>
+                    <a:pt x="0" y="249247"/>
+                    <a:pt x="0" y="160898"/>
+                  </a:cubicBezTo>
+                  <a:cubicBezTo>
+                    <a:pt x="0" y="144453"/>
+                    <a:pt x="645" y="128654"/>
+                    <a:pt x="1612" y="113822"/>
+                  </a:cubicBezTo>
+                  <a:cubicBezTo>
+                    <a:pt x="6126" y="47721"/>
+                    <a:pt x="20314" y="0"/>
+                    <a:pt x="37726" y="0"/>
                   </a:cubicBezTo>
                   <a:lnTo>
-                    <a:pt x="39482" y="6349"/>
+                    <a:pt x="78031" y="0"/>
                   </a:lnTo>
                   <a:cubicBezTo>
-                    <a:pt x="35730" y="5533"/>
-                    <a:pt x="32304" y="13736"/>
-                    <a:pt x="29204" y="29361"/>
-                  </a:cubicBezTo>
-                  <a:cubicBezTo>
-                    <a:pt x="26267" y="43743"/>
-                    <a:pt x="23983" y="64019"/>
-                    <a:pt x="22678" y="88981"/>
-                  </a:cubicBezTo>
-                  <a:cubicBezTo>
-                    <a:pt x="22025" y="97149"/>
-                    <a:pt x="21862" y="106061"/>
-                    <a:pt x="21536" y="114938"/>
-                  </a:cubicBezTo>
-                  <a:cubicBezTo>
-                    <a:pt x="20883" y="129497"/>
-                    <a:pt x="20720" y="145121"/>
-                    <a:pt x="20720" y="161419"/>
-                  </a:cubicBezTo>
-                  <a:cubicBezTo>
-                    <a:pt x="20720" y="217345"/>
-                    <a:pt x="23820" y="267554"/>
-                    <a:pt x="29367" y="296882"/>
-                  </a:cubicBezTo>
-                  <a:cubicBezTo>
-                    <a:pt x="32467" y="313855"/>
-                    <a:pt x="35893" y="323548"/>
-                    <a:pt x="39645" y="324364"/>
+                    <a:pt x="70614" y="0"/>
+                    <a:pt x="63843" y="9028"/>
+                    <a:pt x="57717" y="25473"/>
+                  </a:cubicBezTo>
+                  <a:cubicBezTo>
+                    <a:pt x="51913" y="40628"/>
+                    <a:pt x="47399" y="61586"/>
+                    <a:pt x="44819" y="87059"/>
+                  </a:cubicBezTo>
+                  <a:cubicBezTo>
+                    <a:pt x="43529" y="95442"/>
+                    <a:pt x="43207" y="104471"/>
+                    <a:pt x="42562" y="113499"/>
+                  </a:cubicBezTo>
+                  <a:cubicBezTo>
+                    <a:pt x="41272" y="128331"/>
+                    <a:pt x="40950" y="144131"/>
+                    <a:pt x="40950" y="160575"/>
+                  </a:cubicBezTo>
+                  <a:cubicBezTo>
+                    <a:pt x="40950" y="217003"/>
+                    <a:pt x="47076" y="266981"/>
+                    <a:pt x="58039" y="295356"/>
+                  </a:cubicBezTo>
+                  <a:cubicBezTo>
+                    <a:pt x="64166" y="311800"/>
+                    <a:pt x="70937" y="320828"/>
+                    <a:pt x="78353" y="320828"/>
                   </a:cubicBezTo>
                   <a:close/>
                 </a:path>
@@ -2328,14 +2269,14 @@
         </p:sp>
         <p:sp>
           <p:nvSpPr>
-            <p:cNvPr id="35" name="left House light column 3 row 2 8"/>
+            <p:cNvPr id="29" name="left House light column 3 row 2 7"/>
             <p:cNvSpPr/>
             <p:nvPr/>
           </p:nvSpPr>
           <p:spPr>
             <a:xfrm>
-              <a:off x="4280448" y="1882049"/>
-              <a:ext cx="168044" cy="124950"/>
+              <a:off x="4284459" y="1274333"/>
+              <a:ext cx="332114" cy="91251"/>
             </a:xfrm>
             <a:custGeom>
               <a:avLst/>
@@ -2344,23 +2285,23 @@
               <a:cxnLst/>
               <a:rect l="0" t="0" r="r" b="b"/>
               <a:pathLst>
-                <a:path w="168044" h="124950" fill="norm">
+                <a:path w="332114" h="91251" fill="norm">
                   <a:moveTo>
-                    <a:pt x="167881" y="34510"/>
+                    <a:pt x="331791" y="0"/>
                   </a:moveTo>
                   <a:lnTo>
-                    <a:pt x="167881" y="124950"/>
+                    <a:pt x="331791" y="91251"/>
                   </a:lnTo>
                   <a:lnTo>
-                    <a:pt x="0" y="88454"/>
+                    <a:pt x="0" y="91251"/>
                   </a:lnTo>
                   <a:cubicBezTo>
-                    <a:pt x="2610" y="35972"/>
-                    <a:pt x="9136" y="0"/>
-                    <a:pt x="16968" y="1702"/>
+                    <a:pt x="5159" y="37726"/>
+                    <a:pt x="18057" y="0"/>
+                    <a:pt x="33534" y="0"/>
                   </a:cubicBezTo>
                   <a:lnTo>
-                    <a:pt x="168044" y="34545"/>
+                    <a:pt x="332114" y="0"/>
                   </a:lnTo>
                   <a:close/>
                 </a:path>
@@ -2379,14 +2320,14 @@
         </p:sp>
         <p:sp>
           <p:nvSpPr>
-            <p:cNvPr id="36" name="left House light column 3 row 2 9"/>
+            <p:cNvPr id="30" name="left House light column 3 row 2 8"/>
             <p:cNvSpPr/>
             <p:nvPr/>
           </p:nvSpPr>
           <p:spPr>
             <a:xfrm>
-              <a:off x="4249450" y="1853507"/>
-              <a:ext cx="216826" cy="360682"/>
+              <a:off x="4223196" y="1251762"/>
+              <a:ext cx="428524" cy="320828"/>
             </a:xfrm>
             <a:custGeom>
               <a:avLst/>
@@ -2395,76 +2336,76 @@
               <a:cxnLst/>
               <a:rect l="0" t="0" r="r" b="b"/>
               <a:pathLst>
-                <a:path w="216826" h="360682" fill="norm">
+                <a:path w="428524" h="320828" fill="norm">
                   <a:moveTo>
-                    <a:pt x="216826" y="203732"/>
+                    <a:pt x="428524" y="160575"/>
                   </a:moveTo>
                   <a:cubicBezTo>
-                    <a:pt x="216826" y="291296"/>
-                    <a:pt x="208179" y="360682"/>
-                    <a:pt x="197574" y="358377"/>
+                    <a:pt x="428524" y="248924"/>
+                    <a:pt x="411434" y="320828"/>
+                    <a:pt x="390476" y="320828"/>
                   </a:cubicBezTo>
                   <a:lnTo>
-                    <a:pt x="26104" y="321101"/>
+                    <a:pt x="51590" y="320828"/>
                   </a:lnTo>
                   <a:cubicBezTo>
-                    <a:pt x="11747" y="317979"/>
-                    <a:pt x="0" y="244160"/>
-                    <a:pt x="0" y="156596"/>
-                  </a:cubicBezTo>
-                  <a:cubicBezTo>
-                    <a:pt x="0" y="69032"/>
-                    <a:pt x="11747" y="0"/>
-                    <a:pt x="26104" y="3121"/>
+                    <a:pt x="23216" y="320828"/>
+                    <a:pt x="0" y="248924"/>
+                    <a:pt x="0" y="160575"/>
+                  </a:cubicBezTo>
+                  <a:cubicBezTo>
+                    <a:pt x="0" y="72227"/>
+                    <a:pt x="23216" y="0"/>
+                    <a:pt x="51590" y="0"/>
                   </a:cubicBezTo>
                   <a:lnTo>
-                    <a:pt x="47313" y="7732"/>
+                    <a:pt x="93508" y="0"/>
                   </a:lnTo>
                   <a:cubicBezTo>
-                    <a:pt x="46171" y="7484"/>
-                    <a:pt x="45029" y="7874"/>
-                    <a:pt x="43887" y="8585"/>
-                  </a:cubicBezTo>
-                  <a:cubicBezTo>
-                    <a:pt x="43561" y="8514"/>
-                    <a:pt x="43561" y="9153"/>
-                    <a:pt x="43235" y="9082"/>
-                  </a:cubicBezTo>
-                  <a:cubicBezTo>
-                    <a:pt x="37524" y="12954"/>
-                    <a:pt x="32304" y="28437"/>
-                    <a:pt x="28714" y="51945"/>
-                  </a:cubicBezTo>
-                  <a:cubicBezTo>
-                    <a:pt x="26430" y="64870"/>
-                    <a:pt x="24636" y="79500"/>
-                    <a:pt x="23494" y="96829"/>
-                  </a:cubicBezTo>
-                  <a:cubicBezTo>
-                    <a:pt x="22841" y="102759"/>
-                    <a:pt x="22678" y="108476"/>
-                    <a:pt x="22352" y="115116"/>
+                    <a:pt x="91251" y="0"/>
+                    <a:pt x="88994" y="645"/>
+                    <a:pt x="86737" y="1612"/>
+                  </a:cubicBezTo>
+                  <a:cubicBezTo>
+                    <a:pt x="86092" y="1612"/>
+                    <a:pt x="86092" y="2257"/>
+                    <a:pt x="85447" y="2257"/>
+                  </a:cubicBezTo>
+                  <a:cubicBezTo>
+                    <a:pt x="74161" y="7416"/>
+                    <a:pt x="63843" y="24183"/>
+                    <a:pt x="56750" y="48689"/>
+                  </a:cubicBezTo>
+                  <a:cubicBezTo>
+                    <a:pt x="52235" y="62231"/>
+                    <a:pt x="48689" y="77386"/>
+                    <a:pt x="46431" y="95120"/>
+                  </a:cubicBezTo>
+                  <a:cubicBezTo>
+                    <a:pt x="45142" y="101246"/>
+                    <a:pt x="44819" y="107050"/>
+                    <a:pt x="44174" y="113822"/>
                   </a:cubicBezTo>
                   <a:lnTo>
-                    <a:pt x="158908" y="144802"/>
+                    <a:pt x="314057" y="113822"/>
                   </a:lnTo>
                   <a:cubicBezTo>
-                    <a:pt x="161192" y="79786"/>
-                    <a:pt x="168371" y="34049"/>
-                    <a:pt x="177181" y="35964"/>
+                    <a:pt x="318571" y="47721"/>
+                    <a:pt x="332759" y="0"/>
+                    <a:pt x="350170" y="0"/>
                   </a:cubicBezTo>
                   <a:lnTo>
-                    <a:pt x="197574" y="40397"/>
+                    <a:pt x="390476" y="0"/>
                   </a:lnTo>
                   <a:cubicBezTo>
-                    <a:pt x="206221" y="42277"/>
-                    <a:pt x="213563" y="90851"/>
-                    <a:pt x="215847" y="157180"/>
-                  </a:cubicBezTo>
-                  <a:cubicBezTo>
-                    <a:pt x="216500" y="172023"/>
-                    <a:pt x="216663" y="187718"/>
-                    <a:pt x="216663" y="204016"/>
+                    <a:pt x="407565" y="0"/>
+                    <a:pt x="422075" y="47399"/>
+                    <a:pt x="426589" y="113822"/>
+                  </a:cubicBezTo>
+                  <a:cubicBezTo>
+                    <a:pt x="427879" y="128654"/>
+                    <a:pt x="428201" y="144453"/>
+                    <a:pt x="428201" y="160898"/>
                   </a:cubicBezTo>
                   <a:close/>
                 </a:path>
@@ -2473,7 +2414,7 @@
             <a:solidFill>
               <a:srgbClr val="000000"/>
             </a:solidFill>
-            <a:ln w="9587" cap="rnd">
+            <a:ln w="9673" cap="rnd">
               <a:solidFill>
                 <a:srgbClr val="231815"/>
               </a:solidFill>
@@ -2483,14 +2424,14 @@
         </p:sp>
         <p:sp>
           <p:nvSpPr>
-            <p:cNvPr id="37" name="left House light column 3 row 2 10"/>
+            <p:cNvPr id="31" name="left House light column 3 row 2 9"/>
             <p:cNvSpPr/>
             <p:nvPr/>
           </p:nvSpPr>
           <p:spPr>
             <a:xfrm>
-              <a:off x="4428099" y="1893054"/>
-              <a:ext cx="38177" cy="321136"/>
+              <a:off x="4576268" y="1251762"/>
+              <a:ext cx="75451" cy="320828"/>
             </a:xfrm>
             <a:custGeom>
               <a:avLst/>
@@ -2499,54 +2440,54 @@
               <a:cxnLst/>
               <a:rect l="0" t="0" r="r" b="b"/>
               <a:pathLst>
-                <a:path w="38177" h="321136" fill="norm">
+                <a:path w="75451" h="320828" fill="norm">
                   <a:moveTo>
-                    <a:pt x="38177" y="164186"/>
+                    <a:pt x="75451" y="160575"/>
                   </a:moveTo>
                   <a:cubicBezTo>
-                    <a:pt x="38177" y="251750"/>
-                    <a:pt x="29530" y="321136"/>
-                    <a:pt x="18925" y="318831"/>
-                  </a:cubicBezTo>
-                  <a:cubicBezTo>
-                    <a:pt x="15173" y="318015"/>
-                    <a:pt x="11747" y="308322"/>
-                    <a:pt x="8647" y="291350"/>
-                  </a:cubicBezTo>
-                  <a:cubicBezTo>
-                    <a:pt x="3263" y="262056"/>
-                    <a:pt x="0" y="212132"/>
-                    <a:pt x="0" y="155887"/>
-                  </a:cubicBezTo>
-                  <a:cubicBezTo>
-                    <a:pt x="0" y="139588"/>
-                    <a:pt x="326" y="124000"/>
-                    <a:pt x="816" y="109406"/>
-                  </a:cubicBezTo>
-                  <a:cubicBezTo>
-                    <a:pt x="1142" y="100528"/>
-                    <a:pt x="1468" y="91651"/>
-                    <a:pt x="1958" y="83448"/>
-                  </a:cubicBezTo>
-                  <a:cubicBezTo>
-                    <a:pt x="3426" y="58521"/>
-                    <a:pt x="5710" y="38245"/>
-                    <a:pt x="8484" y="23828"/>
-                  </a:cubicBezTo>
-                  <a:cubicBezTo>
-                    <a:pt x="11584" y="8203"/>
-                    <a:pt x="15010" y="0"/>
-                    <a:pt x="18762" y="816"/>
-                  </a:cubicBezTo>
-                  <a:cubicBezTo>
-                    <a:pt x="27409" y="2696"/>
-                    <a:pt x="34751" y="51269"/>
-                    <a:pt x="37035" y="117599"/>
-                  </a:cubicBezTo>
-                  <a:cubicBezTo>
-                    <a:pt x="37688" y="132441"/>
-                    <a:pt x="37851" y="148136"/>
-                    <a:pt x="37851" y="164435"/>
+                    <a:pt x="75451" y="248924"/>
+                    <a:pt x="58362" y="320828"/>
+                    <a:pt x="37403" y="320828"/>
+                  </a:cubicBezTo>
+                  <a:cubicBezTo>
+                    <a:pt x="29987" y="320828"/>
+                    <a:pt x="23216" y="311800"/>
+                    <a:pt x="17089" y="295356"/>
+                  </a:cubicBezTo>
+                  <a:cubicBezTo>
+                    <a:pt x="6449" y="266981"/>
+                    <a:pt x="0" y="217325"/>
+                    <a:pt x="0" y="160575"/>
+                  </a:cubicBezTo>
+                  <a:cubicBezTo>
+                    <a:pt x="0" y="144131"/>
+                    <a:pt x="645" y="128331"/>
+                    <a:pt x="1612" y="113499"/>
+                  </a:cubicBezTo>
+                  <a:cubicBezTo>
+                    <a:pt x="2257" y="104471"/>
+                    <a:pt x="2902" y="95442"/>
+                    <a:pt x="3869" y="87059"/>
+                  </a:cubicBezTo>
+                  <a:cubicBezTo>
+                    <a:pt x="6771" y="61586"/>
+                    <a:pt x="11285" y="40628"/>
+                    <a:pt x="16767" y="25473"/>
+                  </a:cubicBezTo>
+                  <a:cubicBezTo>
+                    <a:pt x="22893" y="9028"/>
+                    <a:pt x="29665" y="0"/>
+                    <a:pt x="37081" y="0"/>
+                  </a:cubicBezTo>
+                  <a:cubicBezTo>
+                    <a:pt x="54170" y="0"/>
+                    <a:pt x="68680" y="47399"/>
+                    <a:pt x="73194" y="113822"/>
+                  </a:cubicBezTo>
+                  <a:cubicBezTo>
+                    <a:pt x="74484" y="128654"/>
+                    <a:pt x="74806" y="144453"/>
+                    <a:pt x="74806" y="160898"/>
                   </a:cubicBezTo>
                   <a:close/>
                 </a:path>
@@ -2555,7 +2496,7 @@
             <a:solidFill>
               <a:srgbClr val="B3B3B3"/>
             </a:solidFill>
-            <a:ln w="9587" cap="rnd">
+            <a:ln w="9673" cap="rnd">
               <a:solidFill>
                 <a:srgbClr val="231815"/>
               </a:solidFill>
@@ -2566,28 +2507,28 @@
       </p:grpSp>
       <p:grpSp>
         <p:nvGrpSpPr>
-          <p:cNvPr id="38" name="left Water well column 2 row 5"/>
+          <p:cNvPr id="32" name="left Water well column 2 row 5"/>
           <p:cNvGrpSpPr/>
           <p:nvPr/>
         </p:nvGrpSpPr>
         <p:grpSpPr>
           <a:xfrm>
-            <a:off x="536178" y="2711750"/>
-            <a:ext cx="273844" cy="1048957"/>
-            <a:chOff x="3736578" y="3292775"/>
-            <a:chExt cx="273844" cy="1048957"/>
+            <a:off x="565601" y="2250866"/>
+            <a:ext cx="232834" cy="1127294"/>
+            <a:chOff x="3766001" y="2831891"/>
+            <a:chExt cx="232834" cy="1127294"/>
           </a:xfrm>
         </p:grpSpPr>
         <p:sp>
           <p:nvSpPr>
-            <p:cNvPr id="39" name="left Water well column 2 row 5 4"/>
+            <p:cNvPr id="33" name="left Water well column 2 row 5 3"/>
             <p:cNvSpPr/>
             <p:nvPr/>
           </p:nvSpPr>
           <p:spPr>
             <a:xfrm>
-              <a:off x="3736578" y="3292775"/>
-              <a:ext cx="273844" cy="1048957"/>
+              <a:off x="3766001" y="2831891"/>
+              <a:ext cx="232834" cy="1127294"/>
             </a:xfrm>
             <a:custGeom>
               <a:avLst/>
@@ -2596,21 +2537,21 @@
               <a:cxnLst/>
               <a:rect l="0" t="0" r="r" b="b"/>
               <a:pathLst>
-                <a:path w="273844" h="1048957" fill="norm">
+                <a:path w="232834" h="1127294" fill="norm">
                   <a:moveTo>
-                    <a:pt x="0" y="47382"/>
+                    <a:pt x="0" y="238807"/>
                   </a:moveTo>
                   <a:lnTo>
-                    <a:pt x="0" y="1048957"/>
+                    <a:pt x="0" y="1127294"/>
                   </a:lnTo>
                   <a:lnTo>
-                    <a:pt x="273844" y="879780"/>
+                    <a:pt x="232834" y="834545"/>
                   </a:lnTo>
                   <a:lnTo>
-                    <a:pt x="273844" y="0"/>
+                    <a:pt x="232834" y="0"/>
                   </a:lnTo>
                   <a:lnTo>
-                    <a:pt x="0" y="47382"/>
+                    <a:pt x="0" y="238807"/>
                   </a:lnTo>
                   <a:close/>
                 </a:path>
@@ -2629,14 +2570,14 @@
         </p:sp>
         <p:sp>
           <p:nvSpPr>
-            <p:cNvPr id="40" name="left Water well column 2 row 5 5"/>
+            <p:cNvPr id="34" name="left Water well column 2 row 5 4"/>
             <p:cNvSpPr/>
             <p:nvPr/>
           </p:nvSpPr>
           <p:spPr>
             <a:xfrm>
-              <a:off x="3736578" y="3292775"/>
-              <a:ext cx="273844" cy="879780"/>
+              <a:off x="3766001" y="2831891"/>
+              <a:ext cx="232834" cy="946784"/>
             </a:xfrm>
             <a:custGeom>
               <a:avLst/>
@@ -2645,21 +2586,21 @@
               <a:cxnLst/>
               <a:rect l="0" t="0" r="r" b="b"/>
               <a:pathLst>
-                <a:path w="273844" h="879780" fill="norm">
+                <a:path w="232834" h="946784" fill="norm">
                   <a:moveTo>
-                    <a:pt x="0" y="47382"/>
+                    <a:pt x="0" y="238807"/>
                   </a:moveTo>
                   <a:lnTo>
-                    <a:pt x="0" y="845471"/>
+                    <a:pt x="0" y="946784"/>
                   </a:lnTo>
                   <a:lnTo>
-                    <a:pt x="273844" y="879780"/>
+                    <a:pt x="232834" y="834545"/>
                   </a:lnTo>
                   <a:lnTo>
-                    <a:pt x="273844" y="0"/>
+                    <a:pt x="232834" y="0"/>
                   </a:lnTo>
                   <a:lnTo>
-                    <a:pt x="0" y="47382"/>
+                    <a:pt x="0" y="238807"/>
                   </a:lnTo>
                   <a:close/>
                 </a:path>
@@ -2678,14 +2619,14 @@
         </p:sp>
         <p:sp>
           <p:nvSpPr>
-            <p:cNvPr id="41" name="left Water well column 2 row 5 6"/>
+            <p:cNvPr id="35" name="left Water well column 2 row 5 5"/>
             <p:cNvSpPr/>
             <p:nvPr/>
           </p:nvSpPr>
           <p:spPr>
             <a:xfrm>
-              <a:off x="3747549" y="4135670"/>
-              <a:ext cx="192217" cy="121277"/>
+              <a:off x="3775330" y="3667329"/>
+              <a:ext cx="163432" cy="205362"/>
             </a:xfrm>
             <a:custGeom>
               <a:avLst/>
@@ -2694,35 +2635,35 @@
               <a:cxnLst/>
               <a:rect l="0" t="0" r="r" b="b"/>
               <a:pathLst>
-                <a:path w="192217" h="121277" fill="norm">
+                <a:path w="163432" h="205362" fill="norm">
                   <a:moveTo>
-                    <a:pt x="192217" y="0"/>
+                    <a:pt x="163432" y="0"/>
                   </a:moveTo>
                   <a:lnTo>
-                    <a:pt x="192217" y="65168"/>
+                    <a:pt x="163432" y="60700"/>
                   </a:lnTo>
                   <a:cubicBezTo>
-                    <a:pt x="192217" y="99902"/>
-                    <a:pt x="109967" y="121277"/>
-                    <a:pt x="0" y="115135"/>
+                    <a:pt x="163432" y="93053"/>
+                    <a:pt x="93499" y="153843"/>
+                    <a:pt x="0" y="205362"/>
                   </a:cubicBezTo>
                   <a:lnTo>
-                    <a:pt x="0" y="46490"/>
+                    <a:pt x="0" y="144315"/>
                   </a:lnTo>
                   <a:cubicBezTo>
-                    <a:pt x="18972" y="48041"/>
-                    <a:pt x="37202" y="48693"/>
-                    <a:pt x="54418" y="48575"/>
-                  </a:cubicBezTo>
-                  <a:cubicBezTo>
-                    <a:pt x="102253" y="48086"/>
-                    <a:pt x="140872" y="41149"/>
-                    <a:pt x="165447" y="29915"/>
-                  </a:cubicBezTo>
-                  <a:cubicBezTo>
-                    <a:pt x="182124" y="21922"/>
-                    <a:pt x="192217" y="11621"/>
-                    <a:pt x="192217" y="0"/>
+                    <a:pt x="16130" y="135401"/>
+                    <a:pt x="31630" y="126159"/>
+                    <a:pt x="46268" y="116834"/>
+                  </a:cubicBezTo>
+                  <a:cubicBezTo>
+                    <a:pt x="86940" y="91083"/>
+                    <a:pt x="119775" y="64615"/>
+                    <a:pt x="140671" y="41567"/>
+                  </a:cubicBezTo>
+                  <a:cubicBezTo>
+                    <a:pt x="154850" y="25585"/>
+                    <a:pt x="163432" y="10824"/>
+                    <a:pt x="163432" y="0"/>
                   </a:cubicBezTo>
                   <a:close/>
                 </a:path>
@@ -2739,14 +2680,14 @@
         </p:sp>
         <p:sp>
           <p:nvSpPr>
-            <p:cNvPr id="42" name="left Water well column 2 row 5 7"/>
+            <p:cNvPr id="36" name="left Water well column 2 row 5 6"/>
             <p:cNvSpPr/>
             <p:nvPr/>
           </p:nvSpPr>
           <p:spPr>
             <a:xfrm>
-              <a:off x="3747549" y="4135670"/>
-              <a:ext cx="192217" cy="121277"/>
+              <a:off x="3775330" y="3667329"/>
+              <a:ext cx="163432" cy="205362"/>
             </a:xfrm>
             <a:custGeom>
               <a:avLst/>
@@ -2755,17 +2696,17 @@
               <a:cxnLst/>
               <a:rect l="0" t="0" r="r" b="b"/>
               <a:pathLst>
-                <a:path w="192217" h="121277" fill="none">
+                <a:path w="163432" h="205362" fill="none">
                   <a:moveTo>
-                    <a:pt x="192217" y="0"/>
+                    <a:pt x="163432" y="0"/>
                   </a:moveTo>
                   <a:lnTo>
-                    <a:pt x="192217" y="65168"/>
+                    <a:pt x="163432" y="60700"/>
                   </a:lnTo>
                   <a:cubicBezTo>
-                    <a:pt x="192217" y="99902"/>
-                    <a:pt x="109967" y="121277"/>
-                    <a:pt x="0" y="115135"/>
+                    <a:pt x="163432" y="93053"/>
+                    <a:pt x="93499" y="153843"/>
+                    <a:pt x="0" y="205362"/>
                   </a:cubicBezTo>
                 </a:path>
               </a:pathLst>
@@ -2781,14 +2722,14 @@
         </p:sp>
         <p:sp>
           <p:nvSpPr>
-            <p:cNvPr id="43" name="left Water well column 2 row 5 8"/>
+            <p:cNvPr id="37" name="left Water well column 2 row 5 7"/>
             <p:cNvSpPr/>
             <p:nvPr/>
           </p:nvSpPr>
           <p:spPr>
             <a:xfrm>
-              <a:off x="3747549" y="4135670"/>
-              <a:ext cx="192217" cy="48693"/>
+              <a:off x="3775330" y="3667329"/>
+              <a:ext cx="163432" cy="144315"/>
             </a:xfrm>
             <a:custGeom>
               <a:avLst/>
@@ -2797,24 +2738,24 @@
               <a:cxnLst/>
               <a:rect l="0" t="0" r="r" b="b"/>
               <a:pathLst>
-                <a:path w="192217" h="48693" fill="none">
+                <a:path w="163432" h="144315" fill="none">
                   <a:moveTo>
-                    <a:pt x="0" y="46490"/>
+                    <a:pt x="0" y="144315"/>
                   </a:moveTo>
                   <a:cubicBezTo>
-                    <a:pt x="18972" y="48041"/>
-                    <a:pt x="37202" y="48693"/>
-                    <a:pt x="54418" y="48575"/>
-                  </a:cubicBezTo>
-                  <a:cubicBezTo>
-                    <a:pt x="102253" y="48086"/>
-                    <a:pt x="140872" y="41149"/>
-                    <a:pt x="165447" y="29915"/>
-                  </a:cubicBezTo>
-                  <a:cubicBezTo>
-                    <a:pt x="182124" y="21922"/>
-                    <a:pt x="192217" y="11621"/>
-                    <a:pt x="192217" y="0"/>
+                    <a:pt x="16130" y="135401"/>
+                    <a:pt x="31630" y="126159"/>
+                    <a:pt x="46268" y="116834"/>
+                  </a:cubicBezTo>
+                  <a:cubicBezTo>
+                    <a:pt x="86940" y="91083"/>
+                    <a:pt x="119775" y="64615"/>
+                    <a:pt x="140671" y="41567"/>
+                  </a:cubicBezTo>
+                  <a:cubicBezTo>
+                    <a:pt x="154850" y="25585"/>
+                    <a:pt x="163432" y="10824"/>
+                    <a:pt x="163432" y="0"/>
                   </a:cubicBezTo>
                 </a:path>
               </a:pathLst>
@@ -2830,14 +2771,14 @@
         </p:sp>
         <p:sp>
           <p:nvSpPr>
-            <p:cNvPr id="44" name="left Water well column 2 row 5 9"/>
+            <p:cNvPr id="38" name="left Water well column 2 row 5 8"/>
             <p:cNvSpPr/>
             <p:nvPr/>
           </p:nvSpPr>
           <p:spPr>
             <a:xfrm>
-              <a:off x="3747549" y="4034359"/>
-              <a:ext cx="192217" cy="150004"/>
+              <a:off x="3775330" y="3635161"/>
+              <a:ext cx="163432" cy="176484"/>
             </a:xfrm>
             <a:custGeom>
               <a:avLst/>
@@ -2846,32 +2787,32 @@
               <a:cxnLst/>
               <a:rect l="0" t="0" r="r" b="b"/>
               <a:pathLst>
-                <a:path w="192217" h="150004" fill="norm">
+                <a:path w="163432" h="176484" fill="norm">
                   <a:moveTo>
-                    <a:pt x="192217" y="101311"/>
+                    <a:pt x="163432" y="32169"/>
                   </a:moveTo>
                   <a:cubicBezTo>
-                    <a:pt x="192217" y="113160"/>
-                    <a:pt x="182562" y="123281"/>
-                    <a:pt x="165447" y="131227"/>
-                  </a:cubicBezTo>
-                  <a:cubicBezTo>
-                    <a:pt x="141310" y="142512"/>
-                    <a:pt x="102253" y="149397"/>
-                    <a:pt x="54418" y="149886"/>
-                  </a:cubicBezTo>
-                  <a:cubicBezTo>
-                    <a:pt x="37202" y="150004"/>
-                    <a:pt x="18972" y="149352"/>
-                    <a:pt x="0" y="147801"/>
+                    <a:pt x="163432" y="43205"/>
+                    <a:pt x="155223" y="57573"/>
+                    <a:pt x="140671" y="73735"/>
+                  </a:cubicBezTo>
+                  <a:cubicBezTo>
+                    <a:pt x="120148" y="96604"/>
+                    <a:pt x="86940" y="123251"/>
+                    <a:pt x="46268" y="149003"/>
+                  </a:cubicBezTo>
+                  <a:cubicBezTo>
+                    <a:pt x="31630" y="158328"/>
+                    <a:pt x="16130" y="167570"/>
+                    <a:pt x="0" y="176484"/>
                   </a:cubicBezTo>
                   <a:lnTo>
-                    <a:pt x="0" y="0"/>
+                    <a:pt x="0" y="45042"/>
                   </a:lnTo>
                   <a:cubicBezTo>
-                    <a:pt x="109967" y="26174"/>
-                    <a:pt x="192217" y="66775"/>
-                    <a:pt x="192217" y="101311"/>
+                    <a:pt x="93499" y="6753"/>
+                    <a:pt x="163432" y="0"/>
+                    <a:pt x="163432" y="32169"/>
                   </a:cubicBezTo>
                   <a:close/>
                 </a:path>
@@ -2888,14 +2829,14 @@
         </p:sp>
         <p:sp>
           <p:nvSpPr>
-            <p:cNvPr id="45" name="left Water well column 2 row 5 10"/>
+            <p:cNvPr id="39" name="left Water well column 2 row 5 9"/>
             <p:cNvSpPr/>
             <p:nvPr/>
           </p:nvSpPr>
           <p:spPr>
             <a:xfrm>
-              <a:off x="3747549" y="4135670"/>
-              <a:ext cx="192217" cy="48693"/>
+              <a:off x="3775330" y="3667329"/>
+              <a:ext cx="163432" cy="144315"/>
             </a:xfrm>
             <a:custGeom>
               <a:avLst/>
@@ -2904,24 +2845,24 @@
               <a:cxnLst/>
               <a:rect l="0" t="0" r="r" b="b"/>
               <a:pathLst>
-                <a:path w="192217" h="48693" fill="none">
+                <a:path w="163432" h="144315" fill="none">
                   <a:moveTo>
-                    <a:pt x="192217" y="0"/>
+                    <a:pt x="163432" y="0"/>
                   </a:moveTo>
                   <a:cubicBezTo>
-                    <a:pt x="192217" y="11849"/>
-                    <a:pt x="182562" y="21970"/>
-                    <a:pt x="165447" y="29915"/>
-                  </a:cubicBezTo>
-                  <a:cubicBezTo>
-                    <a:pt x="141310" y="41200"/>
-                    <a:pt x="102253" y="48086"/>
-                    <a:pt x="54418" y="48575"/>
-                  </a:cubicBezTo>
-                  <a:cubicBezTo>
-                    <a:pt x="37202" y="48693"/>
-                    <a:pt x="18972" y="48041"/>
-                    <a:pt x="0" y="46490"/>
+                    <a:pt x="163432" y="11036"/>
+                    <a:pt x="155223" y="25405"/>
+                    <a:pt x="140671" y="41567"/>
+                  </a:cubicBezTo>
+                  <a:cubicBezTo>
+                    <a:pt x="120148" y="64435"/>
+                    <a:pt x="86940" y="91083"/>
+                    <a:pt x="46268" y="116834"/>
+                  </a:cubicBezTo>
+                  <a:cubicBezTo>
+                    <a:pt x="31630" y="126159"/>
+                    <a:pt x="16130" y="135401"/>
+                    <a:pt x="0" y="144315"/>
                   </a:cubicBezTo>
                 </a:path>
               </a:pathLst>
@@ -2937,14 +2878,14 @@
         </p:sp>
         <p:sp>
           <p:nvSpPr>
-            <p:cNvPr id="46" name="left Water well column 2 row 5 11"/>
+            <p:cNvPr id="40" name="left Water well column 2 row 5 10"/>
             <p:cNvSpPr/>
             <p:nvPr/>
           </p:nvSpPr>
           <p:spPr>
             <a:xfrm>
-              <a:off x="3747549" y="4034359"/>
-              <a:ext cx="192217" cy="101311"/>
+              <a:off x="3775330" y="3635161"/>
+              <a:ext cx="163432" cy="45042"/>
             </a:xfrm>
             <a:custGeom>
               <a:avLst/>
@@ -2953,14 +2894,14 @@
               <a:cxnLst/>
               <a:rect l="0" t="0" r="r" b="b"/>
               <a:pathLst>
-                <a:path w="192217" h="101311" fill="none">
+                <a:path w="163432" h="45042" fill="none">
                   <a:moveTo>
-                    <a:pt x="0" y="0"/>
+                    <a:pt x="0" y="45042"/>
                   </a:moveTo>
                   <a:cubicBezTo>
-                    <a:pt x="109967" y="26174"/>
-                    <a:pt x="192217" y="66775"/>
-                    <a:pt x="192217" y="101311"/>
+                    <a:pt x="93499" y="6753"/>
+                    <a:pt x="163432" y="0"/>
+                    <a:pt x="163432" y="32169"/>
                   </a:cubicBezTo>
                 </a:path>
               </a:pathLst>
@@ -2976,14 +2917,14 @@
         </p:sp>
         <p:sp>
           <p:nvSpPr>
-            <p:cNvPr id="47" name="left Water well column 2 row 5 12"/>
+            <p:cNvPr id="41" name="left Water well column 2 row 5 11"/>
             <p:cNvSpPr/>
             <p:nvPr/>
           </p:nvSpPr>
           <p:spPr>
             <a:xfrm>
-              <a:off x="3747549" y="4078284"/>
-              <a:ext cx="97987" cy="80576"/>
+              <a:off x="3775330" y="3698402"/>
+              <a:ext cx="83313" cy="91572"/>
             </a:xfrm>
             <a:custGeom>
               <a:avLst/>
@@ -2992,35 +2933,35 @@
               <a:cxnLst/>
               <a:rect l="0" t="0" r="r" b="b"/>
               <a:pathLst>
-                <a:path w="97987" h="80576" fill="norm">
+                <a:path w="83313" h="91572" fill="norm">
                   <a:moveTo>
-                    <a:pt x="97390" y="54843"/>
+                    <a:pt x="82805" y="16495"/>
                   </a:moveTo>
                   <a:cubicBezTo>
-                    <a:pt x="97390" y="61518"/>
-                    <a:pt x="91422" y="67212"/>
-                    <a:pt x="81275" y="71535"/>
-                  </a:cubicBezTo>
-                  <a:cubicBezTo>
-                    <a:pt x="66354" y="77419"/>
-                    <a:pt x="42779" y="80576"/>
-                    <a:pt x="13833" y="80052"/>
-                  </a:cubicBezTo>
-                  <a:cubicBezTo>
-                    <a:pt x="9343" y="79950"/>
-                    <a:pt x="4726" y="79771"/>
-                    <a:pt x="0" y="79509"/>
+                    <a:pt x="82805" y="22569"/>
+                    <a:pt x="77731" y="30938"/>
+                    <a:pt x="69104" y="40294"/>
+                  </a:cubicBezTo>
+                  <a:cubicBezTo>
+                    <a:pt x="56418" y="53626"/>
+                    <a:pt x="36373" y="69188"/>
+                    <a:pt x="11761" y="84472"/>
+                  </a:cubicBezTo>
+                  <a:cubicBezTo>
+                    <a:pt x="7944" y="86839"/>
+                    <a:pt x="4019" y="89210"/>
+                    <a:pt x="0" y="91572"/>
                   </a:cubicBezTo>
                   <a:lnTo>
-                    <a:pt x="0" y="0"/>
+                    <a:pt x="0" y="20864"/>
                   </a:lnTo>
                   <a:cubicBezTo>
-                    <a:pt x="57068" y="15522"/>
-                    <a:pt x="97987" y="37068"/>
-                    <a:pt x="97987" y="54927"/>
+                    <a:pt x="48521" y="2845"/>
+                    <a:pt x="83313" y="0"/>
+                    <a:pt x="83313" y="16251"/>
                   </a:cubicBezTo>
                   <a:lnTo>
-                    <a:pt x="97390" y="54843"/>
+                    <a:pt x="82805" y="16495"/>
                   </a:lnTo>
                   <a:close/>
                 </a:path>
@@ -3040,28 +2981,28 @@
       </p:grpSp>
       <p:grpSp>
         <p:nvGrpSpPr>
-          <p:cNvPr id="48" name="right Speaker column 2 row 1"/>
+          <p:cNvPr id="42" name="right Speaker column 2 row 1"/>
           <p:cNvGrpSpPr/>
           <p:nvPr/>
         </p:nvGrpSpPr>
         <p:grpSpPr>
           <a:xfrm>
-            <a:off x="4975225" y="520292"/>
-            <a:ext cx="365125" cy="1001619"/>
-            <a:chOff x="8175625" y="1101317"/>
-            <a:chExt cx="365125" cy="1001619"/>
+            <a:off x="4987703" y="383895"/>
+            <a:ext cx="310446" cy="914038"/>
+            <a:chOff x="8188103" y="964920"/>
+            <a:chExt cx="310446" cy="914038"/>
           </a:xfrm>
         </p:grpSpPr>
         <p:sp>
           <p:nvSpPr>
-            <p:cNvPr id="49" name="right Speaker column 2 row 1 5"/>
+            <p:cNvPr id="43" name="right Speaker column 2 row 1 6"/>
             <p:cNvSpPr/>
             <p:nvPr/>
           </p:nvSpPr>
           <p:spPr>
             <a:xfrm>
-              <a:off x="8340123" y="1101317"/>
-              <a:ext cx="29754" cy="80343"/>
+              <a:off x="8327966" y="964920"/>
+              <a:ext cx="25298" cy="74876"/>
             </a:xfrm>
             <a:custGeom>
               <a:avLst/>
@@ -3070,29 +3011,29 @@
               <a:cxnLst/>
               <a:rect l="0" t="0" r="r" b="b"/>
               <a:pathLst>
-                <a:path w="29754" h="80343" fill="norm">
+                <a:path w="25298" h="74876" fill="norm">
                   <a:moveTo>
-                    <a:pt x="29754" y="31121"/>
+                    <a:pt x="25298" y="46840"/>
                   </a:moveTo>
                   <a:cubicBezTo>
-                    <a:pt x="29754" y="11435"/>
-                    <a:pt x="22953" y="0"/>
-                    <a:pt x="14877" y="4834"/>
-                  </a:cubicBezTo>
-                  <a:cubicBezTo>
-                    <a:pt x="6801" y="9671"/>
-                    <a:pt x="0" y="30199"/>
-                    <a:pt x="0" y="49374"/>
-                  </a:cubicBezTo>
-                  <a:cubicBezTo>
-                    <a:pt x="0" y="68548"/>
-                    <a:pt x="6801" y="80343"/>
-                    <a:pt x="14877" y="75652"/>
-                  </a:cubicBezTo>
-                  <a:cubicBezTo>
-                    <a:pt x="22953" y="70965"/>
-                    <a:pt x="29754" y="50807"/>
-                    <a:pt x="29754" y="31121"/>
+                    <a:pt x="25298" y="29026"/>
+                    <a:pt x="19516" y="10553"/>
+                    <a:pt x="12649" y="5276"/>
+                  </a:cubicBezTo>
+                  <a:cubicBezTo>
+                    <a:pt x="5782" y="0"/>
+                    <a:pt x="0" y="10551"/>
+                    <a:pt x="0" y="28027"/>
+                  </a:cubicBezTo>
+                  <a:cubicBezTo>
+                    <a:pt x="0" y="45504"/>
+                    <a:pt x="5782" y="64306"/>
+                    <a:pt x="12649" y="69591"/>
+                  </a:cubicBezTo>
+                  <a:cubicBezTo>
+                    <a:pt x="19516" y="74876"/>
+                    <a:pt x="25298" y="64654"/>
+                    <a:pt x="25298" y="46840"/>
                   </a:cubicBezTo>
                   <a:close/>
                 </a:path>
@@ -3109,14 +3050,14 @@
         </p:sp>
         <p:sp>
           <p:nvSpPr>
-            <p:cNvPr id="50" name="right Speaker column 2 row 1 6"/>
+            <p:cNvPr id="44" name="right Speaker column 2 row 1 7"/>
             <p:cNvSpPr/>
             <p:nvPr/>
           </p:nvSpPr>
           <p:spPr>
             <a:xfrm>
-              <a:off x="8340123" y="1216680"/>
-              <a:ext cx="29754" cy="80230"/>
+              <a:off x="8327966" y="1070118"/>
+              <a:ext cx="25298" cy="74573"/>
             </a:xfrm>
             <a:custGeom>
               <a:avLst/>
@@ -3125,29 +3066,29 @@
               <a:cxnLst/>
               <a:rect l="0" t="0" r="r" b="b"/>
               <a:pathLst>
-                <a:path w="29754" h="80230" fill="norm">
+                <a:path w="25298" h="74573" fill="norm">
                   <a:moveTo>
-                    <a:pt x="29754" y="31685"/>
+                    <a:pt x="25298" y="46549"/>
                   </a:moveTo>
                   <a:cubicBezTo>
-                    <a:pt x="29754" y="11999"/>
-                    <a:pt x="22953" y="0"/>
-                    <a:pt x="14877" y="4960"/>
-                  </a:cubicBezTo>
-                  <a:cubicBezTo>
-                    <a:pt x="6801" y="9920"/>
-                    <a:pt x="0" y="29523"/>
-                    <a:pt x="0" y="49059"/>
-                  </a:cubicBezTo>
-                  <a:cubicBezTo>
-                    <a:pt x="0" y="68596"/>
-                    <a:pt x="6801" y="80230"/>
-                    <a:pt x="14877" y="75778"/>
-                  </a:cubicBezTo>
-                  <a:cubicBezTo>
-                    <a:pt x="22953" y="71329"/>
-                    <a:pt x="29754" y="51371"/>
-                    <a:pt x="29754" y="31685"/>
+                    <a:pt x="25298" y="28734"/>
+                    <a:pt x="19516" y="9920"/>
+                    <a:pt x="12649" y="4960"/>
+                  </a:cubicBezTo>
+                  <a:cubicBezTo>
+                    <a:pt x="5782" y="0"/>
+                    <a:pt x="0" y="9880"/>
+                    <a:pt x="0" y="27686"/>
+                  </a:cubicBezTo>
+                  <a:cubicBezTo>
+                    <a:pt x="0" y="45492"/>
+                    <a:pt x="5782" y="63976"/>
+                    <a:pt x="12649" y="69274"/>
+                  </a:cubicBezTo>
+                  <a:cubicBezTo>
+                    <a:pt x="19516" y="74573"/>
+                    <a:pt x="25298" y="64363"/>
+                    <a:pt x="25298" y="46549"/>
                   </a:cubicBezTo>
                   <a:close/>
                 </a:path>
@@ -3164,14 +3105,14 @@
         </p:sp>
         <p:sp>
           <p:nvSpPr>
-            <p:cNvPr id="51" name="right Speaker column 2 row 1 7"/>
+            <p:cNvPr id="45" name="right Speaker column 2 row 1 8"/>
             <p:cNvSpPr/>
             <p:nvPr/>
           </p:nvSpPr>
           <p:spPr>
             <a:xfrm>
-              <a:off x="8340123" y="1332771"/>
-              <a:ext cx="29754" cy="79389"/>
+              <a:off x="8327966" y="1174656"/>
+              <a:ext cx="25298" cy="74930"/>
             </a:xfrm>
             <a:custGeom>
               <a:avLst/>
@@ -3180,29 +3121,29 @@
               <a:cxnLst/>
               <a:rect l="0" t="0" r="r" b="b"/>
               <a:pathLst>
-                <a:path w="29754" h="79389" fill="norm">
+                <a:path w="25298" h="74930" fill="norm">
                   <a:moveTo>
-                    <a:pt x="29754" y="31886"/>
+                    <a:pt x="25298" y="47247"/>
                   </a:moveTo>
                   <a:cubicBezTo>
-                    <a:pt x="29754" y="12200"/>
-                    <a:pt x="22953" y="0"/>
-                    <a:pt x="14877" y="4357"/>
-                  </a:cubicBezTo>
-                  <a:cubicBezTo>
-                    <a:pt x="6801" y="8717"/>
-                    <a:pt x="0" y="28480"/>
-                    <a:pt x="0" y="47655"/>
-                  </a:cubicBezTo>
-                  <a:cubicBezTo>
-                    <a:pt x="0" y="66830"/>
-                    <a:pt x="6801" y="79389"/>
-                    <a:pt x="14877" y="75176"/>
-                  </a:cubicBezTo>
-                  <a:cubicBezTo>
-                    <a:pt x="22953" y="70965"/>
-                    <a:pt x="29754" y="51572"/>
-                    <a:pt x="29754" y="31886"/>
+                    <a:pt x="25298" y="29432"/>
+                    <a:pt x="19516" y="10607"/>
+                    <a:pt x="12649" y="5303"/>
+                  </a:cubicBezTo>
+                  <a:cubicBezTo>
+                    <a:pt x="5782" y="0"/>
+                    <a:pt x="0" y="10199"/>
+                    <a:pt x="0" y="27675"/>
+                  </a:cubicBezTo>
+                  <a:cubicBezTo>
+                    <a:pt x="0" y="45151"/>
+                    <a:pt x="5782" y="64306"/>
+                    <a:pt x="12649" y="69618"/>
+                  </a:cubicBezTo>
+                  <a:cubicBezTo>
+                    <a:pt x="19516" y="74930"/>
+                    <a:pt x="25298" y="65061"/>
+                    <a:pt x="25298" y="47247"/>
                   </a:cubicBezTo>
                   <a:close/>
                 </a:path>
@@ -3219,14 +3160,14 @@
         </p:sp>
         <p:sp>
           <p:nvSpPr>
-            <p:cNvPr id="52" name="right Speaker column 2 row 1 8"/>
+            <p:cNvPr id="46" name="right Speaker column 2 row 1 9"/>
             <p:cNvSpPr/>
             <p:nvPr/>
           </p:nvSpPr>
           <p:spPr>
             <a:xfrm>
-              <a:off x="8340123" y="1448498"/>
-              <a:ext cx="29754" cy="78912"/>
+              <a:off x="8327966" y="1279524"/>
+              <a:ext cx="25298" cy="74957"/>
             </a:xfrm>
             <a:custGeom>
               <a:avLst/>
@@ -3235,29 +3176,29 @@
               <a:cxnLst/>
               <a:rect l="0" t="0" r="r" b="b"/>
               <a:pathLst>
-                <a:path w="29754" h="78912" fill="norm">
+                <a:path w="25298" h="74957" fill="norm">
                   <a:moveTo>
-                    <a:pt x="29754" y="32086"/>
+                    <a:pt x="25298" y="47285"/>
                   </a:moveTo>
                   <a:cubicBezTo>
-                    <a:pt x="29754" y="12400"/>
-                    <a:pt x="22953" y="0"/>
-                    <a:pt x="14877" y="4119"/>
-                  </a:cubicBezTo>
-                  <a:cubicBezTo>
-                    <a:pt x="6801" y="8240"/>
-                    <a:pt x="0" y="27440"/>
-                    <a:pt x="0" y="46976"/>
-                  </a:cubicBezTo>
-                  <a:cubicBezTo>
-                    <a:pt x="0" y="66513"/>
-                    <a:pt x="6801" y="78912"/>
-                    <a:pt x="14877" y="74938"/>
-                  </a:cubicBezTo>
-                  <a:cubicBezTo>
-                    <a:pt x="22953" y="70965"/>
-                    <a:pt x="29754" y="51772"/>
-                    <a:pt x="29754" y="32086"/>
+                    <a:pt x="25298" y="29471"/>
+                    <a:pt x="19516" y="10634"/>
+                    <a:pt x="12649" y="5317"/>
+                  </a:cubicBezTo>
+                  <a:cubicBezTo>
+                    <a:pt x="5782" y="0"/>
+                    <a:pt x="0" y="9858"/>
+                    <a:pt x="0" y="27663"/>
+                  </a:cubicBezTo>
+                  <a:cubicBezTo>
+                    <a:pt x="0" y="45469"/>
+                    <a:pt x="5782" y="64306"/>
+                    <a:pt x="12649" y="69631"/>
+                  </a:cubicBezTo>
+                  <a:cubicBezTo>
+                    <a:pt x="19516" y="74957"/>
+                    <a:pt x="25298" y="65100"/>
+                    <a:pt x="25298" y="47285"/>
                   </a:cubicBezTo>
                   <a:close/>
                 </a:path>
@@ -3274,14 +3215,14 @@
         </p:sp>
         <p:sp>
           <p:nvSpPr>
-            <p:cNvPr id="53" name="right Speaker column 2 row 1 9"/>
+            <p:cNvPr id="47" name="right Speaker column 2 row 1 10"/>
             <p:cNvSpPr/>
             <p:nvPr/>
           </p:nvSpPr>
           <p:spPr>
             <a:xfrm>
-              <a:off x="8340123" y="1564225"/>
-              <a:ext cx="29754" cy="78073"/>
+              <a:off x="8327966" y="1383733"/>
+              <a:ext cx="25298" cy="75973"/>
             </a:xfrm>
             <a:custGeom>
               <a:avLst/>
@@ -3290,29 +3231,29 @@
               <a:cxnLst/>
               <a:rect l="0" t="0" r="r" b="b"/>
               <a:pathLst>
-                <a:path w="29754" h="78073" fill="norm">
+                <a:path w="25298" h="75973" fill="norm">
                   <a:moveTo>
-                    <a:pt x="29754" y="32287"/>
+                    <a:pt x="25298" y="47983"/>
                   </a:moveTo>
                   <a:cubicBezTo>
-                    <a:pt x="29754" y="12601"/>
-                    <a:pt x="22953" y="0"/>
-                    <a:pt x="14877" y="3517"/>
-                  </a:cubicBezTo>
-                  <a:cubicBezTo>
-                    <a:pt x="6801" y="7038"/>
-                    <a:pt x="0" y="26399"/>
-                    <a:pt x="0" y="45936"/>
-                  </a:cubicBezTo>
-                  <a:cubicBezTo>
-                    <a:pt x="0" y="65473"/>
-                    <a:pt x="6801" y="78073"/>
-                    <a:pt x="14877" y="74699"/>
-                  </a:cubicBezTo>
-                  <a:cubicBezTo>
-                    <a:pt x="22953" y="71329"/>
-                    <a:pt x="29754" y="52337"/>
-                    <a:pt x="29754" y="32651"/>
+                    <a:pt x="25298" y="30169"/>
+                    <a:pt x="19516" y="11321"/>
+                    <a:pt x="12649" y="5660"/>
+                  </a:cubicBezTo>
+                  <a:cubicBezTo>
+                    <a:pt x="5782" y="0"/>
+                    <a:pt x="0" y="10176"/>
+                    <a:pt x="0" y="27982"/>
+                  </a:cubicBezTo>
+                  <a:cubicBezTo>
+                    <a:pt x="0" y="45788"/>
+                    <a:pt x="5782" y="64636"/>
+                    <a:pt x="12649" y="70304"/>
+                  </a:cubicBezTo>
+                  <a:cubicBezTo>
+                    <a:pt x="19516" y="75973"/>
+                    <a:pt x="25298" y="66127"/>
+                    <a:pt x="25298" y="48313"/>
                   </a:cubicBezTo>
                   <a:close/>
                 </a:path>
@@ -3329,14 +3270,14 @@
         </p:sp>
         <p:sp>
           <p:nvSpPr>
-            <p:cNvPr id="54" name="right Speaker column 2 row 1 10"/>
+            <p:cNvPr id="48" name="right Speaker column 2 row 1 11"/>
             <p:cNvSpPr/>
             <p:nvPr/>
           </p:nvSpPr>
           <p:spPr>
             <a:xfrm>
-              <a:off x="8340123" y="1680316"/>
-              <a:ext cx="29754" cy="77232"/>
+              <a:off x="8327966" y="1488931"/>
+              <a:ext cx="25298" cy="75670"/>
             </a:xfrm>
             <a:custGeom>
               <a:avLst/>
@@ -3345,29 +3286,29 @@
               <a:cxnLst/>
               <a:rect l="0" t="0" r="r" b="b"/>
               <a:pathLst>
-                <a:path w="29754" h="77232" fill="norm">
+                <a:path w="25298" h="75670" fill="norm">
                   <a:moveTo>
-                    <a:pt x="29754" y="32487"/>
+                    <a:pt x="25298" y="48022"/>
                   </a:moveTo>
                   <a:cubicBezTo>
-                    <a:pt x="29754" y="12802"/>
-                    <a:pt x="22953" y="0"/>
-                    <a:pt x="14877" y="3278"/>
-                  </a:cubicBezTo>
-                  <a:cubicBezTo>
-                    <a:pt x="6801" y="6559"/>
-                    <a:pt x="0" y="25357"/>
-                    <a:pt x="0" y="44894"/>
-                  </a:cubicBezTo>
-                  <a:cubicBezTo>
-                    <a:pt x="0" y="64430"/>
-                    <a:pt x="6801" y="77232"/>
-                    <a:pt x="14877" y="74097"/>
-                  </a:cubicBezTo>
-                  <a:cubicBezTo>
-                    <a:pt x="22953" y="70965"/>
-                    <a:pt x="29754" y="52173"/>
-                    <a:pt x="29754" y="32487"/>
+                    <a:pt x="25298" y="30207"/>
+                    <a:pt x="19516" y="11348"/>
+                    <a:pt x="12649" y="5674"/>
+                  </a:cubicBezTo>
+                  <a:cubicBezTo>
+                    <a:pt x="5782" y="0"/>
+                    <a:pt x="0" y="9835"/>
+                    <a:pt x="0" y="27641"/>
+                  </a:cubicBezTo>
+                  <a:cubicBezTo>
+                    <a:pt x="0" y="45447"/>
+                    <a:pt x="5782" y="64306"/>
+                    <a:pt x="12649" y="69988"/>
+                  </a:cubicBezTo>
+                  <a:cubicBezTo>
+                    <a:pt x="19516" y="75670"/>
+                    <a:pt x="25298" y="65836"/>
+                    <a:pt x="25298" y="48022"/>
                   </a:cubicBezTo>
                   <a:close/>
                 </a:path>
@@ -3384,14 +3325,14 @@
         </p:sp>
         <p:sp>
           <p:nvSpPr>
-            <p:cNvPr id="55" name="right Speaker column 2 row 1 11"/>
+            <p:cNvPr id="49" name="right Speaker column 2 row 1 12"/>
             <p:cNvSpPr/>
             <p:nvPr/>
           </p:nvSpPr>
           <p:spPr>
             <a:xfrm>
-              <a:off x="8340123" y="1795679"/>
-              <a:ext cx="29754" cy="76756"/>
+              <a:off x="8327966" y="1593470"/>
+              <a:ext cx="25298" cy="76357"/>
             </a:xfrm>
             <a:custGeom>
               <a:avLst/>
@@ -3400,29 +3341,29 @@
               <a:cxnLst/>
               <a:rect l="0" t="0" r="r" b="b"/>
               <a:pathLst>
-                <a:path w="29754" h="76756" fill="norm">
+                <a:path w="25298" h="76357" fill="norm">
                   <a:moveTo>
-                    <a:pt x="29754" y="33052"/>
+                    <a:pt x="25298" y="48390"/>
                   </a:moveTo>
                   <a:cubicBezTo>
-                    <a:pt x="29754" y="13366"/>
-                    <a:pt x="22953" y="0"/>
-                    <a:pt x="14877" y="3041"/>
-                  </a:cubicBezTo>
-                  <a:cubicBezTo>
-                    <a:pt x="6801" y="6084"/>
-                    <a:pt x="0" y="24681"/>
-                    <a:pt x="0" y="44217"/>
-                  </a:cubicBezTo>
-                  <a:cubicBezTo>
-                    <a:pt x="0" y="63754"/>
-                    <a:pt x="6801" y="76756"/>
-                    <a:pt x="14877" y="74223"/>
-                  </a:cubicBezTo>
-                  <a:cubicBezTo>
-                    <a:pt x="22953" y="71693"/>
-                    <a:pt x="29754" y="52737"/>
-                    <a:pt x="29754" y="33052"/>
+                    <a:pt x="25298" y="30575"/>
+                    <a:pt x="19516" y="11375"/>
+                    <a:pt x="12649" y="5687"/>
+                  </a:cubicBezTo>
+                  <a:cubicBezTo>
+                    <a:pt x="5782" y="0"/>
+                    <a:pt x="0" y="9823"/>
+                    <a:pt x="0" y="27629"/>
+                  </a:cubicBezTo>
+                  <a:cubicBezTo>
+                    <a:pt x="0" y="45435"/>
+                    <a:pt x="5782" y="64306"/>
+                    <a:pt x="12649" y="70331"/>
+                  </a:cubicBezTo>
+                  <a:cubicBezTo>
+                    <a:pt x="19516" y="76357"/>
+                    <a:pt x="25298" y="66204"/>
+                    <a:pt x="25298" y="48390"/>
                   </a:cubicBezTo>
                   <a:close/>
                 </a:path>
@@ -3439,14 +3380,14 @@
         </p:sp>
         <p:sp>
           <p:nvSpPr>
-            <p:cNvPr id="56" name="right Speaker column 2 row 1 12"/>
+            <p:cNvPr id="50" name="right Speaker column 2 row 1 13"/>
             <p:cNvSpPr/>
             <p:nvPr/>
           </p:nvSpPr>
           <p:spPr>
             <a:xfrm>
-              <a:off x="8340123" y="1911770"/>
-              <a:ext cx="29754" cy="76277"/>
+              <a:off x="8327966" y="1698668"/>
+              <a:ext cx="25298" cy="75724"/>
             </a:xfrm>
             <a:custGeom>
               <a:avLst/>
@@ -3455,29 +3396,29 @@
               <a:cxnLst/>
               <a:rect l="0" t="0" r="r" b="b"/>
               <a:pathLst>
-                <a:path w="29754" h="76277" fill="norm">
+                <a:path w="25298" h="75724" fill="norm">
                   <a:moveTo>
-                    <a:pt x="29754" y="33253"/>
+                    <a:pt x="25298" y="48428"/>
                   </a:moveTo>
                   <a:cubicBezTo>
-                    <a:pt x="29754" y="13567"/>
-                    <a:pt x="22953" y="0"/>
-                    <a:pt x="14877" y="2802"/>
-                  </a:cubicBezTo>
-                  <a:cubicBezTo>
-                    <a:pt x="6801" y="5605"/>
-                    <a:pt x="0" y="23638"/>
-                    <a:pt x="0" y="43175"/>
-                  </a:cubicBezTo>
-                  <a:cubicBezTo>
-                    <a:pt x="0" y="62711"/>
-                    <a:pt x="6801" y="76277"/>
-                    <a:pt x="14877" y="73620"/>
-                  </a:cubicBezTo>
-                  <a:cubicBezTo>
-                    <a:pt x="22953" y="70965"/>
-                    <a:pt x="29754" y="52938"/>
-                    <a:pt x="29754" y="33253"/>
+                    <a:pt x="25298" y="30614"/>
+                    <a:pt x="19516" y="11402"/>
+                    <a:pt x="12649" y="5701"/>
+                  </a:cubicBezTo>
+                  <a:cubicBezTo>
+                    <a:pt x="5782" y="0"/>
+                    <a:pt x="0" y="9482"/>
+                    <a:pt x="0" y="27288"/>
+                  </a:cubicBezTo>
+                  <a:cubicBezTo>
+                    <a:pt x="0" y="45094"/>
+                    <a:pt x="5782" y="64306"/>
+                    <a:pt x="12649" y="70015"/>
+                  </a:cubicBezTo>
+                  <a:cubicBezTo>
+                    <a:pt x="19516" y="75724"/>
+                    <a:pt x="25298" y="66243"/>
+                    <a:pt x="25298" y="48428"/>
                   </a:cubicBezTo>
                   <a:close/>
                 </a:path>
@@ -3494,14 +3435,14 @@
         </p:sp>
         <p:sp>
           <p:nvSpPr>
-            <p:cNvPr id="57" name="right Speaker column 2 row 1 13"/>
+            <p:cNvPr id="51" name="right Speaker column 2 row 1 14"/>
             <p:cNvSpPr/>
             <p:nvPr/>
           </p:nvSpPr>
           <p:spPr>
             <a:xfrm>
-              <a:off x="8340123" y="2027497"/>
-              <a:ext cx="29754" cy="75438"/>
+              <a:off x="8327966" y="1802876"/>
+              <a:ext cx="25298" cy="76081"/>
             </a:xfrm>
             <a:custGeom>
               <a:avLst/>
@@ -3510,29 +3451,29 @@
               <a:cxnLst/>
               <a:rect l="0" t="0" r="r" b="b"/>
               <a:pathLst>
-                <a:path w="29754" h="75438" fill="norm">
+                <a:path w="25298" h="76081" fill="norm">
                   <a:moveTo>
-                    <a:pt x="29754" y="33453"/>
+                    <a:pt x="25298" y="49126"/>
                   </a:moveTo>
                   <a:cubicBezTo>
-                    <a:pt x="29754" y="13767"/>
-                    <a:pt x="22953" y="0"/>
-                    <a:pt x="14877" y="2200"/>
-                  </a:cubicBezTo>
-                  <a:cubicBezTo>
-                    <a:pt x="6801" y="4403"/>
-                    <a:pt x="0" y="22598"/>
-                    <a:pt x="0" y="42134"/>
-                  </a:cubicBezTo>
-                  <a:cubicBezTo>
-                    <a:pt x="0" y="61671"/>
-                    <a:pt x="6801" y="75438"/>
-                    <a:pt x="14877" y="73019"/>
-                  </a:cubicBezTo>
-                  <a:cubicBezTo>
-                    <a:pt x="22953" y="70601"/>
-                    <a:pt x="29754" y="52774"/>
-                    <a:pt x="29754" y="33088"/>
+                    <a:pt x="25298" y="31312"/>
+                    <a:pt x="19516" y="12088"/>
+                    <a:pt x="12649" y="6044"/>
+                  </a:cubicBezTo>
+                  <a:cubicBezTo>
+                    <a:pt x="5782" y="0"/>
+                    <a:pt x="0" y="9801"/>
+                    <a:pt x="0" y="27606"/>
+                  </a:cubicBezTo>
+                  <a:cubicBezTo>
+                    <a:pt x="0" y="45412"/>
+                    <a:pt x="5782" y="64636"/>
+                    <a:pt x="12649" y="70358"/>
+                  </a:cubicBezTo>
+                  <a:cubicBezTo>
+                    <a:pt x="19516" y="76081"/>
+                    <a:pt x="25298" y="66611"/>
+                    <a:pt x="25298" y="48796"/>
                   </a:cubicBezTo>
                   <a:close/>
                 </a:path>
@@ -3549,14 +3490,14 @@
         </p:sp>
         <p:sp>
           <p:nvSpPr>
-            <p:cNvPr id="58" name="right Speaker column 2 row 1 14"/>
+            <p:cNvPr id="52" name="right Speaker column 2 row 1 15"/>
             <p:cNvSpPr/>
             <p:nvPr/>
           </p:nvSpPr>
           <p:spPr>
             <a:xfrm>
-              <a:off x="8382203" y="1133425"/>
-              <a:ext cx="29754" cy="81204"/>
+              <a:off x="8363745" y="1043772"/>
+              <a:ext cx="25298" cy="75264"/>
             </a:xfrm>
             <a:custGeom>
               <a:avLst/>
@@ -3565,29 +3506,29 @@
               <a:cxnLst/>
               <a:rect l="0" t="0" r="r" b="b"/>
               <a:pathLst>
-                <a:path w="29754" h="81204" fill="norm">
+                <a:path w="25298" h="75264" fill="norm">
                   <a:moveTo>
-                    <a:pt x="29754" y="31975"/>
+                    <a:pt x="25298" y="47213"/>
                   </a:moveTo>
                   <a:cubicBezTo>
-                    <a:pt x="29754" y="12080"/>
-                    <a:pt x="22953" y="0"/>
-                    <a:pt x="14877" y="4701"/>
-                  </a:cubicBezTo>
-                  <a:cubicBezTo>
-                    <a:pt x="6801" y="9406"/>
-                    <a:pt x="0" y="29633"/>
-                    <a:pt x="0" y="49380"/>
-                  </a:cubicBezTo>
-                  <a:cubicBezTo>
-                    <a:pt x="0" y="69128"/>
-                    <a:pt x="6801" y="81204"/>
-                    <a:pt x="14877" y="76645"/>
-                  </a:cubicBezTo>
-                  <a:cubicBezTo>
-                    <a:pt x="22953" y="72089"/>
-                    <a:pt x="29754" y="51870"/>
-                    <a:pt x="29754" y="31975"/>
+                    <a:pt x="25298" y="29387"/>
+                    <a:pt x="19516" y="10568"/>
+                    <a:pt x="12649" y="5284"/>
+                  </a:cubicBezTo>
+                  <a:cubicBezTo>
+                    <a:pt x="5782" y="0"/>
+                    <a:pt x="0" y="10225"/>
+                    <a:pt x="0" y="28043"/>
+                  </a:cubicBezTo>
+                  <a:cubicBezTo>
+                    <a:pt x="0" y="45861"/>
+                    <a:pt x="5782" y="64679"/>
+                    <a:pt x="12649" y="69971"/>
+                  </a:cubicBezTo>
+                  <a:cubicBezTo>
+                    <a:pt x="19516" y="75264"/>
+                    <a:pt x="25298" y="65039"/>
+                    <a:pt x="25298" y="47213"/>
                   </a:cubicBezTo>
                   <a:close/>
                 </a:path>
@@ -3604,14 +3545,14 @@
         </p:sp>
         <p:sp>
           <p:nvSpPr>
-            <p:cNvPr id="59" name="right Speaker column 2 row 1 15"/>
+            <p:cNvPr id="53" name="right Speaker column 2 row 1 16"/>
             <p:cNvSpPr/>
             <p:nvPr/>
           </p:nvSpPr>
           <p:spPr>
             <a:xfrm>
-              <a:off x="8382203" y="1251121"/>
-              <a:ext cx="29754" cy="80729"/>
+              <a:off x="8363745" y="1149371"/>
+              <a:ext cx="25298" cy="75290"/>
             </a:xfrm>
             <a:custGeom>
               <a:avLst/>
@@ -3620,29 +3561,29 @@
               <a:cxnLst/>
               <a:rect l="0" t="0" r="r" b="b"/>
               <a:pathLst>
-                <a:path w="29754" h="80729" fill="norm">
+                <a:path w="25298" h="75290" fill="norm">
                   <a:moveTo>
-                    <a:pt x="29754" y="32174"/>
+                    <a:pt x="25298" y="47251"/>
                   </a:moveTo>
                   <a:cubicBezTo>
-                    <a:pt x="29754" y="12279"/>
-                    <a:pt x="22953" y="0"/>
-                    <a:pt x="14877" y="4464"/>
-                  </a:cubicBezTo>
-                  <a:cubicBezTo>
-                    <a:pt x="6801" y="8930"/>
-                    <a:pt x="0" y="28957"/>
-                    <a:pt x="0" y="48705"/>
-                  </a:cubicBezTo>
-                  <a:cubicBezTo>
-                    <a:pt x="0" y="68452"/>
-                    <a:pt x="6801" y="80729"/>
-                    <a:pt x="14877" y="76408"/>
-                  </a:cubicBezTo>
-                  <a:cubicBezTo>
-                    <a:pt x="22953" y="72089"/>
-                    <a:pt x="29754" y="52069"/>
-                    <a:pt x="29754" y="32174"/>
+                    <a:pt x="25298" y="29425"/>
+                    <a:pt x="19516" y="10595"/>
+                    <a:pt x="12649" y="5297"/>
+                  </a:cubicBezTo>
+                  <a:cubicBezTo>
+                    <a:pt x="5782" y="0"/>
+                    <a:pt x="0" y="10214"/>
+                    <a:pt x="0" y="28031"/>
+                  </a:cubicBezTo>
+                  <a:cubicBezTo>
+                    <a:pt x="0" y="45849"/>
+                    <a:pt x="5782" y="64679"/>
+                    <a:pt x="12649" y="69985"/>
+                  </a:cubicBezTo>
+                  <a:cubicBezTo>
+                    <a:pt x="19516" y="75290"/>
+                    <a:pt x="25298" y="65077"/>
+                    <a:pt x="25298" y="47251"/>
                   </a:cubicBezTo>
                   <a:close/>
                 </a:path>
@@ -3659,14 +3600,14 @@
         </p:sp>
         <p:sp>
           <p:nvSpPr>
-            <p:cNvPr id="60" name="right Speaker column 2 row 1 16"/>
+            <p:cNvPr id="54" name="right Speaker column 2 row 1 17"/>
             <p:cNvSpPr/>
             <p:nvPr/>
           </p:nvSpPr>
           <p:spPr>
             <a:xfrm>
-              <a:off x="8382203" y="1368818"/>
-              <a:ext cx="29754" cy="79521"/>
+              <a:off x="8363745" y="1254309"/>
+              <a:ext cx="25298" cy="75977"/>
             </a:xfrm>
             <a:custGeom>
               <a:avLst/>
@@ -3675,29 +3616,29 @@
               <a:cxnLst/>
               <a:rect l="0" t="0" r="r" b="b"/>
               <a:pathLst>
-                <a:path w="29754" h="79521" fill="norm">
+                <a:path w="25298" h="75977" fill="norm">
                   <a:moveTo>
-                    <a:pt x="29754" y="32374"/>
+                    <a:pt x="25298" y="47949"/>
                   </a:moveTo>
                   <a:cubicBezTo>
-                    <a:pt x="29754" y="12479"/>
-                    <a:pt x="22953" y="0"/>
-                    <a:pt x="14877" y="3860"/>
-                  </a:cubicBezTo>
-                  <a:cubicBezTo>
-                    <a:pt x="6801" y="7723"/>
-                    <a:pt x="0" y="27550"/>
-                    <a:pt x="0" y="47298"/>
-                  </a:cubicBezTo>
-                  <a:cubicBezTo>
-                    <a:pt x="0" y="67045"/>
-                    <a:pt x="6801" y="79521"/>
-                    <a:pt x="14877" y="75803"/>
-                  </a:cubicBezTo>
-                  <a:cubicBezTo>
-                    <a:pt x="22953" y="72089"/>
-                    <a:pt x="29754" y="52269"/>
-                    <a:pt x="29754" y="32374"/>
+                    <a:pt x="25298" y="30123"/>
+                    <a:pt x="19516" y="11282"/>
+                    <a:pt x="12649" y="5641"/>
+                  </a:cubicBezTo>
+                  <a:cubicBezTo>
+                    <a:pt x="5782" y="0"/>
+                    <a:pt x="0" y="10202"/>
+                    <a:pt x="0" y="28020"/>
+                  </a:cubicBezTo>
+                  <a:cubicBezTo>
+                    <a:pt x="0" y="45838"/>
+                    <a:pt x="5782" y="64679"/>
+                    <a:pt x="12649" y="70328"/>
+                  </a:cubicBezTo>
+                  <a:cubicBezTo>
+                    <a:pt x="19516" y="75977"/>
+                    <a:pt x="25298" y="65775"/>
+                    <a:pt x="25298" y="47949"/>
                   </a:cubicBezTo>
                   <a:close/>
                 </a:path>
@@ -3714,14 +3655,14 @@
         </p:sp>
         <p:sp>
           <p:nvSpPr>
-            <p:cNvPr id="61" name="right Speaker column 2 row 1 17"/>
+            <p:cNvPr id="55" name="right Speaker column 2 row 1 18"/>
             <p:cNvSpPr/>
             <p:nvPr/>
           </p:nvSpPr>
           <p:spPr>
             <a:xfrm>
-              <a:off x="8382203" y="1485779"/>
-              <a:ext cx="29754" cy="79415"/>
+              <a:off x="8363745" y="1359908"/>
+              <a:ext cx="25298" cy="75674"/>
             </a:xfrm>
             <a:custGeom>
               <a:avLst/>
@@ -3730,29 +3671,29 @@
               <a:cxnLst/>
               <a:rect l="0" t="0" r="r" b="b"/>
               <a:pathLst>
-                <a:path w="29754" h="79415" fill="norm">
+                <a:path w="25298" h="75674" fill="norm">
                   <a:moveTo>
-                    <a:pt x="29754" y="32940"/>
+                    <a:pt x="25298" y="47657"/>
                   </a:moveTo>
                   <a:cubicBezTo>
-                    <a:pt x="29754" y="13045"/>
-                    <a:pt x="22953" y="0"/>
-                    <a:pt x="14877" y="3991"/>
-                  </a:cubicBezTo>
-                  <a:cubicBezTo>
-                    <a:pt x="6801" y="7983"/>
-                    <a:pt x="0" y="27244"/>
-                    <a:pt x="0" y="46992"/>
-                  </a:cubicBezTo>
-                  <a:cubicBezTo>
-                    <a:pt x="0" y="66739"/>
-                    <a:pt x="6801" y="79415"/>
-                    <a:pt x="14877" y="75935"/>
-                  </a:cubicBezTo>
-                  <a:cubicBezTo>
-                    <a:pt x="22953" y="72457"/>
-                    <a:pt x="29754" y="52835"/>
-                    <a:pt x="29754" y="32940"/>
+                    <a:pt x="25298" y="29831"/>
+                    <a:pt x="19516" y="10649"/>
+                    <a:pt x="12649" y="5324"/>
+                  </a:cubicBezTo>
+                  <a:cubicBezTo>
+                    <a:pt x="5782" y="0"/>
+                    <a:pt x="0" y="9861"/>
+                    <a:pt x="0" y="27679"/>
+                  </a:cubicBezTo>
+                  <a:cubicBezTo>
+                    <a:pt x="0" y="45497"/>
+                    <a:pt x="5782" y="64349"/>
+                    <a:pt x="12649" y="70012"/>
+                  </a:cubicBezTo>
+                  <a:cubicBezTo>
+                    <a:pt x="19516" y="75674"/>
+                    <a:pt x="25298" y="65484"/>
+                    <a:pt x="25298" y="47657"/>
                   </a:cubicBezTo>
                   <a:close/>
                 </a:path>
@@ -3769,14 +3710,14 @@
         </p:sp>
         <p:sp>
           <p:nvSpPr>
-            <p:cNvPr id="62" name="right Speaker column 2 row 1 18"/>
+            <p:cNvPr id="56" name="right Speaker column 2 row 1 19"/>
             <p:cNvSpPr/>
             <p:nvPr/>
           </p:nvSpPr>
           <p:spPr>
             <a:xfrm>
-              <a:off x="8382203" y="1603476"/>
-              <a:ext cx="29754" cy="78574"/>
+              <a:off x="8363745" y="1464846"/>
+              <a:ext cx="25298" cy="76031"/>
             </a:xfrm>
             <a:custGeom>
               <a:avLst/>
@@ -3785,29 +3726,29 @@
               <a:cxnLst/>
               <a:rect l="0" t="0" r="r" b="b"/>
               <a:pathLst>
-                <a:path w="29754" h="78574" fill="norm">
+                <a:path w="25298" h="76031" fill="norm">
                   <a:moveTo>
-                    <a:pt x="29754" y="33140"/>
+                    <a:pt x="25298" y="48356"/>
                   </a:moveTo>
                   <a:cubicBezTo>
-                    <a:pt x="29754" y="13245"/>
-                    <a:pt x="22953" y="0"/>
-                    <a:pt x="14877" y="3386"/>
-                  </a:cubicBezTo>
-                  <a:cubicBezTo>
-                    <a:pt x="6801" y="6775"/>
-                    <a:pt x="0" y="25837"/>
-                    <a:pt x="0" y="45585"/>
-                  </a:cubicBezTo>
-                  <a:cubicBezTo>
-                    <a:pt x="0" y="65332"/>
-                    <a:pt x="6801" y="78574"/>
-                    <a:pt x="14877" y="75330"/>
-                  </a:cubicBezTo>
-                  <a:cubicBezTo>
-                    <a:pt x="22953" y="72089"/>
-                    <a:pt x="29754" y="53035"/>
-                    <a:pt x="29754" y="33140"/>
+                    <a:pt x="25298" y="30529"/>
+                    <a:pt x="19516" y="11336"/>
+                    <a:pt x="12649" y="5668"/>
+                  </a:cubicBezTo>
+                  <a:cubicBezTo>
+                    <a:pt x="5782" y="0"/>
+                    <a:pt x="0" y="9850"/>
+                    <a:pt x="0" y="27668"/>
+                  </a:cubicBezTo>
+                  <a:cubicBezTo>
+                    <a:pt x="0" y="45485"/>
+                    <a:pt x="5782" y="64679"/>
+                    <a:pt x="12649" y="70355"/>
+                  </a:cubicBezTo>
+                  <a:cubicBezTo>
+                    <a:pt x="19516" y="76031"/>
+                    <a:pt x="25298" y="66182"/>
+                    <a:pt x="25298" y="48356"/>
                   </a:cubicBezTo>
                   <a:close/>
                 </a:path>
@@ -3824,14 +3765,14 @@
         </p:sp>
         <p:sp>
           <p:nvSpPr>
-            <p:cNvPr id="63" name="right Speaker column 2 row 1 19"/>
+            <p:cNvPr id="57" name="right Speaker column 2 row 1 20"/>
             <p:cNvSpPr/>
             <p:nvPr/>
           </p:nvSpPr>
           <p:spPr>
             <a:xfrm>
-              <a:off x="8382203" y="1721173"/>
-              <a:ext cx="29754" cy="78099"/>
+              <a:off x="8363745" y="1570444"/>
+              <a:ext cx="25298" cy="76058"/>
             </a:xfrm>
             <a:custGeom>
               <a:avLst/>
@@ -3840,29 +3781,29 @@
               <a:cxnLst/>
               <a:rect l="0" t="0" r="r" b="b"/>
               <a:pathLst>
-                <a:path w="29754" h="78099" fill="norm">
+                <a:path w="25298" h="76058" fill="norm">
                   <a:moveTo>
-                    <a:pt x="29754" y="33339"/>
+                    <a:pt x="25298" y="48394"/>
                   </a:moveTo>
                   <a:cubicBezTo>
-                    <a:pt x="29754" y="13444"/>
-                    <a:pt x="22953" y="0"/>
-                    <a:pt x="14877" y="3149"/>
-                  </a:cubicBezTo>
-                  <a:cubicBezTo>
-                    <a:pt x="6801" y="6300"/>
-                    <a:pt x="0" y="25162"/>
-                    <a:pt x="0" y="44909"/>
-                  </a:cubicBezTo>
-                  <a:cubicBezTo>
-                    <a:pt x="0" y="64656"/>
-                    <a:pt x="6801" y="78099"/>
-                    <a:pt x="14877" y="75093"/>
-                  </a:cubicBezTo>
-                  <a:cubicBezTo>
-                    <a:pt x="22953" y="72089"/>
-                    <a:pt x="29754" y="53234"/>
-                    <a:pt x="29754" y="33339"/>
+                    <a:pt x="25298" y="30568"/>
+                    <a:pt x="19516" y="11362"/>
+                    <a:pt x="12649" y="5681"/>
+                  </a:cubicBezTo>
+                  <a:cubicBezTo>
+                    <a:pt x="5782" y="0"/>
+                    <a:pt x="0" y="9838"/>
+                    <a:pt x="0" y="27656"/>
+                  </a:cubicBezTo>
+                  <a:cubicBezTo>
+                    <a:pt x="0" y="45474"/>
+                    <a:pt x="5782" y="64679"/>
+                    <a:pt x="12649" y="70368"/>
+                  </a:cubicBezTo>
+                  <a:cubicBezTo>
+                    <a:pt x="19516" y="76058"/>
+                    <a:pt x="25298" y="66220"/>
+                    <a:pt x="25298" y="48394"/>
                   </a:cubicBezTo>
                   <a:close/>
                 </a:path>
@@ -3879,14 +3820,14 @@
         </p:sp>
         <p:sp>
           <p:nvSpPr>
-            <p:cNvPr id="64" name="right Speaker column 2 row 1 20"/>
+            <p:cNvPr id="58" name="right Speaker column 2 row 1 21"/>
             <p:cNvSpPr/>
             <p:nvPr/>
           </p:nvSpPr>
           <p:spPr>
             <a:xfrm>
-              <a:off x="8382203" y="1838869"/>
-              <a:ext cx="29754" cy="77257"/>
+              <a:off x="8363745" y="1675383"/>
+              <a:ext cx="25298" cy="76415"/>
             </a:xfrm>
             <a:custGeom>
               <a:avLst/>
@@ -3895,29 +3836,29 @@
               <a:cxnLst/>
               <a:rect l="0" t="0" r="r" b="b"/>
               <a:pathLst>
-                <a:path w="29754" h="77257" fill="norm">
+                <a:path w="25298" h="76415" fill="norm">
                   <a:moveTo>
-                    <a:pt x="29754" y="33539"/>
+                    <a:pt x="25298" y="49092"/>
                   </a:moveTo>
                   <a:cubicBezTo>
-                    <a:pt x="29754" y="13644"/>
-                    <a:pt x="22953" y="0"/>
-                    <a:pt x="14877" y="2545"/>
-                  </a:cubicBezTo>
-                  <a:cubicBezTo>
-                    <a:pt x="6801" y="5093"/>
-                    <a:pt x="0" y="23754"/>
-                    <a:pt x="0" y="43867"/>
-                  </a:cubicBezTo>
-                  <a:cubicBezTo>
-                    <a:pt x="0" y="63980"/>
-                    <a:pt x="6801" y="77257"/>
-                    <a:pt x="14877" y="74489"/>
-                  </a:cubicBezTo>
-                  <a:cubicBezTo>
-                    <a:pt x="22953" y="71721"/>
-                    <a:pt x="29754" y="53434"/>
-                    <a:pt x="29754" y="33539"/>
+                    <a:pt x="25298" y="31266"/>
+                    <a:pt x="19516" y="12049"/>
+                    <a:pt x="12649" y="6025"/>
+                  </a:cubicBezTo>
+                  <a:cubicBezTo>
+                    <a:pt x="5782" y="0"/>
+                    <a:pt x="0" y="9827"/>
+                    <a:pt x="0" y="27975"/>
+                  </a:cubicBezTo>
+                  <a:cubicBezTo>
+                    <a:pt x="0" y="46123"/>
+                    <a:pt x="5782" y="65009"/>
+                    <a:pt x="12649" y="70712"/>
+                  </a:cubicBezTo>
+                  <a:cubicBezTo>
+                    <a:pt x="19516" y="76415"/>
+                    <a:pt x="25298" y="66918"/>
+                    <a:pt x="25298" y="49092"/>
                   </a:cubicBezTo>
                   <a:close/>
                 </a:path>
@@ -3934,14 +3875,14 @@
         </p:sp>
         <p:sp>
           <p:nvSpPr>
-            <p:cNvPr id="65" name="right Speaker column 2 row 1 21"/>
+            <p:cNvPr id="59" name="right Speaker column 2 row 1 22"/>
             <p:cNvSpPr/>
             <p:nvPr/>
           </p:nvSpPr>
           <p:spPr>
             <a:xfrm>
-              <a:off x="8382203" y="1956198"/>
-              <a:ext cx="29754" cy="76417"/>
+              <a:off x="8363745" y="1780651"/>
+              <a:ext cx="25298" cy="76772"/>
             </a:xfrm>
             <a:custGeom>
               <a:avLst/>
@@ -3950,29 +3891,29 @@
               <a:cxnLst/>
               <a:rect l="0" t="0" r="r" b="b"/>
               <a:pathLst>
-                <a:path w="29754" h="76417" fill="norm">
+                <a:path w="25298" h="76772" fill="norm">
                   <a:moveTo>
-                    <a:pt x="29754" y="33738"/>
+                    <a:pt x="25298" y="49130"/>
                   </a:moveTo>
                   <a:cubicBezTo>
-                    <a:pt x="29754" y="13843"/>
-                    <a:pt x="22953" y="0"/>
-                    <a:pt x="14877" y="2308"/>
-                  </a:cubicBezTo>
-                  <a:cubicBezTo>
-                    <a:pt x="6801" y="4619"/>
-                    <a:pt x="0" y="23081"/>
-                    <a:pt x="0" y="42828"/>
-                  </a:cubicBezTo>
-                  <a:cubicBezTo>
-                    <a:pt x="0" y="62575"/>
-                    <a:pt x="6801" y="76417"/>
-                    <a:pt x="14877" y="74252"/>
-                  </a:cubicBezTo>
-                  <a:cubicBezTo>
-                    <a:pt x="22953" y="72089"/>
-                    <a:pt x="29754" y="53633"/>
-                    <a:pt x="29754" y="33738"/>
+                    <a:pt x="25298" y="31304"/>
+                    <a:pt x="19516" y="12076"/>
+                    <a:pt x="12649" y="6038"/>
+                  </a:cubicBezTo>
+                  <a:cubicBezTo>
+                    <a:pt x="5782" y="0"/>
+                    <a:pt x="0" y="9816"/>
+                    <a:pt x="0" y="27634"/>
+                  </a:cubicBezTo>
+                  <a:cubicBezTo>
+                    <a:pt x="0" y="45451"/>
+                    <a:pt x="5782" y="64679"/>
+                    <a:pt x="12649" y="70725"/>
+                  </a:cubicBezTo>
+                  <a:cubicBezTo>
+                    <a:pt x="19516" y="76772"/>
+                    <a:pt x="25298" y="66956"/>
+                    <a:pt x="25298" y="49130"/>
                   </a:cubicBezTo>
                   <a:close/>
                 </a:path>
@@ -3989,14 +3930,14 @@
         </p:sp>
         <p:sp>
           <p:nvSpPr>
-            <p:cNvPr id="66" name="right Speaker column 2 row 1 22"/>
+            <p:cNvPr id="60" name="right Speaker column 2 row 1 23"/>
             <p:cNvSpPr/>
             <p:nvPr/>
           </p:nvSpPr>
           <p:spPr>
             <a:xfrm>
-              <a:off x="8424709" y="1167007"/>
-              <a:ext cx="29754" cy="81705"/>
+              <a:off x="8399885" y="1123359"/>
+              <a:ext cx="25298" cy="75653"/>
             </a:xfrm>
             <a:custGeom>
               <a:avLst/>
@@ -4005,29 +3946,29 @@
               <a:cxnLst/>
               <a:rect l="0" t="0" r="r" b="b"/>
               <a:pathLst>
-                <a:path w="29754" h="81705" fill="norm">
+                <a:path w="25298" h="75653" fill="norm">
                   <a:moveTo>
-                    <a:pt x="29754" y="32835"/>
+                    <a:pt x="25298" y="47586"/>
                   </a:moveTo>
                   <a:cubicBezTo>
-                    <a:pt x="29754" y="12731"/>
-                    <a:pt x="22953" y="0"/>
-                    <a:pt x="14877" y="4570"/>
-                  </a:cubicBezTo>
-                  <a:cubicBezTo>
-                    <a:pt x="6801" y="9143"/>
-                    <a:pt x="0" y="29434"/>
-                    <a:pt x="0" y="49391"/>
-                  </a:cubicBezTo>
-                  <a:cubicBezTo>
-                    <a:pt x="0" y="69349"/>
-                    <a:pt x="6801" y="81705"/>
-                    <a:pt x="14877" y="77647"/>
-                  </a:cubicBezTo>
-                  <a:cubicBezTo>
-                    <a:pt x="23378" y="72675"/>
-                    <a:pt x="29754" y="52939"/>
-                    <a:pt x="29754" y="32835"/>
+                    <a:pt x="25298" y="29748"/>
+                    <a:pt x="19516" y="10583"/>
+                    <a:pt x="12649" y="5291"/>
+                  </a:cubicBezTo>
+                  <a:cubicBezTo>
+                    <a:pt x="5782" y="0"/>
+                    <a:pt x="0" y="10229"/>
+                    <a:pt x="0" y="28058"/>
+                  </a:cubicBezTo>
+                  <a:cubicBezTo>
+                    <a:pt x="0" y="45888"/>
+                    <a:pt x="5782" y="64722"/>
+                    <a:pt x="12649" y="70352"/>
+                  </a:cubicBezTo>
+                  <a:cubicBezTo>
+                    <a:pt x="19877" y="75653"/>
+                    <a:pt x="25298" y="65424"/>
+                    <a:pt x="25298" y="47586"/>
                   </a:cubicBezTo>
                   <a:close/>
                 </a:path>
@@ -4044,14 +3985,14 @@
         </p:sp>
         <p:sp>
           <p:nvSpPr>
-            <p:cNvPr id="67" name="right Speaker column 2 row 1 23"/>
+            <p:cNvPr id="61" name="right Speaker column 2 row 1 24"/>
             <p:cNvSpPr/>
             <p:nvPr/>
           </p:nvSpPr>
           <p:spPr>
             <a:xfrm>
-              <a:off x="8424709" y="1286688"/>
-              <a:ext cx="29754" cy="81602"/>
+              <a:off x="8399885" y="1229687"/>
+              <a:ext cx="25298" cy="75681"/>
             </a:xfrm>
             <a:custGeom>
               <a:avLst/>
@@ -4060,29 +4001,29 @@
               <a:cxnLst/>
               <a:rect l="0" t="0" r="r" b="b"/>
               <a:pathLst>
-                <a:path w="29754" h="81602" fill="norm">
+                <a:path w="25298" h="75681" fill="norm">
                   <a:moveTo>
-                    <a:pt x="29754" y="33033"/>
+                    <a:pt x="25298" y="47625"/>
                   </a:moveTo>
                   <a:cubicBezTo>
-                    <a:pt x="29754" y="12929"/>
-                    <a:pt x="22953" y="0"/>
-                    <a:pt x="14877" y="4334"/>
-                  </a:cubicBezTo>
-                  <a:cubicBezTo>
-                    <a:pt x="6376" y="9210"/>
-                    <a:pt x="0" y="28761"/>
-                    <a:pt x="0" y="48719"/>
-                  </a:cubicBezTo>
-                  <a:cubicBezTo>
-                    <a:pt x="0" y="68677"/>
-                    <a:pt x="6801" y="81602"/>
-                    <a:pt x="14877" y="77411"/>
-                  </a:cubicBezTo>
-                  <a:cubicBezTo>
-                    <a:pt x="23378" y="72688"/>
-                    <a:pt x="29754" y="53510"/>
-                    <a:pt x="29754" y="33033"/>
+                    <a:pt x="25298" y="29787"/>
+                    <a:pt x="19516" y="10611"/>
+                    <a:pt x="12649" y="5306"/>
+                  </a:cubicBezTo>
+                  <a:cubicBezTo>
+                    <a:pt x="5421" y="0"/>
+                    <a:pt x="0" y="10218"/>
+                    <a:pt x="0" y="28048"/>
+                  </a:cubicBezTo>
+                  <a:cubicBezTo>
+                    <a:pt x="0" y="45878"/>
+                    <a:pt x="5782" y="65054"/>
+                    <a:pt x="12649" y="70367"/>
+                  </a:cubicBezTo>
+                  <a:cubicBezTo>
+                    <a:pt x="19877" y="75681"/>
+                    <a:pt x="25298" y="65793"/>
+                    <a:pt x="25298" y="47625"/>
                   </a:cubicBezTo>
                   <a:close/>
                 </a:path>
@@ -4099,14 +4040,14 @@
         </p:sp>
         <p:sp>
           <p:nvSpPr>
-            <p:cNvPr id="68" name="right Speaker column 2 row 1 24"/>
+            <p:cNvPr id="62" name="right Speaker column 2 row 1 25"/>
             <p:cNvSpPr/>
             <p:nvPr/>
           </p:nvSpPr>
           <p:spPr>
             <a:xfrm>
-              <a:off x="8424709" y="1405998"/>
-              <a:ext cx="29754" cy="80390"/>
+              <a:off x="8399885" y="1335025"/>
+              <a:ext cx="25298" cy="76040"/>
             </a:xfrm>
             <a:custGeom>
               <a:avLst/>
@@ -4115,29 +4056,29 @@
               <a:cxnLst/>
               <a:rect l="0" t="0" r="r" b="b"/>
               <a:pathLst>
-                <a:path w="29754" h="80390" fill="norm">
+                <a:path w="25298" h="76040" fill="norm">
                   <a:moveTo>
-                    <a:pt x="29754" y="33231"/>
+                    <a:pt x="25298" y="48324"/>
                   </a:moveTo>
                   <a:cubicBezTo>
-                    <a:pt x="29754" y="13127"/>
-                    <a:pt x="22953" y="0"/>
-                    <a:pt x="14877" y="3727"/>
-                  </a:cubicBezTo>
-                  <a:cubicBezTo>
-                    <a:pt x="6376" y="7986"/>
-                    <a:pt x="0" y="27351"/>
-                    <a:pt x="0" y="47309"/>
-                  </a:cubicBezTo>
-                  <a:cubicBezTo>
-                    <a:pt x="0" y="67267"/>
-                    <a:pt x="6801" y="80390"/>
-                    <a:pt x="14877" y="76433"/>
-                  </a:cubicBezTo>
-                  <a:cubicBezTo>
-                    <a:pt x="23378" y="72328"/>
-                    <a:pt x="29754" y="52963"/>
-                    <a:pt x="29754" y="32859"/>
+                    <a:pt x="25298" y="30486"/>
+                    <a:pt x="19516" y="11299"/>
+                    <a:pt x="12649" y="5650"/>
+                  </a:cubicBezTo>
+                  <a:cubicBezTo>
+                    <a:pt x="5421" y="0"/>
+                    <a:pt x="0" y="10208"/>
+                    <a:pt x="0" y="28038"/>
+                  </a:cubicBezTo>
+                  <a:cubicBezTo>
+                    <a:pt x="0" y="45867"/>
+                    <a:pt x="5782" y="65054"/>
+                    <a:pt x="12649" y="70381"/>
+                  </a:cubicBezTo>
+                  <a:cubicBezTo>
+                    <a:pt x="19877" y="76040"/>
+                    <a:pt x="25298" y="65832"/>
+                    <a:pt x="25298" y="47994"/>
                   </a:cubicBezTo>
                   <a:close/>
                 </a:path>
@@ -4154,14 +4095,14 @@
         </p:sp>
         <p:sp>
           <p:nvSpPr>
-            <p:cNvPr id="69" name="right Speaker column 2 row 1 25"/>
+            <p:cNvPr id="63" name="right Speaker column 2 row 1 26"/>
             <p:cNvSpPr/>
             <p:nvPr/>
           </p:nvSpPr>
           <p:spPr>
             <a:xfrm>
-              <a:off x="8424709" y="1525308"/>
-              <a:ext cx="29754" cy="79918"/>
+              <a:off x="8399885" y="1441024"/>
+              <a:ext cx="25298" cy="76398"/>
             </a:xfrm>
             <a:custGeom>
               <a:avLst/>
@@ -4170,29 +4111,29 @@
               <a:cxnLst/>
               <a:rect l="0" t="0" r="r" b="b"/>
               <a:pathLst>
-                <a:path w="29754" h="79918" fill="norm">
+                <a:path w="25298" h="76398" fill="norm">
                   <a:moveTo>
-                    <a:pt x="29754" y="33429"/>
+                    <a:pt x="25298" y="48363"/>
                   </a:moveTo>
                   <a:cubicBezTo>
-                    <a:pt x="29754" y="13325"/>
-                    <a:pt x="22953" y="0"/>
-                    <a:pt x="14877" y="3492"/>
-                  </a:cubicBezTo>
-                  <a:cubicBezTo>
-                    <a:pt x="6376" y="7502"/>
-                    <a:pt x="0" y="26680"/>
-                    <a:pt x="0" y="46638"/>
-                  </a:cubicBezTo>
-                  <a:cubicBezTo>
-                    <a:pt x="0" y="66596"/>
-                    <a:pt x="6801" y="79918"/>
-                    <a:pt x="14877" y="76568"/>
-                  </a:cubicBezTo>
-                  <a:cubicBezTo>
-                    <a:pt x="23378" y="72713"/>
-                    <a:pt x="29754" y="53906"/>
-                    <a:pt x="29754" y="33429"/>
+                    <a:pt x="25298" y="30525"/>
+                    <a:pt x="19516" y="11326"/>
+                    <a:pt x="12649" y="5664"/>
+                  </a:cubicBezTo>
+                  <a:cubicBezTo>
+                    <a:pt x="5421" y="0"/>
+                    <a:pt x="0" y="10197"/>
+                    <a:pt x="0" y="28027"/>
+                  </a:cubicBezTo>
+                  <a:cubicBezTo>
+                    <a:pt x="0" y="45857"/>
+                    <a:pt x="5782" y="65055"/>
+                    <a:pt x="12649" y="70725"/>
+                  </a:cubicBezTo>
+                  <a:cubicBezTo>
+                    <a:pt x="19877" y="76398"/>
+                    <a:pt x="25298" y="66531"/>
+                    <a:pt x="25298" y="48363"/>
                   </a:cubicBezTo>
                   <a:close/>
                 </a:path>
@@ -4209,14 +4150,14 @@
         </p:sp>
         <p:sp>
           <p:nvSpPr>
-            <p:cNvPr id="70" name="right Speaker column 2 row 1 26"/>
+            <p:cNvPr id="64" name="right Speaker column 2 row 1 27"/>
             <p:cNvSpPr/>
             <p:nvPr/>
           </p:nvSpPr>
           <p:spPr>
             <a:xfrm>
-              <a:off x="8424709" y="1644617"/>
-              <a:ext cx="29754" cy="78706"/>
+              <a:off x="8399885" y="1546365"/>
+              <a:ext cx="25298" cy="76423"/>
             </a:xfrm>
             <a:custGeom>
               <a:avLst/>
@@ -4225,29 +4166,29 @@
               <a:cxnLst/>
               <a:rect l="0" t="0" r="r" b="b"/>
               <a:pathLst>
-                <a:path w="29754" h="78706" fill="norm">
+                <a:path w="25298" h="76423" fill="norm">
                   <a:moveTo>
-                    <a:pt x="29754" y="33627"/>
+                    <a:pt x="25298" y="49058"/>
                   </a:moveTo>
                   <a:cubicBezTo>
-                    <a:pt x="29754" y="13523"/>
-                    <a:pt x="22953" y="0"/>
-                    <a:pt x="14877" y="2885"/>
-                  </a:cubicBezTo>
-                  <a:cubicBezTo>
-                    <a:pt x="6801" y="5774"/>
-                    <a:pt x="0" y="25270"/>
-                    <a:pt x="0" y="45228"/>
-                  </a:cubicBezTo>
-                  <a:cubicBezTo>
-                    <a:pt x="0" y="65186"/>
-                    <a:pt x="6801" y="78706"/>
-                    <a:pt x="14877" y="75591"/>
-                  </a:cubicBezTo>
-                  <a:cubicBezTo>
-                    <a:pt x="23378" y="71981"/>
-                    <a:pt x="29754" y="53359"/>
-                    <a:pt x="29754" y="33255"/>
+                    <a:pt x="25298" y="31220"/>
+                    <a:pt x="19516" y="12011"/>
+                    <a:pt x="12649" y="6005"/>
+                  </a:cubicBezTo>
+                  <a:cubicBezTo>
+                    <a:pt x="5782" y="0"/>
+                    <a:pt x="0" y="10184"/>
+                    <a:pt x="0" y="28013"/>
+                  </a:cubicBezTo>
+                  <a:cubicBezTo>
+                    <a:pt x="0" y="45843"/>
+                    <a:pt x="5782" y="65053"/>
+                    <a:pt x="12649" y="70736"/>
+                  </a:cubicBezTo>
+                  <a:cubicBezTo>
+                    <a:pt x="19877" y="76423"/>
+                    <a:pt x="25298" y="66566"/>
+                    <a:pt x="25298" y="48728"/>
                   </a:cubicBezTo>
                   <a:close/>
                 </a:path>
@@ -4264,14 +4205,14 @@
         </p:sp>
         <p:sp>
           <p:nvSpPr>
-            <p:cNvPr id="71" name="right Speaker column 2 row 1 27"/>
+            <p:cNvPr id="65" name="right Speaker column 2 row 1 28"/>
             <p:cNvSpPr/>
             <p:nvPr/>
           </p:nvSpPr>
           <p:spPr>
             <a:xfrm>
-              <a:off x="8424709" y="1763555"/>
-              <a:ext cx="29754" cy="78606"/>
+              <a:off x="8399885" y="1652691"/>
+              <a:ext cx="25298" cy="76784"/>
             </a:xfrm>
             <a:custGeom>
               <a:avLst/>
@@ -4280,29 +4221,29 @@
               <a:cxnLst/>
               <a:rect l="0" t="0" r="r" b="b"/>
               <a:pathLst>
-                <a:path w="29754" h="78606" fill="norm">
+                <a:path w="25298" h="76784" fill="norm">
                   <a:moveTo>
-                    <a:pt x="29754" y="34197"/>
+                    <a:pt x="25298" y="48770"/>
                   </a:moveTo>
                   <a:cubicBezTo>
-                    <a:pt x="29754" y="14093"/>
-                    <a:pt x="22953" y="0"/>
-                    <a:pt x="14877" y="3021"/>
-                  </a:cubicBezTo>
-                  <a:cubicBezTo>
-                    <a:pt x="6376" y="6535"/>
-                    <a:pt x="0" y="24971"/>
-                    <a:pt x="0" y="44929"/>
-                  </a:cubicBezTo>
-                  <a:cubicBezTo>
-                    <a:pt x="0" y="64887"/>
-                    <a:pt x="6801" y="78606"/>
-                    <a:pt x="14877" y="76098"/>
-                  </a:cubicBezTo>
-                  <a:cubicBezTo>
-                    <a:pt x="23378" y="73109"/>
-                    <a:pt x="29754" y="54674"/>
-                    <a:pt x="29754" y="34197"/>
+                    <a:pt x="25298" y="30932"/>
+                    <a:pt x="19516" y="11381"/>
+                    <a:pt x="12649" y="5692"/>
+                  </a:cubicBezTo>
+                  <a:cubicBezTo>
+                    <a:pt x="5421" y="0"/>
+                    <a:pt x="0" y="9846"/>
+                    <a:pt x="0" y="27676"/>
+                  </a:cubicBezTo>
+                  <a:cubicBezTo>
+                    <a:pt x="0" y="45506"/>
+                    <a:pt x="5782" y="64726"/>
+                    <a:pt x="12649" y="70753"/>
+                  </a:cubicBezTo>
+                  <a:cubicBezTo>
+                    <a:pt x="19877" y="76784"/>
+                    <a:pt x="25298" y="66938"/>
+                    <a:pt x="25298" y="48770"/>
                   </a:cubicBezTo>
                   <a:close/>
                 </a:path>
@@ -4319,14 +4260,14 @@
         </p:sp>
         <p:sp>
           <p:nvSpPr>
-            <p:cNvPr id="72" name="right Speaker column 2 row 1 28"/>
+            <p:cNvPr id="66" name="right Speaker column 2 row 1 29"/>
             <p:cNvSpPr/>
             <p:nvPr/>
           </p:nvSpPr>
           <p:spPr>
             <a:xfrm>
-              <a:off x="8424709" y="1882865"/>
-              <a:ext cx="29754" cy="78135"/>
+              <a:off x="8399885" y="1758359"/>
+              <a:ext cx="25298" cy="76812"/>
             </a:xfrm>
             <a:custGeom>
               <a:avLst/>
@@ -4335,29 +4276,29 @@
               <a:cxnLst/>
               <a:rect l="0" t="0" r="r" b="b"/>
               <a:pathLst>
-                <a:path w="29754" h="78135" fill="norm">
+                <a:path w="25298" h="76812" fill="norm">
                   <a:moveTo>
-                    <a:pt x="29754" y="34395"/>
+                    <a:pt x="25298" y="49139"/>
                   </a:moveTo>
                   <a:cubicBezTo>
-                    <a:pt x="29754" y="14291"/>
-                    <a:pt x="22953" y="0"/>
-                    <a:pt x="14877" y="2786"/>
-                  </a:cubicBezTo>
-                  <a:cubicBezTo>
-                    <a:pt x="6376" y="5681"/>
-                    <a:pt x="0" y="23930"/>
-                    <a:pt x="0" y="43888"/>
-                  </a:cubicBezTo>
-                  <a:cubicBezTo>
-                    <a:pt x="0" y="63846"/>
-                    <a:pt x="6801" y="78135"/>
-                    <a:pt x="14877" y="75491"/>
-                  </a:cubicBezTo>
-                  <a:cubicBezTo>
-                    <a:pt x="23378" y="72750"/>
-                    <a:pt x="29754" y="54499"/>
-                    <a:pt x="29754" y="34395"/>
+                    <a:pt x="25298" y="31301"/>
+                    <a:pt x="19516" y="11739"/>
+                    <a:pt x="12649" y="6037"/>
+                  </a:cubicBezTo>
+                  <a:cubicBezTo>
+                    <a:pt x="5421" y="0"/>
+                    <a:pt x="0" y="9835"/>
+                    <a:pt x="0" y="27665"/>
+                  </a:cubicBezTo>
+                  <a:cubicBezTo>
+                    <a:pt x="0" y="45495"/>
+                    <a:pt x="5782" y="65057"/>
+                    <a:pt x="12649" y="70767"/>
+                  </a:cubicBezTo>
+                  <a:cubicBezTo>
+                    <a:pt x="19877" y="76812"/>
+                    <a:pt x="25298" y="66977"/>
+                    <a:pt x="25298" y="49139"/>
                   </a:cubicBezTo>
                   <a:close/>
                 </a:path>
@@ -4374,14 +4315,14 @@
         </p:sp>
         <p:sp>
           <p:nvSpPr>
-            <p:cNvPr id="73" name="right Speaker column 2 row 1 29"/>
+            <p:cNvPr id="67" name="right Speaker column 2 row 1 30"/>
             <p:cNvSpPr/>
             <p:nvPr/>
           </p:nvSpPr>
           <p:spPr>
             <a:xfrm>
-              <a:off x="8466790" y="1202828"/>
-              <a:ext cx="30604" cy="83289"/>
+              <a:off x="8435664" y="1203679"/>
+              <a:ext cx="26021" cy="76042"/>
             </a:xfrm>
             <a:custGeom>
               <a:avLst/>
@@ -4390,29 +4331,29 @@
               <a:cxnLst/>
               <a:rect l="0" t="0" r="r" b="b"/>
               <a:pathLst>
-                <a:path w="30604" h="83289" fill="norm">
+                <a:path w="26021" h="76042" fill="norm">
                   <a:moveTo>
-                    <a:pt x="30604" y="33326"/>
+                    <a:pt x="26021" y="48290"/>
                   </a:moveTo>
                   <a:cubicBezTo>
-                    <a:pt x="30604" y="12637"/>
-                    <a:pt x="23803" y="0"/>
-                    <a:pt x="15302" y="4614"/>
-                  </a:cubicBezTo>
-                  <a:cubicBezTo>
-                    <a:pt x="6801" y="9231"/>
-                    <a:pt x="0" y="29955"/>
-                    <a:pt x="0" y="50119"/>
-                  </a:cubicBezTo>
-                  <a:cubicBezTo>
-                    <a:pt x="0" y="70283"/>
-                    <a:pt x="6801" y="83289"/>
-                    <a:pt x="15302" y="78448"/>
-                  </a:cubicBezTo>
-                  <a:cubicBezTo>
-                    <a:pt x="23803" y="73609"/>
-                    <a:pt x="30604" y="53639"/>
-                    <a:pt x="30604" y="32950"/>
+                    <a:pt x="26021" y="30110"/>
+                    <a:pt x="20239" y="11260"/>
+                    <a:pt x="13011" y="5630"/>
+                  </a:cubicBezTo>
+                  <a:cubicBezTo>
+                    <a:pt x="5782" y="0"/>
+                    <a:pt x="0" y="10562"/>
+                    <a:pt x="0" y="28404"/>
+                  </a:cubicBezTo>
+                  <a:cubicBezTo>
+                    <a:pt x="0" y="46245"/>
+                    <a:pt x="5782" y="65426"/>
+                    <a:pt x="13011" y="70734"/>
+                  </a:cubicBezTo>
+                  <a:cubicBezTo>
+                    <a:pt x="20239" y="76042"/>
+                    <a:pt x="26021" y="66140"/>
+                    <a:pt x="26021" y="47960"/>
                   </a:cubicBezTo>
                   <a:close/>
                 </a:path>
@@ -4429,14 +4370,14 @@
         </p:sp>
         <p:sp>
           <p:nvSpPr>
-            <p:cNvPr id="74" name="right Speaker column 2 row 1 30"/>
+            <p:cNvPr id="68" name="right Speaker column 2 row 1 31"/>
             <p:cNvSpPr/>
             <p:nvPr/>
           </p:nvSpPr>
           <p:spPr>
             <a:xfrm>
-              <a:off x="8466790" y="1323758"/>
-              <a:ext cx="30604" cy="82796"/>
+              <a:off x="8435664" y="1310078"/>
+              <a:ext cx="26021" cy="76731"/>
             </a:xfrm>
             <a:custGeom>
               <a:avLst/>
@@ -4445,29 +4386,29 @@
               <a:cxnLst/>
               <a:rect l="0" t="0" r="r" b="b"/>
               <a:pathLst>
-                <a:path w="30604" h="82796" fill="norm">
+                <a:path w="26021" h="76731" fill="norm">
                   <a:moveTo>
-                    <a:pt x="30604" y="33523"/>
+                    <a:pt x="26021" y="48329"/>
                   </a:moveTo>
                   <a:cubicBezTo>
-                    <a:pt x="30604" y="12833"/>
-                    <a:pt x="23803" y="0"/>
-                    <a:pt x="15302" y="4368"/>
-                  </a:cubicBezTo>
-                  <a:cubicBezTo>
-                    <a:pt x="6801" y="8738"/>
-                    <a:pt x="0" y="28891"/>
-                    <a:pt x="0" y="49428"/>
-                  </a:cubicBezTo>
-                  <a:cubicBezTo>
-                    <a:pt x="0" y="69966"/>
-                    <a:pt x="6801" y="82796"/>
-                    <a:pt x="15302" y="78577"/>
-                  </a:cubicBezTo>
-                  <a:cubicBezTo>
-                    <a:pt x="23803" y="74361"/>
-                    <a:pt x="30604" y="54212"/>
-                    <a:pt x="30604" y="33523"/>
+                    <a:pt x="26021" y="30149"/>
+                    <a:pt x="20239" y="11288"/>
+                    <a:pt x="13011" y="5644"/>
+                  </a:cubicBezTo>
+                  <a:cubicBezTo>
+                    <a:pt x="5782" y="0"/>
+                    <a:pt x="0" y="10221"/>
+                    <a:pt x="0" y="28393"/>
+                  </a:cubicBezTo>
+                  <a:cubicBezTo>
+                    <a:pt x="0" y="46564"/>
+                    <a:pt x="5782" y="65426"/>
+                    <a:pt x="13011" y="71078"/>
+                  </a:cubicBezTo>
+                  <a:cubicBezTo>
+                    <a:pt x="20239" y="76731"/>
+                    <a:pt x="26021" y="66510"/>
+                    <a:pt x="26021" y="48329"/>
                   </a:cubicBezTo>
                   <a:close/>
                 </a:path>
@@ -4484,14 +4425,14 @@
         </p:sp>
         <p:sp>
           <p:nvSpPr>
-            <p:cNvPr id="75" name="right Speaker column 2 row 1 31"/>
+            <p:cNvPr id="69" name="right Speaker column 2 row 1 32"/>
             <p:cNvSpPr/>
             <p:nvPr/>
           </p:nvSpPr>
           <p:spPr>
             <a:xfrm>
-              <a:off x="8466790" y="1444688"/>
-              <a:ext cx="30604" cy="82303"/>
+              <a:off x="8435664" y="1417138"/>
+              <a:ext cx="26021" cy="76098"/>
             </a:xfrm>
             <a:custGeom>
               <a:avLst/>
@@ -4500,29 +4441,29 @@
               <a:cxnLst/>
               <a:rect l="0" t="0" r="r" b="b"/>
               <a:pathLst>
-                <a:path w="30604" h="82303" fill="norm">
+                <a:path w="26021" h="76098" fill="norm">
                   <a:moveTo>
-                    <a:pt x="30604" y="34095"/>
+                    <a:pt x="26021" y="48038"/>
                   </a:moveTo>
                   <a:cubicBezTo>
-                    <a:pt x="30604" y="13406"/>
-                    <a:pt x="23803" y="0"/>
-                    <a:pt x="15302" y="4496"/>
-                  </a:cubicBezTo>
-                  <a:cubicBezTo>
-                    <a:pt x="6801" y="8993"/>
-                    <a:pt x="0" y="28573"/>
-                    <a:pt x="0" y="48738"/>
-                  </a:cubicBezTo>
-                  <a:cubicBezTo>
-                    <a:pt x="0" y="68902"/>
-                    <a:pt x="6801" y="82303"/>
-                    <a:pt x="15302" y="78331"/>
-                  </a:cubicBezTo>
-                  <a:cubicBezTo>
-                    <a:pt x="23803" y="74361"/>
-                    <a:pt x="30604" y="54785"/>
-                    <a:pt x="30604" y="34095"/>
+                    <a:pt x="26021" y="29858"/>
+                    <a:pt x="20239" y="10655"/>
+                    <a:pt x="13011" y="5327"/>
+                  </a:cubicBezTo>
+                  <a:cubicBezTo>
+                    <a:pt x="5782" y="0"/>
+                    <a:pt x="0" y="9879"/>
+                    <a:pt x="0" y="27721"/>
+                  </a:cubicBezTo>
+                  <a:cubicBezTo>
+                    <a:pt x="0" y="45562"/>
+                    <a:pt x="5782" y="64765"/>
+                    <a:pt x="13011" y="70431"/>
+                  </a:cubicBezTo>
+                  <a:cubicBezTo>
+                    <a:pt x="20239" y="76098"/>
+                    <a:pt x="26021" y="66219"/>
+                    <a:pt x="26021" y="48038"/>
                   </a:cubicBezTo>
                   <a:close/>
                 </a:path>
@@ -4539,14 +4480,14 @@
         </p:sp>
         <p:sp>
           <p:nvSpPr>
-            <p:cNvPr id="76" name="right Speaker column 2 row 1 32"/>
+            <p:cNvPr id="70" name="right Speaker column 2 row 1 33"/>
             <p:cNvSpPr/>
             <p:nvPr/>
           </p:nvSpPr>
           <p:spPr>
             <a:xfrm>
-              <a:off x="8466790" y="1565618"/>
-              <a:ext cx="30604" cy="81810"/>
+              <a:off x="8435664" y="1522876"/>
+              <a:ext cx="26021" cy="76786"/>
             </a:xfrm>
             <a:custGeom>
               <a:avLst/>
@@ -4555,29 +4496,29 @@
               <a:cxnLst/>
               <a:rect l="0" t="0" r="r" b="b"/>
               <a:pathLst>
-                <a:path w="30604" h="81810" fill="norm">
+                <a:path w="26021" h="76786" fill="norm">
                   <a:moveTo>
-                    <a:pt x="30604" y="34292"/>
+                    <a:pt x="26021" y="48738"/>
                   </a:moveTo>
                   <a:cubicBezTo>
-                    <a:pt x="30604" y="13603"/>
-                    <a:pt x="23803" y="0"/>
-                    <a:pt x="15302" y="3876"/>
-                  </a:cubicBezTo>
-                  <a:cubicBezTo>
-                    <a:pt x="6801" y="7753"/>
-                    <a:pt x="0" y="27136"/>
-                    <a:pt x="0" y="47674"/>
-                  </a:cubicBezTo>
-                  <a:cubicBezTo>
-                    <a:pt x="0" y="68212"/>
-                    <a:pt x="6801" y="81810"/>
-                    <a:pt x="15302" y="78085"/>
-                  </a:cubicBezTo>
-                  <a:cubicBezTo>
-                    <a:pt x="23803" y="74361"/>
-                    <a:pt x="30604" y="54981"/>
-                    <a:pt x="30604" y="34292"/>
+                    <a:pt x="26021" y="30558"/>
+                    <a:pt x="20239" y="11344"/>
+                    <a:pt x="13011" y="5672"/>
+                  </a:cubicBezTo>
+                  <a:cubicBezTo>
+                    <a:pt x="5782" y="0"/>
+                    <a:pt x="0" y="9868"/>
+                    <a:pt x="0" y="28040"/>
+                  </a:cubicBezTo>
+                  <a:cubicBezTo>
+                    <a:pt x="0" y="46212"/>
+                    <a:pt x="5782" y="65426"/>
+                    <a:pt x="13011" y="71106"/>
+                  </a:cubicBezTo>
+                  <a:cubicBezTo>
+                    <a:pt x="20239" y="76786"/>
+                    <a:pt x="26021" y="66919"/>
+                    <a:pt x="26021" y="48738"/>
                   </a:cubicBezTo>
                   <a:close/>
                 </a:path>
@@ -4594,14 +4535,14 @@
         </p:sp>
         <p:sp>
           <p:nvSpPr>
-            <p:cNvPr id="77" name="right Speaker column 2 row 1 33"/>
+            <p:cNvPr id="71" name="right Speaker column 2 row 1 34"/>
             <p:cNvSpPr/>
             <p:nvPr/>
           </p:nvSpPr>
           <p:spPr>
             <a:xfrm>
-              <a:off x="8466790" y="1686923"/>
-              <a:ext cx="30604" cy="80942"/>
+              <a:off x="8435664" y="1629606"/>
+              <a:ext cx="26021" cy="76484"/>
             </a:xfrm>
             <a:custGeom>
               <a:avLst/>
@@ -4610,29 +4551,29 @@
               <a:cxnLst/>
               <a:rect l="0" t="0" r="r" b="b"/>
               <a:pathLst>
-                <a:path w="30604" h="80942" fill="norm">
+                <a:path w="26021" h="76484" fill="norm">
                   <a:moveTo>
-                    <a:pt x="30604" y="34489"/>
+                    <a:pt x="26021" y="48777"/>
                   </a:moveTo>
                   <a:cubicBezTo>
-                    <a:pt x="30604" y="13800"/>
-                    <a:pt x="23803" y="0"/>
-                    <a:pt x="15302" y="3629"/>
-                  </a:cubicBezTo>
-                  <a:cubicBezTo>
-                    <a:pt x="6801" y="7258"/>
-                    <a:pt x="0" y="26443"/>
-                    <a:pt x="0" y="46608"/>
-                  </a:cubicBezTo>
-                  <a:cubicBezTo>
-                    <a:pt x="0" y="66772"/>
-                    <a:pt x="6801" y="80942"/>
-                    <a:pt x="15302" y="77463"/>
-                  </a:cubicBezTo>
-                  <a:cubicBezTo>
-                    <a:pt x="23803" y="73985"/>
-                    <a:pt x="30604" y="54802"/>
-                    <a:pt x="30604" y="34489"/>
+                    <a:pt x="26021" y="30597"/>
+                    <a:pt x="20239" y="11372"/>
+                    <a:pt x="13011" y="5686"/>
+                  </a:cubicBezTo>
+                  <a:cubicBezTo>
+                    <a:pt x="5782" y="0"/>
+                    <a:pt x="0" y="9857"/>
+                    <a:pt x="0" y="27698"/>
+                  </a:cubicBezTo>
+                  <a:cubicBezTo>
+                    <a:pt x="0" y="45540"/>
+                    <a:pt x="5782" y="65095"/>
+                    <a:pt x="13011" y="70789"/>
+                  </a:cubicBezTo>
+                  <a:cubicBezTo>
+                    <a:pt x="20239" y="76484"/>
+                    <a:pt x="26021" y="66627"/>
+                    <a:pt x="26021" y="48777"/>
                   </a:cubicBezTo>
                   <a:close/>
                 </a:path>
@@ -4649,14 +4590,14 @@
         </p:sp>
         <p:sp>
           <p:nvSpPr>
-            <p:cNvPr id="78" name="right Speaker column 2 row 1 34"/>
+            <p:cNvPr id="72" name="right Speaker column 2 row 1 35"/>
             <p:cNvSpPr/>
             <p:nvPr/>
           </p:nvSpPr>
           <p:spPr>
             <a:xfrm>
-              <a:off x="8466790" y="1807853"/>
-              <a:ext cx="30604" cy="80075"/>
+              <a:off x="8435664" y="1735344"/>
+              <a:ext cx="26021" cy="77503"/>
             </a:xfrm>
             <a:custGeom>
               <a:avLst/>
@@ -4665,29 +4606,29 @@
               <a:cxnLst/>
               <a:rect l="0" t="0" r="r" b="b"/>
               <a:pathLst>
-                <a:path w="30604" h="80075" fill="norm">
+                <a:path w="26021" h="77503" fill="norm">
                   <a:moveTo>
-                    <a:pt x="30604" y="34686"/>
+                    <a:pt x="26021" y="49477"/>
                   </a:moveTo>
                   <a:cubicBezTo>
-                    <a:pt x="30604" y="13996"/>
-                    <a:pt x="23803" y="0"/>
-                    <a:pt x="15302" y="3008"/>
-                  </a:cubicBezTo>
-                  <a:cubicBezTo>
-                    <a:pt x="6801" y="6017"/>
-                    <a:pt x="0" y="25006"/>
-                    <a:pt x="0" y="45544"/>
-                  </a:cubicBezTo>
-                  <a:cubicBezTo>
-                    <a:pt x="0" y="66081"/>
-                    <a:pt x="6801" y="80075"/>
-                    <a:pt x="15302" y="77217"/>
-                  </a:cubicBezTo>
-                  <a:cubicBezTo>
-                    <a:pt x="23803" y="74361"/>
-                    <a:pt x="30604" y="55375"/>
-                    <a:pt x="30604" y="34686"/>
+                    <a:pt x="26021" y="31297"/>
+                    <a:pt x="20239" y="12060"/>
+                    <a:pt x="13011" y="6030"/>
+                  </a:cubicBezTo>
+                  <a:cubicBezTo>
+                    <a:pt x="5782" y="0"/>
+                    <a:pt x="0" y="9846"/>
+                    <a:pt x="0" y="28017"/>
+                  </a:cubicBezTo>
+                  <a:cubicBezTo>
+                    <a:pt x="0" y="46189"/>
+                    <a:pt x="5782" y="65426"/>
+                    <a:pt x="13011" y="71464"/>
+                  </a:cubicBezTo>
+                  <a:cubicBezTo>
+                    <a:pt x="20239" y="77503"/>
+                    <a:pt x="26021" y="67658"/>
+                    <a:pt x="26021" y="49477"/>
                   </a:cubicBezTo>
                   <a:close/>
                 </a:path>
@@ -4704,14 +4645,14 @@
         </p:sp>
         <p:sp>
           <p:nvSpPr>
-            <p:cNvPr id="79" name="right Speaker column 2 row 1 35"/>
+            <p:cNvPr id="73" name="right Speaker column 2 row 1 36"/>
             <p:cNvSpPr/>
             <p:nvPr/>
           </p:nvSpPr>
           <p:spPr>
             <a:xfrm>
-              <a:off x="8510146" y="1239407"/>
-              <a:ext cx="30604" cy="84544"/>
+              <a:off x="8472527" y="1285396"/>
+              <a:ext cx="26021" cy="76100"/>
             </a:xfrm>
             <a:custGeom>
               <a:avLst/>
@@ -4720,29 +4661,29 @@
               <a:cxnLst/>
               <a:rect l="0" t="0" r="r" b="b"/>
               <a:pathLst>
-                <a:path w="30604" h="84544" fill="norm">
+                <a:path w="26021" h="76100" fill="norm">
                   <a:moveTo>
-                    <a:pt x="30604" y="34194"/>
+                    <a:pt x="26021" y="48003"/>
                   </a:moveTo>
                   <a:cubicBezTo>
-                    <a:pt x="30604" y="13292"/>
-                    <a:pt x="23803" y="0"/>
-                    <a:pt x="15302" y="4858"/>
-                  </a:cubicBezTo>
-                  <a:cubicBezTo>
-                    <a:pt x="6801" y="9717"/>
-                    <a:pt x="0" y="29754"/>
-                    <a:pt x="0" y="50506"/>
-                  </a:cubicBezTo>
-                  <a:cubicBezTo>
-                    <a:pt x="0" y="71258"/>
-                    <a:pt x="6801" y="84544"/>
-                    <a:pt x="15302" y="79836"/>
-                  </a:cubicBezTo>
-                  <a:cubicBezTo>
-                    <a:pt x="23803" y="75128"/>
-                    <a:pt x="30604" y="55096"/>
-                    <a:pt x="30604" y="34194"/>
+                    <a:pt x="26021" y="29810"/>
+                    <a:pt x="20239" y="10614"/>
+                    <a:pt x="13011" y="5307"/>
+                  </a:cubicBezTo>
+                  <a:cubicBezTo>
+                    <a:pt x="5782" y="0"/>
+                    <a:pt x="0" y="9905"/>
+                    <a:pt x="0" y="28089"/>
+                  </a:cubicBezTo>
+                  <a:cubicBezTo>
+                    <a:pt x="0" y="46273"/>
+                    <a:pt x="5782" y="65469"/>
+                    <a:pt x="13011" y="70785"/>
+                  </a:cubicBezTo>
+                  <a:cubicBezTo>
+                    <a:pt x="20239" y="76100"/>
+                    <a:pt x="26021" y="66195"/>
+                    <a:pt x="26021" y="48003"/>
                   </a:cubicBezTo>
                   <a:close/>
                 </a:path>
@@ -4759,14 +4700,14 @@
         </p:sp>
         <p:sp>
           <p:nvSpPr>
-            <p:cNvPr id="80" name="right Speaker column 2 row 1 36"/>
+            <p:cNvPr id="74" name="right Speaker column 2 row 1 37"/>
             <p:cNvSpPr/>
             <p:nvPr/>
           </p:nvSpPr>
           <p:spPr>
             <a:xfrm>
-              <a:off x="8510146" y="1362344"/>
-              <a:ext cx="30604" cy="83676"/>
+              <a:off x="8472527" y="1391866"/>
+              <a:ext cx="26021" cy="77120"/>
             </a:xfrm>
             <a:custGeom>
               <a:avLst/>
@@ -4775,29 +4716,29 @@
               <a:cxnLst/>
               <a:rect l="0" t="0" r="r" b="b"/>
               <a:pathLst>
-                <a:path w="30604" h="83676" fill="norm">
+                <a:path w="26021" h="77120" fill="norm">
                   <a:moveTo>
-                    <a:pt x="30604" y="34390"/>
+                    <a:pt x="26021" y="48703"/>
                   </a:moveTo>
                   <a:cubicBezTo>
-                    <a:pt x="30604" y="13488"/>
-                    <a:pt x="23803" y="0"/>
-                    <a:pt x="15302" y="4234"/>
-                  </a:cubicBezTo>
-                  <a:cubicBezTo>
-                    <a:pt x="6801" y="8470"/>
-                    <a:pt x="0" y="28689"/>
-                    <a:pt x="0" y="49441"/>
-                  </a:cubicBezTo>
-                  <a:cubicBezTo>
-                    <a:pt x="0" y="70193"/>
-                    <a:pt x="6801" y="83676"/>
-                    <a:pt x="15302" y="79591"/>
-                  </a:cubicBezTo>
-                  <a:cubicBezTo>
-                    <a:pt x="23803" y="75507"/>
-                    <a:pt x="30604" y="55292"/>
-                    <a:pt x="30604" y="34390"/>
+                    <a:pt x="26021" y="30511"/>
+                    <a:pt x="20239" y="11303"/>
+                    <a:pt x="13011" y="5651"/>
+                  </a:cubicBezTo>
+                  <a:cubicBezTo>
+                    <a:pt x="5782" y="0"/>
+                    <a:pt x="0" y="10225"/>
+                    <a:pt x="0" y="28409"/>
+                  </a:cubicBezTo>
+                  <a:cubicBezTo>
+                    <a:pt x="0" y="46593"/>
+                    <a:pt x="5782" y="65800"/>
+                    <a:pt x="13011" y="71460"/>
+                  </a:cubicBezTo>
+                  <a:cubicBezTo>
+                    <a:pt x="20239" y="77120"/>
+                    <a:pt x="26021" y="66896"/>
+                    <a:pt x="26021" y="48703"/>
                   </a:cubicBezTo>
                   <a:close/>
                 </a:path>
@@ -4814,14 +4755,14 @@
         </p:sp>
         <p:sp>
           <p:nvSpPr>
-            <p:cNvPr id="81" name="right Speaker column 2 row 1 37"/>
+            <p:cNvPr id="75" name="right Speaker column 2 row 1 38"/>
             <p:cNvSpPr/>
             <p:nvPr/>
           </p:nvSpPr>
           <p:spPr>
             <a:xfrm>
-              <a:off x="8510146" y="1485280"/>
-              <a:ext cx="30604" cy="82807"/>
+              <a:off x="8472527" y="1498998"/>
+              <a:ext cx="26021" cy="76817"/>
             </a:xfrm>
             <a:custGeom>
               <a:avLst/>
@@ -4830,29 +4771,29 @@
               <a:cxnLst/>
               <a:rect l="0" t="0" r="r" b="b"/>
               <a:pathLst>
-                <a:path w="30604" h="82807" fill="norm">
+                <a:path w="26021" h="76817" fill="norm">
                   <a:moveTo>
-                    <a:pt x="30604" y="34586"/>
+                    <a:pt x="26021" y="48742"/>
                   </a:moveTo>
                   <a:cubicBezTo>
-                    <a:pt x="30604" y="13684"/>
-                    <a:pt x="23803" y="0"/>
-                    <a:pt x="15302" y="3989"/>
-                  </a:cubicBezTo>
-                  <a:cubicBezTo>
-                    <a:pt x="6801" y="7979"/>
-                    <a:pt x="0" y="27624"/>
-                    <a:pt x="0" y="48376"/>
-                  </a:cubicBezTo>
-                  <a:cubicBezTo>
-                    <a:pt x="0" y="69128"/>
-                    <a:pt x="6801" y="82807"/>
-                    <a:pt x="15302" y="78967"/>
-                  </a:cubicBezTo>
-                  <a:cubicBezTo>
-                    <a:pt x="23803" y="75128"/>
-                    <a:pt x="30604" y="55488"/>
-                    <a:pt x="30604" y="34586"/>
+                    <a:pt x="26021" y="30549"/>
+                    <a:pt x="20239" y="11331"/>
+                    <a:pt x="13011" y="5665"/>
+                  </a:cubicBezTo>
+                  <a:cubicBezTo>
+                    <a:pt x="5782" y="0"/>
+                    <a:pt x="0" y="9883"/>
+                    <a:pt x="0" y="28067"/>
+                  </a:cubicBezTo>
+                  <a:cubicBezTo>
+                    <a:pt x="0" y="46251"/>
+                    <a:pt x="5782" y="65469"/>
+                    <a:pt x="13011" y="71143"/>
+                  </a:cubicBezTo>
+                  <a:cubicBezTo>
+                    <a:pt x="20239" y="76817"/>
+                    <a:pt x="26021" y="66934"/>
+                    <a:pt x="26021" y="48742"/>
                   </a:cubicBezTo>
                   <a:close/>
                 </a:path>
@@ -4869,14 +4810,14 @@
         </p:sp>
         <p:sp>
           <p:nvSpPr>
-            <p:cNvPr id="82" name="right Speaker column 2 row 1 38"/>
+            <p:cNvPr id="76" name="right Speaker column 2 row 1 39"/>
             <p:cNvSpPr/>
             <p:nvPr/>
           </p:nvSpPr>
           <p:spPr>
             <a:xfrm>
-              <a:off x="8510146" y="1607837"/>
-              <a:ext cx="30604" cy="82318"/>
+              <a:off x="8472527" y="1605798"/>
+              <a:ext cx="26021" cy="77506"/>
             </a:xfrm>
             <a:custGeom>
               <a:avLst/>
@@ -4885,29 +4826,29 @@
               <a:cxnLst/>
               <a:rect l="0" t="0" r="r" b="b"/>
               <a:pathLst>
-                <a:path w="30604" h="82318" fill="norm">
+                <a:path w="26021" h="77506" fill="norm">
                   <a:moveTo>
-                    <a:pt x="30604" y="35161"/>
+                    <a:pt x="26021" y="49112"/>
                   </a:moveTo>
                   <a:cubicBezTo>
-                    <a:pt x="30604" y="14259"/>
-                    <a:pt x="23803" y="0"/>
-                    <a:pt x="15302" y="3744"/>
-                  </a:cubicBezTo>
-                  <a:cubicBezTo>
-                    <a:pt x="6801" y="7490"/>
-                    <a:pt x="0" y="26938"/>
-                    <a:pt x="0" y="47690"/>
-                  </a:cubicBezTo>
-                  <a:cubicBezTo>
-                    <a:pt x="0" y="68443"/>
-                    <a:pt x="6801" y="82318"/>
-                    <a:pt x="15302" y="79101"/>
-                  </a:cubicBezTo>
-                  <a:cubicBezTo>
-                    <a:pt x="23803" y="75887"/>
-                    <a:pt x="30604" y="56063"/>
-                    <a:pt x="30604" y="35161"/>
+                    <a:pt x="26021" y="30919"/>
+                    <a:pt x="20239" y="11358"/>
+                    <a:pt x="13011" y="5679"/>
+                  </a:cubicBezTo>
+                  <a:cubicBezTo>
+                    <a:pt x="5782" y="0"/>
+                    <a:pt x="0" y="9872"/>
+                    <a:pt x="0" y="28056"/>
+                  </a:cubicBezTo>
+                  <a:cubicBezTo>
+                    <a:pt x="0" y="46240"/>
+                    <a:pt x="5782" y="65469"/>
+                    <a:pt x="13011" y="71488"/>
+                  </a:cubicBezTo>
+                  <a:cubicBezTo>
+                    <a:pt x="20239" y="77506"/>
+                    <a:pt x="26021" y="67304"/>
+                    <a:pt x="26021" y="49112"/>
                   </a:cubicBezTo>
                   <a:close/>
                 </a:path>
@@ -4924,14 +4865,14 @@
         </p:sp>
         <p:sp>
           <p:nvSpPr>
-            <p:cNvPr id="83" name="right Speaker column 2 row 1 39"/>
+            <p:cNvPr id="77" name="right Speaker column 2 row 1 40"/>
             <p:cNvSpPr/>
             <p:nvPr/>
           </p:nvSpPr>
           <p:spPr>
             <a:xfrm>
-              <a:off x="8510146" y="1730773"/>
-              <a:ext cx="30604" cy="81449"/>
+              <a:off x="8472527" y="1712930"/>
+              <a:ext cx="26021" cy="77203"/>
             </a:xfrm>
             <a:custGeom>
               <a:avLst/>
@@ -4940,29 +4881,29 @@
               <a:cxnLst/>
               <a:rect l="0" t="0" r="r" b="b"/>
               <a:pathLst>
-                <a:path w="30604" h="81449" fill="norm">
+                <a:path w="26021" h="77203" fill="norm">
                   <a:moveTo>
-                    <a:pt x="30604" y="35357"/>
+                    <a:pt x="26021" y="49150"/>
                   </a:moveTo>
                   <a:cubicBezTo>
-                    <a:pt x="30604" y="14455"/>
-                    <a:pt x="23803" y="0"/>
-                    <a:pt x="15302" y="3499"/>
-                  </a:cubicBezTo>
-                  <a:cubicBezTo>
-                    <a:pt x="6801" y="6999"/>
-                    <a:pt x="0" y="25874"/>
-                    <a:pt x="0" y="46626"/>
-                  </a:cubicBezTo>
-                  <a:cubicBezTo>
-                    <a:pt x="0" y="67378"/>
-                    <a:pt x="6801" y="81449"/>
-                    <a:pt x="15302" y="78477"/>
-                  </a:cubicBezTo>
-                  <a:cubicBezTo>
-                    <a:pt x="23803" y="75507"/>
-                    <a:pt x="30604" y="56259"/>
-                    <a:pt x="30604" y="35357"/>
+                    <a:pt x="26021" y="30958"/>
+                    <a:pt x="20239" y="11386"/>
+                    <a:pt x="13011" y="5693"/>
+                  </a:cubicBezTo>
+                  <a:cubicBezTo>
+                    <a:pt x="5782" y="0"/>
+                    <a:pt x="0" y="9530"/>
+                    <a:pt x="0" y="27714"/>
+                  </a:cubicBezTo>
+                  <a:cubicBezTo>
+                    <a:pt x="0" y="45898"/>
+                    <a:pt x="5782" y="65139"/>
+                    <a:pt x="13011" y="71171"/>
+                  </a:cubicBezTo>
+                  <a:cubicBezTo>
+                    <a:pt x="20239" y="77203"/>
+                    <a:pt x="26021" y="67343"/>
+                    <a:pt x="26021" y="49150"/>
                   </a:cubicBezTo>
                   <a:close/>
                 </a:path>
@@ -4979,14 +4920,14 @@
         </p:sp>
         <p:sp>
           <p:nvSpPr>
-            <p:cNvPr id="84" name="right Speaker column 2 row 1 40"/>
+            <p:cNvPr id="78" name="right Speaker column 2 row 1 41"/>
             <p:cNvSpPr/>
             <p:nvPr/>
           </p:nvSpPr>
           <p:spPr>
             <a:xfrm>
-              <a:off x="8298467" y="1983010"/>
-              <a:ext cx="29754" cy="75032"/>
+              <a:off x="8292549" y="1720571"/>
+              <a:ext cx="25298" cy="76359"/>
             </a:xfrm>
             <a:custGeom>
               <a:avLst/>
@@ -4995,29 +4936,29 @@
               <a:cxnLst/>
               <a:rect l="0" t="0" r="r" b="b"/>
               <a:pathLst>
-                <a:path w="29754" h="75032" fill="norm">
+                <a:path w="25298" h="76359" fill="norm">
                   <a:moveTo>
-                    <a:pt x="0" y="42119"/>
+                    <a:pt x="0" y="27591"/>
                   </a:moveTo>
                   <a:cubicBezTo>
-                    <a:pt x="0" y="61445"/>
-                    <a:pt x="6376" y="75032"/>
-                    <a:pt x="14877" y="72391"/>
-                  </a:cubicBezTo>
-                  <a:cubicBezTo>
-                    <a:pt x="23378" y="69752"/>
-                    <a:pt x="29754" y="52084"/>
-                    <a:pt x="29754" y="32607"/>
-                  </a:cubicBezTo>
-                  <a:cubicBezTo>
-                    <a:pt x="29754" y="13131"/>
-                    <a:pt x="22953" y="0"/>
-                    <a:pt x="14877" y="2331"/>
-                  </a:cubicBezTo>
-                  <a:cubicBezTo>
-                    <a:pt x="6801" y="4665"/>
-                    <a:pt x="0" y="22793"/>
-                    <a:pt x="0" y="42119"/>
+                    <a:pt x="0" y="45385"/>
+                    <a:pt x="5421" y="64257"/>
+                    <a:pt x="12649" y="70308"/>
+                  </a:cubicBezTo>
+                  <a:cubicBezTo>
+                    <a:pt x="19877" y="76359"/>
+                    <a:pt x="25298" y="66557"/>
+                    <a:pt x="25298" y="48754"/>
+                  </a:cubicBezTo>
+                  <a:cubicBezTo>
+                    <a:pt x="25298" y="30952"/>
+                    <a:pt x="19516" y="12074"/>
+                    <a:pt x="12649" y="6037"/>
+                  </a:cubicBezTo>
+                  <a:cubicBezTo>
+                    <a:pt x="5782" y="0"/>
+                    <a:pt x="0" y="9797"/>
+                    <a:pt x="0" y="27591"/>
                   </a:cubicBezTo>
                   <a:close/>
                 </a:path>
@@ -5034,14 +4975,14 @@
         </p:sp>
         <p:sp>
           <p:nvSpPr>
-            <p:cNvPr id="85" name="right Speaker column 2 row 1 41"/>
+            <p:cNvPr id="79" name="right Speaker column 2 row 1 42"/>
             <p:cNvSpPr/>
             <p:nvPr/>
           </p:nvSpPr>
           <p:spPr>
             <a:xfrm>
-              <a:off x="8298467" y="1868878"/>
-              <a:ext cx="29754" cy="75883"/>
+              <a:off x="8292549" y="1616761"/>
+              <a:ext cx="25298" cy="75343"/>
             </a:xfrm>
             <a:custGeom>
               <a:avLst/>
@@ -5050,29 +4991,29 @@
               <a:cxnLst/>
               <a:rect l="0" t="0" r="r" b="b"/>
               <a:pathLst>
-                <a:path w="29754" h="75883" fill="norm">
+                <a:path w="25298" h="75343" fill="norm">
                   <a:moveTo>
-                    <a:pt x="0" y="43160"/>
+                    <a:pt x="0" y="27273"/>
                   </a:moveTo>
                   <a:cubicBezTo>
-                    <a:pt x="0" y="62486"/>
-                    <a:pt x="6376" y="75883"/>
-                    <a:pt x="14877" y="72631"/>
-                  </a:cubicBezTo>
-                  <a:cubicBezTo>
-                    <a:pt x="23378" y="69379"/>
-                    <a:pt x="29754" y="51882"/>
-                    <a:pt x="29754" y="32406"/>
-                  </a:cubicBezTo>
-                  <a:cubicBezTo>
-                    <a:pt x="29754" y="12929"/>
-                    <a:pt x="22953" y="0"/>
-                    <a:pt x="14877" y="2930"/>
-                  </a:cubicBezTo>
-                  <a:cubicBezTo>
-                    <a:pt x="6801" y="5862"/>
-                    <a:pt x="0" y="24192"/>
-                    <a:pt x="0" y="43160"/>
+                    <a:pt x="0" y="45067"/>
+                    <a:pt x="5421" y="63928"/>
+                    <a:pt x="12649" y="69635"/>
+                  </a:cubicBezTo>
+                  <a:cubicBezTo>
+                    <a:pt x="19877" y="75343"/>
+                    <a:pt x="25298" y="65859"/>
+                    <a:pt x="25298" y="48056"/>
+                  </a:cubicBezTo>
+                  <a:cubicBezTo>
+                    <a:pt x="25298" y="30254"/>
+                    <a:pt x="19516" y="11387"/>
+                    <a:pt x="12649" y="5694"/>
+                  </a:cubicBezTo>
+                  <a:cubicBezTo>
+                    <a:pt x="5782" y="0"/>
+                    <a:pt x="0" y="9808"/>
+                    <a:pt x="0" y="27273"/>
                   </a:cubicBezTo>
                   <a:close/>
                 </a:path>
@@ -5089,14 +5030,14 @@
         </p:sp>
         <p:sp>
           <p:nvSpPr>
-            <p:cNvPr id="86" name="right Speaker column 2 row 1 42"/>
+            <p:cNvPr id="80" name="right Speaker column 2 row 1 43"/>
             <p:cNvSpPr/>
             <p:nvPr/>
           </p:nvSpPr>
           <p:spPr>
             <a:xfrm>
-              <a:off x="8298467" y="1754745"/>
-              <a:ext cx="29754" cy="76735"/>
+              <a:off x="8292549" y="1512293"/>
+              <a:ext cx="25298" cy="75644"/>
             </a:xfrm>
             <a:custGeom>
               <a:avLst/>
@@ -5105,29 +5046,29 @@
               <a:cxnLst/>
               <a:rect l="0" t="0" r="r" b="b"/>
               <a:pathLst>
-                <a:path w="29754" h="76735" fill="norm">
+                <a:path w="25298" h="75644" fill="norm">
                   <a:moveTo>
-                    <a:pt x="0" y="44202"/>
+                    <a:pt x="0" y="27614"/>
                   </a:moveTo>
                   <a:cubicBezTo>
-                    <a:pt x="0" y="63527"/>
-                    <a:pt x="6376" y="76735"/>
-                    <a:pt x="14877" y="73230"/>
-                  </a:cubicBezTo>
-                  <a:cubicBezTo>
-                    <a:pt x="23378" y="69727"/>
-                    <a:pt x="29754" y="51680"/>
-                    <a:pt x="29754" y="32204"/>
-                  </a:cubicBezTo>
-                  <a:cubicBezTo>
-                    <a:pt x="29754" y="12727"/>
-                    <a:pt x="22953" y="0"/>
-                    <a:pt x="14877" y="3170"/>
-                  </a:cubicBezTo>
-                  <a:cubicBezTo>
-                    <a:pt x="6801" y="6343"/>
-                    <a:pt x="0" y="24876"/>
-                    <a:pt x="0" y="44202"/>
+                    <a:pt x="0" y="45408"/>
+                    <a:pt x="5421" y="64258"/>
+                    <a:pt x="12649" y="69951"/>
+                  </a:cubicBezTo>
+                  <a:cubicBezTo>
+                    <a:pt x="19877" y="75644"/>
+                    <a:pt x="25298" y="65820"/>
+                    <a:pt x="25298" y="48018"/>
+                  </a:cubicBezTo>
+                  <a:cubicBezTo>
+                    <a:pt x="25298" y="30215"/>
+                    <a:pt x="19516" y="11360"/>
+                    <a:pt x="12649" y="5680"/>
+                  </a:cubicBezTo>
+                  <a:cubicBezTo>
+                    <a:pt x="5782" y="0"/>
+                    <a:pt x="0" y="9820"/>
+                    <a:pt x="0" y="27614"/>
                   </a:cubicBezTo>
                   <a:close/>
                 </a:path>
@@ -5144,14 +5085,14 @@
         </p:sp>
         <p:sp>
           <p:nvSpPr>
-            <p:cNvPr id="87" name="right Speaker column 2 row 1 43"/>
+            <p:cNvPr id="81" name="right Speaker column 2 row 1 44"/>
             <p:cNvSpPr/>
             <p:nvPr/>
           </p:nvSpPr>
           <p:spPr>
             <a:xfrm>
-              <a:off x="8298467" y="1640612"/>
-              <a:ext cx="29754" cy="77587"/>
+              <a:off x="8292549" y="1408483"/>
+              <a:ext cx="25298" cy="74628"/>
             </a:xfrm>
             <a:custGeom>
               <a:avLst/>
@@ -5160,29 +5101,29 @@
               <a:cxnLst/>
               <a:rect l="0" t="0" r="r" b="b"/>
               <a:pathLst>
-                <a:path w="29754" h="77587" fill="norm">
+                <a:path w="25298" h="74628" fill="norm">
                   <a:moveTo>
-                    <a:pt x="0" y="45243"/>
+                    <a:pt x="0" y="27296"/>
                   </a:moveTo>
                   <a:cubicBezTo>
-                    <a:pt x="0" y="64569"/>
-                    <a:pt x="6376" y="77587"/>
-                    <a:pt x="14877" y="73470"/>
-                  </a:cubicBezTo>
-                  <a:cubicBezTo>
-                    <a:pt x="23378" y="69354"/>
-                    <a:pt x="29754" y="51479"/>
-                    <a:pt x="29754" y="32002"/>
-                  </a:cubicBezTo>
-                  <a:cubicBezTo>
-                    <a:pt x="29754" y="12526"/>
-                    <a:pt x="22953" y="0"/>
-                    <a:pt x="14877" y="3770"/>
-                  </a:cubicBezTo>
-                  <a:cubicBezTo>
-                    <a:pt x="6801" y="7540"/>
-                    <a:pt x="0" y="26275"/>
-                    <a:pt x="0" y="45243"/>
+                    <a:pt x="0" y="45090"/>
+                    <a:pt x="5421" y="63930"/>
+                    <a:pt x="12649" y="69279"/>
+                  </a:cubicBezTo>
+                  <a:cubicBezTo>
+                    <a:pt x="19877" y="74628"/>
+                    <a:pt x="25298" y="65123"/>
+                    <a:pt x="25298" y="47320"/>
+                  </a:cubicBezTo>
+                  <a:cubicBezTo>
+                    <a:pt x="25298" y="29518"/>
+                    <a:pt x="19516" y="10674"/>
+                    <a:pt x="12649" y="5337"/>
+                  </a:cubicBezTo>
+                  <a:cubicBezTo>
+                    <a:pt x="5782" y="0"/>
+                    <a:pt x="0" y="9831"/>
+                    <a:pt x="0" y="27296"/>
                   </a:cubicBezTo>
                   <a:close/>
                 </a:path>
@@ -5199,14 +5140,14 @@
         </p:sp>
         <p:sp>
           <p:nvSpPr>
-            <p:cNvPr id="88" name="right Speaker column 2 row 1 44"/>
+            <p:cNvPr id="82" name="right Speaker column 2 row 1 45"/>
             <p:cNvSpPr/>
             <p:nvPr/>
           </p:nvSpPr>
           <p:spPr>
             <a:xfrm>
-              <a:off x="8298467" y="1526479"/>
-              <a:ext cx="29754" cy="78080"/>
+              <a:off x="8292549" y="1304015"/>
+              <a:ext cx="25298" cy="75259"/>
             </a:xfrm>
             <a:custGeom>
               <a:avLst/>
@@ -5215,29 +5156,29 @@
               <a:cxnLst/>
               <a:rect l="0" t="0" r="r" b="b"/>
               <a:pathLst>
-                <a:path w="29754" h="78080" fill="norm">
+                <a:path w="25298" h="75259" fill="norm">
                   <a:moveTo>
-                    <a:pt x="0" y="46284"/>
+                    <a:pt x="0" y="27637"/>
                   </a:moveTo>
                   <a:cubicBezTo>
-                    <a:pt x="0" y="65610"/>
-                    <a:pt x="6376" y="78080"/>
-                    <a:pt x="14877" y="74070"/>
-                  </a:cubicBezTo>
-                  <a:cubicBezTo>
-                    <a:pt x="23378" y="70061"/>
-                    <a:pt x="29754" y="51277"/>
-                    <a:pt x="29754" y="31800"/>
-                  </a:cubicBezTo>
-                  <a:cubicBezTo>
-                    <a:pt x="29754" y="12324"/>
-                    <a:pt x="22953" y="0"/>
-                    <a:pt x="14877" y="4010"/>
-                  </a:cubicBezTo>
-                  <a:cubicBezTo>
-                    <a:pt x="6801" y="8021"/>
-                    <a:pt x="0" y="26959"/>
-                    <a:pt x="0" y="46284"/>
+                    <a:pt x="0" y="45431"/>
+                    <a:pt x="5421" y="63930"/>
+                    <a:pt x="12649" y="69595"/>
+                  </a:cubicBezTo>
+                  <a:cubicBezTo>
+                    <a:pt x="19877" y="75259"/>
+                    <a:pt x="25298" y="65084"/>
+                    <a:pt x="25298" y="47281"/>
+                  </a:cubicBezTo>
+                  <a:cubicBezTo>
+                    <a:pt x="25298" y="29479"/>
+                    <a:pt x="19516" y="10646"/>
+                    <a:pt x="12649" y="5323"/>
+                  </a:cubicBezTo>
+                  <a:cubicBezTo>
+                    <a:pt x="5782" y="0"/>
+                    <a:pt x="0" y="9843"/>
+                    <a:pt x="0" y="27637"/>
                   </a:cubicBezTo>
                   <a:close/>
                 </a:path>
@@ -5254,14 +5195,14 @@
         </p:sp>
         <p:sp>
           <p:nvSpPr>
-            <p:cNvPr id="89" name="right Speaker column 2 row 1 45"/>
+            <p:cNvPr id="83" name="right Speaker column 2 row 1 46"/>
             <p:cNvSpPr/>
             <p:nvPr/>
           </p:nvSpPr>
           <p:spPr>
             <a:xfrm>
-              <a:off x="8298467" y="1412347"/>
-              <a:ext cx="29754" cy="78573"/>
+              <a:off x="8292549" y="1199547"/>
+              <a:ext cx="25298" cy="74572"/>
             </a:xfrm>
             <a:custGeom>
               <a:avLst/>
@@ -5270,29 +5211,29 @@
               <a:cxnLst/>
               <a:rect l="0" t="0" r="r" b="b"/>
               <a:pathLst>
-                <a:path w="29754" h="78573" fill="norm">
+                <a:path w="25298" h="74572" fill="norm">
                   <a:moveTo>
-                    <a:pt x="0" y="46968"/>
+                    <a:pt x="0" y="27648"/>
                   </a:moveTo>
                   <a:cubicBezTo>
-                    <a:pt x="0" y="66294"/>
-                    <a:pt x="6376" y="78573"/>
-                    <a:pt x="14877" y="73951"/>
-                  </a:cubicBezTo>
-                  <a:cubicBezTo>
-                    <a:pt x="23378" y="69329"/>
-                    <a:pt x="29754" y="50714"/>
-                    <a:pt x="29754" y="31238"/>
-                  </a:cubicBezTo>
-                  <a:cubicBezTo>
-                    <a:pt x="29754" y="11761"/>
-                    <a:pt x="22953" y="0"/>
-                    <a:pt x="14877" y="4250"/>
-                  </a:cubicBezTo>
-                  <a:cubicBezTo>
-                    <a:pt x="6801" y="8501"/>
-                    <a:pt x="0" y="27642"/>
-                    <a:pt x="0" y="46968"/>
+                    <a:pt x="0" y="45442"/>
+                    <a:pt x="5421" y="63931"/>
+                    <a:pt x="12649" y="69251"/>
+                  </a:cubicBezTo>
+                  <a:cubicBezTo>
+                    <a:pt x="19877" y="74572"/>
+                    <a:pt x="25298" y="64716"/>
+                    <a:pt x="25298" y="46913"/>
+                  </a:cubicBezTo>
+                  <a:cubicBezTo>
+                    <a:pt x="25298" y="29111"/>
+                    <a:pt x="19516" y="10619"/>
+                    <a:pt x="12649" y="5310"/>
+                  </a:cubicBezTo>
+                  <a:cubicBezTo>
+                    <a:pt x="5782" y="0"/>
+                    <a:pt x="0" y="9854"/>
+                    <a:pt x="0" y="27648"/>
                   </a:cubicBezTo>
                   <a:close/>
                 </a:path>
@@ -5309,14 +5250,14 @@
         </p:sp>
         <p:sp>
           <p:nvSpPr>
-            <p:cNvPr id="90" name="right Speaker column 2 row 1 46"/>
+            <p:cNvPr id="84" name="right Speaker column 2 row 1 47"/>
             <p:cNvSpPr/>
             <p:nvPr/>
           </p:nvSpPr>
           <p:spPr>
             <a:xfrm>
-              <a:off x="8298467" y="1298574"/>
-              <a:ext cx="29754" cy="79065"/>
+              <a:off x="8292549" y="1095408"/>
+              <a:ext cx="25298" cy="74544"/>
             </a:xfrm>
             <a:custGeom>
               <a:avLst/>
@@ -5325,29 +5266,29 @@
               <a:cxnLst/>
               <a:rect l="0" t="0" r="r" b="b"/>
               <a:pathLst>
-                <a:path w="29754" h="79065" fill="norm">
+                <a:path w="25298" h="74544" fill="norm">
                   <a:moveTo>
-                    <a:pt x="0" y="47649"/>
+                    <a:pt x="0" y="27660"/>
                   </a:moveTo>
                   <a:cubicBezTo>
-                    <a:pt x="0" y="66975"/>
-                    <a:pt x="6376" y="79065"/>
-                    <a:pt x="14877" y="74190"/>
-                  </a:cubicBezTo>
-                  <a:cubicBezTo>
-                    <a:pt x="23378" y="69316"/>
-                    <a:pt x="29754" y="50153"/>
-                    <a:pt x="29754" y="31037"/>
-                  </a:cubicBezTo>
-                  <a:cubicBezTo>
-                    <a:pt x="29754" y="11921"/>
-                    <a:pt x="22953" y="0"/>
-                    <a:pt x="14877" y="4489"/>
-                  </a:cubicBezTo>
-                  <a:cubicBezTo>
-                    <a:pt x="6801" y="8980"/>
-                    <a:pt x="0" y="28681"/>
-                    <a:pt x="0" y="48007"/>
+                    <a:pt x="0" y="45454"/>
+                    <a:pt x="5421" y="63932"/>
+                    <a:pt x="12649" y="69238"/>
+                  </a:cubicBezTo>
+                  <a:cubicBezTo>
+                    <a:pt x="19877" y="74544"/>
+                    <a:pt x="25298" y="64347"/>
+                    <a:pt x="25298" y="46874"/>
+                  </a:cubicBezTo>
+                  <a:cubicBezTo>
+                    <a:pt x="25298" y="29402"/>
+                    <a:pt x="19516" y="10592"/>
+                    <a:pt x="12649" y="5296"/>
+                  </a:cubicBezTo>
+                  <a:cubicBezTo>
+                    <a:pt x="5782" y="0"/>
+                    <a:pt x="0" y="10195"/>
+                    <a:pt x="0" y="27989"/>
                   </a:cubicBezTo>
                   <a:close/>
                 </a:path>
@@ -5364,14 +5305,14 @@
         </p:sp>
         <p:sp>
           <p:nvSpPr>
-            <p:cNvPr id="91" name="right Speaker column 2 row 1 47"/>
+            <p:cNvPr id="85" name="right Speaker column 2 row 1 48"/>
             <p:cNvSpPr/>
             <p:nvPr/>
           </p:nvSpPr>
           <p:spPr>
             <a:xfrm>
-              <a:off x="8298467" y="1184081"/>
-              <a:ext cx="29754" cy="80276"/>
+              <a:off x="8292549" y="991269"/>
+              <a:ext cx="25298" cy="73857"/>
             </a:xfrm>
             <a:custGeom>
               <a:avLst/>
@@ -5380,29 +5321,29 @@
               <a:cxnLst/>
               <a:rect l="0" t="0" r="r" b="b"/>
               <a:pathLst>
-                <a:path w="29754" h="80276" fill="norm">
+                <a:path w="25298" h="73857" fill="norm">
                   <a:moveTo>
-                    <a:pt x="0" y="49050"/>
+                    <a:pt x="0" y="27671"/>
                   </a:moveTo>
                   <a:cubicBezTo>
-                    <a:pt x="0" y="68376"/>
-                    <a:pt x="6376" y="80276"/>
-                    <a:pt x="14877" y="74790"/>
-                  </a:cubicBezTo>
-                  <a:cubicBezTo>
-                    <a:pt x="23378" y="69303"/>
-                    <a:pt x="29754" y="50311"/>
-                    <a:pt x="29754" y="30834"/>
-                  </a:cubicBezTo>
-                  <a:cubicBezTo>
-                    <a:pt x="29754" y="11358"/>
-                    <a:pt x="22953" y="0"/>
-                    <a:pt x="14877" y="5089"/>
-                  </a:cubicBezTo>
-                  <a:cubicBezTo>
-                    <a:pt x="6801" y="10179"/>
-                    <a:pt x="0" y="29725"/>
-                    <a:pt x="0" y="49050"/>
+                    <a:pt x="0" y="45465"/>
+                    <a:pt x="5421" y="63932"/>
+                    <a:pt x="12649" y="68895"/>
+                  </a:cubicBezTo>
+                  <a:cubicBezTo>
+                    <a:pt x="19877" y="73857"/>
+                    <a:pt x="25298" y="63979"/>
+                    <a:pt x="25298" y="46177"/>
+                  </a:cubicBezTo>
+                  <a:cubicBezTo>
+                    <a:pt x="25298" y="28374"/>
+                    <a:pt x="19516" y="9906"/>
+                    <a:pt x="12649" y="4953"/>
+                  </a:cubicBezTo>
+                  <a:cubicBezTo>
+                    <a:pt x="5782" y="0"/>
+                    <a:pt x="0" y="9877"/>
+                    <a:pt x="0" y="27671"/>
                   </a:cubicBezTo>
                   <a:close/>
                 </a:path>
@@ -5419,14 +5360,14 @@
         </p:sp>
         <p:sp>
           <p:nvSpPr>
-            <p:cNvPr id="92" name="right Speaker column 2 row 1 48"/>
+            <p:cNvPr id="86" name="right Speaker column 2 row 1 49"/>
             <p:cNvSpPr/>
             <p:nvPr/>
           </p:nvSpPr>
           <p:spPr>
             <a:xfrm>
-              <a:off x="8257236" y="1940165"/>
-              <a:ext cx="28904" cy="74429"/>
+              <a:off x="8257492" y="1639326"/>
+              <a:ext cx="24575" cy="75307"/>
             </a:xfrm>
             <a:custGeom>
               <a:avLst/>
@@ -5435,29 +5376,29 @@
               <a:cxnLst/>
               <a:rect l="0" t="0" r="r" b="b"/>
               <a:pathLst>
-                <a:path w="28904" h="74429" fill="norm">
+                <a:path w="24575" h="75307" fill="norm">
                   <a:moveTo>
-                    <a:pt x="0" y="41998"/>
+                    <a:pt x="0" y="27251"/>
                   </a:moveTo>
                   <a:cubicBezTo>
-                    <a:pt x="0" y="60759"/>
-                    <a:pt x="6376" y="74429"/>
-                    <a:pt x="14452" y="71757"/>
-                  </a:cubicBezTo>
-                  <a:cubicBezTo>
-                    <a:pt x="22528" y="69087"/>
-                    <a:pt x="28904" y="51847"/>
-                    <a:pt x="28904" y="32584"/>
-                  </a:cubicBezTo>
-                  <a:cubicBezTo>
-                    <a:pt x="28904" y="13321"/>
-                    <a:pt x="22528" y="0"/>
-                    <a:pt x="14452" y="2819"/>
-                  </a:cubicBezTo>
-                  <a:cubicBezTo>
-                    <a:pt x="6376" y="5639"/>
-                    <a:pt x="0" y="22883"/>
-                    <a:pt x="0" y="41998"/>
+                    <a:pt x="0" y="44704"/>
+                    <a:pt x="5421" y="63890"/>
+                    <a:pt x="12288" y="69598"/>
+                  </a:cubicBezTo>
+                  <a:cubicBezTo>
+                    <a:pt x="19154" y="75307"/>
+                    <a:pt x="24575" y="65838"/>
+                    <a:pt x="24575" y="48048"/>
+                  </a:cubicBezTo>
+                  <a:cubicBezTo>
+                    <a:pt x="24575" y="30257"/>
+                    <a:pt x="19154" y="11400"/>
+                    <a:pt x="12288" y="5700"/>
+                  </a:cubicBezTo>
+                  <a:cubicBezTo>
+                    <a:pt x="5421" y="0"/>
+                    <a:pt x="0" y="9469"/>
+                    <a:pt x="0" y="27251"/>
                   </a:cubicBezTo>
                   <a:close/>
                 </a:path>
@@ -5474,14 +5415,14 @@
         </p:sp>
         <p:sp>
           <p:nvSpPr>
-            <p:cNvPr id="93" name="right Speaker column 2 row 1 49"/>
+            <p:cNvPr id="87" name="right Speaker column 2 row 1 50"/>
             <p:cNvSpPr/>
             <p:nvPr/>
           </p:nvSpPr>
           <p:spPr>
             <a:xfrm>
-              <a:off x="8257236" y="1827987"/>
-              <a:ext cx="28904" cy="74911"/>
+              <a:off x="8257492" y="1536246"/>
+              <a:ext cx="24575" cy="74621"/>
             </a:xfrm>
             <a:custGeom>
               <a:avLst/>
@@ -5490,29 +5431,29 @@
               <a:cxnLst/>
               <a:rect l="0" t="0" r="r" b="b"/>
               <a:pathLst>
-                <a:path w="28904" h="74911" fill="norm">
+                <a:path w="24575" h="74621" fill="norm">
                   <a:moveTo>
-                    <a:pt x="0" y="43025"/>
+                    <a:pt x="0" y="26933"/>
                   </a:moveTo>
                   <a:cubicBezTo>
-                    <a:pt x="0" y="61786"/>
-                    <a:pt x="6376" y="74911"/>
-                    <a:pt x="14452" y="71998"/>
-                  </a:cubicBezTo>
-                  <a:cubicBezTo>
-                    <a:pt x="22528" y="69087"/>
-                    <a:pt x="28904" y="51301"/>
-                    <a:pt x="28904" y="32394"/>
-                  </a:cubicBezTo>
-                  <a:cubicBezTo>
-                    <a:pt x="28904" y="13488"/>
-                    <a:pt x="22528" y="0"/>
-                    <a:pt x="14452" y="3415"/>
-                  </a:cubicBezTo>
-                  <a:cubicBezTo>
-                    <a:pt x="6376" y="6831"/>
-                    <a:pt x="0" y="24264"/>
-                    <a:pt x="0" y="43025"/>
+                    <a:pt x="0" y="44385"/>
+                    <a:pt x="5421" y="63231"/>
+                    <a:pt x="12288" y="68926"/>
+                  </a:cubicBezTo>
+                  <a:cubicBezTo>
+                    <a:pt x="19154" y="74621"/>
+                    <a:pt x="24575" y="64812"/>
+                    <a:pt x="24575" y="47351"/>
+                  </a:cubicBezTo>
+                  <a:cubicBezTo>
+                    <a:pt x="24575" y="29890"/>
+                    <a:pt x="19154" y="10714"/>
+                    <a:pt x="12288" y="5357"/>
+                  </a:cubicBezTo>
+                  <a:cubicBezTo>
+                    <a:pt x="5421" y="0"/>
+                    <a:pt x="0" y="9480"/>
+                    <a:pt x="0" y="26933"/>
                   </a:cubicBezTo>
                   <a:close/>
                 </a:path>
@@ -5529,14 +5470,14 @@
         </p:sp>
         <p:sp>
           <p:nvSpPr>
-            <p:cNvPr id="94" name="right Speaker column 2 row 1 50"/>
+            <p:cNvPr id="88" name="right Speaker column 2 row 1 51"/>
             <p:cNvSpPr/>
             <p:nvPr/>
           </p:nvSpPr>
           <p:spPr>
             <a:xfrm>
-              <a:off x="8257236" y="1715810"/>
-              <a:ext cx="28904" cy="75394"/>
+              <a:off x="8257492" y="1431848"/>
+              <a:ext cx="24575" cy="75252"/>
             </a:xfrm>
             <a:custGeom>
               <a:avLst/>
@@ -5545,29 +5486,29 @@
               <a:cxnLst/>
               <a:rect l="0" t="0" r="r" b="b"/>
               <a:pathLst>
-                <a:path w="28904" h="75394" fill="norm">
+                <a:path w="24575" h="75252" fill="norm">
                   <a:moveTo>
-                    <a:pt x="0" y="43699"/>
+                    <a:pt x="0" y="27602"/>
                   </a:moveTo>
                   <a:cubicBezTo>
-                    <a:pt x="0" y="62460"/>
-                    <a:pt x="6376" y="75394"/>
-                    <a:pt x="14452" y="72239"/>
-                  </a:cubicBezTo>
-                  <a:cubicBezTo>
-                    <a:pt x="22528" y="69087"/>
-                    <a:pt x="28904" y="51111"/>
-                    <a:pt x="28904" y="31848"/>
-                  </a:cubicBezTo>
-                  <a:cubicBezTo>
-                    <a:pt x="28904" y="12585"/>
-                    <a:pt x="22528" y="0"/>
-                    <a:pt x="14452" y="3301"/>
-                  </a:cubicBezTo>
-                  <a:cubicBezTo>
-                    <a:pt x="6376" y="6604"/>
-                    <a:pt x="0" y="24584"/>
-                    <a:pt x="0" y="43699"/>
+                    <a:pt x="0" y="45055"/>
+                    <a:pt x="5421" y="63890"/>
+                    <a:pt x="12288" y="69571"/>
+                  </a:cubicBezTo>
+                  <a:cubicBezTo>
+                    <a:pt x="19154" y="75252"/>
+                    <a:pt x="24575" y="65432"/>
+                    <a:pt x="24575" y="47642"/>
+                  </a:cubicBezTo>
+                  <a:cubicBezTo>
+                    <a:pt x="24575" y="29852"/>
+                    <a:pt x="19154" y="11345"/>
+                    <a:pt x="12288" y="5673"/>
+                  </a:cubicBezTo>
+                  <a:cubicBezTo>
+                    <a:pt x="5421" y="0"/>
+                    <a:pt x="0" y="9820"/>
+                    <a:pt x="0" y="27602"/>
                   </a:cubicBezTo>
                   <a:close/>
                 </a:path>
@@ -5584,14 +5525,14 @@
         </p:sp>
         <p:sp>
           <p:nvSpPr>
-            <p:cNvPr id="95" name="right Speaker column 2 row 1 51"/>
+            <p:cNvPr id="89" name="right Speaker column 2 row 1 52"/>
             <p:cNvSpPr/>
             <p:nvPr/>
           </p:nvSpPr>
           <p:spPr>
             <a:xfrm>
-              <a:off x="8257236" y="1603276"/>
-              <a:ext cx="28904" cy="76232"/>
+              <a:off x="8257492" y="1328438"/>
+              <a:ext cx="24575" cy="74237"/>
             </a:xfrm>
             <a:custGeom>
               <a:avLst/>
@@ -5600,29 +5541,29 @@
               <a:cxnLst/>
               <a:rect l="0" t="0" r="r" b="b"/>
               <a:pathLst>
-                <a:path w="28904" h="76232" fill="norm">
+                <a:path w="24575" h="74237" fill="norm">
                   <a:moveTo>
-                    <a:pt x="0" y="44728"/>
+                    <a:pt x="0" y="27284"/>
                   </a:moveTo>
                   <a:cubicBezTo>
-                    <a:pt x="0" y="63489"/>
-                    <a:pt x="6376" y="76232"/>
-                    <a:pt x="14452" y="72481"/>
-                  </a:cubicBezTo>
-                  <a:cubicBezTo>
-                    <a:pt x="22528" y="68731"/>
-                    <a:pt x="28904" y="50563"/>
-                    <a:pt x="28904" y="31657"/>
-                  </a:cubicBezTo>
-                  <a:cubicBezTo>
-                    <a:pt x="28904" y="12751"/>
-                    <a:pt x="22528" y="0"/>
-                    <a:pt x="14452" y="3898"/>
-                  </a:cubicBezTo>
-                  <a:cubicBezTo>
-                    <a:pt x="6376" y="7797"/>
-                    <a:pt x="0" y="25967"/>
-                    <a:pt x="0" y="44728"/>
+                    <a:pt x="0" y="44736"/>
+                    <a:pt x="5421" y="63561"/>
+                    <a:pt x="12288" y="68899"/>
+                  </a:cubicBezTo>
+                  <a:cubicBezTo>
+                    <a:pt x="19154" y="74237"/>
+                    <a:pt x="24575" y="64406"/>
+                    <a:pt x="24575" y="46945"/>
+                  </a:cubicBezTo>
+                  <a:cubicBezTo>
+                    <a:pt x="24575" y="29484"/>
+                    <a:pt x="19154" y="10659"/>
+                    <a:pt x="12288" y="5330"/>
+                  </a:cubicBezTo>
+                  <a:cubicBezTo>
+                    <a:pt x="5421" y="0"/>
+                    <a:pt x="0" y="9831"/>
+                    <a:pt x="0" y="27284"/>
                   </a:cubicBezTo>
                   <a:close/>
                 </a:path>
@@ -5639,14 +5580,14 @@
         </p:sp>
         <p:sp>
           <p:nvSpPr>
-            <p:cNvPr id="96" name="right Speaker column 2 row 1 52"/>
+            <p:cNvPr id="90" name="right Speaker column 2 row 1 53"/>
             <p:cNvSpPr/>
             <p:nvPr/>
           </p:nvSpPr>
           <p:spPr>
             <a:xfrm>
-              <a:off x="8257236" y="1490743"/>
-              <a:ext cx="28904" cy="77071"/>
+              <a:off x="8257492" y="1224370"/>
+              <a:ext cx="24575" cy="74539"/>
             </a:xfrm>
             <a:custGeom>
               <a:avLst/>
@@ -5655,29 +5596,29 @@
               <a:cxnLst/>
               <a:rect l="0" t="0" r="r" b="b"/>
               <a:pathLst>
-                <a:path w="28904" h="77071" fill="norm">
+                <a:path w="24575" h="74539" fill="norm">
                   <a:moveTo>
-                    <a:pt x="0" y="45758"/>
+                    <a:pt x="0" y="27624"/>
                   </a:moveTo>
                   <a:cubicBezTo>
-                    <a:pt x="0" y="64519"/>
-                    <a:pt x="6376" y="77071"/>
-                    <a:pt x="14452" y="73078"/>
-                  </a:cubicBezTo>
-                  <a:cubicBezTo>
-                    <a:pt x="22528" y="69087"/>
-                    <a:pt x="28904" y="50730"/>
-                    <a:pt x="28904" y="31467"/>
-                  </a:cubicBezTo>
-                  <a:cubicBezTo>
-                    <a:pt x="28904" y="12204"/>
-                    <a:pt x="22528" y="0"/>
-                    <a:pt x="14452" y="4140"/>
-                  </a:cubicBezTo>
-                  <a:cubicBezTo>
-                    <a:pt x="6376" y="8281"/>
-                    <a:pt x="0" y="26643"/>
-                    <a:pt x="0" y="45758"/>
+                    <a:pt x="0" y="45076"/>
+                    <a:pt x="5421" y="63890"/>
+                    <a:pt x="12288" y="69214"/>
+                  </a:cubicBezTo>
+                  <a:cubicBezTo>
+                    <a:pt x="19154" y="74539"/>
+                    <a:pt x="24575" y="64697"/>
+                    <a:pt x="24575" y="46907"/>
+                  </a:cubicBezTo>
+                  <a:cubicBezTo>
+                    <a:pt x="24575" y="29116"/>
+                    <a:pt x="19154" y="10632"/>
+                    <a:pt x="12288" y="5316"/>
+                  </a:cubicBezTo>
+                  <a:cubicBezTo>
+                    <a:pt x="5421" y="0"/>
+                    <a:pt x="0" y="9842"/>
+                    <a:pt x="0" y="27624"/>
                   </a:cubicBezTo>
                   <a:close/>
                 </a:path>
@@ -5694,14 +5635,14 @@
         </p:sp>
         <p:sp>
           <p:nvSpPr>
-            <p:cNvPr id="97" name="right Speaker column 2 row 1 53"/>
+            <p:cNvPr id="91" name="right Speaker column 2 row 1 54"/>
             <p:cNvSpPr/>
             <p:nvPr/>
           </p:nvSpPr>
           <p:spPr>
             <a:xfrm>
-              <a:off x="8257236" y="1378210"/>
-              <a:ext cx="28904" cy="77555"/>
+              <a:off x="8257492" y="1120960"/>
+              <a:ext cx="24575" cy="73853"/>
             </a:xfrm>
             <a:custGeom>
               <a:avLst/>
@@ -5710,29 +5651,29 @@
               <a:cxnLst/>
               <a:rect l="0" t="0" r="r" b="b"/>
               <a:pathLst>
-                <a:path w="28904" h="77555" fill="norm">
+                <a:path w="24575" h="73853" fill="norm">
                   <a:moveTo>
-                    <a:pt x="0" y="46787"/>
+                    <a:pt x="0" y="27305"/>
                   </a:moveTo>
                   <a:cubicBezTo>
-                    <a:pt x="0" y="65548"/>
-                    <a:pt x="6376" y="77555"/>
-                    <a:pt x="14452" y="73320"/>
-                  </a:cubicBezTo>
-                  <a:cubicBezTo>
-                    <a:pt x="22528" y="69087"/>
-                    <a:pt x="28904" y="50182"/>
-                    <a:pt x="28904" y="31276"/>
-                  </a:cubicBezTo>
-                  <a:cubicBezTo>
-                    <a:pt x="28904" y="12370"/>
-                    <a:pt x="22528" y="0"/>
-                    <a:pt x="14452" y="4737"/>
-                  </a:cubicBezTo>
-                  <a:cubicBezTo>
-                    <a:pt x="6376" y="9474"/>
-                    <a:pt x="0" y="28027"/>
-                    <a:pt x="0" y="46787"/>
+                    <a:pt x="0" y="44758"/>
+                    <a:pt x="5421" y="63231"/>
+                    <a:pt x="12288" y="68542"/>
+                  </a:cubicBezTo>
+                  <a:cubicBezTo>
+                    <a:pt x="19154" y="73853"/>
+                    <a:pt x="24575" y="63671"/>
+                    <a:pt x="24575" y="46210"/>
+                  </a:cubicBezTo>
+                  <a:cubicBezTo>
+                    <a:pt x="24575" y="28749"/>
+                    <a:pt x="19154" y="9946"/>
+                    <a:pt x="12288" y="4973"/>
+                  </a:cubicBezTo>
+                  <a:cubicBezTo>
+                    <a:pt x="5421" y="0"/>
+                    <a:pt x="0" y="9853"/>
+                    <a:pt x="0" y="27305"/>
                   </a:cubicBezTo>
                   <a:close/>
                 </a:path>
@@ -5749,14 +5690,14 @@
         </p:sp>
         <p:sp>
           <p:nvSpPr>
-            <p:cNvPr id="98" name="right Speaker column 2 row 1 54"/>
+            <p:cNvPr id="92" name="right Speaker column 2 row 1 55"/>
             <p:cNvSpPr/>
             <p:nvPr/>
           </p:nvSpPr>
           <p:spPr>
             <a:xfrm>
-              <a:off x="8257236" y="1266032"/>
-              <a:ext cx="28904" cy="78037"/>
+              <a:off x="8257492" y="1016562"/>
+              <a:ext cx="24575" cy="74484"/>
             </a:xfrm>
             <a:custGeom>
               <a:avLst/>
@@ -5765,29 +5706,29 @@
               <a:cxnLst/>
               <a:rect l="0" t="0" r="r" b="b"/>
               <a:pathLst>
-                <a:path w="28904" h="78037" fill="norm">
+                <a:path w="24575" h="74484" fill="norm">
                   <a:moveTo>
-                    <a:pt x="0" y="47461"/>
+                    <a:pt x="0" y="27975"/>
                   </a:moveTo>
                   <a:cubicBezTo>
-                    <a:pt x="0" y="66222"/>
-                    <a:pt x="6376" y="78037"/>
-                    <a:pt x="14452" y="73561"/>
-                  </a:cubicBezTo>
-                  <a:cubicBezTo>
-                    <a:pt x="22528" y="69087"/>
-                    <a:pt x="28904" y="49992"/>
-                    <a:pt x="28904" y="30730"/>
-                  </a:cubicBezTo>
-                  <a:cubicBezTo>
-                    <a:pt x="28904" y="11467"/>
-                    <a:pt x="22528" y="0"/>
-                    <a:pt x="14452" y="4622"/>
-                  </a:cubicBezTo>
-                  <a:cubicBezTo>
-                    <a:pt x="6376" y="9248"/>
-                    <a:pt x="0" y="28346"/>
-                    <a:pt x="0" y="47461"/>
+                    <a:pt x="0" y="45427"/>
+                    <a:pt x="5421" y="63890"/>
+                    <a:pt x="12288" y="69187"/>
+                  </a:cubicBezTo>
+                  <a:cubicBezTo>
+                    <a:pt x="19154" y="74484"/>
+                    <a:pt x="24575" y="64291"/>
+                    <a:pt x="24575" y="46501"/>
+                  </a:cubicBezTo>
+                  <a:cubicBezTo>
+                    <a:pt x="24575" y="28711"/>
+                    <a:pt x="19154" y="10577"/>
+                    <a:pt x="12288" y="5288"/>
+                  </a:cubicBezTo>
+                  <a:cubicBezTo>
+                    <a:pt x="5421" y="0"/>
+                    <a:pt x="0" y="10193"/>
+                    <a:pt x="0" y="27975"/>
                   </a:cubicBezTo>
                   <a:close/>
                 </a:path>
@@ -5804,14 +5745,14 @@
         </p:sp>
         <p:sp>
           <p:nvSpPr>
-            <p:cNvPr id="99" name="right Speaker column 2 row 1 55"/>
+            <p:cNvPr id="93" name="right Speaker column 2 row 1 56"/>
             <p:cNvSpPr/>
             <p:nvPr/>
           </p:nvSpPr>
           <p:spPr>
             <a:xfrm>
-              <a:off x="8216431" y="1899084"/>
-              <a:ext cx="28904" cy="73581"/>
+              <a:off x="8222798" y="1558823"/>
+              <a:ext cx="24575" cy="74920"/>
             </a:xfrm>
             <a:custGeom>
               <a:avLst/>
@@ -5820,29 +5761,29 @@
               <a:cxnLst/>
               <a:rect l="0" t="0" r="r" b="b"/>
               <a:pathLst>
-                <a:path w="28904" h="73581" fill="norm">
+                <a:path w="24575" h="74920" fill="norm">
                   <a:moveTo>
-                    <a:pt x="0" y="41982"/>
+                    <a:pt x="0" y="27236"/>
                   </a:moveTo>
                   <a:cubicBezTo>
-                    <a:pt x="0" y="60537"/>
-                    <a:pt x="6376" y="73581"/>
-                    <a:pt x="14452" y="70780"/>
-                  </a:cubicBezTo>
-                  <a:cubicBezTo>
-                    <a:pt x="22528" y="67982"/>
-                    <a:pt x="28904" y="50452"/>
-                    <a:pt x="28904" y="31751"/>
-                  </a:cubicBezTo>
-                  <a:cubicBezTo>
-                    <a:pt x="28904" y="13051"/>
-                    <a:pt x="22528" y="0"/>
-                    <a:pt x="14452" y="2948"/>
-                  </a:cubicBezTo>
-                  <a:cubicBezTo>
-                    <a:pt x="6376" y="5898"/>
-                    <a:pt x="0" y="23428"/>
-                    <a:pt x="0" y="41982"/>
+                    <a:pt x="0" y="44677"/>
+                    <a:pt x="5421" y="63518"/>
+                    <a:pt x="12288" y="69219"/>
+                  </a:cubicBezTo>
+                  <a:cubicBezTo>
+                    <a:pt x="19154" y="74920"/>
+                    <a:pt x="24575" y="65126"/>
+                    <a:pt x="24575" y="47676"/>
+                  </a:cubicBezTo>
+                  <a:cubicBezTo>
+                    <a:pt x="24575" y="30227"/>
+                    <a:pt x="19154" y="11385"/>
+                    <a:pt x="12288" y="5693"/>
+                  </a:cubicBezTo>
+                  <a:cubicBezTo>
+                    <a:pt x="5421" y="0"/>
+                    <a:pt x="0" y="9795"/>
+                    <a:pt x="0" y="27236"/>
                   </a:cubicBezTo>
                   <a:close/>
                 </a:path>
@@ -5859,14 +5800,14 @@
         </p:sp>
         <p:sp>
           <p:nvSpPr>
-            <p:cNvPr id="100" name="right Speaker column 2 row 1 56"/>
+            <p:cNvPr id="94" name="right Speaker column 2 row 1 57"/>
             <p:cNvSpPr/>
             <p:nvPr/>
           </p:nvSpPr>
           <p:spPr>
             <a:xfrm>
-              <a:off x="8216431" y="1788129"/>
-              <a:ext cx="28904" cy="74419"/>
+              <a:off x="8222798" y="1455812"/>
+              <a:ext cx="24575" cy="73905"/>
             </a:xfrm>
             <a:custGeom>
               <a:avLst/>
@@ -5875,29 +5816,29 @@
               <a:cxnLst/>
               <a:rect l="0" t="0" r="r" b="b"/>
               <a:pathLst>
-                <a:path w="28904" h="74419" fill="norm">
+                <a:path w="24575" h="73905" fill="norm">
                   <a:moveTo>
-                    <a:pt x="0" y="43013"/>
+                    <a:pt x="0" y="26917"/>
                   </a:moveTo>
                   <a:cubicBezTo>
-                    <a:pt x="0" y="61567"/>
-                    <a:pt x="6376" y="74419"/>
-                    <a:pt x="14452" y="71024"/>
-                  </a:cubicBezTo>
-                  <a:cubicBezTo>
-                    <a:pt x="22528" y="67629"/>
-                    <a:pt x="28904" y="50260"/>
-                    <a:pt x="28904" y="31560"/>
-                  </a:cubicBezTo>
-                  <a:cubicBezTo>
-                    <a:pt x="28904" y="12859"/>
-                    <a:pt x="22528" y="0"/>
-                    <a:pt x="14452" y="3543"/>
-                  </a:cubicBezTo>
-                  <a:cubicBezTo>
-                    <a:pt x="6376" y="7087"/>
-                    <a:pt x="0" y="24459"/>
-                    <a:pt x="0" y="43013"/>
+                    <a:pt x="0" y="44358"/>
+                    <a:pt x="5421" y="63189"/>
+                    <a:pt x="12288" y="68547"/>
+                  </a:cubicBezTo>
+                  <a:cubicBezTo>
+                    <a:pt x="19154" y="73905"/>
+                    <a:pt x="24575" y="64429"/>
+                    <a:pt x="24575" y="46980"/>
+                  </a:cubicBezTo>
+                  <a:cubicBezTo>
+                    <a:pt x="24575" y="29530"/>
+                    <a:pt x="19154" y="10699"/>
+                    <a:pt x="12288" y="5350"/>
+                  </a:cubicBezTo>
+                  <a:cubicBezTo>
+                    <a:pt x="5421" y="0"/>
+                    <a:pt x="0" y="9476"/>
+                    <a:pt x="0" y="26917"/>
                   </a:cubicBezTo>
                   <a:close/>
                 </a:path>
@@ -5914,14 +5855,14 @@
         </p:sp>
         <p:sp>
           <p:nvSpPr>
-            <p:cNvPr id="101" name="right Speaker column 2 row 1 57"/>
+            <p:cNvPr id="95" name="right Speaker column 2 row 1 58"/>
             <p:cNvSpPr/>
             <p:nvPr/>
           </p:nvSpPr>
           <p:spPr>
             <a:xfrm>
-              <a:off x="8216431" y="1677175"/>
-              <a:ext cx="28904" cy="74906"/>
+              <a:off x="8222798" y="1352142"/>
+              <a:ext cx="24575" cy="74536"/>
             </a:xfrm>
             <a:custGeom>
               <a:avLst/>
@@ -5930,29 +5871,29 @@
               <a:cxnLst/>
               <a:rect l="0" t="0" r="r" b="b"/>
               <a:pathLst>
-                <a:path w="28904" h="74906" fill="norm">
+                <a:path w="24575" h="74536" fill="norm">
                   <a:moveTo>
-                    <a:pt x="0" y="44044"/>
+                    <a:pt x="0" y="27257"/>
                   </a:moveTo>
                   <a:cubicBezTo>
-                    <a:pt x="0" y="62598"/>
-                    <a:pt x="6376" y="74906"/>
-                    <a:pt x="14452" y="71619"/>
-                  </a:cubicBezTo>
-                  <a:cubicBezTo>
-                    <a:pt x="22528" y="68334"/>
-                    <a:pt x="28904" y="50421"/>
-                    <a:pt x="28904" y="31368"/>
-                  </a:cubicBezTo>
-                  <a:cubicBezTo>
-                    <a:pt x="28904" y="12314"/>
-                    <a:pt x="22528" y="0"/>
-                    <a:pt x="14452" y="3786"/>
-                  </a:cubicBezTo>
-                  <a:cubicBezTo>
-                    <a:pt x="6376" y="7574"/>
-                    <a:pt x="0" y="25489"/>
-                    <a:pt x="0" y="44044"/>
+                    <a:pt x="0" y="44698"/>
+                    <a:pt x="5421" y="63189"/>
+                    <a:pt x="12288" y="68862"/>
+                  </a:cubicBezTo>
+                  <a:cubicBezTo>
+                    <a:pt x="19154" y="74536"/>
+                    <a:pt x="24575" y="64720"/>
+                    <a:pt x="24575" y="46941"/>
+                  </a:cubicBezTo>
+                  <a:cubicBezTo>
+                    <a:pt x="24575" y="29163"/>
+                    <a:pt x="19154" y="10672"/>
+                    <a:pt x="12288" y="5336"/>
+                  </a:cubicBezTo>
+                  <a:cubicBezTo>
+                    <a:pt x="5421" y="0"/>
+                    <a:pt x="0" y="9816"/>
+                    <a:pt x="0" y="27257"/>
                   </a:cubicBezTo>
                   <a:close/>
                 </a:path>
@@ -5969,14 +5910,14 @@
         </p:sp>
         <p:sp>
           <p:nvSpPr>
-            <p:cNvPr id="102" name="right Speaker column 2 row 1 58"/>
+            <p:cNvPr id="96" name="right Speaker column 2 row 1 59"/>
             <p:cNvSpPr/>
             <p:nvPr/>
           </p:nvSpPr>
           <p:spPr>
             <a:xfrm>
-              <a:off x="8216431" y="1566572"/>
-              <a:ext cx="28904" cy="75743"/>
+              <a:off x="8222798" y="1248802"/>
+              <a:ext cx="24575" cy="74179"/>
             </a:xfrm>
             <a:custGeom>
               <a:avLst/>
@@ -5985,29 +5926,29 @@
               <a:cxnLst/>
               <a:rect l="0" t="0" r="r" b="b"/>
               <a:pathLst>
-                <a:path w="28904" h="75743" fill="norm">
+                <a:path w="24575" h="74179" fill="norm">
                   <a:moveTo>
-                    <a:pt x="0" y="45072"/>
+                    <a:pt x="0" y="27597"/>
                   </a:moveTo>
                   <a:cubicBezTo>
-                    <a:pt x="0" y="63626"/>
-                    <a:pt x="6376" y="75743"/>
-                    <a:pt x="14452" y="71862"/>
-                  </a:cubicBezTo>
-                  <a:cubicBezTo>
-                    <a:pt x="22528" y="67982"/>
-                    <a:pt x="28904" y="49877"/>
-                    <a:pt x="28904" y="31176"/>
-                  </a:cubicBezTo>
-                  <a:cubicBezTo>
-                    <a:pt x="28904" y="12476"/>
-                    <a:pt x="22528" y="0"/>
-                    <a:pt x="14452" y="4029"/>
-                  </a:cubicBezTo>
-                  <a:cubicBezTo>
-                    <a:pt x="6376" y="8060"/>
-                    <a:pt x="0" y="26168"/>
-                    <a:pt x="0" y="44722"/>
+                    <a:pt x="0" y="45038"/>
+                    <a:pt x="5421" y="63518"/>
+                    <a:pt x="12288" y="68849"/>
+                  </a:cubicBezTo>
+                  <a:cubicBezTo>
+                    <a:pt x="19154" y="74179"/>
+                    <a:pt x="24575" y="64352"/>
+                    <a:pt x="24575" y="46903"/>
+                  </a:cubicBezTo>
+                  <a:cubicBezTo>
+                    <a:pt x="24575" y="29454"/>
+                    <a:pt x="19154" y="10644"/>
+                    <a:pt x="12288" y="5322"/>
+                  </a:cubicBezTo>
+                  <a:cubicBezTo>
+                    <a:pt x="5421" y="0"/>
+                    <a:pt x="0" y="9827"/>
+                    <a:pt x="0" y="27268"/>
                   </a:cubicBezTo>
                   <a:close/>
                 </a:path>
@@ -6024,14 +5965,14 @@
         </p:sp>
         <p:sp>
           <p:nvSpPr>
-            <p:cNvPr id="103" name="right Speaker column 2 row 1 59"/>
+            <p:cNvPr id="97" name="right Speaker column 2 row 1 60"/>
             <p:cNvSpPr/>
             <p:nvPr/>
           </p:nvSpPr>
           <p:spPr>
             <a:xfrm>
-              <a:off x="8216431" y="1455970"/>
-              <a:ext cx="28904" cy="76229"/>
+              <a:off x="8222798" y="1145461"/>
+              <a:ext cx="24575" cy="74152"/>
             </a:xfrm>
             <a:custGeom>
               <a:avLst/>
@@ -6040,29 +5981,29 @@
               <a:cxnLst/>
               <a:rect l="0" t="0" r="r" b="b"/>
               <a:pathLst>
-                <a:path w="28904" h="76229" fill="norm">
+                <a:path w="24575" h="74152" fill="norm">
                   <a:moveTo>
-                    <a:pt x="0" y="45750"/>
+                    <a:pt x="0" y="27608"/>
                   </a:moveTo>
                   <a:cubicBezTo>
-                    <a:pt x="0" y="64304"/>
-                    <a:pt x="6376" y="76229"/>
-                    <a:pt x="14452" y="72104"/>
-                  </a:cubicBezTo>
-                  <a:cubicBezTo>
-                    <a:pt x="22528" y="67982"/>
-                    <a:pt x="28904" y="49686"/>
-                    <a:pt x="28904" y="30632"/>
-                  </a:cubicBezTo>
-                  <a:cubicBezTo>
-                    <a:pt x="28904" y="11579"/>
-                    <a:pt x="22528" y="0"/>
-                    <a:pt x="14452" y="4272"/>
-                  </a:cubicBezTo>
-                  <a:cubicBezTo>
-                    <a:pt x="6376" y="8546"/>
-                    <a:pt x="0" y="27196"/>
-                    <a:pt x="0" y="45750"/>
+                    <a:pt x="0" y="45049"/>
+                    <a:pt x="5421" y="63518"/>
+                    <a:pt x="12288" y="68835"/>
+                  </a:cubicBezTo>
+                  <a:cubicBezTo>
+                    <a:pt x="19154" y="74152"/>
+                    <a:pt x="24575" y="64314"/>
+                    <a:pt x="24575" y="46535"/>
+                  </a:cubicBezTo>
+                  <a:cubicBezTo>
+                    <a:pt x="24575" y="28757"/>
+                    <a:pt x="19154" y="10617"/>
+                    <a:pt x="12288" y="5308"/>
+                  </a:cubicBezTo>
+                  <a:cubicBezTo>
+                    <a:pt x="5421" y="0"/>
+                    <a:pt x="0" y="10167"/>
+                    <a:pt x="0" y="27608"/>
                   </a:cubicBezTo>
                   <a:close/>
                 </a:path>
@@ -6079,14 +6020,14 @@
         </p:sp>
         <p:sp>
           <p:nvSpPr>
-            <p:cNvPr id="104" name="right Speaker column 2 row 1 60"/>
+            <p:cNvPr id="98" name="right Speaker column 2 row 1 61"/>
             <p:cNvSpPr/>
             <p:nvPr/>
           </p:nvSpPr>
           <p:spPr>
             <a:xfrm>
-              <a:off x="8216431" y="1345720"/>
-              <a:ext cx="28904" cy="76713"/>
+              <a:off x="8222798" y="1042450"/>
+              <a:ext cx="24575" cy="74124"/>
             </a:xfrm>
             <a:custGeom>
               <a:avLst/>
@@ -6095,29 +6036,29 @@
               <a:cxnLst/>
               <a:rect l="0" t="0" r="r" b="b"/>
               <a:pathLst>
-                <a:path w="28904" h="76713" fill="norm">
+                <a:path w="24575" h="74124" fill="norm">
                   <a:moveTo>
-                    <a:pt x="0" y="46426"/>
+                    <a:pt x="0" y="27619"/>
                   </a:moveTo>
                   <a:cubicBezTo>
-                    <a:pt x="0" y="64980"/>
-                    <a:pt x="6376" y="76713"/>
-                    <a:pt x="14452" y="72346"/>
-                  </a:cubicBezTo>
-                  <a:cubicBezTo>
-                    <a:pt x="22528" y="67982"/>
-                    <a:pt x="28904" y="49142"/>
-                    <a:pt x="28904" y="30442"/>
-                  </a:cubicBezTo>
-                  <a:cubicBezTo>
-                    <a:pt x="28904" y="11741"/>
-                    <a:pt x="22528" y="0"/>
-                    <a:pt x="14452" y="4514"/>
-                  </a:cubicBezTo>
-                  <a:cubicBezTo>
-                    <a:pt x="6376" y="9030"/>
-                    <a:pt x="0" y="27872"/>
-                    <a:pt x="0" y="46426"/>
+                    <a:pt x="0" y="45060"/>
+                    <a:pt x="5421" y="63518"/>
+                    <a:pt x="12288" y="68821"/>
+                  </a:cubicBezTo>
+                  <a:cubicBezTo>
+                    <a:pt x="19154" y="74124"/>
+                    <a:pt x="24575" y="63946"/>
+                    <a:pt x="24575" y="46497"/>
+                  </a:cubicBezTo>
+                  <a:cubicBezTo>
+                    <a:pt x="24575" y="29048"/>
+                    <a:pt x="19154" y="10589"/>
+                    <a:pt x="12288" y="5295"/>
+                  </a:cubicBezTo>
+                  <a:cubicBezTo>
+                    <a:pt x="5421" y="0"/>
+                    <a:pt x="0" y="10178"/>
+                    <a:pt x="0" y="27619"/>
                   </a:cubicBezTo>
                   <a:close/>
                 </a:path>
@@ -6134,14 +6075,14 @@
         </p:sp>
         <p:sp>
           <p:nvSpPr>
-            <p:cNvPr id="105" name="right Speaker column 2 row 1 61"/>
+            <p:cNvPr id="99" name="right Speaker column 2 row 1 62"/>
             <p:cNvSpPr/>
             <p:nvPr/>
           </p:nvSpPr>
           <p:spPr>
             <a:xfrm>
-              <a:off x="8175625" y="1859275"/>
-              <a:ext cx="28904" cy="73085"/>
+              <a:off x="8188103" y="1479050"/>
+              <a:ext cx="24575" cy="74205"/>
             </a:xfrm>
             <a:custGeom>
               <a:avLst/>
@@ -6150,29 +6091,29 @@
               <a:cxnLst/>
               <a:rect l="0" t="0" r="r" b="b"/>
               <a:pathLst>
-                <a:path w="28904" h="73085" fill="norm">
+                <a:path w="24575" h="74205" fill="norm">
                   <a:moveTo>
-                    <a:pt x="0" y="42317"/>
+                    <a:pt x="0" y="26891"/>
                   </a:moveTo>
                   <a:cubicBezTo>
-                    <a:pt x="0" y="60662"/>
-                    <a:pt x="6376" y="73085"/>
-                    <a:pt x="14452" y="70154"/>
-                  </a:cubicBezTo>
-                  <a:cubicBezTo>
-                    <a:pt x="22528" y="67225"/>
-                    <a:pt x="28904" y="49763"/>
-                    <a:pt x="28904" y="31269"/>
-                  </a:cubicBezTo>
-                  <a:cubicBezTo>
-                    <a:pt x="28904" y="12776"/>
-                    <a:pt x="22528" y="0"/>
-                    <a:pt x="14452" y="3427"/>
-                  </a:cubicBezTo>
-                  <a:cubicBezTo>
-                    <a:pt x="6376" y="6855"/>
-                    <a:pt x="0" y="23972"/>
-                    <a:pt x="0" y="42317"/>
+                    <a:pt x="0" y="44320"/>
+                    <a:pt x="5421" y="62817"/>
+                    <a:pt x="12288" y="68511"/>
+                  </a:cubicBezTo>
+                  <a:cubicBezTo>
+                    <a:pt x="19154" y="74205"/>
+                    <a:pt x="24575" y="64414"/>
+                    <a:pt x="24575" y="46976"/>
+                  </a:cubicBezTo>
+                  <a:cubicBezTo>
+                    <a:pt x="24575" y="29539"/>
+                    <a:pt x="19154" y="10713"/>
+                    <a:pt x="12288" y="5356"/>
+                  </a:cubicBezTo>
+                  <a:cubicBezTo>
+                    <a:pt x="5421" y="0"/>
+                    <a:pt x="0" y="9462"/>
+                    <a:pt x="0" y="26891"/>
                   </a:cubicBezTo>
                   <a:close/>
                 </a:path>
@@ -6189,14 +6130,14 @@
         </p:sp>
         <p:sp>
           <p:nvSpPr>
-            <p:cNvPr id="106" name="right Speaker column 2 row 1 62"/>
+            <p:cNvPr id="100" name="right Speaker column 2 row 1 63"/>
             <p:cNvSpPr/>
             <p:nvPr/>
           </p:nvSpPr>
           <p:spPr>
             <a:xfrm>
-              <a:off x="8175625" y="1750253"/>
-              <a:ext cx="28904" cy="73574"/>
+              <a:off x="8188103" y="1375451"/>
+              <a:ext cx="24575" cy="74177"/>
             </a:xfrm>
             <a:custGeom>
               <a:avLst/>
@@ -6205,29 +6146,29 @@
               <a:cxnLst/>
               <a:rect l="0" t="0" r="r" b="b"/>
               <a:pathLst>
-                <a:path w="28904" h="73574" fill="norm">
+                <a:path w="24575" h="74177" fill="norm">
                   <a:moveTo>
-                    <a:pt x="0" y="43000"/>
+                    <a:pt x="0" y="27560"/>
                   </a:moveTo>
                   <a:cubicBezTo>
-                    <a:pt x="0" y="61345"/>
-                    <a:pt x="6376" y="73574"/>
-                    <a:pt x="14452" y="70051"/>
-                  </a:cubicBezTo>
-                  <a:cubicBezTo>
-                    <a:pt x="22528" y="66528"/>
-                    <a:pt x="28904" y="49221"/>
-                    <a:pt x="28904" y="30728"/>
-                  </a:cubicBezTo>
-                  <a:cubicBezTo>
-                    <a:pt x="28904" y="12234"/>
-                    <a:pt x="22528" y="0"/>
-                    <a:pt x="14452" y="3324"/>
-                  </a:cubicBezTo>
-                  <a:cubicBezTo>
-                    <a:pt x="6376" y="6651"/>
-                    <a:pt x="0" y="24655"/>
-                    <a:pt x="0" y="42654"/>
+                    <a:pt x="0" y="44989"/>
+                    <a:pt x="5421" y="63475"/>
+                    <a:pt x="12288" y="68826"/>
+                  </a:cubicBezTo>
+                  <a:cubicBezTo>
+                    <a:pt x="19154" y="74177"/>
+                    <a:pt x="24575" y="64704"/>
+                    <a:pt x="24575" y="47266"/>
+                  </a:cubicBezTo>
+                  <a:cubicBezTo>
+                    <a:pt x="24575" y="29829"/>
+                    <a:pt x="19154" y="11343"/>
+                    <a:pt x="12288" y="5671"/>
+                  </a:cubicBezTo>
+                  <a:cubicBezTo>
+                    <a:pt x="5421" y="0"/>
+                    <a:pt x="0" y="10131"/>
+                    <a:pt x="0" y="27231"/>
                   </a:cubicBezTo>
                   <a:close/>
                 </a:path>
@@ -6244,14 +6185,14 @@
         </p:sp>
         <p:sp>
           <p:nvSpPr>
-            <p:cNvPr id="107" name="right Speaker column 2 row 1 63"/>
+            <p:cNvPr id="101" name="right Speaker column 2 row 1 64"/>
             <p:cNvSpPr/>
             <p:nvPr/>
           </p:nvSpPr>
           <p:spPr>
             <a:xfrm>
-              <a:off x="8175625" y="1641230"/>
-              <a:ext cx="28904" cy="74410"/>
+              <a:off x="8188103" y="1273167"/>
+              <a:ext cx="24575" cy="73820"/>
             </a:xfrm>
             <a:custGeom>
               <a:avLst/>
@@ -6260,29 +6201,29 @@
               <a:cxnLst/>
               <a:rect l="0" t="0" r="r" b="b"/>
               <a:pathLst>
-                <a:path w="28904" h="74410" fill="norm">
+                <a:path w="24575" h="73820" fill="norm">
                   <a:moveTo>
-                    <a:pt x="0" y="44029"/>
+                    <a:pt x="0" y="27242"/>
                   </a:moveTo>
                   <a:cubicBezTo>
-                    <a:pt x="0" y="62374"/>
-                    <a:pt x="6376" y="74410"/>
-                    <a:pt x="14452" y="70643"/>
-                  </a:cubicBezTo>
-                  <a:cubicBezTo>
-                    <a:pt x="22528" y="66876"/>
-                    <a:pt x="28904" y="49028"/>
-                    <a:pt x="28904" y="30535"/>
-                  </a:cubicBezTo>
-                  <a:cubicBezTo>
-                    <a:pt x="28904" y="12042"/>
-                    <a:pt x="22528" y="0"/>
-                    <a:pt x="14452" y="3916"/>
-                  </a:cubicBezTo>
-                  <a:cubicBezTo>
-                    <a:pt x="6376" y="7834"/>
-                    <a:pt x="0" y="25684"/>
-                    <a:pt x="0" y="44029"/>
+                    <a:pt x="0" y="44671"/>
+                    <a:pt x="5421" y="63146"/>
+                    <a:pt x="12288" y="68483"/>
+                  </a:cubicBezTo>
+                  <a:cubicBezTo>
+                    <a:pt x="19154" y="73820"/>
+                    <a:pt x="24575" y="64008"/>
+                    <a:pt x="24575" y="46570"/>
+                  </a:cubicBezTo>
+                  <a:cubicBezTo>
+                    <a:pt x="24575" y="29133"/>
+                    <a:pt x="19154" y="10657"/>
+                    <a:pt x="12288" y="5328"/>
+                  </a:cubicBezTo>
+                  <a:cubicBezTo>
+                    <a:pt x="5421" y="0"/>
+                    <a:pt x="0" y="9813"/>
+                    <a:pt x="0" y="27242"/>
                   </a:cubicBezTo>
                   <a:close/>
                 </a:path>
@@ -6299,14 +6240,14 @@
         </p:sp>
         <p:sp>
           <p:nvSpPr>
-            <p:cNvPr id="108" name="right Speaker column 2 row 1 64"/>
+            <p:cNvPr id="102" name="right Speaker column 2 row 1 65"/>
             <p:cNvSpPr/>
             <p:nvPr/>
           </p:nvSpPr>
           <p:spPr>
             <a:xfrm>
-              <a:off x="8175625" y="1532556"/>
-              <a:ext cx="28904" cy="74898"/>
+              <a:off x="8188103" y="1170555"/>
+              <a:ext cx="24575" cy="73793"/>
             </a:xfrm>
             <a:custGeom>
               <a:avLst/>
@@ -6315,29 +6256,29 @@
               <a:cxnLst/>
               <a:rect l="0" t="0" r="r" b="b"/>
               <a:pathLst>
-                <a:path w="28904" h="74898" fill="norm">
+                <a:path w="24575" h="73793" fill="norm">
                   <a:moveTo>
-                    <a:pt x="0" y="44710"/>
+                    <a:pt x="0" y="27253"/>
                   </a:moveTo>
                   <a:cubicBezTo>
-                    <a:pt x="0" y="63055"/>
-                    <a:pt x="6376" y="74898"/>
-                    <a:pt x="14452" y="70886"/>
-                  </a:cubicBezTo>
-                  <a:cubicBezTo>
-                    <a:pt x="22528" y="66876"/>
-                    <a:pt x="28904" y="48836"/>
-                    <a:pt x="28904" y="30343"/>
-                  </a:cubicBezTo>
-                  <a:cubicBezTo>
-                    <a:pt x="28904" y="11850"/>
-                    <a:pt x="22528" y="0"/>
-                    <a:pt x="14452" y="4160"/>
-                  </a:cubicBezTo>
-                  <a:cubicBezTo>
-                    <a:pt x="6376" y="8322"/>
-                    <a:pt x="0" y="26365"/>
-                    <a:pt x="0" y="44710"/>
+                    <a:pt x="0" y="44682"/>
+                    <a:pt x="5421" y="63146"/>
+                    <a:pt x="12288" y="68469"/>
+                  </a:cubicBezTo>
+                  <a:cubicBezTo>
+                    <a:pt x="19154" y="73793"/>
+                    <a:pt x="24575" y="63969"/>
+                    <a:pt x="24575" y="46532"/>
+                  </a:cubicBezTo>
+                  <a:cubicBezTo>
+                    <a:pt x="24575" y="29094"/>
+                    <a:pt x="19154" y="10629"/>
+                    <a:pt x="12288" y="5315"/>
+                  </a:cubicBezTo>
+                  <a:cubicBezTo>
+                    <a:pt x="5421" y="0"/>
+                    <a:pt x="0" y="9824"/>
+                    <a:pt x="0" y="27253"/>
                   </a:cubicBezTo>
                   <a:close/>
                 </a:path>
@@ -6354,14 +6295,14 @@
         </p:sp>
         <p:sp>
           <p:nvSpPr>
-            <p:cNvPr id="109" name="right Speaker column 2 row 1 65"/>
+            <p:cNvPr id="103" name="right Speaker column 2 row 1 66"/>
             <p:cNvSpPr/>
             <p:nvPr/>
           </p:nvSpPr>
           <p:spPr>
             <a:xfrm>
-              <a:off x="8175625" y="1423185"/>
-              <a:ext cx="28904" cy="75736"/>
+              <a:off x="8188103" y="1067942"/>
+              <a:ext cx="24575" cy="73436"/>
             </a:xfrm>
             <a:custGeom>
               <a:avLst/>
@@ -6370,29 +6311,29 @@
               <a:cxnLst/>
               <a:rect l="0" t="0" r="r" b="b"/>
               <a:pathLst>
-                <a:path w="28904" h="75736" fill="norm">
+                <a:path w="24575" h="73436" fill="norm">
                   <a:moveTo>
-                    <a:pt x="0" y="46088"/>
+                    <a:pt x="0" y="27264"/>
                   </a:moveTo>
                   <a:cubicBezTo>
-                    <a:pt x="0" y="64433"/>
-                    <a:pt x="6376" y="75736"/>
-                    <a:pt x="14452" y="71479"/>
-                  </a:cubicBezTo>
-                  <a:cubicBezTo>
-                    <a:pt x="22528" y="67225"/>
-                    <a:pt x="28904" y="48643"/>
-                    <a:pt x="28904" y="30150"/>
-                  </a:cubicBezTo>
-                  <a:cubicBezTo>
-                    <a:pt x="28904" y="11657"/>
-                    <a:pt x="22528" y="0"/>
-                    <a:pt x="14452" y="4753"/>
-                  </a:cubicBezTo>
-                  <a:cubicBezTo>
-                    <a:pt x="6376" y="9506"/>
-                    <a:pt x="0" y="27743"/>
-                    <a:pt x="0" y="46088"/>
+                    <a:pt x="0" y="44693"/>
+                    <a:pt x="5421" y="62817"/>
+                    <a:pt x="12288" y="68127"/>
+                  </a:cubicBezTo>
+                  <a:cubicBezTo>
+                    <a:pt x="19154" y="73436"/>
+                    <a:pt x="24575" y="63273"/>
+                    <a:pt x="24575" y="45835"/>
+                  </a:cubicBezTo>
+                  <a:cubicBezTo>
+                    <a:pt x="24575" y="28397"/>
+                    <a:pt x="19154" y="9944"/>
+                    <a:pt x="12288" y="4972"/>
+                  </a:cubicBezTo>
+                  <a:cubicBezTo>
+                    <a:pt x="5421" y="0"/>
+                    <a:pt x="0" y="9835"/>
+                    <a:pt x="0" y="27264"/>
                   </a:cubicBezTo>
                   <a:close/>
                 </a:path>
@@ -6410,28 +6351,28 @@
       </p:grpSp>
       <p:grpSp>
         <p:nvGrpSpPr>
-          <p:cNvPr id="110" name="right Lever column 2 row 7"/>
+          <p:cNvPr id="104" name="right Lever column 2 row 7"/>
           <p:cNvGrpSpPr/>
           <p:nvPr/>
         </p:nvGrpSpPr>
         <p:grpSpPr>
           <a:xfrm>
-            <a:off x="4903113" y="4043243"/>
-            <a:ext cx="254675" cy="215920"/>
-            <a:chOff x="8103513" y="4624268"/>
-            <a:chExt cx="254675" cy="215920"/>
+            <a:off x="4772772" y="3585544"/>
+            <a:ext cx="370153" cy="200963"/>
+            <a:chOff x="7973172" y="4166569"/>
+            <a:chExt cx="370153" cy="200963"/>
           </a:xfrm>
         </p:grpSpPr>
         <p:sp>
           <p:nvSpPr>
-            <p:cNvPr id="111" name="right Lever column 2 row 7 5"/>
+            <p:cNvPr id="105" name="right Lever column 2 row 7 6"/>
             <p:cNvSpPr/>
             <p:nvPr/>
           </p:nvSpPr>
           <p:spPr>
             <a:xfrm>
-              <a:off x="8103513" y="4637165"/>
-              <a:ext cx="254675" cy="203023"/>
+              <a:off x="7973172" y="4180338"/>
+              <a:ext cx="370153" cy="187195"/>
             </a:xfrm>
             <a:custGeom>
               <a:avLst/>
@@ -6440,21 +6381,21 @@
               <a:cxnLst/>
               <a:rect l="0" t="0" r="r" b="b"/>
               <a:pathLst>
-                <a:path w="254675" h="203023" fill="norm">
+                <a:path w="370153" h="187195" fill="norm">
                   <a:moveTo>
-                    <a:pt x="0" y="203023"/>
+                    <a:pt x="0" y="187195"/>
                   </a:moveTo>
                   <a:lnTo>
-                    <a:pt x="150291" y="186687"/>
+                    <a:pt x="218438" y="187195"/>
                   </a:lnTo>
                   <a:lnTo>
-                    <a:pt x="254675" y="0"/>
+                    <a:pt x="370153" y="0"/>
                   </a:lnTo>
                   <a:lnTo>
-                    <a:pt x="107845" y="15960"/>
+                    <a:pt x="156746" y="0"/>
                   </a:lnTo>
                   <a:lnTo>
-                    <a:pt x="0" y="203023"/>
+                    <a:pt x="0" y="187195"/>
                   </a:lnTo>
                   <a:close/>
                 </a:path>
@@ -6463,7 +6404,7 @@
             <a:solidFill>
               <a:srgbClr val="9E9D9B"/>
             </a:solidFill>
-            <a:ln w="6200" cap="rnd">
+            <a:ln w="6619" cap="rnd">
               <a:solidFill>
                 <a:srgbClr val="040000"/>
               </a:solidFill>
@@ -6473,14 +6414,14 @@
         </p:sp>
         <p:sp>
           <p:nvSpPr>
-            <p:cNvPr id="112" name="right Lever column 2 row 7 6"/>
+            <p:cNvPr id="106" name="right Lever column 2 row 7 7"/>
             <p:cNvSpPr/>
             <p:nvPr/>
           </p:nvSpPr>
           <p:spPr>
             <a:xfrm>
-              <a:off x="8103513" y="4810956"/>
-              <a:ext cx="150291" cy="29232"/>
+              <a:off x="7973172" y="4353764"/>
+              <a:ext cx="218438" cy="13768"/>
             </a:xfrm>
             <a:custGeom>
               <a:avLst/>
@@ -6489,18 +6430,18 @@
               <a:cxnLst/>
               <a:rect l="0" t="0" r="r" b="b"/>
               <a:pathLst>
-                <a:path w="150291" h="29232" fill="norm">
+                <a:path w="218438" h="13768" fill="norm">
                   <a:moveTo>
-                    <a:pt x="150291" y="0"/>
+                    <a:pt x="218438" y="0"/>
                   </a:moveTo>
                   <a:lnTo>
-                    <a:pt x="0" y="16336"/>
+                    <a:pt x="0" y="0"/>
                   </a:lnTo>
                   <a:lnTo>
-                    <a:pt x="0" y="29232"/>
+                    <a:pt x="0" y="13768"/>
                   </a:lnTo>
                   <a:lnTo>
-                    <a:pt x="150291" y="12896"/>
+                    <a:pt x="218438" y="13768"/>
                   </a:lnTo>
                   <a:close/>
                 </a:path>
@@ -6509,7 +6450,7 @@
             <a:solidFill>
               <a:srgbClr val="9E9D9B"/>
             </a:solidFill>
-            <a:ln w="6200" cap="rnd">
+            <a:ln w="6619" cap="rnd">
               <a:solidFill>
                 <a:srgbClr val="040000"/>
               </a:solidFill>
@@ -6519,14 +6460,14 @@
         </p:sp>
         <p:sp>
           <p:nvSpPr>
-            <p:cNvPr id="113" name="right Lever column 2 row 7 7"/>
+            <p:cNvPr id="107" name="right Lever column 2 row 7 8"/>
             <p:cNvSpPr/>
             <p:nvPr/>
           </p:nvSpPr>
           <p:spPr>
             <a:xfrm>
-              <a:off x="8103513" y="4624268"/>
-              <a:ext cx="254675" cy="203023"/>
+              <a:off x="7973172" y="4166569"/>
+              <a:ext cx="370153" cy="187195"/>
             </a:xfrm>
             <a:custGeom>
               <a:avLst/>
@@ -6535,21 +6476,21 @@
               <a:cxnLst/>
               <a:rect l="0" t="0" r="r" b="b"/>
               <a:pathLst>
-                <a:path w="254675" h="203023" fill="norm">
+                <a:path w="370153" h="187195" fill="norm">
                   <a:moveTo>
-                    <a:pt x="0" y="203023"/>
+                    <a:pt x="0" y="187195"/>
                   </a:moveTo>
                   <a:lnTo>
-                    <a:pt x="150291" y="186687"/>
+                    <a:pt x="218438" y="187195"/>
                   </a:lnTo>
                   <a:lnTo>
-                    <a:pt x="254675" y="0"/>
+                    <a:pt x="370153" y="0"/>
                   </a:lnTo>
                   <a:lnTo>
-                    <a:pt x="107845" y="15960"/>
+                    <a:pt x="156746" y="0"/>
                   </a:lnTo>
                   <a:lnTo>
-                    <a:pt x="0" y="203023"/>
+                    <a:pt x="0" y="187195"/>
                   </a:lnTo>
                   <a:close/>
                 </a:path>
@@ -6558,7 +6499,7 @@
             <a:solidFill>
               <a:srgbClr val="9E9D9B"/>
             </a:solidFill>
-            <a:ln w="6200" cap="rnd">
+            <a:ln w="6619" cap="rnd">
               <a:solidFill>
                 <a:srgbClr val="040000"/>
               </a:solidFill>
@@ -6568,14 +6509,14 @@
         </p:sp>
         <p:sp>
           <p:nvSpPr>
-            <p:cNvPr id="114" name="right Lever column 2 row 7 8"/>
+            <p:cNvPr id="108" name="right Lever column 2 row 7 9"/>
             <p:cNvSpPr/>
             <p:nvPr/>
           </p:nvSpPr>
           <p:spPr>
             <a:xfrm>
-              <a:off x="8253804" y="4624268"/>
-              <a:ext cx="104384" cy="199584"/>
+              <a:off x="8191611" y="4166569"/>
+              <a:ext cx="151715" cy="200963"/>
             </a:xfrm>
             <a:custGeom>
               <a:avLst/>
@@ -6584,21 +6525,21 @@
               <a:cxnLst/>
               <a:rect l="0" t="0" r="r" b="b"/>
               <a:pathLst>
-                <a:path w="104384" h="199584" fill="norm">
+                <a:path w="151715" h="200963" fill="norm">
                   <a:moveTo>
-                    <a:pt x="104384" y="0"/>
+                    <a:pt x="151715" y="0"/>
                   </a:moveTo>
                   <a:lnTo>
-                    <a:pt x="0" y="186439"/>
+                    <a:pt x="0" y="186930"/>
                   </a:lnTo>
                   <a:lnTo>
-                    <a:pt x="0" y="199584"/>
+                    <a:pt x="0" y="200963"/>
                   </a:lnTo>
                   <a:lnTo>
-                    <a:pt x="104384" y="12896"/>
+                    <a:pt x="151715" y="13768"/>
                   </a:lnTo>
                   <a:lnTo>
-                    <a:pt x="104384" y="0"/>
+                    <a:pt x="151715" y="0"/>
                   </a:lnTo>
                   <a:close/>
                 </a:path>
@@ -6607,7 +6548,7 @@
             <a:solidFill>
               <a:srgbClr val="9E9D9B"/>
             </a:solidFill>
-            <a:ln w="6200" cap="rnd">
+            <a:ln w="6619" cap="rnd">
               <a:solidFill>
                 <a:srgbClr val="040000"/>
               </a:solidFill>
@@ -6618,28 +6559,28 @@
       </p:grpSp>
       <p:grpSp>
         <p:nvGrpSpPr>
-          <p:cNvPr id="115" name="Box outer frame"/>
+          <p:cNvPr id="109" name="Box outer frame"/>
           <p:cNvGrpSpPr/>
           <p:nvPr/>
         </p:nvGrpSpPr>
         <p:grpSpPr>
           <a:xfrm>
-            <a:off x="0" y="0"/>
-            <a:ext cx="5791200" cy="5791200"/>
-            <a:chOff x="3200400" y="581025"/>
-            <a:chExt cx="5791200" cy="5791200"/>
+            <a:off x="9325" y="670654"/>
+            <a:ext cx="5772550" cy="4473764"/>
+            <a:chOff x="3209725" y="1251679"/>
+            <a:chExt cx="5772550" cy="4473764"/>
           </a:xfrm>
         </p:grpSpPr>
         <p:sp>
           <p:nvSpPr>
-            <p:cNvPr id="116" name="Box outer frame 103"/>
+            <p:cNvPr id="110" name="Box outer frame 97"/>
             <p:cNvSpPr/>
             <p:nvPr/>
           </p:nvSpPr>
           <p:spPr>
             <a:xfrm>
-              <a:off x="3200400" y="581025"/>
-              <a:ext cx="5791200" cy="38100"/>
+              <a:off x="3209725" y="1251679"/>
+              <a:ext cx="5772550" cy="4473764"/>
             </a:xfrm>
             <a:custGeom>
               <a:avLst/>
@@ -6648,194 +6589,42 @@
               <a:cxnLst/>
               <a:rect l="0" t="0" r="r" b="b"/>
               <a:pathLst>
-                <a:path w="5791200" h="38100" fill="norm">
+                <a:path w="5772550" h="4473764" fill="norm">
                   <a:moveTo>
-                    <a:pt x="0" y="0"/>
+                    <a:pt x="5772550" y="4354031"/>
                   </a:moveTo>
                   <a:lnTo>
-                    <a:pt x="5791200" y="0"/>
+                    <a:pt x="5772550" y="0"/>
                   </a:lnTo>
                   <a:lnTo>
-                    <a:pt x="5791200" y="38100"/>
+                    <a:pt x="5639762" y="0"/>
                   </a:lnTo>
                   <a:lnTo>
-                    <a:pt x="0" y="38100"/>
-                  </a:lnTo>
-                  <a:close/>
-                </a:path>
-              </a:pathLst>
-            </a:custGeom>
-            <a:solidFill>
-              <a:srgbClr val="040000"/>
-            </a:solidFill>
-            <a:ln w="0" cap="rnd">
-              <a:noFill/>
-              <a:round/>
-            </a:ln>
-          </p:spPr>
-        </p:sp>
-        <p:sp>
-          <p:nvSpPr>
-            <p:cNvPr id="117" name="Box outer frame 104"/>
-            <p:cNvSpPr/>
-            <p:nvPr/>
-          </p:nvSpPr>
-          <p:spPr>
-            <a:xfrm>
-              <a:off x="3200400" y="6334125"/>
-              <a:ext cx="5791200" cy="38100"/>
-            </a:xfrm>
-            <a:custGeom>
-              <a:avLst/>
-              <a:gdLst/>
-              <a:ahLst/>
-              <a:cxnLst/>
-              <a:rect l="0" t="0" r="r" b="b"/>
-              <a:pathLst>
-                <a:path w="5791200" h="38100" fill="norm">
-                  <a:moveTo>
-                    <a:pt x="0" y="0"/>
-                  </a:moveTo>
-                  <a:lnTo>
-                    <a:pt x="5791200" y="0"/>
+                    <a:pt x="5638643" y="4354031"/>
                   </a:lnTo>
                   <a:lnTo>
-                    <a:pt x="5791200" y="38100"/>
+                    <a:pt x="134280" y="4354031"/>
                   </a:lnTo>
                   <a:lnTo>
-                    <a:pt x="0" y="38100"/>
-                  </a:lnTo>
-                  <a:close/>
-                </a:path>
-              </a:pathLst>
-            </a:custGeom>
-            <a:solidFill>
-              <a:srgbClr val="040000"/>
-            </a:solidFill>
-            <a:ln w="0" cap="rnd">
-              <a:noFill/>
-              <a:round/>
-            </a:ln>
-          </p:spPr>
-        </p:sp>
-        <p:sp>
-          <p:nvSpPr>
-            <p:cNvPr id="118" name="Box outer frame 105"/>
-            <p:cNvSpPr/>
-            <p:nvPr/>
-          </p:nvSpPr>
-          <p:spPr>
-            <a:xfrm>
-              <a:off x="3200400" y="581025"/>
-              <a:ext cx="38100" cy="5791200"/>
-            </a:xfrm>
-            <a:custGeom>
-              <a:avLst/>
-              <a:gdLst/>
-              <a:ahLst/>
-              <a:cxnLst/>
-              <a:rect l="0" t="0" r="r" b="b"/>
-              <a:pathLst>
-                <a:path w="38100" h="5791200" fill="norm">
-                  <a:moveTo>
-                    <a:pt x="0" y="0"/>
-                  </a:moveTo>
-                  <a:lnTo>
-                    <a:pt x="38100" y="0"/>
+                    <a:pt x="132788" y="0"/>
                   </a:lnTo>
                   <a:lnTo>
-                    <a:pt x="38100" y="5791200"/>
+                    <a:pt x="0" y="0"/>
                   </a:lnTo>
                   <a:lnTo>
-                    <a:pt x="0" y="5791200"/>
-                  </a:lnTo>
-                  <a:close/>
-                </a:path>
-              </a:pathLst>
-            </a:custGeom>
-            <a:solidFill>
-              <a:srgbClr val="040000"/>
-            </a:solidFill>
-            <a:ln w="0" cap="rnd">
-              <a:noFill/>
-              <a:round/>
-            </a:ln>
-          </p:spPr>
-        </p:sp>
-        <p:sp>
-          <p:nvSpPr>
-            <p:cNvPr id="119" name="Box outer frame 106"/>
-            <p:cNvSpPr/>
-            <p:nvPr/>
-          </p:nvSpPr>
-          <p:spPr>
-            <a:xfrm>
-              <a:off x="8953500" y="581025"/>
-              <a:ext cx="38100" cy="5791200"/>
-            </a:xfrm>
-            <a:custGeom>
-              <a:avLst/>
-              <a:gdLst/>
-              <a:ahLst/>
-              <a:cxnLst/>
-              <a:rect l="0" t="0" r="r" b="b"/>
-              <a:pathLst>
-                <a:path w="38100" h="5791200" fill="norm">
-                  <a:moveTo>
-                    <a:pt x="0" y="0"/>
-                  </a:moveTo>
-                  <a:lnTo>
-                    <a:pt x="38100" y="0"/>
+                    <a:pt x="0" y="4354031"/>
                   </a:lnTo>
                   <a:lnTo>
-                    <a:pt x="38100" y="5791200"/>
+                    <a:pt x="0" y="4473764"/>
                   </a:lnTo>
                   <a:lnTo>
-                    <a:pt x="0" y="5791200"/>
-                  </a:lnTo>
-                  <a:close/>
-                </a:path>
-              </a:pathLst>
-            </a:custGeom>
-            <a:solidFill>
-              <a:srgbClr val="040000"/>
-            </a:solidFill>
-            <a:ln w="0" cap="rnd">
-              <a:noFill/>
-              <a:round/>
-            </a:ln>
-          </p:spPr>
-        </p:sp>
-        <p:sp>
-          <p:nvSpPr>
-            <p:cNvPr id="120" name="Box outer frame 107"/>
-            <p:cNvSpPr/>
-            <p:nvPr/>
-          </p:nvSpPr>
-          <p:spPr>
-            <a:xfrm>
-              <a:off x="3209925" y="590550"/>
-              <a:ext cx="5772150" cy="19050"/>
-            </a:xfrm>
-            <a:custGeom>
-              <a:avLst/>
-              <a:gdLst/>
-              <a:ahLst/>
-              <a:cxnLst/>
-              <a:rect l="0" t="0" r="r" b="b"/>
-              <a:pathLst>
-                <a:path w="5772150" h="19050" fill="norm">
-                  <a:moveTo>
-                    <a:pt x="0" y="0"/>
-                  </a:moveTo>
-                  <a:lnTo>
-                    <a:pt x="5772150" y="0"/>
+                    <a:pt x="5772550" y="4473764"/>
                   </a:lnTo>
                   <a:lnTo>
-                    <a:pt x="5772150" y="19050"/>
+                    <a:pt x="5772550" y="4354031"/>
                   </a:lnTo>
                   <a:lnTo>
-                    <a:pt x="0" y="19050"/>
+                    <a:pt x="5772550" y="4354031"/>
                   </a:lnTo>
                   <a:close/>
                 </a:path>
@@ -6844,140 +6633,10 @@
             <a:solidFill>
               <a:srgbClr val="EFEEEB"/>
             </a:solidFill>
-            <a:ln w="0" cap="rnd">
-              <a:noFill/>
-              <a:round/>
-            </a:ln>
-          </p:spPr>
-        </p:sp>
-        <p:sp>
-          <p:nvSpPr>
-            <p:cNvPr id="121" name="Box outer frame 108"/>
-            <p:cNvSpPr/>
-            <p:nvPr/>
-          </p:nvSpPr>
-          <p:spPr>
-            <a:xfrm>
-              <a:off x="3209925" y="6343650"/>
-              <a:ext cx="5772150" cy="19050"/>
-            </a:xfrm>
-            <a:custGeom>
-              <a:avLst/>
-              <a:gdLst/>
-              <a:ahLst/>
-              <a:cxnLst/>
-              <a:rect l="0" t="0" r="r" b="b"/>
-              <a:pathLst>
-                <a:path w="5772150" h="19050" fill="norm">
-                  <a:moveTo>
-                    <a:pt x="0" y="0"/>
-                  </a:moveTo>
-                  <a:lnTo>
-                    <a:pt x="5772150" y="0"/>
-                  </a:lnTo>
-                  <a:lnTo>
-                    <a:pt x="5772150" y="19050"/>
-                  </a:lnTo>
-                  <a:lnTo>
-                    <a:pt x="0" y="19050"/>
-                  </a:lnTo>
-                  <a:close/>
-                </a:path>
-              </a:pathLst>
-            </a:custGeom>
-            <a:solidFill>
-              <a:srgbClr val="EFEEEB"/>
-            </a:solidFill>
-            <a:ln w="0" cap="rnd">
-              <a:noFill/>
-              <a:round/>
-            </a:ln>
-          </p:spPr>
-        </p:sp>
-        <p:sp>
-          <p:nvSpPr>
-            <p:cNvPr id="122" name="Box outer frame 109"/>
-            <p:cNvSpPr/>
-            <p:nvPr/>
-          </p:nvSpPr>
-          <p:spPr>
-            <a:xfrm>
-              <a:off x="3209925" y="590550"/>
-              <a:ext cx="19050" cy="5772150"/>
-            </a:xfrm>
-            <a:custGeom>
-              <a:avLst/>
-              <a:gdLst/>
-              <a:ahLst/>
-              <a:cxnLst/>
-              <a:rect l="0" t="0" r="r" b="b"/>
-              <a:pathLst>
-                <a:path w="19050" h="5772150" fill="norm">
-                  <a:moveTo>
-                    <a:pt x="0" y="0"/>
-                  </a:moveTo>
-                  <a:lnTo>
-                    <a:pt x="19050" y="0"/>
-                  </a:lnTo>
-                  <a:lnTo>
-                    <a:pt x="19050" y="5772150"/>
-                  </a:lnTo>
-                  <a:lnTo>
-                    <a:pt x="0" y="5772150"/>
-                  </a:lnTo>
-                  <a:close/>
-                </a:path>
-              </a:pathLst>
-            </a:custGeom>
-            <a:solidFill>
-              <a:srgbClr val="EFEEEB"/>
-            </a:solidFill>
-            <a:ln w="0" cap="rnd">
-              <a:noFill/>
-              <a:round/>
-            </a:ln>
-          </p:spPr>
-        </p:sp>
-        <p:sp>
-          <p:nvSpPr>
-            <p:cNvPr id="123" name="Box outer frame 110"/>
-            <p:cNvSpPr/>
-            <p:nvPr/>
-          </p:nvSpPr>
-          <p:spPr>
-            <a:xfrm>
-              <a:off x="8963025" y="590550"/>
-              <a:ext cx="19050" cy="5772150"/>
-            </a:xfrm>
-            <a:custGeom>
-              <a:avLst/>
-              <a:gdLst/>
-              <a:ahLst/>
-              <a:cxnLst/>
-              <a:rect l="0" t="0" r="r" b="b"/>
-              <a:pathLst>
-                <a:path w="19050" h="5772150" fill="norm">
-                  <a:moveTo>
-                    <a:pt x="0" y="0"/>
-                  </a:moveTo>
-                  <a:lnTo>
-                    <a:pt x="19050" y="0"/>
-                  </a:lnTo>
-                  <a:lnTo>
-                    <a:pt x="19050" y="5772150"/>
-                  </a:lnTo>
-                  <a:lnTo>
-                    <a:pt x="0" y="5772150"/>
-                  </a:lnTo>
-                  <a:close/>
-                </a:path>
-              </a:pathLst>
-            </a:custGeom>
-            <a:solidFill>
-              <a:srgbClr val="EFEEEB"/>
-            </a:solidFill>
-            <a:ln w="0" cap="rnd">
-              <a:noFill/>
+            <a:ln w="18650" cap="rnd">
+              <a:solidFill>
+                <a:srgbClr val="040000"/>
+              </a:solidFill>
               <a:round/>
             </a:ln>
           </p:spPr>
@@ -6985,7 +6644,7 @@
       </p:grpSp>
       <p:grpSp>
         <p:nvGrpSpPr>
-          <p:cNvPr id="124" name="Rat"/>
+          <p:cNvPr id="111" name="Rat"/>
           <p:cNvGrpSpPr/>
           <p:nvPr/>
         </p:nvGrpSpPr>
@@ -6999,7 +6658,7 @@
         </p:grpSpPr>
         <p:sp>
           <p:nvSpPr>
-            <p:cNvPr id="125" name="LE rat nose Outline 1"/>
+            <p:cNvPr id="112" name="LE rat nose Outline 1"/>
             <p:cNvSpPr/>
             <p:nvPr/>
           </p:nvSpPr>
@@ -7039,7 +6698,7 @@
         </p:sp>
         <p:sp>
           <p:nvSpPr>
-            <p:cNvPr id="126" name="LE rat nose Outline 2"/>
+            <p:cNvPr id="113" name="LE rat nose Outline 2"/>
             <p:cNvSpPr/>
             <p:nvPr/>
           </p:nvSpPr>
@@ -8869,7 +8528,7 @@
         </p:sp>
         <p:sp>
           <p:nvSpPr>
-            <p:cNvPr id="127" name="LE rat nose White fur 3"/>
+            <p:cNvPr id="114" name="LE rat nose White fur 3"/>
             <p:cNvSpPr/>
             <p:nvPr/>
           </p:nvSpPr>
@@ -8914,7 +8573,7 @@
         </p:sp>
         <p:sp>
           <p:nvSpPr>
-            <p:cNvPr id="128" name="LE rat nose White fur 4"/>
+            <p:cNvPr id="115" name="LE rat nose White fur 4"/>
             <p:cNvSpPr/>
             <p:nvPr/>
           </p:nvSpPr>
@@ -9509,7 +9168,7 @@
         </p:sp>
         <p:sp>
           <p:nvSpPr>
-            <p:cNvPr id="129" name="LE rat nose Skin 5"/>
+            <p:cNvPr id="116" name="LE rat nose Skin 5"/>
             <p:cNvSpPr/>
             <p:nvPr/>
           </p:nvSpPr>
@@ -9574,7 +9233,7 @@
         </p:sp>
         <p:sp>
           <p:nvSpPr>
-            <p:cNvPr id="130" name="LE rat nose Skin 6"/>
+            <p:cNvPr id="117" name="LE rat nose Skin 6"/>
             <p:cNvSpPr/>
             <p:nvPr/>
           </p:nvSpPr>
@@ -9799,7 +9458,7 @@
         </p:sp>
         <p:sp>
           <p:nvSpPr>
-            <p:cNvPr id="131" name="LE rat nose Skin 7"/>
+            <p:cNvPr id="118" name="LE rat nose Skin 7"/>
             <p:cNvSpPr/>
             <p:nvPr/>
           </p:nvSpPr>
@@ -10109,7 +9768,7 @@
         </p:sp>
         <p:sp>
           <p:nvSpPr>
-            <p:cNvPr id="132" name="LE rat nose Skin 8"/>
+            <p:cNvPr id="119" name="LE rat nose Skin 8"/>
             <p:cNvSpPr/>
             <p:nvPr/>
           </p:nvSpPr>
@@ -10864,7 +10523,7 @@
         </p:sp>
         <p:sp>
           <p:nvSpPr>
-            <p:cNvPr id="133" name="LE rat nose Skin 9"/>
+            <p:cNvPr id="120" name="LE rat nose Skin 9"/>
             <p:cNvSpPr/>
             <p:nvPr/>
           </p:nvSpPr>
@@ -10984,7 +10643,7 @@
         </p:sp>
         <p:sp>
           <p:nvSpPr>
-            <p:cNvPr id="134" name="LE rat nose Skin shading 10"/>
+            <p:cNvPr id="121" name="LE rat nose Skin shading 10"/>
             <p:cNvSpPr/>
             <p:nvPr/>
           </p:nvSpPr>
@@ -11039,7 +10698,7 @@
         </p:sp>
         <p:sp>
           <p:nvSpPr>
-            <p:cNvPr id="135" name="LE rat nose Skin shading 11"/>
+            <p:cNvPr id="122" name="LE rat nose Skin shading 11"/>
             <p:cNvSpPr/>
             <p:nvPr/>
           </p:nvSpPr>
@@ -11174,7 +10833,7 @@
         </p:sp>
         <p:sp>
           <p:nvSpPr>
-            <p:cNvPr id="136" name="LE rat nose Skin shading 12"/>
+            <p:cNvPr id="123" name="LE rat nose Skin shading 12"/>
             <p:cNvSpPr/>
             <p:nvPr/>
           </p:nvSpPr>
@@ -11279,7 +10938,7 @@
         </p:sp>
         <p:sp>
           <p:nvSpPr>
-            <p:cNvPr id="137" name="LE rat nose Skin shading 13"/>
+            <p:cNvPr id="124" name="LE rat nose Skin shading 13"/>
             <p:cNvSpPr/>
             <p:nvPr/>
           </p:nvSpPr>
@@ -11344,7 +11003,7 @@
         </p:sp>
         <p:sp>
           <p:nvSpPr>
-            <p:cNvPr id="138" name="LE rat nose Skin shading 14"/>
+            <p:cNvPr id="125" name="LE rat nose Skin shading 14"/>
             <p:cNvSpPr/>
             <p:nvPr/>
           </p:nvSpPr>
@@ -11459,7 +11118,7 @@
         </p:sp>
         <p:sp>
           <p:nvSpPr>
-            <p:cNvPr id="139" name="LE rat nose Skin shading 15"/>
+            <p:cNvPr id="126" name="LE rat nose Skin shading 15"/>
             <p:cNvSpPr/>
             <p:nvPr/>
           </p:nvSpPr>
@@ -11709,7 +11368,7 @@
         </p:sp>
         <p:sp>
           <p:nvSpPr>
-            <p:cNvPr id="140" name="LE rat nose Charcoal shading 16"/>
+            <p:cNvPr id="127" name="LE rat nose Charcoal shading 16"/>
             <p:cNvSpPr/>
             <p:nvPr/>
           </p:nvSpPr>
@@ -11924,7 +11583,7 @@
         </p:sp>
         <p:sp>
           <p:nvSpPr>
-            <p:cNvPr id="141" name="LE rat nose Charcoal shading 17"/>
+            <p:cNvPr id="128" name="LE rat nose Charcoal shading 17"/>
             <p:cNvSpPr/>
             <p:nvPr/>
           </p:nvSpPr>
@@ -12049,7 +11708,7 @@
         </p:sp>
         <p:sp>
           <p:nvSpPr>
-            <p:cNvPr id="142" name="LE rat nose Charcoal shading 18"/>
+            <p:cNvPr id="129" name="LE rat nose Charcoal shading 18"/>
             <p:cNvSpPr/>
             <p:nvPr/>
           </p:nvSpPr>
@@ -13267,7 +12926,7 @@
         </p:sp>
         <p:sp>
           <p:nvSpPr>
-            <p:cNvPr id="143" name="LE rat nose Eye and fur detail 19"/>
+            <p:cNvPr id="130" name="LE rat nose Eye and fur detail 19"/>
             <p:cNvSpPr/>
             <p:nvPr/>
           </p:nvSpPr>
